--- a/AI物理感知平台-华为汇报.pptx
+++ b/AI物理感知平台-华为汇报.pptx
@@ -6687,7 +6687,7 @@
                 <a:ea typeface="Microsoft YaHei"/>
                 <a:cs typeface="Microsoft YaHei"/>
               </a:rPr>
-              <a:t>华为内部立项  ·  融合 TimesFM-3 + UniTS/MOMENT + LIMU-BERT-X</a:t>
+              <a:t>华为内部立项  ·  平台工具化：接口明确 + 代际演进</a:t>
             </a:r>
           </a:p>
         </p:txBody>
@@ -6765,7 +6765,7 @@
                 <a:ea typeface="Microsoft YaHei"/>
                 <a:cs typeface="Microsoft YaHei"/>
               </a:rPr>
-              <a:t>一个物理时序底座，同时出预测与分类</a:t>
+              <a:t>Ingest 契约 → 共享表征 → predict() / classify()，不做场景应用</a:t>
             </a:r>
           </a:p>
         </p:txBody>
@@ -6851,7 +6851,7 @@
                 <a:ea typeface="Microsoft YaHei"/>
                 <a:cs typeface="Microsoft YaHei"/>
               </a:rPr>
-              <a:t>TimesFM-3 管零样本预测；UniTS / MOMENT 管多任务与分类；LIMU-BERT-X 管 IMU 表征。</a:t>
+              <a:t>平台只交付工具链：统一输入契约、两个推理函数、可替换底座。</a:t>
             </a:r>
           </a:p>
           <a:p>
@@ -6869,7 +6869,7 @@
                 <a:ea typeface="Microsoft YaHei"/>
                 <a:cs typeface="Microsoft YaHei"/>
               </a:rPr>
-              <a:t>融合成 PhysFM：PhysIngest → 共享表征 → 预测头 + 分类头。不做场景应用、不做整机。</a:t>
+              <a:t>TimesFM-3 管预测，UniTS/MOMENT 管分类，LIMU-BERT-X 管 IMU 先验；底座可换，接口不变。</a:t>
             </a:r>
           </a:p>
         </p:txBody>
@@ -6998,7 +6998,7 @@
                 <a:ea typeface="Microsoft YaHei"/>
                 <a:cs typeface="Microsoft YaHei"/>
               </a:rPr>
-              <a:t>预测</a:t>
+              <a:t>接口</a:t>
             </a:r>
           </a:p>
         </p:txBody>
@@ -7037,7 +7037,7 @@
                 <a:ea typeface="Microsoft YaHei"/>
                 <a:cs typeface="Microsoft YaHei"/>
               </a:rPr>
-              <a:t>TimesFM-3 式 CPM · 9 分位数</a:t>
+              <a:t>Ingest schema + predict + classify</a:t>
             </a:r>
           </a:p>
         </p:txBody>
@@ -7166,7 +7166,7 @@
                 <a:ea typeface="Microsoft YaHei"/>
                 <a:cs typeface="Microsoft YaHei"/>
               </a:rPr>
-              <a:t>分类</a:t>
+              <a:t>底座</a:t>
             </a:r>
           </a:p>
         </p:txBody>
@@ -7205,7 +7205,7 @@
                 <a:ea typeface="Microsoft YaHei"/>
                 <a:cs typeface="Microsoft YaHei"/>
               </a:rPr>
-              <a:t>UniTS 任务 token / MOMENT 头</a:t>
+              <a:t>TimesFM-3 + UniTS/MOMENT + LIMU-BERT-X</a:t>
             </a:r>
           </a:p>
         </p:txBody>
@@ -7334,7 +7334,7 @@
                 <a:ea typeface="Microsoft YaHei"/>
                 <a:cs typeface="Microsoft YaHei"/>
               </a:rPr>
-              <a:t>IMU 先验</a:t>
+              <a:t>演进</a:t>
             </a:r>
           </a:p>
         </p:txBody>
@@ -7373,7 +7373,7 @@
                 <a:ea typeface="Microsoft YaHei"/>
                 <a:cs typeface="Microsoft YaHei"/>
               </a:rPr>
-              <a:t>LIMU-BERT-X · 143 万小时</a:t>
+              <a:t>Gen1 零样本 → Gen2 指令微调</a:t>
             </a:r>
           </a:p>
         </p:txBody>
@@ -7412,7 +7412,7 @@
                 <a:ea typeface="Microsoft YaHei"/>
                 <a:cs typeface="Microsoft YaHei"/>
               </a:rPr>
-              <a:t>来源：TimesFM / UniTS / MOMENT / LIMU-BERT-X 公开资料  ·  8 页架构版</a:t>
+              <a:t>来源：TimesFM / UniTS / MOMENT / LIMU-BERT-X 公开资料  ·  8 页平台版</a:t>
             </a:r>
           </a:p>
         </p:txBody>
@@ -7590,7 +7590,7 @@
                 <a:ea typeface="Microsoft YaHei"/>
                 <a:cs typeface="Microsoft YaHei"/>
               </a:rPr>
-              <a:t>1  规格</a:t>
+              <a:t>1  平台边界</a:t>
             </a:r>
           </a:p>
         </p:txBody>
@@ -7629,7 +7629,7 @@
                 <a:ea typeface="Microsoft YaHei"/>
                 <a:cs typeface="Microsoft YaHei"/>
               </a:rPr>
-              <a:t>融合底座：TimesFM 主干 + 双头 + IMU 预训练</a:t>
+              <a:t>只做工具，不做场景；接口稳定，底座可换</a:t>
             </a:r>
           </a:p>
         </p:txBody>
@@ -7711,7 +7711,7 @@
                 <a:ea typeface="Microsoft YaHei"/>
                 <a:cs typeface="Microsoft YaHei"/>
               </a:rPr>
-              <a:t>目标：同一批 patch token，同时给出分位数预测与类别 logits。</a:t>
+              <a:t>明确划分：平台负责 Ingest → 表征 → 推理；场景方负责业务标签与闭环。</a:t>
             </a:r>
           </a:p>
         </p:txBody>
@@ -7797,7 +7797,7 @@
                 <a:ea typeface="Microsoft YaHei"/>
                 <a:cs typeface="Microsoft YaHei"/>
               </a:rPr>
-              <a:t>主干</a:t>
+              <a:t>平台交付</a:t>
             </a:r>
           </a:p>
         </p:txBody>
@@ -7836,7 +7836,7 @@
                 <a:ea typeface="Microsoft YaHei"/>
                 <a:cs typeface="Microsoft YaHei"/>
               </a:rPr>
-              <a:t>TimesFM-3：20 层 Mixing Transformer，d=1280，16 heads</a:t>
+              <a:t>PhysIngest 校验、共享表征、predict() / classify()、评测工具链</a:t>
             </a:r>
           </a:p>
         </p:txBody>
@@ -7922,7 +7922,7 @@
                 <a:ea typeface="Microsoft YaHei"/>
                 <a:cs typeface="Microsoft YaHei"/>
               </a:rPr>
-              <a:t>patch</a:t>
+              <a:t>平台不交付</a:t>
             </a:r>
           </a:p>
         </p:txBody>
@@ -7961,7 +7961,7 @@
                 <a:ea typeface="Microsoft YaHei"/>
                 <a:cs typeface="Microsoft YaHei"/>
               </a:rPr>
-              <a:t>输入 32 / 输出 64；上下文上限 15,360；变元上限 32</a:t>
+              <a:t>场景 Pack、整机 App、芯片、盘古、世界视频、把 TimesFM 当分类模型宣传</a:t>
             </a:r>
           </a:p>
         </p:txBody>
@@ -8047,7 +8047,7 @@
                 <a:ea typeface="Microsoft YaHei"/>
                 <a:cs typeface="Microsoft YaHei"/>
               </a:rPr>
-              <a:t>预测头</a:t>
+              <a:t>底座可替换</a:t>
             </a:r>
           </a:p>
         </p:txBody>
@@ -8086,7 +8086,7 @@
                 <a:ea typeface="Microsoft YaHei"/>
                 <a:cs typeface="Microsoft YaHei"/>
               </a:rPr>
-              <a:t>Linear 1280→64×9，CPM 一次解码，median=q50</a:t>
+              <a:t>TimesFM-3 → 自研 / 更新版本；UniTS/MOMENT → 其他多任务模型</a:t>
             </a:r>
           </a:p>
         </p:txBody>
@@ -8172,7 +8172,7 @@
                 <a:ea typeface="Microsoft YaHei"/>
                 <a:cs typeface="Microsoft YaHei"/>
               </a:rPr>
-              <a:t>分类头</a:t>
+              <a:t>接口不替换</a:t>
             </a:r>
           </a:p>
         </p:txBody>
@@ -8211,7 +8211,7 @@
                 <a:ea typeface="Microsoft YaHei"/>
                 <a:cs typeface="Microsoft YaHei"/>
               </a:rPr>
-              <a:t>UniTS 任务 token 或 MOMENT linear-probe；可 LoRA 微调</a:t>
+              <a:t>Ingest schema、predict() 返回结构、classify() 返回结构保持兼容</a:t>
             </a:r>
           </a:p>
         </p:txBody>
@@ -8297,7 +8297,7 @@
                 <a:ea typeface="Microsoft YaHei"/>
                 <a:cs typeface="Microsoft YaHei"/>
               </a:rPr>
-              <a:t>IMU 初始化</a:t>
+              <a:t>输入</a:t>
             </a:r>
           </a:p>
         </p:txBody>
@@ -8336,7 +8336,7 @@
                 <a:ea typeface="Microsoft YaHei"/>
                 <a:cs typeface="Microsoft YaHei"/>
               </a:rPr>
-              <a:t>LIMU-BERT-X：143 万小时、6 万人、1.1K 机型，端侧可用</a:t>
+              <a:t>target / past-only / past-future 变元；IMU / EMG / TP 只是变元</a:t>
             </a:r>
           </a:p>
         </p:txBody>
@@ -8422,7 +8422,7 @@
                 <a:ea typeface="Microsoft YaHei"/>
                 <a:cs typeface="Microsoft YaHei"/>
               </a:rPr>
-              <a:t>许可</a:t>
+              <a:t>输出</a:t>
             </a:r>
           </a:p>
         </p:txBody>
@@ -8461,7 +8461,7 @@
                 <a:ea typeface="Microsoft YaHei"/>
                 <a:cs typeface="Microsoft YaHei"/>
               </a:rPr>
-              <a:t>TimesFM-3 权重 NC；UniTS / MOMENT / LIMU-BERT 公开可研究。商用自训。</a:t>
+              <a:t>预测：quantiles + point；分类：label + confidence；无场景语义</a:t>
             </a:r>
           </a:p>
         </p:txBody>
@@ -8590,7 +8590,7 @@
                 <a:ea typeface="Microsoft YaHei"/>
                 <a:cs typeface="Microsoft YaHei"/>
               </a:rPr>
-              <a:t>所以  ·  TimesFM 原生没有分类头；要「预测+分类」必须融合 UniTS 式任务 token 或 MOMENT 式探针。</a:t>
+              <a:t>所以  ·  平台不抢场景：场景方调 predict/classify，平台方保接口与底座演进。</a:t>
             </a:r>
           </a:p>
         </p:txBody>
@@ -8672,7 +8672,7 @@
                 <a:ea typeface="Microsoft YaHei"/>
                 <a:cs typeface="Microsoft YaHei"/>
               </a:rPr>
-              <a:t>华为  ·  AI 物理感知平台  ·  规格    |    Security Level: Internal</a:t>
+              <a:t>华为  ·  AI 物理感知平台  ·  平台边界    |    Security Level: Internal</a:t>
             </a:r>
           </a:p>
         </p:txBody>
@@ -8811,7 +8811,7 @@
                 <a:ea typeface="Microsoft YaHei"/>
                 <a:cs typeface="Microsoft YaHei"/>
               </a:rPr>
-              <a:t>2  总览</a:t>
+              <a:t>2  接口定义</a:t>
             </a:r>
           </a:p>
         </p:txBody>
@@ -8850,7 +8850,7 @@
                 <a:ea typeface="Microsoft YaHei"/>
                 <a:cs typeface="Microsoft YaHei"/>
               </a:rPr>
-              <a:t>四段流水：输入 → 特征 → 表征 → 双头</a:t>
+              <a:t>Ingest 契约 + predict() + classify()</a:t>
             </a:r>
           </a:p>
         </p:txBody>
@@ -8932,7 +8932,7 @@
                 <a:ea typeface="Microsoft YaHei"/>
                 <a:cs typeface="Microsoft YaHei"/>
               </a:rPr>
-              <a:t>物理传感器只作为变元接入：target / past-only / past-future。</a:t>
+              <a:t>所有输入先过 Ingest；预测与分类共用同一批 patch token。</a:t>
             </a:r>
           </a:p>
         </p:txBody>
@@ -8945,8 +8945,8 @@
         </p:nvSpPr>
         <p:spPr>
           <a:xfrm>
-            <a:off x="411480" y="1417320"/>
-            <a:ext cx="2788920" cy="2880360"/>
+            <a:off x="457200" y="1371600"/>
+            <a:ext cx="11247120" cy="1828800"/>
           </a:xfrm>
           <a:prstGeom prst="roundRect">
             <a:avLst>
@@ -8992,8 +8992,8 @@
         </p:nvSpPr>
         <p:spPr>
           <a:xfrm>
-            <a:off x="411480" y="1417320"/>
-            <a:ext cx="2788920" cy="73152"/>
+            <a:off x="457200" y="1371600"/>
+            <a:ext cx="11247120" cy="73152"/>
           </a:xfrm>
           <a:prstGeom prst="rect">
             <a:avLst/>
@@ -9035,8 +9035,8 @@
         </p:nvSpPr>
         <p:spPr>
           <a:xfrm>
-            <a:off x="548640" y="1645920"/>
-            <a:ext cx="2514600" cy="365760"/>
+            <a:off x="640080" y="1600200"/>
+            <a:ext cx="10881360" cy="320040"/>
           </a:xfrm>
           <a:prstGeom prst="rect">
             <a:avLst/>
@@ -9061,7 +9061,7 @@
                 <a:ea typeface="Microsoft YaHei"/>
                 <a:cs typeface="Microsoft YaHei"/>
               </a:rPr>
-              <a:t>1. 输入</a:t>
+              <a:t>Ingest(schema) → 校验 → patch token</a:t>
             </a:r>
           </a:p>
         </p:txBody>
@@ -9074,8 +9074,8 @@
         </p:nvSpPr>
         <p:spPr>
           <a:xfrm>
-            <a:off x="548640" y="2148840"/>
-            <a:ext cx="2514600" cy="1920240"/>
+            <a:off x="640080" y="2011680"/>
+            <a:ext cx="10881360" cy="1005840"/>
           </a:xfrm>
           <a:prstGeom prst="rect">
             <a:avLst/>
@@ -9100,7 +9100,7 @@
                 <a:ea typeface="Microsoft YaHei"/>
                 <a:cs typeface="Microsoft YaHei"/>
               </a:rPr>
-              <a:t>target (B,U,C)</a:t>
+              <a:t>schema = {series_id, timestamp, value, unit, quality_flag, variate_role: target/past-only/past-future}</a:t>
             </a:r>
           </a:p>
           <a:p>
@@ -9118,9 +9118,120 @@
                 <a:ea typeface="Microsoft YaHei"/>
                 <a:cs typeface="Microsoft YaHei"/>
               </a:rPr>
-              <a:t>past-only (B,Vpo,C)</a:t>
-            </a:r>
-          </a:p>
+              <a:t>校验：时钟对齐、量纲归一、质量位过滤、变元上限 32、context ≤ 15,360。不合格直接拒收。</a:t>
+            </a:r>
+          </a:p>
+        </p:txBody>
+      </p:sp>
+      <p:sp>
+        <p:nvSpPr>
+          <p:cNvPr id="11" name="Rounded Rectangle 10"/>
+          <p:cNvSpPr/>
+          <p:nvPr/>
+        </p:nvSpPr>
+        <p:spPr>
+          <a:xfrm>
+            <a:off x="457200" y="3383280"/>
+            <a:ext cx="5577840" cy="2194560"/>
+          </a:xfrm>
+          <a:prstGeom prst="roundRect">
+            <a:avLst>
+              <a:gd name="adj" fmla="val 5000"/>
+            </a:avLst>
+          </a:prstGeom>
+          <a:solidFill>
+            <a:srgbClr val="FFFFFF"/>
+          </a:solidFill>
+          <a:ln w="9525">
+            <a:solidFill>
+              <a:srgbClr val="DDDDDD"/>
+            </a:solidFill>
+          </a:ln>
+        </p:spPr>
+        <p:style>
+          <a:lnRef idx="1">
+            <a:schemeClr val="accent1"/>
+          </a:lnRef>
+          <a:fillRef idx="3">
+            <a:schemeClr val="accent1"/>
+          </a:fillRef>
+          <a:effectRef idx="2">
+            <a:schemeClr val="accent1"/>
+          </a:effectRef>
+          <a:fontRef idx="minor">
+            <a:schemeClr val="lt1"/>
+          </a:fontRef>
+        </p:style>
+        <p:txBody>
+          <a:bodyPr rtlCol="0" anchor="ctr"/>
+          <a:lstStyle/>
+          <a:p>
+            <a:pPr algn="ctr"/>
+          </a:p>
+        </p:txBody>
+      </p:sp>
+      <p:sp>
+        <p:nvSpPr>
+          <p:cNvPr id="12" name="Rectangle 11"/>
+          <p:cNvSpPr/>
+          <p:nvPr/>
+        </p:nvSpPr>
+        <p:spPr>
+          <a:xfrm>
+            <a:off x="457200" y="3383280"/>
+            <a:ext cx="5577840" cy="73152"/>
+          </a:xfrm>
+          <a:prstGeom prst="rect">
+            <a:avLst/>
+          </a:prstGeom>
+          <a:solidFill>
+            <a:srgbClr val="62B230"/>
+          </a:solidFill>
+          <a:ln>
+            <a:noFill/>
+          </a:ln>
+        </p:spPr>
+        <p:style>
+          <a:lnRef idx="1">
+            <a:schemeClr val="accent1"/>
+          </a:lnRef>
+          <a:fillRef idx="3">
+            <a:schemeClr val="accent1"/>
+          </a:fillRef>
+          <a:effectRef idx="2">
+            <a:schemeClr val="accent1"/>
+          </a:effectRef>
+          <a:fontRef idx="minor">
+            <a:schemeClr val="lt1"/>
+          </a:fontRef>
+        </p:style>
+        <p:txBody>
+          <a:bodyPr rtlCol="0" anchor="ctr"/>
+          <a:lstStyle/>
+          <a:p>
+            <a:pPr algn="ctr"/>
+          </a:p>
+        </p:txBody>
+      </p:sp>
+      <p:sp>
+        <p:nvSpPr>
+          <p:cNvPr id="13" name="TextBox 12"/>
+          <p:cNvSpPr txBox="1"/>
+          <p:nvPr/>
+        </p:nvSpPr>
+        <p:spPr>
+          <a:xfrm>
+            <a:off x="640080" y="3611880"/>
+            <a:ext cx="5212080" cy="320040"/>
+          </a:xfrm>
+          <a:prstGeom prst="rect">
+            <a:avLst/>
+          </a:prstGeom>
+          <a:noFill/>
+        </p:spPr>
+        <p:txBody>
+          <a:bodyPr wrap="square" anchor="t"/>
+          <a:lstStyle/>
           <a:p>
             <a:pPr algn="l">
               <a:spcAft>
@@ -9128,29 +9239,104 @@
               </a:spcAft>
             </a:pPr>
             <a:r>
-              <a:rPr sz="1300" b="0">
-                <a:solidFill>
-                  <a:srgbClr val="555757"/>
+              <a:rPr sz="1600" b="1">
+                <a:solidFill>
+                  <a:srgbClr val="62B230"/>
                 </a:solidFill>
                 <a:latin typeface="Microsoft YaHei"/>
                 <a:ea typeface="Microsoft YaHei"/>
                 <a:cs typeface="Microsoft YaHei"/>
               </a:rPr>
-              <a:t>past-future (B,W,C+H)</a:t>
-            </a:r>
-          </a:p>
-        </p:txBody>
-      </p:sp>
-      <p:sp>
-        <p:nvSpPr>
-          <p:cNvPr id="11" name="Rounded Rectangle 10"/>
+              <a:t>predict(context, horizon) → {quantiles, point}</a:t>
+            </a:r>
+          </a:p>
+        </p:txBody>
+      </p:sp>
+      <p:sp>
+        <p:nvSpPr>
+          <p:cNvPr id="14" name="TextBox 13"/>
+          <p:cNvSpPr txBox="1"/>
+          <p:nvPr/>
+        </p:nvSpPr>
+        <p:spPr>
+          <a:xfrm>
+            <a:off x="640080" y="4069080"/>
+            <a:ext cx="5212080" cy="1280160"/>
+          </a:xfrm>
+          <a:prstGeom prst="rect">
+            <a:avLst/>
+          </a:prstGeom>
+          <a:noFill/>
+        </p:spPr>
+        <p:txBody>
+          <a:bodyPr wrap="square" anchor="t"/>
+          <a:lstStyle/>
+          <a:p>
+            <a:pPr algn="l">
+              <a:spcAft>
+                <a:spcPts val="200"/>
+              </a:spcAft>
+            </a:pPr>
+            <a:r>
+              <a:rPr sz="1300" b="0">
+                <a:solidFill>
+                  <a:srgbClr val="555757"/>
+                </a:solidFill>
+                <a:latin typeface="Microsoft YaHei"/>
+                <a:ea typeface="Microsoft YaHei"/>
+                <a:cs typeface="Microsoft YaHei"/>
+              </a:rPr>
+              <a:t>quantiles: (V, H, 9) 十分位轨迹</a:t>
+            </a:r>
+          </a:p>
+          <a:p>
+            <a:pPr algn="l">
+              <a:spcAft>
+                <a:spcPts val="200"/>
+              </a:spcAft>
+            </a:pPr>
+            <a:r>
+              <a:rPr sz="1300" b="0">
+                <a:solidFill>
+                  <a:srgbClr val="555757"/>
+                </a:solidFill>
+                <a:latin typeface="Microsoft YaHei"/>
+                <a:ea typeface="Microsoft YaHei"/>
+                <a:cs typeface="Microsoft YaHei"/>
+              </a:rPr>
+              <a:t>point: (V, H) 中位数 q50</a:t>
+            </a:r>
+          </a:p>
+          <a:p>
+            <a:pPr algn="l">
+              <a:spcAft>
+                <a:spcPts val="200"/>
+              </a:spcAft>
+            </a:pPr>
+            <a:r>
+              <a:rPr sz="1300" b="0">
+                <a:solidFill>
+                  <a:srgbClr val="555757"/>
+                </a:solidFill>
+                <a:latin typeface="Microsoft YaHei"/>
+                <a:ea typeface="Microsoft YaHei"/>
+                <a:cs typeface="Microsoft YaHei"/>
+              </a:rPr>
+              <a:t>一次前向，CPM 非自回归；可 stitching 任意 H。</a:t>
+            </a:r>
+          </a:p>
+        </p:txBody>
+      </p:sp>
+      <p:sp>
+        <p:nvSpPr>
+          <p:cNvPr id="15" name="Rounded Rectangle 14"/>
           <p:cNvSpPr/>
           <p:nvPr/>
         </p:nvSpPr>
         <p:spPr>
           <a:xfrm>
-            <a:off x="3337560" y="1417320"/>
-            <a:ext cx="2788920" cy="2880360"/>
+            <a:off x="6217920" y="3383280"/>
+            <a:ext cx="5486400" cy="2194560"/>
           </a:xfrm>
           <a:prstGeom prst="roundRect">
             <a:avLst>
@@ -9190,20 +9376,20 @@
       </p:sp>
       <p:sp>
         <p:nvSpPr>
-          <p:cNvPr id="12" name="Rectangle 11"/>
+          <p:cNvPr id="16" name="Rectangle 15"/>
           <p:cNvSpPr/>
           <p:nvPr/>
         </p:nvSpPr>
         <p:spPr>
           <a:xfrm>
-            <a:off x="3337560" y="1417320"/>
-            <a:ext cx="2788920" cy="73152"/>
-          </a:xfrm>
-          <a:prstGeom prst="rect">
-            <a:avLst/>
-          </a:prstGeom>
-          <a:solidFill>
-            <a:srgbClr val="ED6D00"/>
+            <a:off x="6217920" y="3383280"/>
+            <a:ext cx="5486400" cy="73152"/>
+          </a:xfrm>
+          <a:prstGeom prst="rect">
+            <a:avLst/>
+          </a:prstGeom>
+          <a:solidFill>
+            <a:srgbClr val="30B5C5"/>
           </a:solidFill>
           <a:ln>
             <a:noFill/>
@@ -9233,14 +9419,14 @@
       </p:sp>
       <p:sp>
         <p:nvSpPr>
-          <p:cNvPr id="13" name="TextBox 12"/>
+          <p:cNvPr id="17" name="TextBox 16"/>
           <p:cNvSpPr txBox="1"/>
           <p:nvPr/>
         </p:nvSpPr>
         <p:spPr>
           <a:xfrm>
-            <a:off x="3474720" y="1645920"/>
-            <a:ext cx="2514600" cy="365760"/>
+            <a:off x="6400800" y="3611880"/>
+            <a:ext cx="5120640" cy="320040"/>
           </a:xfrm>
           <a:prstGeom prst="rect">
             <a:avLst/>
@@ -9259,27 +9445,27 @@
             <a:r>
               <a:rPr sz="1600" b="1">
                 <a:solidFill>
-                  <a:srgbClr val="ED6D00"/>
+                  <a:srgbClr val="30B5C5"/>
                 </a:solidFill>
                 <a:latin typeface="Microsoft YaHei"/>
                 <a:ea typeface="Microsoft YaHei"/>
                 <a:cs typeface="Microsoft YaHei"/>
               </a:rPr>
-              <a:t>2. 特征提取</a:t>
-            </a:r>
-          </a:p>
-        </p:txBody>
-      </p:sp>
-      <p:sp>
-        <p:nvSpPr>
-          <p:cNvPr id="14" name="TextBox 13"/>
+              <a:t>classify(window) → {label, confidence}</a:t>
+            </a:r>
+          </a:p>
+        </p:txBody>
+      </p:sp>
+      <p:sp>
+        <p:nvSpPr>
+          <p:cNvPr id="18" name="TextBox 17"/>
           <p:cNvSpPr txBox="1"/>
           <p:nvPr/>
         </p:nvSpPr>
         <p:spPr>
           <a:xfrm>
-            <a:off x="3474720" y="2148840"/>
-            <a:ext cx="2514600" cy="1920240"/>
+            <a:off x="6400800" y="4069080"/>
+            <a:ext cx="5120640" cy="1280160"/>
           </a:xfrm>
           <a:prstGeom prst="rect">
             <a:avLst/>
@@ -9304,7 +9490,7 @@
                 <a:ea typeface="Microsoft YaHei"/>
                 <a:cs typeface="Microsoft YaHei"/>
               </a:rPr>
-              <a:t>pad32 · 去趋势 · 堆叠 V</a:t>
+              <a:t>label: 场景方注册的类别 id</a:t>
             </a:r>
           </a:p>
           <a:p>
@@ -9322,34 +9508,48 @@
                 <a:ea typeface="Microsoft YaHei"/>
                 <a:cs typeface="Microsoft YaHei"/>
               </a:rPr>
-              <a:t>切 patch · RevIN · ResidualBlock</a:t>
-            </a:r>
-          </a:p>
-        </p:txBody>
-      </p:sp>
-      <p:sp>
-        <p:nvSpPr>
-          <p:cNvPr id="15" name="Rounded Rectangle 14"/>
+              <a:t>confidence: softmax 概率</a:t>
+            </a:r>
+          </a:p>
+          <a:p>
+            <a:pPr algn="l">
+              <a:spcAft>
+                <a:spcPts val="200"/>
+              </a:spcAft>
+            </a:pPr>
+            <a:r>
+              <a:rPr sz="1300" b="0">
+                <a:solidFill>
+                  <a:srgbClr val="555757"/>
+                </a:solidFill>
+                <a:latin typeface="Microsoft YaHei"/>
+                <a:ea typeface="Microsoft YaHei"/>
+                <a:cs typeface="Microsoft YaHei"/>
+              </a:rPr>
+              <a:t>基于共享表征 + 任务 token / linear probe。</a:t>
+            </a:r>
+          </a:p>
+        </p:txBody>
+      </p:sp>
+      <p:sp>
+        <p:nvSpPr>
+          <p:cNvPr id="19" name="Rectangle 18"/>
           <p:cNvSpPr/>
           <p:nvPr/>
         </p:nvSpPr>
         <p:spPr>
           <a:xfrm>
-            <a:off x="6263640" y="1417320"/>
-            <a:ext cx="2788920" cy="2880360"/>
-          </a:xfrm>
-          <a:prstGeom prst="roundRect">
-            <a:avLst>
-              <a:gd name="adj" fmla="val 5000"/>
-            </a:avLst>
-          </a:prstGeom>
-          <a:solidFill>
-            <a:srgbClr val="FFFFFF"/>
-          </a:solidFill>
-          <a:ln w="9525">
-            <a:solidFill>
-              <a:srgbClr val="DDDDDD"/>
-            </a:solidFill>
+            <a:off x="0" y="6537960"/>
+            <a:ext cx="12191695" cy="320040"/>
+          </a:xfrm>
+          <a:prstGeom prst="rect">
+            <a:avLst/>
+          </a:prstGeom>
+          <a:solidFill>
+            <a:srgbClr val="F2F2F2"/>
+          </a:solidFill>
+          <a:ln>
+            <a:noFill/>
           </a:ln>
         </p:spPr>
         <p:style>
@@ -9376,57 +9576,14 @@
       </p:sp>
       <p:sp>
         <p:nvSpPr>
-          <p:cNvPr id="16" name="Rectangle 15"/>
-          <p:cNvSpPr/>
-          <p:nvPr/>
-        </p:nvSpPr>
-        <p:spPr>
-          <a:xfrm>
-            <a:off x="6263640" y="1417320"/>
-            <a:ext cx="2788920" cy="73152"/>
-          </a:xfrm>
-          <a:prstGeom prst="rect">
-            <a:avLst/>
-          </a:prstGeom>
-          <a:solidFill>
-            <a:srgbClr val="30B5C5"/>
-          </a:solidFill>
-          <a:ln>
-            <a:noFill/>
-          </a:ln>
-        </p:spPr>
-        <p:style>
-          <a:lnRef idx="1">
-            <a:schemeClr val="accent1"/>
-          </a:lnRef>
-          <a:fillRef idx="3">
-            <a:schemeClr val="accent1"/>
-          </a:fillRef>
-          <a:effectRef idx="2">
-            <a:schemeClr val="accent1"/>
-          </a:effectRef>
-          <a:fontRef idx="minor">
-            <a:schemeClr val="lt1"/>
-          </a:fontRef>
-        </p:style>
-        <p:txBody>
-          <a:bodyPr rtlCol="0" anchor="ctr"/>
-          <a:lstStyle/>
-          <a:p>
-            <a:pPr algn="ctr"/>
-          </a:p>
-        </p:txBody>
-      </p:sp>
-      <p:sp>
-        <p:nvSpPr>
-          <p:cNvPr id="17" name="TextBox 16"/>
+          <p:cNvPr id="20" name="TextBox 19"/>
           <p:cNvSpPr txBox="1"/>
           <p:nvPr/>
         </p:nvSpPr>
         <p:spPr>
           <a:xfrm>
-            <a:off x="6400800" y="1645920"/>
-            <a:ext cx="2514600" cy="365760"/>
+            <a:off x="457200" y="6537960"/>
+            <a:ext cx="8229600" cy="320040"/>
           </a:xfrm>
           <a:prstGeom prst="rect">
             <a:avLst/>
@@ -9434,7 +9591,7 @@
           <a:noFill/>
         </p:spPr>
         <p:txBody>
-          <a:bodyPr wrap="square" anchor="t"/>
+          <a:bodyPr wrap="square" anchor="ctr"/>
           <a:lstStyle/>
           <a:p>
             <a:pPr algn="l">
@@ -9443,490 +9600,22 @@
               </a:spcAft>
             </a:pPr>
             <a:r>
-              <a:rPr sz="1600" b="1">
-                <a:solidFill>
-                  <a:srgbClr val="30B5C5"/>
+              <a:rPr sz="900" b="0">
+                <a:solidFill>
+                  <a:srgbClr val="898989"/>
                 </a:solidFill>
                 <a:latin typeface="Microsoft YaHei"/>
                 <a:ea typeface="Microsoft YaHei"/>
                 <a:cs typeface="Microsoft YaHei"/>
               </a:rPr>
-              <a:t>3. 共享表征</a:t>
-            </a:r>
-          </a:p>
-        </p:txBody>
-      </p:sp>
-      <p:sp>
-        <p:nvSpPr>
-          <p:cNvPr id="18" name="TextBox 17"/>
-          <p:cNvSpPr txBox="1"/>
-          <p:nvPr/>
-        </p:nvSpPr>
-        <p:spPr>
-          <a:xfrm>
-            <a:off x="6400800" y="2148840"/>
-            <a:ext cx="2514600" cy="1920240"/>
-          </a:xfrm>
-          <a:prstGeom prst="rect">
-            <a:avLst/>
-          </a:prstGeom>
-          <a:noFill/>
-        </p:spPr>
-        <p:txBody>
-          <a:bodyPr wrap="square" anchor="t"/>
-          <a:lstStyle/>
-          <a:p>
-            <a:pPr algn="l">
-              <a:spcAft>
-                <a:spcPts val="200"/>
-              </a:spcAft>
-            </a:pPr>
-            <a:r>
-              <a:rPr sz="1300" b="0">
-                <a:solidFill>
-                  <a:srgbClr val="555757"/>
-                </a:solidFill>
-                <a:latin typeface="Microsoft YaHei"/>
-                <a:ea typeface="Microsoft YaHei"/>
-                <a:cs typeface="Microsoft YaHei"/>
-              </a:rPr>
-              <a:t>20 × MixingTransformer</a:t>
-            </a:r>
-          </a:p>
-          <a:p>
-            <a:pPr algn="l">
-              <a:spcAft>
-                <a:spcPts val="200"/>
-              </a:spcAft>
-            </a:pPr>
-            <a:r>
-              <a:rPr sz="1300" b="0">
-                <a:solidFill>
-                  <a:srgbClr val="555757"/>
-                </a:solidFill>
-                <a:latin typeface="Microsoft YaHei"/>
-                <a:ea typeface="Microsoft YaHei"/>
-                <a:cs typeface="Microsoft YaHei"/>
-              </a:rPr>
-              <a:t>因果时间注意力 + 变元注意力</a:t>
-            </a:r>
-          </a:p>
-        </p:txBody>
-      </p:sp>
-      <p:sp>
-        <p:nvSpPr>
-          <p:cNvPr id="19" name="Rounded Rectangle 18"/>
-          <p:cNvSpPr/>
-          <p:nvPr/>
-        </p:nvSpPr>
-        <p:spPr>
-          <a:xfrm>
-            <a:off x="9189720" y="1417320"/>
-            <a:ext cx="2788920" cy="2880360"/>
-          </a:xfrm>
-          <a:prstGeom prst="roundRect">
-            <a:avLst>
-              <a:gd name="adj" fmla="val 5000"/>
-            </a:avLst>
-          </a:prstGeom>
-          <a:solidFill>
-            <a:srgbClr val="FFFFFF"/>
-          </a:solidFill>
-          <a:ln w="9525">
-            <a:solidFill>
-              <a:srgbClr val="DDDDDD"/>
-            </a:solidFill>
-          </a:ln>
-        </p:spPr>
-        <p:style>
-          <a:lnRef idx="1">
-            <a:schemeClr val="accent1"/>
-          </a:lnRef>
-          <a:fillRef idx="3">
-            <a:schemeClr val="accent1"/>
-          </a:fillRef>
-          <a:effectRef idx="2">
-            <a:schemeClr val="accent1"/>
-          </a:effectRef>
-          <a:fontRef idx="minor">
-            <a:schemeClr val="lt1"/>
-          </a:fontRef>
-        </p:style>
-        <p:txBody>
-          <a:bodyPr rtlCol="0" anchor="ctr"/>
-          <a:lstStyle/>
-          <a:p>
-            <a:pPr algn="ctr"/>
-          </a:p>
-        </p:txBody>
-      </p:sp>
-      <p:sp>
-        <p:nvSpPr>
-          <p:cNvPr id="20" name="Rectangle 19"/>
-          <p:cNvSpPr/>
-          <p:nvPr/>
-        </p:nvSpPr>
-        <p:spPr>
-          <a:xfrm>
-            <a:off x="9189720" y="1417320"/>
-            <a:ext cx="2788920" cy="73152"/>
-          </a:xfrm>
-          <a:prstGeom prst="rect">
-            <a:avLst/>
-          </a:prstGeom>
-          <a:solidFill>
-            <a:srgbClr val="62B230"/>
-          </a:solidFill>
-          <a:ln>
-            <a:noFill/>
-          </a:ln>
-        </p:spPr>
-        <p:style>
-          <a:lnRef idx="1">
-            <a:schemeClr val="accent1"/>
-          </a:lnRef>
-          <a:fillRef idx="3">
-            <a:schemeClr val="accent1"/>
-          </a:fillRef>
-          <a:effectRef idx="2">
-            <a:schemeClr val="accent1"/>
-          </a:effectRef>
-          <a:fontRef idx="minor">
-            <a:schemeClr val="lt1"/>
-          </a:fontRef>
-        </p:style>
-        <p:txBody>
-          <a:bodyPr rtlCol="0" anchor="ctr"/>
-          <a:lstStyle/>
-          <a:p>
-            <a:pPr algn="ctr"/>
+              <a:t>华为  ·  AI 物理感知平台  ·  接口    |    Security Level: Internal</a:t>
+            </a:r>
           </a:p>
         </p:txBody>
       </p:sp>
       <p:sp>
         <p:nvSpPr>
           <p:cNvPr id="21" name="TextBox 20"/>
-          <p:cNvSpPr txBox="1"/>
-          <p:nvPr/>
-        </p:nvSpPr>
-        <p:spPr>
-          <a:xfrm>
-            <a:off x="9326880" y="1645920"/>
-            <a:ext cx="2514600" cy="365760"/>
-          </a:xfrm>
-          <a:prstGeom prst="rect">
-            <a:avLst/>
-          </a:prstGeom>
-          <a:noFill/>
-        </p:spPr>
-        <p:txBody>
-          <a:bodyPr wrap="square" anchor="t"/>
-          <a:lstStyle/>
-          <a:p>
-            <a:pPr algn="l">
-              <a:spcAft>
-                <a:spcPts val="200"/>
-              </a:spcAft>
-            </a:pPr>
-            <a:r>
-              <a:rPr sz="1600" b="1">
-                <a:solidFill>
-                  <a:srgbClr val="62B230"/>
-                </a:solidFill>
-                <a:latin typeface="Microsoft YaHei"/>
-                <a:ea typeface="Microsoft YaHei"/>
-                <a:cs typeface="Microsoft YaHei"/>
-              </a:rPr>
-              <a:t>4. 双头</a:t>
-            </a:r>
-          </a:p>
-        </p:txBody>
-      </p:sp>
-      <p:sp>
-        <p:nvSpPr>
-          <p:cNvPr id="22" name="TextBox 21"/>
-          <p:cNvSpPr txBox="1"/>
-          <p:nvPr/>
-        </p:nvSpPr>
-        <p:spPr>
-          <a:xfrm>
-            <a:off x="9326880" y="2148840"/>
-            <a:ext cx="2514600" cy="1920240"/>
-          </a:xfrm>
-          <a:prstGeom prst="rect">
-            <a:avLst/>
-          </a:prstGeom>
-          <a:noFill/>
-        </p:spPr>
-        <p:txBody>
-          <a:bodyPr wrap="square" anchor="t"/>
-          <a:lstStyle/>
-          <a:p>
-            <a:pPr algn="l">
-              <a:spcAft>
-                <a:spcPts val="200"/>
-              </a:spcAft>
-            </a:pPr>
-            <a:r>
-              <a:rPr sz="1300" b="0">
-                <a:solidFill>
-                  <a:srgbClr val="555757"/>
-                </a:solidFill>
-                <a:latin typeface="Microsoft YaHei"/>
-                <a:ea typeface="Microsoft YaHei"/>
-                <a:cs typeface="Microsoft YaHei"/>
-              </a:rPr>
-              <a:t>预测：Linear 1280→64×9</a:t>
-            </a:r>
-          </a:p>
-          <a:p>
-            <a:pPr algn="l">
-              <a:spcAft>
-                <a:spcPts val="200"/>
-              </a:spcAft>
-            </a:pPr>
-            <a:r>
-              <a:rPr sz="1300" b="0">
-                <a:solidFill>
-                  <a:srgbClr val="555757"/>
-                </a:solidFill>
-                <a:latin typeface="Microsoft YaHei"/>
-                <a:ea typeface="Microsoft YaHei"/>
-                <a:cs typeface="Microsoft YaHei"/>
-              </a:rPr>
-              <a:t>分类：任务 token / linear probe</a:t>
-            </a:r>
-          </a:p>
-        </p:txBody>
-      </p:sp>
-      <p:sp>
-        <p:nvSpPr>
-          <p:cNvPr id="23" name="Rounded Rectangle 22"/>
-          <p:cNvSpPr/>
-          <p:nvPr/>
-        </p:nvSpPr>
-        <p:spPr>
-          <a:xfrm>
-            <a:off x="457200" y="4480560"/>
-            <a:ext cx="11247120" cy="1188720"/>
-          </a:xfrm>
-          <a:prstGeom prst="roundRect">
-            <a:avLst>
-              <a:gd name="adj" fmla="val 5000"/>
-            </a:avLst>
-          </a:prstGeom>
-          <a:solidFill>
-            <a:srgbClr val="F7F7F7"/>
-          </a:solidFill>
-          <a:ln w="9525">
-            <a:solidFill>
-              <a:srgbClr val="DDDDDD"/>
-            </a:solidFill>
-          </a:ln>
-        </p:spPr>
-        <p:style>
-          <a:lnRef idx="1">
-            <a:schemeClr val="accent1"/>
-          </a:lnRef>
-          <a:fillRef idx="3">
-            <a:schemeClr val="accent1"/>
-          </a:fillRef>
-          <a:effectRef idx="2">
-            <a:schemeClr val="accent1"/>
-          </a:effectRef>
-          <a:fontRef idx="minor">
-            <a:schemeClr val="lt1"/>
-          </a:fontRef>
-        </p:style>
-        <p:txBody>
-          <a:bodyPr rtlCol="0" anchor="ctr"/>
-          <a:lstStyle/>
-          <a:p>
-            <a:pPr algn="ctr"/>
-          </a:p>
-        </p:txBody>
-      </p:sp>
-      <p:sp>
-        <p:nvSpPr>
-          <p:cNvPr id="24" name="TextBox 23"/>
-          <p:cNvSpPr txBox="1"/>
-          <p:nvPr/>
-        </p:nvSpPr>
-        <p:spPr>
-          <a:xfrm>
-            <a:off x="640080" y="4617720"/>
-            <a:ext cx="10881360" cy="274320"/>
-          </a:xfrm>
-          <a:prstGeom prst="rect">
-            <a:avLst/>
-          </a:prstGeom>
-          <a:noFill/>
-        </p:spPr>
-        <p:txBody>
-          <a:bodyPr wrap="square" anchor="t"/>
-          <a:lstStyle/>
-          <a:p>
-            <a:pPr algn="l">
-              <a:spcAft>
-                <a:spcPts val="200"/>
-              </a:spcAft>
-            </a:pPr>
-            <a:r>
-              <a:rPr sz="1400" b="1">
-                <a:solidFill>
-                  <a:srgbClr val="C7000B"/>
-                </a:solidFill>
-                <a:latin typeface="Microsoft YaHei"/>
-                <a:ea typeface="Microsoft YaHei"/>
-                <a:cs typeface="Microsoft YaHei"/>
-              </a:rPr>
-              <a:t>物理变元怎么接（不是应用场景）</a:t>
-            </a:r>
-          </a:p>
-        </p:txBody>
-      </p:sp>
-      <p:sp>
-        <p:nvSpPr>
-          <p:cNvPr id="25" name="TextBox 24"/>
-          <p:cNvSpPr txBox="1"/>
-          <p:nvPr/>
-        </p:nvSpPr>
-        <p:spPr>
-          <a:xfrm>
-            <a:off x="640080" y="4937760"/>
-            <a:ext cx="10881360" cy="640080"/>
-          </a:xfrm>
-          <a:prstGeom prst="rect">
-            <a:avLst/>
-          </a:prstGeom>
-          <a:noFill/>
-        </p:spPr>
-        <p:txBody>
-          <a:bodyPr wrap="square" anchor="t"/>
-          <a:lstStyle/>
-          <a:p>
-            <a:pPr algn="l">
-              <a:spcAft>
-                <a:spcPts val="200"/>
-              </a:spcAft>
-            </a:pPr>
-            <a:r>
-              <a:rPr sz="1300" b="0">
-                <a:solidFill>
-                  <a:srgbClr val="555757"/>
-                </a:solidFill>
-                <a:latin typeface="Microsoft YaHei"/>
-                <a:ea typeface="Microsoft YaHei"/>
-                <a:cs typeface="Microsoft YaHei"/>
-              </a:rPr>
-              <a:t>IMU / EMG 作 target 或 past-only；已知未来通道作 past-future，horizon 上保持可见。</a:t>
-            </a:r>
-          </a:p>
-          <a:p>
-            <a:pPr algn="l">
-              <a:spcAft>
-                <a:spcPts val="200"/>
-              </a:spcAft>
-            </a:pPr>
-            <a:r>
-              <a:rPr sz="1300" b="0">
-                <a:solidFill>
-                  <a:srgbClr val="555757"/>
-                </a:solidFill>
-                <a:latin typeface="Microsoft YaHei"/>
-                <a:ea typeface="Microsoft YaHei"/>
-                <a:cs typeface="Microsoft YaHei"/>
-              </a:rPr>
-              <a:t>变元上限 32。无 schema / 时钟 / 质量位则拒收——这是 Ingest，TimesFM 不管。</a:t>
-            </a:r>
-          </a:p>
-        </p:txBody>
-      </p:sp>
-      <p:sp>
-        <p:nvSpPr>
-          <p:cNvPr id="26" name="Rectangle 25"/>
-          <p:cNvSpPr/>
-          <p:nvPr/>
-        </p:nvSpPr>
-        <p:spPr>
-          <a:xfrm>
-            <a:off x="0" y="6537960"/>
-            <a:ext cx="12191695" cy="320040"/>
-          </a:xfrm>
-          <a:prstGeom prst="rect">
-            <a:avLst/>
-          </a:prstGeom>
-          <a:solidFill>
-            <a:srgbClr val="F2F2F2"/>
-          </a:solidFill>
-          <a:ln>
-            <a:noFill/>
-          </a:ln>
-        </p:spPr>
-        <p:style>
-          <a:lnRef idx="1">
-            <a:schemeClr val="accent1"/>
-          </a:lnRef>
-          <a:fillRef idx="3">
-            <a:schemeClr val="accent1"/>
-          </a:fillRef>
-          <a:effectRef idx="2">
-            <a:schemeClr val="accent1"/>
-          </a:effectRef>
-          <a:fontRef idx="minor">
-            <a:schemeClr val="lt1"/>
-          </a:fontRef>
-        </p:style>
-        <p:txBody>
-          <a:bodyPr rtlCol="0" anchor="ctr"/>
-          <a:lstStyle/>
-          <a:p>
-            <a:pPr algn="ctr"/>
-          </a:p>
-        </p:txBody>
-      </p:sp>
-      <p:sp>
-        <p:nvSpPr>
-          <p:cNvPr id="27" name="TextBox 26"/>
-          <p:cNvSpPr txBox="1"/>
-          <p:nvPr/>
-        </p:nvSpPr>
-        <p:spPr>
-          <a:xfrm>
-            <a:off x="457200" y="6537960"/>
-            <a:ext cx="8229600" cy="320040"/>
-          </a:xfrm>
-          <a:prstGeom prst="rect">
-            <a:avLst/>
-          </a:prstGeom>
-          <a:noFill/>
-        </p:spPr>
-        <p:txBody>
-          <a:bodyPr wrap="square" anchor="ctr"/>
-          <a:lstStyle/>
-          <a:p>
-            <a:pPr algn="l">
-              <a:spcAft>
-                <a:spcPts val="200"/>
-              </a:spcAft>
-            </a:pPr>
-            <a:r>
-              <a:rPr sz="900" b="0">
-                <a:solidFill>
-                  <a:srgbClr val="898989"/>
-                </a:solidFill>
-                <a:latin typeface="Microsoft YaHei"/>
-                <a:ea typeface="Microsoft YaHei"/>
-                <a:cs typeface="Microsoft YaHei"/>
-              </a:rPr>
-              <a:t>华为  ·  AI 物理感知平台  ·  总览    |    Security Level: Internal</a:t>
-            </a:r>
-          </a:p>
-        </p:txBody>
-      </p:sp>
-      <p:sp>
-        <p:nvSpPr>
-          <p:cNvPr id="28" name="TextBox 27"/>
           <p:cNvSpPr txBox="1"/>
           <p:nvPr/>
         </p:nvSpPr>
@@ -10058,7 +9747,7 @@
                 <a:ea typeface="Microsoft YaHei"/>
                 <a:cs typeface="Microsoft YaHei"/>
               </a:rPr>
-              <a:t>3  特征提取</a:t>
+              <a:t>3  预测实现</a:t>
             </a:r>
           </a:p>
         </p:txBody>
@@ -10097,7 +9786,7 @@
                 <a:ea typeface="Microsoft YaHei"/>
                 <a:cs typeface="Microsoft YaHei"/>
               </a:rPr>
-              <a:t>数据是 patch token，不是逐步 RNN 状态</a:t>
+              <a:t>TimesFM-3 式：CPM 一次前向出 9 分位数</a:t>
             </a:r>
           </a:p>
         </p:txBody>
@@ -10179,7 +9868,7 @@
                 <a:ea typeface="Microsoft YaHei"/>
                 <a:cs typeface="Microsoft YaHei"/>
               </a:rPr>
-              <a:t>每个时间 patch 拼成 192 维，ResidualBlock → 1280 维 token。</a:t>
+              <a:t>预测是平台原生能力；接口固定，底座可换。</a:t>
             </a:r>
           </a:p>
         </p:txBody>
@@ -10192,8 +9881,8 @@
         </p:nvSpPr>
         <p:spPr>
           <a:xfrm>
-            <a:off x="457200" y="1353312"/>
-            <a:ext cx="11247120" cy="749808"/>
+            <a:off x="457200" y="1371600"/>
+            <a:ext cx="5623560" cy="1298448"/>
           </a:xfrm>
           <a:prstGeom prst="roundRect">
             <a:avLst>
@@ -10239,8 +9928,8 @@
         </p:nvSpPr>
         <p:spPr>
           <a:xfrm>
-            <a:off x="640080" y="1353312"/>
-            <a:ext cx="2194560" cy="749808"/>
+            <a:off x="658368" y="1508760"/>
+            <a:ext cx="5212080" cy="320040"/>
           </a:xfrm>
           <a:prstGeom prst="rect">
             <a:avLst/>
@@ -10248,7 +9937,7 @@
           <a:noFill/>
         </p:spPr>
         <p:txBody>
-          <a:bodyPr wrap="square" anchor="ctr"/>
+          <a:bodyPr wrap="square" anchor="t"/>
           <a:lstStyle/>
           <a:p>
             <a:pPr algn="l">
@@ -10265,7 +9954,7 @@
                 <a:ea typeface="Microsoft YaHei"/>
                 <a:cs typeface="Microsoft YaHei"/>
               </a:rPr>
-              <a:t>1 对齐</a:t>
+              <a:t>输入</a:t>
             </a:r>
           </a:p>
         </p:txBody>
@@ -10278,8 +9967,8 @@
         </p:nvSpPr>
         <p:spPr>
           <a:xfrm>
-            <a:off x="2926080" y="1353312"/>
-            <a:ext cx="8595360" cy="749808"/>
+            <a:off x="658368" y="1874520"/>
+            <a:ext cx="5212080" cy="685800"/>
           </a:xfrm>
           <a:prstGeom prst="rect">
             <a:avLst/>
@@ -10287,7 +9976,7 @@
           <a:noFill/>
         </p:spPr>
         <p:txBody>
-          <a:bodyPr wrap="square" anchor="ctr"/>
+          <a:bodyPr wrap="square" anchor="t"/>
           <a:lstStyle/>
           <a:p>
             <a:pPr algn="l">
@@ -10296,7 +9985,7 @@
               </a:spcAft>
             </a:pPr>
             <a:r>
-              <a:rPr sz="1400" b="0">
+              <a:rPr sz="1300" b="0">
                 <a:solidFill>
                   <a:srgbClr val="555757"/>
                 </a:solidFill>
@@ -10304,7 +9993,7 @@
                 <a:ea typeface="Microsoft YaHei"/>
                 <a:cs typeface="Microsoft YaHei"/>
               </a:rPr>
-              <a:t>context 左 pad 到 32 倍数。horizon 上目标全 mask；past-future 在 horizon 可见。</a:t>
+              <a:t>context ≤ 15,360；变元 ≤ 32；target / past-only / past-future。</a:t>
             </a:r>
           </a:p>
         </p:txBody>
@@ -10317,8 +10006,8 @@
         </p:nvSpPr>
         <p:spPr>
           <a:xfrm>
-            <a:off x="457200" y="2176272"/>
-            <a:ext cx="11247120" cy="749808"/>
+            <a:off x="6263640" y="1371600"/>
+            <a:ext cx="5623560" cy="1298448"/>
           </a:xfrm>
           <a:prstGeom prst="roundRect">
             <a:avLst>
@@ -10326,7 +10015,7 @@
             </a:avLst>
           </a:prstGeom>
           <a:solidFill>
-            <a:srgbClr val="F7F7F7"/>
+            <a:srgbClr val="FFFFFF"/>
           </a:solidFill>
           <a:ln w="9525">
             <a:solidFill>
@@ -10364,8 +10053,8 @@
         </p:nvSpPr>
         <p:spPr>
           <a:xfrm>
-            <a:off x="640080" y="2176272"/>
-            <a:ext cx="2194560" cy="749808"/>
+            <a:off x="6464808" y="1508760"/>
+            <a:ext cx="5212080" cy="320040"/>
           </a:xfrm>
           <a:prstGeom prst="rect">
             <a:avLst/>
@@ -10373,7 +10062,7 @@
           <a:noFill/>
         </p:spPr>
         <p:txBody>
-          <a:bodyPr wrap="square" anchor="ctr"/>
+          <a:bodyPr wrap="square" anchor="t"/>
           <a:lstStyle/>
           <a:p>
             <a:pPr algn="l">
@@ -10390,7 +10079,7 @@
                 <a:ea typeface="Microsoft YaHei"/>
                 <a:cs typeface="Microsoft YaHei"/>
               </a:rPr>
-              <a:t>2 变元堆叠</a:t>
+              <a:t>特征</a:t>
             </a:r>
           </a:p>
         </p:txBody>
@@ -10403,8 +10092,8 @@
         </p:nvSpPr>
         <p:spPr>
           <a:xfrm>
-            <a:off x="2926080" y="2176272"/>
-            <a:ext cx="8595360" cy="749808"/>
+            <a:off x="6464808" y="1874520"/>
+            <a:ext cx="5212080" cy="685800"/>
           </a:xfrm>
           <a:prstGeom prst="rect">
             <a:avLst/>
@@ -10412,7 +10101,7 @@
           <a:noFill/>
         </p:spPr>
         <p:txBody>
-          <a:bodyPr wrap="square" anchor="ctr"/>
+          <a:bodyPr wrap="square" anchor="t"/>
           <a:lstStyle/>
           <a:p>
             <a:pPr algn="l">
@@ -10421,7 +10110,7 @@
               </a:spcAft>
             </a:pPr>
             <a:r>
-              <a:rPr sz="1400" b="0">
+              <a:rPr sz="1300" b="0">
                 <a:solidFill>
                   <a:srgbClr val="555757"/>
                 </a:solidFill>
@@ -10429,7 +10118,7 @@
                 <a:ea typeface="Microsoft YaHei"/>
                 <a:cs typeface="Microsoft YaHei"/>
               </a:rPr>
-              <a:t>target ⊕ past-only ⊕ past-future 沿 V 维拼接，供变元注意力交互。</a:t>
+              <a:t>pad32 → 去趋势 → RevIN → patch 192 → ResidualBlock → 1280 token。</a:t>
             </a:r>
           </a:p>
         </p:txBody>
@@ -10442,8 +10131,8 @@
         </p:nvSpPr>
         <p:spPr>
           <a:xfrm>
-            <a:off x="457200" y="2999232"/>
-            <a:ext cx="11247120" cy="749808"/>
+            <a:off x="457200" y="2788920"/>
+            <a:ext cx="5623560" cy="1298448"/>
           </a:xfrm>
           <a:prstGeom prst="roundRect">
             <a:avLst>
@@ -10489,8 +10178,8 @@
         </p:nvSpPr>
         <p:spPr>
           <a:xfrm>
-            <a:off x="640080" y="2999232"/>
-            <a:ext cx="2194560" cy="749808"/>
+            <a:off x="658368" y="2926080"/>
+            <a:ext cx="5212080" cy="320040"/>
           </a:xfrm>
           <a:prstGeom prst="rect">
             <a:avLst/>
@@ -10498,7 +10187,7 @@
           <a:noFill/>
         </p:spPr>
         <p:txBody>
-          <a:bodyPr wrap="square" anchor="ctr"/>
+          <a:bodyPr wrap="square" anchor="t"/>
           <a:lstStyle/>
           <a:p>
             <a:pPr algn="l">
@@ -10515,7 +10204,7 @@
                 <a:ea typeface="Microsoft YaHei"/>
                 <a:cs typeface="Microsoft YaHei"/>
               </a:rPr>
-              <a:t>3 去趋势</a:t>
+              <a:t>表征</a:t>
             </a:r>
           </a:p>
         </p:txBody>
@@ -10528,8 +10217,8 @@
         </p:nvSpPr>
         <p:spPr>
           <a:xfrm>
-            <a:off x="2926080" y="2999232"/>
-            <a:ext cx="8595360" cy="749808"/>
+            <a:off x="658368" y="3291840"/>
+            <a:ext cx="5212080" cy="685800"/>
           </a:xfrm>
           <a:prstGeom prst="rect">
             <a:avLst/>
@@ -10537,7 +10226,7 @@
           <a:noFill/>
         </p:spPr>
         <p:txBody>
-          <a:bodyPr wrap="square" anchor="ctr"/>
+          <a:bodyPr wrap="square" anchor="t"/>
           <a:lstStyle/>
           <a:p>
             <a:pPr algn="l">
@@ -10546,7 +10235,7 @@
               </a:spcAft>
             </a:pPr>
             <a:r>
-              <a:rPr sz="1400" b="0">
+              <a:rPr sz="1300" b="0">
                 <a:solidFill>
                   <a:srgbClr val="555757"/>
                 </a:solidFill>
@@ -10554,7 +10243,7 @@
                 <a:ea typeface="Microsoft YaHei"/>
                 <a:cs typeface="Microsoft YaHei"/>
               </a:rPr>
-              <a:t>可选线性去趋势；去趋势后 std 明显更小（阈值 0.5）才减直线，预测后再加回。</a:t>
+              <a:t>20 × MixingTransformer：因果时间注意力 + 变元注意力 + FFN。</a:t>
             </a:r>
           </a:p>
         </p:txBody>
@@ -10567,8 +10256,8 @@
         </p:nvSpPr>
         <p:spPr>
           <a:xfrm>
-            <a:off x="457200" y="3822191"/>
-            <a:ext cx="11247120" cy="749808"/>
+            <a:off x="6263640" y="2788920"/>
+            <a:ext cx="5623560" cy="1298448"/>
           </a:xfrm>
           <a:prstGeom prst="roundRect">
             <a:avLst>
@@ -10576,7 +10265,7 @@
             </a:avLst>
           </a:prstGeom>
           <a:solidFill>
-            <a:srgbClr val="F7F7F7"/>
+            <a:srgbClr val="FFFFFF"/>
           </a:solidFill>
           <a:ln w="9525">
             <a:solidFill>
@@ -10614,8 +10303,8 @@
         </p:nvSpPr>
         <p:spPr>
           <a:xfrm>
-            <a:off x="640080" y="3822191"/>
-            <a:ext cx="2194560" cy="749808"/>
+            <a:off x="6464808" y="2926080"/>
+            <a:ext cx="5212080" cy="320040"/>
           </a:xfrm>
           <a:prstGeom prst="rect">
             <a:avLst/>
@@ -10623,7 +10312,7 @@
           <a:noFill/>
         </p:spPr>
         <p:txBody>
-          <a:bodyPr wrap="square" anchor="ctr"/>
+          <a:bodyPr wrap="square" anchor="t"/>
           <a:lstStyle/>
           <a:p>
             <a:pPr algn="l">
@@ -10640,7 +10329,7 @@
                 <a:ea typeface="Microsoft YaHei"/>
                 <a:cs typeface="Microsoft YaHei"/>
               </a:rPr>
-              <a:t>4 RevIN</a:t>
+              <a:t>输出头</a:t>
             </a:r>
           </a:p>
         </p:txBody>
@@ -10653,8 +10342,8 @@
         </p:nvSpPr>
         <p:spPr>
           <a:xfrm>
-            <a:off x="2926080" y="3822191"/>
-            <a:ext cx="8595360" cy="749808"/>
+            <a:off x="6464808" y="3291840"/>
+            <a:ext cx="5212080" cy="685800"/>
           </a:xfrm>
           <a:prstGeom prst="rect">
             <a:avLst/>
@@ -10662,7 +10351,7 @@
           <a:noFill/>
         </p:spPr>
         <p:txBody>
-          <a:bodyPr wrap="square" anchor="ctr"/>
+          <a:bodyPr wrap="square" anchor="t"/>
           <a:lstStyle/>
           <a:p>
             <a:pPr algn="l">
@@ -10671,7 +10360,7 @@
               </a:spcAft>
             </a:pPr>
             <a:r>
-              <a:rPr sz="1400" b="0">
+              <a:rPr sz="1300" b="0">
                 <a:solidFill>
                   <a:srgbClr val="555757"/>
                 </a:solidFill>
@@ -10679,7 +10368,7 @@
                 <a:ea typeface="Microsoft YaHei"/>
                 <a:cs typeface="Microsoft YaHei"/>
               </a:rPr>
-              <a:t>逐变元 running mean/std。horizon 用 CPM：mask 目标 patch，用上下文统计并可迭代修正。</a:t>
+              <a:t>Linear 1280→64×9；CPM mask horizon；逆 RevIN；stitching 任意 H。</a:t>
             </a:r>
           </a:p>
         </p:txBody>
@@ -10692,8 +10381,8 @@
         </p:nvSpPr>
         <p:spPr>
           <a:xfrm>
-            <a:off x="457200" y="4645152"/>
-            <a:ext cx="11247120" cy="749808"/>
+            <a:off x="457200" y="4206240"/>
+            <a:ext cx="5623560" cy="1298448"/>
           </a:xfrm>
           <a:prstGeom prst="roundRect">
             <a:avLst>
@@ -10739,8 +10428,8 @@
         </p:nvSpPr>
         <p:spPr>
           <a:xfrm>
-            <a:off x="640080" y="4645152"/>
-            <a:ext cx="2194560" cy="749808"/>
+            <a:off x="658368" y="4343400"/>
+            <a:ext cx="5212080" cy="320040"/>
           </a:xfrm>
           <a:prstGeom prst="rect">
             <a:avLst/>
@@ -10748,7 +10437,7 @@
           <a:noFill/>
         </p:spPr>
         <p:txBody>
-          <a:bodyPr wrap="square" anchor="ctr"/>
+          <a:bodyPr wrap="square" anchor="t"/>
           <a:lstStyle/>
           <a:p>
             <a:pPr algn="l">
@@ -10765,7 +10454,7 @@
                 <a:ea typeface="Microsoft YaHei"/>
                 <a:cs typeface="Microsoft YaHei"/>
               </a:rPr>
-              <a:t>5 Patch 嵌入</a:t>
+              <a:t>读出</a:t>
             </a:r>
           </a:p>
         </p:txBody>
@@ -10778,8 +10467,8 @@
         </p:nvSpPr>
         <p:spPr>
           <a:xfrm>
-            <a:off x="2926080" y="4645152"/>
-            <a:ext cx="8595360" cy="749808"/>
+            <a:off x="658368" y="4709160"/>
+            <a:ext cx="5212080" cy="685800"/>
           </a:xfrm>
           <a:prstGeom prst="rect">
             <a:avLst/>
@@ -10787,7 +10476,7 @@
           <a:noFill/>
         </p:spPr>
         <p:txBody>
-          <a:bodyPr wrap="square" anchor="ctr"/>
+          <a:bodyPr wrap="square" anchor="t"/>
           <a:lstStyle/>
           <a:p>
             <a:pPr algn="l">
@@ -10796,7 +10485,7 @@
               </a:spcAft>
             </a:pPr>
             <a:r>
-              <a:rPr sz="1400" b="0">
+              <a:rPr sz="1300" b="0">
                 <a:solidFill>
                   <a:srgbClr val="555757"/>
                 </a:solidFill>
@@ -10804,30 +10493,34 @@
                 <a:ea typeface="Microsoft YaHei"/>
                 <a:cs typeface="Microsoft YaHei"/>
               </a:rPr>
-              <a:t>当前 32 + roll 未来 64 + mask 96 → concat 192 → ResidualBlock（两层线性+ReLU+残差）→ d=1280。</a:t>
-            </a:r>
-          </a:p>
-        </p:txBody>
-      </p:sp>
-      <p:sp>
-        <p:nvSpPr>
-          <p:cNvPr id="22" name="Rectangle 21"/>
+              <a:t>点预测 q50；概率区间 q10–q90；MAE + 覆盖率评测。</a:t>
+            </a:r>
+          </a:p>
+        </p:txBody>
+      </p:sp>
+      <p:sp>
+        <p:nvSpPr>
+          <p:cNvPr id="22" name="Rounded Rectangle 21"/>
           <p:cNvSpPr/>
           <p:nvPr/>
         </p:nvSpPr>
         <p:spPr>
           <a:xfrm>
-            <a:off x="0" y="6537960"/>
-            <a:ext cx="12191695" cy="320040"/>
-          </a:xfrm>
-          <a:prstGeom prst="rect">
-            <a:avLst/>
-          </a:prstGeom>
-          <a:solidFill>
-            <a:srgbClr val="F2F2F2"/>
-          </a:solidFill>
-          <a:ln>
-            <a:noFill/>
+            <a:off x="6263640" y="4206240"/>
+            <a:ext cx="5623560" cy="1298448"/>
+          </a:xfrm>
+          <a:prstGeom prst="roundRect">
+            <a:avLst>
+              <a:gd name="adj" fmla="val 5000"/>
+            </a:avLst>
+          </a:prstGeom>
+          <a:solidFill>
+            <a:srgbClr val="FFFFFF"/>
+          </a:solidFill>
+          <a:ln w="9525">
+            <a:solidFill>
+              <a:srgbClr val="DDDDDD"/>
+            </a:solidFill>
           </a:ln>
         </p:spPr>
         <p:style>
@@ -10860,8 +10553,8 @@
         </p:nvSpPr>
         <p:spPr>
           <a:xfrm>
-            <a:off x="457200" y="6537960"/>
-            <a:ext cx="8229600" cy="320040"/>
+            <a:off x="6464808" y="4343400"/>
+            <a:ext cx="5212080" cy="320040"/>
           </a:xfrm>
           <a:prstGeom prst="rect">
             <a:avLst/>
@@ -10869,7 +10562,7 @@
           <a:noFill/>
         </p:spPr>
         <p:txBody>
-          <a:bodyPr wrap="square" anchor="ctr"/>
+          <a:bodyPr wrap="square" anchor="t"/>
           <a:lstStyle/>
           <a:p>
             <a:pPr algn="l">
@@ -10878,15 +10571,15 @@
               </a:spcAft>
             </a:pPr>
             <a:r>
-              <a:rPr sz="900" b="0">
-                <a:solidFill>
-                  <a:srgbClr val="898989"/>
+              <a:rPr sz="1600" b="1">
+                <a:solidFill>
+                  <a:srgbClr val="C7000B"/>
                 </a:solidFill>
                 <a:latin typeface="Microsoft YaHei"/>
                 <a:ea typeface="Microsoft YaHei"/>
                 <a:cs typeface="Microsoft YaHei"/>
               </a:rPr>
-              <a:t>华为  ·  AI 物理感知平台  ·  特征提取    |    Security Level: Internal</a:t>
+              <a:t>替换点</a:t>
             </a:r>
           </a:p>
         </p:txBody>
@@ -10894,6 +10587,127 @@
       <p:sp>
         <p:nvSpPr>
           <p:cNvPr id="24" name="TextBox 23"/>
+          <p:cNvSpPr txBox="1"/>
+          <p:nvPr/>
+        </p:nvSpPr>
+        <p:spPr>
+          <a:xfrm>
+            <a:off x="6464808" y="4709160"/>
+            <a:ext cx="5212080" cy="685800"/>
+          </a:xfrm>
+          <a:prstGeom prst="rect">
+            <a:avLst/>
+          </a:prstGeom>
+          <a:noFill/>
+        </p:spPr>
+        <p:txBody>
+          <a:bodyPr wrap="square" anchor="t"/>
+          <a:lstStyle/>
+          <a:p>
+            <a:pPr algn="l">
+              <a:spcAft>
+                <a:spcPts val="200"/>
+              </a:spcAft>
+            </a:pPr>
+            <a:r>
+              <a:rPr sz="1300" b="0">
+                <a:solidFill>
+                  <a:srgbClr val="555757"/>
+                </a:solidFill>
+                <a:latin typeface="Microsoft YaHei"/>
+                <a:ea typeface="Microsoft YaHei"/>
+                <a:cs typeface="Microsoft YaHei"/>
+              </a:rPr>
+              <a:t>底座换 TimesFM-4 / 自研时，predict() 签名与返回结构不变。</a:t>
+            </a:r>
+          </a:p>
+        </p:txBody>
+      </p:sp>
+      <p:sp>
+        <p:nvSpPr>
+          <p:cNvPr id="25" name="Rectangle 24"/>
+          <p:cNvSpPr/>
+          <p:nvPr/>
+        </p:nvSpPr>
+        <p:spPr>
+          <a:xfrm>
+            <a:off x="0" y="6537960"/>
+            <a:ext cx="12191695" cy="320040"/>
+          </a:xfrm>
+          <a:prstGeom prst="rect">
+            <a:avLst/>
+          </a:prstGeom>
+          <a:solidFill>
+            <a:srgbClr val="F2F2F2"/>
+          </a:solidFill>
+          <a:ln>
+            <a:noFill/>
+          </a:ln>
+        </p:spPr>
+        <p:style>
+          <a:lnRef idx="1">
+            <a:schemeClr val="accent1"/>
+          </a:lnRef>
+          <a:fillRef idx="3">
+            <a:schemeClr val="accent1"/>
+          </a:fillRef>
+          <a:effectRef idx="2">
+            <a:schemeClr val="accent1"/>
+          </a:effectRef>
+          <a:fontRef idx="minor">
+            <a:schemeClr val="lt1"/>
+          </a:fontRef>
+        </p:style>
+        <p:txBody>
+          <a:bodyPr rtlCol="0" anchor="ctr"/>
+          <a:lstStyle/>
+          <a:p>
+            <a:pPr algn="ctr"/>
+          </a:p>
+        </p:txBody>
+      </p:sp>
+      <p:sp>
+        <p:nvSpPr>
+          <p:cNvPr id="26" name="TextBox 25"/>
+          <p:cNvSpPr txBox="1"/>
+          <p:nvPr/>
+        </p:nvSpPr>
+        <p:spPr>
+          <a:xfrm>
+            <a:off x="457200" y="6537960"/>
+            <a:ext cx="8229600" cy="320040"/>
+          </a:xfrm>
+          <a:prstGeom prst="rect">
+            <a:avLst/>
+          </a:prstGeom>
+          <a:noFill/>
+        </p:spPr>
+        <p:txBody>
+          <a:bodyPr wrap="square" anchor="ctr"/>
+          <a:lstStyle/>
+          <a:p>
+            <a:pPr algn="l">
+              <a:spcAft>
+                <a:spcPts val="200"/>
+              </a:spcAft>
+            </a:pPr>
+            <a:r>
+              <a:rPr sz="900" b="0">
+                <a:solidFill>
+                  <a:srgbClr val="898989"/>
+                </a:solidFill>
+                <a:latin typeface="Microsoft YaHei"/>
+                <a:ea typeface="Microsoft YaHei"/>
+                <a:cs typeface="Microsoft YaHei"/>
+              </a:rPr>
+              <a:t>华为  ·  AI 物理感知平台  ·  预测    |    Security Level: Internal</a:t>
+            </a:r>
+          </a:p>
+        </p:txBody>
+      </p:sp>
+      <p:sp>
+        <p:nvSpPr>
+          <p:cNvPr id="27" name="TextBox 26"/>
           <p:cNvSpPr txBox="1"/>
           <p:nvPr/>
         </p:nvSpPr>
@@ -11025,7 +10839,7 @@
                 <a:ea typeface="Microsoft YaHei"/>
                 <a:cs typeface="Microsoft YaHei"/>
               </a:rPr>
-              <a:t>4  表征</a:t>
+              <a:t>4  分类实现</a:t>
             </a:r>
           </a:p>
         </p:txBody>
@@ -11064,7 +10878,7 @@
                 <a:ea typeface="Microsoft YaHei"/>
                 <a:cs typeface="Microsoft YaHei"/>
               </a:rPr>
-              <a:t>Mixing Transformer 学的是条件表征，预测与分类共用</a:t>
+              <a:t>共享表征 + 任务 token / linear probe</a:t>
             </a:r>
           </a:p>
         </p:txBody>
@@ -11146,7 +10960,7 @@
                 <a:ea typeface="Microsoft YaHei"/>
                 <a:cs typeface="Microsoft YaHei"/>
               </a:rPr>
-              <a:t>每层对 (B, V, N, 1280) 做：时间注意力 → 变元注意力 → FFN。堆叠 20 层。</a:t>
+              <a:t>分类不是 TimesFM 内建；平台用 UniTS / MOMENT 方式补。</a:t>
             </a:r>
           </a:p>
         </p:txBody>
@@ -11159,8 +10973,8 @@
         </p:nvSpPr>
         <p:spPr>
           <a:xfrm>
-            <a:off x="457200" y="1417320"/>
-            <a:ext cx="3657600" cy="3246120"/>
+            <a:off x="457200" y="1371600"/>
+            <a:ext cx="5577840" cy="4206240"/>
           </a:xfrm>
           <a:prstGeom prst="roundRect">
             <a:avLst>
@@ -11206,14 +11020,14 @@
         </p:nvSpPr>
         <p:spPr>
           <a:xfrm>
-            <a:off x="457200" y="1417320"/>
-            <a:ext cx="91440" cy="3246120"/>
-          </a:xfrm>
-          <a:prstGeom prst="rect">
-            <a:avLst/>
-          </a:prstGeom>
-          <a:solidFill>
-            <a:srgbClr val="30B5C5"/>
+            <a:off x="457200" y="1371600"/>
+            <a:ext cx="5577840" cy="73152"/>
+          </a:xfrm>
+          <a:prstGeom prst="rect">
+            <a:avLst/>
+          </a:prstGeom>
+          <a:solidFill>
+            <a:srgbClr val="898989"/>
           </a:solidFill>
           <a:ln>
             <a:noFill/>
@@ -11249,8 +11063,8 @@
         </p:nvSpPr>
         <p:spPr>
           <a:xfrm>
-            <a:off x="685800" y="1600200"/>
-            <a:ext cx="3200400" cy="411480"/>
+            <a:off x="640080" y="1600200"/>
+            <a:ext cx="5212080" cy="365760"/>
           </a:xfrm>
           <a:prstGeom prst="rect">
             <a:avLst/>
@@ -11267,15 +11081,15 @@
               </a:spcAft>
             </a:pPr>
             <a:r>
-              <a:rPr sz="1800" b="1">
-                <a:solidFill>
-                  <a:srgbClr val="30B5C5"/>
+              <a:rPr sz="1700" b="1">
+                <a:solidFill>
+                  <a:srgbClr val="898989"/>
                 </a:solidFill>
                 <a:latin typeface="Microsoft YaHei"/>
                 <a:ea typeface="Microsoft YaHei"/>
                 <a:cs typeface="Microsoft YaHei"/>
               </a:rPr>
-              <a:t>时间注意力</a:t>
+              <a:t>路 A  规则下游（零样本，示意）</a:t>
             </a:r>
           </a:p>
         </p:txBody>
@@ -11288,8 +11102,8 @@
         </p:nvSpPr>
         <p:spPr>
           <a:xfrm>
-            <a:off x="685800" y="2194560"/>
-            <a:ext cx="3200400" cy="2194560"/>
+            <a:off x="640080" y="2103120"/>
+            <a:ext cx="5212080" cy="3200400"/>
           </a:xfrm>
           <a:prstGeom prst="rect">
             <a:avLst/>
@@ -11306,7 +11120,7 @@
               </a:spcAft>
             </a:pPr>
             <a:r>
-              <a:rPr sz="1500" b="0">
+              <a:rPr sz="1400" b="0">
                 <a:solidFill>
                   <a:srgbClr val="555757"/>
                 </a:solidFill>
@@ -11314,7 +11128,7 @@
                 <a:ea typeface="Microsoft YaHei"/>
                 <a:cs typeface="Microsoft YaHei"/>
               </a:rPr>
-              <a:t>因果 + RoPE。</a:t>
+              <a:t>历史段：去趋势残差 z-score。</a:t>
             </a:r>
           </a:p>
           <a:p>
@@ -11324,7 +11138,7 @@
               </a:spcAft>
             </a:pPr>
             <a:r>
-              <a:rPr sz="1500" b="0">
+              <a:rPr sz="1400" b="0">
                 <a:solidFill>
                   <a:srgbClr val="555757"/>
                 </a:solidFill>
@@ -11332,7 +11146,7 @@
                 <a:ea typeface="Microsoft YaHei"/>
                 <a:cs typeface="Microsoft YaHei"/>
               </a:rPr>
-              <a:t>每个变元独立：第 t 个 patch 只能看 ≤ t。</a:t>
+              <a:t>|z|≥3 CRITICAL，≥2 WARNING，否则 NORMAL。</a:t>
             </a:r>
           </a:p>
           <a:p>
@@ -11342,7 +11156,7 @@
               </a:spcAft>
             </a:pPr>
             <a:r>
-              <a:rPr sz="1500" b="0">
+              <a:rPr sz="1400" b="0">
                 <a:solidFill>
                   <a:srgbClr val="555757"/>
                 </a:solidFill>
@@ -11350,7 +11164,61 @@
                 <a:ea typeface="Microsoft YaHei"/>
                 <a:cs typeface="Microsoft YaHei"/>
               </a:rPr>
-              <a:t>建模趋势、季节、水平漂移。</a:t>
+              <a:t/>
+            </a:r>
+          </a:p>
+          <a:p>
+            <a:pPr algn="l">
+              <a:spcAft>
+                <a:spcPts val="200"/>
+              </a:spcAft>
+            </a:pPr>
+            <a:r>
+              <a:rPr sz="1400" b="0">
+                <a:solidFill>
+                  <a:srgbClr val="555757"/>
+                </a:solidFill>
+                <a:latin typeface="Microsoft YaHei"/>
+                <a:ea typeface="Microsoft YaHei"/>
+                <a:cs typeface="Microsoft YaHei"/>
+              </a:rPr>
+              <a:t>未来段：观测是否落在 q10–q90 / q20–q80 外。</a:t>
+            </a:r>
+          </a:p>
+          <a:p>
+            <a:pPr algn="l">
+              <a:spcAft>
+                <a:spcPts val="200"/>
+              </a:spcAft>
+            </a:pPr>
+            <a:r>
+              <a:rPr sz="1400" b="0">
+                <a:solidFill>
+                  <a:srgbClr val="555757"/>
+                </a:solidFill>
+                <a:latin typeface="Microsoft YaHei"/>
+                <a:ea typeface="Microsoft YaHei"/>
+                <a:cs typeface="Microsoft YaHei"/>
+              </a:rPr>
+              <a:t/>
+            </a:r>
+          </a:p>
+          <a:p>
+            <a:pPr algn="l">
+              <a:spcAft>
+                <a:spcPts val="200"/>
+              </a:spcAft>
+            </a:pPr>
+            <a:r>
+              <a:rPr sz="1400" b="0">
+                <a:solidFill>
+                  <a:srgbClr val="555757"/>
+                </a:solidFill>
+                <a:latin typeface="Microsoft YaHei"/>
+                <a:ea typeface="Microsoft YaHei"/>
+                <a:cs typeface="Microsoft YaHei"/>
+              </a:rPr>
+              <a:t>不改权重，不能注册新类别，只能做异常示意。</a:t>
             </a:r>
           </a:p>
         </p:txBody>
@@ -11363,8 +11231,8 @@
         </p:nvSpPr>
         <p:spPr>
           <a:xfrm>
-            <a:off x="4297680" y="1417320"/>
-            <a:ext cx="3657600" cy="3246120"/>
+            <a:off x="6217920" y="1371600"/>
+            <a:ext cx="5486400" cy="4206240"/>
           </a:xfrm>
           <a:prstGeom prst="roundRect">
             <a:avLst>
@@ -11410,14 +11278,14 @@
         </p:nvSpPr>
         <p:spPr>
           <a:xfrm>
-            <a:off x="4297680" y="1417320"/>
-            <a:ext cx="91440" cy="3246120"/>
-          </a:xfrm>
-          <a:prstGeom prst="rect">
-            <a:avLst/>
-          </a:prstGeom>
-          <a:solidFill>
-            <a:srgbClr val="ED6D00"/>
+            <a:off x="6217920" y="1371600"/>
+            <a:ext cx="5486400" cy="73152"/>
+          </a:xfrm>
+          <a:prstGeom prst="rect">
+            <a:avLst/>
+          </a:prstGeom>
+          <a:solidFill>
+            <a:srgbClr val="C7000B"/>
           </a:solidFill>
           <a:ln>
             <a:noFill/>
@@ -11453,8 +11321,8 @@
         </p:nvSpPr>
         <p:spPr>
           <a:xfrm>
-            <a:off x="4526280" y="1600200"/>
-            <a:ext cx="3200400" cy="411480"/>
+            <a:off x="6400800" y="1600200"/>
+            <a:ext cx="5120640" cy="365760"/>
           </a:xfrm>
           <a:prstGeom prst="rect">
             <a:avLst/>
@@ -11471,15 +11339,15 @@
               </a:spcAft>
             </a:pPr>
             <a:r>
-              <a:rPr sz="1800" b="1">
-                <a:solidFill>
-                  <a:srgbClr val="ED6D00"/>
+              <a:rPr sz="1700" b="1">
+                <a:solidFill>
+                  <a:srgbClr val="C7000B"/>
                 </a:solidFill>
                 <a:latin typeface="Microsoft YaHei"/>
                 <a:ea typeface="Microsoft YaHei"/>
                 <a:cs typeface="Microsoft YaHei"/>
               </a:rPr>
-              <a:t>变元注意力</a:t>
+              <a:t>路 B  可学习分类（平台接口）</a:t>
             </a:r>
           </a:p>
         </p:txBody>
@@ -11492,8 +11360,8 @@
         </p:nvSpPr>
         <p:spPr>
           <a:xfrm>
-            <a:off x="4526280" y="2194560"/>
-            <a:ext cx="3200400" cy="2194560"/>
+            <a:off x="6400800" y="2103120"/>
+            <a:ext cx="5120640" cy="3200400"/>
           </a:xfrm>
           <a:prstGeom prst="rect">
             <a:avLst/>
@@ -11510,7 +11378,7 @@
               </a:spcAft>
             </a:pPr>
             <a:r>
-              <a:rPr sz="1500" b="0">
+              <a:rPr sz="1400" b="0">
                 <a:solidFill>
                   <a:srgbClr val="555757"/>
                 </a:solidFill>
@@ -11518,7 +11386,7 @@
                 <a:ea typeface="Microsoft YaHei"/>
                 <a:cs typeface="Microsoft YaHei"/>
               </a:rPr>
-              <a:t>同一时刻、跨通道、非因果。</a:t>
+              <a:t>UniTS：任务 token 把预测 / 分类 / 填补 / 异常收进同一套参数。</a:t>
             </a:r>
           </a:p>
           <a:p>
@@ -11528,7 +11396,7 @@
               </a:spcAft>
             </a:pPr>
             <a:r>
-              <a:rPr sz="1500" b="0">
+              <a:rPr sz="1400" b="0">
                 <a:solidFill>
                   <a:srgbClr val="555757"/>
                 </a:solidFill>
@@ -11536,7 +11404,7 @@
                 <a:ea typeface="Microsoft YaHei"/>
                 <a:cs typeface="Microsoft YaHei"/>
               </a:rPr>
-              <a:t>目标与协变量在同一 patch 交换信息。</a:t>
+              <a:t>MOMENT：掩码预训练编码器 + linear probe / 分类头。</a:t>
             </a:r>
           </a:p>
           <a:p>
@@ -11546,7 +11414,7 @@
               </a:spcAft>
             </a:pPr>
             <a:r>
-              <a:rPr sz="1500" b="0">
+              <a:rPr sz="1400" b="0">
                 <a:solidFill>
                   <a:srgbClr val="555757"/>
                 </a:solidFill>
@@ -11554,34 +11422,66 @@
                 <a:ea typeface="Microsoft YaHei"/>
                 <a:cs typeface="Microsoft YaHei"/>
               </a:rPr>
-              <a:t>这是 3.0 相对 2.x 单变量的核心。</a:t>
-            </a:r>
-          </a:p>
-        </p:txBody>
-      </p:sp>
-      <p:sp>
-        <p:nvSpPr>
-          <p:cNvPr id="15" name="Rounded Rectangle 14"/>
+              <a:t>LIMU-BERT-X：IMU 掩码预训练，直接初始化 IMU 变元。</a:t>
+            </a:r>
+          </a:p>
+          <a:p>
+            <a:pPr algn="l">
+              <a:spcAft>
+                <a:spcPts val="200"/>
+              </a:spcAft>
+            </a:pPr>
+            <a:r>
+              <a:rPr sz="1400" b="0">
+                <a:solidFill>
+                  <a:srgbClr val="555757"/>
+                </a:solidFill>
+                <a:latin typeface="Microsoft YaHei"/>
+                <a:ea typeface="Microsoft YaHei"/>
+                <a:cs typeface="Microsoft YaHei"/>
+              </a:rPr>
+              <a:t/>
+            </a:r>
+          </a:p>
+          <a:p>
+            <a:pPr algn="l">
+              <a:spcAft>
+                <a:spcPts val="200"/>
+              </a:spcAft>
+            </a:pPr>
+            <a:r>
+              <a:rPr sz="1400" b="0">
+                <a:solidFill>
+                  <a:srgbClr val="555757"/>
+                </a:solidFill>
+                <a:latin typeface="Microsoft YaHei"/>
+                <a:ea typeface="Microsoft YaHei"/>
+                <a:cs typeface="Microsoft YaHei"/>
+              </a:rPr>
+              <a:t>场景方注册类别 → 平台微调 classify() → 返回 label + confidence。</a:t>
+            </a:r>
+          </a:p>
+        </p:txBody>
+      </p:sp>
+      <p:sp>
+        <p:nvSpPr>
+          <p:cNvPr id="15" name="Rectangle 14"/>
           <p:cNvSpPr/>
           <p:nvPr/>
         </p:nvSpPr>
         <p:spPr>
           <a:xfrm>
-            <a:off x="8138160" y="1417320"/>
-            <a:ext cx="3657600" cy="3246120"/>
-          </a:xfrm>
-          <a:prstGeom prst="roundRect">
-            <a:avLst>
-              <a:gd name="adj" fmla="val 5000"/>
-            </a:avLst>
-          </a:prstGeom>
-          <a:solidFill>
-            <a:srgbClr val="FFFFFF"/>
-          </a:solidFill>
-          <a:ln w="9525">
-            <a:solidFill>
-              <a:srgbClr val="DDDDDD"/>
-            </a:solidFill>
+            <a:off x="0" y="6537960"/>
+            <a:ext cx="12191695" cy="320040"/>
+          </a:xfrm>
+          <a:prstGeom prst="rect">
+            <a:avLst/>
+          </a:prstGeom>
+          <a:solidFill>
+            <a:srgbClr val="F2F2F2"/>
+          </a:solidFill>
+          <a:ln>
+            <a:noFill/>
           </a:ln>
         </p:spPr>
         <p:style>
@@ -11608,57 +11508,14 @@
       </p:sp>
       <p:sp>
         <p:nvSpPr>
-          <p:cNvPr id="16" name="Rectangle 15"/>
-          <p:cNvSpPr/>
-          <p:nvPr/>
-        </p:nvSpPr>
-        <p:spPr>
-          <a:xfrm>
-            <a:off x="8138160" y="1417320"/>
-            <a:ext cx="91440" cy="3246120"/>
-          </a:xfrm>
-          <a:prstGeom prst="rect">
-            <a:avLst/>
-          </a:prstGeom>
-          <a:solidFill>
-            <a:srgbClr val="62B230"/>
-          </a:solidFill>
-          <a:ln>
-            <a:noFill/>
-          </a:ln>
-        </p:spPr>
-        <p:style>
-          <a:lnRef idx="1">
-            <a:schemeClr val="accent1"/>
-          </a:lnRef>
-          <a:fillRef idx="3">
-            <a:schemeClr val="accent1"/>
-          </a:fillRef>
-          <a:effectRef idx="2">
-            <a:schemeClr val="accent1"/>
-          </a:effectRef>
-          <a:fontRef idx="minor">
-            <a:schemeClr val="lt1"/>
-          </a:fontRef>
-        </p:style>
-        <p:txBody>
-          <a:bodyPr rtlCol="0" anchor="ctr"/>
-          <a:lstStyle/>
-          <a:p>
-            <a:pPr algn="ctr"/>
-          </a:p>
-        </p:txBody>
-      </p:sp>
-      <p:sp>
-        <p:nvSpPr>
-          <p:cNvPr id="17" name="TextBox 16"/>
+          <p:cNvPr id="16" name="TextBox 15"/>
           <p:cNvSpPr txBox="1"/>
           <p:nvPr/>
         </p:nvSpPr>
         <p:spPr>
           <a:xfrm>
-            <a:off x="8366760" y="1600200"/>
-            <a:ext cx="3200400" cy="411480"/>
+            <a:off x="457200" y="6537960"/>
+            <a:ext cx="8229600" cy="320040"/>
           </a:xfrm>
           <a:prstGeom prst="rect">
             <a:avLst/>
@@ -11666,7 +11523,7 @@
           <a:noFill/>
         </p:spPr>
         <p:txBody>
-          <a:bodyPr wrap="square" anchor="t"/>
+          <a:bodyPr wrap="square" anchor="ctr"/>
           <a:lstStyle/>
           <a:p>
             <a:pPr algn="l">
@@ -11675,308 +11532,22 @@
               </a:spcAft>
             </a:pPr>
             <a:r>
-              <a:rPr sz="1800" b="1">
-                <a:solidFill>
-                  <a:srgbClr val="62B230"/>
+              <a:rPr sz="900" b="0">
+                <a:solidFill>
+                  <a:srgbClr val="898989"/>
                 </a:solidFill>
                 <a:latin typeface="Microsoft YaHei"/>
                 <a:ea typeface="Microsoft YaHei"/>
                 <a:cs typeface="Microsoft YaHei"/>
               </a:rPr>
-              <a:t>FFN</a:t>
-            </a:r>
-          </a:p>
-        </p:txBody>
-      </p:sp>
-      <p:sp>
-        <p:nvSpPr>
-          <p:cNvPr id="18" name="TextBox 17"/>
-          <p:cNvSpPr txBox="1"/>
-          <p:nvPr/>
-        </p:nvSpPr>
-        <p:spPr>
-          <a:xfrm>
-            <a:off x="8366760" y="2194560"/>
-            <a:ext cx="3200400" cy="2194560"/>
-          </a:xfrm>
-          <a:prstGeom prst="rect">
-            <a:avLst/>
-          </a:prstGeom>
-          <a:noFill/>
-        </p:spPr>
-        <p:txBody>
-          <a:bodyPr wrap="square" anchor="t"/>
-          <a:lstStyle/>
-          <a:p>
-            <a:pPr algn="l">
-              <a:spcAft>
-                <a:spcPts val="200"/>
-              </a:spcAft>
-            </a:pPr>
-            <a:r>
-              <a:rPr sz="1500" b="0">
-                <a:solidFill>
-                  <a:srgbClr val="555757"/>
-                </a:solidFill>
-                <a:latin typeface="Microsoft YaHei"/>
-                <a:ea typeface="Microsoft YaHei"/>
-                <a:cs typeface="Microsoft YaHei"/>
-              </a:rPr>
-              <a:t>RMSNorm + ReLU MLP + 残差。</a:t>
-            </a:r>
-          </a:p>
-          <a:p>
-            <a:pPr algn="l">
-              <a:spcAft>
-                <a:spcPts val="200"/>
-              </a:spcAft>
-            </a:pPr>
-            <a:r>
-              <a:rPr sz="1500" b="0">
-                <a:solidFill>
-                  <a:srgbClr val="555757"/>
-                </a:solidFill>
-                <a:latin typeface="Microsoft YaHei"/>
-                <a:ea typeface="Microsoft YaHei"/>
-                <a:cs typeface="Microsoft YaHei"/>
-              </a:rPr>
-              <a:t>输出条件表征，同时供预测头与分类头。</a:t>
-            </a:r>
-          </a:p>
-          <a:p>
-            <a:pPr algn="l">
-              <a:spcAft>
-                <a:spcPts val="200"/>
-              </a:spcAft>
-            </a:pPr>
-            <a:r>
-              <a:rPr sz="1500" b="0">
-                <a:solidFill>
-                  <a:srgbClr val="555757"/>
-                </a:solidFill>
-                <a:latin typeface="Microsoft YaHei"/>
-                <a:ea typeface="Microsoft YaHei"/>
-                <a:cs typeface="Microsoft YaHei"/>
-              </a:rPr>
-              <a:t>UniTS / MOMENT 证明这套表征可做分类。</a:t>
-            </a:r>
-          </a:p>
-        </p:txBody>
-      </p:sp>
-      <p:sp>
-        <p:nvSpPr>
-          <p:cNvPr id="19" name="Rounded Rectangle 18"/>
-          <p:cNvSpPr/>
-          <p:nvPr/>
-        </p:nvSpPr>
-        <p:spPr>
-          <a:xfrm>
-            <a:off x="457200" y="5806440"/>
-            <a:ext cx="11247120" cy="640080"/>
-          </a:xfrm>
-          <a:prstGeom prst="roundRect">
-            <a:avLst>
-              <a:gd name="adj" fmla="val 5000"/>
-            </a:avLst>
-          </a:prstGeom>
-          <a:solidFill>
-            <a:srgbClr val="FFF0F0"/>
-          </a:solidFill>
-          <a:ln w="9525">
-            <a:solidFill>
-              <a:srgbClr val="C7000B"/>
-            </a:solidFill>
-          </a:ln>
-        </p:spPr>
-        <p:style>
-          <a:lnRef idx="1">
-            <a:schemeClr val="accent1"/>
-          </a:lnRef>
-          <a:fillRef idx="3">
-            <a:schemeClr val="accent1"/>
-          </a:fillRef>
-          <a:effectRef idx="2">
-            <a:schemeClr val="accent1"/>
-          </a:effectRef>
-          <a:fontRef idx="minor">
-            <a:schemeClr val="lt1"/>
-          </a:fontRef>
-        </p:style>
-        <p:txBody>
-          <a:bodyPr rtlCol="0" anchor="ctr"/>
-          <a:lstStyle/>
-          <a:p>
-            <a:pPr algn="ctr"/>
-          </a:p>
-        </p:txBody>
-      </p:sp>
-      <p:sp>
-        <p:nvSpPr>
-          <p:cNvPr id="20" name="Rectangle 19"/>
-          <p:cNvSpPr/>
-          <p:nvPr/>
-        </p:nvSpPr>
-        <p:spPr>
-          <a:xfrm>
-            <a:off x="457200" y="5806440"/>
-            <a:ext cx="73152" cy="640080"/>
-          </a:xfrm>
-          <a:prstGeom prst="rect">
-            <a:avLst/>
-          </a:prstGeom>
-          <a:solidFill>
-            <a:srgbClr val="C7000B"/>
-          </a:solidFill>
-          <a:ln>
-            <a:noFill/>
-          </a:ln>
-        </p:spPr>
-        <p:style>
-          <a:lnRef idx="1">
-            <a:schemeClr val="accent1"/>
-          </a:lnRef>
-          <a:fillRef idx="3">
-            <a:schemeClr val="accent1"/>
-          </a:fillRef>
-          <a:effectRef idx="2">
-            <a:schemeClr val="accent1"/>
-          </a:effectRef>
-          <a:fontRef idx="minor">
-            <a:schemeClr val="lt1"/>
-          </a:fontRef>
-        </p:style>
-        <p:txBody>
-          <a:bodyPr rtlCol="0" anchor="ctr"/>
-          <a:lstStyle/>
-          <a:p>
-            <a:pPr algn="ctr"/>
-          </a:p>
-        </p:txBody>
-      </p:sp>
-      <p:sp>
-        <p:nvSpPr>
-          <p:cNvPr id="21" name="TextBox 20"/>
-          <p:cNvSpPr txBox="1"/>
-          <p:nvPr/>
-        </p:nvSpPr>
-        <p:spPr>
-          <a:xfrm>
-            <a:off x="685800" y="5806440"/>
-            <a:ext cx="10881360" cy="640080"/>
-          </a:xfrm>
-          <a:prstGeom prst="rect">
-            <a:avLst/>
-          </a:prstGeom>
-          <a:noFill/>
-        </p:spPr>
-        <p:txBody>
-          <a:bodyPr wrap="square" anchor="ctr"/>
-          <a:lstStyle/>
-          <a:p>
-            <a:pPr algn="l">
-              <a:spcAft>
-                <a:spcPts val="200"/>
-              </a:spcAft>
-            </a:pPr>
-            <a:r>
-              <a:rPr sz="1300" b="1">
-                <a:solidFill>
-                  <a:srgbClr val="1A1A1A"/>
-                </a:solidFill>
-                <a:latin typeface="Microsoft YaHei"/>
-                <a:ea typeface="Microsoft YaHei"/>
-                <a:cs typeface="Microsoft YaHei"/>
-              </a:rPr>
-              <a:t>所以  ·  表征层不动 TimesFM；分类能力来自在表征上接 UniTS 任务 token 或 MOMENT 探针。</a:t>
-            </a:r>
-          </a:p>
-        </p:txBody>
-      </p:sp>
-      <p:sp>
-        <p:nvSpPr>
-          <p:cNvPr id="22" name="Rectangle 21"/>
-          <p:cNvSpPr/>
-          <p:nvPr/>
-        </p:nvSpPr>
-        <p:spPr>
-          <a:xfrm>
-            <a:off x="0" y="6537960"/>
-            <a:ext cx="12191695" cy="320040"/>
-          </a:xfrm>
-          <a:prstGeom prst="rect">
-            <a:avLst/>
-          </a:prstGeom>
-          <a:solidFill>
-            <a:srgbClr val="F2F2F2"/>
-          </a:solidFill>
-          <a:ln>
-            <a:noFill/>
-          </a:ln>
-        </p:spPr>
-        <p:style>
-          <a:lnRef idx="1">
-            <a:schemeClr val="accent1"/>
-          </a:lnRef>
-          <a:fillRef idx="3">
-            <a:schemeClr val="accent1"/>
-          </a:fillRef>
-          <a:effectRef idx="2">
-            <a:schemeClr val="accent1"/>
-          </a:effectRef>
-          <a:fontRef idx="minor">
-            <a:schemeClr val="lt1"/>
-          </a:fontRef>
-        </p:style>
-        <p:txBody>
-          <a:bodyPr rtlCol="0" anchor="ctr"/>
-          <a:lstStyle/>
-          <a:p>
-            <a:pPr algn="ctr"/>
-          </a:p>
-        </p:txBody>
-      </p:sp>
-      <p:sp>
-        <p:nvSpPr>
-          <p:cNvPr id="23" name="TextBox 22"/>
-          <p:cNvSpPr txBox="1"/>
-          <p:nvPr/>
-        </p:nvSpPr>
-        <p:spPr>
-          <a:xfrm>
-            <a:off x="457200" y="6537960"/>
-            <a:ext cx="8229600" cy="320040"/>
-          </a:xfrm>
-          <a:prstGeom prst="rect">
-            <a:avLst/>
-          </a:prstGeom>
-          <a:noFill/>
-        </p:spPr>
-        <p:txBody>
-          <a:bodyPr wrap="square" anchor="ctr"/>
-          <a:lstStyle/>
-          <a:p>
-            <a:pPr algn="l">
-              <a:spcAft>
-                <a:spcPts val="200"/>
-              </a:spcAft>
-            </a:pPr>
-            <a:r>
-              <a:rPr sz="900" b="0">
-                <a:solidFill>
-                  <a:srgbClr val="898989"/>
-                </a:solidFill>
-                <a:latin typeface="Microsoft YaHei"/>
-                <a:ea typeface="Microsoft YaHei"/>
-                <a:cs typeface="Microsoft YaHei"/>
-              </a:rPr>
-              <a:t>华为  ·  AI 物理感知平台  ·  表征    |    Security Level: Internal</a:t>
-            </a:r>
-          </a:p>
-        </p:txBody>
-      </p:sp>
-      <p:sp>
-        <p:nvSpPr>
-          <p:cNvPr id="24" name="TextBox 23"/>
+              <a:t>华为  ·  AI 物理感知平台  ·  分类    |    Security Level: Internal</a:t>
+            </a:r>
+          </a:p>
+        </p:txBody>
+      </p:sp>
+      <p:sp>
+        <p:nvSpPr>
+          <p:cNvPr id="17" name="TextBox 16"/>
           <p:cNvSpPr txBox="1"/>
           <p:nvPr/>
         </p:nvSpPr>
@@ -12108,7 +11679,7 @@
                 <a:ea typeface="Microsoft YaHei"/>
                 <a:cs typeface="Microsoft YaHei"/>
               </a:rPr>
-              <a:t>5  预测</a:t>
+              <a:t>5  代际演进</a:t>
             </a:r>
           </a:p>
         </p:txBody>
@@ -12147,7 +11718,7 @@
                 <a:ea typeface="Microsoft YaHei"/>
                 <a:cs typeface="Microsoft YaHei"/>
               </a:rPr>
-              <a:t>decode() 非自回归：整段 context+horizon 只走一遍</a:t>
+              <a:t>Gen1 零样本 → Gen2 指令微调 → Gen3 端侧</a:t>
             </a:r>
           </a:p>
         </p:txBody>
@@ -12229,7 +11800,7 @@
                 <a:ea typeface="Microsoft YaHei"/>
                 <a:cs typeface="Microsoft YaHei"/>
               </a:rPr>
-              <a:t>TimesFM3Torch.decode() → forward() → TimesFM3Forecaster.predict_batch()。</a:t>
+              <a:t>接口不变，底座与能力逐代升级。</a:t>
             </a:r>
           </a:p>
         </p:txBody>
@@ -12242,8 +11813,8 @@
         </p:nvSpPr>
         <p:spPr>
           <a:xfrm>
-            <a:off x="457200" y="1371600"/>
-            <a:ext cx="5623560" cy="1298448"/>
+            <a:off x="411480" y="1417320"/>
+            <a:ext cx="2788920" cy="3566160"/>
           </a:xfrm>
           <a:prstGeom prst="roundRect">
             <a:avLst>
@@ -12283,14 +11854,57 @@
       </p:sp>
       <p:sp>
         <p:nvSpPr>
-          <p:cNvPr id="8" name="TextBox 7"/>
+          <p:cNvPr id="8" name="Rectangle 7"/>
+          <p:cNvSpPr/>
+          <p:nvPr/>
+        </p:nvSpPr>
+        <p:spPr>
+          <a:xfrm>
+            <a:off x="411480" y="1417320"/>
+            <a:ext cx="2788920" cy="73152"/>
+          </a:xfrm>
+          <a:prstGeom prst="rect">
+            <a:avLst/>
+          </a:prstGeom>
+          <a:solidFill>
+            <a:srgbClr val="C7000B"/>
+          </a:solidFill>
+          <a:ln>
+            <a:noFill/>
+          </a:ln>
+        </p:spPr>
+        <p:style>
+          <a:lnRef idx="1">
+            <a:schemeClr val="accent1"/>
+          </a:lnRef>
+          <a:fillRef idx="3">
+            <a:schemeClr val="accent1"/>
+          </a:fillRef>
+          <a:effectRef idx="2">
+            <a:schemeClr val="accent1"/>
+          </a:effectRef>
+          <a:fontRef idx="minor">
+            <a:schemeClr val="lt1"/>
+          </a:fontRef>
+        </p:style>
+        <p:txBody>
+          <a:bodyPr rtlCol="0" anchor="ctr"/>
+          <a:lstStyle/>
+          <a:p>
+            <a:pPr algn="ctr"/>
+          </a:p>
+        </p:txBody>
+      </p:sp>
+      <p:sp>
+        <p:nvSpPr>
+          <p:cNvPr id="9" name="TextBox 8"/>
           <p:cNvSpPr txBox="1"/>
           <p:nvPr/>
         </p:nvSpPr>
         <p:spPr>
           <a:xfrm>
-            <a:off x="658368" y="1508760"/>
-            <a:ext cx="5212080" cy="320040"/>
+            <a:off x="548640" y="1645920"/>
+            <a:ext cx="2514600" cy="365760"/>
           </a:xfrm>
           <a:prstGeom prst="rect">
             <a:avLst/>
@@ -12315,21 +11929,21 @@
                 <a:ea typeface="Microsoft YaHei"/>
                 <a:cs typeface="Microsoft YaHei"/>
               </a:rPr>
-              <a:t>输出头</a:t>
-            </a:r>
-          </a:p>
-        </p:txBody>
-      </p:sp>
-      <p:sp>
-        <p:nvSpPr>
-          <p:cNvPr id="9" name="TextBox 8"/>
+              <a:t>Gen1  零样本基线</a:t>
+            </a:r>
+          </a:p>
+        </p:txBody>
+      </p:sp>
+      <p:sp>
+        <p:nvSpPr>
+          <p:cNvPr id="10" name="TextBox 9"/>
           <p:cNvSpPr txBox="1"/>
           <p:nvPr/>
         </p:nvSpPr>
         <p:spPr>
           <a:xfrm>
-            <a:off x="658368" y="1874520"/>
-            <a:ext cx="5212080" cy="685800"/>
+            <a:off x="548640" y="2148840"/>
+            <a:ext cx="2514600" cy="2651760"/>
           </a:xfrm>
           <a:prstGeom prst="rect">
             <a:avLst/>
@@ -12354,21 +11968,57 @@
                 <a:ea typeface="Microsoft YaHei"/>
                 <a:cs typeface="Microsoft YaHei"/>
               </a:rPr>
-              <a:t>Linear(1280 → 64×9)。每个输入 patch 预测未来 64 步、9 个分位数。</a:t>
-            </a:r>
-          </a:p>
-        </p:txBody>
-      </p:sp>
-      <p:sp>
-        <p:nvSpPr>
-          <p:cNvPr id="10" name="Rounded Rectangle 9"/>
+              <a:t>TimesFM-3 + UniTS/MOMENT + LIMU-BERT-X</a:t>
+            </a:r>
+          </a:p>
+          <a:p>
+            <a:pPr algn="l">
+              <a:spcAft>
+                <a:spcPts val="200"/>
+              </a:spcAft>
+            </a:pPr>
+            <a:r>
+              <a:rPr sz="1300" b="0">
+                <a:solidFill>
+                  <a:srgbClr val="555757"/>
+                </a:solidFill>
+                <a:latin typeface="Microsoft YaHei"/>
+                <a:ea typeface="Microsoft YaHei"/>
+                <a:cs typeface="Microsoft YaHei"/>
+              </a:rPr>
+              <a:t>predict 零样本；classify 规则 / LoRA</a:t>
+            </a:r>
+          </a:p>
+          <a:p>
+            <a:pPr algn="l">
+              <a:spcAft>
+                <a:spcPts val="200"/>
+              </a:spcAft>
+            </a:pPr>
+            <a:r>
+              <a:rPr sz="1300" b="0">
+                <a:solidFill>
+                  <a:srgbClr val="555757"/>
+                </a:solidFill>
+                <a:latin typeface="Microsoft YaHei"/>
+                <a:ea typeface="Microsoft YaHei"/>
+                <a:cs typeface="Microsoft YaHei"/>
+              </a:rPr>
+              <a:t>评测：MAE + 覆盖率 + macro-F1</a:t>
+            </a:r>
+          </a:p>
+        </p:txBody>
+      </p:sp>
+      <p:sp>
+        <p:nvSpPr>
+          <p:cNvPr id="11" name="Rounded Rectangle 10"/>
           <p:cNvSpPr/>
           <p:nvPr/>
         </p:nvSpPr>
         <p:spPr>
           <a:xfrm>
-            <a:off x="6263640" y="1371600"/>
-            <a:ext cx="5623560" cy="1298448"/>
+            <a:off x="3337560" y="1417320"/>
+            <a:ext cx="2788920" cy="3566160"/>
           </a:xfrm>
           <a:prstGeom prst="roundRect">
             <a:avLst>
@@ -12408,14 +12058,57 @@
       </p:sp>
       <p:sp>
         <p:nvSpPr>
-          <p:cNvPr id="11" name="TextBox 10"/>
+          <p:cNvPr id="12" name="Rectangle 11"/>
+          <p:cNvSpPr/>
+          <p:nvPr/>
+        </p:nvSpPr>
+        <p:spPr>
+          <a:xfrm>
+            <a:off x="3337560" y="1417320"/>
+            <a:ext cx="2788920" cy="73152"/>
+          </a:xfrm>
+          <a:prstGeom prst="rect">
+            <a:avLst/>
+          </a:prstGeom>
+          <a:solidFill>
+            <a:srgbClr val="ED6D00"/>
+          </a:solidFill>
+          <a:ln>
+            <a:noFill/>
+          </a:ln>
+        </p:spPr>
+        <p:style>
+          <a:lnRef idx="1">
+            <a:schemeClr val="accent1"/>
+          </a:lnRef>
+          <a:fillRef idx="3">
+            <a:schemeClr val="accent1"/>
+          </a:fillRef>
+          <a:effectRef idx="2">
+            <a:schemeClr val="accent1"/>
+          </a:effectRef>
+          <a:fontRef idx="minor">
+            <a:schemeClr val="lt1"/>
+          </a:fontRef>
+        </p:style>
+        <p:txBody>
+          <a:bodyPr rtlCol="0" anchor="ctr"/>
+          <a:lstStyle/>
+          <a:p>
+            <a:pPr algn="ctr"/>
+          </a:p>
+        </p:txBody>
+      </p:sp>
+      <p:sp>
+        <p:nvSpPr>
+          <p:cNvPr id="13" name="TextBox 12"/>
           <p:cNvSpPr txBox="1"/>
           <p:nvPr/>
         </p:nvSpPr>
         <p:spPr>
           <a:xfrm>
-            <a:off x="6464808" y="1508760"/>
-            <a:ext cx="5212080" cy="320040"/>
+            <a:off x="3474720" y="1645920"/>
+            <a:ext cx="2514600" cy="365760"/>
           </a:xfrm>
           <a:prstGeom prst="rect">
             <a:avLst/>
@@ -12434,27 +12127,27 @@
             <a:r>
               <a:rPr sz="1600" b="1">
                 <a:solidFill>
-                  <a:srgbClr val="C7000B"/>
+                  <a:srgbClr val="ED6D00"/>
                 </a:solidFill>
                 <a:latin typeface="Microsoft YaHei"/>
                 <a:ea typeface="Microsoft YaHei"/>
                 <a:cs typeface="Microsoft YaHei"/>
               </a:rPr>
-              <a:t>CPM</a:t>
-            </a:r>
-          </a:p>
-        </p:txBody>
-      </p:sp>
-      <p:sp>
-        <p:nvSpPr>
-          <p:cNvPr id="12" name="TextBox 11"/>
+              <a:t>Gen2  指令微调</a:t>
+            </a:r>
+          </a:p>
+        </p:txBody>
+      </p:sp>
+      <p:sp>
+        <p:nvSpPr>
+          <p:cNvPr id="14" name="TextBox 13"/>
           <p:cNvSpPr txBox="1"/>
           <p:nvPr/>
         </p:nvSpPr>
         <p:spPr>
           <a:xfrm>
-            <a:off x="6464808" y="1874520"/>
-            <a:ext cx="5212080" cy="685800"/>
+            <a:off x="3474720" y="2148840"/>
+            <a:ext cx="2514600" cy="2651760"/>
           </a:xfrm>
           <a:prstGeom prst="rect">
             <a:avLst/>
@@ -12479,21 +12172,57 @@
                 <a:ea typeface="Microsoft YaHei"/>
                 <a:cs typeface="Microsoft YaHei"/>
               </a:rPr>
-              <a:t>horizon 目标 patch 先 mask。用上下文统计量做 RevIN，并可迭代用模型估计修正。</a:t>
-            </a:r>
-          </a:p>
-        </p:txBody>
-      </p:sp>
-      <p:sp>
-        <p:nvSpPr>
-          <p:cNvPr id="13" name="Rounded Rectangle 12"/>
+              <a:t>物理指令数据集：预测 / 分类 / 异常统一 prompt</a:t>
+            </a:r>
+          </a:p>
+          <a:p>
+            <a:pPr algn="l">
+              <a:spcAft>
+                <a:spcPts val="200"/>
+              </a:spcAft>
+            </a:pPr>
+            <a:r>
+              <a:rPr sz="1300" b="0">
+                <a:solidFill>
+                  <a:srgbClr val="555757"/>
+                </a:solidFill>
+                <a:latin typeface="Microsoft YaHei"/>
+                <a:ea typeface="Microsoft YaHei"/>
+                <a:cs typeface="Microsoft YaHei"/>
+              </a:rPr>
+              <a:t>底座自研，摆脱 3.0 NC 权重</a:t>
+            </a:r>
+          </a:p>
+          <a:p>
+            <a:pPr algn="l">
+              <a:spcAft>
+                <a:spcPts val="200"/>
+              </a:spcAft>
+            </a:pPr>
+            <a:r>
+              <a:rPr sz="1300" b="0">
+                <a:solidFill>
+                  <a:srgbClr val="555757"/>
+                </a:solidFill>
+                <a:latin typeface="Microsoft YaHei"/>
+                <a:ea typeface="Microsoft YaHei"/>
+                <a:cs typeface="Microsoft YaHei"/>
+              </a:rPr>
+              <a:t>评测：zero-shot → few-shot → full-shot</a:t>
+            </a:r>
+          </a:p>
+        </p:txBody>
+      </p:sp>
+      <p:sp>
+        <p:nvSpPr>
+          <p:cNvPr id="15" name="Rounded Rectangle 14"/>
           <p:cNvSpPr/>
           <p:nvPr/>
         </p:nvSpPr>
         <p:spPr>
           <a:xfrm>
-            <a:off x="457200" y="2788920"/>
-            <a:ext cx="5623560" cy="1298448"/>
+            <a:off x="6263640" y="1417320"/>
+            <a:ext cx="2788920" cy="3566160"/>
           </a:xfrm>
           <a:prstGeom prst="roundRect">
             <a:avLst>
@@ -12533,14 +12262,57 @@
       </p:sp>
       <p:sp>
         <p:nvSpPr>
-          <p:cNvPr id="14" name="TextBox 13"/>
+          <p:cNvPr id="16" name="Rectangle 15"/>
+          <p:cNvSpPr/>
+          <p:nvPr/>
+        </p:nvSpPr>
+        <p:spPr>
+          <a:xfrm>
+            <a:off x="6263640" y="1417320"/>
+            <a:ext cx="2788920" cy="73152"/>
+          </a:xfrm>
+          <a:prstGeom prst="rect">
+            <a:avLst/>
+          </a:prstGeom>
+          <a:solidFill>
+            <a:srgbClr val="30B5C5"/>
+          </a:solidFill>
+          <a:ln>
+            <a:noFill/>
+          </a:ln>
+        </p:spPr>
+        <p:style>
+          <a:lnRef idx="1">
+            <a:schemeClr val="accent1"/>
+          </a:lnRef>
+          <a:fillRef idx="3">
+            <a:schemeClr val="accent1"/>
+          </a:fillRef>
+          <a:effectRef idx="2">
+            <a:schemeClr val="accent1"/>
+          </a:effectRef>
+          <a:fontRef idx="minor">
+            <a:schemeClr val="lt1"/>
+          </a:fontRef>
+        </p:style>
+        <p:txBody>
+          <a:bodyPr rtlCol="0" anchor="ctr"/>
+          <a:lstStyle/>
+          <a:p>
+            <a:pPr algn="ctr"/>
+          </a:p>
+        </p:txBody>
+      </p:sp>
+      <p:sp>
+        <p:nvSpPr>
+          <p:cNvPr id="17" name="TextBox 16"/>
           <p:cNvSpPr txBox="1"/>
           <p:nvPr/>
         </p:nvSpPr>
         <p:spPr>
           <a:xfrm>
-            <a:off x="658368" y="2926080"/>
-            <a:ext cx="5212080" cy="320040"/>
+            <a:off x="6400800" y="1645920"/>
+            <a:ext cx="2514600" cy="365760"/>
           </a:xfrm>
           <a:prstGeom prst="rect">
             <a:avLst/>
@@ -12559,27 +12331,27 @@
             <a:r>
               <a:rPr sz="1600" b="1">
                 <a:solidFill>
-                  <a:srgbClr val="C7000B"/>
+                  <a:srgbClr val="30B5C5"/>
                 </a:solidFill>
                 <a:latin typeface="Microsoft YaHei"/>
                 <a:ea typeface="Microsoft YaHei"/>
                 <a:cs typeface="Microsoft YaHei"/>
               </a:rPr>
-              <a:t>逆变换</a:t>
-            </a:r>
-          </a:p>
-        </p:txBody>
-      </p:sp>
-      <p:sp>
-        <p:nvSpPr>
-          <p:cNvPr id="15" name="TextBox 14"/>
+              <a:t>Gen3  端侧物理</a:t>
+            </a:r>
+          </a:p>
+        </p:txBody>
+      </p:sp>
+      <p:sp>
+        <p:nvSpPr>
+          <p:cNvPr id="18" name="TextBox 17"/>
           <p:cNvSpPr txBox="1"/>
           <p:nvPr/>
         </p:nvSpPr>
         <p:spPr>
           <a:xfrm>
-            <a:off x="658368" y="3291840"/>
-            <a:ext cx="5212080" cy="685800"/>
+            <a:off x="6400800" y="2148840"/>
+            <a:ext cx="2514600" cy="2651760"/>
           </a:xfrm>
           <a:prstGeom prst="rect">
             <a:avLst/>
@@ -12604,21 +12376,57 @@
                 <a:ea typeface="Microsoft YaHei"/>
                 <a:cs typeface="Microsoft YaHei"/>
               </a:rPr>
-              <a:t>分位数在 RevIN 空间；逆归一化后再加回去趋势。</a:t>
-            </a:r>
-          </a:p>
-        </p:txBody>
-      </p:sp>
-      <p:sp>
-        <p:nvSpPr>
-          <p:cNvPr id="16" name="Rounded Rectangle 15"/>
+              <a:t>LIMU-BERT-X 式端侧初始化 + 量化</a:t>
+            </a:r>
+          </a:p>
+          <a:p>
+            <a:pPr algn="l">
+              <a:spcAft>
+                <a:spcPts val="200"/>
+              </a:spcAft>
+            </a:pPr>
+            <a:r>
+              <a:rPr sz="1300" b="0">
+                <a:solidFill>
+                  <a:srgbClr val="555757"/>
+                </a:solidFill>
+                <a:latin typeface="Microsoft YaHei"/>
+                <a:ea typeface="Microsoft YaHei"/>
+                <a:cs typeface="Microsoft YaHei"/>
+              </a:rPr>
+              <a:t>predict/classify 在设备闭环</a:t>
+            </a:r>
+          </a:p>
+          <a:p>
+            <a:pPr algn="l">
+              <a:spcAft>
+                <a:spcPts val="200"/>
+              </a:spcAft>
+            </a:pPr>
+            <a:r>
+              <a:rPr sz="1300" b="0">
+                <a:solidFill>
+                  <a:srgbClr val="555757"/>
+                </a:solidFill>
+                <a:latin typeface="Microsoft YaHei"/>
+                <a:ea typeface="Microsoft YaHei"/>
+                <a:cs typeface="Microsoft YaHei"/>
+              </a:rPr>
+              <a:t>评测：延迟 + 功耗 + 精度</a:t>
+            </a:r>
+          </a:p>
+        </p:txBody>
+      </p:sp>
+      <p:sp>
+        <p:nvSpPr>
+          <p:cNvPr id="19" name="Rounded Rectangle 18"/>
           <p:cNvSpPr/>
           <p:nvPr/>
         </p:nvSpPr>
         <p:spPr>
           <a:xfrm>
-            <a:off x="6263640" y="2788920"/>
-            <a:ext cx="5623560" cy="1298448"/>
+            <a:off x="457200" y="5120640"/>
+            <a:ext cx="11247120" cy="822960"/>
           </a:xfrm>
           <a:prstGeom prst="roundRect">
             <a:avLst>
@@ -12626,7 +12434,7 @@
             </a:avLst>
           </a:prstGeom>
           <a:solidFill>
-            <a:srgbClr val="FFFFFF"/>
+            <a:srgbClr val="F7F7F7"/>
           </a:solidFill>
           <a:ln w="9525">
             <a:solidFill>
@@ -12658,14 +12466,14 @@
       </p:sp>
       <p:sp>
         <p:nvSpPr>
-          <p:cNvPr id="17" name="TextBox 16"/>
+          <p:cNvPr id="20" name="TextBox 19"/>
           <p:cNvSpPr txBox="1"/>
           <p:nvPr/>
         </p:nvSpPr>
         <p:spPr>
           <a:xfrm>
-            <a:off x="6464808" y="2926080"/>
-            <a:ext cx="5212080" cy="320040"/>
+            <a:off x="640080" y="5257800"/>
+            <a:ext cx="10881360" cy="548640"/>
           </a:xfrm>
           <a:prstGeom prst="rect">
             <a:avLst/>
@@ -12682,7 +12490,7 @@
               </a:spcAft>
             </a:pPr>
             <a:r>
-              <a:rPr sz="1600" b="1">
+              <a:rPr sz="1400" b="1">
                 <a:solidFill>
                   <a:srgbClr val="C7000B"/>
                 </a:solidFill>
@@ -12690,21 +12498,64 @@
                 <a:ea typeface="Microsoft YaHei"/>
                 <a:cs typeface="Microsoft YaHei"/>
               </a:rPr>
-              <a:t>Stitching</a:t>
-            </a:r>
-          </a:p>
-        </p:txBody>
-      </p:sp>
-      <p:sp>
-        <p:nvSpPr>
-          <p:cNvPr id="18" name="TextBox 17"/>
+              <a:t>演进原则：接口（Ingest / predict / classify）向下兼容；底座、权重、头可独立替换。</a:t>
+            </a:r>
+          </a:p>
+        </p:txBody>
+      </p:sp>
+      <p:sp>
+        <p:nvSpPr>
+          <p:cNvPr id="21" name="Rectangle 20"/>
+          <p:cNvSpPr/>
+          <p:nvPr/>
+        </p:nvSpPr>
+        <p:spPr>
+          <a:xfrm>
+            <a:off x="0" y="6537960"/>
+            <a:ext cx="12191695" cy="320040"/>
+          </a:xfrm>
+          <a:prstGeom prst="rect">
+            <a:avLst/>
+          </a:prstGeom>
+          <a:solidFill>
+            <a:srgbClr val="F2F2F2"/>
+          </a:solidFill>
+          <a:ln>
+            <a:noFill/>
+          </a:ln>
+        </p:spPr>
+        <p:style>
+          <a:lnRef idx="1">
+            <a:schemeClr val="accent1"/>
+          </a:lnRef>
+          <a:fillRef idx="3">
+            <a:schemeClr val="accent1"/>
+          </a:fillRef>
+          <a:effectRef idx="2">
+            <a:schemeClr val="accent1"/>
+          </a:effectRef>
+          <a:fontRef idx="minor">
+            <a:schemeClr val="lt1"/>
+          </a:fontRef>
+        </p:style>
+        <p:txBody>
+          <a:bodyPr rtlCol="0" anchor="ctr"/>
+          <a:lstStyle/>
+          <a:p>
+            <a:pPr algn="ctr"/>
+          </a:p>
+        </p:txBody>
+      </p:sp>
+      <p:sp>
+        <p:nvSpPr>
+          <p:cNvPr id="22" name="TextBox 21"/>
           <p:cNvSpPr txBox="1"/>
           <p:nvPr/>
         </p:nvSpPr>
         <p:spPr>
           <a:xfrm>
-            <a:off x="6464808" y="3291840"/>
-            <a:ext cx="5212080" cy="685800"/>
+            <a:off x="457200" y="6537960"/>
+            <a:ext cx="8229600" cy="320040"/>
           </a:xfrm>
           <a:prstGeom prst="rect">
             <a:avLst/>
@@ -12712,7 +12563,7 @@
           <a:noFill/>
         </p:spPr>
         <p:txBody>
-          <a:bodyPr wrap="square" anchor="t"/>
+          <a:bodyPr wrap="square" anchor="ctr"/>
           <a:lstStyle/>
           <a:p>
             <a:pPr algn="l">
@@ -12721,354 +12572,22 @@
               </a:spcAft>
             </a:pPr>
             <a:r>
-              <a:rPr sz="1300" b="0">
-                <a:solidFill>
-                  <a:srgbClr val="555757"/>
+              <a:rPr sz="900" b="0">
+                <a:solidFill>
+                  <a:srgbClr val="898989"/>
                 </a:solidFill>
                 <a:latin typeface="Microsoft YaHei"/>
                 <a:ea typeface="Microsoft YaHei"/>
                 <a:cs typeface="Microsoft YaHei"/>
               </a:rPr>
-              <a:t>相邻窗口重叠 32 点，拼出任意 horizon（可超过 64）。</a:t>
-            </a:r>
-          </a:p>
-        </p:txBody>
-      </p:sp>
-      <p:sp>
-        <p:nvSpPr>
-          <p:cNvPr id="19" name="Rounded Rectangle 18"/>
-          <p:cNvSpPr/>
-          <p:nvPr/>
-        </p:nvSpPr>
-        <p:spPr>
-          <a:xfrm>
-            <a:off x="457200" y="4206240"/>
-            <a:ext cx="5623560" cy="1298448"/>
-          </a:xfrm>
-          <a:prstGeom prst="roundRect">
-            <a:avLst>
-              <a:gd name="adj" fmla="val 5000"/>
-            </a:avLst>
-          </a:prstGeom>
-          <a:solidFill>
-            <a:srgbClr val="FFFFFF"/>
-          </a:solidFill>
-          <a:ln w="9525">
-            <a:solidFill>
-              <a:srgbClr val="DDDDDD"/>
-            </a:solidFill>
-          </a:ln>
-        </p:spPr>
-        <p:style>
-          <a:lnRef idx="1">
-            <a:schemeClr val="accent1"/>
-          </a:lnRef>
-          <a:fillRef idx="3">
-            <a:schemeClr val="accent1"/>
-          </a:fillRef>
-          <a:effectRef idx="2">
-            <a:schemeClr val="accent1"/>
-          </a:effectRef>
-          <a:fontRef idx="minor">
-            <a:schemeClr val="lt1"/>
-          </a:fontRef>
-        </p:style>
-        <p:txBody>
-          <a:bodyPr rtlCol="0" anchor="ctr"/>
-          <a:lstStyle/>
-          <a:p>
-            <a:pPr algn="ctr"/>
-          </a:p>
-        </p:txBody>
-      </p:sp>
-      <p:sp>
-        <p:nvSpPr>
-          <p:cNvPr id="20" name="TextBox 19"/>
-          <p:cNvSpPr txBox="1"/>
-          <p:nvPr/>
-        </p:nvSpPr>
-        <p:spPr>
-          <a:xfrm>
-            <a:off x="658368" y="4343400"/>
-            <a:ext cx="5212080" cy="320040"/>
-          </a:xfrm>
-          <a:prstGeom prst="rect">
-            <a:avLst/>
-          </a:prstGeom>
-          <a:noFill/>
-        </p:spPr>
-        <p:txBody>
-          <a:bodyPr wrap="square" anchor="t"/>
-          <a:lstStyle/>
-          <a:p>
-            <a:pPr algn="l">
-              <a:spcAft>
-                <a:spcPts val="200"/>
-              </a:spcAft>
-            </a:pPr>
-            <a:r>
-              <a:rPr sz="1600" b="1">
-                <a:solidFill>
-                  <a:srgbClr val="C7000B"/>
-                </a:solidFill>
-                <a:latin typeface="Microsoft YaHei"/>
-                <a:ea typeface="Microsoft YaHei"/>
-                <a:cs typeface="Microsoft YaHei"/>
-              </a:rPr>
-              <a:t>读出</a:t>
-            </a:r>
-          </a:p>
-        </p:txBody>
-      </p:sp>
-      <p:sp>
-        <p:nvSpPr>
-          <p:cNvPr id="21" name="TextBox 20"/>
-          <p:cNvSpPr txBox="1"/>
-          <p:nvPr/>
-        </p:nvSpPr>
-        <p:spPr>
-          <a:xfrm>
-            <a:off x="658368" y="4709160"/>
-            <a:ext cx="5212080" cy="685800"/>
-          </a:xfrm>
-          <a:prstGeom prst="rect">
-            <a:avLst/>
-          </a:prstGeom>
-          <a:noFill/>
-        </p:spPr>
-        <p:txBody>
-          <a:bodyPr wrap="square" anchor="t"/>
-          <a:lstStyle/>
-          <a:p>
-            <a:pPr algn="l">
-              <a:spcAft>
-                <a:spcPts val="200"/>
-              </a:spcAft>
-            </a:pPr>
-            <a:r>
-              <a:rPr sz="1300" b="0">
-                <a:solidFill>
-                  <a:srgbClr val="555757"/>
-                </a:solidFill>
-                <a:latin typeface="Microsoft YaHei"/>
-                <a:ea typeface="Microsoft YaHei"/>
-                <a:cs typeface="Microsoft YaHei"/>
-              </a:rPr>
-              <a:t>点预测：quantiles[..., 4]（0.5）。概率：9 条分位轨迹，做区间与校准。</a:t>
-            </a:r>
-          </a:p>
-        </p:txBody>
-      </p:sp>
-      <p:sp>
-        <p:nvSpPr>
-          <p:cNvPr id="22" name="Rounded Rectangle 21"/>
-          <p:cNvSpPr/>
-          <p:nvPr/>
-        </p:nvSpPr>
-        <p:spPr>
-          <a:xfrm>
-            <a:off x="6263640" y="4206240"/>
-            <a:ext cx="5623560" cy="1298448"/>
-          </a:xfrm>
-          <a:prstGeom prst="roundRect">
-            <a:avLst>
-              <a:gd name="adj" fmla="val 5000"/>
-            </a:avLst>
-          </a:prstGeom>
-          <a:solidFill>
-            <a:srgbClr val="FFFFFF"/>
-          </a:solidFill>
-          <a:ln w="9525">
-            <a:solidFill>
-              <a:srgbClr val="DDDDDD"/>
-            </a:solidFill>
-          </a:ln>
-        </p:spPr>
-        <p:style>
-          <a:lnRef idx="1">
-            <a:schemeClr val="accent1"/>
-          </a:lnRef>
-          <a:fillRef idx="3">
-            <a:schemeClr val="accent1"/>
-          </a:fillRef>
-          <a:effectRef idx="2">
-            <a:schemeClr val="accent1"/>
-          </a:effectRef>
-          <a:fontRef idx="minor">
-            <a:schemeClr val="lt1"/>
-          </a:fontRef>
-        </p:style>
-        <p:txBody>
-          <a:bodyPr rtlCol="0" anchor="ctr"/>
-          <a:lstStyle/>
-          <a:p>
-            <a:pPr algn="ctr"/>
+              <a:t>华为  ·  AI 物理感知平台  ·  代际演进    |    Security Level: Internal</a:t>
+            </a:r>
           </a:p>
         </p:txBody>
       </p:sp>
       <p:sp>
         <p:nvSpPr>
           <p:cNvPr id="23" name="TextBox 22"/>
-          <p:cNvSpPr txBox="1"/>
-          <p:nvPr/>
-        </p:nvSpPr>
-        <p:spPr>
-          <a:xfrm>
-            <a:off x="6464808" y="4343400"/>
-            <a:ext cx="5212080" cy="320040"/>
-          </a:xfrm>
-          <a:prstGeom prst="rect">
-            <a:avLst/>
-          </a:prstGeom>
-          <a:noFill/>
-        </p:spPr>
-        <p:txBody>
-          <a:bodyPr wrap="square" anchor="t"/>
-          <a:lstStyle/>
-          <a:p>
-            <a:pPr algn="l">
-              <a:spcAft>
-                <a:spcPts val="200"/>
-              </a:spcAft>
-            </a:pPr>
-            <a:r>
-              <a:rPr sz="1600" b="1">
-                <a:solidFill>
-                  <a:srgbClr val="C7000B"/>
-                </a:solidFill>
-                <a:latin typeface="Microsoft YaHei"/>
-                <a:ea typeface="Microsoft YaHei"/>
-                <a:cs typeface="Microsoft YaHei"/>
-              </a:rPr>
-              <a:t>Eval</a:t>
-            </a:r>
-          </a:p>
-        </p:txBody>
-      </p:sp>
-      <p:sp>
-        <p:nvSpPr>
-          <p:cNvPr id="24" name="TextBox 23"/>
-          <p:cNvSpPr txBox="1"/>
-          <p:nvPr/>
-        </p:nvSpPr>
-        <p:spPr>
-          <a:xfrm>
-            <a:off x="6464808" y="4709160"/>
-            <a:ext cx="5212080" cy="685800"/>
-          </a:xfrm>
-          <a:prstGeom prst="rect">
-            <a:avLst/>
-          </a:prstGeom>
-          <a:noFill/>
-        </p:spPr>
-        <p:txBody>
-          <a:bodyPr wrap="square" anchor="t"/>
-          <a:lstStyle/>
-          <a:p>
-            <a:pPr algn="l">
-              <a:spcAft>
-                <a:spcPts val="200"/>
-              </a:spcAft>
-            </a:pPr>
-            <a:r>
-              <a:rPr sz="1300" b="0">
-                <a:solidFill>
-                  <a:srgbClr val="555757"/>
-                </a:solidFill>
-                <a:latin typeface="Microsoft YaHei"/>
-                <a:ea typeface="Microsoft YaHei"/>
-                <a:cs typeface="Microsoft YaHei"/>
-              </a:rPr>
-              <a:t>点预测 MAE；q10–q90 覆盖率。对照 TimesFM-3 单变量 / 多变量两种模式。</a:t>
-            </a:r>
-          </a:p>
-        </p:txBody>
-      </p:sp>
-      <p:sp>
-        <p:nvSpPr>
-          <p:cNvPr id="25" name="Rectangle 24"/>
-          <p:cNvSpPr/>
-          <p:nvPr/>
-        </p:nvSpPr>
-        <p:spPr>
-          <a:xfrm>
-            <a:off x="0" y="6537960"/>
-            <a:ext cx="12191695" cy="320040"/>
-          </a:xfrm>
-          <a:prstGeom prst="rect">
-            <a:avLst/>
-          </a:prstGeom>
-          <a:solidFill>
-            <a:srgbClr val="F2F2F2"/>
-          </a:solidFill>
-          <a:ln>
-            <a:noFill/>
-          </a:ln>
-        </p:spPr>
-        <p:style>
-          <a:lnRef idx="1">
-            <a:schemeClr val="accent1"/>
-          </a:lnRef>
-          <a:fillRef idx="3">
-            <a:schemeClr val="accent1"/>
-          </a:fillRef>
-          <a:effectRef idx="2">
-            <a:schemeClr val="accent1"/>
-          </a:effectRef>
-          <a:fontRef idx="minor">
-            <a:schemeClr val="lt1"/>
-          </a:fontRef>
-        </p:style>
-        <p:txBody>
-          <a:bodyPr rtlCol="0" anchor="ctr"/>
-          <a:lstStyle/>
-          <a:p>
-            <a:pPr algn="ctr"/>
-          </a:p>
-        </p:txBody>
-      </p:sp>
-      <p:sp>
-        <p:nvSpPr>
-          <p:cNvPr id="26" name="TextBox 25"/>
-          <p:cNvSpPr txBox="1"/>
-          <p:nvPr/>
-        </p:nvSpPr>
-        <p:spPr>
-          <a:xfrm>
-            <a:off x="457200" y="6537960"/>
-            <a:ext cx="8229600" cy="320040"/>
-          </a:xfrm>
-          <a:prstGeom prst="rect">
-            <a:avLst/>
-          </a:prstGeom>
-          <a:noFill/>
-        </p:spPr>
-        <p:txBody>
-          <a:bodyPr wrap="square" anchor="ctr"/>
-          <a:lstStyle/>
-          <a:p>
-            <a:pPr algn="l">
-              <a:spcAft>
-                <a:spcPts val="200"/>
-              </a:spcAft>
-            </a:pPr>
-            <a:r>
-              <a:rPr sz="900" b="0">
-                <a:solidFill>
-                  <a:srgbClr val="898989"/>
-                </a:solidFill>
-                <a:latin typeface="Microsoft YaHei"/>
-                <a:ea typeface="Microsoft YaHei"/>
-                <a:cs typeface="Microsoft YaHei"/>
-              </a:rPr>
-              <a:t>华为  ·  AI 物理感知平台  ·  预测    |    Security Level: Internal</a:t>
-            </a:r>
-          </a:p>
-        </p:txBody>
-      </p:sp>
-      <p:sp>
-        <p:nvSpPr>
-          <p:cNvPr id="27" name="TextBox 26"/>
           <p:cNvSpPr txBox="1"/>
           <p:nvPr/>
         </p:nvSpPr>
@@ -13200,7 +12719,7 @@
                 <a:ea typeface="Microsoft YaHei"/>
                 <a:cs typeface="Microsoft YaHei"/>
               </a:rPr>
-              <a:t>6  分类</a:t>
+              <a:t>6  评测与许可</a:t>
             </a:r>
           </a:p>
         </p:txBody>
@@ -13239,7 +12758,7 @@
                 <a:ea typeface="Microsoft YaHei"/>
                 <a:cs typeface="Microsoft YaHei"/>
               </a:rPr>
-              <a:t>分类不是 TimesFM 内建；融合 UniTS / MOMENT / LIMU-BERT-X</a:t>
+              <a:t>同一接口，同一评测，不同底座可对比</a:t>
             </a:r>
           </a:p>
         </p:txBody>
@@ -13321,7 +12840,7 @@
                 <a:ea typeface="Microsoft YaHei"/>
                 <a:cs typeface="Microsoft YaHei"/>
               </a:rPr>
-              <a:t>规则只做异常示意；可学习分类必须接在共享表征上。</a:t>
+              <a:t>平台提供统一评测工具链；许可边界随底座变化。</a:t>
             </a:r>
           </a:p>
         </p:txBody>
@@ -13388,7 +12907,7 @@
             <a:avLst/>
           </a:prstGeom>
           <a:solidFill>
-            <a:srgbClr val="898989"/>
+            <a:srgbClr val="62B230"/>
           </a:solidFill>
           <a:ln>
             <a:noFill/>
@@ -13444,13 +12963,13 @@
             <a:r>
               <a:rPr sz="1700" b="1">
                 <a:solidFill>
-                  <a:srgbClr val="898989"/>
+                  <a:srgbClr val="62B230"/>
                 </a:solidFill>
                 <a:latin typeface="Microsoft YaHei"/>
                 <a:ea typeface="Microsoft YaHei"/>
                 <a:cs typeface="Microsoft YaHei"/>
               </a:rPr>
-              <a:t>路 A  规则下游（零样本）</a:t>
+              <a:t>评测接口</a:t>
             </a:r>
           </a:p>
         </p:txBody>
@@ -13489,7 +13008,7 @@
                 <a:ea typeface="Microsoft YaHei"/>
                 <a:cs typeface="Microsoft YaHei"/>
               </a:rPr>
-              <a:t>历史段：去趋势残差 z-score。</a:t>
+              <a:t>predict：MAE、q10–q90 覆盖率、stitching 长 horizon 稳定性。</a:t>
             </a:r>
           </a:p>
           <a:p>
@@ -13507,7 +13026,7 @@
                 <a:ea typeface="Microsoft YaHei"/>
                 <a:cs typeface="Microsoft YaHei"/>
               </a:rPr>
-              <a:t>|z|≥3 CRITICAL，≥2 WARNING，否则 NORMAL。</a:t>
+              <a:t>classify：macro-F1、confusion matrix、注册类别一致性。</a:t>
             </a:r>
           </a:p>
           <a:p>
@@ -13525,9 +13044,120 @@
                 <a:ea typeface="Microsoft YaHei"/>
                 <a:cs typeface="Microsoft YaHei"/>
               </a:rPr>
-              <a:t/>
-            </a:r>
-          </a:p>
+              <a:t>底座对比：同一批数据，同一接口，换底座重跑。</a:t>
+            </a:r>
+          </a:p>
+        </p:txBody>
+      </p:sp>
+      <p:sp>
+        <p:nvSpPr>
+          <p:cNvPr id="11" name="Rounded Rectangle 10"/>
+          <p:cNvSpPr/>
+          <p:nvPr/>
+        </p:nvSpPr>
+        <p:spPr>
+          <a:xfrm>
+            <a:off x="6217920" y="1371600"/>
+            <a:ext cx="5486400" cy="4206240"/>
+          </a:xfrm>
+          <a:prstGeom prst="roundRect">
+            <a:avLst>
+              <a:gd name="adj" fmla="val 5000"/>
+            </a:avLst>
+          </a:prstGeom>
+          <a:solidFill>
+            <a:srgbClr val="FFFFFF"/>
+          </a:solidFill>
+          <a:ln w="9525">
+            <a:solidFill>
+              <a:srgbClr val="DDDDDD"/>
+            </a:solidFill>
+          </a:ln>
+        </p:spPr>
+        <p:style>
+          <a:lnRef idx="1">
+            <a:schemeClr val="accent1"/>
+          </a:lnRef>
+          <a:fillRef idx="3">
+            <a:schemeClr val="accent1"/>
+          </a:fillRef>
+          <a:effectRef idx="2">
+            <a:schemeClr val="accent1"/>
+          </a:effectRef>
+          <a:fontRef idx="minor">
+            <a:schemeClr val="lt1"/>
+          </a:fontRef>
+        </p:style>
+        <p:txBody>
+          <a:bodyPr rtlCol="0" anchor="ctr"/>
+          <a:lstStyle/>
+          <a:p>
+            <a:pPr algn="ctr"/>
+          </a:p>
+        </p:txBody>
+      </p:sp>
+      <p:sp>
+        <p:nvSpPr>
+          <p:cNvPr id="12" name="Rectangle 11"/>
+          <p:cNvSpPr/>
+          <p:nvPr/>
+        </p:nvSpPr>
+        <p:spPr>
+          <a:xfrm>
+            <a:off x="6217920" y="1371600"/>
+            <a:ext cx="5486400" cy="73152"/>
+          </a:xfrm>
+          <a:prstGeom prst="rect">
+            <a:avLst/>
+          </a:prstGeom>
+          <a:solidFill>
+            <a:srgbClr val="ED6D00"/>
+          </a:solidFill>
+          <a:ln>
+            <a:noFill/>
+          </a:ln>
+        </p:spPr>
+        <p:style>
+          <a:lnRef idx="1">
+            <a:schemeClr val="accent1"/>
+          </a:lnRef>
+          <a:fillRef idx="3">
+            <a:schemeClr val="accent1"/>
+          </a:fillRef>
+          <a:effectRef idx="2">
+            <a:schemeClr val="accent1"/>
+          </a:effectRef>
+          <a:fontRef idx="minor">
+            <a:schemeClr val="lt1"/>
+          </a:fontRef>
+        </p:style>
+        <p:txBody>
+          <a:bodyPr rtlCol="0" anchor="ctr"/>
+          <a:lstStyle/>
+          <a:p>
+            <a:pPr algn="ctr"/>
+          </a:p>
+        </p:txBody>
+      </p:sp>
+      <p:sp>
+        <p:nvSpPr>
+          <p:cNvPr id="13" name="TextBox 12"/>
+          <p:cNvSpPr txBox="1"/>
+          <p:nvPr/>
+        </p:nvSpPr>
+        <p:spPr>
+          <a:xfrm>
+            <a:off x="6400800" y="1600200"/>
+            <a:ext cx="5120640" cy="365760"/>
+          </a:xfrm>
+          <a:prstGeom prst="rect">
+            <a:avLst/>
+          </a:prstGeom>
+          <a:noFill/>
+        </p:spPr>
+        <p:txBody>
+          <a:bodyPr wrap="square" anchor="t"/>
+          <a:lstStyle/>
           <a:p>
             <a:pPr algn="l">
               <a:spcAft>
@@ -13535,17 +13165,38 @@
               </a:spcAft>
             </a:pPr>
             <a:r>
-              <a:rPr sz="1400" b="0">
-                <a:solidFill>
-                  <a:srgbClr val="555757"/>
+              <a:rPr sz="1700" b="1">
+                <a:solidFill>
+                  <a:srgbClr val="ED6D00"/>
                 </a:solidFill>
                 <a:latin typeface="Microsoft YaHei"/>
                 <a:ea typeface="Microsoft YaHei"/>
                 <a:cs typeface="Microsoft YaHei"/>
               </a:rPr>
-              <a:t>未来段：观测是否落在 q10–q90 / q20–q80 外。</a:t>
-            </a:r>
-          </a:p>
+              <a:t>许可边界</a:t>
+            </a:r>
+          </a:p>
+        </p:txBody>
+      </p:sp>
+      <p:sp>
+        <p:nvSpPr>
+          <p:cNvPr id="14" name="TextBox 13"/>
+          <p:cNvSpPr txBox="1"/>
+          <p:nvPr/>
+        </p:nvSpPr>
+        <p:spPr>
+          <a:xfrm>
+            <a:off x="6400800" y="2103120"/>
+            <a:ext cx="5120640" cy="3200400"/>
+          </a:xfrm>
+          <a:prstGeom prst="rect">
+            <a:avLst/>
+          </a:prstGeom>
+          <a:noFill/>
+        </p:spPr>
+        <p:txBody>
+          <a:bodyPr wrap="square" anchor="t"/>
+          <a:lstStyle/>
           <a:p>
             <a:pPr algn="l">
               <a:spcAft>
@@ -13561,7 +13212,7 @@
                 <a:ea typeface="Microsoft YaHei"/>
                 <a:cs typeface="Microsoft YaHei"/>
               </a:rPr>
-              <a:t>区间外 → 异常。</a:t>
+              <a:t>TimesFM-3 权重：NC，商用必须自训底座。</a:t>
             </a:r>
           </a:p>
           <a:p>
@@ -13579,7 +13230,7 @@
                 <a:ea typeface="Microsoft YaHei"/>
                 <a:cs typeface="Microsoft YaHei"/>
               </a:rPr>
-              <a:t/>
+              <a:t>TimesFM ≤ 2.5：Apache-2.0，可商用。</a:t>
             </a:r>
           </a:p>
           <a:p>
@@ -13597,34 +13248,66 @@
                 <a:ea typeface="Microsoft YaHei"/>
                 <a:cs typeface="Microsoft YaHei"/>
               </a:rPr>
-              <a:t>不改权重，不能当「可学习分类」。</a:t>
-            </a:r>
-          </a:p>
-        </p:txBody>
-      </p:sp>
-      <p:sp>
-        <p:nvSpPr>
-          <p:cNvPr id="11" name="Rounded Rectangle 10"/>
+              <a:t>UniTS / MOMENT / LIMU-BERT-X：公开可研究，商用前确认 license。</a:t>
+            </a:r>
+          </a:p>
+          <a:p>
+            <a:pPr algn="l">
+              <a:spcAft>
+                <a:spcPts val="200"/>
+              </a:spcAft>
+            </a:pPr>
+            <a:r>
+              <a:rPr sz="1400" b="0">
+                <a:solidFill>
+                  <a:srgbClr val="555757"/>
+                </a:solidFill>
+                <a:latin typeface="Microsoft YaHei"/>
+                <a:ea typeface="Microsoft YaHei"/>
+                <a:cs typeface="Microsoft YaHei"/>
+              </a:rPr>
+              <a:t/>
+            </a:r>
+          </a:p>
+          <a:p>
+            <a:pPr algn="l">
+              <a:spcAft>
+                <a:spcPts val="200"/>
+              </a:spcAft>
+            </a:pPr>
+            <a:r>
+              <a:rPr sz="1400" b="0">
+                <a:solidFill>
+                  <a:srgbClr val="555757"/>
+                </a:solidFill>
+                <a:latin typeface="Microsoft YaHei"/>
+                <a:ea typeface="Microsoft YaHei"/>
+                <a:cs typeface="Microsoft YaHei"/>
+              </a:rPr>
+              <a:t>平台不绑定任何 NC 权重；接口层与许可层解耦。</a:t>
+            </a:r>
+          </a:p>
+        </p:txBody>
+      </p:sp>
+      <p:sp>
+        <p:nvSpPr>
+          <p:cNvPr id="15" name="Rectangle 14"/>
           <p:cNvSpPr/>
           <p:nvPr/>
         </p:nvSpPr>
         <p:spPr>
           <a:xfrm>
-            <a:off x="6217920" y="1371600"/>
-            <a:ext cx="5486400" cy="4206240"/>
-          </a:xfrm>
-          <a:prstGeom prst="roundRect">
-            <a:avLst>
-              <a:gd name="adj" fmla="val 5000"/>
-            </a:avLst>
-          </a:prstGeom>
-          <a:solidFill>
-            <a:srgbClr val="FFFFFF"/>
-          </a:solidFill>
-          <a:ln w="9525">
-            <a:solidFill>
-              <a:srgbClr val="DDDDDD"/>
-            </a:solidFill>
+            <a:off x="0" y="6537960"/>
+            <a:ext cx="12191695" cy="320040"/>
+          </a:xfrm>
+          <a:prstGeom prst="rect">
+            <a:avLst/>
+          </a:prstGeom>
+          <a:solidFill>
+            <a:srgbClr val="F2F2F2"/>
+          </a:solidFill>
+          <a:ln>
+            <a:noFill/>
           </a:ln>
         </p:spPr>
         <p:style>
@@ -13651,57 +13334,14 @@
       </p:sp>
       <p:sp>
         <p:nvSpPr>
-          <p:cNvPr id="12" name="Rectangle 11"/>
-          <p:cNvSpPr/>
-          <p:nvPr/>
-        </p:nvSpPr>
-        <p:spPr>
-          <a:xfrm>
-            <a:off x="6217920" y="1371600"/>
-            <a:ext cx="5486400" cy="73152"/>
-          </a:xfrm>
-          <a:prstGeom prst="rect">
-            <a:avLst/>
-          </a:prstGeom>
-          <a:solidFill>
-            <a:srgbClr val="C7000B"/>
-          </a:solidFill>
-          <a:ln>
-            <a:noFill/>
-          </a:ln>
-        </p:spPr>
-        <p:style>
-          <a:lnRef idx="1">
-            <a:schemeClr val="accent1"/>
-          </a:lnRef>
-          <a:fillRef idx="3">
-            <a:schemeClr val="accent1"/>
-          </a:fillRef>
-          <a:effectRef idx="2">
-            <a:schemeClr val="accent1"/>
-          </a:effectRef>
-          <a:fontRef idx="minor">
-            <a:schemeClr val="lt1"/>
-          </a:fontRef>
-        </p:style>
-        <p:txBody>
-          <a:bodyPr rtlCol="0" anchor="ctr"/>
-          <a:lstStyle/>
-          <a:p>
-            <a:pPr algn="ctr"/>
-          </a:p>
-        </p:txBody>
-      </p:sp>
-      <p:sp>
-        <p:nvSpPr>
-          <p:cNvPr id="13" name="TextBox 12"/>
+          <p:cNvPr id="16" name="TextBox 15"/>
           <p:cNvSpPr txBox="1"/>
           <p:nvPr/>
         </p:nvSpPr>
         <p:spPr>
           <a:xfrm>
-            <a:off x="6400800" y="1600200"/>
-            <a:ext cx="5120640" cy="365760"/>
+            <a:off x="457200" y="6537960"/>
+            <a:ext cx="8229600" cy="320040"/>
           </a:xfrm>
           <a:prstGeom prst="rect">
             <a:avLst/>
@@ -13709,7 +13349,7 @@
           <a:noFill/>
         </p:spPr>
         <p:txBody>
-          <a:bodyPr wrap="square" anchor="t"/>
+          <a:bodyPr wrap="square" anchor="ctr"/>
           <a:lstStyle/>
           <a:p>
             <a:pPr algn="l">
@@ -13718,208 +13358,15 @@
               </a:spcAft>
             </a:pPr>
             <a:r>
-              <a:rPr sz="1700" b="1">
-                <a:solidFill>
-                  <a:srgbClr val="C7000B"/>
+              <a:rPr sz="900" b="0">
+                <a:solidFill>
+                  <a:srgbClr val="898989"/>
                 </a:solidFill>
                 <a:latin typeface="Microsoft YaHei"/>
                 <a:ea typeface="Microsoft YaHei"/>
                 <a:cs typeface="Microsoft YaHei"/>
               </a:rPr>
-              <a:t>路 B  共享表征 + 分类头</a:t>
-            </a:r>
-          </a:p>
-        </p:txBody>
-      </p:sp>
-      <p:sp>
-        <p:nvSpPr>
-          <p:cNvPr id="14" name="TextBox 13"/>
-          <p:cNvSpPr txBox="1"/>
-          <p:nvPr/>
-        </p:nvSpPr>
-        <p:spPr>
-          <a:xfrm>
-            <a:off x="6400800" y="2103120"/>
-            <a:ext cx="5120640" cy="3200400"/>
-          </a:xfrm>
-          <a:prstGeom prst="rect">
-            <a:avLst/>
-          </a:prstGeom>
-          <a:noFill/>
-        </p:spPr>
-        <p:txBody>
-          <a:bodyPr wrap="square" anchor="t"/>
-          <a:lstStyle/>
-          <a:p>
-            <a:pPr algn="l">
-              <a:spcAft>
-                <a:spcPts val="200"/>
-              </a:spcAft>
-            </a:pPr>
-            <a:r>
-              <a:rPr sz="1400" b="0">
-                <a:solidFill>
-                  <a:srgbClr val="555757"/>
-                </a:solidFill>
-                <a:latin typeface="Microsoft YaHei"/>
-                <a:ea typeface="Microsoft YaHei"/>
-                <a:cs typeface="Microsoft YaHei"/>
-              </a:rPr>
-              <a:t>UniTS：任务 token 把预测 / 分类 / 填补 / 异常收进同一套参数。</a:t>
-            </a:r>
-          </a:p>
-          <a:p>
-            <a:pPr algn="l">
-              <a:spcAft>
-                <a:spcPts val="200"/>
-              </a:spcAft>
-            </a:pPr>
-            <a:r>
-              <a:rPr sz="1400" b="0">
-                <a:solidFill>
-                  <a:srgbClr val="555757"/>
-                </a:solidFill>
-                <a:latin typeface="Microsoft YaHei"/>
-                <a:ea typeface="Microsoft YaHei"/>
-                <a:cs typeface="Microsoft YaHei"/>
-              </a:rPr>
-              <a:t>MOMENT：掩码预训练编码器 + linear probe / 分类头。</a:t>
-            </a:r>
-          </a:p>
-          <a:p>
-            <a:pPr algn="l">
-              <a:spcAft>
-                <a:spcPts val="200"/>
-              </a:spcAft>
-            </a:pPr>
-            <a:r>
-              <a:rPr sz="1400" b="0">
-                <a:solidFill>
-                  <a:srgbClr val="555757"/>
-                </a:solidFill>
-                <a:latin typeface="Microsoft YaHei"/>
-                <a:ea typeface="Microsoft YaHei"/>
-                <a:cs typeface="Microsoft YaHei"/>
-              </a:rPr>
-              <a:t>LIMU-BERT-X：IMU 掩码预训练，直接初始化 IMU 变元。</a:t>
-            </a:r>
-          </a:p>
-          <a:p>
-            <a:pPr algn="l">
-              <a:spcAft>
-                <a:spcPts val="200"/>
-              </a:spcAft>
-            </a:pPr>
-            <a:r>
-              <a:rPr sz="1400" b="0">
-                <a:solidFill>
-                  <a:srgbClr val="555757"/>
-                </a:solidFill>
-                <a:latin typeface="Microsoft YaHei"/>
-                <a:ea typeface="Microsoft YaHei"/>
-                <a:cs typeface="Microsoft YaHei"/>
-              </a:rPr>
-              <a:t/>
-            </a:r>
-          </a:p>
-          <a:p>
-            <a:pPr algn="l">
-              <a:spcAft>
-                <a:spcPts val="200"/>
-              </a:spcAft>
-            </a:pPr>
-            <a:r>
-              <a:rPr sz="1400" b="0">
-                <a:solidFill>
-                  <a:srgbClr val="555757"/>
-                </a:solidFill>
-                <a:latin typeface="Microsoft YaHei"/>
-                <a:ea typeface="Microsoft YaHei"/>
-                <a:cs typeface="Microsoft YaHei"/>
-              </a:rPr>
-              <a:t>物理信号分类走这条；LoRA 微调参照 timesfm-forecasting/examples/finetuning/。</a:t>
-            </a:r>
-          </a:p>
-        </p:txBody>
-      </p:sp>
-      <p:sp>
-        <p:nvSpPr>
-          <p:cNvPr id="15" name="Rectangle 14"/>
-          <p:cNvSpPr/>
-          <p:nvPr/>
-        </p:nvSpPr>
-        <p:spPr>
-          <a:xfrm>
-            <a:off x="0" y="6537960"/>
-            <a:ext cx="12191695" cy="320040"/>
-          </a:xfrm>
-          <a:prstGeom prst="rect">
-            <a:avLst/>
-          </a:prstGeom>
-          <a:solidFill>
-            <a:srgbClr val="F2F2F2"/>
-          </a:solidFill>
-          <a:ln>
-            <a:noFill/>
-          </a:ln>
-        </p:spPr>
-        <p:style>
-          <a:lnRef idx="1">
-            <a:schemeClr val="accent1"/>
-          </a:lnRef>
-          <a:fillRef idx="3">
-            <a:schemeClr val="accent1"/>
-          </a:fillRef>
-          <a:effectRef idx="2">
-            <a:schemeClr val="accent1"/>
-          </a:effectRef>
-          <a:fontRef idx="minor">
-            <a:schemeClr val="lt1"/>
-          </a:fontRef>
-        </p:style>
-        <p:txBody>
-          <a:bodyPr rtlCol="0" anchor="ctr"/>
-          <a:lstStyle/>
-          <a:p>
-            <a:pPr algn="ctr"/>
-          </a:p>
-        </p:txBody>
-      </p:sp>
-      <p:sp>
-        <p:nvSpPr>
-          <p:cNvPr id="16" name="TextBox 15"/>
-          <p:cNvSpPr txBox="1"/>
-          <p:nvPr/>
-        </p:nvSpPr>
-        <p:spPr>
-          <a:xfrm>
-            <a:off x="457200" y="6537960"/>
-            <a:ext cx="8229600" cy="320040"/>
-          </a:xfrm>
-          <a:prstGeom prst="rect">
-            <a:avLst/>
-          </a:prstGeom>
-          <a:noFill/>
-        </p:spPr>
-        <p:txBody>
-          <a:bodyPr wrap="square" anchor="ctr"/>
-          <a:lstStyle/>
-          <a:p>
-            <a:pPr algn="l">
-              <a:spcAft>
-                <a:spcPts val="200"/>
-              </a:spcAft>
-            </a:pPr>
-            <a:r>
-              <a:rPr sz="900" b="0">
-                <a:solidFill>
-                  <a:srgbClr val="898989"/>
-                </a:solidFill>
-                <a:latin typeface="Microsoft YaHei"/>
-                <a:ea typeface="Microsoft YaHei"/>
-                <a:cs typeface="Microsoft YaHei"/>
-              </a:rPr>
-              <a:t>华为  ·  AI 物理感知平台  ·  分类    |    Security Level: Internal</a:t>
+              <a:t>华为  ·  AI 物理感知平台  ·  评测与许可    |    Security Level: Internal</a:t>
             </a:r>
           </a:p>
         </p:txBody>
@@ -14097,7 +13544,7 @@
                 <a:ea typeface="Microsoft YaHei"/>
                 <a:cs typeface="Microsoft YaHei"/>
               </a:rPr>
-              <a:t>平台交付「预测+分类」融合底座，不交付应用 Pack</a:t>
+              <a:t>平台交付接口与工具链，不交付场景语义</a:t>
             </a:r>
           </a:p>
         </p:txBody>
@@ -14179,7 +13626,7 @@
                 <a:ea typeface="Microsoft YaHei"/>
                 <a:cs typeface="Microsoft YaHei"/>
               </a:rPr>
-              <a:t>TimesFM 管预测，UniTS / MOMENT 管分类，LIMU-BERT-X 管 IMU。</a:t>
+              <a:t>接口固定，底座可换，代际演进向下兼容。</a:t>
             </a:r>
           </a:p>
         </p:txBody>
@@ -14265,7 +13712,7 @@
                 <a:ea typeface="Microsoft YaHei"/>
                 <a:cs typeface="Microsoft YaHei"/>
               </a:rPr>
-              <a:t>主干</a:t>
+              <a:t>接口</a:t>
             </a:r>
           </a:p>
         </p:txBody>
@@ -14304,7 +13751,7 @@
                 <a:ea typeface="Microsoft YaHei"/>
                 <a:cs typeface="Microsoft YaHei"/>
               </a:rPr>
-              <a:t>PhysIngest → pad/RevIN/patch token → 20 层 Mixing Transformer → 双头。</a:t>
+              <a:t>Ingest schema + predict() + classify()；版本化，向下兼容。</a:t>
             </a:r>
           </a:p>
         </p:txBody>
@@ -14429,7 +13876,7 @@
                 <a:ea typeface="Microsoft YaHei"/>
                 <a:cs typeface="Microsoft YaHei"/>
               </a:rPr>
-              <a:t>TimesFM-3 式 CPM 一次前向；点预测 q50；评测 MAE + 分位覆盖率。</a:t>
+              <a:t>TimesFM-3 式 CPM 一次前向；点预测 q50；评测 MAE + 覆盖率。</a:t>
             </a:r>
           </a:p>
         </p:txBody>
@@ -14554,7 +14001,7 @@
                 <a:ea typeface="Microsoft YaHei"/>
                 <a:cs typeface="Microsoft YaHei"/>
               </a:rPr>
-              <a:t>UniTS 任务 token / MOMENT linear probe；可 LoRA。对照 LIMU-BERT-X。</a:t>
+              <a:t>UniTS 任务 token / MOMENT linear probe；场景方注册类别，平台微调。</a:t>
             </a:r>
           </a:p>
         </p:txBody>
@@ -14640,7 +14087,7 @@
                 <a:ea typeface="Microsoft YaHei"/>
                 <a:cs typeface="Microsoft YaHei"/>
               </a:rPr>
-              <a:t>IMU</a:t>
+              <a:t>演进</a:t>
             </a:r>
           </a:p>
         </p:txBody>
@@ -14679,7 +14126,7 @@
                 <a:ea typeface="Microsoft YaHei"/>
                 <a:cs typeface="Microsoft YaHei"/>
               </a:rPr>
-              <a:t>用 LIMU-BERT-X 初始化 IMU 变元；TartanIMU 作运动估计参照。</a:t>
+              <a:t>Gen1 零样本 → Gen2 指令微调 → Gen3 端侧；接口不变。</a:t>
             </a:r>
           </a:p>
         </p:txBody>
@@ -14804,7 +14251,7 @@
                 <a:ea typeface="Microsoft YaHei"/>
                 <a:cs typeface="Microsoft YaHei"/>
               </a:rPr>
-              <a:t>TimesFM-3 权重 NC；UniTS / MOMENT / LIMU-BERT 公开。商用自训。</a:t>
+              <a:t>3.0 权重 NC；2.5 及以前 Apache-2.0；平台层与许可层解耦。</a:t>
             </a:r>
           </a:p>
         </p:txBody>

--- a/AI物理感知平台-华为汇报.pptx
+++ b/AI物理感知平台-华为汇报.pptx
@@ -22,6 +22,8 @@
     <p:sldId id="261" r:id="rId16"/>
     <p:sldId id="262" r:id="rId17"/>
     <p:sldId id="263" r:id="rId18"/>
+    <p:sldId id="264" r:id="rId19"/>
+    <p:sldId id="265" r:id="rId20"/>
   </p:sldIdLst>
   <p:sldSz cx="12196763" cy="6858000"/>
   <p:notesSz cx="6858000" cy="9144000"/>
@@ -7412,7 +7414,7 @@
                 <a:ea typeface="Microsoft YaHei"/>
                 <a:cs typeface="Microsoft YaHei"/>
               </a:rPr>
-              <a:t>来源：TimesFM / UniTS / MOMENT / LIMU-BERT-X 公开资料  ·  8 页平台版</a:t>
+              <a:t>来源：TimesFM / UniTS / MOMENT / LIMU-BERT-X 公开资料  ·  10 页平台版</a:t>
             </a:r>
           </a:p>
         </p:txBody>
@@ -7451,7 +7453,7 @@
                 <a:ea typeface="Microsoft YaHei"/>
                 <a:cs typeface="Microsoft YaHei"/>
               </a:rPr>
-              <a:t>1  /  8</a:t>
+              <a:t>1  /  10</a:t>
             </a:r>
           </a:p>
         </p:txBody>
@@ -7491,6 +7493,1098 @@
                 <a:cs typeface="Microsoft YaHei"/>
               </a:rPr>
               <a:t>Security Level: Internal</a:t>
+            </a:r>
+          </a:p>
+        </p:txBody>
+      </p:sp>
+    </p:spTree>
+  </p:cSld>
+  <p:clrMapOvr>
+    <a:masterClrMapping/>
+  </p:clrMapOvr>
+</p:sld>
+</file>
+
+<file path=ppt/slides/slide10.xml><?xml version="1.0" encoding="utf-8"?>
+<p:sld xmlns:a="http://schemas.openxmlformats.org/drawingml/2006/main" xmlns:p="http://schemas.openxmlformats.org/presentationml/2006/main" xmlns:r="http://schemas.openxmlformats.org/officeDocument/2006/relationships">
+  <p:cSld>
+    <p:spTree>
+      <p:nvGrpSpPr>
+        <p:cNvPr id="1" name=""/>
+        <p:cNvGrpSpPr/>
+        <p:nvPr/>
+      </p:nvGrpSpPr>
+      <p:grpSpPr/>
+      <p:sp>
+        <p:nvSpPr>
+          <p:cNvPr id="2" name="Rectangle 1"/>
+          <p:cNvSpPr/>
+          <p:nvPr/>
+        </p:nvSpPr>
+        <p:spPr>
+          <a:xfrm>
+            <a:off x="0" y="0"/>
+            <a:ext cx="12196763" cy="6858000"/>
+          </a:xfrm>
+          <a:prstGeom prst="rect">
+            <a:avLst/>
+          </a:prstGeom>
+          <a:solidFill>
+            <a:srgbClr val="FFFFFF"/>
+          </a:solidFill>
+          <a:ln>
+            <a:noFill/>
+          </a:ln>
+        </p:spPr>
+        <p:style>
+          <a:lnRef idx="1">
+            <a:schemeClr val="accent1"/>
+          </a:lnRef>
+          <a:fillRef idx="3">
+            <a:schemeClr val="accent1"/>
+          </a:fillRef>
+          <a:effectRef idx="2">
+            <a:schemeClr val="accent1"/>
+          </a:effectRef>
+          <a:fontRef idx="minor">
+            <a:schemeClr val="lt1"/>
+          </a:fontRef>
+        </p:style>
+        <p:txBody>
+          <a:bodyPr rtlCol="0" anchor="ctr"/>
+          <a:lstStyle/>
+          <a:p>
+            <a:pPr algn="ctr"/>
+          </a:p>
+        </p:txBody>
+      </p:sp>
+      <p:sp>
+        <p:nvSpPr>
+          <p:cNvPr id="3" name="TextBox 2"/>
+          <p:cNvSpPr txBox="1"/>
+          <p:nvPr/>
+        </p:nvSpPr>
+        <p:spPr>
+          <a:xfrm>
+            <a:off x="457200" y="201168"/>
+            <a:ext cx="11155680" cy="256032"/>
+          </a:xfrm>
+          <a:prstGeom prst="rect">
+            <a:avLst/>
+          </a:prstGeom>
+          <a:noFill/>
+        </p:spPr>
+        <p:txBody>
+          <a:bodyPr wrap="square" anchor="t"/>
+          <a:lstStyle/>
+          <a:p>
+            <a:pPr algn="l">
+              <a:spcAft>
+                <a:spcPts val="200"/>
+              </a:spcAft>
+            </a:pPr>
+            <a:r>
+              <a:rPr sz="1100" b="1">
+                <a:solidFill>
+                  <a:srgbClr val="C7000B"/>
+                </a:solidFill>
+                <a:latin typeface="Microsoft YaHei"/>
+                <a:ea typeface="Microsoft YaHei"/>
+                <a:cs typeface="Microsoft YaHei"/>
+              </a:rPr>
+              <a:t>决策</a:t>
+            </a:r>
+          </a:p>
+        </p:txBody>
+      </p:sp>
+      <p:sp>
+        <p:nvSpPr>
+          <p:cNvPr id="4" name="TextBox 3"/>
+          <p:cNvSpPr txBox="1"/>
+          <p:nvPr/>
+        </p:nvSpPr>
+        <p:spPr>
+          <a:xfrm>
+            <a:off x="457200" y="438912"/>
+            <a:ext cx="11155680" cy="438912"/>
+          </a:xfrm>
+          <a:prstGeom prst="rect">
+            <a:avLst/>
+          </a:prstGeom>
+          <a:noFill/>
+        </p:spPr>
+        <p:txBody>
+          <a:bodyPr wrap="square" anchor="t"/>
+          <a:lstStyle/>
+          <a:p>
+            <a:pPr algn="l">
+              <a:spcAft>
+                <a:spcPts val="200"/>
+              </a:spcAft>
+            </a:pPr>
+            <a:r>
+              <a:rPr sz="2400" b="1">
+                <a:solidFill>
+                  <a:srgbClr val="1A1A1A"/>
+                </a:solidFill>
+                <a:latin typeface="Microsoft YaHei"/>
+                <a:ea typeface="Microsoft YaHei"/>
+                <a:cs typeface="Microsoft YaHei"/>
+              </a:rPr>
+              <a:t>平台交付接口与工具链，不交付场景语义</a:t>
+            </a:r>
+          </a:p>
+        </p:txBody>
+      </p:sp>
+      <p:sp>
+        <p:nvSpPr>
+          <p:cNvPr id="5" name="Rectangle 4"/>
+          <p:cNvSpPr/>
+          <p:nvPr/>
+        </p:nvSpPr>
+        <p:spPr>
+          <a:xfrm>
+            <a:off x="457200" y="914400"/>
+            <a:ext cx="1097280" cy="45720"/>
+          </a:xfrm>
+          <a:prstGeom prst="rect">
+            <a:avLst/>
+          </a:prstGeom>
+          <a:solidFill>
+            <a:srgbClr val="C7000B"/>
+          </a:solidFill>
+          <a:ln>
+            <a:noFill/>
+          </a:ln>
+        </p:spPr>
+        <p:style>
+          <a:lnRef idx="1">
+            <a:schemeClr val="accent1"/>
+          </a:lnRef>
+          <a:fillRef idx="3">
+            <a:schemeClr val="accent1"/>
+          </a:fillRef>
+          <a:effectRef idx="2">
+            <a:schemeClr val="accent1"/>
+          </a:effectRef>
+          <a:fontRef idx="minor">
+            <a:schemeClr val="lt1"/>
+          </a:fontRef>
+        </p:style>
+        <p:txBody>
+          <a:bodyPr rtlCol="0" anchor="ctr"/>
+          <a:lstStyle/>
+          <a:p>
+            <a:pPr algn="ctr"/>
+          </a:p>
+        </p:txBody>
+      </p:sp>
+      <p:sp>
+        <p:nvSpPr>
+          <p:cNvPr id="6" name="TextBox 5"/>
+          <p:cNvSpPr txBox="1"/>
+          <p:nvPr/>
+        </p:nvSpPr>
+        <p:spPr>
+          <a:xfrm>
+            <a:off x="457200" y="1024128"/>
+            <a:ext cx="11155680" cy="292608"/>
+          </a:xfrm>
+          <a:prstGeom prst="rect">
+            <a:avLst/>
+          </a:prstGeom>
+          <a:noFill/>
+        </p:spPr>
+        <p:txBody>
+          <a:bodyPr wrap="square" anchor="t"/>
+          <a:lstStyle/>
+          <a:p>
+            <a:pPr algn="l">
+              <a:spcAft>
+                <a:spcPts val="200"/>
+              </a:spcAft>
+            </a:pPr>
+            <a:r>
+              <a:rPr sz="1200" b="0">
+                <a:solidFill>
+                  <a:srgbClr val="898989"/>
+                </a:solidFill>
+                <a:latin typeface="Microsoft YaHei"/>
+                <a:ea typeface="Microsoft YaHei"/>
+                <a:cs typeface="Microsoft YaHei"/>
+              </a:rPr>
+              <a:t>接口固定，底座可换，代际演进向下兼容。</a:t>
+            </a:r>
+          </a:p>
+        </p:txBody>
+      </p:sp>
+      <p:sp>
+        <p:nvSpPr>
+          <p:cNvPr id="7" name="Rounded Rectangle 6"/>
+          <p:cNvSpPr/>
+          <p:nvPr/>
+        </p:nvSpPr>
+        <p:spPr>
+          <a:xfrm>
+            <a:off x="457200" y="1371600"/>
+            <a:ext cx="11247120" cy="658368"/>
+          </a:xfrm>
+          <a:prstGeom prst="roundRect">
+            <a:avLst>
+              <a:gd name="adj" fmla="val 5000"/>
+            </a:avLst>
+          </a:prstGeom>
+          <a:solidFill>
+            <a:srgbClr val="FFFFFF"/>
+          </a:solidFill>
+          <a:ln w="9525">
+            <a:solidFill>
+              <a:srgbClr val="DDDDDD"/>
+            </a:solidFill>
+          </a:ln>
+        </p:spPr>
+        <p:style>
+          <a:lnRef idx="1">
+            <a:schemeClr val="accent1"/>
+          </a:lnRef>
+          <a:fillRef idx="3">
+            <a:schemeClr val="accent1"/>
+          </a:fillRef>
+          <a:effectRef idx="2">
+            <a:schemeClr val="accent1"/>
+          </a:effectRef>
+          <a:fontRef idx="minor">
+            <a:schemeClr val="lt1"/>
+          </a:fontRef>
+        </p:style>
+        <p:txBody>
+          <a:bodyPr rtlCol="0" anchor="ctr"/>
+          <a:lstStyle/>
+          <a:p>
+            <a:pPr algn="ctr"/>
+          </a:p>
+        </p:txBody>
+      </p:sp>
+      <p:sp>
+        <p:nvSpPr>
+          <p:cNvPr id="8" name="TextBox 7"/>
+          <p:cNvSpPr txBox="1"/>
+          <p:nvPr/>
+        </p:nvSpPr>
+        <p:spPr>
+          <a:xfrm>
+            <a:off x="640080" y="1371600"/>
+            <a:ext cx="1463040" cy="658368"/>
+          </a:xfrm>
+          <a:prstGeom prst="rect">
+            <a:avLst/>
+          </a:prstGeom>
+          <a:noFill/>
+        </p:spPr>
+        <p:txBody>
+          <a:bodyPr wrap="square" anchor="ctr"/>
+          <a:lstStyle/>
+          <a:p>
+            <a:pPr algn="l">
+              <a:spcAft>
+                <a:spcPts val="200"/>
+              </a:spcAft>
+            </a:pPr>
+            <a:r>
+              <a:rPr sz="1600" b="1">
+                <a:solidFill>
+                  <a:srgbClr val="C7000B"/>
+                </a:solidFill>
+                <a:latin typeface="Microsoft YaHei"/>
+                <a:ea typeface="Microsoft YaHei"/>
+                <a:cs typeface="Microsoft YaHei"/>
+              </a:rPr>
+              <a:t>接口</a:t>
+            </a:r>
+          </a:p>
+        </p:txBody>
+      </p:sp>
+      <p:sp>
+        <p:nvSpPr>
+          <p:cNvPr id="9" name="TextBox 8"/>
+          <p:cNvSpPr txBox="1"/>
+          <p:nvPr/>
+        </p:nvSpPr>
+        <p:spPr>
+          <a:xfrm>
+            <a:off x="2286000" y="1371600"/>
+            <a:ext cx="9235440" cy="658368"/>
+          </a:xfrm>
+          <a:prstGeom prst="rect">
+            <a:avLst/>
+          </a:prstGeom>
+          <a:noFill/>
+        </p:spPr>
+        <p:txBody>
+          <a:bodyPr wrap="square" anchor="ctr"/>
+          <a:lstStyle/>
+          <a:p>
+            <a:pPr algn="l">
+              <a:spcAft>
+                <a:spcPts val="200"/>
+              </a:spcAft>
+            </a:pPr>
+            <a:r>
+              <a:rPr sz="1400" b="0">
+                <a:solidFill>
+                  <a:srgbClr val="1A1A1A"/>
+                </a:solidFill>
+                <a:latin typeface="Microsoft YaHei"/>
+                <a:ea typeface="Microsoft YaHei"/>
+                <a:cs typeface="Microsoft YaHei"/>
+              </a:rPr>
+              <a:t>Ingest schema + predict() + classify()；版本化，向下兼容。</a:t>
+            </a:r>
+          </a:p>
+        </p:txBody>
+      </p:sp>
+      <p:sp>
+        <p:nvSpPr>
+          <p:cNvPr id="10" name="Rounded Rectangle 9"/>
+          <p:cNvSpPr/>
+          <p:nvPr/>
+        </p:nvSpPr>
+        <p:spPr>
+          <a:xfrm>
+            <a:off x="457200" y="2103120"/>
+            <a:ext cx="11247120" cy="658368"/>
+          </a:xfrm>
+          <a:prstGeom prst="roundRect">
+            <a:avLst>
+              <a:gd name="adj" fmla="val 5000"/>
+            </a:avLst>
+          </a:prstGeom>
+          <a:solidFill>
+            <a:srgbClr val="F7F7F7"/>
+          </a:solidFill>
+          <a:ln w="9525">
+            <a:solidFill>
+              <a:srgbClr val="DDDDDD"/>
+            </a:solidFill>
+          </a:ln>
+        </p:spPr>
+        <p:style>
+          <a:lnRef idx="1">
+            <a:schemeClr val="accent1"/>
+          </a:lnRef>
+          <a:fillRef idx="3">
+            <a:schemeClr val="accent1"/>
+          </a:fillRef>
+          <a:effectRef idx="2">
+            <a:schemeClr val="accent1"/>
+          </a:effectRef>
+          <a:fontRef idx="minor">
+            <a:schemeClr val="lt1"/>
+          </a:fontRef>
+        </p:style>
+        <p:txBody>
+          <a:bodyPr rtlCol="0" anchor="ctr"/>
+          <a:lstStyle/>
+          <a:p>
+            <a:pPr algn="ctr"/>
+          </a:p>
+        </p:txBody>
+      </p:sp>
+      <p:sp>
+        <p:nvSpPr>
+          <p:cNvPr id="11" name="TextBox 10"/>
+          <p:cNvSpPr txBox="1"/>
+          <p:nvPr/>
+        </p:nvSpPr>
+        <p:spPr>
+          <a:xfrm>
+            <a:off x="640080" y="2103120"/>
+            <a:ext cx="1463040" cy="658368"/>
+          </a:xfrm>
+          <a:prstGeom prst="rect">
+            <a:avLst/>
+          </a:prstGeom>
+          <a:noFill/>
+        </p:spPr>
+        <p:txBody>
+          <a:bodyPr wrap="square" anchor="ctr"/>
+          <a:lstStyle/>
+          <a:p>
+            <a:pPr algn="l">
+              <a:spcAft>
+                <a:spcPts val="200"/>
+              </a:spcAft>
+            </a:pPr>
+            <a:r>
+              <a:rPr sz="1600" b="1">
+                <a:solidFill>
+                  <a:srgbClr val="C7000B"/>
+                </a:solidFill>
+                <a:latin typeface="Microsoft YaHei"/>
+                <a:ea typeface="Microsoft YaHei"/>
+                <a:cs typeface="Microsoft YaHei"/>
+              </a:rPr>
+              <a:t>预测</a:t>
+            </a:r>
+          </a:p>
+        </p:txBody>
+      </p:sp>
+      <p:sp>
+        <p:nvSpPr>
+          <p:cNvPr id="12" name="TextBox 11"/>
+          <p:cNvSpPr txBox="1"/>
+          <p:nvPr/>
+        </p:nvSpPr>
+        <p:spPr>
+          <a:xfrm>
+            <a:off x="2286000" y="2103120"/>
+            <a:ext cx="9235440" cy="658368"/>
+          </a:xfrm>
+          <a:prstGeom prst="rect">
+            <a:avLst/>
+          </a:prstGeom>
+          <a:noFill/>
+        </p:spPr>
+        <p:txBody>
+          <a:bodyPr wrap="square" anchor="ctr"/>
+          <a:lstStyle/>
+          <a:p>
+            <a:pPr algn="l">
+              <a:spcAft>
+                <a:spcPts val="200"/>
+              </a:spcAft>
+            </a:pPr>
+            <a:r>
+              <a:rPr sz="1400" b="0">
+                <a:solidFill>
+                  <a:srgbClr val="1A1A1A"/>
+                </a:solidFill>
+                <a:latin typeface="Microsoft YaHei"/>
+                <a:ea typeface="Microsoft YaHei"/>
+                <a:cs typeface="Microsoft YaHei"/>
+              </a:rPr>
+              <a:t>TimesFM-3 式 CPM 一次前向；点预测 q50；评测 MAE + 覆盖率。</a:t>
+            </a:r>
+          </a:p>
+        </p:txBody>
+      </p:sp>
+      <p:sp>
+        <p:nvSpPr>
+          <p:cNvPr id="13" name="Rounded Rectangle 12"/>
+          <p:cNvSpPr/>
+          <p:nvPr/>
+        </p:nvSpPr>
+        <p:spPr>
+          <a:xfrm>
+            <a:off x="457200" y="2834640"/>
+            <a:ext cx="11247120" cy="658368"/>
+          </a:xfrm>
+          <a:prstGeom prst="roundRect">
+            <a:avLst>
+              <a:gd name="adj" fmla="val 5000"/>
+            </a:avLst>
+          </a:prstGeom>
+          <a:solidFill>
+            <a:srgbClr val="FFFFFF"/>
+          </a:solidFill>
+          <a:ln w="9525">
+            <a:solidFill>
+              <a:srgbClr val="DDDDDD"/>
+            </a:solidFill>
+          </a:ln>
+        </p:spPr>
+        <p:style>
+          <a:lnRef idx="1">
+            <a:schemeClr val="accent1"/>
+          </a:lnRef>
+          <a:fillRef idx="3">
+            <a:schemeClr val="accent1"/>
+          </a:fillRef>
+          <a:effectRef idx="2">
+            <a:schemeClr val="accent1"/>
+          </a:effectRef>
+          <a:fontRef idx="minor">
+            <a:schemeClr val="lt1"/>
+          </a:fontRef>
+        </p:style>
+        <p:txBody>
+          <a:bodyPr rtlCol="0" anchor="ctr"/>
+          <a:lstStyle/>
+          <a:p>
+            <a:pPr algn="ctr"/>
+          </a:p>
+        </p:txBody>
+      </p:sp>
+      <p:sp>
+        <p:nvSpPr>
+          <p:cNvPr id="14" name="TextBox 13"/>
+          <p:cNvSpPr txBox="1"/>
+          <p:nvPr/>
+        </p:nvSpPr>
+        <p:spPr>
+          <a:xfrm>
+            <a:off x="640080" y="2834640"/>
+            <a:ext cx="1463040" cy="658368"/>
+          </a:xfrm>
+          <a:prstGeom prst="rect">
+            <a:avLst/>
+          </a:prstGeom>
+          <a:noFill/>
+        </p:spPr>
+        <p:txBody>
+          <a:bodyPr wrap="square" anchor="ctr"/>
+          <a:lstStyle/>
+          <a:p>
+            <a:pPr algn="l">
+              <a:spcAft>
+                <a:spcPts val="200"/>
+              </a:spcAft>
+            </a:pPr>
+            <a:r>
+              <a:rPr sz="1600" b="1">
+                <a:solidFill>
+                  <a:srgbClr val="C7000B"/>
+                </a:solidFill>
+                <a:latin typeface="Microsoft YaHei"/>
+                <a:ea typeface="Microsoft YaHei"/>
+                <a:cs typeface="Microsoft YaHei"/>
+              </a:rPr>
+              <a:t>分类</a:t>
+            </a:r>
+          </a:p>
+        </p:txBody>
+      </p:sp>
+      <p:sp>
+        <p:nvSpPr>
+          <p:cNvPr id="15" name="TextBox 14"/>
+          <p:cNvSpPr txBox="1"/>
+          <p:nvPr/>
+        </p:nvSpPr>
+        <p:spPr>
+          <a:xfrm>
+            <a:off x="2286000" y="2834640"/>
+            <a:ext cx="9235440" cy="658368"/>
+          </a:xfrm>
+          <a:prstGeom prst="rect">
+            <a:avLst/>
+          </a:prstGeom>
+          <a:noFill/>
+        </p:spPr>
+        <p:txBody>
+          <a:bodyPr wrap="square" anchor="ctr"/>
+          <a:lstStyle/>
+          <a:p>
+            <a:pPr algn="l">
+              <a:spcAft>
+                <a:spcPts val="200"/>
+              </a:spcAft>
+            </a:pPr>
+            <a:r>
+              <a:rPr sz="1400" b="0">
+                <a:solidFill>
+                  <a:srgbClr val="1A1A1A"/>
+                </a:solidFill>
+                <a:latin typeface="Microsoft YaHei"/>
+                <a:ea typeface="Microsoft YaHei"/>
+                <a:cs typeface="Microsoft YaHei"/>
+              </a:rPr>
+              <a:t>UniTS 任务 token / MOMENT linear probe；场景方注册类别，平台微调。</a:t>
+            </a:r>
+          </a:p>
+        </p:txBody>
+      </p:sp>
+      <p:sp>
+        <p:nvSpPr>
+          <p:cNvPr id="16" name="Rounded Rectangle 15"/>
+          <p:cNvSpPr/>
+          <p:nvPr/>
+        </p:nvSpPr>
+        <p:spPr>
+          <a:xfrm>
+            <a:off x="457200" y="3566160"/>
+            <a:ext cx="11247120" cy="658368"/>
+          </a:xfrm>
+          <a:prstGeom prst="roundRect">
+            <a:avLst>
+              <a:gd name="adj" fmla="val 5000"/>
+            </a:avLst>
+          </a:prstGeom>
+          <a:solidFill>
+            <a:srgbClr val="F7F7F7"/>
+          </a:solidFill>
+          <a:ln w="9525">
+            <a:solidFill>
+              <a:srgbClr val="DDDDDD"/>
+            </a:solidFill>
+          </a:ln>
+        </p:spPr>
+        <p:style>
+          <a:lnRef idx="1">
+            <a:schemeClr val="accent1"/>
+          </a:lnRef>
+          <a:fillRef idx="3">
+            <a:schemeClr val="accent1"/>
+          </a:fillRef>
+          <a:effectRef idx="2">
+            <a:schemeClr val="accent1"/>
+          </a:effectRef>
+          <a:fontRef idx="minor">
+            <a:schemeClr val="lt1"/>
+          </a:fontRef>
+        </p:style>
+        <p:txBody>
+          <a:bodyPr rtlCol="0" anchor="ctr"/>
+          <a:lstStyle/>
+          <a:p>
+            <a:pPr algn="ctr"/>
+          </a:p>
+        </p:txBody>
+      </p:sp>
+      <p:sp>
+        <p:nvSpPr>
+          <p:cNvPr id="17" name="TextBox 16"/>
+          <p:cNvSpPr txBox="1"/>
+          <p:nvPr/>
+        </p:nvSpPr>
+        <p:spPr>
+          <a:xfrm>
+            <a:off x="640080" y="3566160"/>
+            <a:ext cx="1463040" cy="658368"/>
+          </a:xfrm>
+          <a:prstGeom prst="rect">
+            <a:avLst/>
+          </a:prstGeom>
+          <a:noFill/>
+        </p:spPr>
+        <p:txBody>
+          <a:bodyPr wrap="square" anchor="ctr"/>
+          <a:lstStyle/>
+          <a:p>
+            <a:pPr algn="l">
+              <a:spcAft>
+                <a:spcPts val="200"/>
+              </a:spcAft>
+            </a:pPr>
+            <a:r>
+              <a:rPr sz="1600" b="1">
+                <a:solidFill>
+                  <a:srgbClr val="C7000B"/>
+                </a:solidFill>
+                <a:latin typeface="Microsoft YaHei"/>
+                <a:ea typeface="Microsoft YaHei"/>
+                <a:cs typeface="Microsoft YaHei"/>
+              </a:rPr>
+              <a:t>演进</a:t>
+            </a:r>
+          </a:p>
+        </p:txBody>
+      </p:sp>
+      <p:sp>
+        <p:nvSpPr>
+          <p:cNvPr id="18" name="TextBox 17"/>
+          <p:cNvSpPr txBox="1"/>
+          <p:nvPr/>
+        </p:nvSpPr>
+        <p:spPr>
+          <a:xfrm>
+            <a:off x="2286000" y="3566160"/>
+            <a:ext cx="9235440" cy="658368"/>
+          </a:xfrm>
+          <a:prstGeom prst="rect">
+            <a:avLst/>
+          </a:prstGeom>
+          <a:noFill/>
+        </p:spPr>
+        <p:txBody>
+          <a:bodyPr wrap="square" anchor="ctr"/>
+          <a:lstStyle/>
+          <a:p>
+            <a:pPr algn="l">
+              <a:spcAft>
+                <a:spcPts val="200"/>
+              </a:spcAft>
+            </a:pPr>
+            <a:r>
+              <a:rPr sz="1400" b="0">
+                <a:solidFill>
+                  <a:srgbClr val="1A1A1A"/>
+                </a:solidFill>
+                <a:latin typeface="Microsoft YaHei"/>
+                <a:ea typeface="Microsoft YaHei"/>
+                <a:cs typeface="Microsoft YaHei"/>
+              </a:rPr>
+              <a:t>Gen1 零样本 → Gen2 指令微调 → Gen3 端侧；接口不变。</a:t>
+            </a:r>
+          </a:p>
+        </p:txBody>
+      </p:sp>
+      <p:sp>
+        <p:nvSpPr>
+          <p:cNvPr id="19" name="Rounded Rectangle 18"/>
+          <p:cNvSpPr/>
+          <p:nvPr/>
+        </p:nvSpPr>
+        <p:spPr>
+          <a:xfrm>
+            <a:off x="457200" y="4297680"/>
+            <a:ext cx="11247120" cy="658368"/>
+          </a:xfrm>
+          <a:prstGeom prst="roundRect">
+            <a:avLst>
+              <a:gd name="adj" fmla="val 5000"/>
+            </a:avLst>
+          </a:prstGeom>
+          <a:solidFill>
+            <a:srgbClr val="FFFFFF"/>
+          </a:solidFill>
+          <a:ln w="9525">
+            <a:solidFill>
+              <a:srgbClr val="DDDDDD"/>
+            </a:solidFill>
+          </a:ln>
+        </p:spPr>
+        <p:style>
+          <a:lnRef idx="1">
+            <a:schemeClr val="accent1"/>
+          </a:lnRef>
+          <a:fillRef idx="3">
+            <a:schemeClr val="accent1"/>
+          </a:fillRef>
+          <a:effectRef idx="2">
+            <a:schemeClr val="accent1"/>
+          </a:effectRef>
+          <a:fontRef idx="minor">
+            <a:schemeClr val="lt1"/>
+          </a:fontRef>
+        </p:style>
+        <p:txBody>
+          <a:bodyPr rtlCol="0" anchor="ctr"/>
+          <a:lstStyle/>
+          <a:p>
+            <a:pPr algn="ctr"/>
+          </a:p>
+        </p:txBody>
+      </p:sp>
+      <p:sp>
+        <p:nvSpPr>
+          <p:cNvPr id="20" name="TextBox 19"/>
+          <p:cNvSpPr txBox="1"/>
+          <p:nvPr/>
+        </p:nvSpPr>
+        <p:spPr>
+          <a:xfrm>
+            <a:off x="640080" y="4297680"/>
+            <a:ext cx="1463040" cy="658368"/>
+          </a:xfrm>
+          <a:prstGeom prst="rect">
+            <a:avLst/>
+          </a:prstGeom>
+          <a:noFill/>
+        </p:spPr>
+        <p:txBody>
+          <a:bodyPr wrap="square" anchor="ctr"/>
+          <a:lstStyle/>
+          <a:p>
+            <a:pPr algn="l">
+              <a:spcAft>
+                <a:spcPts val="200"/>
+              </a:spcAft>
+            </a:pPr>
+            <a:r>
+              <a:rPr sz="1600" b="1">
+                <a:solidFill>
+                  <a:srgbClr val="C7000B"/>
+                </a:solidFill>
+                <a:latin typeface="Microsoft YaHei"/>
+                <a:ea typeface="Microsoft YaHei"/>
+                <a:cs typeface="Microsoft YaHei"/>
+              </a:rPr>
+              <a:t>许可</a:t>
+            </a:r>
+          </a:p>
+        </p:txBody>
+      </p:sp>
+      <p:sp>
+        <p:nvSpPr>
+          <p:cNvPr id="21" name="TextBox 20"/>
+          <p:cNvSpPr txBox="1"/>
+          <p:nvPr/>
+        </p:nvSpPr>
+        <p:spPr>
+          <a:xfrm>
+            <a:off x="2286000" y="4297680"/>
+            <a:ext cx="9235440" cy="658368"/>
+          </a:xfrm>
+          <a:prstGeom prst="rect">
+            <a:avLst/>
+          </a:prstGeom>
+          <a:noFill/>
+        </p:spPr>
+        <p:txBody>
+          <a:bodyPr wrap="square" anchor="ctr"/>
+          <a:lstStyle/>
+          <a:p>
+            <a:pPr algn="l">
+              <a:spcAft>
+                <a:spcPts val="200"/>
+              </a:spcAft>
+            </a:pPr>
+            <a:r>
+              <a:rPr sz="1400" b="0">
+                <a:solidFill>
+                  <a:srgbClr val="1A1A1A"/>
+                </a:solidFill>
+                <a:latin typeface="Microsoft YaHei"/>
+                <a:ea typeface="Microsoft YaHei"/>
+                <a:cs typeface="Microsoft YaHei"/>
+              </a:rPr>
+              <a:t>3.0 权重 NC；2.5 及以前 Apache-2.0；平台层与许可层解耦。</a:t>
+            </a:r>
+          </a:p>
+        </p:txBody>
+      </p:sp>
+      <p:sp>
+        <p:nvSpPr>
+          <p:cNvPr id="22" name="Rounded Rectangle 21"/>
+          <p:cNvSpPr/>
+          <p:nvPr/>
+        </p:nvSpPr>
+        <p:spPr>
+          <a:xfrm>
+            <a:off x="457200" y="5029200"/>
+            <a:ext cx="11247120" cy="658368"/>
+          </a:xfrm>
+          <a:prstGeom prst="roundRect">
+            <a:avLst>
+              <a:gd name="adj" fmla="val 5000"/>
+            </a:avLst>
+          </a:prstGeom>
+          <a:solidFill>
+            <a:srgbClr val="F7F7F7"/>
+          </a:solidFill>
+          <a:ln w="9525">
+            <a:solidFill>
+              <a:srgbClr val="DDDDDD"/>
+            </a:solidFill>
+          </a:ln>
+        </p:spPr>
+        <p:style>
+          <a:lnRef idx="1">
+            <a:schemeClr val="accent1"/>
+          </a:lnRef>
+          <a:fillRef idx="3">
+            <a:schemeClr val="accent1"/>
+          </a:fillRef>
+          <a:effectRef idx="2">
+            <a:schemeClr val="accent1"/>
+          </a:effectRef>
+          <a:fontRef idx="minor">
+            <a:schemeClr val="lt1"/>
+          </a:fontRef>
+        </p:style>
+        <p:txBody>
+          <a:bodyPr rtlCol="0" anchor="ctr"/>
+          <a:lstStyle/>
+          <a:p>
+            <a:pPr algn="ctr"/>
+          </a:p>
+        </p:txBody>
+      </p:sp>
+      <p:sp>
+        <p:nvSpPr>
+          <p:cNvPr id="23" name="TextBox 22"/>
+          <p:cNvSpPr txBox="1"/>
+          <p:nvPr/>
+        </p:nvSpPr>
+        <p:spPr>
+          <a:xfrm>
+            <a:off x="640080" y="5029200"/>
+            <a:ext cx="1463040" cy="658368"/>
+          </a:xfrm>
+          <a:prstGeom prst="rect">
+            <a:avLst/>
+          </a:prstGeom>
+          <a:noFill/>
+        </p:spPr>
+        <p:txBody>
+          <a:bodyPr wrap="square" anchor="ctr"/>
+          <a:lstStyle/>
+          <a:p>
+            <a:pPr algn="l">
+              <a:spcAft>
+                <a:spcPts val="200"/>
+              </a:spcAft>
+            </a:pPr>
+            <a:r>
+              <a:rPr sz="1600" b="1">
+                <a:solidFill>
+                  <a:srgbClr val="C7000B"/>
+                </a:solidFill>
+                <a:latin typeface="Microsoft YaHei"/>
+                <a:ea typeface="Microsoft YaHei"/>
+                <a:cs typeface="Microsoft YaHei"/>
+              </a:rPr>
+              <a:t>不做</a:t>
+            </a:r>
+          </a:p>
+        </p:txBody>
+      </p:sp>
+      <p:sp>
+        <p:nvSpPr>
+          <p:cNvPr id="24" name="TextBox 23"/>
+          <p:cNvSpPr txBox="1"/>
+          <p:nvPr/>
+        </p:nvSpPr>
+        <p:spPr>
+          <a:xfrm>
+            <a:off x="2286000" y="5029200"/>
+            <a:ext cx="9235440" cy="658368"/>
+          </a:xfrm>
+          <a:prstGeom prst="rect">
+            <a:avLst/>
+          </a:prstGeom>
+          <a:noFill/>
+        </p:spPr>
+        <p:txBody>
+          <a:bodyPr wrap="square" anchor="ctr"/>
+          <a:lstStyle/>
+          <a:p>
+            <a:pPr algn="l">
+              <a:spcAft>
+                <a:spcPts val="200"/>
+              </a:spcAft>
+            </a:pPr>
+            <a:r>
+              <a:rPr sz="1400" b="0">
+                <a:solidFill>
+                  <a:srgbClr val="1A1A1A"/>
+                </a:solidFill>
+                <a:latin typeface="Microsoft YaHei"/>
+                <a:ea typeface="Microsoft YaHei"/>
+                <a:cs typeface="Microsoft YaHei"/>
+              </a:rPr>
+              <a:t>场景 Pack、整机、芯片、盘古、世界视频、把 TimesFM 当分类模型宣传。</a:t>
+            </a:r>
+          </a:p>
+        </p:txBody>
+      </p:sp>
+      <p:sp>
+        <p:nvSpPr>
+          <p:cNvPr id="25" name="Rectangle 24"/>
+          <p:cNvSpPr/>
+          <p:nvPr/>
+        </p:nvSpPr>
+        <p:spPr>
+          <a:xfrm>
+            <a:off x="0" y="6537960"/>
+            <a:ext cx="12191695" cy="320040"/>
+          </a:xfrm>
+          <a:prstGeom prst="rect">
+            <a:avLst/>
+          </a:prstGeom>
+          <a:solidFill>
+            <a:srgbClr val="F2F2F2"/>
+          </a:solidFill>
+          <a:ln>
+            <a:noFill/>
+          </a:ln>
+        </p:spPr>
+        <p:style>
+          <a:lnRef idx="1">
+            <a:schemeClr val="accent1"/>
+          </a:lnRef>
+          <a:fillRef idx="3">
+            <a:schemeClr val="accent1"/>
+          </a:fillRef>
+          <a:effectRef idx="2">
+            <a:schemeClr val="accent1"/>
+          </a:effectRef>
+          <a:fontRef idx="minor">
+            <a:schemeClr val="lt1"/>
+          </a:fontRef>
+        </p:style>
+        <p:txBody>
+          <a:bodyPr rtlCol="0" anchor="ctr"/>
+          <a:lstStyle/>
+          <a:p>
+            <a:pPr algn="ctr"/>
+          </a:p>
+        </p:txBody>
+      </p:sp>
+      <p:sp>
+        <p:nvSpPr>
+          <p:cNvPr id="26" name="TextBox 25"/>
+          <p:cNvSpPr txBox="1"/>
+          <p:nvPr/>
+        </p:nvSpPr>
+        <p:spPr>
+          <a:xfrm>
+            <a:off x="457200" y="6537960"/>
+            <a:ext cx="8229600" cy="320040"/>
+          </a:xfrm>
+          <a:prstGeom prst="rect">
+            <a:avLst/>
+          </a:prstGeom>
+          <a:noFill/>
+        </p:spPr>
+        <p:txBody>
+          <a:bodyPr wrap="square" anchor="ctr"/>
+          <a:lstStyle/>
+          <a:p>
+            <a:pPr algn="l">
+              <a:spcAft>
+                <a:spcPts val="200"/>
+              </a:spcAft>
+            </a:pPr>
+            <a:r>
+              <a:rPr sz="900" b="0">
+                <a:solidFill>
+                  <a:srgbClr val="898989"/>
+                </a:solidFill>
+                <a:latin typeface="Microsoft YaHei"/>
+                <a:ea typeface="Microsoft YaHei"/>
+                <a:cs typeface="Microsoft YaHei"/>
+              </a:rPr>
+              <a:t>华为  ·  AI 物理感知平台  ·  决策    |    Security Level: Internal</a:t>
+            </a:r>
+          </a:p>
+        </p:txBody>
+      </p:sp>
+      <p:sp>
+        <p:nvSpPr>
+          <p:cNvPr id="27" name="TextBox 26"/>
+          <p:cNvSpPr txBox="1"/>
+          <p:nvPr/>
+        </p:nvSpPr>
+        <p:spPr>
+          <a:xfrm>
+            <a:off x="10241280" y="6537960"/>
+            <a:ext cx="1554480" cy="320040"/>
+          </a:xfrm>
+          <a:prstGeom prst="rect">
+            <a:avLst/>
+          </a:prstGeom>
+          <a:noFill/>
+        </p:spPr>
+        <p:txBody>
+          <a:bodyPr wrap="square" anchor="ctr"/>
+          <a:lstStyle/>
+          <a:p>
+            <a:pPr algn="r">
+              <a:spcAft>
+                <a:spcPts val="200"/>
+              </a:spcAft>
+            </a:pPr>
+            <a:r>
+              <a:rPr sz="900" b="0">
+                <a:solidFill>
+                  <a:srgbClr val="898989"/>
+                </a:solidFill>
+                <a:latin typeface="Microsoft YaHei"/>
+                <a:ea typeface="Microsoft YaHei"/>
+                <a:cs typeface="Microsoft YaHei"/>
+              </a:rPr>
+              <a:t>10  /  10</a:t>
             </a:r>
           </a:p>
         </p:txBody>
@@ -7590,7 +8684,7 @@
                 <a:ea typeface="Microsoft YaHei"/>
                 <a:cs typeface="Microsoft YaHei"/>
               </a:rPr>
-              <a:t>1  平台边界</a:t>
+              <a:t>1  模型盘点 · 通用时序</a:t>
             </a:r>
           </a:p>
         </p:txBody>
@@ -7629,7 +8723,7 @@
                 <a:ea typeface="Microsoft YaHei"/>
                 <a:cs typeface="Microsoft YaHei"/>
               </a:rPr>
-              <a:t>只做工具，不做场景；接口稳定，底座可换</a:t>
+              <a:t>通用时序基础模型：预测强，分类只有两家原生支持</a:t>
             </a:r>
           </a:p>
         </p:txBody>
@@ -7711,21 +8805,216 @@
                 <a:ea typeface="Microsoft YaHei"/>
                 <a:cs typeface="Microsoft YaHei"/>
               </a:rPr>
-              <a:t>明确划分：平台负责 Ingest → 表征 → 推理；场景方负责业务标签与闭环。</a:t>
-            </a:r>
-          </a:p>
-        </p:txBody>
-      </p:sp>
-      <p:sp>
-        <p:nvSpPr>
-          <p:cNvPr id="7" name="Rounded Rectangle 6"/>
+              <a:t>口径：预训练目标决定原生能力；TimesFM / Chronos / Moirai 都只做预测。</a:t>
+            </a:r>
+          </a:p>
+        </p:txBody>
+      </p:sp>
+      <p:sp>
+        <p:nvSpPr>
+          <p:cNvPr id="7" name="TextBox 6"/>
+          <p:cNvSpPr txBox="1"/>
+          <p:nvPr/>
+        </p:nvSpPr>
+        <p:spPr>
+          <a:xfrm>
+            <a:off x="566928" y="1298448"/>
+            <a:ext cx="2103120" cy="292608"/>
+          </a:xfrm>
+          <a:prstGeom prst="rect">
+            <a:avLst/>
+          </a:prstGeom>
+          <a:noFill/>
+        </p:spPr>
+        <p:txBody>
+          <a:bodyPr wrap="square" anchor="t"/>
+          <a:lstStyle/>
+          <a:p>
+            <a:pPr algn="l">
+              <a:spcAft>
+                <a:spcPts val="200"/>
+              </a:spcAft>
+            </a:pPr>
+            <a:r>
+              <a:rPr sz="1200" b="1">
+                <a:solidFill>
+                  <a:srgbClr val="898989"/>
+                </a:solidFill>
+                <a:latin typeface="Microsoft YaHei"/>
+                <a:ea typeface="Microsoft YaHei"/>
+                <a:cs typeface="Microsoft YaHei"/>
+              </a:rPr>
+              <a:t>模型 / 出处</a:t>
+            </a:r>
+          </a:p>
+        </p:txBody>
+      </p:sp>
+      <p:sp>
+        <p:nvSpPr>
+          <p:cNvPr id="8" name="TextBox 7"/>
+          <p:cNvSpPr txBox="1"/>
+          <p:nvPr/>
+        </p:nvSpPr>
+        <p:spPr>
+          <a:xfrm>
+            <a:off x="2898648" y="1298448"/>
+            <a:ext cx="2103120" cy="292608"/>
+          </a:xfrm>
+          <a:prstGeom prst="rect">
+            <a:avLst/>
+          </a:prstGeom>
+          <a:noFill/>
+        </p:spPr>
+        <p:txBody>
+          <a:bodyPr wrap="square" anchor="t"/>
+          <a:lstStyle/>
+          <a:p>
+            <a:pPr algn="l">
+              <a:spcAft>
+                <a:spcPts val="200"/>
+              </a:spcAft>
+            </a:pPr>
+            <a:r>
+              <a:rPr sz="1200" b="1">
+                <a:solidFill>
+                  <a:srgbClr val="898989"/>
+                </a:solidFill>
+                <a:latin typeface="Microsoft YaHei"/>
+                <a:ea typeface="Microsoft YaHei"/>
+                <a:cs typeface="Microsoft YaHei"/>
+              </a:rPr>
+              <a:t>预训练目标</a:t>
+            </a:r>
+          </a:p>
+        </p:txBody>
+      </p:sp>
+      <p:sp>
+        <p:nvSpPr>
+          <p:cNvPr id="9" name="TextBox 8"/>
+          <p:cNvSpPr txBox="1"/>
+          <p:nvPr/>
+        </p:nvSpPr>
+        <p:spPr>
+          <a:xfrm>
+            <a:off x="5230368" y="1298448"/>
+            <a:ext cx="3108960" cy="292608"/>
+          </a:xfrm>
+          <a:prstGeom prst="rect">
+            <a:avLst/>
+          </a:prstGeom>
+          <a:noFill/>
+        </p:spPr>
+        <p:txBody>
+          <a:bodyPr wrap="square" anchor="t"/>
+          <a:lstStyle/>
+          <a:p>
+            <a:pPr algn="l">
+              <a:spcAft>
+                <a:spcPts val="200"/>
+              </a:spcAft>
+            </a:pPr>
+            <a:r>
+              <a:rPr sz="1200" b="1">
+                <a:solidFill>
+                  <a:srgbClr val="898989"/>
+                </a:solidFill>
+                <a:latin typeface="Microsoft YaHei"/>
+                <a:ea typeface="Microsoft YaHei"/>
+                <a:cs typeface="Microsoft YaHei"/>
+              </a:rPr>
+              <a:t>原生能力</a:t>
+            </a:r>
+          </a:p>
+        </p:txBody>
+      </p:sp>
+      <p:sp>
+        <p:nvSpPr>
+          <p:cNvPr id="10" name="TextBox 9"/>
+          <p:cNvSpPr txBox="1"/>
+          <p:nvPr/>
+        </p:nvSpPr>
+        <p:spPr>
+          <a:xfrm>
+            <a:off x="8567928" y="1298448"/>
+            <a:ext cx="1097280" cy="292608"/>
+          </a:xfrm>
+          <a:prstGeom prst="rect">
+            <a:avLst/>
+          </a:prstGeom>
+          <a:noFill/>
+        </p:spPr>
+        <p:txBody>
+          <a:bodyPr wrap="square" anchor="t"/>
+          <a:lstStyle/>
+          <a:p>
+            <a:pPr algn="l">
+              <a:spcAft>
+                <a:spcPts val="200"/>
+              </a:spcAft>
+            </a:pPr>
+            <a:r>
+              <a:rPr sz="1200" b="1">
+                <a:solidFill>
+                  <a:srgbClr val="898989"/>
+                </a:solidFill>
+                <a:latin typeface="Microsoft YaHei"/>
+                <a:ea typeface="Microsoft YaHei"/>
+                <a:cs typeface="Microsoft YaHei"/>
+              </a:rPr>
+              <a:t>分类</a:t>
+            </a:r>
+          </a:p>
+        </p:txBody>
+      </p:sp>
+      <p:sp>
+        <p:nvSpPr>
+          <p:cNvPr id="11" name="TextBox 10"/>
+          <p:cNvSpPr txBox="1"/>
+          <p:nvPr/>
+        </p:nvSpPr>
+        <p:spPr>
+          <a:xfrm>
+            <a:off x="9893807" y="1298448"/>
+            <a:ext cx="1737360" cy="292608"/>
+          </a:xfrm>
+          <a:prstGeom prst="rect">
+            <a:avLst/>
+          </a:prstGeom>
+          <a:noFill/>
+        </p:spPr>
+        <p:txBody>
+          <a:bodyPr wrap="square" anchor="t"/>
+          <a:lstStyle/>
+          <a:p>
+            <a:pPr algn="l">
+              <a:spcAft>
+                <a:spcPts val="200"/>
+              </a:spcAft>
+            </a:pPr>
+            <a:r>
+              <a:rPr sz="1200" b="1">
+                <a:solidFill>
+                  <a:srgbClr val="898989"/>
+                </a:solidFill>
+                <a:latin typeface="Microsoft YaHei"/>
+                <a:ea typeface="Microsoft YaHei"/>
+                <a:cs typeface="Microsoft YaHei"/>
+              </a:rPr>
+              <a:t>许可</a:t>
+            </a:r>
+          </a:p>
+        </p:txBody>
+      </p:sp>
+      <p:sp>
+        <p:nvSpPr>
+          <p:cNvPr id="12" name="Rounded Rectangle 11"/>
           <p:cNvSpPr/>
           <p:nvPr/>
         </p:nvSpPr>
         <p:spPr>
           <a:xfrm>
-            <a:off x="457200" y="1371600"/>
-            <a:ext cx="5623560" cy="1234440"/>
+            <a:off x="457200" y="1664208"/>
+            <a:ext cx="11247120" cy="749808"/>
           </a:xfrm>
           <a:prstGeom prst="roundRect">
             <a:avLst>
@@ -7765,14 +9054,14 @@
       </p:sp>
       <p:sp>
         <p:nvSpPr>
-          <p:cNvPr id="8" name="TextBox 7"/>
+          <p:cNvPr id="13" name="TextBox 12"/>
           <p:cNvSpPr txBox="1"/>
           <p:nvPr/>
         </p:nvSpPr>
         <p:spPr>
           <a:xfrm>
-            <a:off x="658368" y="1536192"/>
-            <a:ext cx="5212080" cy="320040"/>
+            <a:off x="566928" y="1719072"/>
+            <a:ext cx="2103120" cy="658368"/>
           </a:xfrm>
           <a:prstGeom prst="rect">
             <a:avLst/>
@@ -7789,7 +9078,7 @@
               </a:spcAft>
             </a:pPr>
             <a:r>
-              <a:rPr sz="1500" b="1">
+              <a:rPr sz="1200" b="1">
                 <a:solidFill>
                   <a:srgbClr val="C7000B"/>
                 </a:solidFill>
@@ -7797,21 +9086,39 @@
                 <a:ea typeface="Microsoft YaHei"/>
                 <a:cs typeface="Microsoft YaHei"/>
               </a:rPr>
-              <a:t>平台交付</a:t>
-            </a:r>
-          </a:p>
-        </p:txBody>
-      </p:sp>
-      <p:sp>
-        <p:nvSpPr>
-          <p:cNvPr id="9" name="TextBox 8"/>
+              <a:t>TimesFM-3</a:t>
+            </a:r>
+          </a:p>
+          <a:p>
+            <a:pPr algn="l">
+              <a:spcAft>
+                <a:spcPts val="200"/>
+              </a:spcAft>
+            </a:pPr>
+            <a:r>
+              <a:rPr sz="1200" b="1">
+                <a:solidFill>
+                  <a:srgbClr val="C7000B"/>
+                </a:solidFill>
+                <a:latin typeface="Microsoft YaHei"/>
+                <a:ea typeface="Microsoft YaHei"/>
+                <a:cs typeface="Microsoft YaHei"/>
+              </a:rPr>
+              <a:t>Google 2026</a:t>
+            </a:r>
+          </a:p>
+        </p:txBody>
+      </p:sp>
+      <p:sp>
+        <p:nvSpPr>
+          <p:cNvPr id="14" name="TextBox 13"/>
           <p:cNvSpPr txBox="1"/>
           <p:nvPr/>
         </p:nvSpPr>
         <p:spPr>
           <a:xfrm>
-            <a:off x="658368" y="1901952"/>
-            <a:ext cx="5212080" cy="548640"/>
+            <a:off x="2898648" y="1719072"/>
+            <a:ext cx="2103120" cy="658368"/>
           </a:xfrm>
           <a:prstGeom prst="rect">
             <a:avLst/>
@@ -7828,7 +9135,7 @@
               </a:spcAft>
             </a:pPr>
             <a:r>
-              <a:rPr sz="1400" b="0">
+              <a:rPr sz="1100" b="0">
                 <a:solidFill>
                   <a:srgbClr val="555757"/>
                 </a:solidFill>
@@ -7836,21 +9143,470 @@
                 <a:ea typeface="Microsoft YaHei"/>
                 <a:cs typeface="Microsoft YaHei"/>
               </a:rPr>
-              <a:t>PhysIngest 校验、共享表征、predict() / classify()、评测工具链</a:t>
-            </a:r>
-          </a:p>
-        </p:txBody>
-      </p:sp>
-      <p:sp>
-        <p:nvSpPr>
-          <p:cNvPr id="10" name="Rounded Rectangle 9"/>
+              <a:t>decoder-only</a:t>
+            </a:r>
+          </a:p>
+          <a:p>
+            <a:pPr algn="l">
+              <a:spcAft>
+                <a:spcPts val="200"/>
+              </a:spcAft>
+            </a:pPr>
+            <a:r>
+              <a:rPr sz="1100" b="0">
+                <a:solidFill>
+                  <a:srgbClr val="555757"/>
+                </a:solidFill>
+                <a:latin typeface="Microsoft YaHei"/>
+                <a:ea typeface="Microsoft YaHei"/>
+                <a:cs typeface="Microsoft YaHei"/>
+              </a:rPr>
+              <a:t>分位数回归</a:t>
+            </a:r>
+          </a:p>
+        </p:txBody>
+      </p:sp>
+      <p:sp>
+        <p:nvSpPr>
+          <p:cNvPr id="15" name="TextBox 14"/>
+          <p:cNvSpPr txBox="1"/>
+          <p:nvPr/>
+        </p:nvSpPr>
+        <p:spPr>
+          <a:xfrm>
+            <a:off x="5230368" y="1719072"/>
+            <a:ext cx="3108960" cy="658368"/>
+          </a:xfrm>
+          <a:prstGeom prst="rect">
+            <a:avLst/>
+          </a:prstGeom>
+          <a:noFill/>
+        </p:spPr>
+        <p:txBody>
+          <a:bodyPr wrap="square" anchor="t"/>
+          <a:lstStyle/>
+          <a:p>
+            <a:pPr algn="l">
+              <a:spcAft>
+                <a:spcPts val="200"/>
+              </a:spcAft>
+            </a:pPr>
+            <a:r>
+              <a:rPr sz="1100" b="0">
+                <a:solidFill>
+                  <a:srgbClr val="555757"/>
+                </a:solidFill>
+                <a:latin typeface="Microsoft YaHei"/>
+                <a:ea typeface="Microsoft YaHei"/>
+                <a:cs typeface="Microsoft YaHei"/>
+              </a:rPr>
+              <a:t>多变量预测 + 协变量；</a:t>
+            </a:r>
+          </a:p>
+          <a:p>
+            <a:pPr algn="l">
+              <a:spcAft>
+                <a:spcPts val="200"/>
+              </a:spcAft>
+            </a:pPr>
+            <a:r>
+              <a:rPr sz="1100" b="0">
+                <a:solidFill>
+                  <a:srgbClr val="555757"/>
+                </a:solidFill>
+                <a:latin typeface="Microsoft YaHei"/>
+                <a:ea typeface="Microsoft YaHei"/>
+                <a:cs typeface="Microsoft YaHei"/>
+              </a:rPr>
+              <a:t>CPM 一次前向出 9 分位</a:t>
+            </a:r>
+          </a:p>
+        </p:txBody>
+      </p:sp>
+      <p:sp>
+        <p:nvSpPr>
+          <p:cNvPr id="16" name="TextBox 15"/>
+          <p:cNvSpPr txBox="1"/>
+          <p:nvPr/>
+        </p:nvSpPr>
+        <p:spPr>
+          <a:xfrm>
+            <a:off x="8567928" y="1719072"/>
+            <a:ext cx="1097280" cy="658368"/>
+          </a:xfrm>
+          <a:prstGeom prst="rect">
+            <a:avLst/>
+          </a:prstGeom>
+          <a:noFill/>
+        </p:spPr>
+        <p:txBody>
+          <a:bodyPr wrap="square" anchor="t"/>
+          <a:lstStyle/>
+          <a:p>
+            <a:pPr algn="l">
+              <a:spcAft>
+                <a:spcPts val="200"/>
+              </a:spcAft>
+            </a:pPr>
+            <a:r>
+              <a:rPr sz="1200" b="1">
+                <a:solidFill>
+                  <a:srgbClr val="898989"/>
+                </a:solidFill>
+                <a:latin typeface="Microsoft YaHei"/>
+                <a:ea typeface="Microsoft YaHei"/>
+                <a:cs typeface="Microsoft YaHei"/>
+              </a:rPr>
+              <a:t>✗ 规则/加头</a:t>
+            </a:r>
+          </a:p>
+        </p:txBody>
+      </p:sp>
+      <p:sp>
+        <p:nvSpPr>
+          <p:cNvPr id="17" name="TextBox 16"/>
+          <p:cNvSpPr txBox="1"/>
+          <p:nvPr/>
+        </p:nvSpPr>
+        <p:spPr>
+          <a:xfrm>
+            <a:off x="9893807" y="1719072"/>
+            <a:ext cx="1737360" cy="658368"/>
+          </a:xfrm>
+          <a:prstGeom prst="rect">
+            <a:avLst/>
+          </a:prstGeom>
+          <a:noFill/>
+        </p:spPr>
+        <p:txBody>
+          <a:bodyPr wrap="square" anchor="t"/>
+          <a:lstStyle/>
+          <a:p>
+            <a:pPr algn="l">
+              <a:spcAft>
+                <a:spcPts val="200"/>
+              </a:spcAft>
+            </a:pPr>
+            <a:r>
+              <a:rPr sz="1100" b="0">
+                <a:solidFill>
+                  <a:srgbClr val="555757"/>
+                </a:solidFill>
+                <a:latin typeface="Microsoft YaHei"/>
+                <a:ea typeface="Microsoft YaHei"/>
+                <a:cs typeface="Microsoft YaHei"/>
+              </a:rPr>
+              <a:t>3.0 权重 NC</a:t>
+            </a:r>
+          </a:p>
+          <a:p>
+            <a:pPr algn="l">
+              <a:spcAft>
+                <a:spcPts val="200"/>
+              </a:spcAft>
+            </a:pPr>
+            <a:r>
+              <a:rPr sz="1100" b="0">
+                <a:solidFill>
+                  <a:srgbClr val="555757"/>
+                </a:solidFill>
+                <a:latin typeface="Microsoft YaHei"/>
+                <a:ea typeface="Microsoft YaHei"/>
+                <a:cs typeface="Microsoft YaHei"/>
+              </a:rPr>
+              <a:t>≤2.5 Apache</a:t>
+            </a:r>
+          </a:p>
+        </p:txBody>
+      </p:sp>
+      <p:sp>
+        <p:nvSpPr>
+          <p:cNvPr id="18" name="Rounded Rectangle 17"/>
           <p:cNvSpPr/>
           <p:nvPr/>
         </p:nvSpPr>
         <p:spPr>
           <a:xfrm>
-            <a:off x="6263640" y="1371600"/>
-            <a:ext cx="5623560" cy="1234440"/>
+            <a:off x="457200" y="2487168"/>
+            <a:ext cx="11247120" cy="749808"/>
+          </a:xfrm>
+          <a:prstGeom prst="roundRect">
+            <a:avLst>
+              <a:gd name="adj" fmla="val 5000"/>
+            </a:avLst>
+          </a:prstGeom>
+          <a:solidFill>
+            <a:srgbClr val="F7F7F7"/>
+          </a:solidFill>
+          <a:ln w="9525">
+            <a:solidFill>
+              <a:srgbClr val="DDDDDD"/>
+            </a:solidFill>
+          </a:ln>
+        </p:spPr>
+        <p:style>
+          <a:lnRef idx="1">
+            <a:schemeClr val="accent1"/>
+          </a:lnRef>
+          <a:fillRef idx="3">
+            <a:schemeClr val="accent1"/>
+          </a:fillRef>
+          <a:effectRef idx="2">
+            <a:schemeClr val="accent1"/>
+          </a:effectRef>
+          <a:fontRef idx="minor">
+            <a:schemeClr val="lt1"/>
+          </a:fontRef>
+        </p:style>
+        <p:txBody>
+          <a:bodyPr rtlCol="0" anchor="ctr"/>
+          <a:lstStyle/>
+          <a:p>
+            <a:pPr algn="ctr"/>
+          </a:p>
+        </p:txBody>
+      </p:sp>
+      <p:sp>
+        <p:nvSpPr>
+          <p:cNvPr id="19" name="TextBox 18"/>
+          <p:cNvSpPr txBox="1"/>
+          <p:nvPr/>
+        </p:nvSpPr>
+        <p:spPr>
+          <a:xfrm>
+            <a:off x="566928" y="2542032"/>
+            <a:ext cx="2103120" cy="658368"/>
+          </a:xfrm>
+          <a:prstGeom prst="rect">
+            <a:avLst/>
+          </a:prstGeom>
+          <a:noFill/>
+        </p:spPr>
+        <p:txBody>
+          <a:bodyPr wrap="square" anchor="t"/>
+          <a:lstStyle/>
+          <a:p>
+            <a:pPr algn="l">
+              <a:spcAft>
+                <a:spcPts val="200"/>
+              </a:spcAft>
+            </a:pPr>
+            <a:r>
+              <a:rPr sz="1200" b="1">
+                <a:solidFill>
+                  <a:srgbClr val="C7000B"/>
+                </a:solidFill>
+                <a:latin typeface="Microsoft YaHei"/>
+                <a:ea typeface="Microsoft YaHei"/>
+                <a:cs typeface="Microsoft YaHei"/>
+              </a:rPr>
+              <a:t>Chronos</a:t>
+            </a:r>
+          </a:p>
+          <a:p>
+            <a:pPr algn="l">
+              <a:spcAft>
+                <a:spcPts val="200"/>
+              </a:spcAft>
+            </a:pPr>
+            <a:r>
+              <a:rPr sz="1200" b="1">
+                <a:solidFill>
+                  <a:srgbClr val="C7000B"/>
+                </a:solidFill>
+                <a:latin typeface="Microsoft YaHei"/>
+                <a:ea typeface="Microsoft YaHei"/>
+                <a:cs typeface="Microsoft YaHei"/>
+              </a:rPr>
+              <a:t>Amazon 2024</a:t>
+            </a:r>
+          </a:p>
+        </p:txBody>
+      </p:sp>
+      <p:sp>
+        <p:nvSpPr>
+          <p:cNvPr id="20" name="TextBox 19"/>
+          <p:cNvSpPr txBox="1"/>
+          <p:nvPr/>
+        </p:nvSpPr>
+        <p:spPr>
+          <a:xfrm>
+            <a:off x="2898648" y="2542032"/>
+            <a:ext cx="2103120" cy="658368"/>
+          </a:xfrm>
+          <a:prstGeom prst="rect">
+            <a:avLst/>
+          </a:prstGeom>
+          <a:noFill/>
+        </p:spPr>
+        <p:txBody>
+          <a:bodyPr wrap="square" anchor="t"/>
+          <a:lstStyle/>
+          <a:p>
+            <a:pPr algn="l">
+              <a:spcAft>
+                <a:spcPts val="200"/>
+              </a:spcAft>
+            </a:pPr>
+            <a:r>
+              <a:rPr sz="1100" b="0">
+                <a:solidFill>
+                  <a:srgbClr val="555757"/>
+                </a:solidFill>
+                <a:latin typeface="Microsoft YaHei"/>
+                <a:ea typeface="Microsoft YaHei"/>
+                <a:cs typeface="Microsoft YaHei"/>
+              </a:rPr>
+              <a:t>离散 token</a:t>
+            </a:r>
+          </a:p>
+          <a:p>
+            <a:pPr algn="l">
+              <a:spcAft>
+                <a:spcPts val="200"/>
+              </a:spcAft>
+            </a:pPr>
+            <a:r>
+              <a:rPr sz="1100" b="0">
+                <a:solidFill>
+                  <a:srgbClr val="555757"/>
+                </a:solidFill>
+                <a:latin typeface="Microsoft YaHei"/>
+                <a:ea typeface="Microsoft YaHei"/>
+                <a:cs typeface="Microsoft YaHei"/>
+              </a:rPr>
+              <a:t>T5 式 NTP</a:t>
+            </a:r>
+          </a:p>
+        </p:txBody>
+      </p:sp>
+      <p:sp>
+        <p:nvSpPr>
+          <p:cNvPr id="21" name="TextBox 20"/>
+          <p:cNvSpPr txBox="1"/>
+          <p:nvPr/>
+        </p:nvSpPr>
+        <p:spPr>
+          <a:xfrm>
+            <a:off x="5230368" y="2542032"/>
+            <a:ext cx="3108960" cy="658368"/>
+          </a:xfrm>
+          <a:prstGeom prst="rect">
+            <a:avLst/>
+          </a:prstGeom>
+          <a:noFill/>
+        </p:spPr>
+        <p:txBody>
+          <a:bodyPr wrap="square" anchor="t"/>
+          <a:lstStyle/>
+          <a:p>
+            <a:pPr algn="l">
+              <a:spcAft>
+                <a:spcPts val="200"/>
+              </a:spcAft>
+            </a:pPr>
+            <a:r>
+              <a:rPr sz="1100" b="0">
+                <a:solidFill>
+                  <a:srgbClr val="555757"/>
+                </a:solidFill>
+                <a:latin typeface="Microsoft YaHei"/>
+                <a:ea typeface="Microsoft YaHei"/>
+                <a:cs typeface="Microsoft YaHei"/>
+              </a:rPr>
+              <a:t>单变量概率预测</a:t>
+            </a:r>
+          </a:p>
+        </p:txBody>
+      </p:sp>
+      <p:sp>
+        <p:nvSpPr>
+          <p:cNvPr id="22" name="TextBox 21"/>
+          <p:cNvSpPr txBox="1"/>
+          <p:nvPr/>
+        </p:nvSpPr>
+        <p:spPr>
+          <a:xfrm>
+            <a:off x="8567928" y="2542032"/>
+            <a:ext cx="1097280" cy="658368"/>
+          </a:xfrm>
+          <a:prstGeom prst="rect">
+            <a:avLst/>
+          </a:prstGeom>
+          <a:noFill/>
+        </p:spPr>
+        <p:txBody>
+          <a:bodyPr wrap="square" anchor="t"/>
+          <a:lstStyle/>
+          <a:p>
+            <a:pPr algn="l">
+              <a:spcAft>
+                <a:spcPts val="200"/>
+              </a:spcAft>
+            </a:pPr>
+            <a:r>
+              <a:rPr sz="1200" b="1">
+                <a:solidFill>
+                  <a:srgbClr val="898989"/>
+                </a:solidFill>
+                <a:latin typeface="Microsoft YaHei"/>
+                <a:ea typeface="Microsoft YaHei"/>
+                <a:cs typeface="Microsoft YaHei"/>
+              </a:rPr>
+              <a:t>✗</a:t>
+            </a:r>
+          </a:p>
+        </p:txBody>
+      </p:sp>
+      <p:sp>
+        <p:nvSpPr>
+          <p:cNvPr id="23" name="TextBox 22"/>
+          <p:cNvSpPr txBox="1"/>
+          <p:nvPr/>
+        </p:nvSpPr>
+        <p:spPr>
+          <a:xfrm>
+            <a:off x="9893807" y="2542032"/>
+            <a:ext cx="1737360" cy="658368"/>
+          </a:xfrm>
+          <a:prstGeom prst="rect">
+            <a:avLst/>
+          </a:prstGeom>
+          <a:noFill/>
+        </p:spPr>
+        <p:txBody>
+          <a:bodyPr wrap="square" anchor="t"/>
+          <a:lstStyle/>
+          <a:p>
+            <a:pPr algn="l">
+              <a:spcAft>
+                <a:spcPts val="200"/>
+              </a:spcAft>
+            </a:pPr>
+            <a:r>
+              <a:rPr sz="1100" b="0">
+                <a:solidFill>
+                  <a:srgbClr val="555757"/>
+                </a:solidFill>
+                <a:latin typeface="Microsoft YaHei"/>
+                <a:ea typeface="Microsoft YaHei"/>
+                <a:cs typeface="Microsoft YaHei"/>
+              </a:rPr>
+              <a:t>Apache-2.0</a:t>
+            </a:r>
+          </a:p>
+        </p:txBody>
+      </p:sp>
+      <p:sp>
+        <p:nvSpPr>
+          <p:cNvPr id="24" name="Rounded Rectangle 23"/>
+          <p:cNvSpPr/>
+          <p:nvPr/>
+        </p:nvSpPr>
+        <p:spPr>
+          <a:xfrm>
+            <a:off x="457200" y="3310128"/>
+            <a:ext cx="11247120" cy="749808"/>
           </a:xfrm>
           <a:prstGeom prst="roundRect">
             <a:avLst>
@@ -7890,14 +9646,14 @@
       </p:sp>
       <p:sp>
         <p:nvSpPr>
-          <p:cNvPr id="11" name="TextBox 10"/>
+          <p:cNvPr id="25" name="TextBox 24"/>
           <p:cNvSpPr txBox="1"/>
           <p:nvPr/>
         </p:nvSpPr>
         <p:spPr>
           <a:xfrm>
-            <a:off x="6464808" y="1536192"/>
-            <a:ext cx="5212080" cy="320040"/>
+            <a:off x="566928" y="3364992"/>
+            <a:ext cx="2103120" cy="658368"/>
           </a:xfrm>
           <a:prstGeom prst="rect">
             <a:avLst/>
@@ -7914,7 +9670,7 @@
               </a:spcAft>
             </a:pPr>
             <a:r>
-              <a:rPr sz="1500" b="1">
+              <a:rPr sz="1200" b="1">
                 <a:solidFill>
                   <a:srgbClr val="C7000B"/>
                 </a:solidFill>
@@ -7922,21 +9678,39 @@
                 <a:ea typeface="Microsoft YaHei"/>
                 <a:cs typeface="Microsoft YaHei"/>
               </a:rPr>
-              <a:t>平台不交付</a:t>
-            </a:r>
-          </a:p>
-        </p:txBody>
-      </p:sp>
-      <p:sp>
-        <p:nvSpPr>
-          <p:cNvPr id="12" name="TextBox 11"/>
+              <a:t>Moirai</a:t>
+            </a:r>
+          </a:p>
+          <a:p>
+            <a:pPr algn="l">
+              <a:spcAft>
+                <a:spcPts val="200"/>
+              </a:spcAft>
+            </a:pPr>
+            <a:r>
+              <a:rPr sz="1200" b="1">
+                <a:solidFill>
+                  <a:srgbClr val="C7000B"/>
+                </a:solidFill>
+                <a:latin typeface="Microsoft YaHei"/>
+                <a:ea typeface="Microsoft YaHei"/>
+                <a:cs typeface="Microsoft YaHei"/>
+              </a:rPr>
+              <a:t>Salesforce 2024</a:t>
+            </a:r>
+          </a:p>
+        </p:txBody>
+      </p:sp>
+      <p:sp>
+        <p:nvSpPr>
+          <p:cNvPr id="26" name="TextBox 25"/>
           <p:cNvSpPr txBox="1"/>
           <p:nvPr/>
         </p:nvSpPr>
         <p:spPr>
           <a:xfrm>
-            <a:off x="6464808" y="1901952"/>
-            <a:ext cx="5212080" cy="548640"/>
+            <a:off x="2898648" y="3364992"/>
+            <a:ext cx="2103120" cy="658368"/>
           </a:xfrm>
           <a:prstGeom prst="rect">
             <a:avLst/>
@@ -7953,7 +9727,7 @@
               </a:spcAft>
             </a:pPr>
             <a:r>
-              <a:rPr sz="1400" b="0">
+              <a:rPr sz="1100" b="0">
                 <a:solidFill>
                   <a:srgbClr val="555757"/>
                 </a:solidFill>
@@ -7961,21 +9735,470 @@
                 <a:ea typeface="Microsoft YaHei"/>
                 <a:cs typeface="Microsoft YaHei"/>
               </a:rPr>
-              <a:t>场景 Pack、整机 App、芯片、盘古、世界视频、把 TimesFM 当分类模型宣传</a:t>
-            </a:r>
-          </a:p>
-        </p:txBody>
-      </p:sp>
-      <p:sp>
-        <p:nvSpPr>
-          <p:cNvPr id="13" name="Rounded Rectangle 12"/>
+              <a:t>masked encoder</a:t>
+            </a:r>
+          </a:p>
+          <a:p>
+            <a:pPr algn="l">
+              <a:spcAft>
+                <a:spcPts val="200"/>
+              </a:spcAft>
+            </a:pPr>
+            <a:r>
+              <a:rPr sz="1100" b="0">
+                <a:solidFill>
+                  <a:srgbClr val="555757"/>
+                </a:solidFill>
+                <a:latin typeface="Microsoft YaHei"/>
+                <a:ea typeface="Microsoft YaHei"/>
+                <a:cs typeface="Microsoft YaHei"/>
+              </a:rPr>
+              <a:t>any-variate</a:t>
+            </a:r>
+          </a:p>
+        </p:txBody>
+      </p:sp>
+      <p:sp>
+        <p:nvSpPr>
+          <p:cNvPr id="27" name="TextBox 26"/>
+          <p:cNvSpPr txBox="1"/>
+          <p:nvPr/>
+        </p:nvSpPr>
+        <p:spPr>
+          <a:xfrm>
+            <a:off x="5230368" y="3364992"/>
+            <a:ext cx="3108960" cy="658368"/>
+          </a:xfrm>
+          <a:prstGeom prst="rect">
+            <a:avLst/>
+          </a:prstGeom>
+          <a:noFill/>
+        </p:spPr>
+        <p:txBody>
+          <a:bodyPr wrap="square" anchor="t"/>
+          <a:lstStyle/>
+          <a:p>
+            <a:pPr algn="l">
+              <a:spcAft>
+                <a:spcPts val="200"/>
+              </a:spcAft>
+            </a:pPr>
+            <a:r>
+              <a:rPr sz="1100" b="0">
+                <a:solidFill>
+                  <a:srgbClr val="555757"/>
+                </a:solidFill>
+                <a:latin typeface="Microsoft YaHei"/>
+                <a:ea typeface="Microsoft YaHei"/>
+                <a:cs typeface="Microsoft YaHei"/>
+              </a:rPr>
+              <a:t>多变量概率预测</a:t>
+            </a:r>
+          </a:p>
+        </p:txBody>
+      </p:sp>
+      <p:sp>
+        <p:nvSpPr>
+          <p:cNvPr id="28" name="TextBox 27"/>
+          <p:cNvSpPr txBox="1"/>
+          <p:nvPr/>
+        </p:nvSpPr>
+        <p:spPr>
+          <a:xfrm>
+            <a:off x="8567928" y="3364992"/>
+            <a:ext cx="1097280" cy="658368"/>
+          </a:xfrm>
+          <a:prstGeom prst="rect">
+            <a:avLst/>
+          </a:prstGeom>
+          <a:noFill/>
+        </p:spPr>
+        <p:txBody>
+          <a:bodyPr wrap="square" anchor="t"/>
+          <a:lstStyle/>
+          <a:p>
+            <a:pPr algn="l">
+              <a:spcAft>
+                <a:spcPts val="200"/>
+              </a:spcAft>
+            </a:pPr>
+            <a:r>
+              <a:rPr sz="1200" b="1">
+                <a:solidFill>
+                  <a:srgbClr val="898989"/>
+                </a:solidFill>
+                <a:latin typeface="Microsoft YaHei"/>
+                <a:ea typeface="Microsoft YaHei"/>
+                <a:cs typeface="Microsoft YaHei"/>
+              </a:rPr>
+              <a:t>✗</a:t>
+            </a:r>
+          </a:p>
+        </p:txBody>
+      </p:sp>
+      <p:sp>
+        <p:nvSpPr>
+          <p:cNvPr id="29" name="TextBox 28"/>
+          <p:cNvSpPr txBox="1"/>
+          <p:nvPr/>
+        </p:nvSpPr>
+        <p:spPr>
+          <a:xfrm>
+            <a:off x="9893807" y="3364992"/>
+            <a:ext cx="1737360" cy="658368"/>
+          </a:xfrm>
+          <a:prstGeom prst="rect">
+            <a:avLst/>
+          </a:prstGeom>
+          <a:noFill/>
+        </p:spPr>
+        <p:txBody>
+          <a:bodyPr wrap="square" anchor="t"/>
+          <a:lstStyle/>
+          <a:p>
+            <a:pPr algn="l">
+              <a:spcAft>
+                <a:spcPts val="200"/>
+              </a:spcAft>
+            </a:pPr>
+            <a:r>
+              <a:rPr sz="1100" b="0">
+                <a:solidFill>
+                  <a:srgbClr val="555757"/>
+                </a:solidFill>
+                <a:latin typeface="Microsoft YaHei"/>
+                <a:ea typeface="Microsoft YaHei"/>
+                <a:cs typeface="Microsoft YaHei"/>
+              </a:rPr>
+              <a:t>代码 Apache</a:t>
+            </a:r>
+          </a:p>
+          <a:p>
+            <a:pPr algn="l">
+              <a:spcAft>
+                <a:spcPts val="200"/>
+              </a:spcAft>
+            </a:pPr>
+            <a:r>
+              <a:rPr sz="1100" b="0">
+                <a:solidFill>
+                  <a:srgbClr val="555757"/>
+                </a:solidFill>
+                <a:latin typeface="Microsoft YaHei"/>
+                <a:ea typeface="Microsoft YaHei"/>
+                <a:cs typeface="Microsoft YaHei"/>
+              </a:rPr>
+              <a:t>权重 CC-BY-NC</a:t>
+            </a:r>
+          </a:p>
+        </p:txBody>
+      </p:sp>
+      <p:sp>
+        <p:nvSpPr>
+          <p:cNvPr id="30" name="Rounded Rectangle 29"/>
           <p:cNvSpPr/>
           <p:nvPr/>
         </p:nvSpPr>
         <p:spPr>
           <a:xfrm>
-            <a:off x="457200" y="2743200"/>
-            <a:ext cx="5623560" cy="1234440"/>
+            <a:off x="457200" y="4133088"/>
+            <a:ext cx="11247120" cy="749808"/>
+          </a:xfrm>
+          <a:prstGeom prst="roundRect">
+            <a:avLst>
+              <a:gd name="adj" fmla="val 5000"/>
+            </a:avLst>
+          </a:prstGeom>
+          <a:solidFill>
+            <a:srgbClr val="F7F7F7"/>
+          </a:solidFill>
+          <a:ln w="9525">
+            <a:solidFill>
+              <a:srgbClr val="DDDDDD"/>
+            </a:solidFill>
+          </a:ln>
+        </p:spPr>
+        <p:style>
+          <a:lnRef idx="1">
+            <a:schemeClr val="accent1"/>
+          </a:lnRef>
+          <a:fillRef idx="3">
+            <a:schemeClr val="accent1"/>
+          </a:fillRef>
+          <a:effectRef idx="2">
+            <a:schemeClr val="accent1"/>
+          </a:effectRef>
+          <a:fontRef idx="minor">
+            <a:schemeClr val="lt1"/>
+          </a:fontRef>
+        </p:style>
+        <p:txBody>
+          <a:bodyPr rtlCol="0" anchor="ctr"/>
+          <a:lstStyle/>
+          <a:p>
+            <a:pPr algn="ctr"/>
+          </a:p>
+        </p:txBody>
+      </p:sp>
+      <p:sp>
+        <p:nvSpPr>
+          <p:cNvPr id="31" name="TextBox 30"/>
+          <p:cNvSpPr txBox="1"/>
+          <p:nvPr/>
+        </p:nvSpPr>
+        <p:spPr>
+          <a:xfrm>
+            <a:off x="566928" y="4187952"/>
+            <a:ext cx="2103120" cy="658368"/>
+          </a:xfrm>
+          <a:prstGeom prst="rect">
+            <a:avLst/>
+          </a:prstGeom>
+          <a:noFill/>
+        </p:spPr>
+        <p:txBody>
+          <a:bodyPr wrap="square" anchor="t"/>
+          <a:lstStyle/>
+          <a:p>
+            <a:pPr algn="l">
+              <a:spcAft>
+                <a:spcPts val="200"/>
+              </a:spcAft>
+            </a:pPr>
+            <a:r>
+              <a:rPr sz="1200" b="1">
+                <a:solidFill>
+                  <a:srgbClr val="C7000B"/>
+                </a:solidFill>
+                <a:latin typeface="Microsoft YaHei"/>
+                <a:ea typeface="Microsoft YaHei"/>
+                <a:cs typeface="Microsoft YaHei"/>
+              </a:rPr>
+              <a:t>UniTS</a:t>
+            </a:r>
+          </a:p>
+          <a:p>
+            <a:pPr algn="l">
+              <a:spcAft>
+                <a:spcPts val="200"/>
+              </a:spcAft>
+            </a:pPr>
+            <a:r>
+              <a:rPr sz="1200" b="1">
+                <a:solidFill>
+                  <a:srgbClr val="C7000B"/>
+                </a:solidFill>
+                <a:latin typeface="Microsoft YaHei"/>
+                <a:ea typeface="Microsoft YaHei"/>
+                <a:cs typeface="Microsoft YaHei"/>
+              </a:rPr>
+              <a:t>Harvard NeurIPS'24</a:t>
+            </a:r>
+          </a:p>
+        </p:txBody>
+      </p:sp>
+      <p:sp>
+        <p:nvSpPr>
+          <p:cNvPr id="32" name="TextBox 31"/>
+          <p:cNvSpPr txBox="1"/>
+          <p:nvPr/>
+        </p:nvSpPr>
+        <p:spPr>
+          <a:xfrm>
+            <a:off x="2898648" y="4187952"/>
+            <a:ext cx="2103120" cy="658368"/>
+          </a:xfrm>
+          <a:prstGeom prst="rect">
+            <a:avLst/>
+          </a:prstGeom>
+          <a:noFill/>
+        </p:spPr>
+        <p:txBody>
+          <a:bodyPr wrap="square" anchor="t"/>
+          <a:lstStyle/>
+          <a:p>
+            <a:pPr algn="l">
+              <a:spcAft>
+                <a:spcPts val="200"/>
+              </a:spcAft>
+            </a:pPr>
+            <a:r>
+              <a:rPr sz="1100" b="0">
+                <a:solidFill>
+                  <a:srgbClr val="555757"/>
+                </a:solidFill>
+                <a:latin typeface="Microsoft YaHei"/>
+                <a:ea typeface="Microsoft YaHei"/>
+                <a:cs typeface="Microsoft YaHei"/>
+              </a:rPr>
+              <a:t>任务 token</a:t>
+            </a:r>
+          </a:p>
+          <a:p>
+            <a:pPr algn="l">
+              <a:spcAft>
+                <a:spcPts val="200"/>
+              </a:spcAft>
+            </a:pPr>
+            <a:r>
+              <a:rPr sz="1100" b="0">
+                <a:solidFill>
+                  <a:srgbClr val="555757"/>
+                </a:solidFill>
+                <a:latin typeface="Microsoft YaHei"/>
+                <a:ea typeface="Microsoft YaHei"/>
+                <a:cs typeface="Microsoft YaHei"/>
+              </a:rPr>
+              <a:t>GEN/CLS 共享参数</a:t>
+            </a:r>
+          </a:p>
+        </p:txBody>
+      </p:sp>
+      <p:sp>
+        <p:nvSpPr>
+          <p:cNvPr id="33" name="TextBox 32"/>
+          <p:cNvSpPr txBox="1"/>
+          <p:nvPr/>
+        </p:nvSpPr>
+        <p:spPr>
+          <a:xfrm>
+            <a:off x="5230368" y="4187952"/>
+            <a:ext cx="3108960" cy="658368"/>
+          </a:xfrm>
+          <a:prstGeom prst="rect">
+            <a:avLst/>
+          </a:prstGeom>
+          <a:noFill/>
+        </p:spPr>
+        <p:txBody>
+          <a:bodyPr wrap="square" anchor="t"/>
+          <a:lstStyle/>
+          <a:p>
+            <a:pPr algn="l">
+              <a:spcAft>
+                <a:spcPts val="200"/>
+              </a:spcAft>
+            </a:pPr>
+            <a:r>
+              <a:rPr sz="1100" b="0">
+                <a:solidFill>
+                  <a:srgbClr val="555757"/>
+                </a:solidFill>
+                <a:latin typeface="Microsoft YaHei"/>
+                <a:ea typeface="Microsoft YaHei"/>
+                <a:cs typeface="Microsoft YaHei"/>
+              </a:rPr>
+              <a:t>预测+分类+填补+异常一体；</a:t>
+            </a:r>
+          </a:p>
+          <a:p>
+            <a:pPr algn="l">
+              <a:spcAft>
+                <a:spcPts val="200"/>
+              </a:spcAft>
+            </a:pPr>
+            <a:r>
+              <a:rPr sz="1100" b="0">
+                <a:solidFill>
+                  <a:srgbClr val="555757"/>
+                </a:solidFill>
+                <a:latin typeface="Microsoft YaHei"/>
+                <a:ea typeface="Microsoft YaHei"/>
+                <a:cs typeface="Microsoft YaHei"/>
+              </a:rPr>
+              <a:t>38 个数据集对比领先</a:t>
+            </a:r>
+          </a:p>
+        </p:txBody>
+      </p:sp>
+      <p:sp>
+        <p:nvSpPr>
+          <p:cNvPr id="34" name="TextBox 33"/>
+          <p:cNvSpPr txBox="1"/>
+          <p:nvPr/>
+        </p:nvSpPr>
+        <p:spPr>
+          <a:xfrm>
+            <a:off x="8567928" y="4187952"/>
+            <a:ext cx="1097280" cy="658368"/>
+          </a:xfrm>
+          <a:prstGeom prst="rect">
+            <a:avLst/>
+          </a:prstGeom>
+          <a:noFill/>
+        </p:spPr>
+        <p:txBody>
+          <a:bodyPr wrap="square" anchor="t"/>
+          <a:lstStyle/>
+          <a:p>
+            <a:pPr algn="l">
+              <a:spcAft>
+                <a:spcPts val="200"/>
+              </a:spcAft>
+            </a:pPr>
+            <a:r>
+              <a:rPr sz="1200" b="1">
+                <a:solidFill>
+                  <a:srgbClr val="62B230"/>
+                </a:solidFill>
+                <a:latin typeface="Microsoft YaHei"/>
+                <a:ea typeface="Microsoft YaHei"/>
+                <a:cs typeface="Microsoft YaHei"/>
+              </a:rPr>
+              <a:t>✓ 原生</a:t>
+            </a:r>
+          </a:p>
+        </p:txBody>
+      </p:sp>
+      <p:sp>
+        <p:nvSpPr>
+          <p:cNvPr id="35" name="TextBox 34"/>
+          <p:cNvSpPr txBox="1"/>
+          <p:nvPr/>
+        </p:nvSpPr>
+        <p:spPr>
+          <a:xfrm>
+            <a:off x="9893807" y="4187952"/>
+            <a:ext cx="1737360" cy="658368"/>
+          </a:xfrm>
+          <a:prstGeom prst="rect">
+            <a:avLst/>
+          </a:prstGeom>
+          <a:noFill/>
+        </p:spPr>
+        <p:txBody>
+          <a:bodyPr wrap="square" anchor="t"/>
+          <a:lstStyle/>
+          <a:p>
+            <a:pPr algn="l">
+              <a:spcAft>
+                <a:spcPts val="200"/>
+              </a:spcAft>
+            </a:pPr>
+            <a:r>
+              <a:rPr sz="1100" b="0">
+                <a:solidFill>
+                  <a:srgbClr val="555757"/>
+                </a:solidFill>
+                <a:latin typeface="Microsoft YaHei"/>
+                <a:ea typeface="Microsoft YaHei"/>
+                <a:cs typeface="Microsoft YaHei"/>
+              </a:rPr>
+              <a:t>MIT</a:t>
+            </a:r>
+          </a:p>
+        </p:txBody>
+      </p:sp>
+      <p:sp>
+        <p:nvSpPr>
+          <p:cNvPr id="36" name="Rounded Rectangle 35"/>
+          <p:cNvSpPr/>
+          <p:nvPr/>
+        </p:nvSpPr>
+        <p:spPr>
+          <a:xfrm>
+            <a:off x="457200" y="4956048"/>
+            <a:ext cx="11247120" cy="749808"/>
           </a:xfrm>
           <a:prstGeom prst="roundRect">
             <a:avLst>
@@ -8015,14 +10238,14 @@
       </p:sp>
       <p:sp>
         <p:nvSpPr>
-          <p:cNvPr id="14" name="TextBox 13"/>
+          <p:cNvPr id="37" name="TextBox 36"/>
           <p:cNvSpPr txBox="1"/>
           <p:nvPr/>
         </p:nvSpPr>
         <p:spPr>
           <a:xfrm>
-            <a:off x="658368" y="2907792"/>
-            <a:ext cx="5212080" cy="320040"/>
+            <a:off x="566928" y="5010912"/>
+            <a:ext cx="2103120" cy="658368"/>
           </a:xfrm>
           <a:prstGeom prst="rect">
             <a:avLst/>
@@ -8039,7 +10262,7 @@
               </a:spcAft>
             </a:pPr>
             <a:r>
-              <a:rPr sz="1500" b="1">
+              <a:rPr sz="1200" b="1">
                 <a:solidFill>
                   <a:srgbClr val="C7000B"/>
                 </a:solidFill>
@@ -8047,21 +10270,39 @@
                 <a:ea typeface="Microsoft YaHei"/>
                 <a:cs typeface="Microsoft YaHei"/>
               </a:rPr>
-              <a:t>底座可替换</a:t>
-            </a:r>
-          </a:p>
-        </p:txBody>
-      </p:sp>
-      <p:sp>
-        <p:nvSpPr>
-          <p:cNvPr id="15" name="TextBox 14"/>
+              <a:t>MOMENT</a:t>
+            </a:r>
+          </a:p>
+          <a:p>
+            <a:pPr algn="l">
+              <a:spcAft>
+                <a:spcPts val="200"/>
+              </a:spcAft>
+            </a:pPr>
+            <a:r>
+              <a:rPr sz="1200" b="1">
+                <a:solidFill>
+                  <a:srgbClr val="C7000B"/>
+                </a:solidFill>
+                <a:latin typeface="Microsoft YaHei"/>
+                <a:ea typeface="Microsoft YaHei"/>
+                <a:cs typeface="Microsoft YaHei"/>
+              </a:rPr>
+              <a:t>CMU ICML'24</a:t>
+            </a:r>
+          </a:p>
+        </p:txBody>
+      </p:sp>
+      <p:sp>
+        <p:nvSpPr>
+          <p:cNvPr id="38" name="TextBox 37"/>
           <p:cNvSpPr txBox="1"/>
           <p:nvPr/>
         </p:nvSpPr>
         <p:spPr>
           <a:xfrm>
-            <a:off x="658368" y="3273552"/>
-            <a:ext cx="5212080" cy="548640"/>
+            <a:off x="2898648" y="5010912"/>
+            <a:ext cx="2103120" cy="658368"/>
           </a:xfrm>
           <a:prstGeom prst="rect">
             <a:avLst/>
@@ -8078,7 +10319,7 @@
               </a:spcAft>
             </a:pPr>
             <a:r>
-              <a:rPr sz="1400" b="0">
+              <a:rPr sz="1100" b="0">
                 <a:solidFill>
                   <a:srgbClr val="555757"/>
                 </a:solidFill>
@@ -8086,68 +10327,39 @@
                 <a:ea typeface="Microsoft YaHei"/>
                 <a:cs typeface="Microsoft YaHei"/>
               </a:rPr>
-              <a:t>TimesFM-3 → 自研 / 更新版本；UniTS/MOMENT → 其他多任务模型</a:t>
-            </a:r>
-          </a:p>
-        </p:txBody>
-      </p:sp>
-      <p:sp>
-        <p:nvSpPr>
-          <p:cNvPr id="16" name="Rounded Rectangle 15"/>
-          <p:cNvSpPr/>
-          <p:nvPr/>
-        </p:nvSpPr>
-        <p:spPr>
-          <a:xfrm>
-            <a:off x="6263640" y="2743200"/>
-            <a:ext cx="5623560" cy="1234440"/>
-          </a:xfrm>
-          <a:prstGeom prst="roundRect">
-            <a:avLst>
-              <a:gd name="adj" fmla="val 5000"/>
-            </a:avLst>
-          </a:prstGeom>
-          <a:solidFill>
-            <a:srgbClr val="FFFFFF"/>
-          </a:solidFill>
-          <a:ln w="9525">
-            <a:solidFill>
-              <a:srgbClr val="DDDDDD"/>
-            </a:solidFill>
-          </a:ln>
-        </p:spPr>
-        <p:style>
-          <a:lnRef idx="1">
-            <a:schemeClr val="accent1"/>
-          </a:lnRef>
-          <a:fillRef idx="3">
-            <a:schemeClr val="accent1"/>
-          </a:fillRef>
-          <a:effectRef idx="2">
-            <a:schemeClr val="accent1"/>
-          </a:effectRef>
-          <a:fontRef idx="minor">
-            <a:schemeClr val="lt1"/>
-          </a:fontRef>
-        </p:style>
-        <p:txBody>
-          <a:bodyPr rtlCol="0" anchor="ctr"/>
-          <a:lstStyle/>
-          <a:p>
-            <a:pPr algn="ctr"/>
-          </a:p>
-        </p:txBody>
-      </p:sp>
-      <p:sp>
-        <p:nvSpPr>
-          <p:cNvPr id="17" name="TextBox 16"/>
+              <a:t>掩码 patch 重建</a:t>
+            </a:r>
+          </a:p>
+          <a:p>
+            <a:pPr algn="l">
+              <a:spcAft>
+                <a:spcPts val="200"/>
+              </a:spcAft>
+            </a:pPr>
+            <a:r>
+              <a:rPr sz="1100" b="0">
+                <a:solidFill>
+                  <a:srgbClr val="555757"/>
+                </a:solidFill>
+                <a:latin typeface="Microsoft YaHei"/>
+                <a:ea typeface="Microsoft YaHei"/>
+                <a:cs typeface="Microsoft YaHei"/>
+              </a:rPr>
+              <a:t>T5 encoder</a:t>
+            </a:r>
+          </a:p>
+        </p:txBody>
+      </p:sp>
+      <p:sp>
+        <p:nvSpPr>
+          <p:cNvPr id="39" name="TextBox 38"/>
           <p:cNvSpPr txBox="1"/>
           <p:nvPr/>
         </p:nvSpPr>
         <p:spPr>
           <a:xfrm>
-            <a:off x="6464808" y="2907792"/>
-            <a:ext cx="5212080" cy="320040"/>
+            <a:off x="5230368" y="5010912"/>
+            <a:ext cx="3108960" cy="658368"/>
           </a:xfrm>
           <a:prstGeom prst="rect">
             <a:avLst/>
@@ -8164,29 +10376,47 @@
               </a:spcAft>
             </a:pPr>
             <a:r>
-              <a:rPr sz="1500" b="1">
-                <a:solidFill>
-                  <a:srgbClr val="C7000B"/>
-                </a:solidFill>
-                <a:latin typeface="Microsoft YaHei"/>
-                <a:ea typeface="Microsoft YaHei"/>
-                <a:cs typeface="Microsoft YaHei"/>
-              </a:rPr>
-              <a:t>接口不替换</a:t>
-            </a:r>
-          </a:p>
-        </p:txBody>
-      </p:sp>
-      <p:sp>
-        <p:nvSpPr>
-          <p:cNvPr id="18" name="TextBox 17"/>
+              <a:rPr sz="1100" b="0">
+                <a:solidFill>
+                  <a:srgbClr val="555757"/>
+                </a:solidFill>
+                <a:latin typeface="Microsoft YaHei"/>
+                <a:ea typeface="Microsoft YaHei"/>
+                <a:cs typeface="Microsoft YaHei"/>
+              </a:rPr>
+              <a:t>预测/分类/异常/填补；</a:t>
+            </a:r>
+          </a:p>
+          <a:p>
+            <a:pPr algn="l">
+              <a:spcAft>
+                <a:spcPts val="200"/>
+              </a:spcAft>
+            </a:pPr>
+            <a:r>
+              <a:rPr sz="1100" b="0">
+                <a:solidFill>
+                  <a:srgbClr val="555757"/>
+                </a:solidFill>
+                <a:latin typeface="Microsoft YaHei"/>
+                <a:ea typeface="Microsoft YaHei"/>
+                <a:cs typeface="Microsoft YaHei"/>
+              </a:rPr>
+              <a:t>linear probe 即用</a:t>
+            </a:r>
+          </a:p>
+        </p:txBody>
+      </p:sp>
+      <p:sp>
+        <p:nvSpPr>
+          <p:cNvPr id="40" name="TextBox 39"/>
           <p:cNvSpPr txBox="1"/>
           <p:nvPr/>
         </p:nvSpPr>
         <p:spPr>
           <a:xfrm>
-            <a:off x="6464808" y="3273552"/>
-            <a:ext cx="5212080" cy="548640"/>
+            <a:off x="8567928" y="5010912"/>
+            <a:ext cx="1097280" cy="658368"/>
           </a:xfrm>
           <a:prstGeom prst="rect">
             <a:avLst/>
@@ -8203,7 +10433,46 @@
               </a:spcAft>
             </a:pPr>
             <a:r>
-              <a:rPr sz="1400" b="0">
+              <a:rPr sz="1200" b="1">
+                <a:solidFill>
+                  <a:srgbClr val="62B230"/>
+                </a:solidFill>
+                <a:latin typeface="Microsoft YaHei"/>
+                <a:ea typeface="Microsoft YaHei"/>
+                <a:cs typeface="Microsoft YaHei"/>
+              </a:rPr>
+              <a:t>✓ 探针</a:t>
+            </a:r>
+          </a:p>
+        </p:txBody>
+      </p:sp>
+      <p:sp>
+        <p:nvSpPr>
+          <p:cNvPr id="41" name="TextBox 40"/>
+          <p:cNvSpPr txBox="1"/>
+          <p:nvPr/>
+        </p:nvSpPr>
+        <p:spPr>
+          <a:xfrm>
+            <a:off x="9893807" y="5010912"/>
+            <a:ext cx="1737360" cy="658368"/>
+          </a:xfrm>
+          <a:prstGeom prst="rect">
+            <a:avLst/>
+          </a:prstGeom>
+          <a:noFill/>
+        </p:spPr>
+        <p:txBody>
+          <a:bodyPr wrap="square" anchor="t"/>
+          <a:lstStyle/>
+          <a:p>
+            <a:pPr algn="l">
+              <a:spcAft>
+                <a:spcPts val="200"/>
+              </a:spcAft>
+            </a:pPr>
+            <a:r>
+              <a:rPr sz="1100" b="0">
                 <a:solidFill>
                   <a:srgbClr val="555757"/>
                 </a:solidFill>
@@ -8211,264 +10480,14 @@
                 <a:ea typeface="Microsoft YaHei"/>
                 <a:cs typeface="Microsoft YaHei"/>
               </a:rPr>
-              <a:t>Ingest schema、predict() 返回结构、classify() 返回结构保持兼容</a:t>
-            </a:r>
-          </a:p>
-        </p:txBody>
-      </p:sp>
-      <p:sp>
-        <p:nvSpPr>
-          <p:cNvPr id="19" name="Rounded Rectangle 18"/>
-          <p:cNvSpPr/>
-          <p:nvPr/>
-        </p:nvSpPr>
-        <p:spPr>
-          <a:xfrm>
-            <a:off x="457200" y="4114800"/>
-            <a:ext cx="5623560" cy="1234440"/>
-          </a:xfrm>
-          <a:prstGeom prst="roundRect">
-            <a:avLst>
-              <a:gd name="adj" fmla="val 5000"/>
-            </a:avLst>
-          </a:prstGeom>
-          <a:solidFill>
-            <a:srgbClr val="FFFFFF"/>
-          </a:solidFill>
-          <a:ln w="9525">
-            <a:solidFill>
-              <a:srgbClr val="DDDDDD"/>
-            </a:solidFill>
-          </a:ln>
-        </p:spPr>
-        <p:style>
-          <a:lnRef idx="1">
-            <a:schemeClr val="accent1"/>
-          </a:lnRef>
-          <a:fillRef idx="3">
-            <a:schemeClr val="accent1"/>
-          </a:fillRef>
-          <a:effectRef idx="2">
-            <a:schemeClr val="accent1"/>
-          </a:effectRef>
-          <a:fontRef idx="minor">
-            <a:schemeClr val="lt1"/>
-          </a:fontRef>
-        </p:style>
-        <p:txBody>
-          <a:bodyPr rtlCol="0" anchor="ctr"/>
-          <a:lstStyle/>
-          <a:p>
-            <a:pPr algn="ctr"/>
-          </a:p>
-        </p:txBody>
-      </p:sp>
-      <p:sp>
-        <p:nvSpPr>
-          <p:cNvPr id="20" name="TextBox 19"/>
-          <p:cNvSpPr txBox="1"/>
-          <p:nvPr/>
-        </p:nvSpPr>
-        <p:spPr>
-          <a:xfrm>
-            <a:off x="658368" y="4279392"/>
-            <a:ext cx="5212080" cy="320040"/>
-          </a:xfrm>
-          <a:prstGeom prst="rect">
-            <a:avLst/>
-          </a:prstGeom>
-          <a:noFill/>
-        </p:spPr>
-        <p:txBody>
-          <a:bodyPr wrap="square" anchor="t"/>
-          <a:lstStyle/>
-          <a:p>
-            <a:pPr algn="l">
-              <a:spcAft>
-                <a:spcPts val="200"/>
-              </a:spcAft>
-            </a:pPr>
-            <a:r>
-              <a:rPr sz="1500" b="1">
-                <a:solidFill>
-                  <a:srgbClr val="C7000B"/>
-                </a:solidFill>
-                <a:latin typeface="Microsoft YaHei"/>
-                <a:ea typeface="Microsoft YaHei"/>
-                <a:cs typeface="Microsoft YaHei"/>
-              </a:rPr>
-              <a:t>输入</a:t>
-            </a:r>
-          </a:p>
-        </p:txBody>
-      </p:sp>
-      <p:sp>
-        <p:nvSpPr>
-          <p:cNvPr id="21" name="TextBox 20"/>
-          <p:cNvSpPr txBox="1"/>
-          <p:nvPr/>
-        </p:nvSpPr>
-        <p:spPr>
-          <a:xfrm>
-            <a:off x="658368" y="4645152"/>
-            <a:ext cx="5212080" cy="548640"/>
-          </a:xfrm>
-          <a:prstGeom prst="rect">
-            <a:avLst/>
-          </a:prstGeom>
-          <a:noFill/>
-        </p:spPr>
-        <p:txBody>
-          <a:bodyPr wrap="square" anchor="t"/>
-          <a:lstStyle/>
-          <a:p>
-            <a:pPr algn="l">
-              <a:spcAft>
-                <a:spcPts val="200"/>
-              </a:spcAft>
-            </a:pPr>
-            <a:r>
-              <a:rPr sz="1400" b="0">
-                <a:solidFill>
-                  <a:srgbClr val="555757"/>
-                </a:solidFill>
-                <a:latin typeface="Microsoft YaHei"/>
-                <a:ea typeface="Microsoft YaHei"/>
-                <a:cs typeface="Microsoft YaHei"/>
-              </a:rPr>
-              <a:t>target / past-only / past-future 变元；IMU / EMG / TP 只是变元</a:t>
-            </a:r>
-          </a:p>
-        </p:txBody>
-      </p:sp>
-      <p:sp>
-        <p:nvSpPr>
-          <p:cNvPr id="22" name="Rounded Rectangle 21"/>
-          <p:cNvSpPr/>
-          <p:nvPr/>
-        </p:nvSpPr>
-        <p:spPr>
-          <a:xfrm>
-            <a:off x="6263640" y="4114800"/>
-            <a:ext cx="5623560" cy="1234440"/>
-          </a:xfrm>
-          <a:prstGeom prst="roundRect">
-            <a:avLst>
-              <a:gd name="adj" fmla="val 5000"/>
-            </a:avLst>
-          </a:prstGeom>
-          <a:solidFill>
-            <a:srgbClr val="FFFFFF"/>
-          </a:solidFill>
-          <a:ln w="9525">
-            <a:solidFill>
-              <a:srgbClr val="DDDDDD"/>
-            </a:solidFill>
-          </a:ln>
-        </p:spPr>
-        <p:style>
-          <a:lnRef idx="1">
-            <a:schemeClr val="accent1"/>
-          </a:lnRef>
-          <a:fillRef idx="3">
-            <a:schemeClr val="accent1"/>
-          </a:fillRef>
-          <a:effectRef idx="2">
-            <a:schemeClr val="accent1"/>
-          </a:effectRef>
-          <a:fontRef idx="minor">
-            <a:schemeClr val="lt1"/>
-          </a:fontRef>
-        </p:style>
-        <p:txBody>
-          <a:bodyPr rtlCol="0" anchor="ctr"/>
-          <a:lstStyle/>
-          <a:p>
-            <a:pPr algn="ctr"/>
-          </a:p>
-        </p:txBody>
-      </p:sp>
-      <p:sp>
-        <p:nvSpPr>
-          <p:cNvPr id="23" name="TextBox 22"/>
-          <p:cNvSpPr txBox="1"/>
-          <p:nvPr/>
-        </p:nvSpPr>
-        <p:spPr>
-          <a:xfrm>
-            <a:off x="6464808" y="4279392"/>
-            <a:ext cx="5212080" cy="320040"/>
-          </a:xfrm>
-          <a:prstGeom prst="rect">
-            <a:avLst/>
-          </a:prstGeom>
-          <a:noFill/>
-        </p:spPr>
-        <p:txBody>
-          <a:bodyPr wrap="square" anchor="t"/>
-          <a:lstStyle/>
-          <a:p>
-            <a:pPr algn="l">
-              <a:spcAft>
-                <a:spcPts val="200"/>
-              </a:spcAft>
-            </a:pPr>
-            <a:r>
-              <a:rPr sz="1500" b="1">
-                <a:solidFill>
-                  <a:srgbClr val="C7000B"/>
-                </a:solidFill>
-                <a:latin typeface="Microsoft YaHei"/>
-                <a:ea typeface="Microsoft YaHei"/>
-                <a:cs typeface="Microsoft YaHei"/>
-              </a:rPr>
-              <a:t>输出</a:t>
-            </a:r>
-          </a:p>
-        </p:txBody>
-      </p:sp>
-      <p:sp>
-        <p:nvSpPr>
-          <p:cNvPr id="24" name="TextBox 23"/>
-          <p:cNvSpPr txBox="1"/>
-          <p:nvPr/>
-        </p:nvSpPr>
-        <p:spPr>
-          <a:xfrm>
-            <a:off x="6464808" y="4645152"/>
-            <a:ext cx="5212080" cy="548640"/>
-          </a:xfrm>
-          <a:prstGeom prst="rect">
-            <a:avLst/>
-          </a:prstGeom>
-          <a:noFill/>
-        </p:spPr>
-        <p:txBody>
-          <a:bodyPr wrap="square" anchor="t"/>
-          <a:lstStyle/>
-          <a:p>
-            <a:pPr algn="l">
-              <a:spcAft>
-                <a:spcPts val="200"/>
-              </a:spcAft>
-            </a:pPr>
-            <a:r>
-              <a:rPr sz="1400" b="0">
-                <a:solidFill>
-                  <a:srgbClr val="555757"/>
-                </a:solidFill>
-                <a:latin typeface="Microsoft YaHei"/>
-                <a:ea typeface="Microsoft YaHei"/>
-                <a:cs typeface="Microsoft YaHei"/>
-              </a:rPr>
-              <a:t>预测：quantiles + point；分类：label + confidence；无场景语义</a:t>
-            </a:r>
-          </a:p>
-        </p:txBody>
-      </p:sp>
-      <p:sp>
-        <p:nvSpPr>
-          <p:cNvPr id="25" name="Rounded Rectangle 24"/>
+              <a:t>MIT</a:t>
+            </a:r>
+          </a:p>
+        </p:txBody>
+      </p:sp>
+      <p:sp>
+        <p:nvSpPr>
+          <p:cNvPr id="42" name="Rounded Rectangle 41"/>
           <p:cNvSpPr/>
           <p:nvPr/>
         </p:nvSpPr>
@@ -8515,7 +10534,7 @@
       </p:sp>
       <p:sp>
         <p:nvSpPr>
-          <p:cNvPr id="26" name="Rectangle 25"/>
+          <p:cNvPr id="43" name="Rectangle 42"/>
           <p:cNvSpPr/>
           <p:nvPr/>
         </p:nvSpPr>
@@ -8558,7 +10577,7 @@
       </p:sp>
       <p:sp>
         <p:nvSpPr>
-          <p:cNvPr id="27" name="TextBox 26"/>
+          <p:cNvPr id="44" name="TextBox 43"/>
           <p:cNvSpPr txBox="1"/>
           <p:nvPr/>
         </p:nvSpPr>
@@ -8590,14 +10609,14 @@
                 <a:ea typeface="Microsoft YaHei"/>
                 <a:cs typeface="Microsoft YaHei"/>
               </a:rPr>
-              <a:t>所以  ·  平台不抢场景：场景方调 predict/classify，平台方保接口与底座演进。</a:t>
-            </a:r>
-          </a:p>
-        </p:txBody>
-      </p:sp>
-      <p:sp>
-        <p:nvSpPr>
-          <p:cNvPr id="28" name="Rectangle 27"/>
+              <a:t>所以  ·  预测底座选 TimesFM-3（多变量+协变量最强）；原生分类只有 UniTS / MOMENT——这正是双头设计的来源。</a:t>
+            </a:r>
+          </a:p>
+        </p:txBody>
+      </p:sp>
+      <p:sp>
+        <p:nvSpPr>
+          <p:cNvPr id="45" name="Rectangle 44"/>
           <p:cNvSpPr/>
           <p:nvPr/>
         </p:nvSpPr>
@@ -8640,7 +10659,7 @@
       </p:sp>
       <p:sp>
         <p:nvSpPr>
-          <p:cNvPr id="29" name="TextBox 28"/>
+          <p:cNvPr id="46" name="TextBox 45"/>
           <p:cNvSpPr txBox="1"/>
           <p:nvPr/>
         </p:nvSpPr>
@@ -8672,14 +10691,14 @@
                 <a:ea typeface="Microsoft YaHei"/>
                 <a:cs typeface="Microsoft YaHei"/>
               </a:rPr>
-              <a:t>华为  ·  AI 物理感知平台  ·  平台边界    |    Security Level: Internal</a:t>
-            </a:r>
-          </a:p>
-        </p:txBody>
-      </p:sp>
-      <p:sp>
-        <p:nvSpPr>
-          <p:cNvPr id="30" name="TextBox 29"/>
+              <a:t>华为  ·  AI 物理感知平台  ·  模型盘点    |    Security Level: Internal</a:t>
+            </a:r>
+          </a:p>
+        </p:txBody>
+      </p:sp>
+      <p:sp>
+        <p:nvSpPr>
+          <p:cNvPr id="47" name="TextBox 46"/>
           <p:cNvSpPr txBox="1"/>
           <p:nvPr/>
         </p:nvSpPr>
@@ -8711,7 +10730,7 @@
                 <a:ea typeface="Microsoft YaHei"/>
                 <a:cs typeface="Microsoft YaHei"/>
               </a:rPr>
-              <a:t>2  /  8</a:t>
+              <a:t>2  /  10</a:t>
             </a:r>
           </a:p>
         </p:txBody>
@@ -8811,7 +10830,7 @@
                 <a:ea typeface="Microsoft YaHei"/>
                 <a:cs typeface="Microsoft YaHei"/>
               </a:rPr>
-              <a:t>2  接口定义</a:t>
+              <a:t>2  模型盘点 · 物理传感器</a:t>
             </a:r>
           </a:p>
         </p:txBody>
@@ -8850,7 +10869,7 @@
                 <a:ea typeface="Microsoft YaHei"/>
                 <a:cs typeface="Microsoft YaHei"/>
               </a:rPr>
-              <a:t>Ingest 契约 + predict() + classify()</a:t>
+              <a:t>IMU / EMG 专用模型：提供领域先验，不当平台底座</a:t>
             </a:r>
           </a:p>
         </p:txBody>
@@ -8932,21 +10951,177 @@
                 <a:ea typeface="Microsoft YaHei"/>
                 <a:cs typeface="Microsoft YaHei"/>
               </a:rPr>
-              <a:t>所有输入先过 Ingest；预测与分类共用同一批 patch token。</a:t>
-            </a:r>
-          </a:p>
-        </p:txBody>
-      </p:sp>
-      <p:sp>
-        <p:nvSpPr>
-          <p:cNvPr id="7" name="Rounded Rectangle 6"/>
+              <a:t>传感器模型规模小、端侧导向；与通用底座互补，不替代。</a:t>
+            </a:r>
+          </a:p>
+        </p:txBody>
+      </p:sp>
+      <p:sp>
+        <p:nvSpPr>
+          <p:cNvPr id="7" name="TextBox 6"/>
+          <p:cNvSpPr txBox="1"/>
+          <p:nvPr/>
+        </p:nvSpPr>
+        <p:spPr>
+          <a:xfrm>
+            <a:off x="566928" y="1298448"/>
+            <a:ext cx="2194560" cy="292608"/>
+          </a:xfrm>
+          <a:prstGeom prst="rect">
+            <a:avLst/>
+          </a:prstGeom>
+          <a:noFill/>
+        </p:spPr>
+        <p:txBody>
+          <a:bodyPr wrap="square" anchor="t"/>
+          <a:lstStyle/>
+          <a:p>
+            <a:pPr algn="l">
+              <a:spcAft>
+                <a:spcPts val="200"/>
+              </a:spcAft>
+            </a:pPr>
+            <a:r>
+              <a:rPr sz="1200" b="1">
+                <a:solidFill>
+                  <a:srgbClr val="898989"/>
+                </a:solidFill>
+                <a:latin typeface="Microsoft YaHei"/>
+                <a:ea typeface="Microsoft YaHei"/>
+                <a:cs typeface="Microsoft YaHei"/>
+              </a:rPr>
+              <a:t>模型 / 出处</a:t>
+            </a:r>
+          </a:p>
+        </p:txBody>
+      </p:sp>
+      <p:sp>
+        <p:nvSpPr>
+          <p:cNvPr id="8" name="TextBox 7"/>
+          <p:cNvSpPr txBox="1"/>
+          <p:nvPr/>
+        </p:nvSpPr>
+        <p:spPr>
+          <a:xfrm>
+            <a:off x="2990088" y="1298448"/>
+            <a:ext cx="2834639" cy="292608"/>
+          </a:xfrm>
+          <a:prstGeom prst="rect">
+            <a:avLst/>
+          </a:prstGeom>
+          <a:noFill/>
+        </p:spPr>
+        <p:txBody>
+          <a:bodyPr wrap="square" anchor="t"/>
+          <a:lstStyle/>
+          <a:p>
+            <a:pPr algn="l">
+              <a:spcAft>
+                <a:spcPts val="200"/>
+              </a:spcAft>
+            </a:pPr>
+            <a:r>
+              <a:rPr sz="1200" b="1">
+                <a:solidFill>
+                  <a:srgbClr val="898989"/>
+                </a:solidFill>
+                <a:latin typeface="Microsoft YaHei"/>
+                <a:ea typeface="Microsoft YaHei"/>
+                <a:cs typeface="Microsoft YaHei"/>
+              </a:rPr>
+              <a:t>数据 / 预训练</a:t>
+            </a:r>
+          </a:p>
+        </p:txBody>
+      </p:sp>
+      <p:sp>
+        <p:nvSpPr>
+          <p:cNvPr id="9" name="TextBox 8"/>
+          <p:cNvSpPr txBox="1"/>
+          <p:nvPr/>
+        </p:nvSpPr>
+        <p:spPr>
+          <a:xfrm>
+            <a:off x="6053328" y="1298448"/>
+            <a:ext cx="3840480" cy="292608"/>
+          </a:xfrm>
+          <a:prstGeom prst="rect">
+            <a:avLst/>
+          </a:prstGeom>
+          <a:noFill/>
+        </p:spPr>
+        <p:txBody>
+          <a:bodyPr wrap="square" anchor="t"/>
+          <a:lstStyle/>
+          <a:p>
+            <a:pPr algn="l">
+              <a:spcAft>
+                <a:spcPts val="200"/>
+              </a:spcAft>
+            </a:pPr>
+            <a:r>
+              <a:rPr sz="1200" b="1">
+                <a:solidFill>
+                  <a:srgbClr val="898989"/>
+                </a:solidFill>
+                <a:latin typeface="Microsoft YaHei"/>
+                <a:ea typeface="Microsoft YaHei"/>
+                <a:cs typeface="Microsoft YaHei"/>
+              </a:rPr>
+              <a:t>能力亮点</a:t>
+            </a:r>
+          </a:p>
+        </p:txBody>
+      </p:sp>
+      <p:sp>
+        <p:nvSpPr>
+          <p:cNvPr id="10" name="TextBox 9"/>
+          <p:cNvSpPr txBox="1"/>
+          <p:nvPr/>
+        </p:nvSpPr>
+        <p:spPr>
+          <a:xfrm>
+            <a:off x="10122407" y="1298448"/>
+            <a:ext cx="1508760" cy="292608"/>
+          </a:xfrm>
+          <a:prstGeom prst="rect">
+            <a:avLst/>
+          </a:prstGeom>
+          <a:noFill/>
+        </p:spPr>
+        <p:txBody>
+          <a:bodyPr wrap="square" anchor="t"/>
+          <a:lstStyle/>
+          <a:p>
+            <a:pPr algn="l">
+              <a:spcAft>
+                <a:spcPts val="200"/>
+              </a:spcAft>
+            </a:pPr>
+            <a:r>
+              <a:rPr sz="1200" b="1">
+                <a:solidFill>
+                  <a:srgbClr val="898989"/>
+                </a:solidFill>
+                <a:latin typeface="Microsoft YaHei"/>
+                <a:ea typeface="Microsoft YaHei"/>
+                <a:cs typeface="Microsoft YaHei"/>
+              </a:rPr>
+              <a:t>部署 / 许可</a:t>
+            </a:r>
+          </a:p>
+        </p:txBody>
+      </p:sp>
+      <p:sp>
+        <p:nvSpPr>
+          <p:cNvPr id="11" name="Rounded Rectangle 10"/>
           <p:cNvSpPr/>
           <p:nvPr/>
         </p:nvSpPr>
         <p:spPr>
           <a:xfrm>
-            <a:off x="457200" y="1371600"/>
-            <a:ext cx="11247120" cy="1828800"/>
+            <a:off x="457200" y="1645920"/>
+            <a:ext cx="11247120" cy="621792"/>
           </a:xfrm>
           <a:prstGeom prst="roundRect">
             <a:avLst>
@@ -8986,23 +11161,219 @@
       </p:sp>
       <p:sp>
         <p:nvSpPr>
-          <p:cNvPr id="8" name="Rectangle 7"/>
+          <p:cNvPr id="12" name="TextBox 11"/>
+          <p:cNvSpPr txBox="1"/>
+          <p:nvPr/>
+        </p:nvSpPr>
+        <p:spPr>
+          <a:xfrm>
+            <a:off x="566928" y="1682496"/>
+            <a:ext cx="2194560" cy="548640"/>
+          </a:xfrm>
+          <a:prstGeom prst="rect">
+            <a:avLst/>
+          </a:prstGeom>
+          <a:noFill/>
+        </p:spPr>
+        <p:txBody>
+          <a:bodyPr wrap="square" anchor="t"/>
+          <a:lstStyle/>
+          <a:p>
+            <a:pPr algn="l">
+              <a:spcAft>
+                <a:spcPts val="200"/>
+              </a:spcAft>
+            </a:pPr>
+            <a:r>
+              <a:rPr sz="1200" b="1">
+                <a:solidFill>
+                  <a:srgbClr val="C7000B"/>
+                </a:solidFill>
+                <a:latin typeface="Microsoft YaHei"/>
+                <a:ea typeface="Microsoft YaHei"/>
+                <a:cs typeface="Microsoft YaHei"/>
+              </a:rPr>
+              <a:t>LIMU-BERT</a:t>
+            </a:r>
+          </a:p>
+          <a:p>
+            <a:pPr algn="l">
+              <a:spcAft>
+                <a:spcPts val="200"/>
+              </a:spcAft>
+            </a:pPr>
+            <a:r>
+              <a:rPr sz="1200" b="1">
+                <a:solidFill>
+                  <a:srgbClr val="C7000B"/>
+                </a:solidFill>
+                <a:latin typeface="Microsoft YaHei"/>
+                <a:ea typeface="Microsoft YaHei"/>
+                <a:cs typeface="Microsoft YaHei"/>
+              </a:rPr>
+              <a:t>SenSys'21</a:t>
+            </a:r>
+          </a:p>
+        </p:txBody>
+      </p:sp>
+      <p:sp>
+        <p:nvSpPr>
+          <p:cNvPr id="13" name="TextBox 12"/>
+          <p:cNvSpPr txBox="1"/>
+          <p:nvPr/>
+        </p:nvSpPr>
+        <p:spPr>
+          <a:xfrm>
+            <a:off x="2990088" y="1682496"/>
+            <a:ext cx="2834639" cy="548640"/>
+          </a:xfrm>
+          <a:prstGeom prst="rect">
+            <a:avLst/>
+          </a:prstGeom>
+          <a:noFill/>
+        </p:spPr>
+        <p:txBody>
+          <a:bodyPr wrap="square" anchor="t"/>
+          <a:lstStyle/>
+          <a:p>
+            <a:pPr algn="l">
+              <a:spcAft>
+                <a:spcPts val="200"/>
+              </a:spcAft>
+            </a:pPr>
+            <a:r>
+              <a:rPr sz="1100" b="0">
+                <a:solidFill>
+                  <a:srgbClr val="555757"/>
+                </a:solidFill>
+                <a:latin typeface="Microsoft YaHei"/>
+                <a:ea typeface="Microsoft YaHei"/>
+                <a:cs typeface="Microsoft YaHei"/>
+              </a:rPr>
+              <a:t>IMU 三轴</a:t>
+            </a:r>
+          </a:p>
+          <a:p>
+            <a:pPr algn="l">
+              <a:spcAft>
+                <a:spcPts val="200"/>
+              </a:spcAft>
+            </a:pPr>
+            <a:r>
+              <a:rPr sz="1100" b="0">
+                <a:solidFill>
+                  <a:srgbClr val="555757"/>
+                </a:solidFill>
+                <a:latin typeface="Microsoft YaHei"/>
+                <a:ea typeface="Microsoft YaHei"/>
+                <a:cs typeface="Microsoft YaHei"/>
+              </a:rPr>
+              <a:t>掩码预训练</a:t>
+            </a:r>
+          </a:p>
+        </p:txBody>
+      </p:sp>
+      <p:sp>
+        <p:nvSpPr>
+          <p:cNvPr id="14" name="TextBox 13"/>
+          <p:cNvSpPr txBox="1"/>
+          <p:nvPr/>
+        </p:nvSpPr>
+        <p:spPr>
+          <a:xfrm>
+            <a:off x="6053328" y="1682496"/>
+            <a:ext cx="3840480" cy="548640"/>
+          </a:xfrm>
+          <a:prstGeom prst="rect">
+            <a:avLst/>
+          </a:prstGeom>
+          <a:noFill/>
+        </p:spPr>
+        <p:txBody>
+          <a:bodyPr wrap="square" anchor="t"/>
+          <a:lstStyle/>
+          <a:p>
+            <a:pPr algn="l">
+              <a:spcAft>
+                <a:spcPts val="200"/>
+              </a:spcAft>
+            </a:pPr>
+            <a:r>
+              <a:rPr sz="1100" b="0">
+                <a:solidFill>
+                  <a:srgbClr val="555757"/>
+                </a:solidFill>
+                <a:latin typeface="Microsoft YaHei"/>
+                <a:ea typeface="Microsoft YaHei"/>
+                <a:cs typeface="Microsoft YaHei"/>
+              </a:rPr>
+              <a:t>端侧 HAR 开山作；小样本迁移到手机 / 腕戴</a:t>
+            </a:r>
+          </a:p>
+        </p:txBody>
+      </p:sp>
+      <p:sp>
+        <p:nvSpPr>
+          <p:cNvPr id="15" name="TextBox 14"/>
+          <p:cNvSpPr txBox="1"/>
+          <p:nvPr/>
+        </p:nvSpPr>
+        <p:spPr>
+          <a:xfrm>
+            <a:off x="10122407" y="1682496"/>
+            <a:ext cx="1508760" cy="548640"/>
+          </a:xfrm>
+          <a:prstGeom prst="rect">
+            <a:avLst/>
+          </a:prstGeom>
+          <a:noFill/>
+        </p:spPr>
+        <p:txBody>
+          <a:bodyPr wrap="square" anchor="t"/>
+          <a:lstStyle/>
+          <a:p>
+            <a:pPr algn="l">
+              <a:spcAft>
+                <a:spcPts val="200"/>
+              </a:spcAft>
+            </a:pPr>
+            <a:r>
+              <a:rPr sz="1100" b="0">
+                <a:solidFill>
+                  <a:srgbClr val="555757"/>
+                </a:solidFill>
+                <a:latin typeface="Microsoft YaHei"/>
+                <a:ea typeface="Microsoft YaHei"/>
+                <a:cs typeface="Microsoft YaHei"/>
+              </a:rPr>
+              <a:t>手机可部署</a:t>
+            </a:r>
+          </a:p>
+        </p:txBody>
+      </p:sp>
+      <p:sp>
+        <p:nvSpPr>
+          <p:cNvPr id="16" name="Rounded Rectangle 15"/>
           <p:cNvSpPr/>
           <p:nvPr/>
         </p:nvSpPr>
         <p:spPr>
           <a:xfrm>
-            <a:off x="457200" y="1371600"/>
-            <a:ext cx="11247120" cy="73152"/>
-          </a:xfrm>
-          <a:prstGeom prst="rect">
-            <a:avLst/>
+            <a:off x="457200" y="2331720"/>
+            <a:ext cx="11247120" cy="621792"/>
+          </a:xfrm>
+          <a:prstGeom prst="roundRect">
+            <a:avLst>
+              <a:gd name="adj" fmla="val 5000"/>
+            </a:avLst>
           </a:prstGeom>
           <a:solidFill>
-            <a:srgbClr val="C7000B"/>
+            <a:srgbClr val="F7F7F7"/>
           </a:solidFill>
-          <a:ln>
-            <a:noFill/>
+          <a:ln w="9525">
+            <a:solidFill>
+              <a:srgbClr val="DDDDDD"/>
+            </a:solidFill>
           </a:ln>
         </p:spPr>
         <p:style>
@@ -9029,14 +11400,14 @@
       </p:sp>
       <p:sp>
         <p:nvSpPr>
-          <p:cNvPr id="9" name="TextBox 8"/>
+          <p:cNvPr id="17" name="TextBox 16"/>
           <p:cNvSpPr txBox="1"/>
           <p:nvPr/>
         </p:nvSpPr>
         <p:spPr>
           <a:xfrm>
-            <a:off x="640080" y="1600200"/>
-            <a:ext cx="10881360" cy="320040"/>
+            <a:off x="566928" y="2368296"/>
+            <a:ext cx="2194560" cy="548640"/>
           </a:xfrm>
           <a:prstGeom prst="rect">
             <a:avLst/>
@@ -9053,7 +11424,7 @@
               </a:spcAft>
             </a:pPr>
             <a:r>
-              <a:rPr sz="1600" b="1">
+              <a:rPr sz="1200" b="1">
                 <a:solidFill>
                   <a:srgbClr val="C7000B"/>
                 </a:solidFill>
@@ -9061,21 +11432,39 @@
                 <a:ea typeface="Microsoft YaHei"/>
                 <a:cs typeface="Microsoft YaHei"/>
               </a:rPr>
-              <a:t>Ingest(schema) → 校验 → patch token</a:t>
-            </a:r>
-          </a:p>
-        </p:txBody>
-      </p:sp>
-      <p:sp>
-        <p:nvSpPr>
-          <p:cNvPr id="10" name="TextBox 9"/>
+              <a:t>LIMU-BERT-X</a:t>
+            </a:r>
+          </a:p>
+          <a:p>
+            <a:pPr algn="l">
+              <a:spcAft>
+                <a:spcPts val="200"/>
+              </a:spcAft>
+            </a:pPr>
+            <a:r>
+              <a:rPr sz="1200" b="1">
+                <a:solidFill>
+                  <a:srgbClr val="C7000B"/>
+                </a:solidFill>
+                <a:latin typeface="Microsoft YaHei"/>
+                <a:ea typeface="Microsoft YaHei"/>
+                <a:cs typeface="Microsoft YaHei"/>
+              </a:rPr>
+              <a:t>MobiCom'25</a:t>
+            </a:r>
+          </a:p>
+        </p:txBody>
+      </p:sp>
+      <p:sp>
+        <p:nvSpPr>
+          <p:cNvPr id="18" name="TextBox 17"/>
           <p:cNvSpPr txBox="1"/>
           <p:nvPr/>
         </p:nvSpPr>
         <p:spPr>
           <a:xfrm>
-            <a:off x="640080" y="2011680"/>
-            <a:ext cx="10881360" cy="1005840"/>
+            <a:off x="2990088" y="2368296"/>
+            <a:ext cx="2834639" cy="548640"/>
           </a:xfrm>
           <a:prstGeom prst="rect">
             <a:avLst/>
@@ -9092,7 +11481,7 @@
               </a:spcAft>
             </a:pPr>
             <a:r>
-              <a:rPr sz="1300" b="0">
+              <a:rPr sz="1100" b="0">
                 <a:solidFill>
                   <a:srgbClr val="555757"/>
                 </a:solidFill>
@@ -9100,17 +11489,17 @@
                 <a:ea typeface="Microsoft YaHei"/>
                 <a:cs typeface="Microsoft YaHei"/>
               </a:rPr>
-              <a:t>schema = {series_id, timestamp, value, unit, quality_flag, variate_role: target/past-only/past-future}</a:t>
-            </a:r>
-          </a:p>
-          <a:p>
-            <a:pPr algn="l">
-              <a:spcAft>
-                <a:spcPts val="200"/>
-              </a:spcAft>
-            </a:pPr>
-            <a:r>
-              <a:rPr sz="1300" b="0">
+              <a:t>143 万小时 · 6 万人</a:t>
+            </a:r>
+          </a:p>
+          <a:p>
+            <a:pPr algn="l">
+              <a:spcAft>
+                <a:spcPts val="200"/>
+              </a:spcAft>
+            </a:pPr>
+            <a:r>
+              <a:rPr sz="1100" b="0">
                 <a:solidFill>
                   <a:srgbClr val="555757"/>
                 </a:solidFill>
@@ -9118,21 +11507,99 @@
                 <a:ea typeface="Microsoft YaHei"/>
                 <a:cs typeface="Microsoft YaHei"/>
               </a:rPr>
-              <a:t>校验：时钟对齐、量纲归一、质量位过滤、变元上限 32、context ≤ 15,360。不合格直接拒收。</a:t>
-            </a:r>
-          </a:p>
-        </p:txBody>
-      </p:sp>
-      <p:sp>
-        <p:nvSpPr>
-          <p:cNvPr id="11" name="Rounded Rectangle 10"/>
+              <a:t>1.1K 种机型</a:t>
+            </a:r>
+          </a:p>
+        </p:txBody>
+      </p:sp>
+      <p:sp>
+        <p:nvSpPr>
+          <p:cNvPr id="19" name="TextBox 18"/>
+          <p:cNvSpPr txBox="1"/>
+          <p:nvPr/>
+        </p:nvSpPr>
+        <p:spPr>
+          <a:xfrm>
+            <a:off x="6053328" y="2368296"/>
+            <a:ext cx="3840480" cy="548640"/>
+          </a:xfrm>
+          <a:prstGeom prst="rect">
+            <a:avLst/>
+          </a:prstGeom>
+          <a:noFill/>
+        </p:spPr>
+        <p:txBody>
+          <a:bodyPr wrap="square" anchor="t"/>
+          <a:lstStyle/>
+          <a:p>
+            <a:pPr algn="l">
+              <a:spcAft>
+                <a:spcPts val="200"/>
+              </a:spcAft>
+            </a:pPr>
+            <a:r>
+              <a:rPr sz="1100" b="0">
+                <a:solidFill>
+                  <a:srgbClr val="555757"/>
+                </a:solidFill>
+                <a:latin typeface="Microsoft YaHei"/>
+                <a:ea typeface="Microsoft YaHei"/>
+                <a:cs typeface="Microsoft YaHei"/>
+              </a:rPr>
+              <a:t>真实设备大规模泛化；端侧 HAR SOTA</a:t>
+            </a:r>
+          </a:p>
+        </p:txBody>
+      </p:sp>
+      <p:sp>
+        <p:nvSpPr>
+          <p:cNvPr id="20" name="TextBox 19"/>
+          <p:cNvSpPr txBox="1"/>
+          <p:nvPr/>
+        </p:nvSpPr>
+        <p:spPr>
+          <a:xfrm>
+            <a:off x="10122407" y="2368296"/>
+            <a:ext cx="1508760" cy="548640"/>
+          </a:xfrm>
+          <a:prstGeom prst="rect">
+            <a:avLst/>
+          </a:prstGeom>
+          <a:noFill/>
+        </p:spPr>
+        <p:txBody>
+          <a:bodyPr wrap="square" anchor="t"/>
+          <a:lstStyle/>
+          <a:p>
+            <a:pPr algn="l">
+              <a:spcAft>
+                <a:spcPts val="200"/>
+              </a:spcAft>
+            </a:pPr>
+            <a:r>
+              <a:rPr sz="1100" b="0">
+                <a:solidFill>
+                  <a:srgbClr val="555757"/>
+                </a:solidFill>
+                <a:latin typeface="Microsoft YaHei"/>
+                <a:ea typeface="Microsoft YaHei"/>
+                <a:cs typeface="Microsoft YaHei"/>
+              </a:rPr>
+              <a:t>端侧</a:t>
+            </a:r>
+          </a:p>
+        </p:txBody>
+      </p:sp>
+      <p:sp>
+        <p:nvSpPr>
+          <p:cNvPr id="21" name="Rounded Rectangle 20"/>
           <p:cNvSpPr/>
           <p:nvPr/>
         </p:nvSpPr>
         <p:spPr>
           <a:xfrm>
-            <a:off x="457200" y="3383280"/>
-            <a:ext cx="5577840" cy="2194560"/>
+            <a:off x="457200" y="3017520"/>
+            <a:ext cx="11247120" cy="621792"/>
           </a:xfrm>
           <a:prstGeom prst="roundRect">
             <a:avLst>
@@ -9172,23 +11639,219 @@
       </p:sp>
       <p:sp>
         <p:nvSpPr>
-          <p:cNvPr id="12" name="Rectangle 11"/>
+          <p:cNvPr id="22" name="TextBox 21"/>
+          <p:cNvSpPr txBox="1"/>
+          <p:nvPr/>
+        </p:nvSpPr>
+        <p:spPr>
+          <a:xfrm>
+            <a:off x="566928" y="3054096"/>
+            <a:ext cx="2194560" cy="548640"/>
+          </a:xfrm>
+          <a:prstGeom prst="rect">
+            <a:avLst/>
+          </a:prstGeom>
+          <a:noFill/>
+        </p:spPr>
+        <p:txBody>
+          <a:bodyPr wrap="square" anchor="t"/>
+          <a:lstStyle/>
+          <a:p>
+            <a:pPr algn="l">
+              <a:spcAft>
+                <a:spcPts val="200"/>
+              </a:spcAft>
+            </a:pPr>
+            <a:r>
+              <a:rPr sz="1200" b="1">
+                <a:solidFill>
+                  <a:srgbClr val="C7000B"/>
+                </a:solidFill>
+                <a:latin typeface="Microsoft YaHei"/>
+                <a:ea typeface="Microsoft YaHei"/>
+                <a:cs typeface="Microsoft YaHei"/>
+              </a:rPr>
+              <a:t>TartanIMU</a:t>
+            </a:r>
+          </a:p>
+          <a:p>
+            <a:pPr algn="l">
+              <a:spcAft>
+                <a:spcPts val="200"/>
+              </a:spcAft>
+            </a:pPr>
+            <a:r>
+              <a:rPr sz="1200" b="1">
+                <a:solidFill>
+                  <a:srgbClr val="C7000B"/>
+                </a:solidFill>
+                <a:latin typeface="Microsoft YaHei"/>
+                <a:ea typeface="Microsoft YaHei"/>
+                <a:cs typeface="Microsoft YaHei"/>
+              </a:rPr>
+              <a:t>CVPR'25</a:t>
+            </a:r>
+          </a:p>
+        </p:txBody>
+      </p:sp>
+      <p:sp>
+        <p:nvSpPr>
+          <p:cNvPr id="23" name="TextBox 22"/>
+          <p:cNvSpPr txBox="1"/>
+          <p:nvPr/>
+        </p:nvSpPr>
+        <p:spPr>
+          <a:xfrm>
+            <a:off x="2990088" y="3054096"/>
+            <a:ext cx="2834639" cy="548640"/>
+          </a:xfrm>
+          <a:prstGeom prst="rect">
+            <a:avLst/>
+          </a:prstGeom>
+          <a:noFill/>
+        </p:spPr>
+        <p:txBody>
+          <a:bodyPr wrap="square" anchor="t"/>
+          <a:lstStyle/>
+          <a:p>
+            <a:pPr algn="l">
+              <a:spcAft>
+                <a:spcPts val="200"/>
+              </a:spcAft>
+            </a:pPr>
+            <a:r>
+              <a:rPr sz="1100" b="0">
+                <a:solidFill>
+                  <a:srgbClr val="555757"/>
+                </a:solidFill>
+                <a:latin typeface="Microsoft YaHei"/>
+                <a:ea typeface="Microsoft YaHei"/>
+                <a:cs typeface="Microsoft YaHei"/>
+              </a:rPr>
+              <a:t>跨机器人 IMU</a:t>
+            </a:r>
+          </a:p>
+          <a:p>
+            <a:pPr algn="l">
+              <a:spcAft>
+                <a:spcPts val="200"/>
+              </a:spcAft>
+            </a:pPr>
+            <a:r>
+              <a:rPr sz="1100" b="0">
+                <a:solidFill>
+                  <a:srgbClr val="555757"/>
+                </a:solidFill>
+                <a:latin typeface="Microsoft YaHei"/>
+                <a:ea typeface="Microsoft YaHei"/>
+                <a:cs typeface="Microsoft YaHei"/>
+              </a:rPr>
+              <a:t>位姿基础模型</a:t>
+            </a:r>
+          </a:p>
+        </p:txBody>
+      </p:sp>
+      <p:sp>
+        <p:nvSpPr>
+          <p:cNvPr id="24" name="TextBox 23"/>
+          <p:cNvSpPr txBox="1"/>
+          <p:nvPr/>
+        </p:nvSpPr>
+        <p:spPr>
+          <a:xfrm>
+            <a:off x="6053328" y="3054096"/>
+            <a:ext cx="3840480" cy="548640"/>
+          </a:xfrm>
+          <a:prstGeom prst="rect">
+            <a:avLst/>
+          </a:prstGeom>
+          <a:noFill/>
+        </p:spPr>
+        <p:txBody>
+          <a:bodyPr wrap="square" anchor="t"/>
+          <a:lstStyle/>
+          <a:p>
+            <a:pPr algn="l">
+              <a:spcAft>
+                <a:spcPts val="200"/>
+              </a:spcAft>
+            </a:pPr>
+            <a:r>
+              <a:rPr sz="1100" b="0">
+                <a:solidFill>
+                  <a:srgbClr val="555757"/>
+                </a:solidFill>
+                <a:latin typeface="Microsoft YaHei"/>
+                <a:ea typeface="Microsoft YaHei"/>
+                <a:cs typeface="Microsoft YaHei"/>
+              </a:rPr>
+              <a:t>LoRA 仅 1.1M 参数即适配新机；200 FPS 在线推理</a:t>
+            </a:r>
+          </a:p>
+        </p:txBody>
+      </p:sp>
+      <p:sp>
+        <p:nvSpPr>
+          <p:cNvPr id="25" name="TextBox 24"/>
+          <p:cNvSpPr txBox="1"/>
+          <p:nvPr/>
+        </p:nvSpPr>
+        <p:spPr>
+          <a:xfrm>
+            <a:off x="10122407" y="3054096"/>
+            <a:ext cx="1508760" cy="548640"/>
+          </a:xfrm>
+          <a:prstGeom prst="rect">
+            <a:avLst/>
+          </a:prstGeom>
+          <a:noFill/>
+        </p:spPr>
+        <p:txBody>
+          <a:bodyPr wrap="square" anchor="t"/>
+          <a:lstStyle/>
+          <a:p>
+            <a:pPr algn="l">
+              <a:spcAft>
+                <a:spcPts val="200"/>
+              </a:spcAft>
+            </a:pPr>
+            <a:r>
+              <a:rPr sz="1100" b="0">
+                <a:solidFill>
+                  <a:srgbClr val="555757"/>
+                </a:solidFill>
+                <a:latin typeface="Microsoft YaHei"/>
+                <a:ea typeface="Microsoft YaHei"/>
+                <a:cs typeface="Microsoft YaHei"/>
+              </a:rPr>
+              <a:t>机器人</a:t>
+            </a:r>
+          </a:p>
+        </p:txBody>
+      </p:sp>
+      <p:sp>
+        <p:nvSpPr>
+          <p:cNvPr id="26" name="Rounded Rectangle 25"/>
           <p:cNvSpPr/>
           <p:nvPr/>
         </p:nvSpPr>
         <p:spPr>
           <a:xfrm>
-            <a:off x="457200" y="3383280"/>
-            <a:ext cx="5577840" cy="73152"/>
-          </a:xfrm>
-          <a:prstGeom prst="rect">
-            <a:avLst/>
+            <a:off x="457200" y="3703320"/>
+            <a:ext cx="11247120" cy="621792"/>
+          </a:xfrm>
+          <a:prstGeom prst="roundRect">
+            <a:avLst>
+              <a:gd name="adj" fmla="val 5000"/>
+            </a:avLst>
           </a:prstGeom>
           <a:solidFill>
-            <a:srgbClr val="62B230"/>
+            <a:srgbClr val="F7F7F7"/>
           </a:solidFill>
-          <a:ln>
-            <a:noFill/>
+          <a:ln w="9525">
+            <a:solidFill>
+              <a:srgbClr val="DDDDDD"/>
+            </a:solidFill>
           </a:ln>
         </p:spPr>
         <p:style>
@@ -9215,14 +11878,14 @@
       </p:sp>
       <p:sp>
         <p:nvSpPr>
-          <p:cNvPr id="13" name="TextBox 12"/>
+          <p:cNvPr id="27" name="TextBox 26"/>
           <p:cNvSpPr txBox="1"/>
           <p:nvPr/>
         </p:nvSpPr>
         <p:spPr>
           <a:xfrm>
-            <a:off x="640080" y="3611880"/>
-            <a:ext cx="5212080" cy="320040"/>
+            <a:off x="566928" y="3739896"/>
+            <a:ext cx="2194560" cy="548640"/>
           </a:xfrm>
           <a:prstGeom prst="rect">
             <a:avLst/>
@@ -9239,29 +11902,47 @@
               </a:spcAft>
             </a:pPr>
             <a:r>
-              <a:rPr sz="1600" b="1">
-                <a:solidFill>
-                  <a:srgbClr val="62B230"/>
-                </a:solidFill>
-                <a:latin typeface="Microsoft YaHei"/>
-                <a:ea typeface="Microsoft YaHei"/>
-                <a:cs typeface="Microsoft YaHei"/>
-              </a:rPr>
-              <a:t>predict(context, horizon) → {quantiles, point}</a:t>
-            </a:r>
-          </a:p>
-        </p:txBody>
-      </p:sp>
-      <p:sp>
-        <p:nvSpPr>
-          <p:cNvPr id="14" name="TextBox 13"/>
+              <a:rPr sz="1200" b="1">
+                <a:solidFill>
+                  <a:srgbClr val="C7000B"/>
+                </a:solidFill>
+                <a:latin typeface="Microsoft YaHei"/>
+                <a:ea typeface="Microsoft YaHei"/>
+                <a:cs typeface="Microsoft YaHei"/>
+              </a:rPr>
+              <a:t>PRIMUS</a:t>
+            </a:r>
+          </a:p>
+          <a:p>
+            <a:pPr algn="l">
+              <a:spcAft>
+                <a:spcPts val="200"/>
+              </a:spcAft>
+            </a:pPr>
+            <a:r>
+              <a:rPr sz="1200" b="1">
+                <a:solidFill>
+                  <a:srgbClr val="C7000B"/>
+                </a:solidFill>
+                <a:latin typeface="Microsoft YaHei"/>
+                <a:ea typeface="Microsoft YaHei"/>
+                <a:cs typeface="Microsoft YaHei"/>
+              </a:rPr>
+              <a:t>ICASSP'25</a:t>
+            </a:r>
+          </a:p>
+        </p:txBody>
+      </p:sp>
+      <p:sp>
+        <p:nvSpPr>
+          <p:cNvPr id="28" name="TextBox 27"/>
           <p:cNvSpPr txBox="1"/>
           <p:nvPr/>
         </p:nvSpPr>
         <p:spPr>
           <a:xfrm>
-            <a:off x="640080" y="4069080"/>
-            <a:ext cx="5212080" cy="1280160"/>
+            <a:off x="2990088" y="3739896"/>
+            <a:ext cx="2834639" cy="548640"/>
           </a:xfrm>
           <a:prstGeom prst="rect">
             <a:avLst/>
@@ -9278,7 +11959,7 @@
               </a:spcAft>
             </a:pPr>
             <a:r>
-              <a:rPr sz="1300" b="0">
+              <a:rPr sz="1100" b="0">
                 <a:solidFill>
                   <a:srgbClr val="555757"/>
                 </a:solidFill>
@@ -9286,17 +11967,17 @@
                 <a:ea typeface="Microsoft YaHei"/>
                 <a:cs typeface="Microsoft YaHei"/>
               </a:rPr>
-              <a:t>quantiles: (V, H, 9) 十分位轨迹</a:t>
-            </a:r>
-          </a:p>
-          <a:p>
-            <a:pPr algn="l">
-              <a:spcAft>
-                <a:spcPts val="200"/>
-              </a:spcAft>
-            </a:pPr>
-            <a:r>
-              <a:rPr sz="1300" b="0">
+              <a:t>IMU 多模态</a:t>
+            </a:r>
+          </a:p>
+          <a:p>
+            <a:pPr algn="l">
+              <a:spcAft>
+                <a:spcPts val="200"/>
+              </a:spcAft>
+            </a:pPr>
+            <a:r>
+              <a:rPr sz="1100" b="0">
                 <a:solidFill>
                   <a:srgbClr val="555757"/>
                 </a:solidFill>
@@ -9304,17 +11985,38 @@
                 <a:ea typeface="Microsoft YaHei"/>
                 <a:cs typeface="Microsoft YaHei"/>
               </a:rPr>
-              <a:t>point: (V, H) 中位数 q50</a:t>
-            </a:r>
-          </a:p>
-          <a:p>
-            <a:pPr algn="l">
-              <a:spcAft>
-                <a:spcPts val="200"/>
-              </a:spcAft>
-            </a:pPr>
-            <a:r>
-              <a:rPr sz="1300" b="0">
+              <a:t>自监督对齐</a:t>
+            </a:r>
+          </a:p>
+        </p:txBody>
+      </p:sp>
+      <p:sp>
+        <p:nvSpPr>
+          <p:cNvPr id="29" name="TextBox 28"/>
+          <p:cNvSpPr txBox="1"/>
+          <p:nvPr/>
+        </p:nvSpPr>
+        <p:spPr>
+          <a:xfrm>
+            <a:off x="6053328" y="3739896"/>
+            <a:ext cx="3840480" cy="548640"/>
+          </a:xfrm>
+          <a:prstGeom prst="rect">
+            <a:avLst/>
+          </a:prstGeom>
+          <a:noFill/>
+        </p:spPr>
+        <p:txBody>
+          <a:bodyPr wrap="square" anchor="t"/>
+          <a:lstStyle/>
+          <a:p>
+            <a:pPr algn="l">
+              <a:spcAft>
+                <a:spcPts val="200"/>
+              </a:spcAft>
+            </a:pPr>
+            <a:r>
+              <a:rPr sz="1100" b="0">
                 <a:solidFill>
                   <a:srgbClr val="555757"/>
                 </a:solidFill>
@@ -9322,21 +12024,60 @@
                 <a:ea typeface="Microsoft YaHei"/>
                 <a:cs typeface="Microsoft YaHei"/>
               </a:rPr>
-              <a:t>一次前向，CPM 非自回归；可 stitching 任意 H。</a:t>
-            </a:r>
-          </a:p>
-        </p:txBody>
-      </p:sp>
-      <p:sp>
-        <p:nvSpPr>
-          <p:cNvPr id="15" name="Rounded Rectangle 14"/>
+              <a:t>对齐预训练，提升下游 HAR / 健康任务</a:t>
+            </a:r>
+          </a:p>
+        </p:txBody>
+      </p:sp>
+      <p:sp>
+        <p:nvSpPr>
+          <p:cNvPr id="30" name="TextBox 29"/>
+          <p:cNvSpPr txBox="1"/>
+          <p:nvPr/>
+        </p:nvSpPr>
+        <p:spPr>
+          <a:xfrm>
+            <a:off x="10122407" y="3739896"/>
+            <a:ext cx="1508760" cy="548640"/>
+          </a:xfrm>
+          <a:prstGeom prst="rect">
+            <a:avLst/>
+          </a:prstGeom>
+          <a:noFill/>
+        </p:spPr>
+        <p:txBody>
+          <a:bodyPr wrap="square" anchor="t"/>
+          <a:lstStyle/>
+          <a:p>
+            <a:pPr algn="l">
+              <a:spcAft>
+                <a:spcPts val="200"/>
+              </a:spcAft>
+            </a:pPr>
+            <a:r>
+              <a:rPr sz="1100" b="0">
+                <a:solidFill>
+                  <a:srgbClr val="555757"/>
+                </a:solidFill>
+                <a:latin typeface="Microsoft YaHei"/>
+                <a:ea typeface="Microsoft YaHei"/>
+                <a:cs typeface="Microsoft YaHei"/>
+              </a:rPr>
+              <a:t>研究</a:t>
+            </a:r>
+          </a:p>
+        </p:txBody>
+      </p:sp>
+      <p:sp>
+        <p:nvSpPr>
+          <p:cNvPr id="31" name="Rounded Rectangle 30"/>
           <p:cNvSpPr/>
           <p:nvPr/>
         </p:nvSpPr>
         <p:spPr>
           <a:xfrm>
-            <a:off x="6217920" y="3383280"/>
-            <a:ext cx="5486400" cy="2194560"/>
+            <a:off x="457200" y="4389120"/>
+            <a:ext cx="11247120" cy="621792"/>
           </a:xfrm>
           <a:prstGeom prst="roundRect">
             <a:avLst>
@@ -9376,23 +12117,219 @@
       </p:sp>
       <p:sp>
         <p:nvSpPr>
-          <p:cNvPr id="16" name="Rectangle 15"/>
+          <p:cNvPr id="32" name="TextBox 31"/>
+          <p:cNvSpPr txBox="1"/>
+          <p:nvPr/>
+        </p:nvSpPr>
+        <p:spPr>
+          <a:xfrm>
+            <a:off x="566928" y="4425696"/>
+            <a:ext cx="2194560" cy="548640"/>
+          </a:xfrm>
+          <a:prstGeom prst="rect">
+            <a:avLst/>
+          </a:prstGeom>
+          <a:noFill/>
+        </p:spPr>
+        <p:txBody>
+          <a:bodyPr wrap="square" anchor="t"/>
+          <a:lstStyle/>
+          <a:p>
+            <a:pPr algn="l">
+              <a:spcAft>
+                <a:spcPts val="200"/>
+              </a:spcAft>
+            </a:pPr>
+            <a:r>
+              <a:rPr sz="1200" b="1">
+                <a:solidFill>
+                  <a:srgbClr val="C7000B"/>
+                </a:solidFill>
+                <a:latin typeface="Microsoft YaHei"/>
+                <a:ea typeface="Microsoft YaHei"/>
+                <a:cs typeface="Microsoft YaHei"/>
+              </a:rPr>
+              <a:t>Babel</a:t>
+            </a:r>
+          </a:p>
+          <a:p>
+            <a:pPr algn="l">
+              <a:spcAft>
+                <a:spcPts val="200"/>
+              </a:spcAft>
+            </a:pPr>
+            <a:r>
+              <a:rPr sz="1200" b="1">
+                <a:solidFill>
+                  <a:srgbClr val="C7000B"/>
+                </a:solidFill>
+                <a:latin typeface="Microsoft YaHei"/>
+                <a:ea typeface="Microsoft YaHei"/>
+                <a:cs typeface="Microsoft YaHei"/>
+              </a:rPr>
+              <a:t>SenSys'25</a:t>
+            </a:r>
+          </a:p>
+        </p:txBody>
+      </p:sp>
+      <p:sp>
+        <p:nvSpPr>
+          <p:cNvPr id="33" name="TextBox 32"/>
+          <p:cNvSpPr txBox="1"/>
+          <p:nvPr/>
+        </p:nvSpPr>
+        <p:spPr>
+          <a:xfrm>
+            <a:off x="2990088" y="4425696"/>
+            <a:ext cx="2834639" cy="548640"/>
+          </a:xfrm>
+          <a:prstGeom prst="rect">
+            <a:avLst/>
+          </a:prstGeom>
+          <a:noFill/>
+        </p:spPr>
+        <p:txBody>
+          <a:bodyPr wrap="square" anchor="t"/>
+          <a:lstStyle/>
+          <a:p>
+            <a:pPr algn="l">
+              <a:spcAft>
+                <a:spcPts val="200"/>
+              </a:spcAft>
+            </a:pPr>
+            <a:r>
+              <a:rPr sz="1100" b="0">
+                <a:solidFill>
+                  <a:srgbClr val="555757"/>
+                </a:solidFill>
+                <a:latin typeface="Microsoft YaHei"/>
+                <a:ea typeface="Microsoft YaHei"/>
+                <a:cs typeface="Microsoft YaHei"/>
+              </a:rPr>
+              <a:t>6 模态对齐</a:t>
+            </a:r>
+          </a:p>
+          <a:p>
+            <a:pPr algn="l">
+              <a:spcAft>
+                <a:spcPts val="200"/>
+              </a:spcAft>
+            </a:pPr>
+            <a:r>
+              <a:rPr sz="1100" b="0">
+                <a:solidFill>
+                  <a:srgbClr val="555757"/>
+                </a:solidFill>
+                <a:latin typeface="Microsoft YaHei"/>
+                <a:ea typeface="Microsoft YaHei"/>
+                <a:cs typeface="Microsoft YaHei"/>
+              </a:rPr>
+              <a:t>IMU 塔 = LIMU-BERT</a:t>
+            </a:r>
+          </a:p>
+        </p:txBody>
+      </p:sp>
+      <p:sp>
+        <p:nvSpPr>
+          <p:cNvPr id="34" name="TextBox 33"/>
+          <p:cNvSpPr txBox="1"/>
+          <p:nvPr/>
+        </p:nvSpPr>
+        <p:spPr>
+          <a:xfrm>
+            <a:off x="6053328" y="4425696"/>
+            <a:ext cx="3840480" cy="548640"/>
+          </a:xfrm>
+          <a:prstGeom prst="rect">
+            <a:avLst/>
+          </a:prstGeom>
+          <a:noFill/>
+        </p:spPr>
+        <p:txBody>
+          <a:bodyPr wrap="square" anchor="t"/>
+          <a:lstStyle/>
+          <a:p>
+            <a:pPr algn="l">
+              <a:spcAft>
+                <a:spcPts val="200"/>
+              </a:spcAft>
+            </a:pPr>
+            <a:r>
+              <a:rPr sz="1100" b="0">
+                <a:solidFill>
+                  <a:srgbClr val="555757"/>
+                </a:solidFill>
+                <a:latin typeface="Microsoft YaHei"/>
+                <a:ea typeface="Microsoft YaHei"/>
+                <a:cs typeface="Microsoft YaHei"/>
+              </a:rPr>
+              <a:t>多模态人体感知表征</a:t>
+            </a:r>
+          </a:p>
+        </p:txBody>
+      </p:sp>
+      <p:sp>
+        <p:nvSpPr>
+          <p:cNvPr id="35" name="TextBox 34"/>
+          <p:cNvSpPr txBox="1"/>
+          <p:nvPr/>
+        </p:nvSpPr>
+        <p:spPr>
+          <a:xfrm>
+            <a:off x="10122407" y="4425696"/>
+            <a:ext cx="1508760" cy="548640"/>
+          </a:xfrm>
+          <a:prstGeom prst="rect">
+            <a:avLst/>
+          </a:prstGeom>
+          <a:noFill/>
+        </p:spPr>
+        <p:txBody>
+          <a:bodyPr wrap="square" anchor="t"/>
+          <a:lstStyle/>
+          <a:p>
+            <a:pPr algn="l">
+              <a:spcAft>
+                <a:spcPts val="200"/>
+              </a:spcAft>
+            </a:pPr>
+            <a:r>
+              <a:rPr sz="1100" b="0">
+                <a:solidFill>
+                  <a:srgbClr val="555757"/>
+                </a:solidFill>
+                <a:latin typeface="Microsoft YaHei"/>
+                <a:ea typeface="Microsoft YaHei"/>
+                <a:cs typeface="Microsoft YaHei"/>
+              </a:rPr>
+              <a:t>研究</a:t>
+            </a:r>
+          </a:p>
+        </p:txBody>
+      </p:sp>
+      <p:sp>
+        <p:nvSpPr>
+          <p:cNvPr id="36" name="Rounded Rectangle 35"/>
           <p:cNvSpPr/>
           <p:nvPr/>
         </p:nvSpPr>
         <p:spPr>
           <a:xfrm>
-            <a:off x="6217920" y="3383280"/>
-            <a:ext cx="5486400" cy="73152"/>
-          </a:xfrm>
-          <a:prstGeom prst="rect">
-            <a:avLst/>
+            <a:off x="457200" y="5074920"/>
+            <a:ext cx="11247120" cy="621792"/>
+          </a:xfrm>
+          <a:prstGeom prst="roundRect">
+            <a:avLst>
+              <a:gd name="adj" fmla="val 5000"/>
+            </a:avLst>
           </a:prstGeom>
           <a:solidFill>
-            <a:srgbClr val="30B5C5"/>
+            <a:srgbClr val="F7F7F7"/>
           </a:solidFill>
-          <a:ln>
-            <a:noFill/>
+          <a:ln w="9525">
+            <a:solidFill>
+              <a:srgbClr val="DDDDDD"/>
+            </a:solidFill>
           </a:ln>
         </p:spPr>
         <p:style>
@@ -9419,14 +12356,14 @@
       </p:sp>
       <p:sp>
         <p:nvSpPr>
-          <p:cNvPr id="17" name="TextBox 16"/>
+          <p:cNvPr id="37" name="TextBox 36"/>
           <p:cNvSpPr txBox="1"/>
           <p:nvPr/>
         </p:nvSpPr>
         <p:spPr>
           <a:xfrm>
-            <a:off x="6400800" y="3611880"/>
-            <a:ext cx="5120640" cy="320040"/>
+            <a:off x="566928" y="5111496"/>
+            <a:ext cx="2194560" cy="548640"/>
           </a:xfrm>
           <a:prstGeom prst="rect">
             <a:avLst/>
@@ -9443,29 +12380,47 @@
               </a:spcAft>
             </a:pPr>
             <a:r>
-              <a:rPr sz="1600" b="1">
-                <a:solidFill>
-                  <a:srgbClr val="30B5C5"/>
-                </a:solidFill>
-                <a:latin typeface="Microsoft YaHei"/>
-                <a:ea typeface="Microsoft YaHei"/>
-                <a:cs typeface="Microsoft YaHei"/>
-              </a:rPr>
-              <a:t>classify(window) → {label, confidence}</a:t>
-            </a:r>
-          </a:p>
-        </p:txBody>
-      </p:sp>
-      <p:sp>
-        <p:nvSpPr>
-          <p:cNvPr id="18" name="TextBox 17"/>
+              <a:rPr sz="1200" b="1">
+                <a:solidFill>
+                  <a:srgbClr val="C7000B"/>
+                </a:solidFill>
+                <a:latin typeface="Microsoft YaHei"/>
+                <a:ea typeface="Microsoft YaHei"/>
+                <a:cs typeface="Microsoft YaHei"/>
+              </a:rPr>
+              <a:t>Meta EMG</a:t>
+            </a:r>
+          </a:p>
+          <a:p>
+            <a:pPr algn="l">
+              <a:spcAft>
+                <a:spcPts val="200"/>
+              </a:spcAft>
+            </a:pPr>
+            <a:r>
+              <a:rPr sz="1200" b="1">
+                <a:solidFill>
+                  <a:srgbClr val="C7000B"/>
+                </a:solidFill>
+                <a:latin typeface="Microsoft YaHei"/>
+                <a:ea typeface="Microsoft YaHei"/>
+                <a:cs typeface="Microsoft YaHei"/>
+              </a:rPr>
+              <a:t>Nature'25</a:t>
+            </a:r>
+          </a:p>
+        </p:txBody>
+      </p:sp>
+      <p:sp>
+        <p:nvSpPr>
+          <p:cNvPr id="38" name="TextBox 37"/>
           <p:cNvSpPr txBox="1"/>
           <p:nvPr/>
         </p:nvSpPr>
         <p:spPr>
           <a:xfrm>
-            <a:off x="6400800" y="4069080"/>
-            <a:ext cx="5120640" cy="1280160"/>
+            <a:off x="2990088" y="5111496"/>
+            <a:ext cx="2834639" cy="548640"/>
           </a:xfrm>
           <a:prstGeom prst="rect">
             <a:avLst/>
@@ -9482,7 +12437,7 @@
               </a:spcAft>
             </a:pPr>
             <a:r>
-              <a:rPr sz="1300" b="0">
+              <a:rPr sz="1100" b="0">
                 <a:solidFill>
                   <a:srgbClr val="555757"/>
                 </a:solidFill>
@@ -9490,17 +12445,17 @@
                 <a:ea typeface="Microsoft YaHei"/>
                 <a:cs typeface="Microsoft YaHei"/>
               </a:rPr>
-              <a:t>label: 场景方注册的类别 id</a:t>
-            </a:r>
-          </a:p>
-          <a:p>
-            <a:pPr algn="l">
-              <a:spcAft>
-                <a:spcPts val="200"/>
-              </a:spcAft>
-            </a:pPr>
-            <a:r>
-              <a:rPr sz="1300" b="0">
+              <a:t>sEMG 腕带</a:t>
+            </a:r>
+          </a:p>
+          <a:p>
+            <a:pPr algn="l">
+              <a:spcAft>
+                <a:spcPts val="200"/>
+              </a:spcAft>
+            </a:pPr>
+            <a:r>
+              <a:rPr sz="1100" b="0">
                 <a:solidFill>
                   <a:srgbClr val="555757"/>
                 </a:solidFill>
@@ -9508,17 +12463,38 @@
                 <a:ea typeface="Microsoft YaHei"/>
                 <a:cs typeface="Microsoft YaHei"/>
               </a:rPr>
-              <a:t>confidence: softmax 概率</a:t>
-            </a:r>
-          </a:p>
-          <a:p>
-            <a:pPr algn="l">
-              <a:spcAft>
-                <a:spcPts val="200"/>
-              </a:spcAft>
-            </a:pPr>
-            <a:r>
-              <a:rPr sz="1300" b="0">
+              <a:t>跨用户泛化</a:t>
+            </a:r>
+          </a:p>
+        </p:txBody>
+      </p:sp>
+      <p:sp>
+        <p:nvSpPr>
+          <p:cNvPr id="39" name="TextBox 38"/>
+          <p:cNvSpPr txBox="1"/>
+          <p:nvPr/>
+        </p:nvSpPr>
+        <p:spPr>
+          <a:xfrm>
+            <a:off x="6053328" y="5111496"/>
+            <a:ext cx="3840480" cy="548640"/>
+          </a:xfrm>
+          <a:prstGeom prst="rect">
+            <a:avLst/>
+          </a:prstGeom>
+          <a:noFill/>
+        </p:spPr>
+        <p:txBody>
+          <a:bodyPr wrap="square" anchor="t"/>
+          <a:lstStyle/>
+          <a:p>
+            <a:pPr algn="l">
+              <a:spcAft>
+                <a:spcPts val="200"/>
+              </a:spcAft>
+            </a:pPr>
+            <a:r>
+              <a:rPr sz="1100" b="0">
                 <a:solidFill>
                   <a:srgbClr val="555757"/>
                 </a:solidFill>
@@ -9526,14 +12502,200 @@
                 <a:ea typeface="Microsoft YaHei"/>
                 <a:cs typeface="Microsoft YaHei"/>
               </a:rPr>
-              <a:t>基于共享表征 + 任务 token / linear probe。</a:t>
-            </a:r>
-          </a:p>
-        </p:txBody>
-      </p:sp>
-      <p:sp>
-        <p:nvSpPr>
-          <p:cNvPr id="19" name="Rectangle 18"/>
+              <a:t>0.88 手势/s；手写 20.9 WPM；个性化再 +16%</a:t>
+            </a:r>
+          </a:p>
+        </p:txBody>
+      </p:sp>
+      <p:sp>
+        <p:nvSpPr>
+          <p:cNvPr id="40" name="TextBox 39"/>
+          <p:cNvSpPr txBox="1"/>
+          <p:nvPr/>
+        </p:nvSpPr>
+        <p:spPr>
+          <a:xfrm>
+            <a:off x="10122407" y="5111496"/>
+            <a:ext cx="1508760" cy="548640"/>
+          </a:xfrm>
+          <a:prstGeom prst="rect">
+            <a:avLst/>
+          </a:prstGeom>
+          <a:noFill/>
+        </p:spPr>
+        <p:txBody>
+          <a:bodyPr wrap="square" anchor="t"/>
+          <a:lstStyle/>
+          <a:p>
+            <a:pPr algn="l">
+              <a:spcAft>
+                <a:spcPts val="200"/>
+              </a:spcAft>
+            </a:pPr>
+            <a:r>
+              <a:rPr sz="1100" b="0">
+                <a:solidFill>
+                  <a:srgbClr val="555757"/>
+                </a:solidFill>
+                <a:latin typeface="Microsoft YaHei"/>
+                <a:ea typeface="Microsoft YaHei"/>
+                <a:cs typeface="Microsoft YaHei"/>
+              </a:rPr>
+              <a:t>腕带</a:t>
+            </a:r>
+          </a:p>
+          <a:p>
+            <a:pPr algn="l">
+              <a:spcAft>
+                <a:spcPts val="200"/>
+              </a:spcAft>
+            </a:pPr>
+            <a:r>
+              <a:rPr sz="1100" b="0">
+                <a:solidFill>
+                  <a:srgbClr val="555757"/>
+                </a:solidFill>
+                <a:latin typeface="Microsoft YaHei"/>
+                <a:ea typeface="Microsoft YaHei"/>
+                <a:cs typeface="Microsoft YaHei"/>
+              </a:rPr>
+              <a:t>CC-BY-NC</a:t>
+            </a:r>
+          </a:p>
+        </p:txBody>
+      </p:sp>
+      <p:sp>
+        <p:nvSpPr>
+          <p:cNvPr id="41" name="Rounded Rectangle 40"/>
+          <p:cNvSpPr/>
+          <p:nvPr/>
+        </p:nvSpPr>
+        <p:spPr>
+          <a:xfrm>
+            <a:off x="457200" y="5806440"/>
+            <a:ext cx="11247120" cy="640080"/>
+          </a:xfrm>
+          <a:prstGeom prst="roundRect">
+            <a:avLst>
+              <a:gd name="adj" fmla="val 5000"/>
+            </a:avLst>
+          </a:prstGeom>
+          <a:solidFill>
+            <a:srgbClr val="FFF0F0"/>
+          </a:solidFill>
+          <a:ln w="9525">
+            <a:solidFill>
+              <a:srgbClr val="C7000B"/>
+            </a:solidFill>
+          </a:ln>
+        </p:spPr>
+        <p:style>
+          <a:lnRef idx="1">
+            <a:schemeClr val="accent1"/>
+          </a:lnRef>
+          <a:fillRef idx="3">
+            <a:schemeClr val="accent1"/>
+          </a:fillRef>
+          <a:effectRef idx="2">
+            <a:schemeClr val="accent1"/>
+          </a:effectRef>
+          <a:fontRef idx="minor">
+            <a:schemeClr val="lt1"/>
+          </a:fontRef>
+        </p:style>
+        <p:txBody>
+          <a:bodyPr rtlCol="0" anchor="ctr"/>
+          <a:lstStyle/>
+          <a:p>
+            <a:pPr algn="ctr"/>
+          </a:p>
+        </p:txBody>
+      </p:sp>
+      <p:sp>
+        <p:nvSpPr>
+          <p:cNvPr id="42" name="Rectangle 41"/>
+          <p:cNvSpPr/>
+          <p:nvPr/>
+        </p:nvSpPr>
+        <p:spPr>
+          <a:xfrm>
+            <a:off x="457200" y="5806440"/>
+            <a:ext cx="73152" cy="640080"/>
+          </a:xfrm>
+          <a:prstGeom prst="rect">
+            <a:avLst/>
+          </a:prstGeom>
+          <a:solidFill>
+            <a:srgbClr val="C7000B"/>
+          </a:solidFill>
+          <a:ln>
+            <a:noFill/>
+          </a:ln>
+        </p:spPr>
+        <p:style>
+          <a:lnRef idx="1">
+            <a:schemeClr val="accent1"/>
+          </a:lnRef>
+          <a:fillRef idx="3">
+            <a:schemeClr val="accent1"/>
+          </a:fillRef>
+          <a:effectRef idx="2">
+            <a:schemeClr val="accent1"/>
+          </a:effectRef>
+          <a:fontRef idx="minor">
+            <a:schemeClr val="lt1"/>
+          </a:fontRef>
+        </p:style>
+        <p:txBody>
+          <a:bodyPr rtlCol="0" anchor="ctr"/>
+          <a:lstStyle/>
+          <a:p>
+            <a:pPr algn="ctr"/>
+          </a:p>
+        </p:txBody>
+      </p:sp>
+      <p:sp>
+        <p:nvSpPr>
+          <p:cNvPr id="43" name="TextBox 42"/>
+          <p:cNvSpPr txBox="1"/>
+          <p:nvPr/>
+        </p:nvSpPr>
+        <p:spPr>
+          <a:xfrm>
+            <a:off x="685800" y="5806440"/>
+            <a:ext cx="10881360" cy="640080"/>
+          </a:xfrm>
+          <a:prstGeom prst="rect">
+            <a:avLst/>
+          </a:prstGeom>
+          <a:noFill/>
+        </p:spPr>
+        <p:txBody>
+          <a:bodyPr wrap="square" anchor="ctr"/>
+          <a:lstStyle/>
+          <a:p>
+            <a:pPr algn="l">
+              <a:spcAft>
+                <a:spcPts val="200"/>
+              </a:spcAft>
+            </a:pPr>
+            <a:r>
+              <a:rPr sz="1300" b="1">
+                <a:solidFill>
+                  <a:srgbClr val="1A1A1A"/>
+                </a:solidFill>
+                <a:latin typeface="Microsoft YaHei"/>
+                <a:ea typeface="Microsoft YaHei"/>
+                <a:cs typeface="Microsoft YaHei"/>
+              </a:rPr>
+              <a:t>所以  ·  平台用 LIMU-BERT-X 初始化 IMU 变元、用 Meta EMG 作 EMG 对照；底座仍是通用模型。</a:t>
+            </a:r>
+          </a:p>
+        </p:txBody>
+      </p:sp>
+      <p:sp>
+        <p:nvSpPr>
+          <p:cNvPr id="44" name="Rectangle 43"/>
           <p:cNvSpPr/>
           <p:nvPr/>
         </p:nvSpPr>
@@ -9576,7 +12738,7 @@
       </p:sp>
       <p:sp>
         <p:nvSpPr>
-          <p:cNvPr id="20" name="TextBox 19"/>
+          <p:cNvPr id="45" name="TextBox 44"/>
           <p:cNvSpPr txBox="1"/>
           <p:nvPr/>
         </p:nvSpPr>
@@ -9608,14 +12770,14 @@
                 <a:ea typeface="Microsoft YaHei"/>
                 <a:cs typeface="Microsoft YaHei"/>
               </a:rPr>
-              <a:t>华为  ·  AI 物理感知平台  ·  接口    |    Security Level: Internal</a:t>
-            </a:r>
-          </a:p>
-        </p:txBody>
-      </p:sp>
-      <p:sp>
-        <p:nvSpPr>
-          <p:cNvPr id="21" name="TextBox 20"/>
+              <a:t>华为  ·  AI 物理感知平台  ·  模型盘点    |    Security Level: Internal</a:t>
+            </a:r>
+          </a:p>
+        </p:txBody>
+      </p:sp>
+      <p:sp>
+        <p:nvSpPr>
+          <p:cNvPr id="46" name="TextBox 45"/>
           <p:cNvSpPr txBox="1"/>
           <p:nvPr/>
         </p:nvSpPr>
@@ -9647,7 +12809,7 @@
                 <a:ea typeface="Microsoft YaHei"/>
                 <a:cs typeface="Microsoft YaHei"/>
               </a:rPr>
-              <a:t>3  /  8</a:t>
+              <a:t>3  /  10</a:t>
             </a:r>
           </a:p>
         </p:txBody>
@@ -9747,7 +12909,7 @@
                 <a:ea typeface="Microsoft YaHei"/>
                 <a:cs typeface="Microsoft YaHei"/>
               </a:rPr>
-              <a:t>3  预测实现</a:t>
+              <a:t>3  平台边界</a:t>
             </a:r>
           </a:p>
         </p:txBody>
@@ -9786,7 +12948,7 @@
                 <a:ea typeface="Microsoft YaHei"/>
                 <a:cs typeface="Microsoft YaHei"/>
               </a:rPr>
-              <a:t>TimesFM-3 式：CPM 一次前向出 9 分位数</a:t>
+              <a:t>只做工具，不做场景；接口稳定，底座可换</a:t>
             </a:r>
           </a:p>
         </p:txBody>
@@ -9868,7 +13030,7 @@
                 <a:ea typeface="Microsoft YaHei"/>
                 <a:cs typeface="Microsoft YaHei"/>
               </a:rPr>
-              <a:t>预测是平台原生能力；接口固定，底座可换。</a:t>
+              <a:t>明确划分：平台负责 Ingest → 表征 → 推理；场景方负责业务标签与闭环。</a:t>
             </a:r>
           </a:p>
         </p:txBody>
@@ -9882,7 +13044,7 @@
         <p:spPr>
           <a:xfrm>
             <a:off x="457200" y="1371600"/>
-            <a:ext cx="5623560" cy="1298448"/>
+            <a:ext cx="5623560" cy="1234440"/>
           </a:xfrm>
           <a:prstGeom prst="roundRect">
             <a:avLst>
@@ -9928,7 +13090,7 @@
         </p:nvSpPr>
         <p:spPr>
           <a:xfrm>
-            <a:off x="658368" y="1508760"/>
+            <a:off x="658368" y="1536192"/>
             <a:ext cx="5212080" cy="320040"/>
           </a:xfrm>
           <a:prstGeom prst="rect">
@@ -9946,7 +13108,7 @@
               </a:spcAft>
             </a:pPr>
             <a:r>
-              <a:rPr sz="1600" b="1">
+              <a:rPr sz="1500" b="1">
                 <a:solidFill>
                   <a:srgbClr val="C7000B"/>
                 </a:solidFill>
@@ -9954,7 +13116,7 @@
                 <a:ea typeface="Microsoft YaHei"/>
                 <a:cs typeface="Microsoft YaHei"/>
               </a:rPr>
-              <a:t>输入</a:t>
+              <a:t>平台交付</a:t>
             </a:r>
           </a:p>
         </p:txBody>
@@ -9967,8 +13129,8 @@
         </p:nvSpPr>
         <p:spPr>
           <a:xfrm>
-            <a:off x="658368" y="1874520"/>
-            <a:ext cx="5212080" cy="685800"/>
+            <a:off x="658368" y="1901952"/>
+            <a:ext cx="5212080" cy="548640"/>
           </a:xfrm>
           <a:prstGeom prst="rect">
             <a:avLst/>
@@ -9985,7 +13147,7 @@
               </a:spcAft>
             </a:pPr>
             <a:r>
-              <a:rPr sz="1300" b="0">
+              <a:rPr sz="1400" b="0">
                 <a:solidFill>
                   <a:srgbClr val="555757"/>
                 </a:solidFill>
@@ -9993,7 +13155,7 @@
                 <a:ea typeface="Microsoft YaHei"/>
                 <a:cs typeface="Microsoft YaHei"/>
               </a:rPr>
-              <a:t>context ≤ 15,360；变元 ≤ 32；target / past-only / past-future。</a:t>
+              <a:t>PhysIngest 校验、共享表征、predict() / classify()、评测工具链</a:t>
             </a:r>
           </a:p>
         </p:txBody>
@@ -10007,7 +13169,7 @@
         <p:spPr>
           <a:xfrm>
             <a:off x="6263640" y="1371600"/>
-            <a:ext cx="5623560" cy="1298448"/>
+            <a:ext cx="5623560" cy="1234440"/>
           </a:xfrm>
           <a:prstGeom prst="roundRect">
             <a:avLst>
@@ -10053,7 +13215,7 @@
         </p:nvSpPr>
         <p:spPr>
           <a:xfrm>
-            <a:off x="6464808" y="1508760"/>
+            <a:off x="6464808" y="1536192"/>
             <a:ext cx="5212080" cy="320040"/>
           </a:xfrm>
           <a:prstGeom prst="rect">
@@ -10071,7 +13233,7 @@
               </a:spcAft>
             </a:pPr>
             <a:r>
-              <a:rPr sz="1600" b="1">
+              <a:rPr sz="1500" b="1">
                 <a:solidFill>
                   <a:srgbClr val="C7000B"/>
                 </a:solidFill>
@@ -10079,7 +13241,7 @@
                 <a:ea typeface="Microsoft YaHei"/>
                 <a:cs typeface="Microsoft YaHei"/>
               </a:rPr>
-              <a:t>特征</a:t>
+              <a:t>平台不交付</a:t>
             </a:r>
           </a:p>
         </p:txBody>
@@ -10092,8 +13254,8 @@
         </p:nvSpPr>
         <p:spPr>
           <a:xfrm>
-            <a:off x="6464808" y="1874520"/>
-            <a:ext cx="5212080" cy="685800"/>
+            <a:off x="6464808" y="1901952"/>
+            <a:ext cx="5212080" cy="548640"/>
           </a:xfrm>
           <a:prstGeom prst="rect">
             <a:avLst/>
@@ -10110,7 +13272,7 @@
               </a:spcAft>
             </a:pPr>
             <a:r>
-              <a:rPr sz="1300" b="0">
+              <a:rPr sz="1400" b="0">
                 <a:solidFill>
                   <a:srgbClr val="555757"/>
                 </a:solidFill>
@@ -10118,7 +13280,7 @@
                 <a:ea typeface="Microsoft YaHei"/>
                 <a:cs typeface="Microsoft YaHei"/>
               </a:rPr>
-              <a:t>pad32 → 去趋势 → RevIN → patch 192 → ResidualBlock → 1280 token。</a:t>
+              <a:t>场景 Pack、整机 App、芯片、盘古、世界视频、把 TimesFM 当分类模型宣传</a:t>
             </a:r>
           </a:p>
         </p:txBody>
@@ -10131,8 +13293,8 @@
         </p:nvSpPr>
         <p:spPr>
           <a:xfrm>
-            <a:off x="457200" y="2788920"/>
-            <a:ext cx="5623560" cy="1298448"/>
+            <a:off x="457200" y="2743200"/>
+            <a:ext cx="5623560" cy="1234440"/>
           </a:xfrm>
           <a:prstGeom prst="roundRect">
             <a:avLst>
@@ -10178,7 +13340,7 @@
         </p:nvSpPr>
         <p:spPr>
           <a:xfrm>
-            <a:off x="658368" y="2926080"/>
+            <a:off x="658368" y="2907792"/>
             <a:ext cx="5212080" cy="320040"/>
           </a:xfrm>
           <a:prstGeom prst="rect">
@@ -10196,7 +13358,7 @@
               </a:spcAft>
             </a:pPr>
             <a:r>
-              <a:rPr sz="1600" b="1">
+              <a:rPr sz="1500" b="1">
                 <a:solidFill>
                   <a:srgbClr val="C7000B"/>
                 </a:solidFill>
@@ -10204,7 +13366,7 @@
                 <a:ea typeface="Microsoft YaHei"/>
                 <a:cs typeface="Microsoft YaHei"/>
               </a:rPr>
-              <a:t>表征</a:t>
+              <a:t>底座可替换</a:t>
             </a:r>
           </a:p>
         </p:txBody>
@@ -10217,8 +13379,8 @@
         </p:nvSpPr>
         <p:spPr>
           <a:xfrm>
-            <a:off x="658368" y="3291840"/>
-            <a:ext cx="5212080" cy="685800"/>
+            <a:off x="658368" y="3273552"/>
+            <a:ext cx="5212080" cy="548640"/>
           </a:xfrm>
           <a:prstGeom prst="rect">
             <a:avLst/>
@@ -10235,7 +13397,7 @@
               </a:spcAft>
             </a:pPr>
             <a:r>
-              <a:rPr sz="1300" b="0">
+              <a:rPr sz="1400" b="0">
                 <a:solidFill>
                   <a:srgbClr val="555757"/>
                 </a:solidFill>
@@ -10243,7 +13405,7 @@
                 <a:ea typeface="Microsoft YaHei"/>
                 <a:cs typeface="Microsoft YaHei"/>
               </a:rPr>
-              <a:t>20 × MixingTransformer：因果时间注意力 + 变元注意力 + FFN。</a:t>
+              <a:t>TimesFM-3 → 自研 / 更新版本；UniTS/MOMENT → 其他多任务模型</a:t>
             </a:r>
           </a:p>
         </p:txBody>
@@ -10256,8 +13418,8 @@
         </p:nvSpPr>
         <p:spPr>
           <a:xfrm>
-            <a:off x="6263640" y="2788920"/>
-            <a:ext cx="5623560" cy="1298448"/>
+            <a:off x="6263640" y="2743200"/>
+            <a:ext cx="5623560" cy="1234440"/>
           </a:xfrm>
           <a:prstGeom prst="roundRect">
             <a:avLst>
@@ -10303,7 +13465,7 @@
         </p:nvSpPr>
         <p:spPr>
           <a:xfrm>
-            <a:off x="6464808" y="2926080"/>
+            <a:off x="6464808" y="2907792"/>
             <a:ext cx="5212080" cy="320040"/>
           </a:xfrm>
           <a:prstGeom prst="rect">
@@ -10321,7 +13483,7 @@
               </a:spcAft>
             </a:pPr>
             <a:r>
-              <a:rPr sz="1600" b="1">
+              <a:rPr sz="1500" b="1">
                 <a:solidFill>
                   <a:srgbClr val="C7000B"/>
                 </a:solidFill>
@@ -10329,7 +13491,7 @@
                 <a:ea typeface="Microsoft YaHei"/>
                 <a:cs typeface="Microsoft YaHei"/>
               </a:rPr>
-              <a:t>输出头</a:t>
+              <a:t>接口不替换</a:t>
             </a:r>
           </a:p>
         </p:txBody>
@@ -10342,8 +13504,8 @@
         </p:nvSpPr>
         <p:spPr>
           <a:xfrm>
-            <a:off x="6464808" y="3291840"/>
-            <a:ext cx="5212080" cy="685800"/>
+            <a:off x="6464808" y="3273552"/>
+            <a:ext cx="5212080" cy="548640"/>
           </a:xfrm>
           <a:prstGeom prst="rect">
             <a:avLst/>
@@ -10360,7 +13522,7 @@
               </a:spcAft>
             </a:pPr>
             <a:r>
-              <a:rPr sz="1300" b="0">
+              <a:rPr sz="1400" b="0">
                 <a:solidFill>
                   <a:srgbClr val="555757"/>
                 </a:solidFill>
@@ -10368,7 +13530,7 @@
                 <a:ea typeface="Microsoft YaHei"/>
                 <a:cs typeface="Microsoft YaHei"/>
               </a:rPr>
-              <a:t>Linear 1280→64×9；CPM mask horizon；逆 RevIN；stitching 任意 H。</a:t>
+              <a:t>Ingest schema、predict() 返回结构、classify() 返回结构保持兼容</a:t>
             </a:r>
           </a:p>
         </p:txBody>
@@ -10381,8 +13543,8 @@
         </p:nvSpPr>
         <p:spPr>
           <a:xfrm>
-            <a:off x="457200" y="4206240"/>
-            <a:ext cx="5623560" cy="1298448"/>
+            <a:off x="457200" y="4114800"/>
+            <a:ext cx="5623560" cy="1234440"/>
           </a:xfrm>
           <a:prstGeom prst="roundRect">
             <a:avLst>
@@ -10428,7 +13590,7 @@
         </p:nvSpPr>
         <p:spPr>
           <a:xfrm>
-            <a:off x="658368" y="4343400"/>
+            <a:off x="658368" y="4279392"/>
             <a:ext cx="5212080" cy="320040"/>
           </a:xfrm>
           <a:prstGeom prst="rect">
@@ -10446,7 +13608,7 @@
               </a:spcAft>
             </a:pPr>
             <a:r>
-              <a:rPr sz="1600" b="1">
+              <a:rPr sz="1500" b="1">
                 <a:solidFill>
                   <a:srgbClr val="C7000B"/>
                 </a:solidFill>
@@ -10454,7 +13616,7 @@
                 <a:ea typeface="Microsoft YaHei"/>
                 <a:cs typeface="Microsoft YaHei"/>
               </a:rPr>
-              <a:t>读出</a:t>
+              <a:t>输入</a:t>
             </a:r>
           </a:p>
         </p:txBody>
@@ -10467,8 +13629,8 @@
         </p:nvSpPr>
         <p:spPr>
           <a:xfrm>
-            <a:off x="658368" y="4709160"/>
-            <a:ext cx="5212080" cy="685800"/>
+            <a:off x="658368" y="4645152"/>
+            <a:ext cx="5212080" cy="548640"/>
           </a:xfrm>
           <a:prstGeom prst="rect">
             <a:avLst/>
@@ -10485,7 +13647,7 @@
               </a:spcAft>
             </a:pPr>
             <a:r>
-              <a:rPr sz="1300" b="0">
+              <a:rPr sz="1400" b="0">
                 <a:solidFill>
                   <a:srgbClr val="555757"/>
                 </a:solidFill>
@@ -10493,7 +13655,7 @@
                 <a:ea typeface="Microsoft YaHei"/>
                 <a:cs typeface="Microsoft YaHei"/>
               </a:rPr>
-              <a:t>点预测 q50；概率区间 q10–q90；MAE + 覆盖率评测。</a:t>
+              <a:t>target / past-only / past-future 变元；IMU / EMG / TP 只是变元</a:t>
             </a:r>
           </a:p>
         </p:txBody>
@@ -10506,8 +13668,8 @@
         </p:nvSpPr>
         <p:spPr>
           <a:xfrm>
-            <a:off x="6263640" y="4206240"/>
-            <a:ext cx="5623560" cy="1298448"/>
+            <a:off x="6263640" y="4114800"/>
+            <a:ext cx="5623560" cy="1234440"/>
           </a:xfrm>
           <a:prstGeom prst="roundRect">
             <a:avLst>
@@ -10553,7 +13715,7 @@
         </p:nvSpPr>
         <p:spPr>
           <a:xfrm>
-            <a:off x="6464808" y="4343400"/>
+            <a:off x="6464808" y="4279392"/>
             <a:ext cx="5212080" cy="320040"/>
           </a:xfrm>
           <a:prstGeom prst="rect">
@@ -10571,7 +13733,7 @@
               </a:spcAft>
             </a:pPr>
             <a:r>
-              <a:rPr sz="1600" b="1">
+              <a:rPr sz="1500" b="1">
                 <a:solidFill>
                   <a:srgbClr val="C7000B"/>
                 </a:solidFill>
@@ -10579,7 +13741,7 @@
                 <a:ea typeface="Microsoft YaHei"/>
                 <a:cs typeface="Microsoft YaHei"/>
               </a:rPr>
-              <a:t>替换点</a:t>
+              <a:t>输出</a:t>
             </a:r>
           </a:p>
         </p:txBody>
@@ -10592,8 +13754,8 @@
         </p:nvSpPr>
         <p:spPr>
           <a:xfrm>
-            <a:off x="6464808" y="4709160"/>
-            <a:ext cx="5212080" cy="685800"/>
+            <a:off x="6464808" y="4645152"/>
+            <a:ext cx="5212080" cy="548640"/>
           </a:xfrm>
           <a:prstGeom prst="rect">
             <a:avLst/>
@@ -10610,7 +13772,7 @@
               </a:spcAft>
             </a:pPr>
             <a:r>
-              <a:rPr sz="1300" b="0">
+              <a:rPr sz="1400" b="0">
                 <a:solidFill>
                   <a:srgbClr val="555757"/>
                 </a:solidFill>
@@ -10618,14 +13780,143 @@
                 <a:ea typeface="Microsoft YaHei"/>
                 <a:cs typeface="Microsoft YaHei"/>
               </a:rPr>
-              <a:t>底座换 TimesFM-4 / 自研时，predict() 签名与返回结构不变。</a:t>
-            </a:r>
-          </a:p>
-        </p:txBody>
-      </p:sp>
-      <p:sp>
-        <p:nvSpPr>
-          <p:cNvPr id="25" name="Rectangle 24"/>
+              <a:t>预测：quantiles + point；分类：label + confidence；无场景语义</a:t>
+            </a:r>
+          </a:p>
+        </p:txBody>
+      </p:sp>
+      <p:sp>
+        <p:nvSpPr>
+          <p:cNvPr id="25" name="Rounded Rectangle 24"/>
+          <p:cNvSpPr/>
+          <p:nvPr/>
+        </p:nvSpPr>
+        <p:spPr>
+          <a:xfrm>
+            <a:off x="457200" y="5806440"/>
+            <a:ext cx="11247120" cy="640080"/>
+          </a:xfrm>
+          <a:prstGeom prst="roundRect">
+            <a:avLst>
+              <a:gd name="adj" fmla="val 5000"/>
+            </a:avLst>
+          </a:prstGeom>
+          <a:solidFill>
+            <a:srgbClr val="FFF0F0"/>
+          </a:solidFill>
+          <a:ln w="9525">
+            <a:solidFill>
+              <a:srgbClr val="C7000B"/>
+            </a:solidFill>
+          </a:ln>
+        </p:spPr>
+        <p:style>
+          <a:lnRef idx="1">
+            <a:schemeClr val="accent1"/>
+          </a:lnRef>
+          <a:fillRef idx="3">
+            <a:schemeClr val="accent1"/>
+          </a:fillRef>
+          <a:effectRef idx="2">
+            <a:schemeClr val="accent1"/>
+          </a:effectRef>
+          <a:fontRef idx="minor">
+            <a:schemeClr val="lt1"/>
+          </a:fontRef>
+        </p:style>
+        <p:txBody>
+          <a:bodyPr rtlCol="0" anchor="ctr"/>
+          <a:lstStyle/>
+          <a:p>
+            <a:pPr algn="ctr"/>
+          </a:p>
+        </p:txBody>
+      </p:sp>
+      <p:sp>
+        <p:nvSpPr>
+          <p:cNvPr id="26" name="Rectangle 25"/>
+          <p:cNvSpPr/>
+          <p:nvPr/>
+        </p:nvSpPr>
+        <p:spPr>
+          <a:xfrm>
+            <a:off x="457200" y="5806440"/>
+            <a:ext cx="73152" cy="640080"/>
+          </a:xfrm>
+          <a:prstGeom prst="rect">
+            <a:avLst/>
+          </a:prstGeom>
+          <a:solidFill>
+            <a:srgbClr val="C7000B"/>
+          </a:solidFill>
+          <a:ln>
+            <a:noFill/>
+          </a:ln>
+        </p:spPr>
+        <p:style>
+          <a:lnRef idx="1">
+            <a:schemeClr val="accent1"/>
+          </a:lnRef>
+          <a:fillRef idx="3">
+            <a:schemeClr val="accent1"/>
+          </a:fillRef>
+          <a:effectRef idx="2">
+            <a:schemeClr val="accent1"/>
+          </a:effectRef>
+          <a:fontRef idx="minor">
+            <a:schemeClr val="lt1"/>
+          </a:fontRef>
+        </p:style>
+        <p:txBody>
+          <a:bodyPr rtlCol="0" anchor="ctr"/>
+          <a:lstStyle/>
+          <a:p>
+            <a:pPr algn="ctr"/>
+          </a:p>
+        </p:txBody>
+      </p:sp>
+      <p:sp>
+        <p:nvSpPr>
+          <p:cNvPr id="27" name="TextBox 26"/>
+          <p:cNvSpPr txBox="1"/>
+          <p:nvPr/>
+        </p:nvSpPr>
+        <p:spPr>
+          <a:xfrm>
+            <a:off x="685800" y="5806440"/>
+            <a:ext cx="10881360" cy="640080"/>
+          </a:xfrm>
+          <a:prstGeom prst="rect">
+            <a:avLst/>
+          </a:prstGeom>
+          <a:noFill/>
+        </p:spPr>
+        <p:txBody>
+          <a:bodyPr wrap="square" anchor="ctr"/>
+          <a:lstStyle/>
+          <a:p>
+            <a:pPr algn="l">
+              <a:spcAft>
+                <a:spcPts val="200"/>
+              </a:spcAft>
+            </a:pPr>
+            <a:r>
+              <a:rPr sz="1300" b="1">
+                <a:solidFill>
+                  <a:srgbClr val="1A1A1A"/>
+                </a:solidFill>
+                <a:latin typeface="Microsoft YaHei"/>
+                <a:ea typeface="Microsoft YaHei"/>
+                <a:cs typeface="Microsoft YaHei"/>
+              </a:rPr>
+              <a:t>所以  ·  平台不抢场景：场景方调 predict/classify，平台方保接口与底座演进。</a:t>
+            </a:r>
+          </a:p>
+        </p:txBody>
+      </p:sp>
+      <p:sp>
+        <p:nvSpPr>
+          <p:cNvPr id="28" name="Rectangle 27"/>
           <p:cNvSpPr/>
           <p:nvPr/>
         </p:nvSpPr>
@@ -10668,7 +13959,7 @@
       </p:sp>
       <p:sp>
         <p:nvSpPr>
-          <p:cNvPr id="26" name="TextBox 25"/>
+          <p:cNvPr id="29" name="TextBox 28"/>
           <p:cNvSpPr txBox="1"/>
           <p:nvPr/>
         </p:nvSpPr>
@@ -10700,14 +13991,14 @@
                 <a:ea typeface="Microsoft YaHei"/>
                 <a:cs typeface="Microsoft YaHei"/>
               </a:rPr>
-              <a:t>华为  ·  AI 物理感知平台  ·  预测    |    Security Level: Internal</a:t>
-            </a:r>
-          </a:p>
-        </p:txBody>
-      </p:sp>
-      <p:sp>
-        <p:nvSpPr>
-          <p:cNvPr id="27" name="TextBox 26"/>
+              <a:t>华为  ·  AI 物理感知平台  ·  平台边界    |    Security Level: Internal</a:t>
+            </a:r>
+          </a:p>
+        </p:txBody>
+      </p:sp>
+      <p:sp>
+        <p:nvSpPr>
+          <p:cNvPr id="30" name="TextBox 29"/>
           <p:cNvSpPr txBox="1"/>
           <p:nvPr/>
         </p:nvSpPr>
@@ -10739,7 +14030,7 @@
                 <a:ea typeface="Microsoft YaHei"/>
                 <a:cs typeface="Microsoft YaHei"/>
               </a:rPr>
-              <a:t>4  /  8</a:t>
+              <a:t>4  /  10</a:t>
             </a:r>
           </a:p>
         </p:txBody>
@@ -10839,7 +14130,7 @@
                 <a:ea typeface="Microsoft YaHei"/>
                 <a:cs typeface="Microsoft YaHei"/>
               </a:rPr>
-              <a:t>4  分类实现</a:t>
+              <a:t>4  接口定义</a:t>
             </a:r>
           </a:p>
         </p:txBody>
@@ -10878,7 +14169,7 @@
                 <a:ea typeface="Microsoft YaHei"/>
                 <a:cs typeface="Microsoft YaHei"/>
               </a:rPr>
-              <a:t>共享表征 + 任务 token / linear probe</a:t>
+              <a:t>Ingest 契约 + predict() + classify()</a:t>
             </a:r>
           </a:p>
         </p:txBody>
@@ -10960,7 +14251,7 @@
                 <a:ea typeface="Microsoft YaHei"/>
                 <a:cs typeface="Microsoft YaHei"/>
               </a:rPr>
-              <a:t>分类不是 TimesFM 内建；平台用 UniTS / MOMENT 方式补。</a:t>
+              <a:t>所有输入先过 Ingest；预测与分类共用同一批 patch token。</a:t>
             </a:r>
           </a:p>
         </p:txBody>
@@ -10974,7 +14265,7 @@
         <p:spPr>
           <a:xfrm>
             <a:off x="457200" y="1371600"/>
-            <a:ext cx="5577840" cy="4206240"/>
+            <a:ext cx="11247120" cy="1828800"/>
           </a:xfrm>
           <a:prstGeom prst="roundRect">
             <a:avLst>
@@ -11021,13 +14312,13 @@
         <p:spPr>
           <a:xfrm>
             <a:off x="457200" y="1371600"/>
-            <a:ext cx="5577840" cy="73152"/>
+            <a:ext cx="11247120" cy="73152"/>
           </a:xfrm>
           <a:prstGeom prst="rect">
             <a:avLst/>
           </a:prstGeom>
           <a:solidFill>
-            <a:srgbClr val="898989"/>
+            <a:srgbClr val="C7000B"/>
           </a:solidFill>
           <a:ln>
             <a:noFill/>
@@ -11064,7 +14355,7 @@
         <p:spPr>
           <a:xfrm>
             <a:off x="640080" y="1600200"/>
-            <a:ext cx="5212080" cy="365760"/>
+            <a:ext cx="10881360" cy="320040"/>
           </a:xfrm>
           <a:prstGeom prst="rect">
             <a:avLst/>
@@ -11081,15 +14372,15 @@
               </a:spcAft>
             </a:pPr>
             <a:r>
-              <a:rPr sz="1700" b="1">
-                <a:solidFill>
-                  <a:srgbClr val="898989"/>
-                </a:solidFill>
-                <a:latin typeface="Microsoft YaHei"/>
-                <a:ea typeface="Microsoft YaHei"/>
-                <a:cs typeface="Microsoft YaHei"/>
-              </a:rPr>
-              <a:t>路 A  规则下游（零样本，示意）</a:t>
+              <a:rPr sz="1600" b="1">
+                <a:solidFill>
+                  <a:srgbClr val="C7000B"/>
+                </a:solidFill>
+                <a:latin typeface="Microsoft YaHei"/>
+                <a:ea typeface="Microsoft YaHei"/>
+                <a:cs typeface="Microsoft YaHei"/>
+              </a:rPr>
+              <a:t>Ingest(schema) → 校验 → patch token</a:t>
             </a:r>
           </a:p>
         </p:txBody>
@@ -11102,8 +14393,8 @@
         </p:nvSpPr>
         <p:spPr>
           <a:xfrm>
-            <a:off x="640080" y="2103120"/>
-            <a:ext cx="5212080" cy="3200400"/>
+            <a:off x="640080" y="2011680"/>
+            <a:ext cx="10881360" cy="1005840"/>
           </a:xfrm>
           <a:prstGeom prst="rect">
             <a:avLst/>
@@ -11120,7 +14411,7 @@
               </a:spcAft>
             </a:pPr>
             <a:r>
-              <a:rPr sz="1400" b="0">
+              <a:rPr sz="1300" b="0">
                 <a:solidFill>
                   <a:srgbClr val="555757"/>
                 </a:solidFill>
@@ -11128,17 +14419,17 @@
                 <a:ea typeface="Microsoft YaHei"/>
                 <a:cs typeface="Microsoft YaHei"/>
               </a:rPr>
-              <a:t>历史段：去趋势残差 z-score。</a:t>
-            </a:r>
-          </a:p>
-          <a:p>
-            <a:pPr algn="l">
-              <a:spcAft>
-                <a:spcPts val="200"/>
-              </a:spcAft>
-            </a:pPr>
-            <a:r>
-              <a:rPr sz="1400" b="0">
+              <a:t>schema = {series_id, timestamp, value, unit, quality_flag, variate_role: target/past-only/past-future}</a:t>
+            </a:r>
+          </a:p>
+          <a:p>
+            <a:pPr algn="l">
+              <a:spcAft>
+                <a:spcPts val="200"/>
+              </a:spcAft>
+            </a:pPr>
+            <a:r>
+              <a:rPr sz="1300" b="0">
                 <a:solidFill>
                   <a:srgbClr val="555757"/>
                 </a:solidFill>
@@ -11146,79 +14437,7 @@
                 <a:ea typeface="Microsoft YaHei"/>
                 <a:cs typeface="Microsoft YaHei"/>
               </a:rPr>
-              <a:t>|z|≥3 CRITICAL，≥2 WARNING，否则 NORMAL。</a:t>
-            </a:r>
-          </a:p>
-          <a:p>
-            <a:pPr algn="l">
-              <a:spcAft>
-                <a:spcPts val="200"/>
-              </a:spcAft>
-            </a:pPr>
-            <a:r>
-              <a:rPr sz="1400" b="0">
-                <a:solidFill>
-                  <a:srgbClr val="555757"/>
-                </a:solidFill>
-                <a:latin typeface="Microsoft YaHei"/>
-                <a:ea typeface="Microsoft YaHei"/>
-                <a:cs typeface="Microsoft YaHei"/>
-              </a:rPr>
-              <a:t/>
-            </a:r>
-          </a:p>
-          <a:p>
-            <a:pPr algn="l">
-              <a:spcAft>
-                <a:spcPts val="200"/>
-              </a:spcAft>
-            </a:pPr>
-            <a:r>
-              <a:rPr sz="1400" b="0">
-                <a:solidFill>
-                  <a:srgbClr val="555757"/>
-                </a:solidFill>
-                <a:latin typeface="Microsoft YaHei"/>
-                <a:ea typeface="Microsoft YaHei"/>
-                <a:cs typeface="Microsoft YaHei"/>
-              </a:rPr>
-              <a:t>未来段：观测是否落在 q10–q90 / q20–q80 外。</a:t>
-            </a:r>
-          </a:p>
-          <a:p>
-            <a:pPr algn="l">
-              <a:spcAft>
-                <a:spcPts val="200"/>
-              </a:spcAft>
-            </a:pPr>
-            <a:r>
-              <a:rPr sz="1400" b="0">
-                <a:solidFill>
-                  <a:srgbClr val="555757"/>
-                </a:solidFill>
-                <a:latin typeface="Microsoft YaHei"/>
-                <a:ea typeface="Microsoft YaHei"/>
-                <a:cs typeface="Microsoft YaHei"/>
-              </a:rPr>
-              <a:t/>
-            </a:r>
-          </a:p>
-          <a:p>
-            <a:pPr algn="l">
-              <a:spcAft>
-                <a:spcPts val="200"/>
-              </a:spcAft>
-            </a:pPr>
-            <a:r>
-              <a:rPr sz="1400" b="0">
-                <a:solidFill>
-                  <a:srgbClr val="555757"/>
-                </a:solidFill>
-                <a:latin typeface="Microsoft YaHei"/>
-                <a:ea typeface="Microsoft YaHei"/>
-                <a:cs typeface="Microsoft YaHei"/>
-              </a:rPr>
-              <a:t>不改权重，不能注册新类别，只能做异常示意。</a:t>
+              <a:t>校验：时钟对齐、量纲归一、质量位过滤、变元上限 32、context ≤ 15,360。不合格直接拒收。</a:t>
             </a:r>
           </a:p>
         </p:txBody>
@@ -11231,8 +14450,8 @@
         </p:nvSpPr>
         <p:spPr>
           <a:xfrm>
-            <a:off x="6217920" y="1371600"/>
-            <a:ext cx="5486400" cy="4206240"/>
+            <a:off x="457200" y="3383280"/>
+            <a:ext cx="5577840" cy="2194560"/>
           </a:xfrm>
           <a:prstGeom prst="roundRect">
             <a:avLst>
@@ -11278,14 +14497,14 @@
         </p:nvSpPr>
         <p:spPr>
           <a:xfrm>
-            <a:off x="6217920" y="1371600"/>
-            <a:ext cx="5486400" cy="73152"/>
+            <a:off x="457200" y="3383280"/>
+            <a:ext cx="5577840" cy="73152"/>
           </a:xfrm>
           <a:prstGeom prst="rect">
             <a:avLst/>
           </a:prstGeom>
           <a:solidFill>
-            <a:srgbClr val="C7000B"/>
+            <a:srgbClr val="62B230"/>
           </a:solidFill>
           <a:ln>
             <a:noFill/>
@@ -11321,8 +14540,8 @@
         </p:nvSpPr>
         <p:spPr>
           <a:xfrm>
-            <a:off x="6400800" y="1600200"/>
-            <a:ext cx="5120640" cy="365760"/>
+            <a:off x="640080" y="3611880"/>
+            <a:ext cx="5212080" cy="320040"/>
           </a:xfrm>
           <a:prstGeom prst="rect">
             <a:avLst/>
@@ -11339,15 +14558,15 @@
               </a:spcAft>
             </a:pPr>
             <a:r>
-              <a:rPr sz="1700" b="1">
-                <a:solidFill>
-                  <a:srgbClr val="C7000B"/>
-                </a:solidFill>
-                <a:latin typeface="Microsoft YaHei"/>
-                <a:ea typeface="Microsoft YaHei"/>
-                <a:cs typeface="Microsoft YaHei"/>
-              </a:rPr>
-              <a:t>路 B  可学习分类（平台接口）</a:t>
+              <a:rPr sz="1600" b="1">
+                <a:solidFill>
+                  <a:srgbClr val="62B230"/>
+                </a:solidFill>
+                <a:latin typeface="Microsoft YaHei"/>
+                <a:ea typeface="Microsoft YaHei"/>
+                <a:cs typeface="Microsoft YaHei"/>
+              </a:rPr>
+              <a:t>predict(context, horizon) → {quantiles, point}</a:t>
             </a:r>
           </a:p>
         </p:txBody>
@@ -11360,8 +14579,8 @@
         </p:nvSpPr>
         <p:spPr>
           <a:xfrm>
-            <a:off x="6400800" y="2103120"/>
-            <a:ext cx="5120640" cy="3200400"/>
+            <a:off x="640080" y="4069080"/>
+            <a:ext cx="5212080" cy="1280160"/>
           </a:xfrm>
           <a:prstGeom prst="rect">
             <a:avLst/>
@@ -11378,7 +14597,7 @@
               </a:spcAft>
             </a:pPr>
             <a:r>
-              <a:rPr sz="1400" b="0">
+              <a:rPr sz="1300" b="0">
                 <a:solidFill>
                   <a:srgbClr val="555757"/>
                 </a:solidFill>
@@ -11386,17 +14605,17 @@
                 <a:ea typeface="Microsoft YaHei"/>
                 <a:cs typeface="Microsoft YaHei"/>
               </a:rPr>
-              <a:t>UniTS：任务 token 把预测 / 分类 / 填补 / 异常收进同一套参数。</a:t>
-            </a:r>
-          </a:p>
-          <a:p>
-            <a:pPr algn="l">
-              <a:spcAft>
-                <a:spcPts val="200"/>
-              </a:spcAft>
-            </a:pPr>
-            <a:r>
-              <a:rPr sz="1400" b="0">
+              <a:t>quantiles: (V, H, 9) 十分位轨迹</a:t>
+            </a:r>
+          </a:p>
+          <a:p>
+            <a:pPr algn="l">
+              <a:spcAft>
+                <a:spcPts val="200"/>
+              </a:spcAft>
+            </a:pPr>
+            <a:r>
+              <a:rPr sz="1300" b="0">
                 <a:solidFill>
                   <a:srgbClr val="555757"/>
                 </a:solidFill>
@@ -11404,17 +14623,17 @@
                 <a:ea typeface="Microsoft YaHei"/>
                 <a:cs typeface="Microsoft YaHei"/>
               </a:rPr>
-              <a:t>MOMENT：掩码预训练编码器 + linear probe / 分类头。</a:t>
-            </a:r>
-          </a:p>
-          <a:p>
-            <a:pPr algn="l">
-              <a:spcAft>
-                <a:spcPts val="200"/>
-              </a:spcAft>
-            </a:pPr>
-            <a:r>
-              <a:rPr sz="1400" b="0">
+              <a:t>point: (V, H) 中位数 q50</a:t>
+            </a:r>
+          </a:p>
+          <a:p>
+            <a:pPr algn="l">
+              <a:spcAft>
+                <a:spcPts val="200"/>
+              </a:spcAft>
+            </a:pPr>
+            <a:r>
+              <a:rPr sz="1300" b="0">
                 <a:solidFill>
                   <a:srgbClr val="555757"/>
                 </a:solidFill>
@@ -11422,17 +14641,167 @@
                 <a:ea typeface="Microsoft YaHei"/>
                 <a:cs typeface="Microsoft YaHei"/>
               </a:rPr>
-              <a:t>LIMU-BERT-X：IMU 掩码预训练，直接初始化 IMU 变元。</a:t>
-            </a:r>
-          </a:p>
-          <a:p>
-            <a:pPr algn="l">
-              <a:spcAft>
-                <a:spcPts val="200"/>
-              </a:spcAft>
-            </a:pPr>
-            <a:r>
-              <a:rPr sz="1400" b="0">
+              <a:t>一次前向，CPM 非自回归；可 stitching 任意 H。</a:t>
+            </a:r>
+          </a:p>
+        </p:txBody>
+      </p:sp>
+      <p:sp>
+        <p:nvSpPr>
+          <p:cNvPr id="15" name="Rounded Rectangle 14"/>
+          <p:cNvSpPr/>
+          <p:nvPr/>
+        </p:nvSpPr>
+        <p:spPr>
+          <a:xfrm>
+            <a:off x="6217920" y="3383280"/>
+            <a:ext cx="5486400" cy="2194560"/>
+          </a:xfrm>
+          <a:prstGeom prst="roundRect">
+            <a:avLst>
+              <a:gd name="adj" fmla="val 5000"/>
+            </a:avLst>
+          </a:prstGeom>
+          <a:solidFill>
+            <a:srgbClr val="FFFFFF"/>
+          </a:solidFill>
+          <a:ln w="9525">
+            <a:solidFill>
+              <a:srgbClr val="DDDDDD"/>
+            </a:solidFill>
+          </a:ln>
+        </p:spPr>
+        <p:style>
+          <a:lnRef idx="1">
+            <a:schemeClr val="accent1"/>
+          </a:lnRef>
+          <a:fillRef idx="3">
+            <a:schemeClr val="accent1"/>
+          </a:fillRef>
+          <a:effectRef idx="2">
+            <a:schemeClr val="accent1"/>
+          </a:effectRef>
+          <a:fontRef idx="minor">
+            <a:schemeClr val="lt1"/>
+          </a:fontRef>
+        </p:style>
+        <p:txBody>
+          <a:bodyPr rtlCol="0" anchor="ctr"/>
+          <a:lstStyle/>
+          <a:p>
+            <a:pPr algn="ctr"/>
+          </a:p>
+        </p:txBody>
+      </p:sp>
+      <p:sp>
+        <p:nvSpPr>
+          <p:cNvPr id="16" name="Rectangle 15"/>
+          <p:cNvSpPr/>
+          <p:nvPr/>
+        </p:nvSpPr>
+        <p:spPr>
+          <a:xfrm>
+            <a:off x="6217920" y="3383280"/>
+            <a:ext cx="5486400" cy="73152"/>
+          </a:xfrm>
+          <a:prstGeom prst="rect">
+            <a:avLst/>
+          </a:prstGeom>
+          <a:solidFill>
+            <a:srgbClr val="30B5C5"/>
+          </a:solidFill>
+          <a:ln>
+            <a:noFill/>
+          </a:ln>
+        </p:spPr>
+        <p:style>
+          <a:lnRef idx="1">
+            <a:schemeClr val="accent1"/>
+          </a:lnRef>
+          <a:fillRef idx="3">
+            <a:schemeClr val="accent1"/>
+          </a:fillRef>
+          <a:effectRef idx="2">
+            <a:schemeClr val="accent1"/>
+          </a:effectRef>
+          <a:fontRef idx="minor">
+            <a:schemeClr val="lt1"/>
+          </a:fontRef>
+        </p:style>
+        <p:txBody>
+          <a:bodyPr rtlCol="0" anchor="ctr"/>
+          <a:lstStyle/>
+          <a:p>
+            <a:pPr algn="ctr"/>
+          </a:p>
+        </p:txBody>
+      </p:sp>
+      <p:sp>
+        <p:nvSpPr>
+          <p:cNvPr id="17" name="TextBox 16"/>
+          <p:cNvSpPr txBox="1"/>
+          <p:nvPr/>
+        </p:nvSpPr>
+        <p:spPr>
+          <a:xfrm>
+            <a:off x="6400800" y="3611880"/>
+            <a:ext cx="5120640" cy="320040"/>
+          </a:xfrm>
+          <a:prstGeom prst="rect">
+            <a:avLst/>
+          </a:prstGeom>
+          <a:noFill/>
+        </p:spPr>
+        <p:txBody>
+          <a:bodyPr wrap="square" anchor="t"/>
+          <a:lstStyle/>
+          <a:p>
+            <a:pPr algn="l">
+              <a:spcAft>
+                <a:spcPts val="200"/>
+              </a:spcAft>
+            </a:pPr>
+            <a:r>
+              <a:rPr sz="1600" b="1">
+                <a:solidFill>
+                  <a:srgbClr val="30B5C5"/>
+                </a:solidFill>
+                <a:latin typeface="Microsoft YaHei"/>
+                <a:ea typeface="Microsoft YaHei"/>
+                <a:cs typeface="Microsoft YaHei"/>
+              </a:rPr>
+              <a:t>classify(window) → {label, confidence}</a:t>
+            </a:r>
+          </a:p>
+        </p:txBody>
+      </p:sp>
+      <p:sp>
+        <p:nvSpPr>
+          <p:cNvPr id="18" name="TextBox 17"/>
+          <p:cNvSpPr txBox="1"/>
+          <p:nvPr/>
+        </p:nvSpPr>
+        <p:spPr>
+          <a:xfrm>
+            <a:off x="6400800" y="4069080"/>
+            <a:ext cx="5120640" cy="1280160"/>
+          </a:xfrm>
+          <a:prstGeom prst="rect">
+            <a:avLst/>
+          </a:prstGeom>
+          <a:noFill/>
+        </p:spPr>
+        <p:txBody>
+          <a:bodyPr wrap="square" anchor="t"/>
+          <a:lstStyle/>
+          <a:p>
+            <a:pPr algn="l">
+              <a:spcAft>
+                <a:spcPts val="200"/>
+              </a:spcAft>
+            </a:pPr>
+            <a:r>
+              <a:rPr sz="1300" b="0">
                 <a:solidFill>
                   <a:srgbClr val="555757"/>
                 </a:solidFill>
@@ -11440,17 +14809,17 @@
                 <a:ea typeface="Microsoft YaHei"/>
                 <a:cs typeface="Microsoft YaHei"/>
               </a:rPr>
-              <a:t/>
-            </a:r>
-          </a:p>
-          <a:p>
-            <a:pPr algn="l">
-              <a:spcAft>
-                <a:spcPts val="200"/>
-              </a:spcAft>
-            </a:pPr>
-            <a:r>
-              <a:rPr sz="1400" b="0">
+              <a:t>label: 场景方注册的类别 id</a:t>
+            </a:r>
+          </a:p>
+          <a:p>
+            <a:pPr algn="l">
+              <a:spcAft>
+                <a:spcPts val="200"/>
+              </a:spcAft>
+            </a:pPr>
+            <a:r>
+              <a:rPr sz="1300" b="0">
                 <a:solidFill>
                   <a:srgbClr val="555757"/>
                 </a:solidFill>
@@ -11458,14 +14827,32 @@
                 <a:ea typeface="Microsoft YaHei"/>
                 <a:cs typeface="Microsoft YaHei"/>
               </a:rPr>
-              <a:t>场景方注册类别 → 平台微调 classify() → 返回 label + confidence。</a:t>
-            </a:r>
-          </a:p>
-        </p:txBody>
-      </p:sp>
-      <p:sp>
-        <p:nvSpPr>
-          <p:cNvPr id="15" name="Rectangle 14"/>
+              <a:t>confidence: softmax 概率</a:t>
+            </a:r>
+          </a:p>
+          <a:p>
+            <a:pPr algn="l">
+              <a:spcAft>
+                <a:spcPts val="200"/>
+              </a:spcAft>
+            </a:pPr>
+            <a:r>
+              <a:rPr sz="1300" b="0">
+                <a:solidFill>
+                  <a:srgbClr val="555757"/>
+                </a:solidFill>
+                <a:latin typeface="Microsoft YaHei"/>
+                <a:ea typeface="Microsoft YaHei"/>
+                <a:cs typeface="Microsoft YaHei"/>
+              </a:rPr>
+              <a:t>基于共享表征 + 任务 token / linear probe。</a:t>
+            </a:r>
+          </a:p>
+        </p:txBody>
+      </p:sp>
+      <p:sp>
+        <p:nvSpPr>
+          <p:cNvPr id="19" name="Rectangle 18"/>
           <p:cNvSpPr/>
           <p:nvPr/>
         </p:nvSpPr>
@@ -11508,7 +14895,7 @@
       </p:sp>
       <p:sp>
         <p:nvSpPr>
-          <p:cNvPr id="16" name="TextBox 15"/>
+          <p:cNvPr id="20" name="TextBox 19"/>
           <p:cNvSpPr txBox="1"/>
           <p:nvPr/>
         </p:nvSpPr>
@@ -11540,14 +14927,14 @@
                 <a:ea typeface="Microsoft YaHei"/>
                 <a:cs typeface="Microsoft YaHei"/>
               </a:rPr>
-              <a:t>华为  ·  AI 物理感知平台  ·  分类    |    Security Level: Internal</a:t>
-            </a:r>
-          </a:p>
-        </p:txBody>
-      </p:sp>
-      <p:sp>
-        <p:nvSpPr>
-          <p:cNvPr id="17" name="TextBox 16"/>
+              <a:t>华为  ·  AI 物理感知平台  ·  接口    |    Security Level: Internal</a:t>
+            </a:r>
+          </a:p>
+        </p:txBody>
+      </p:sp>
+      <p:sp>
+        <p:nvSpPr>
+          <p:cNvPr id="21" name="TextBox 20"/>
           <p:cNvSpPr txBox="1"/>
           <p:nvPr/>
         </p:nvSpPr>
@@ -11579,7 +14966,7 @@
                 <a:ea typeface="Microsoft YaHei"/>
                 <a:cs typeface="Microsoft YaHei"/>
               </a:rPr>
-              <a:t>5  /  8</a:t>
+              <a:t>5  /  10</a:t>
             </a:r>
           </a:p>
         </p:txBody>
@@ -11679,7 +15066,7 @@
                 <a:ea typeface="Microsoft YaHei"/>
                 <a:cs typeface="Microsoft YaHei"/>
               </a:rPr>
-              <a:t>5  代际演进</a:t>
+              <a:t>5  预测实现</a:t>
             </a:r>
           </a:p>
         </p:txBody>
@@ -11718,7 +15105,7 @@
                 <a:ea typeface="Microsoft YaHei"/>
                 <a:cs typeface="Microsoft YaHei"/>
               </a:rPr>
-              <a:t>Gen1 零样本 → Gen2 指令微调 → Gen3 端侧</a:t>
+              <a:t>TimesFM-3 式：CPM 一次前向出 9 分位数</a:t>
             </a:r>
           </a:p>
         </p:txBody>
@@ -11800,7 +15187,7 @@
                 <a:ea typeface="Microsoft YaHei"/>
                 <a:cs typeface="Microsoft YaHei"/>
               </a:rPr>
-              <a:t>接口不变，底座与能力逐代升级。</a:t>
+              <a:t>预测是平台原生能力；接口固定，底座可换。</a:t>
             </a:r>
           </a:p>
         </p:txBody>
@@ -11813,8 +15200,8 @@
         </p:nvSpPr>
         <p:spPr>
           <a:xfrm>
-            <a:off x="411480" y="1417320"/>
-            <a:ext cx="2788920" cy="3566160"/>
+            <a:off x="457200" y="1371600"/>
+            <a:ext cx="5623560" cy="1298448"/>
           </a:xfrm>
           <a:prstGeom prst="roundRect">
             <a:avLst>
@@ -11854,44 +15241,40 @@
       </p:sp>
       <p:sp>
         <p:nvSpPr>
-          <p:cNvPr id="8" name="Rectangle 7"/>
-          <p:cNvSpPr/>
-          <p:nvPr/>
-        </p:nvSpPr>
-        <p:spPr>
-          <a:xfrm>
-            <a:off x="411480" y="1417320"/>
-            <a:ext cx="2788920" cy="73152"/>
-          </a:xfrm>
-          <a:prstGeom prst="rect">
-            <a:avLst/>
-          </a:prstGeom>
-          <a:solidFill>
-            <a:srgbClr val="C7000B"/>
-          </a:solidFill>
-          <a:ln>
-            <a:noFill/>
-          </a:ln>
-        </p:spPr>
-        <p:style>
-          <a:lnRef idx="1">
-            <a:schemeClr val="accent1"/>
-          </a:lnRef>
-          <a:fillRef idx="3">
-            <a:schemeClr val="accent1"/>
-          </a:fillRef>
-          <a:effectRef idx="2">
-            <a:schemeClr val="accent1"/>
-          </a:effectRef>
-          <a:fontRef idx="minor">
-            <a:schemeClr val="lt1"/>
-          </a:fontRef>
-        </p:style>
-        <p:txBody>
-          <a:bodyPr rtlCol="0" anchor="ctr"/>
-          <a:lstStyle/>
-          <a:p>
-            <a:pPr algn="ctr"/>
+          <p:cNvPr id="8" name="TextBox 7"/>
+          <p:cNvSpPr txBox="1"/>
+          <p:nvPr/>
+        </p:nvSpPr>
+        <p:spPr>
+          <a:xfrm>
+            <a:off x="658368" y="1508760"/>
+            <a:ext cx="5212080" cy="320040"/>
+          </a:xfrm>
+          <a:prstGeom prst="rect">
+            <a:avLst/>
+          </a:prstGeom>
+          <a:noFill/>
+        </p:spPr>
+        <p:txBody>
+          <a:bodyPr wrap="square" anchor="t"/>
+          <a:lstStyle/>
+          <a:p>
+            <a:pPr algn="l">
+              <a:spcAft>
+                <a:spcPts val="200"/>
+              </a:spcAft>
+            </a:pPr>
+            <a:r>
+              <a:rPr sz="1600" b="1">
+                <a:solidFill>
+                  <a:srgbClr val="C7000B"/>
+                </a:solidFill>
+                <a:latin typeface="Microsoft YaHei"/>
+                <a:ea typeface="Microsoft YaHei"/>
+                <a:cs typeface="Microsoft YaHei"/>
+              </a:rPr>
+              <a:t>输入</a:t>
+            </a:r>
           </a:p>
         </p:txBody>
       </p:sp>
@@ -11903,8 +15286,8 @@
         </p:nvSpPr>
         <p:spPr>
           <a:xfrm>
-            <a:off x="548640" y="1645920"/>
-            <a:ext cx="2514600" cy="365760"/>
+            <a:off x="658368" y="1874520"/>
+            <a:ext cx="5212080" cy="685800"/>
           </a:xfrm>
           <a:prstGeom prst="rect">
             <a:avLst/>
@@ -11921,45 +15304,6 @@
               </a:spcAft>
             </a:pPr>
             <a:r>
-              <a:rPr sz="1600" b="1">
-                <a:solidFill>
-                  <a:srgbClr val="C7000B"/>
-                </a:solidFill>
-                <a:latin typeface="Microsoft YaHei"/>
-                <a:ea typeface="Microsoft YaHei"/>
-                <a:cs typeface="Microsoft YaHei"/>
-              </a:rPr>
-              <a:t>Gen1  零样本基线</a:t>
-            </a:r>
-          </a:p>
-        </p:txBody>
-      </p:sp>
-      <p:sp>
-        <p:nvSpPr>
-          <p:cNvPr id="10" name="TextBox 9"/>
-          <p:cNvSpPr txBox="1"/>
-          <p:nvPr/>
-        </p:nvSpPr>
-        <p:spPr>
-          <a:xfrm>
-            <a:off x="548640" y="2148840"/>
-            <a:ext cx="2514600" cy="2651760"/>
-          </a:xfrm>
-          <a:prstGeom prst="rect">
-            <a:avLst/>
-          </a:prstGeom>
-          <a:noFill/>
-        </p:spPr>
-        <p:txBody>
-          <a:bodyPr wrap="square" anchor="t"/>
-          <a:lstStyle/>
-          <a:p>
-            <a:pPr algn="l">
-              <a:spcAft>
-                <a:spcPts val="200"/>
-              </a:spcAft>
-            </a:pPr>
-            <a:r>
               <a:rPr sz="1300" b="0">
                 <a:solidFill>
                   <a:srgbClr val="555757"/>
@@ -11968,57 +15312,21 @@
                 <a:ea typeface="Microsoft YaHei"/>
                 <a:cs typeface="Microsoft YaHei"/>
               </a:rPr>
-              <a:t>TimesFM-3 + UniTS/MOMENT + LIMU-BERT-X</a:t>
-            </a:r>
-          </a:p>
-          <a:p>
-            <a:pPr algn="l">
-              <a:spcAft>
-                <a:spcPts val="200"/>
-              </a:spcAft>
-            </a:pPr>
-            <a:r>
-              <a:rPr sz="1300" b="0">
-                <a:solidFill>
-                  <a:srgbClr val="555757"/>
-                </a:solidFill>
-                <a:latin typeface="Microsoft YaHei"/>
-                <a:ea typeface="Microsoft YaHei"/>
-                <a:cs typeface="Microsoft YaHei"/>
-              </a:rPr>
-              <a:t>predict 零样本；classify 规则 / LoRA</a:t>
-            </a:r>
-          </a:p>
-          <a:p>
-            <a:pPr algn="l">
-              <a:spcAft>
-                <a:spcPts val="200"/>
-              </a:spcAft>
-            </a:pPr>
-            <a:r>
-              <a:rPr sz="1300" b="0">
-                <a:solidFill>
-                  <a:srgbClr val="555757"/>
-                </a:solidFill>
-                <a:latin typeface="Microsoft YaHei"/>
-                <a:ea typeface="Microsoft YaHei"/>
-                <a:cs typeface="Microsoft YaHei"/>
-              </a:rPr>
-              <a:t>评测：MAE + 覆盖率 + macro-F1</a:t>
-            </a:r>
-          </a:p>
-        </p:txBody>
-      </p:sp>
-      <p:sp>
-        <p:nvSpPr>
-          <p:cNvPr id="11" name="Rounded Rectangle 10"/>
+              <a:t>context ≤ 15,360；变元 ≤ 32；target / past-only / past-future。</a:t>
+            </a:r>
+          </a:p>
+        </p:txBody>
+      </p:sp>
+      <p:sp>
+        <p:nvSpPr>
+          <p:cNvPr id="10" name="Rounded Rectangle 9"/>
           <p:cNvSpPr/>
           <p:nvPr/>
         </p:nvSpPr>
         <p:spPr>
           <a:xfrm>
-            <a:off x="3337560" y="1417320"/>
-            <a:ext cx="2788920" cy="3566160"/>
+            <a:off x="6263640" y="1371600"/>
+            <a:ext cx="5623560" cy="1298448"/>
           </a:xfrm>
           <a:prstGeom prst="roundRect">
             <a:avLst>
@@ -12058,171 +15366,92 @@
       </p:sp>
       <p:sp>
         <p:nvSpPr>
-          <p:cNvPr id="12" name="Rectangle 11"/>
+          <p:cNvPr id="11" name="TextBox 10"/>
+          <p:cNvSpPr txBox="1"/>
+          <p:nvPr/>
+        </p:nvSpPr>
+        <p:spPr>
+          <a:xfrm>
+            <a:off x="6464808" y="1508760"/>
+            <a:ext cx="5212080" cy="320040"/>
+          </a:xfrm>
+          <a:prstGeom prst="rect">
+            <a:avLst/>
+          </a:prstGeom>
+          <a:noFill/>
+        </p:spPr>
+        <p:txBody>
+          <a:bodyPr wrap="square" anchor="t"/>
+          <a:lstStyle/>
+          <a:p>
+            <a:pPr algn="l">
+              <a:spcAft>
+                <a:spcPts val="200"/>
+              </a:spcAft>
+            </a:pPr>
+            <a:r>
+              <a:rPr sz="1600" b="1">
+                <a:solidFill>
+                  <a:srgbClr val="C7000B"/>
+                </a:solidFill>
+                <a:latin typeface="Microsoft YaHei"/>
+                <a:ea typeface="Microsoft YaHei"/>
+                <a:cs typeface="Microsoft YaHei"/>
+              </a:rPr>
+              <a:t>特征</a:t>
+            </a:r>
+          </a:p>
+        </p:txBody>
+      </p:sp>
+      <p:sp>
+        <p:nvSpPr>
+          <p:cNvPr id="12" name="TextBox 11"/>
+          <p:cNvSpPr txBox="1"/>
+          <p:nvPr/>
+        </p:nvSpPr>
+        <p:spPr>
+          <a:xfrm>
+            <a:off x="6464808" y="1874520"/>
+            <a:ext cx="5212080" cy="685800"/>
+          </a:xfrm>
+          <a:prstGeom prst="rect">
+            <a:avLst/>
+          </a:prstGeom>
+          <a:noFill/>
+        </p:spPr>
+        <p:txBody>
+          <a:bodyPr wrap="square" anchor="t"/>
+          <a:lstStyle/>
+          <a:p>
+            <a:pPr algn="l">
+              <a:spcAft>
+                <a:spcPts val="200"/>
+              </a:spcAft>
+            </a:pPr>
+            <a:r>
+              <a:rPr sz="1300" b="0">
+                <a:solidFill>
+                  <a:srgbClr val="555757"/>
+                </a:solidFill>
+                <a:latin typeface="Microsoft YaHei"/>
+                <a:ea typeface="Microsoft YaHei"/>
+                <a:cs typeface="Microsoft YaHei"/>
+              </a:rPr>
+              <a:t>pad32 → 去趋势 → RevIN → patch 192 → ResidualBlock → 1280 token。</a:t>
+            </a:r>
+          </a:p>
+        </p:txBody>
+      </p:sp>
+      <p:sp>
+        <p:nvSpPr>
+          <p:cNvPr id="13" name="Rounded Rectangle 12"/>
           <p:cNvSpPr/>
           <p:nvPr/>
         </p:nvSpPr>
         <p:spPr>
           <a:xfrm>
-            <a:off x="3337560" y="1417320"/>
-            <a:ext cx="2788920" cy="73152"/>
-          </a:xfrm>
-          <a:prstGeom prst="rect">
-            <a:avLst/>
-          </a:prstGeom>
-          <a:solidFill>
-            <a:srgbClr val="ED6D00"/>
-          </a:solidFill>
-          <a:ln>
-            <a:noFill/>
-          </a:ln>
-        </p:spPr>
-        <p:style>
-          <a:lnRef idx="1">
-            <a:schemeClr val="accent1"/>
-          </a:lnRef>
-          <a:fillRef idx="3">
-            <a:schemeClr val="accent1"/>
-          </a:fillRef>
-          <a:effectRef idx="2">
-            <a:schemeClr val="accent1"/>
-          </a:effectRef>
-          <a:fontRef idx="minor">
-            <a:schemeClr val="lt1"/>
-          </a:fontRef>
-        </p:style>
-        <p:txBody>
-          <a:bodyPr rtlCol="0" anchor="ctr"/>
-          <a:lstStyle/>
-          <a:p>
-            <a:pPr algn="ctr"/>
-          </a:p>
-        </p:txBody>
-      </p:sp>
-      <p:sp>
-        <p:nvSpPr>
-          <p:cNvPr id="13" name="TextBox 12"/>
-          <p:cNvSpPr txBox="1"/>
-          <p:nvPr/>
-        </p:nvSpPr>
-        <p:spPr>
-          <a:xfrm>
-            <a:off x="3474720" y="1645920"/>
-            <a:ext cx="2514600" cy="365760"/>
-          </a:xfrm>
-          <a:prstGeom prst="rect">
-            <a:avLst/>
-          </a:prstGeom>
-          <a:noFill/>
-        </p:spPr>
-        <p:txBody>
-          <a:bodyPr wrap="square" anchor="t"/>
-          <a:lstStyle/>
-          <a:p>
-            <a:pPr algn="l">
-              <a:spcAft>
-                <a:spcPts val="200"/>
-              </a:spcAft>
-            </a:pPr>
-            <a:r>
-              <a:rPr sz="1600" b="1">
-                <a:solidFill>
-                  <a:srgbClr val="ED6D00"/>
-                </a:solidFill>
-                <a:latin typeface="Microsoft YaHei"/>
-                <a:ea typeface="Microsoft YaHei"/>
-                <a:cs typeface="Microsoft YaHei"/>
-              </a:rPr>
-              <a:t>Gen2  指令微调</a:t>
-            </a:r>
-          </a:p>
-        </p:txBody>
-      </p:sp>
-      <p:sp>
-        <p:nvSpPr>
-          <p:cNvPr id="14" name="TextBox 13"/>
-          <p:cNvSpPr txBox="1"/>
-          <p:nvPr/>
-        </p:nvSpPr>
-        <p:spPr>
-          <a:xfrm>
-            <a:off x="3474720" y="2148840"/>
-            <a:ext cx="2514600" cy="2651760"/>
-          </a:xfrm>
-          <a:prstGeom prst="rect">
-            <a:avLst/>
-          </a:prstGeom>
-          <a:noFill/>
-        </p:spPr>
-        <p:txBody>
-          <a:bodyPr wrap="square" anchor="t"/>
-          <a:lstStyle/>
-          <a:p>
-            <a:pPr algn="l">
-              <a:spcAft>
-                <a:spcPts val="200"/>
-              </a:spcAft>
-            </a:pPr>
-            <a:r>
-              <a:rPr sz="1300" b="0">
-                <a:solidFill>
-                  <a:srgbClr val="555757"/>
-                </a:solidFill>
-                <a:latin typeface="Microsoft YaHei"/>
-                <a:ea typeface="Microsoft YaHei"/>
-                <a:cs typeface="Microsoft YaHei"/>
-              </a:rPr>
-              <a:t>物理指令数据集：预测 / 分类 / 异常统一 prompt</a:t>
-            </a:r>
-          </a:p>
-          <a:p>
-            <a:pPr algn="l">
-              <a:spcAft>
-                <a:spcPts val="200"/>
-              </a:spcAft>
-            </a:pPr>
-            <a:r>
-              <a:rPr sz="1300" b="0">
-                <a:solidFill>
-                  <a:srgbClr val="555757"/>
-                </a:solidFill>
-                <a:latin typeface="Microsoft YaHei"/>
-                <a:ea typeface="Microsoft YaHei"/>
-                <a:cs typeface="Microsoft YaHei"/>
-              </a:rPr>
-              <a:t>底座自研，摆脱 3.0 NC 权重</a:t>
-            </a:r>
-          </a:p>
-          <a:p>
-            <a:pPr algn="l">
-              <a:spcAft>
-                <a:spcPts val="200"/>
-              </a:spcAft>
-            </a:pPr>
-            <a:r>
-              <a:rPr sz="1300" b="0">
-                <a:solidFill>
-                  <a:srgbClr val="555757"/>
-                </a:solidFill>
-                <a:latin typeface="Microsoft YaHei"/>
-                <a:ea typeface="Microsoft YaHei"/>
-                <a:cs typeface="Microsoft YaHei"/>
-              </a:rPr>
-              <a:t>评测：zero-shot → few-shot → full-shot</a:t>
-            </a:r>
-          </a:p>
-        </p:txBody>
-      </p:sp>
-      <p:sp>
-        <p:nvSpPr>
-          <p:cNvPr id="15" name="Rounded Rectangle 14"/>
-          <p:cNvSpPr/>
-          <p:nvPr/>
-        </p:nvSpPr>
-        <p:spPr>
-          <a:xfrm>
-            <a:off x="6263640" y="1417320"/>
-            <a:ext cx="2788920" cy="3566160"/>
+            <a:off x="457200" y="2788920"/>
+            <a:ext cx="5623560" cy="1298448"/>
           </a:xfrm>
           <a:prstGeom prst="roundRect">
             <a:avLst>
@@ -12262,171 +15491,92 @@
       </p:sp>
       <p:sp>
         <p:nvSpPr>
-          <p:cNvPr id="16" name="Rectangle 15"/>
+          <p:cNvPr id="14" name="TextBox 13"/>
+          <p:cNvSpPr txBox="1"/>
+          <p:nvPr/>
+        </p:nvSpPr>
+        <p:spPr>
+          <a:xfrm>
+            <a:off x="658368" y="2926080"/>
+            <a:ext cx="5212080" cy="320040"/>
+          </a:xfrm>
+          <a:prstGeom prst="rect">
+            <a:avLst/>
+          </a:prstGeom>
+          <a:noFill/>
+        </p:spPr>
+        <p:txBody>
+          <a:bodyPr wrap="square" anchor="t"/>
+          <a:lstStyle/>
+          <a:p>
+            <a:pPr algn="l">
+              <a:spcAft>
+                <a:spcPts val="200"/>
+              </a:spcAft>
+            </a:pPr>
+            <a:r>
+              <a:rPr sz="1600" b="1">
+                <a:solidFill>
+                  <a:srgbClr val="C7000B"/>
+                </a:solidFill>
+                <a:latin typeface="Microsoft YaHei"/>
+                <a:ea typeface="Microsoft YaHei"/>
+                <a:cs typeface="Microsoft YaHei"/>
+              </a:rPr>
+              <a:t>表征</a:t>
+            </a:r>
+          </a:p>
+        </p:txBody>
+      </p:sp>
+      <p:sp>
+        <p:nvSpPr>
+          <p:cNvPr id="15" name="TextBox 14"/>
+          <p:cNvSpPr txBox="1"/>
+          <p:nvPr/>
+        </p:nvSpPr>
+        <p:spPr>
+          <a:xfrm>
+            <a:off x="658368" y="3291840"/>
+            <a:ext cx="5212080" cy="685800"/>
+          </a:xfrm>
+          <a:prstGeom prst="rect">
+            <a:avLst/>
+          </a:prstGeom>
+          <a:noFill/>
+        </p:spPr>
+        <p:txBody>
+          <a:bodyPr wrap="square" anchor="t"/>
+          <a:lstStyle/>
+          <a:p>
+            <a:pPr algn="l">
+              <a:spcAft>
+                <a:spcPts val="200"/>
+              </a:spcAft>
+            </a:pPr>
+            <a:r>
+              <a:rPr sz="1300" b="0">
+                <a:solidFill>
+                  <a:srgbClr val="555757"/>
+                </a:solidFill>
+                <a:latin typeface="Microsoft YaHei"/>
+                <a:ea typeface="Microsoft YaHei"/>
+                <a:cs typeface="Microsoft YaHei"/>
+              </a:rPr>
+              <a:t>20 × MixingTransformer：因果时间注意力 + 变元注意力 + FFN。</a:t>
+            </a:r>
+          </a:p>
+        </p:txBody>
+      </p:sp>
+      <p:sp>
+        <p:nvSpPr>
+          <p:cNvPr id="16" name="Rounded Rectangle 15"/>
           <p:cNvSpPr/>
           <p:nvPr/>
         </p:nvSpPr>
         <p:spPr>
           <a:xfrm>
-            <a:off x="6263640" y="1417320"/>
-            <a:ext cx="2788920" cy="73152"/>
-          </a:xfrm>
-          <a:prstGeom prst="rect">
-            <a:avLst/>
-          </a:prstGeom>
-          <a:solidFill>
-            <a:srgbClr val="30B5C5"/>
-          </a:solidFill>
-          <a:ln>
-            <a:noFill/>
-          </a:ln>
-        </p:spPr>
-        <p:style>
-          <a:lnRef idx="1">
-            <a:schemeClr val="accent1"/>
-          </a:lnRef>
-          <a:fillRef idx="3">
-            <a:schemeClr val="accent1"/>
-          </a:fillRef>
-          <a:effectRef idx="2">
-            <a:schemeClr val="accent1"/>
-          </a:effectRef>
-          <a:fontRef idx="minor">
-            <a:schemeClr val="lt1"/>
-          </a:fontRef>
-        </p:style>
-        <p:txBody>
-          <a:bodyPr rtlCol="0" anchor="ctr"/>
-          <a:lstStyle/>
-          <a:p>
-            <a:pPr algn="ctr"/>
-          </a:p>
-        </p:txBody>
-      </p:sp>
-      <p:sp>
-        <p:nvSpPr>
-          <p:cNvPr id="17" name="TextBox 16"/>
-          <p:cNvSpPr txBox="1"/>
-          <p:nvPr/>
-        </p:nvSpPr>
-        <p:spPr>
-          <a:xfrm>
-            <a:off x="6400800" y="1645920"/>
-            <a:ext cx="2514600" cy="365760"/>
-          </a:xfrm>
-          <a:prstGeom prst="rect">
-            <a:avLst/>
-          </a:prstGeom>
-          <a:noFill/>
-        </p:spPr>
-        <p:txBody>
-          <a:bodyPr wrap="square" anchor="t"/>
-          <a:lstStyle/>
-          <a:p>
-            <a:pPr algn="l">
-              <a:spcAft>
-                <a:spcPts val="200"/>
-              </a:spcAft>
-            </a:pPr>
-            <a:r>
-              <a:rPr sz="1600" b="1">
-                <a:solidFill>
-                  <a:srgbClr val="30B5C5"/>
-                </a:solidFill>
-                <a:latin typeface="Microsoft YaHei"/>
-                <a:ea typeface="Microsoft YaHei"/>
-                <a:cs typeface="Microsoft YaHei"/>
-              </a:rPr>
-              <a:t>Gen3  端侧物理</a:t>
-            </a:r>
-          </a:p>
-        </p:txBody>
-      </p:sp>
-      <p:sp>
-        <p:nvSpPr>
-          <p:cNvPr id="18" name="TextBox 17"/>
-          <p:cNvSpPr txBox="1"/>
-          <p:nvPr/>
-        </p:nvSpPr>
-        <p:spPr>
-          <a:xfrm>
-            <a:off x="6400800" y="2148840"/>
-            <a:ext cx="2514600" cy="2651760"/>
-          </a:xfrm>
-          <a:prstGeom prst="rect">
-            <a:avLst/>
-          </a:prstGeom>
-          <a:noFill/>
-        </p:spPr>
-        <p:txBody>
-          <a:bodyPr wrap="square" anchor="t"/>
-          <a:lstStyle/>
-          <a:p>
-            <a:pPr algn="l">
-              <a:spcAft>
-                <a:spcPts val="200"/>
-              </a:spcAft>
-            </a:pPr>
-            <a:r>
-              <a:rPr sz="1300" b="0">
-                <a:solidFill>
-                  <a:srgbClr val="555757"/>
-                </a:solidFill>
-                <a:latin typeface="Microsoft YaHei"/>
-                <a:ea typeface="Microsoft YaHei"/>
-                <a:cs typeface="Microsoft YaHei"/>
-              </a:rPr>
-              <a:t>LIMU-BERT-X 式端侧初始化 + 量化</a:t>
-            </a:r>
-          </a:p>
-          <a:p>
-            <a:pPr algn="l">
-              <a:spcAft>
-                <a:spcPts val="200"/>
-              </a:spcAft>
-            </a:pPr>
-            <a:r>
-              <a:rPr sz="1300" b="0">
-                <a:solidFill>
-                  <a:srgbClr val="555757"/>
-                </a:solidFill>
-                <a:latin typeface="Microsoft YaHei"/>
-                <a:ea typeface="Microsoft YaHei"/>
-                <a:cs typeface="Microsoft YaHei"/>
-              </a:rPr>
-              <a:t>predict/classify 在设备闭环</a:t>
-            </a:r>
-          </a:p>
-          <a:p>
-            <a:pPr algn="l">
-              <a:spcAft>
-                <a:spcPts val="200"/>
-              </a:spcAft>
-            </a:pPr>
-            <a:r>
-              <a:rPr sz="1300" b="0">
-                <a:solidFill>
-                  <a:srgbClr val="555757"/>
-                </a:solidFill>
-                <a:latin typeface="Microsoft YaHei"/>
-                <a:ea typeface="Microsoft YaHei"/>
-                <a:cs typeface="Microsoft YaHei"/>
-              </a:rPr>
-              <a:t>评测：延迟 + 功耗 + 精度</a:t>
-            </a:r>
-          </a:p>
-        </p:txBody>
-      </p:sp>
-      <p:sp>
-        <p:nvSpPr>
-          <p:cNvPr id="19" name="Rounded Rectangle 18"/>
-          <p:cNvSpPr/>
-          <p:nvPr/>
-        </p:nvSpPr>
-        <p:spPr>
-          <a:xfrm>
-            <a:off x="457200" y="5120640"/>
-            <a:ext cx="11247120" cy="822960"/>
+            <a:off x="6263640" y="2788920"/>
+            <a:ext cx="5623560" cy="1298448"/>
           </a:xfrm>
           <a:prstGeom prst="roundRect">
             <a:avLst>
@@ -12434,7 +15584,7 @@
             </a:avLst>
           </a:prstGeom>
           <a:solidFill>
-            <a:srgbClr val="F7F7F7"/>
+            <a:srgbClr val="FFFFFF"/>
           </a:solidFill>
           <a:ln w="9525">
             <a:solidFill>
@@ -12466,14 +15616,139 @@
       </p:sp>
       <p:sp>
         <p:nvSpPr>
+          <p:cNvPr id="17" name="TextBox 16"/>
+          <p:cNvSpPr txBox="1"/>
+          <p:nvPr/>
+        </p:nvSpPr>
+        <p:spPr>
+          <a:xfrm>
+            <a:off x="6464808" y="2926080"/>
+            <a:ext cx="5212080" cy="320040"/>
+          </a:xfrm>
+          <a:prstGeom prst="rect">
+            <a:avLst/>
+          </a:prstGeom>
+          <a:noFill/>
+        </p:spPr>
+        <p:txBody>
+          <a:bodyPr wrap="square" anchor="t"/>
+          <a:lstStyle/>
+          <a:p>
+            <a:pPr algn="l">
+              <a:spcAft>
+                <a:spcPts val="200"/>
+              </a:spcAft>
+            </a:pPr>
+            <a:r>
+              <a:rPr sz="1600" b="1">
+                <a:solidFill>
+                  <a:srgbClr val="C7000B"/>
+                </a:solidFill>
+                <a:latin typeface="Microsoft YaHei"/>
+                <a:ea typeface="Microsoft YaHei"/>
+                <a:cs typeface="Microsoft YaHei"/>
+              </a:rPr>
+              <a:t>输出头</a:t>
+            </a:r>
+          </a:p>
+        </p:txBody>
+      </p:sp>
+      <p:sp>
+        <p:nvSpPr>
+          <p:cNvPr id="18" name="TextBox 17"/>
+          <p:cNvSpPr txBox="1"/>
+          <p:nvPr/>
+        </p:nvSpPr>
+        <p:spPr>
+          <a:xfrm>
+            <a:off x="6464808" y="3291840"/>
+            <a:ext cx="5212080" cy="685800"/>
+          </a:xfrm>
+          <a:prstGeom prst="rect">
+            <a:avLst/>
+          </a:prstGeom>
+          <a:noFill/>
+        </p:spPr>
+        <p:txBody>
+          <a:bodyPr wrap="square" anchor="t"/>
+          <a:lstStyle/>
+          <a:p>
+            <a:pPr algn="l">
+              <a:spcAft>
+                <a:spcPts val="200"/>
+              </a:spcAft>
+            </a:pPr>
+            <a:r>
+              <a:rPr sz="1300" b="0">
+                <a:solidFill>
+                  <a:srgbClr val="555757"/>
+                </a:solidFill>
+                <a:latin typeface="Microsoft YaHei"/>
+                <a:ea typeface="Microsoft YaHei"/>
+                <a:cs typeface="Microsoft YaHei"/>
+              </a:rPr>
+              <a:t>Linear 1280→64×9；CPM mask horizon；逆 RevIN；stitching 任意 H。</a:t>
+            </a:r>
+          </a:p>
+        </p:txBody>
+      </p:sp>
+      <p:sp>
+        <p:nvSpPr>
+          <p:cNvPr id="19" name="Rounded Rectangle 18"/>
+          <p:cNvSpPr/>
+          <p:nvPr/>
+        </p:nvSpPr>
+        <p:spPr>
+          <a:xfrm>
+            <a:off x="457200" y="4206240"/>
+            <a:ext cx="5623560" cy="1298448"/>
+          </a:xfrm>
+          <a:prstGeom prst="roundRect">
+            <a:avLst>
+              <a:gd name="adj" fmla="val 5000"/>
+            </a:avLst>
+          </a:prstGeom>
+          <a:solidFill>
+            <a:srgbClr val="FFFFFF"/>
+          </a:solidFill>
+          <a:ln w="9525">
+            <a:solidFill>
+              <a:srgbClr val="DDDDDD"/>
+            </a:solidFill>
+          </a:ln>
+        </p:spPr>
+        <p:style>
+          <a:lnRef idx="1">
+            <a:schemeClr val="accent1"/>
+          </a:lnRef>
+          <a:fillRef idx="3">
+            <a:schemeClr val="accent1"/>
+          </a:fillRef>
+          <a:effectRef idx="2">
+            <a:schemeClr val="accent1"/>
+          </a:effectRef>
+          <a:fontRef idx="minor">
+            <a:schemeClr val="lt1"/>
+          </a:fontRef>
+        </p:style>
+        <p:txBody>
+          <a:bodyPr rtlCol="0" anchor="ctr"/>
+          <a:lstStyle/>
+          <a:p>
+            <a:pPr algn="ctr"/>
+          </a:p>
+        </p:txBody>
+      </p:sp>
+      <p:sp>
+        <p:nvSpPr>
           <p:cNvPr id="20" name="TextBox 19"/>
           <p:cNvSpPr txBox="1"/>
           <p:nvPr/>
         </p:nvSpPr>
         <p:spPr>
           <a:xfrm>
-            <a:off x="640080" y="5257800"/>
-            <a:ext cx="10881360" cy="548640"/>
+            <a:off x="658368" y="4343400"/>
+            <a:ext cx="5212080" cy="320040"/>
           </a:xfrm>
           <a:prstGeom prst="rect">
             <a:avLst/>
@@ -12490,7 +15765,7 @@
               </a:spcAft>
             </a:pPr>
             <a:r>
-              <a:rPr sz="1400" b="1">
+              <a:rPr sz="1600" b="1">
                 <a:solidFill>
                   <a:srgbClr val="C7000B"/>
                 </a:solidFill>
@@ -12498,14 +15773,178 @@
                 <a:ea typeface="Microsoft YaHei"/>
                 <a:cs typeface="Microsoft YaHei"/>
               </a:rPr>
-              <a:t>演进原则：接口（Ingest / predict / classify）向下兼容；底座、权重、头可独立替换。</a:t>
-            </a:r>
-          </a:p>
-        </p:txBody>
-      </p:sp>
-      <p:sp>
-        <p:nvSpPr>
-          <p:cNvPr id="21" name="Rectangle 20"/>
+              <a:t>读出</a:t>
+            </a:r>
+          </a:p>
+        </p:txBody>
+      </p:sp>
+      <p:sp>
+        <p:nvSpPr>
+          <p:cNvPr id="21" name="TextBox 20"/>
+          <p:cNvSpPr txBox="1"/>
+          <p:nvPr/>
+        </p:nvSpPr>
+        <p:spPr>
+          <a:xfrm>
+            <a:off x="658368" y="4709160"/>
+            <a:ext cx="5212080" cy="685800"/>
+          </a:xfrm>
+          <a:prstGeom prst="rect">
+            <a:avLst/>
+          </a:prstGeom>
+          <a:noFill/>
+        </p:spPr>
+        <p:txBody>
+          <a:bodyPr wrap="square" anchor="t"/>
+          <a:lstStyle/>
+          <a:p>
+            <a:pPr algn="l">
+              <a:spcAft>
+                <a:spcPts val="200"/>
+              </a:spcAft>
+            </a:pPr>
+            <a:r>
+              <a:rPr sz="1300" b="0">
+                <a:solidFill>
+                  <a:srgbClr val="555757"/>
+                </a:solidFill>
+                <a:latin typeface="Microsoft YaHei"/>
+                <a:ea typeface="Microsoft YaHei"/>
+                <a:cs typeface="Microsoft YaHei"/>
+              </a:rPr>
+              <a:t>点预测 q50；概率区间 q10–q90；MAE + 覆盖率评测。</a:t>
+            </a:r>
+          </a:p>
+        </p:txBody>
+      </p:sp>
+      <p:sp>
+        <p:nvSpPr>
+          <p:cNvPr id="22" name="Rounded Rectangle 21"/>
+          <p:cNvSpPr/>
+          <p:nvPr/>
+        </p:nvSpPr>
+        <p:spPr>
+          <a:xfrm>
+            <a:off x="6263640" y="4206240"/>
+            <a:ext cx="5623560" cy="1298448"/>
+          </a:xfrm>
+          <a:prstGeom prst="roundRect">
+            <a:avLst>
+              <a:gd name="adj" fmla="val 5000"/>
+            </a:avLst>
+          </a:prstGeom>
+          <a:solidFill>
+            <a:srgbClr val="FFFFFF"/>
+          </a:solidFill>
+          <a:ln w="9525">
+            <a:solidFill>
+              <a:srgbClr val="DDDDDD"/>
+            </a:solidFill>
+          </a:ln>
+        </p:spPr>
+        <p:style>
+          <a:lnRef idx="1">
+            <a:schemeClr val="accent1"/>
+          </a:lnRef>
+          <a:fillRef idx="3">
+            <a:schemeClr val="accent1"/>
+          </a:fillRef>
+          <a:effectRef idx="2">
+            <a:schemeClr val="accent1"/>
+          </a:effectRef>
+          <a:fontRef idx="minor">
+            <a:schemeClr val="lt1"/>
+          </a:fontRef>
+        </p:style>
+        <p:txBody>
+          <a:bodyPr rtlCol="0" anchor="ctr"/>
+          <a:lstStyle/>
+          <a:p>
+            <a:pPr algn="ctr"/>
+          </a:p>
+        </p:txBody>
+      </p:sp>
+      <p:sp>
+        <p:nvSpPr>
+          <p:cNvPr id="23" name="TextBox 22"/>
+          <p:cNvSpPr txBox="1"/>
+          <p:nvPr/>
+        </p:nvSpPr>
+        <p:spPr>
+          <a:xfrm>
+            <a:off x="6464808" y="4343400"/>
+            <a:ext cx="5212080" cy="320040"/>
+          </a:xfrm>
+          <a:prstGeom prst="rect">
+            <a:avLst/>
+          </a:prstGeom>
+          <a:noFill/>
+        </p:spPr>
+        <p:txBody>
+          <a:bodyPr wrap="square" anchor="t"/>
+          <a:lstStyle/>
+          <a:p>
+            <a:pPr algn="l">
+              <a:spcAft>
+                <a:spcPts val="200"/>
+              </a:spcAft>
+            </a:pPr>
+            <a:r>
+              <a:rPr sz="1600" b="1">
+                <a:solidFill>
+                  <a:srgbClr val="C7000B"/>
+                </a:solidFill>
+                <a:latin typeface="Microsoft YaHei"/>
+                <a:ea typeface="Microsoft YaHei"/>
+                <a:cs typeface="Microsoft YaHei"/>
+              </a:rPr>
+              <a:t>替换点</a:t>
+            </a:r>
+          </a:p>
+        </p:txBody>
+      </p:sp>
+      <p:sp>
+        <p:nvSpPr>
+          <p:cNvPr id="24" name="TextBox 23"/>
+          <p:cNvSpPr txBox="1"/>
+          <p:nvPr/>
+        </p:nvSpPr>
+        <p:spPr>
+          <a:xfrm>
+            <a:off x="6464808" y="4709160"/>
+            <a:ext cx="5212080" cy="685800"/>
+          </a:xfrm>
+          <a:prstGeom prst="rect">
+            <a:avLst/>
+          </a:prstGeom>
+          <a:noFill/>
+        </p:spPr>
+        <p:txBody>
+          <a:bodyPr wrap="square" anchor="t"/>
+          <a:lstStyle/>
+          <a:p>
+            <a:pPr algn="l">
+              <a:spcAft>
+                <a:spcPts val="200"/>
+              </a:spcAft>
+            </a:pPr>
+            <a:r>
+              <a:rPr sz="1300" b="0">
+                <a:solidFill>
+                  <a:srgbClr val="555757"/>
+                </a:solidFill>
+                <a:latin typeface="Microsoft YaHei"/>
+                <a:ea typeface="Microsoft YaHei"/>
+                <a:cs typeface="Microsoft YaHei"/>
+              </a:rPr>
+              <a:t>底座换 TimesFM-4 / 自研时，predict() 签名与返回结构不变。</a:t>
+            </a:r>
+          </a:p>
+        </p:txBody>
+      </p:sp>
+      <p:sp>
+        <p:nvSpPr>
+          <p:cNvPr id="25" name="Rectangle 24"/>
           <p:cNvSpPr/>
           <p:nvPr/>
         </p:nvSpPr>
@@ -12548,7 +15987,7 @@
       </p:sp>
       <p:sp>
         <p:nvSpPr>
-          <p:cNvPr id="22" name="TextBox 21"/>
+          <p:cNvPr id="26" name="TextBox 25"/>
           <p:cNvSpPr txBox="1"/>
           <p:nvPr/>
         </p:nvSpPr>
@@ -12580,14 +16019,14 @@
                 <a:ea typeface="Microsoft YaHei"/>
                 <a:cs typeface="Microsoft YaHei"/>
               </a:rPr>
-              <a:t>华为  ·  AI 物理感知平台  ·  代际演进    |    Security Level: Internal</a:t>
-            </a:r>
-          </a:p>
-        </p:txBody>
-      </p:sp>
-      <p:sp>
-        <p:nvSpPr>
-          <p:cNvPr id="23" name="TextBox 22"/>
+              <a:t>华为  ·  AI 物理感知平台  ·  预测    |    Security Level: Internal</a:t>
+            </a:r>
+          </a:p>
+        </p:txBody>
+      </p:sp>
+      <p:sp>
+        <p:nvSpPr>
+          <p:cNvPr id="27" name="TextBox 26"/>
           <p:cNvSpPr txBox="1"/>
           <p:nvPr/>
         </p:nvSpPr>
@@ -12619,7 +16058,7 @@
                 <a:ea typeface="Microsoft YaHei"/>
                 <a:cs typeface="Microsoft YaHei"/>
               </a:rPr>
-              <a:t>6  /  8</a:t>
+              <a:t>6  /  10</a:t>
             </a:r>
           </a:p>
         </p:txBody>
@@ -12719,7 +16158,7 @@
                 <a:ea typeface="Microsoft YaHei"/>
                 <a:cs typeface="Microsoft YaHei"/>
               </a:rPr>
-              <a:t>6  评测与许可</a:t>
+              <a:t>6  分类实现</a:t>
             </a:r>
           </a:p>
         </p:txBody>
@@ -12758,7 +16197,7 @@
                 <a:ea typeface="Microsoft YaHei"/>
                 <a:cs typeface="Microsoft YaHei"/>
               </a:rPr>
-              <a:t>同一接口，同一评测，不同底座可对比</a:t>
+              <a:t>共享表征 + 任务 token / linear probe</a:t>
             </a:r>
           </a:p>
         </p:txBody>
@@ -12840,7 +16279,7 @@
                 <a:ea typeface="Microsoft YaHei"/>
                 <a:cs typeface="Microsoft YaHei"/>
               </a:rPr>
-              <a:t>平台提供统一评测工具链；许可边界随底座变化。</a:t>
+              <a:t>分类不是 TimesFM 内建；平台用 UniTS / MOMENT 方式补。</a:t>
             </a:r>
           </a:p>
         </p:txBody>
@@ -12907,7 +16346,7 @@
             <a:avLst/>
           </a:prstGeom>
           <a:solidFill>
-            <a:srgbClr val="62B230"/>
+            <a:srgbClr val="898989"/>
           </a:solidFill>
           <a:ln>
             <a:noFill/>
@@ -12963,13 +16402,13 @@
             <a:r>
               <a:rPr sz="1700" b="1">
                 <a:solidFill>
-                  <a:srgbClr val="62B230"/>
-                </a:solidFill>
-                <a:latin typeface="Microsoft YaHei"/>
-                <a:ea typeface="Microsoft YaHei"/>
-                <a:cs typeface="Microsoft YaHei"/>
-              </a:rPr>
-              <a:t>评测接口</a:t>
+                  <a:srgbClr val="898989"/>
+                </a:solidFill>
+                <a:latin typeface="Microsoft YaHei"/>
+                <a:ea typeface="Microsoft YaHei"/>
+                <a:cs typeface="Microsoft YaHei"/>
+              </a:rPr>
+              <a:t>路 A  规则下游（零样本，示意）</a:t>
             </a:r>
           </a:p>
         </p:txBody>
@@ -13008,7 +16447,7 @@
                 <a:ea typeface="Microsoft YaHei"/>
                 <a:cs typeface="Microsoft YaHei"/>
               </a:rPr>
-              <a:t>predict：MAE、q10–q90 覆盖率、stitching 长 horizon 稳定性。</a:t>
+              <a:t>历史段：去趋势残差 z-score。</a:t>
             </a:r>
           </a:p>
           <a:p>
@@ -13026,7 +16465,7 @@
                 <a:ea typeface="Microsoft YaHei"/>
                 <a:cs typeface="Microsoft YaHei"/>
               </a:rPr>
-              <a:t>classify：macro-F1、confusion matrix、注册类别一致性。</a:t>
+              <a:t>|z|≥3 CRITICAL，≥2 WARNING，否则 NORMAL。</a:t>
             </a:r>
           </a:p>
           <a:p>
@@ -13044,7 +16483,61 @@
                 <a:ea typeface="Microsoft YaHei"/>
                 <a:cs typeface="Microsoft YaHei"/>
               </a:rPr>
-              <a:t>底座对比：同一批数据，同一接口，换底座重跑。</a:t>
+              <a:t/>
+            </a:r>
+          </a:p>
+          <a:p>
+            <a:pPr algn="l">
+              <a:spcAft>
+                <a:spcPts val="200"/>
+              </a:spcAft>
+            </a:pPr>
+            <a:r>
+              <a:rPr sz="1400" b="0">
+                <a:solidFill>
+                  <a:srgbClr val="555757"/>
+                </a:solidFill>
+                <a:latin typeface="Microsoft YaHei"/>
+                <a:ea typeface="Microsoft YaHei"/>
+                <a:cs typeface="Microsoft YaHei"/>
+              </a:rPr>
+              <a:t>未来段：观测是否落在 q10–q90 / q20–q80 外。</a:t>
+            </a:r>
+          </a:p>
+          <a:p>
+            <a:pPr algn="l">
+              <a:spcAft>
+                <a:spcPts val="200"/>
+              </a:spcAft>
+            </a:pPr>
+            <a:r>
+              <a:rPr sz="1400" b="0">
+                <a:solidFill>
+                  <a:srgbClr val="555757"/>
+                </a:solidFill>
+                <a:latin typeface="Microsoft YaHei"/>
+                <a:ea typeface="Microsoft YaHei"/>
+                <a:cs typeface="Microsoft YaHei"/>
+              </a:rPr>
+              <a:t/>
+            </a:r>
+          </a:p>
+          <a:p>
+            <a:pPr algn="l">
+              <a:spcAft>
+                <a:spcPts val="200"/>
+              </a:spcAft>
+            </a:pPr>
+            <a:r>
+              <a:rPr sz="1400" b="0">
+                <a:solidFill>
+                  <a:srgbClr val="555757"/>
+                </a:solidFill>
+                <a:latin typeface="Microsoft YaHei"/>
+                <a:ea typeface="Microsoft YaHei"/>
+                <a:cs typeface="Microsoft YaHei"/>
+              </a:rPr>
+              <a:t>不改权重，不能注册新类别，只能做异常示意。</a:t>
             </a:r>
           </a:p>
         </p:txBody>
@@ -13111,7 +16604,7 @@
             <a:avLst/>
           </a:prstGeom>
           <a:solidFill>
-            <a:srgbClr val="ED6D00"/>
+            <a:srgbClr val="C7000B"/>
           </a:solidFill>
           <a:ln>
             <a:noFill/>
@@ -13167,13 +16660,13 @@
             <a:r>
               <a:rPr sz="1700" b="1">
                 <a:solidFill>
-                  <a:srgbClr val="ED6D00"/>
-                </a:solidFill>
-                <a:latin typeface="Microsoft YaHei"/>
-                <a:ea typeface="Microsoft YaHei"/>
-                <a:cs typeface="Microsoft YaHei"/>
-              </a:rPr>
-              <a:t>许可边界</a:t>
+                  <a:srgbClr val="C7000B"/>
+                </a:solidFill>
+                <a:latin typeface="Microsoft YaHei"/>
+                <a:ea typeface="Microsoft YaHei"/>
+                <a:cs typeface="Microsoft YaHei"/>
+              </a:rPr>
+              <a:t>路 B  可学习分类（平台接口）</a:t>
             </a:r>
           </a:p>
         </p:txBody>
@@ -13212,7 +16705,7 @@
                 <a:ea typeface="Microsoft YaHei"/>
                 <a:cs typeface="Microsoft YaHei"/>
               </a:rPr>
-              <a:t>TimesFM-3 权重：NC，商用必须自训底座。</a:t>
+              <a:t>UniTS：任务 token 把预测 / 分类 / 填补 / 异常收进同一套参数。</a:t>
             </a:r>
           </a:p>
           <a:p>
@@ -13230,7 +16723,7 @@
                 <a:ea typeface="Microsoft YaHei"/>
                 <a:cs typeface="Microsoft YaHei"/>
               </a:rPr>
-              <a:t>TimesFM ≤ 2.5：Apache-2.0，可商用。</a:t>
+              <a:t>MOMENT：掩码预训练编码器 + linear probe / 分类头。</a:t>
             </a:r>
           </a:p>
           <a:p>
@@ -13248,7 +16741,7 @@
                 <a:ea typeface="Microsoft YaHei"/>
                 <a:cs typeface="Microsoft YaHei"/>
               </a:rPr>
-              <a:t>UniTS / MOMENT / LIMU-BERT-X：公开可研究，商用前确认 license。</a:t>
+              <a:t>LIMU-BERT-X：IMU 掩码预训练，直接初始化 IMU 变元。</a:t>
             </a:r>
           </a:p>
           <a:p>
@@ -13284,7 +16777,7 @@
                 <a:ea typeface="Microsoft YaHei"/>
                 <a:cs typeface="Microsoft YaHei"/>
               </a:rPr>
-              <a:t>平台不绑定任何 NC 权重；接口层与许可层解耦。</a:t>
+              <a:t>场景方注册类别 → 平台微调 classify() → 返回 label + confidence。</a:t>
             </a:r>
           </a:p>
         </p:txBody>
@@ -13366,7 +16859,7 @@
                 <a:ea typeface="Microsoft YaHei"/>
                 <a:cs typeface="Microsoft YaHei"/>
               </a:rPr>
-              <a:t>华为  ·  AI 物理感知平台  ·  评测与许可    |    Security Level: Internal</a:t>
+              <a:t>华为  ·  AI 物理感知平台  ·  分类    |    Security Level: Internal</a:t>
             </a:r>
           </a:p>
         </p:txBody>
@@ -13405,7 +16898,7 @@
                 <a:ea typeface="Microsoft YaHei"/>
                 <a:cs typeface="Microsoft YaHei"/>
               </a:rPr>
-              <a:t>7  /  8</a:t>
+              <a:t>7  /  10</a:t>
             </a:r>
           </a:p>
         </p:txBody>
@@ -13505,7 +16998,7 @@
                 <a:ea typeface="Microsoft YaHei"/>
                 <a:cs typeface="Microsoft YaHei"/>
               </a:rPr>
-              <a:t>决策</a:t>
+              <a:t>7  代际演进</a:t>
             </a:r>
           </a:p>
         </p:txBody>
@@ -13544,7 +17037,7 @@
                 <a:ea typeface="Microsoft YaHei"/>
                 <a:cs typeface="Microsoft YaHei"/>
               </a:rPr>
-              <a:t>平台交付接口与工具链，不交付场景语义</a:t>
+              <a:t>Gen1 零样本 → Gen2 指令微调 → Gen3 端侧</a:t>
             </a:r>
           </a:p>
         </p:txBody>
@@ -13626,7 +17119,7 @@
                 <a:ea typeface="Microsoft YaHei"/>
                 <a:cs typeface="Microsoft YaHei"/>
               </a:rPr>
-              <a:t>接口固定，底座可换，代际演进向下兼容。</a:t>
+              <a:t>接口不变，底座与能力逐代升级。</a:t>
             </a:r>
           </a:p>
         </p:txBody>
@@ -13639,8 +17132,8 @@
         </p:nvSpPr>
         <p:spPr>
           <a:xfrm>
-            <a:off x="457200" y="1371600"/>
-            <a:ext cx="11247120" cy="658368"/>
+            <a:off x="411480" y="1417320"/>
+            <a:ext cx="2788920" cy="3566160"/>
           </a:xfrm>
           <a:prstGeom prst="roundRect">
             <a:avLst>
@@ -13680,40 +17173,44 @@
       </p:sp>
       <p:sp>
         <p:nvSpPr>
-          <p:cNvPr id="8" name="TextBox 7"/>
-          <p:cNvSpPr txBox="1"/>
-          <p:nvPr/>
-        </p:nvSpPr>
-        <p:spPr>
-          <a:xfrm>
-            <a:off x="640080" y="1371600"/>
-            <a:ext cx="1463040" cy="658368"/>
-          </a:xfrm>
-          <a:prstGeom prst="rect">
-            <a:avLst/>
-          </a:prstGeom>
-          <a:noFill/>
-        </p:spPr>
-        <p:txBody>
-          <a:bodyPr wrap="square" anchor="ctr"/>
-          <a:lstStyle/>
-          <a:p>
-            <a:pPr algn="l">
-              <a:spcAft>
-                <a:spcPts val="200"/>
-              </a:spcAft>
-            </a:pPr>
-            <a:r>
-              <a:rPr sz="1600" b="1">
-                <a:solidFill>
-                  <a:srgbClr val="C7000B"/>
-                </a:solidFill>
-                <a:latin typeface="Microsoft YaHei"/>
-                <a:ea typeface="Microsoft YaHei"/>
-                <a:cs typeface="Microsoft YaHei"/>
-              </a:rPr>
-              <a:t>接口</a:t>
-            </a:r>
+          <p:cNvPr id="8" name="Rectangle 7"/>
+          <p:cNvSpPr/>
+          <p:nvPr/>
+        </p:nvSpPr>
+        <p:spPr>
+          <a:xfrm>
+            <a:off x="411480" y="1417320"/>
+            <a:ext cx="2788920" cy="73152"/>
+          </a:xfrm>
+          <a:prstGeom prst="rect">
+            <a:avLst/>
+          </a:prstGeom>
+          <a:solidFill>
+            <a:srgbClr val="C7000B"/>
+          </a:solidFill>
+          <a:ln>
+            <a:noFill/>
+          </a:ln>
+        </p:spPr>
+        <p:style>
+          <a:lnRef idx="1">
+            <a:schemeClr val="accent1"/>
+          </a:lnRef>
+          <a:fillRef idx="3">
+            <a:schemeClr val="accent1"/>
+          </a:fillRef>
+          <a:effectRef idx="2">
+            <a:schemeClr val="accent1"/>
+          </a:effectRef>
+          <a:fontRef idx="minor">
+            <a:schemeClr val="lt1"/>
+          </a:fontRef>
+        </p:style>
+        <p:txBody>
+          <a:bodyPr rtlCol="0" anchor="ctr"/>
+          <a:lstStyle/>
+          <a:p>
+            <a:pPr algn="ctr"/>
           </a:p>
         </p:txBody>
       </p:sp>
@@ -13725,8 +17222,8 @@
         </p:nvSpPr>
         <p:spPr>
           <a:xfrm>
-            <a:off x="2286000" y="1371600"/>
-            <a:ext cx="9235440" cy="658368"/>
+            <a:off x="548640" y="1645920"/>
+            <a:ext cx="2514600" cy="365760"/>
           </a:xfrm>
           <a:prstGeom prst="rect">
             <a:avLst/>
@@ -13734,38 +17231,521 @@
           <a:noFill/>
         </p:spPr>
         <p:txBody>
-          <a:bodyPr wrap="square" anchor="ctr"/>
-          <a:lstStyle/>
-          <a:p>
-            <a:pPr algn="l">
-              <a:spcAft>
-                <a:spcPts val="200"/>
-              </a:spcAft>
-            </a:pPr>
-            <a:r>
-              <a:rPr sz="1400" b="0">
-                <a:solidFill>
-                  <a:srgbClr val="1A1A1A"/>
-                </a:solidFill>
-                <a:latin typeface="Microsoft YaHei"/>
-                <a:ea typeface="Microsoft YaHei"/>
-                <a:cs typeface="Microsoft YaHei"/>
-              </a:rPr>
-              <a:t>Ingest schema + predict() + classify()；版本化，向下兼容。</a:t>
-            </a:r>
-          </a:p>
-        </p:txBody>
-      </p:sp>
-      <p:sp>
-        <p:nvSpPr>
-          <p:cNvPr id="10" name="Rounded Rectangle 9"/>
+          <a:bodyPr wrap="square" anchor="t"/>
+          <a:lstStyle/>
+          <a:p>
+            <a:pPr algn="l">
+              <a:spcAft>
+                <a:spcPts val="200"/>
+              </a:spcAft>
+            </a:pPr>
+            <a:r>
+              <a:rPr sz="1600" b="1">
+                <a:solidFill>
+                  <a:srgbClr val="C7000B"/>
+                </a:solidFill>
+                <a:latin typeface="Microsoft YaHei"/>
+                <a:ea typeface="Microsoft YaHei"/>
+                <a:cs typeface="Microsoft YaHei"/>
+              </a:rPr>
+              <a:t>Gen1  零样本基线</a:t>
+            </a:r>
+          </a:p>
+        </p:txBody>
+      </p:sp>
+      <p:sp>
+        <p:nvSpPr>
+          <p:cNvPr id="10" name="TextBox 9"/>
+          <p:cNvSpPr txBox="1"/>
+          <p:nvPr/>
+        </p:nvSpPr>
+        <p:spPr>
+          <a:xfrm>
+            <a:off x="548640" y="2148840"/>
+            <a:ext cx="2514600" cy="2651760"/>
+          </a:xfrm>
+          <a:prstGeom prst="rect">
+            <a:avLst/>
+          </a:prstGeom>
+          <a:noFill/>
+        </p:spPr>
+        <p:txBody>
+          <a:bodyPr wrap="square" anchor="t"/>
+          <a:lstStyle/>
+          <a:p>
+            <a:pPr algn="l">
+              <a:spcAft>
+                <a:spcPts val="200"/>
+              </a:spcAft>
+            </a:pPr>
+            <a:r>
+              <a:rPr sz="1300" b="0">
+                <a:solidFill>
+                  <a:srgbClr val="555757"/>
+                </a:solidFill>
+                <a:latin typeface="Microsoft YaHei"/>
+                <a:ea typeface="Microsoft YaHei"/>
+                <a:cs typeface="Microsoft YaHei"/>
+              </a:rPr>
+              <a:t>TimesFM-3 + UniTS/MOMENT + LIMU-BERT-X</a:t>
+            </a:r>
+          </a:p>
+          <a:p>
+            <a:pPr algn="l">
+              <a:spcAft>
+                <a:spcPts val="200"/>
+              </a:spcAft>
+            </a:pPr>
+            <a:r>
+              <a:rPr sz="1300" b="0">
+                <a:solidFill>
+                  <a:srgbClr val="555757"/>
+                </a:solidFill>
+                <a:latin typeface="Microsoft YaHei"/>
+                <a:ea typeface="Microsoft YaHei"/>
+                <a:cs typeface="Microsoft YaHei"/>
+              </a:rPr>
+              <a:t>predict 零样本；classify 规则 / LoRA</a:t>
+            </a:r>
+          </a:p>
+          <a:p>
+            <a:pPr algn="l">
+              <a:spcAft>
+                <a:spcPts val="200"/>
+              </a:spcAft>
+            </a:pPr>
+            <a:r>
+              <a:rPr sz="1300" b="0">
+                <a:solidFill>
+                  <a:srgbClr val="555757"/>
+                </a:solidFill>
+                <a:latin typeface="Microsoft YaHei"/>
+                <a:ea typeface="Microsoft YaHei"/>
+                <a:cs typeface="Microsoft YaHei"/>
+              </a:rPr>
+              <a:t>评测：MAE + 覆盖率 + macro-F1</a:t>
+            </a:r>
+          </a:p>
+        </p:txBody>
+      </p:sp>
+      <p:sp>
+        <p:nvSpPr>
+          <p:cNvPr id="11" name="Rounded Rectangle 10"/>
           <p:cNvSpPr/>
           <p:nvPr/>
         </p:nvSpPr>
         <p:spPr>
           <a:xfrm>
-            <a:off x="457200" y="2103120"/>
-            <a:ext cx="11247120" cy="658368"/>
+            <a:off x="3337560" y="1417320"/>
+            <a:ext cx="2788920" cy="3566160"/>
+          </a:xfrm>
+          <a:prstGeom prst="roundRect">
+            <a:avLst>
+              <a:gd name="adj" fmla="val 5000"/>
+            </a:avLst>
+          </a:prstGeom>
+          <a:solidFill>
+            <a:srgbClr val="FFFFFF"/>
+          </a:solidFill>
+          <a:ln w="9525">
+            <a:solidFill>
+              <a:srgbClr val="DDDDDD"/>
+            </a:solidFill>
+          </a:ln>
+        </p:spPr>
+        <p:style>
+          <a:lnRef idx="1">
+            <a:schemeClr val="accent1"/>
+          </a:lnRef>
+          <a:fillRef idx="3">
+            <a:schemeClr val="accent1"/>
+          </a:fillRef>
+          <a:effectRef idx="2">
+            <a:schemeClr val="accent1"/>
+          </a:effectRef>
+          <a:fontRef idx="minor">
+            <a:schemeClr val="lt1"/>
+          </a:fontRef>
+        </p:style>
+        <p:txBody>
+          <a:bodyPr rtlCol="0" anchor="ctr"/>
+          <a:lstStyle/>
+          <a:p>
+            <a:pPr algn="ctr"/>
+          </a:p>
+        </p:txBody>
+      </p:sp>
+      <p:sp>
+        <p:nvSpPr>
+          <p:cNvPr id="12" name="Rectangle 11"/>
+          <p:cNvSpPr/>
+          <p:nvPr/>
+        </p:nvSpPr>
+        <p:spPr>
+          <a:xfrm>
+            <a:off x="3337560" y="1417320"/>
+            <a:ext cx="2788920" cy="73152"/>
+          </a:xfrm>
+          <a:prstGeom prst="rect">
+            <a:avLst/>
+          </a:prstGeom>
+          <a:solidFill>
+            <a:srgbClr val="ED6D00"/>
+          </a:solidFill>
+          <a:ln>
+            <a:noFill/>
+          </a:ln>
+        </p:spPr>
+        <p:style>
+          <a:lnRef idx="1">
+            <a:schemeClr val="accent1"/>
+          </a:lnRef>
+          <a:fillRef idx="3">
+            <a:schemeClr val="accent1"/>
+          </a:fillRef>
+          <a:effectRef idx="2">
+            <a:schemeClr val="accent1"/>
+          </a:effectRef>
+          <a:fontRef idx="minor">
+            <a:schemeClr val="lt1"/>
+          </a:fontRef>
+        </p:style>
+        <p:txBody>
+          <a:bodyPr rtlCol="0" anchor="ctr"/>
+          <a:lstStyle/>
+          <a:p>
+            <a:pPr algn="ctr"/>
+          </a:p>
+        </p:txBody>
+      </p:sp>
+      <p:sp>
+        <p:nvSpPr>
+          <p:cNvPr id="13" name="TextBox 12"/>
+          <p:cNvSpPr txBox="1"/>
+          <p:nvPr/>
+        </p:nvSpPr>
+        <p:spPr>
+          <a:xfrm>
+            <a:off x="3474720" y="1645920"/>
+            <a:ext cx="2514600" cy="365760"/>
+          </a:xfrm>
+          <a:prstGeom prst="rect">
+            <a:avLst/>
+          </a:prstGeom>
+          <a:noFill/>
+        </p:spPr>
+        <p:txBody>
+          <a:bodyPr wrap="square" anchor="t"/>
+          <a:lstStyle/>
+          <a:p>
+            <a:pPr algn="l">
+              <a:spcAft>
+                <a:spcPts val="200"/>
+              </a:spcAft>
+            </a:pPr>
+            <a:r>
+              <a:rPr sz="1600" b="1">
+                <a:solidFill>
+                  <a:srgbClr val="ED6D00"/>
+                </a:solidFill>
+                <a:latin typeface="Microsoft YaHei"/>
+                <a:ea typeface="Microsoft YaHei"/>
+                <a:cs typeface="Microsoft YaHei"/>
+              </a:rPr>
+              <a:t>Gen2  指令微调</a:t>
+            </a:r>
+          </a:p>
+        </p:txBody>
+      </p:sp>
+      <p:sp>
+        <p:nvSpPr>
+          <p:cNvPr id="14" name="TextBox 13"/>
+          <p:cNvSpPr txBox="1"/>
+          <p:nvPr/>
+        </p:nvSpPr>
+        <p:spPr>
+          <a:xfrm>
+            <a:off x="3474720" y="2148840"/>
+            <a:ext cx="2514600" cy="2651760"/>
+          </a:xfrm>
+          <a:prstGeom prst="rect">
+            <a:avLst/>
+          </a:prstGeom>
+          <a:noFill/>
+        </p:spPr>
+        <p:txBody>
+          <a:bodyPr wrap="square" anchor="t"/>
+          <a:lstStyle/>
+          <a:p>
+            <a:pPr algn="l">
+              <a:spcAft>
+                <a:spcPts val="200"/>
+              </a:spcAft>
+            </a:pPr>
+            <a:r>
+              <a:rPr sz="1300" b="0">
+                <a:solidFill>
+                  <a:srgbClr val="555757"/>
+                </a:solidFill>
+                <a:latin typeface="Microsoft YaHei"/>
+                <a:ea typeface="Microsoft YaHei"/>
+                <a:cs typeface="Microsoft YaHei"/>
+              </a:rPr>
+              <a:t>物理指令数据集：预测 / 分类 / 异常统一 prompt</a:t>
+            </a:r>
+          </a:p>
+          <a:p>
+            <a:pPr algn="l">
+              <a:spcAft>
+                <a:spcPts val="200"/>
+              </a:spcAft>
+            </a:pPr>
+            <a:r>
+              <a:rPr sz="1300" b="0">
+                <a:solidFill>
+                  <a:srgbClr val="555757"/>
+                </a:solidFill>
+                <a:latin typeface="Microsoft YaHei"/>
+                <a:ea typeface="Microsoft YaHei"/>
+                <a:cs typeface="Microsoft YaHei"/>
+              </a:rPr>
+              <a:t>底座自研，摆脱 3.0 NC 权重</a:t>
+            </a:r>
+          </a:p>
+          <a:p>
+            <a:pPr algn="l">
+              <a:spcAft>
+                <a:spcPts val="200"/>
+              </a:spcAft>
+            </a:pPr>
+            <a:r>
+              <a:rPr sz="1300" b="0">
+                <a:solidFill>
+                  <a:srgbClr val="555757"/>
+                </a:solidFill>
+                <a:latin typeface="Microsoft YaHei"/>
+                <a:ea typeface="Microsoft YaHei"/>
+                <a:cs typeface="Microsoft YaHei"/>
+              </a:rPr>
+              <a:t>评测：zero-shot → few-shot → full-shot</a:t>
+            </a:r>
+          </a:p>
+        </p:txBody>
+      </p:sp>
+      <p:sp>
+        <p:nvSpPr>
+          <p:cNvPr id="15" name="Rounded Rectangle 14"/>
+          <p:cNvSpPr/>
+          <p:nvPr/>
+        </p:nvSpPr>
+        <p:spPr>
+          <a:xfrm>
+            <a:off x="6263640" y="1417320"/>
+            <a:ext cx="2788920" cy="3566160"/>
+          </a:xfrm>
+          <a:prstGeom prst="roundRect">
+            <a:avLst>
+              <a:gd name="adj" fmla="val 5000"/>
+            </a:avLst>
+          </a:prstGeom>
+          <a:solidFill>
+            <a:srgbClr val="FFFFFF"/>
+          </a:solidFill>
+          <a:ln w="9525">
+            <a:solidFill>
+              <a:srgbClr val="DDDDDD"/>
+            </a:solidFill>
+          </a:ln>
+        </p:spPr>
+        <p:style>
+          <a:lnRef idx="1">
+            <a:schemeClr val="accent1"/>
+          </a:lnRef>
+          <a:fillRef idx="3">
+            <a:schemeClr val="accent1"/>
+          </a:fillRef>
+          <a:effectRef idx="2">
+            <a:schemeClr val="accent1"/>
+          </a:effectRef>
+          <a:fontRef idx="minor">
+            <a:schemeClr val="lt1"/>
+          </a:fontRef>
+        </p:style>
+        <p:txBody>
+          <a:bodyPr rtlCol="0" anchor="ctr"/>
+          <a:lstStyle/>
+          <a:p>
+            <a:pPr algn="ctr"/>
+          </a:p>
+        </p:txBody>
+      </p:sp>
+      <p:sp>
+        <p:nvSpPr>
+          <p:cNvPr id="16" name="Rectangle 15"/>
+          <p:cNvSpPr/>
+          <p:nvPr/>
+        </p:nvSpPr>
+        <p:spPr>
+          <a:xfrm>
+            <a:off x="6263640" y="1417320"/>
+            <a:ext cx="2788920" cy="73152"/>
+          </a:xfrm>
+          <a:prstGeom prst="rect">
+            <a:avLst/>
+          </a:prstGeom>
+          <a:solidFill>
+            <a:srgbClr val="30B5C5"/>
+          </a:solidFill>
+          <a:ln>
+            <a:noFill/>
+          </a:ln>
+        </p:spPr>
+        <p:style>
+          <a:lnRef idx="1">
+            <a:schemeClr val="accent1"/>
+          </a:lnRef>
+          <a:fillRef idx="3">
+            <a:schemeClr val="accent1"/>
+          </a:fillRef>
+          <a:effectRef idx="2">
+            <a:schemeClr val="accent1"/>
+          </a:effectRef>
+          <a:fontRef idx="minor">
+            <a:schemeClr val="lt1"/>
+          </a:fontRef>
+        </p:style>
+        <p:txBody>
+          <a:bodyPr rtlCol="0" anchor="ctr"/>
+          <a:lstStyle/>
+          <a:p>
+            <a:pPr algn="ctr"/>
+          </a:p>
+        </p:txBody>
+      </p:sp>
+      <p:sp>
+        <p:nvSpPr>
+          <p:cNvPr id="17" name="TextBox 16"/>
+          <p:cNvSpPr txBox="1"/>
+          <p:nvPr/>
+        </p:nvSpPr>
+        <p:spPr>
+          <a:xfrm>
+            <a:off x="6400800" y="1645920"/>
+            <a:ext cx="2514600" cy="365760"/>
+          </a:xfrm>
+          <a:prstGeom prst="rect">
+            <a:avLst/>
+          </a:prstGeom>
+          <a:noFill/>
+        </p:spPr>
+        <p:txBody>
+          <a:bodyPr wrap="square" anchor="t"/>
+          <a:lstStyle/>
+          <a:p>
+            <a:pPr algn="l">
+              <a:spcAft>
+                <a:spcPts val="200"/>
+              </a:spcAft>
+            </a:pPr>
+            <a:r>
+              <a:rPr sz="1600" b="1">
+                <a:solidFill>
+                  <a:srgbClr val="30B5C5"/>
+                </a:solidFill>
+                <a:latin typeface="Microsoft YaHei"/>
+                <a:ea typeface="Microsoft YaHei"/>
+                <a:cs typeface="Microsoft YaHei"/>
+              </a:rPr>
+              <a:t>Gen3  端侧物理</a:t>
+            </a:r>
+          </a:p>
+        </p:txBody>
+      </p:sp>
+      <p:sp>
+        <p:nvSpPr>
+          <p:cNvPr id="18" name="TextBox 17"/>
+          <p:cNvSpPr txBox="1"/>
+          <p:nvPr/>
+        </p:nvSpPr>
+        <p:spPr>
+          <a:xfrm>
+            <a:off x="6400800" y="2148840"/>
+            <a:ext cx="2514600" cy="2651760"/>
+          </a:xfrm>
+          <a:prstGeom prst="rect">
+            <a:avLst/>
+          </a:prstGeom>
+          <a:noFill/>
+        </p:spPr>
+        <p:txBody>
+          <a:bodyPr wrap="square" anchor="t"/>
+          <a:lstStyle/>
+          <a:p>
+            <a:pPr algn="l">
+              <a:spcAft>
+                <a:spcPts val="200"/>
+              </a:spcAft>
+            </a:pPr>
+            <a:r>
+              <a:rPr sz="1300" b="0">
+                <a:solidFill>
+                  <a:srgbClr val="555757"/>
+                </a:solidFill>
+                <a:latin typeface="Microsoft YaHei"/>
+                <a:ea typeface="Microsoft YaHei"/>
+                <a:cs typeface="Microsoft YaHei"/>
+              </a:rPr>
+              <a:t>LIMU-BERT-X 式端侧初始化 + 量化</a:t>
+            </a:r>
+          </a:p>
+          <a:p>
+            <a:pPr algn="l">
+              <a:spcAft>
+                <a:spcPts val="200"/>
+              </a:spcAft>
+            </a:pPr>
+            <a:r>
+              <a:rPr sz="1300" b="0">
+                <a:solidFill>
+                  <a:srgbClr val="555757"/>
+                </a:solidFill>
+                <a:latin typeface="Microsoft YaHei"/>
+                <a:ea typeface="Microsoft YaHei"/>
+                <a:cs typeface="Microsoft YaHei"/>
+              </a:rPr>
+              <a:t>predict/classify 在设备闭环</a:t>
+            </a:r>
+          </a:p>
+          <a:p>
+            <a:pPr algn="l">
+              <a:spcAft>
+                <a:spcPts val="200"/>
+              </a:spcAft>
+            </a:pPr>
+            <a:r>
+              <a:rPr sz="1300" b="0">
+                <a:solidFill>
+                  <a:srgbClr val="555757"/>
+                </a:solidFill>
+                <a:latin typeface="Microsoft YaHei"/>
+                <a:ea typeface="Microsoft YaHei"/>
+                <a:cs typeface="Microsoft YaHei"/>
+              </a:rPr>
+              <a:t>评测：延迟 + 功耗 + 精度</a:t>
+            </a:r>
+          </a:p>
+        </p:txBody>
+      </p:sp>
+      <p:sp>
+        <p:nvSpPr>
+          <p:cNvPr id="19" name="Rounded Rectangle 18"/>
+          <p:cNvSpPr/>
+          <p:nvPr/>
+        </p:nvSpPr>
+        <p:spPr>
+          <a:xfrm>
+            <a:off x="457200" y="5120640"/>
+            <a:ext cx="11247120" cy="822960"/>
           </a:xfrm>
           <a:prstGeom prst="roundRect">
             <a:avLst>
@@ -13805,14 +17785,14 @@
       </p:sp>
       <p:sp>
         <p:nvSpPr>
-          <p:cNvPr id="11" name="TextBox 10"/>
+          <p:cNvPr id="20" name="TextBox 19"/>
           <p:cNvSpPr txBox="1"/>
           <p:nvPr/>
         </p:nvSpPr>
         <p:spPr>
           <a:xfrm>
-            <a:off x="640080" y="2103120"/>
-            <a:ext cx="1463040" cy="658368"/>
+            <a:off x="640080" y="5257800"/>
+            <a:ext cx="10881360" cy="548640"/>
           </a:xfrm>
           <a:prstGeom prst="rect">
             <a:avLst/>
@@ -13820,6 +17800,88 @@
           <a:noFill/>
         </p:spPr>
         <p:txBody>
+          <a:bodyPr wrap="square" anchor="t"/>
+          <a:lstStyle/>
+          <a:p>
+            <a:pPr algn="l">
+              <a:spcAft>
+                <a:spcPts val="200"/>
+              </a:spcAft>
+            </a:pPr>
+            <a:r>
+              <a:rPr sz="1400" b="1">
+                <a:solidFill>
+                  <a:srgbClr val="C7000B"/>
+                </a:solidFill>
+                <a:latin typeface="Microsoft YaHei"/>
+                <a:ea typeface="Microsoft YaHei"/>
+                <a:cs typeface="Microsoft YaHei"/>
+              </a:rPr>
+              <a:t>演进原则：接口（Ingest / predict / classify）向下兼容；底座、权重、头可独立替换。</a:t>
+            </a:r>
+          </a:p>
+        </p:txBody>
+      </p:sp>
+      <p:sp>
+        <p:nvSpPr>
+          <p:cNvPr id="21" name="Rectangle 20"/>
+          <p:cNvSpPr/>
+          <p:nvPr/>
+        </p:nvSpPr>
+        <p:spPr>
+          <a:xfrm>
+            <a:off x="0" y="6537960"/>
+            <a:ext cx="12191695" cy="320040"/>
+          </a:xfrm>
+          <a:prstGeom prst="rect">
+            <a:avLst/>
+          </a:prstGeom>
+          <a:solidFill>
+            <a:srgbClr val="F2F2F2"/>
+          </a:solidFill>
+          <a:ln>
+            <a:noFill/>
+          </a:ln>
+        </p:spPr>
+        <p:style>
+          <a:lnRef idx="1">
+            <a:schemeClr val="accent1"/>
+          </a:lnRef>
+          <a:fillRef idx="3">
+            <a:schemeClr val="accent1"/>
+          </a:fillRef>
+          <a:effectRef idx="2">
+            <a:schemeClr val="accent1"/>
+          </a:effectRef>
+          <a:fontRef idx="minor">
+            <a:schemeClr val="lt1"/>
+          </a:fontRef>
+        </p:style>
+        <p:txBody>
+          <a:bodyPr rtlCol="0" anchor="ctr"/>
+          <a:lstStyle/>
+          <a:p>
+            <a:pPr algn="ctr"/>
+          </a:p>
+        </p:txBody>
+      </p:sp>
+      <p:sp>
+        <p:nvSpPr>
+          <p:cNvPr id="22" name="TextBox 21"/>
+          <p:cNvSpPr txBox="1"/>
+          <p:nvPr/>
+        </p:nvSpPr>
+        <p:spPr>
+          <a:xfrm>
+            <a:off x="457200" y="6537960"/>
+            <a:ext cx="8229600" cy="320040"/>
+          </a:xfrm>
+          <a:prstGeom prst="rect">
+            <a:avLst/>
+          </a:prstGeom>
+          <a:noFill/>
+        </p:spPr>
+        <p:txBody>
           <a:bodyPr wrap="square" anchor="ctr"/>
           <a:lstStyle/>
           <a:p>
@@ -13829,7 +17891,146 @@
               </a:spcAft>
             </a:pPr>
             <a:r>
-              <a:rPr sz="1600" b="1">
+              <a:rPr sz="900" b="0">
+                <a:solidFill>
+                  <a:srgbClr val="898989"/>
+                </a:solidFill>
+                <a:latin typeface="Microsoft YaHei"/>
+                <a:ea typeface="Microsoft YaHei"/>
+                <a:cs typeface="Microsoft YaHei"/>
+              </a:rPr>
+              <a:t>华为  ·  AI 物理感知平台  ·  代际演进    |    Security Level: Internal</a:t>
+            </a:r>
+          </a:p>
+        </p:txBody>
+      </p:sp>
+      <p:sp>
+        <p:nvSpPr>
+          <p:cNvPr id="23" name="TextBox 22"/>
+          <p:cNvSpPr txBox="1"/>
+          <p:nvPr/>
+        </p:nvSpPr>
+        <p:spPr>
+          <a:xfrm>
+            <a:off x="10241280" y="6537960"/>
+            <a:ext cx="1554480" cy="320040"/>
+          </a:xfrm>
+          <a:prstGeom prst="rect">
+            <a:avLst/>
+          </a:prstGeom>
+          <a:noFill/>
+        </p:spPr>
+        <p:txBody>
+          <a:bodyPr wrap="square" anchor="ctr"/>
+          <a:lstStyle/>
+          <a:p>
+            <a:pPr algn="r">
+              <a:spcAft>
+                <a:spcPts val="200"/>
+              </a:spcAft>
+            </a:pPr>
+            <a:r>
+              <a:rPr sz="900" b="0">
+                <a:solidFill>
+                  <a:srgbClr val="898989"/>
+                </a:solidFill>
+                <a:latin typeface="Microsoft YaHei"/>
+                <a:ea typeface="Microsoft YaHei"/>
+                <a:cs typeface="Microsoft YaHei"/>
+              </a:rPr>
+              <a:t>8  /  10</a:t>
+            </a:r>
+          </a:p>
+        </p:txBody>
+      </p:sp>
+    </p:spTree>
+  </p:cSld>
+  <p:clrMapOvr>
+    <a:masterClrMapping/>
+  </p:clrMapOvr>
+</p:sld>
+</file>
+
+<file path=ppt/slides/slide9.xml><?xml version="1.0" encoding="utf-8"?>
+<p:sld xmlns:a="http://schemas.openxmlformats.org/drawingml/2006/main" xmlns:p="http://schemas.openxmlformats.org/presentationml/2006/main" xmlns:r="http://schemas.openxmlformats.org/officeDocument/2006/relationships">
+  <p:cSld>
+    <p:spTree>
+      <p:nvGrpSpPr>
+        <p:cNvPr id="1" name=""/>
+        <p:cNvGrpSpPr/>
+        <p:nvPr/>
+      </p:nvGrpSpPr>
+      <p:grpSpPr/>
+      <p:sp>
+        <p:nvSpPr>
+          <p:cNvPr id="2" name="Rectangle 1"/>
+          <p:cNvSpPr/>
+          <p:nvPr/>
+        </p:nvSpPr>
+        <p:spPr>
+          <a:xfrm>
+            <a:off x="0" y="0"/>
+            <a:ext cx="12196763" cy="6858000"/>
+          </a:xfrm>
+          <a:prstGeom prst="rect">
+            <a:avLst/>
+          </a:prstGeom>
+          <a:solidFill>
+            <a:srgbClr val="FFFFFF"/>
+          </a:solidFill>
+          <a:ln>
+            <a:noFill/>
+          </a:ln>
+        </p:spPr>
+        <p:style>
+          <a:lnRef idx="1">
+            <a:schemeClr val="accent1"/>
+          </a:lnRef>
+          <a:fillRef idx="3">
+            <a:schemeClr val="accent1"/>
+          </a:fillRef>
+          <a:effectRef idx="2">
+            <a:schemeClr val="accent1"/>
+          </a:effectRef>
+          <a:fontRef idx="minor">
+            <a:schemeClr val="lt1"/>
+          </a:fontRef>
+        </p:style>
+        <p:txBody>
+          <a:bodyPr rtlCol="0" anchor="ctr"/>
+          <a:lstStyle/>
+          <a:p>
+            <a:pPr algn="ctr"/>
+          </a:p>
+        </p:txBody>
+      </p:sp>
+      <p:sp>
+        <p:nvSpPr>
+          <p:cNvPr id="3" name="TextBox 2"/>
+          <p:cNvSpPr txBox="1"/>
+          <p:nvPr/>
+        </p:nvSpPr>
+        <p:spPr>
+          <a:xfrm>
+            <a:off x="457200" y="201168"/>
+            <a:ext cx="11155680" cy="256032"/>
+          </a:xfrm>
+          <a:prstGeom prst="rect">
+            <a:avLst/>
+          </a:prstGeom>
+          <a:noFill/>
+        </p:spPr>
+        <p:txBody>
+          <a:bodyPr wrap="square" anchor="t"/>
+          <a:lstStyle/>
+          <a:p>
+            <a:pPr algn="l">
+              <a:spcAft>
+                <a:spcPts val="200"/>
+              </a:spcAft>
+            </a:pPr>
+            <a:r>
+              <a:rPr sz="1100" b="1">
                 <a:solidFill>
                   <a:srgbClr val="C7000B"/>
                 </a:solidFill>
@@ -13837,21 +18038,21 @@
                 <a:ea typeface="Microsoft YaHei"/>
                 <a:cs typeface="Microsoft YaHei"/>
               </a:rPr>
-              <a:t>预测</a:t>
-            </a:r>
-          </a:p>
-        </p:txBody>
-      </p:sp>
-      <p:sp>
-        <p:nvSpPr>
-          <p:cNvPr id="12" name="TextBox 11"/>
+              <a:t>8  评测与许可</a:t>
+            </a:r>
+          </a:p>
+        </p:txBody>
+      </p:sp>
+      <p:sp>
+        <p:nvSpPr>
+          <p:cNvPr id="4" name="TextBox 3"/>
           <p:cNvSpPr txBox="1"/>
           <p:nvPr/>
         </p:nvSpPr>
         <p:spPr>
           <a:xfrm>
-            <a:off x="2286000" y="2103120"/>
-            <a:ext cx="9235440" cy="658368"/>
+            <a:off x="457200" y="438912"/>
+            <a:ext cx="11155680" cy="438912"/>
           </a:xfrm>
           <a:prstGeom prst="rect">
             <a:avLst/>
@@ -13859,16 +18060,16 @@
           <a:noFill/>
         </p:spPr>
         <p:txBody>
-          <a:bodyPr wrap="square" anchor="ctr"/>
-          <a:lstStyle/>
-          <a:p>
-            <a:pPr algn="l">
-              <a:spcAft>
-                <a:spcPts val="200"/>
-              </a:spcAft>
-            </a:pPr>
-            <a:r>
-              <a:rPr sz="1400" b="0">
+          <a:bodyPr wrap="square" anchor="t"/>
+          <a:lstStyle/>
+          <a:p>
+            <a:pPr algn="l">
+              <a:spcAft>
+                <a:spcPts val="200"/>
+              </a:spcAft>
+            </a:pPr>
+            <a:r>
+              <a:rPr sz="2400" b="1">
                 <a:solidFill>
                   <a:srgbClr val="1A1A1A"/>
                 </a:solidFill>
@@ -13876,21 +18077,103 @@
                 <a:ea typeface="Microsoft YaHei"/>
                 <a:cs typeface="Microsoft YaHei"/>
               </a:rPr>
-              <a:t>TimesFM-3 式 CPM 一次前向；点预测 q50；评测 MAE + 覆盖率。</a:t>
-            </a:r>
-          </a:p>
-        </p:txBody>
-      </p:sp>
-      <p:sp>
-        <p:nvSpPr>
-          <p:cNvPr id="13" name="Rounded Rectangle 12"/>
+              <a:t>同一接口，同一评测，不同底座可对比</a:t>
+            </a:r>
+          </a:p>
+        </p:txBody>
+      </p:sp>
+      <p:sp>
+        <p:nvSpPr>
+          <p:cNvPr id="5" name="Rectangle 4"/>
           <p:cNvSpPr/>
           <p:nvPr/>
         </p:nvSpPr>
         <p:spPr>
           <a:xfrm>
-            <a:off x="457200" y="2834640"/>
-            <a:ext cx="11247120" cy="658368"/>
+            <a:off x="457200" y="914400"/>
+            <a:ext cx="1097280" cy="45720"/>
+          </a:xfrm>
+          <a:prstGeom prst="rect">
+            <a:avLst/>
+          </a:prstGeom>
+          <a:solidFill>
+            <a:srgbClr val="C7000B"/>
+          </a:solidFill>
+          <a:ln>
+            <a:noFill/>
+          </a:ln>
+        </p:spPr>
+        <p:style>
+          <a:lnRef idx="1">
+            <a:schemeClr val="accent1"/>
+          </a:lnRef>
+          <a:fillRef idx="3">
+            <a:schemeClr val="accent1"/>
+          </a:fillRef>
+          <a:effectRef idx="2">
+            <a:schemeClr val="accent1"/>
+          </a:effectRef>
+          <a:fontRef idx="minor">
+            <a:schemeClr val="lt1"/>
+          </a:fontRef>
+        </p:style>
+        <p:txBody>
+          <a:bodyPr rtlCol="0" anchor="ctr"/>
+          <a:lstStyle/>
+          <a:p>
+            <a:pPr algn="ctr"/>
+          </a:p>
+        </p:txBody>
+      </p:sp>
+      <p:sp>
+        <p:nvSpPr>
+          <p:cNvPr id="6" name="TextBox 5"/>
+          <p:cNvSpPr txBox="1"/>
+          <p:nvPr/>
+        </p:nvSpPr>
+        <p:spPr>
+          <a:xfrm>
+            <a:off x="457200" y="1024128"/>
+            <a:ext cx="11155680" cy="292608"/>
+          </a:xfrm>
+          <a:prstGeom prst="rect">
+            <a:avLst/>
+          </a:prstGeom>
+          <a:noFill/>
+        </p:spPr>
+        <p:txBody>
+          <a:bodyPr wrap="square" anchor="t"/>
+          <a:lstStyle/>
+          <a:p>
+            <a:pPr algn="l">
+              <a:spcAft>
+                <a:spcPts val="200"/>
+              </a:spcAft>
+            </a:pPr>
+            <a:r>
+              <a:rPr sz="1200" b="0">
+                <a:solidFill>
+                  <a:srgbClr val="898989"/>
+                </a:solidFill>
+                <a:latin typeface="Microsoft YaHei"/>
+                <a:ea typeface="Microsoft YaHei"/>
+                <a:cs typeface="Microsoft YaHei"/>
+              </a:rPr>
+              <a:t>平台提供统一评测工具链；许可边界随底座变化。</a:t>
+            </a:r>
+          </a:p>
+        </p:txBody>
+      </p:sp>
+      <p:sp>
+        <p:nvSpPr>
+          <p:cNvPr id="7" name="Rounded Rectangle 6"/>
+          <p:cNvSpPr/>
+          <p:nvPr/>
+        </p:nvSpPr>
+        <p:spPr>
+          <a:xfrm>
+            <a:off x="457200" y="1371600"/>
+            <a:ext cx="5577840" cy="4206240"/>
           </a:xfrm>
           <a:prstGeom prst="roundRect">
             <a:avLst>
@@ -13930,105 +18213,23 @@
       </p:sp>
       <p:sp>
         <p:nvSpPr>
-          <p:cNvPr id="14" name="TextBox 13"/>
-          <p:cNvSpPr txBox="1"/>
-          <p:nvPr/>
-        </p:nvSpPr>
-        <p:spPr>
-          <a:xfrm>
-            <a:off x="640080" y="2834640"/>
-            <a:ext cx="1463040" cy="658368"/>
-          </a:xfrm>
-          <a:prstGeom prst="rect">
-            <a:avLst/>
-          </a:prstGeom>
-          <a:noFill/>
-        </p:spPr>
-        <p:txBody>
-          <a:bodyPr wrap="square" anchor="ctr"/>
-          <a:lstStyle/>
-          <a:p>
-            <a:pPr algn="l">
-              <a:spcAft>
-                <a:spcPts val="200"/>
-              </a:spcAft>
-            </a:pPr>
-            <a:r>
-              <a:rPr sz="1600" b="1">
-                <a:solidFill>
-                  <a:srgbClr val="C7000B"/>
-                </a:solidFill>
-                <a:latin typeface="Microsoft YaHei"/>
-                <a:ea typeface="Microsoft YaHei"/>
-                <a:cs typeface="Microsoft YaHei"/>
-              </a:rPr>
-              <a:t>分类</a:t>
-            </a:r>
-          </a:p>
-        </p:txBody>
-      </p:sp>
-      <p:sp>
-        <p:nvSpPr>
-          <p:cNvPr id="15" name="TextBox 14"/>
-          <p:cNvSpPr txBox="1"/>
-          <p:nvPr/>
-        </p:nvSpPr>
-        <p:spPr>
-          <a:xfrm>
-            <a:off x="2286000" y="2834640"/>
-            <a:ext cx="9235440" cy="658368"/>
-          </a:xfrm>
-          <a:prstGeom prst="rect">
-            <a:avLst/>
-          </a:prstGeom>
-          <a:noFill/>
-        </p:spPr>
-        <p:txBody>
-          <a:bodyPr wrap="square" anchor="ctr"/>
-          <a:lstStyle/>
-          <a:p>
-            <a:pPr algn="l">
-              <a:spcAft>
-                <a:spcPts val="200"/>
-              </a:spcAft>
-            </a:pPr>
-            <a:r>
-              <a:rPr sz="1400" b="0">
-                <a:solidFill>
-                  <a:srgbClr val="1A1A1A"/>
-                </a:solidFill>
-                <a:latin typeface="Microsoft YaHei"/>
-                <a:ea typeface="Microsoft YaHei"/>
-                <a:cs typeface="Microsoft YaHei"/>
-              </a:rPr>
-              <a:t>UniTS 任务 token / MOMENT linear probe；场景方注册类别，平台微调。</a:t>
-            </a:r>
-          </a:p>
-        </p:txBody>
-      </p:sp>
-      <p:sp>
-        <p:nvSpPr>
-          <p:cNvPr id="16" name="Rounded Rectangle 15"/>
+          <p:cNvPr id="8" name="Rectangle 7"/>
           <p:cNvSpPr/>
           <p:nvPr/>
         </p:nvSpPr>
         <p:spPr>
           <a:xfrm>
-            <a:off x="457200" y="3566160"/>
-            <a:ext cx="11247120" cy="658368"/>
-          </a:xfrm>
-          <a:prstGeom prst="roundRect">
-            <a:avLst>
-              <a:gd name="adj" fmla="val 5000"/>
-            </a:avLst>
+            <a:off x="457200" y="1371600"/>
+            <a:ext cx="5577840" cy="73152"/>
+          </a:xfrm>
+          <a:prstGeom prst="rect">
+            <a:avLst/>
           </a:prstGeom>
           <a:solidFill>
-            <a:srgbClr val="F7F7F7"/>
+            <a:srgbClr val="62B230"/>
           </a:solidFill>
-          <a:ln w="9525">
-            <a:solidFill>
-              <a:srgbClr val="DDDDDD"/>
-            </a:solidFill>
+          <a:ln>
+            <a:noFill/>
           </a:ln>
         </p:spPr>
         <p:style>
@@ -14055,14 +18256,14 @@
       </p:sp>
       <p:sp>
         <p:nvSpPr>
-          <p:cNvPr id="17" name="TextBox 16"/>
+          <p:cNvPr id="9" name="TextBox 8"/>
           <p:cNvSpPr txBox="1"/>
           <p:nvPr/>
         </p:nvSpPr>
         <p:spPr>
           <a:xfrm>
-            <a:off x="640080" y="3566160"/>
-            <a:ext cx="1463040" cy="658368"/>
+            <a:off x="640080" y="1600200"/>
+            <a:ext cx="5212080" cy="365760"/>
           </a:xfrm>
           <a:prstGeom prst="rect">
             <a:avLst/>
@@ -14070,38 +18271,38 @@
           <a:noFill/>
         </p:spPr>
         <p:txBody>
-          <a:bodyPr wrap="square" anchor="ctr"/>
-          <a:lstStyle/>
-          <a:p>
-            <a:pPr algn="l">
-              <a:spcAft>
-                <a:spcPts val="200"/>
-              </a:spcAft>
-            </a:pPr>
-            <a:r>
-              <a:rPr sz="1600" b="1">
-                <a:solidFill>
-                  <a:srgbClr val="C7000B"/>
-                </a:solidFill>
-                <a:latin typeface="Microsoft YaHei"/>
-                <a:ea typeface="Microsoft YaHei"/>
-                <a:cs typeface="Microsoft YaHei"/>
-              </a:rPr>
-              <a:t>演进</a:t>
-            </a:r>
-          </a:p>
-        </p:txBody>
-      </p:sp>
-      <p:sp>
-        <p:nvSpPr>
-          <p:cNvPr id="18" name="TextBox 17"/>
+          <a:bodyPr wrap="square" anchor="t"/>
+          <a:lstStyle/>
+          <a:p>
+            <a:pPr algn="l">
+              <a:spcAft>
+                <a:spcPts val="200"/>
+              </a:spcAft>
+            </a:pPr>
+            <a:r>
+              <a:rPr sz="1700" b="1">
+                <a:solidFill>
+                  <a:srgbClr val="62B230"/>
+                </a:solidFill>
+                <a:latin typeface="Microsoft YaHei"/>
+                <a:ea typeface="Microsoft YaHei"/>
+                <a:cs typeface="Microsoft YaHei"/>
+              </a:rPr>
+              <a:t>评测接口</a:t>
+            </a:r>
+          </a:p>
+        </p:txBody>
+      </p:sp>
+      <p:sp>
+        <p:nvSpPr>
+          <p:cNvPr id="10" name="TextBox 9"/>
           <p:cNvSpPr txBox="1"/>
           <p:nvPr/>
         </p:nvSpPr>
         <p:spPr>
           <a:xfrm>
-            <a:off x="2286000" y="3566160"/>
-            <a:ext cx="9235440" cy="658368"/>
+            <a:off x="640080" y="2103120"/>
+            <a:ext cx="5212080" cy="3200400"/>
           </a:xfrm>
           <a:prstGeom prst="rect">
             <a:avLst/>
@@ -14109,7 +18310,7 @@
           <a:noFill/>
         </p:spPr>
         <p:txBody>
-          <a:bodyPr wrap="square" anchor="ctr"/>
+          <a:bodyPr wrap="square" anchor="t"/>
           <a:lstStyle/>
           <a:p>
             <a:pPr algn="l">
@@ -14120,27 +18321,63 @@
             <a:r>
               <a:rPr sz="1400" b="0">
                 <a:solidFill>
-                  <a:srgbClr val="1A1A1A"/>
-                </a:solidFill>
-                <a:latin typeface="Microsoft YaHei"/>
-                <a:ea typeface="Microsoft YaHei"/>
-                <a:cs typeface="Microsoft YaHei"/>
-              </a:rPr>
-              <a:t>Gen1 零样本 → Gen2 指令微调 → Gen3 端侧；接口不变。</a:t>
-            </a:r>
-          </a:p>
-        </p:txBody>
-      </p:sp>
-      <p:sp>
-        <p:nvSpPr>
-          <p:cNvPr id="19" name="Rounded Rectangle 18"/>
+                  <a:srgbClr val="555757"/>
+                </a:solidFill>
+                <a:latin typeface="Microsoft YaHei"/>
+                <a:ea typeface="Microsoft YaHei"/>
+                <a:cs typeface="Microsoft YaHei"/>
+              </a:rPr>
+              <a:t>predict：MAE、q10–q90 覆盖率、stitching 长 horizon 稳定性。</a:t>
+            </a:r>
+          </a:p>
+          <a:p>
+            <a:pPr algn="l">
+              <a:spcAft>
+                <a:spcPts val="200"/>
+              </a:spcAft>
+            </a:pPr>
+            <a:r>
+              <a:rPr sz="1400" b="0">
+                <a:solidFill>
+                  <a:srgbClr val="555757"/>
+                </a:solidFill>
+                <a:latin typeface="Microsoft YaHei"/>
+                <a:ea typeface="Microsoft YaHei"/>
+                <a:cs typeface="Microsoft YaHei"/>
+              </a:rPr>
+              <a:t>classify：macro-F1、confusion matrix、注册类别一致性。</a:t>
+            </a:r>
+          </a:p>
+          <a:p>
+            <a:pPr algn="l">
+              <a:spcAft>
+                <a:spcPts val="200"/>
+              </a:spcAft>
+            </a:pPr>
+            <a:r>
+              <a:rPr sz="1400" b="0">
+                <a:solidFill>
+                  <a:srgbClr val="555757"/>
+                </a:solidFill>
+                <a:latin typeface="Microsoft YaHei"/>
+                <a:ea typeface="Microsoft YaHei"/>
+                <a:cs typeface="Microsoft YaHei"/>
+              </a:rPr>
+              <a:t>底座对比：同一批数据，同一接口，换底座重跑。</a:t>
+            </a:r>
+          </a:p>
+        </p:txBody>
+      </p:sp>
+      <p:sp>
+        <p:nvSpPr>
+          <p:cNvPr id="11" name="Rounded Rectangle 10"/>
           <p:cNvSpPr/>
           <p:nvPr/>
         </p:nvSpPr>
         <p:spPr>
           <a:xfrm>
-            <a:off x="457200" y="4297680"/>
-            <a:ext cx="11247120" cy="658368"/>
+            <a:off x="6217920" y="1371600"/>
+            <a:ext cx="5486400" cy="4206240"/>
           </a:xfrm>
           <a:prstGeom prst="roundRect">
             <a:avLst>
@@ -14180,105 +18417,23 @@
       </p:sp>
       <p:sp>
         <p:nvSpPr>
-          <p:cNvPr id="20" name="TextBox 19"/>
-          <p:cNvSpPr txBox="1"/>
-          <p:nvPr/>
-        </p:nvSpPr>
-        <p:spPr>
-          <a:xfrm>
-            <a:off x="640080" y="4297680"/>
-            <a:ext cx="1463040" cy="658368"/>
-          </a:xfrm>
-          <a:prstGeom prst="rect">
-            <a:avLst/>
-          </a:prstGeom>
-          <a:noFill/>
-        </p:spPr>
-        <p:txBody>
-          <a:bodyPr wrap="square" anchor="ctr"/>
-          <a:lstStyle/>
-          <a:p>
-            <a:pPr algn="l">
-              <a:spcAft>
-                <a:spcPts val="200"/>
-              </a:spcAft>
-            </a:pPr>
-            <a:r>
-              <a:rPr sz="1600" b="1">
-                <a:solidFill>
-                  <a:srgbClr val="C7000B"/>
-                </a:solidFill>
-                <a:latin typeface="Microsoft YaHei"/>
-                <a:ea typeface="Microsoft YaHei"/>
-                <a:cs typeface="Microsoft YaHei"/>
-              </a:rPr>
-              <a:t>许可</a:t>
-            </a:r>
-          </a:p>
-        </p:txBody>
-      </p:sp>
-      <p:sp>
-        <p:nvSpPr>
-          <p:cNvPr id="21" name="TextBox 20"/>
-          <p:cNvSpPr txBox="1"/>
-          <p:nvPr/>
-        </p:nvSpPr>
-        <p:spPr>
-          <a:xfrm>
-            <a:off x="2286000" y="4297680"/>
-            <a:ext cx="9235440" cy="658368"/>
-          </a:xfrm>
-          <a:prstGeom prst="rect">
-            <a:avLst/>
-          </a:prstGeom>
-          <a:noFill/>
-        </p:spPr>
-        <p:txBody>
-          <a:bodyPr wrap="square" anchor="ctr"/>
-          <a:lstStyle/>
-          <a:p>
-            <a:pPr algn="l">
-              <a:spcAft>
-                <a:spcPts val="200"/>
-              </a:spcAft>
-            </a:pPr>
-            <a:r>
-              <a:rPr sz="1400" b="0">
-                <a:solidFill>
-                  <a:srgbClr val="1A1A1A"/>
-                </a:solidFill>
-                <a:latin typeface="Microsoft YaHei"/>
-                <a:ea typeface="Microsoft YaHei"/>
-                <a:cs typeface="Microsoft YaHei"/>
-              </a:rPr>
-              <a:t>3.0 权重 NC；2.5 及以前 Apache-2.0；平台层与许可层解耦。</a:t>
-            </a:r>
-          </a:p>
-        </p:txBody>
-      </p:sp>
-      <p:sp>
-        <p:nvSpPr>
-          <p:cNvPr id="22" name="Rounded Rectangle 21"/>
+          <p:cNvPr id="12" name="Rectangle 11"/>
           <p:cNvSpPr/>
           <p:nvPr/>
         </p:nvSpPr>
         <p:spPr>
           <a:xfrm>
-            <a:off x="457200" y="5029200"/>
-            <a:ext cx="11247120" cy="658368"/>
-          </a:xfrm>
-          <a:prstGeom prst="roundRect">
-            <a:avLst>
-              <a:gd name="adj" fmla="val 5000"/>
-            </a:avLst>
+            <a:off x="6217920" y="1371600"/>
+            <a:ext cx="5486400" cy="73152"/>
+          </a:xfrm>
+          <a:prstGeom prst="rect">
+            <a:avLst/>
           </a:prstGeom>
           <a:solidFill>
-            <a:srgbClr val="F7F7F7"/>
+            <a:srgbClr val="ED6D00"/>
           </a:solidFill>
-          <a:ln w="9525">
-            <a:solidFill>
-              <a:srgbClr val="DDDDDD"/>
-            </a:solidFill>
+          <a:ln>
+            <a:noFill/>
           </a:ln>
         </p:spPr>
         <p:style>
@@ -14305,14 +18460,14 @@
       </p:sp>
       <p:sp>
         <p:nvSpPr>
-          <p:cNvPr id="23" name="TextBox 22"/>
+          <p:cNvPr id="13" name="TextBox 12"/>
           <p:cNvSpPr txBox="1"/>
           <p:nvPr/>
         </p:nvSpPr>
         <p:spPr>
           <a:xfrm>
-            <a:off x="640080" y="5029200"/>
-            <a:ext cx="1463040" cy="658368"/>
+            <a:off x="6400800" y="1600200"/>
+            <a:ext cx="5120640" cy="365760"/>
           </a:xfrm>
           <a:prstGeom prst="rect">
             <a:avLst/>
@@ -14320,38 +18475,38 @@
           <a:noFill/>
         </p:spPr>
         <p:txBody>
-          <a:bodyPr wrap="square" anchor="ctr"/>
-          <a:lstStyle/>
-          <a:p>
-            <a:pPr algn="l">
-              <a:spcAft>
-                <a:spcPts val="200"/>
-              </a:spcAft>
-            </a:pPr>
-            <a:r>
-              <a:rPr sz="1600" b="1">
-                <a:solidFill>
-                  <a:srgbClr val="C7000B"/>
-                </a:solidFill>
-                <a:latin typeface="Microsoft YaHei"/>
-                <a:ea typeface="Microsoft YaHei"/>
-                <a:cs typeface="Microsoft YaHei"/>
-              </a:rPr>
-              <a:t>不做</a:t>
-            </a:r>
-          </a:p>
-        </p:txBody>
-      </p:sp>
-      <p:sp>
-        <p:nvSpPr>
-          <p:cNvPr id="24" name="TextBox 23"/>
+          <a:bodyPr wrap="square" anchor="t"/>
+          <a:lstStyle/>
+          <a:p>
+            <a:pPr algn="l">
+              <a:spcAft>
+                <a:spcPts val="200"/>
+              </a:spcAft>
+            </a:pPr>
+            <a:r>
+              <a:rPr sz="1700" b="1">
+                <a:solidFill>
+                  <a:srgbClr val="ED6D00"/>
+                </a:solidFill>
+                <a:latin typeface="Microsoft YaHei"/>
+                <a:ea typeface="Microsoft YaHei"/>
+                <a:cs typeface="Microsoft YaHei"/>
+              </a:rPr>
+              <a:t>许可边界</a:t>
+            </a:r>
+          </a:p>
+        </p:txBody>
+      </p:sp>
+      <p:sp>
+        <p:nvSpPr>
+          <p:cNvPr id="14" name="TextBox 13"/>
           <p:cNvSpPr txBox="1"/>
           <p:nvPr/>
         </p:nvSpPr>
         <p:spPr>
           <a:xfrm>
-            <a:off x="2286000" y="5029200"/>
-            <a:ext cx="9235440" cy="658368"/>
+            <a:off x="6400800" y="2103120"/>
+            <a:ext cx="5120640" cy="3200400"/>
           </a:xfrm>
           <a:prstGeom prst="rect">
             <a:avLst/>
@@ -14359,7 +18514,7 @@
           <a:noFill/>
         </p:spPr>
         <p:txBody>
-          <a:bodyPr wrap="square" anchor="ctr"/>
+          <a:bodyPr wrap="square" anchor="t"/>
           <a:lstStyle/>
           <a:p>
             <a:pPr algn="l">
@@ -14370,20 +18525,110 @@
             <a:r>
               <a:rPr sz="1400" b="0">
                 <a:solidFill>
-                  <a:srgbClr val="1A1A1A"/>
-                </a:solidFill>
-                <a:latin typeface="Microsoft YaHei"/>
-                <a:ea typeface="Microsoft YaHei"/>
-                <a:cs typeface="Microsoft YaHei"/>
-              </a:rPr>
-              <a:t>场景 Pack、整机、芯片、盘古、世界视频、把 TimesFM 当分类模型宣传。</a:t>
-            </a:r>
-          </a:p>
-        </p:txBody>
-      </p:sp>
-      <p:sp>
-        <p:nvSpPr>
-          <p:cNvPr id="25" name="Rectangle 24"/>
+                  <a:srgbClr val="555757"/>
+                </a:solidFill>
+                <a:latin typeface="Microsoft YaHei"/>
+                <a:ea typeface="Microsoft YaHei"/>
+                <a:cs typeface="Microsoft YaHei"/>
+              </a:rPr>
+              <a:t>TimesFM-3 权重：NC，商用必须自训底座。</a:t>
+            </a:r>
+          </a:p>
+          <a:p>
+            <a:pPr algn="l">
+              <a:spcAft>
+                <a:spcPts val="200"/>
+              </a:spcAft>
+            </a:pPr>
+            <a:r>
+              <a:rPr sz="1400" b="0">
+                <a:solidFill>
+                  <a:srgbClr val="555757"/>
+                </a:solidFill>
+                <a:latin typeface="Microsoft YaHei"/>
+                <a:ea typeface="Microsoft YaHei"/>
+                <a:cs typeface="Microsoft YaHei"/>
+              </a:rPr>
+              <a:t>TimesFM ≤ 2.5：Apache-2.0，可商用。</a:t>
+            </a:r>
+          </a:p>
+          <a:p>
+            <a:pPr algn="l">
+              <a:spcAft>
+                <a:spcPts val="200"/>
+              </a:spcAft>
+            </a:pPr>
+            <a:r>
+              <a:rPr sz="1400" b="0">
+                <a:solidFill>
+                  <a:srgbClr val="555757"/>
+                </a:solidFill>
+                <a:latin typeface="Microsoft YaHei"/>
+                <a:ea typeface="Microsoft YaHei"/>
+                <a:cs typeface="Microsoft YaHei"/>
+              </a:rPr>
+              <a:t>UniTS / MOMENT：MIT，可商用。</a:t>
+            </a:r>
+          </a:p>
+          <a:p>
+            <a:pPr algn="l">
+              <a:spcAft>
+                <a:spcPts val="200"/>
+              </a:spcAft>
+            </a:pPr>
+            <a:r>
+              <a:rPr sz="1400" b="0">
+                <a:solidFill>
+                  <a:srgbClr val="555757"/>
+                </a:solidFill>
+                <a:latin typeface="Microsoft YaHei"/>
+                <a:ea typeface="Microsoft YaHei"/>
+                <a:cs typeface="Microsoft YaHei"/>
+              </a:rPr>
+              <a:t>Moirai 权重 / Meta EMG：CC-BY-NC，仅研究。</a:t>
+            </a:r>
+          </a:p>
+          <a:p>
+            <a:pPr algn="l">
+              <a:spcAft>
+                <a:spcPts val="200"/>
+              </a:spcAft>
+            </a:pPr>
+            <a:r>
+              <a:rPr sz="1400" b="0">
+                <a:solidFill>
+                  <a:srgbClr val="555757"/>
+                </a:solidFill>
+                <a:latin typeface="Microsoft YaHei"/>
+                <a:ea typeface="Microsoft YaHei"/>
+                <a:cs typeface="Microsoft YaHei"/>
+              </a:rPr>
+              <a:t/>
+            </a:r>
+          </a:p>
+          <a:p>
+            <a:pPr algn="l">
+              <a:spcAft>
+                <a:spcPts val="200"/>
+              </a:spcAft>
+            </a:pPr>
+            <a:r>
+              <a:rPr sz="1400" b="0">
+                <a:solidFill>
+                  <a:srgbClr val="555757"/>
+                </a:solidFill>
+                <a:latin typeface="Microsoft YaHei"/>
+                <a:ea typeface="Microsoft YaHei"/>
+                <a:cs typeface="Microsoft YaHei"/>
+              </a:rPr>
+              <a:t>平台不绑定任何 NC 权重；接口层与许可层解耦。</a:t>
+            </a:r>
+          </a:p>
+        </p:txBody>
+      </p:sp>
+      <p:sp>
+        <p:nvSpPr>
+          <p:cNvPr id="15" name="Rectangle 14"/>
           <p:cNvSpPr/>
           <p:nvPr/>
         </p:nvSpPr>
@@ -14426,7 +18671,7 @@
       </p:sp>
       <p:sp>
         <p:nvSpPr>
-          <p:cNvPr id="26" name="TextBox 25"/>
+          <p:cNvPr id="16" name="TextBox 15"/>
           <p:cNvSpPr txBox="1"/>
           <p:nvPr/>
         </p:nvSpPr>
@@ -14458,14 +18703,14 @@
                 <a:ea typeface="Microsoft YaHei"/>
                 <a:cs typeface="Microsoft YaHei"/>
               </a:rPr>
-              <a:t>华为  ·  AI 物理感知平台  ·  决策    |    Security Level: Internal</a:t>
-            </a:r>
-          </a:p>
-        </p:txBody>
-      </p:sp>
-      <p:sp>
-        <p:nvSpPr>
-          <p:cNvPr id="27" name="TextBox 26"/>
+              <a:t>华为  ·  AI 物理感知平台  ·  评测与许可    |    Security Level: Internal</a:t>
+            </a:r>
+          </a:p>
+        </p:txBody>
+      </p:sp>
+      <p:sp>
+        <p:nvSpPr>
+          <p:cNvPr id="17" name="TextBox 16"/>
           <p:cNvSpPr txBox="1"/>
           <p:nvPr/>
         </p:nvSpPr>
@@ -14497,7 +18742,7 @@
                 <a:ea typeface="Microsoft YaHei"/>
                 <a:cs typeface="Microsoft YaHei"/>
               </a:rPr>
-              <a:t>8  /  8</a:t>
+              <a:t>9  /  10</a:t>
             </a:r>
           </a:p>
         </p:txBody>

--- a/AI物理感知平台-华为汇报.pptx
+++ b/AI物理感知平台-华为汇报.pptx
@@ -10868,7 +10868,7 @@
                 <a:ea typeface="Microsoft YaHei"/>
                 <a:cs typeface="Microsoft YaHei"/>
               </a:rPr>
-              <a:t>模型 / 出处</a:t>
+              <a:t>模型 / 作者单位</a:t>
             </a:r>
           </a:p>
         </p:txBody>
@@ -11084,8 +11084,8 @@
         </p:nvSpPr>
         <p:spPr>
           <a:xfrm>
-            <a:off x="566928" y="1719072"/>
-            <a:ext cx="2103120" cy="658368"/>
+            <a:off x="566928" y="1700784"/>
+            <a:ext cx="2103120" cy="694944"/>
           </a:xfrm>
           <a:prstGeom prst="rect">
             <a:avLst/>
@@ -11102,7 +11102,7 @@
               </a:spcAft>
             </a:pPr>
             <a:r>
-              <a:rPr sz="1200" b="1">
+              <a:rPr sz="1100" b="1">
                 <a:solidFill>
                   <a:srgbClr val="C7000B"/>
                 </a:solidFill>
@@ -11120,7 +11120,7 @@
               </a:spcAft>
             </a:pPr>
             <a:r>
-              <a:rPr sz="1200" b="1">
+              <a:rPr sz="1100" b="1">
                 <a:solidFill>
                   <a:srgbClr val="C7000B"/>
                 </a:solidFill>
@@ -11128,7 +11128,25 @@
                 <a:ea typeface="Microsoft YaHei"/>
                 <a:cs typeface="Microsoft YaHei"/>
               </a:rPr>
-              <a:t>Google 2026</a:t>
+              <a:t>Google Research</a:t>
+            </a:r>
+          </a:p>
+          <a:p>
+            <a:pPr algn="l">
+              <a:spcAft>
+                <a:spcPts val="200"/>
+              </a:spcAft>
+            </a:pPr>
+            <a:r>
+              <a:rPr sz="1100" b="1">
+                <a:solidFill>
+                  <a:srgbClr val="C7000B"/>
+                </a:solidFill>
+                <a:latin typeface="Microsoft YaHei"/>
+                <a:ea typeface="Microsoft YaHei"/>
+                <a:cs typeface="Microsoft YaHei"/>
+              </a:rPr>
+              <a:t>ICML'24 / 3.0 2026</a:t>
             </a:r>
           </a:p>
         </p:txBody>
@@ -11398,8 +11416,8 @@
         </p:nvSpPr>
         <p:spPr>
           <a:xfrm>
-            <a:off x="566928" y="2542032"/>
-            <a:ext cx="2103120" cy="658368"/>
+            <a:off x="566928" y="2523744"/>
+            <a:ext cx="2103120" cy="694944"/>
           </a:xfrm>
           <a:prstGeom prst="rect">
             <a:avLst/>
@@ -11416,7 +11434,7 @@
               </a:spcAft>
             </a:pPr>
             <a:r>
-              <a:rPr sz="1200" b="1">
+              <a:rPr sz="1100" b="1">
                 <a:solidFill>
                   <a:srgbClr val="C7000B"/>
                 </a:solidFill>
@@ -11434,7 +11452,7 @@
               </a:spcAft>
             </a:pPr>
             <a:r>
-              <a:rPr sz="1200" b="1">
+              <a:rPr sz="1100" b="1">
                 <a:solidFill>
                   <a:srgbClr val="C7000B"/>
                 </a:solidFill>
@@ -11442,7 +11460,25 @@
                 <a:ea typeface="Microsoft YaHei"/>
                 <a:cs typeface="Microsoft YaHei"/>
               </a:rPr>
-              <a:t>Amazon 2024</a:t>
+              <a:t>Amazon Science</a:t>
+            </a:r>
+          </a:p>
+          <a:p>
+            <a:pPr algn="l">
+              <a:spcAft>
+                <a:spcPts val="200"/>
+              </a:spcAft>
+            </a:pPr>
+            <a:r>
+              <a:rPr sz="1100" b="1">
+                <a:solidFill>
+                  <a:srgbClr val="C7000B"/>
+                </a:solidFill>
+                <a:latin typeface="Microsoft YaHei"/>
+                <a:ea typeface="Microsoft YaHei"/>
+                <a:cs typeface="Microsoft YaHei"/>
+              </a:rPr>
+              <a:t>ICML'24</a:t>
             </a:r>
           </a:p>
         </p:txBody>
@@ -11676,8 +11712,8 @@
         </p:nvSpPr>
         <p:spPr>
           <a:xfrm>
-            <a:off x="566928" y="3364992"/>
-            <a:ext cx="2103120" cy="658368"/>
+            <a:off x="566928" y="3346704"/>
+            <a:ext cx="2103120" cy="694944"/>
           </a:xfrm>
           <a:prstGeom prst="rect">
             <a:avLst/>
@@ -11694,7 +11730,7 @@
               </a:spcAft>
             </a:pPr>
             <a:r>
-              <a:rPr sz="1200" b="1">
+              <a:rPr sz="1100" b="1">
                 <a:solidFill>
                   <a:srgbClr val="C7000B"/>
                 </a:solidFill>
@@ -11712,7 +11748,7 @@
               </a:spcAft>
             </a:pPr>
             <a:r>
-              <a:rPr sz="1200" b="1">
+              <a:rPr sz="1100" b="1">
                 <a:solidFill>
                   <a:srgbClr val="C7000B"/>
                 </a:solidFill>
@@ -11720,7 +11756,25 @@
                 <a:ea typeface="Microsoft YaHei"/>
                 <a:cs typeface="Microsoft YaHei"/>
               </a:rPr>
-              <a:t>Salesforce 2024</a:t>
+              <a:t>Salesforce AI Research</a:t>
+            </a:r>
+          </a:p>
+          <a:p>
+            <a:pPr algn="l">
+              <a:spcAft>
+                <a:spcPts val="200"/>
+              </a:spcAft>
+            </a:pPr>
+            <a:r>
+              <a:rPr sz="1100" b="1">
+                <a:solidFill>
+                  <a:srgbClr val="C7000B"/>
+                </a:solidFill>
+                <a:latin typeface="Microsoft YaHei"/>
+                <a:ea typeface="Microsoft YaHei"/>
+                <a:cs typeface="Microsoft YaHei"/>
+              </a:rPr>
+              <a:t>ICML'24</a:t>
             </a:r>
           </a:p>
         </p:txBody>
@@ -11972,8 +12026,8 @@
         </p:nvSpPr>
         <p:spPr>
           <a:xfrm>
-            <a:off x="566928" y="4187952"/>
-            <a:ext cx="2103120" cy="658368"/>
+            <a:off x="566928" y="4169664"/>
+            <a:ext cx="2103120" cy="694944"/>
           </a:xfrm>
           <a:prstGeom prst="rect">
             <a:avLst/>
@@ -11990,7 +12044,7 @@
               </a:spcAft>
             </a:pPr>
             <a:r>
-              <a:rPr sz="1200" b="1">
+              <a:rPr sz="1100" b="1">
                 <a:solidFill>
                   <a:srgbClr val="C7000B"/>
                 </a:solidFill>
@@ -12008,7 +12062,7 @@
               </a:spcAft>
             </a:pPr>
             <a:r>
-              <a:rPr sz="1200" b="1">
+              <a:rPr sz="1100" b="1">
                 <a:solidFill>
                   <a:srgbClr val="C7000B"/>
                 </a:solidFill>
@@ -12016,7 +12070,25 @@
                 <a:ea typeface="Microsoft YaHei"/>
                 <a:cs typeface="Microsoft YaHei"/>
               </a:rPr>
-              <a:t>Harvard NeurIPS'24</a:t>
+              <a:t>Harvard + MIT Lincoln Lab</a:t>
+            </a:r>
+          </a:p>
+          <a:p>
+            <a:pPr algn="l">
+              <a:spcAft>
+                <a:spcPts val="200"/>
+              </a:spcAft>
+            </a:pPr>
+            <a:r>
+              <a:rPr sz="1100" b="1">
+                <a:solidFill>
+                  <a:srgbClr val="C7000B"/>
+                </a:solidFill>
+                <a:latin typeface="Microsoft YaHei"/>
+                <a:ea typeface="Microsoft YaHei"/>
+                <a:cs typeface="Microsoft YaHei"/>
+              </a:rPr>
+              <a:t>NeurIPS'24</a:t>
             </a:r>
           </a:p>
         </p:txBody>
@@ -12268,8 +12340,8 @@
         </p:nvSpPr>
         <p:spPr>
           <a:xfrm>
-            <a:off x="566928" y="5010912"/>
-            <a:ext cx="2103120" cy="658368"/>
+            <a:off x="566928" y="4992624"/>
+            <a:ext cx="2103120" cy="694944"/>
           </a:xfrm>
           <a:prstGeom prst="rect">
             <a:avLst/>
@@ -12286,7 +12358,7 @@
               </a:spcAft>
             </a:pPr>
             <a:r>
-              <a:rPr sz="1200" b="1">
+              <a:rPr sz="1100" b="1">
                 <a:solidFill>
                   <a:srgbClr val="C7000B"/>
                 </a:solidFill>
@@ -12304,7 +12376,7 @@
               </a:spcAft>
             </a:pPr>
             <a:r>
-              <a:rPr sz="1200" b="1">
+              <a:rPr sz="1100" b="1">
                 <a:solidFill>
                   <a:srgbClr val="C7000B"/>
                 </a:solidFill>
@@ -12312,7 +12384,25 @@
                 <a:ea typeface="Microsoft YaHei"/>
                 <a:cs typeface="Microsoft YaHei"/>
               </a:rPr>
-              <a:t>CMU ICML'24</a:t>
+              <a:t>CMU Auton Lab</a:t>
+            </a:r>
+          </a:p>
+          <a:p>
+            <a:pPr algn="l">
+              <a:spcAft>
+                <a:spcPts val="200"/>
+              </a:spcAft>
+            </a:pPr>
+            <a:r>
+              <a:rPr sz="1100" b="1">
+                <a:solidFill>
+                  <a:srgbClr val="C7000B"/>
+                </a:solidFill>
+                <a:latin typeface="Microsoft YaHei"/>
+                <a:ea typeface="Microsoft YaHei"/>
+                <a:cs typeface="Microsoft YaHei"/>
+              </a:rPr>
+              <a:t>ICML'24</a:t>
             </a:r>
           </a:p>
         </p:txBody>
@@ -13014,7 +13104,7 @@
                 <a:ea typeface="Microsoft YaHei"/>
                 <a:cs typeface="Microsoft YaHei"/>
               </a:rPr>
-              <a:t>模型 / 出处</a:t>
+              <a:t>模型 / 作者单位</a:t>
             </a:r>
           </a:p>
         </p:txBody>
@@ -13191,8 +13281,8 @@
         </p:nvSpPr>
         <p:spPr>
           <a:xfrm>
-            <a:off x="566928" y="1682496"/>
-            <a:ext cx="2194560" cy="548640"/>
+            <a:off x="566928" y="1673352"/>
+            <a:ext cx="2194560" cy="585216"/>
           </a:xfrm>
           <a:prstGeom prst="rect">
             <a:avLst/>
@@ -13209,7 +13299,7 @@
               </a:spcAft>
             </a:pPr>
             <a:r>
-              <a:rPr sz="1200" b="1">
+              <a:rPr sz="1000" b="1">
                 <a:solidFill>
                   <a:srgbClr val="C7000B"/>
                 </a:solidFill>
@@ -13227,7 +13317,25 @@
               </a:spcAft>
             </a:pPr>
             <a:r>
-              <a:rPr sz="1200" b="1">
+              <a:rPr sz="1000" b="1">
+                <a:solidFill>
+                  <a:srgbClr val="C7000B"/>
+                </a:solidFill>
+                <a:latin typeface="Microsoft YaHei"/>
+                <a:ea typeface="Microsoft YaHei"/>
+                <a:cs typeface="Microsoft YaHei"/>
+              </a:rPr>
+              <a:t>南洋理工+阿里巴巴</a:t>
+            </a:r>
+          </a:p>
+          <a:p>
+            <a:pPr algn="l">
+              <a:spcAft>
+                <a:spcPts val="200"/>
+              </a:spcAft>
+            </a:pPr>
+            <a:r>
+              <a:rPr sz="1000" b="1">
                 <a:solidFill>
                   <a:srgbClr val="C7000B"/>
                 </a:solidFill>
@@ -13430,8 +13538,8 @@
         </p:nvSpPr>
         <p:spPr>
           <a:xfrm>
-            <a:off x="566928" y="2368296"/>
-            <a:ext cx="2194560" cy="548640"/>
+            <a:off x="566928" y="2359152"/>
+            <a:ext cx="2194560" cy="585216"/>
           </a:xfrm>
           <a:prstGeom prst="rect">
             <a:avLst/>
@@ -13448,7 +13556,7 @@
               </a:spcAft>
             </a:pPr>
             <a:r>
-              <a:rPr sz="1200" b="1">
+              <a:rPr sz="1000" b="1">
                 <a:solidFill>
                   <a:srgbClr val="C7000B"/>
                 </a:solidFill>
@@ -13466,7 +13574,25 @@
               </a:spcAft>
             </a:pPr>
             <a:r>
-              <a:rPr sz="1200" b="1">
+              <a:rPr sz="1000" b="1">
+                <a:solidFill>
+                  <a:srgbClr val="C7000B"/>
+                </a:solidFill>
+                <a:latin typeface="Microsoft YaHei"/>
+                <a:ea typeface="Microsoft YaHei"/>
+                <a:cs typeface="Microsoft YaHei"/>
+              </a:rPr>
+              <a:t>港科大+阿里巴巴</a:t>
+            </a:r>
+          </a:p>
+          <a:p>
+            <a:pPr algn="l">
+              <a:spcAft>
+                <a:spcPts val="200"/>
+              </a:spcAft>
+            </a:pPr>
+            <a:r>
+              <a:rPr sz="1000" b="1">
                 <a:solidFill>
                   <a:srgbClr val="C7000B"/>
                 </a:solidFill>
@@ -13570,7 +13696,7 @@
                 <a:ea typeface="Microsoft YaHei"/>
                 <a:cs typeface="Microsoft YaHei"/>
               </a:rPr>
-              <a:t>真实设备大规模泛化；端侧 HAR SOTA</a:t>
+              <a:t>真实设备大规模泛化；端侧 HAR SOTA；外卖配送全国部署</a:t>
             </a:r>
           </a:p>
         </p:txBody>
@@ -13669,8 +13795,8 @@
         </p:nvSpPr>
         <p:spPr>
           <a:xfrm>
-            <a:off x="566928" y="3054096"/>
-            <a:ext cx="2194560" cy="548640"/>
+            <a:off x="566928" y="3044952"/>
+            <a:ext cx="2194560" cy="585216"/>
           </a:xfrm>
           <a:prstGeom prst="rect">
             <a:avLst/>
@@ -13687,7 +13813,7 @@
               </a:spcAft>
             </a:pPr>
             <a:r>
-              <a:rPr sz="1200" b="1">
+              <a:rPr sz="1000" b="1">
                 <a:solidFill>
                   <a:srgbClr val="C7000B"/>
                 </a:solidFill>
@@ -13705,7 +13831,25 @@
               </a:spcAft>
             </a:pPr>
             <a:r>
-              <a:rPr sz="1200" b="1">
+              <a:rPr sz="1000" b="1">
+                <a:solidFill>
+                  <a:srgbClr val="C7000B"/>
+                </a:solidFill>
+                <a:latin typeface="Microsoft YaHei"/>
+                <a:ea typeface="Microsoft YaHei"/>
+                <a:cs typeface="Microsoft YaHei"/>
+              </a:rPr>
+              <a:t>CMU AirLab</a:t>
+            </a:r>
+          </a:p>
+          <a:p>
+            <a:pPr algn="l">
+              <a:spcAft>
+                <a:spcPts val="200"/>
+              </a:spcAft>
+            </a:pPr>
+            <a:r>
+              <a:rPr sz="1000" b="1">
                 <a:solidFill>
                   <a:srgbClr val="C7000B"/>
                 </a:solidFill>
@@ -13908,8 +14052,8 @@
         </p:nvSpPr>
         <p:spPr>
           <a:xfrm>
-            <a:off x="566928" y="3739896"/>
-            <a:ext cx="2194560" cy="548640"/>
+            <a:off x="566928" y="3730752"/>
+            <a:ext cx="2194560" cy="585216"/>
           </a:xfrm>
           <a:prstGeom prst="rect">
             <a:avLst/>
@@ -13926,7 +14070,7 @@
               </a:spcAft>
             </a:pPr>
             <a:r>
-              <a:rPr sz="1200" b="1">
+              <a:rPr sz="1000" b="1">
                 <a:solidFill>
                   <a:srgbClr val="C7000B"/>
                 </a:solidFill>
@@ -13944,7 +14088,7 @@
               </a:spcAft>
             </a:pPr>
             <a:r>
-              <a:rPr sz="1200" b="1">
+              <a:rPr sz="1000" b="1">
                 <a:solidFill>
                   <a:srgbClr val="C7000B"/>
                 </a:solidFill>
@@ -13952,7 +14096,25 @@
                 <a:ea typeface="Microsoft YaHei"/>
                 <a:cs typeface="Microsoft YaHei"/>
               </a:rPr>
-              <a:t>ICASSP'25</a:t>
+              <a:t>Nokia Bell Labs</a:t>
+            </a:r>
+          </a:p>
+          <a:p>
+            <a:pPr algn="l">
+              <a:spcAft>
+                <a:spcPts val="200"/>
+              </a:spcAft>
+            </a:pPr>
+            <a:r>
+              <a:rPr sz="1000" b="1">
+                <a:solidFill>
+                  <a:srgbClr val="C7000B"/>
+                </a:solidFill>
+                <a:latin typeface="Microsoft YaHei"/>
+                <a:ea typeface="Microsoft YaHei"/>
+                <a:cs typeface="Microsoft YaHei"/>
+              </a:rPr>
+              <a:t>+华盛顿大学 ICASSP'25</a:t>
             </a:r>
           </a:p>
         </p:txBody>
@@ -14147,8 +14309,8 @@
         </p:nvSpPr>
         <p:spPr>
           <a:xfrm>
-            <a:off x="566928" y="4425696"/>
-            <a:ext cx="2194560" cy="548640"/>
+            <a:off x="566928" y="4416552"/>
+            <a:ext cx="2194560" cy="585216"/>
           </a:xfrm>
           <a:prstGeom prst="rect">
             <a:avLst/>
@@ -14165,7 +14327,7 @@
               </a:spcAft>
             </a:pPr>
             <a:r>
-              <a:rPr sz="1200" b="1">
+              <a:rPr sz="1000" b="1">
                 <a:solidFill>
                   <a:srgbClr val="C7000B"/>
                 </a:solidFill>
@@ -14183,7 +14345,7 @@
               </a:spcAft>
             </a:pPr>
             <a:r>
-              <a:rPr sz="1200" b="1">
+              <a:rPr sz="1000" b="1">
                 <a:solidFill>
                   <a:srgbClr val="C7000B"/>
                 </a:solidFill>
@@ -14191,7 +14353,25 @@
                 <a:ea typeface="Microsoft YaHei"/>
                 <a:cs typeface="Microsoft YaHei"/>
               </a:rPr>
-              <a:t>SenSys'25</a:t>
+              <a:t>微软研究院+威斯康星</a:t>
+            </a:r>
+          </a:p>
+          <a:p>
+            <a:pPr algn="l">
+              <a:spcAft>
+                <a:spcPts val="200"/>
+              </a:spcAft>
+            </a:pPr>
+            <a:r>
+              <a:rPr sz="1000" b="1">
+                <a:solidFill>
+                  <a:srgbClr val="C7000B"/>
+                </a:solidFill>
+                <a:latin typeface="Microsoft YaHei"/>
+                <a:ea typeface="Microsoft YaHei"/>
+                <a:cs typeface="Microsoft YaHei"/>
+              </a:rPr>
+              <a:t>麦迪逊+港科大 SenSys'25</a:t>
             </a:r>
           </a:p>
         </p:txBody>
@@ -14386,8 +14566,8 @@
         </p:nvSpPr>
         <p:spPr>
           <a:xfrm>
-            <a:off x="566928" y="5111496"/>
-            <a:ext cx="2194560" cy="548640"/>
+            <a:off x="566928" y="5102352"/>
+            <a:ext cx="2194560" cy="585216"/>
           </a:xfrm>
           <a:prstGeom prst="rect">
             <a:avLst/>
@@ -14404,7 +14584,7 @@
               </a:spcAft>
             </a:pPr>
             <a:r>
-              <a:rPr sz="1200" b="1">
+              <a:rPr sz="1000" b="1">
                 <a:solidFill>
                   <a:srgbClr val="C7000B"/>
                 </a:solidFill>
@@ -14422,7 +14602,25 @@
               </a:spcAft>
             </a:pPr>
             <a:r>
-              <a:rPr sz="1200" b="1">
+              <a:rPr sz="1000" b="1">
+                <a:solidFill>
+                  <a:srgbClr val="C7000B"/>
+                </a:solidFill>
+                <a:latin typeface="Microsoft YaHei"/>
+                <a:ea typeface="Microsoft YaHei"/>
+                <a:cs typeface="Microsoft YaHei"/>
+              </a:rPr>
+              <a:t>Meta</a:t>
+            </a:r>
+          </a:p>
+          <a:p>
+            <a:pPr algn="l">
+              <a:spcAft>
+                <a:spcPts val="200"/>
+              </a:spcAft>
+            </a:pPr>
+            <a:r>
+              <a:rPr sz="1000" b="1">
                 <a:solidFill>
                   <a:srgbClr val="C7000B"/>
                 </a:solidFill>

--- a/AI物理感知平台-华为汇报.pptx
+++ b/AI物理感知平台-华为汇报.pptx
@@ -6768,7 +6768,7 @@
                 <a:ea typeface="Microsoft YaHei"/>
                 <a:cs typeface="Microsoft YaHei"/>
               </a:rPr>
-              <a:t>Ingest 契约 → 共享表征 → predict() / classify()，不做场景应用</a:t>
+              <a:t>接入规格 → 共享表征 → 预测 / 分类双接口，不做场景应用</a:t>
             </a:r>
           </a:p>
         </p:txBody>
@@ -7208,7 +7208,7 @@
                 <a:ea typeface="Microsoft YaHei"/>
                 <a:cs typeface="Microsoft YaHei"/>
               </a:rPr>
-              <a:t>Ingest schema + predict + classify</a:t>
+              <a:t>接入规格 + 预测 + 分类</a:t>
             </a:r>
           </a:p>
         </p:txBody>
@@ -7882,7 +7882,7 @@
                 <a:ea typeface="Microsoft YaHei"/>
                 <a:cs typeface="Microsoft YaHei"/>
               </a:rPr>
-              <a:t>predict：MAE、q10–q90 覆盖率、stitching 长 horizon 稳定性。</a:t>
+              <a:t>预测：MAE、q10–q90 覆盖率、长时域拼接稳定性。</a:t>
             </a:r>
           </a:p>
           <a:p>
@@ -7900,7 +7900,7 @@
                 <a:ea typeface="Microsoft YaHei"/>
                 <a:cs typeface="Microsoft YaHei"/>
               </a:rPr>
-              <a:t>classify：macro-F1、confusion matrix、注册类别一致性。</a:t>
+              <a:t>分类：宏 F1、混淆矩阵、注册类别一致性。</a:t>
             </a:r>
           </a:p>
           <a:p>
@@ -8768,7 +8768,7 @@
                 <a:ea typeface="Microsoft YaHei"/>
                 <a:cs typeface="Microsoft YaHei"/>
               </a:rPr>
-              <a:t>Ingest schema + predict() + classify()；版本化，向下兼容。</a:t>
+              <a:t>接入规格 + 预测接口 + 分类接口；版本化，向下兼容。</a:t>
             </a:r>
           </a:p>
         </p:txBody>
@@ -9018,7 +9018,7 @@
                 <a:ea typeface="Microsoft YaHei"/>
                 <a:cs typeface="Microsoft YaHei"/>
               </a:rPr>
-              <a:t>UniTS 任务 token / MOMENT linear probe；场景方注册类别，平台微调。</a:t>
+              <a:t>UniTS 任务 token / MOMENT 线性探针；场景方注册类别，平台微调。</a:t>
             </a:r>
           </a:p>
         </p:txBody>
@@ -12516,7 +12516,7 @@
                 <a:ea typeface="Microsoft YaHei"/>
                 <a:cs typeface="Microsoft YaHei"/>
               </a:rPr>
-              <a:t>linear probe 即用</a:t>
+              <a:t>线性探针即用</a:t>
             </a:r>
           </a:p>
         </p:txBody>
@@ -15252,7 +15252,7 @@
                 <a:ea typeface="Microsoft YaHei"/>
                 <a:cs typeface="Microsoft YaHei"/>
               </a:rPr>
-              <a:t>平台不做场景：只把模型能力收敛成 Ingest → 表征 → predict / classify。</a:t>
+              <a:t>平台不做场景：只把模型能力收敛成 接入 → 表征 → 预测 / 分类。</a:t>
             </a:r>
           </a:p>
         </p:txBody>
@@ -15456,7 +15456,7 @@
                 <a:ea typeface="Microsoft YaHei"/>
                 <a:cs typeface="Microsoft YaHei"/>
               </a:rPr>
-              <a:t>Ingest 契约统一时钟、量纲、质量位——对齐在进模型前完成。</a:t>
+              <a:t>接入规格统一时钟、量纲、质量位——对齐在进模型前完成。</a:t>
             </a:r>
           </a:p>
         </p:txBody>
@@ -15864,7 +15864,7 @@
                 <a:ea typeface="Microsoft YaHei"/>
                 <a:cs typeface="Microsoft YaHei"/>
               </a:rPr>
-              <a:t>统一 predict / classify 接口，新场景先零样本启动，再按需微调。</a:t>
+              <a:t>统一预测 / 分类接口，新场景先零样本启动，再按需微调。</a:t>
             </a:r>
           </a:p>
         </p:txBody>
@@ -15950,7 +15950,7 @@
                 <a:ea typeface="Microsoft YaHei"/>
                 <a:cs typeface="Microsoft YaHei"/>
               </a:rPr>
-              <a:t>平台边界：交付 Ingest 校验、共享表征、predict() / classify()、评测工具链；不交付场景 Pack、整机、芯片。</a:t>
+              <a:t>平台边界：交付接入校验、共享表征、预测 / 分类双接口、评测工具链；不交付场景 Pack、整机、芯片。</a:t>
             </a:r>
           </a:p>
         </p:txBody>
@@ -16210,7 +16210,7 @@
                 <a:ea typeface="Microsoft YaHei"/>
                 <a:cs typeface="Microsoft YaHei"/>
               </a:rPr>
-              <a:t>Ingest 契约 + predict() + classify()</a:t>
+              <a:t>接入规格 + 预测接口 + 分类接口</a:t>
             </a:r>
           </a:p>
         </p:txBody>
@@ -16292,7 +16292,7 @@
                 <a:ea typeface="Microsoft YaHei"/>
                 <a:cs typeface="Microsoft YaHei"/>
               </a:rPr>
-              <a:t>所有输入先过 Ingest；预测与分类共用同一批 patch token。</a:t>
+              <a:t>所有输入先过接入校验；预测与分类共用同一批 patch token。</a:t>
             </a:r>
           </a:p>
         </p:txBody>
@@ -16421,7 +16421,7 @@
                 <a:ea typeface="Microsoft YaHei"/>
                 <a:cs typeface="Microsoft YaHei"/>
               </a:rPr>
-              <a:t>Ingest(schema) → 校验 → patch token</a:t>
+              <a:t>接入（数据规格） → 校验 → patch token</a:t>
             </a:r>
           </a:p>
         </p:txBody>
@@ -16460,7 +16460,7 @@
                 <a:ea typeface="Microsoft YaHei"/>
                 <a:cs typeface="Microsoft YaHei"/>
               </a:rPr>
-              <a:t>schema = {series_id, timestamp, value, unit, quality_flag, variate_role: target/past-only/past-future}</a:t>
+              <a:t>数据规格 = {序列 id, 时间戳, 数值, 量纲单位, 质量位, 变元角色: 目标 / 仅历史 / 历史+未来}</a:t>
             </a:r>
           </a:p>
           <a:p>
@@ -16478,7 +16478,7 @@
                 <a:ea typeface="Microsoft YaHei"/>
                 <a:cs typeface="Microsoft YaHei"/>
               </a:rPr>
-              <a:t>校验：时钟对齐、量纲归一、质量位过滤、变元上限 32、context ≤ 15,360。不合格直接拒收。</a:t>
+              <a:t>校验：时钟对齐、量纲归一、质量位过滤、变元上限 32、历史段 ≤ 15,360。不合格直接拒收。</a:t>
             </a:r>
           </a:p>
         </p:txBody>
@@ -16607,7 +16607,7 @@
                 <a:ea typeface="Microsoft YaHei"/>
                 <a:cs typeface="Microsoft YaHei"/>
               </a:rPr>
-              <a:t>predict(context, horizon) → {quantiles, point}</a:t>
+              <a:t>预测（历史段, 预测时长） → {分位数, 点预测}</a:t>
             </a:r>
           </a:p>
         </p:txBody>
@@ -16646,7 +16646,7 @@
                 <a:ea typeface="Microsoft YaHei"/>
                 <a:cs typeface="Microsoft YaHei"/>
               </a:rPr>
-              <a:t>quantiles: (V, H, 9) 十分位轨迹</a:t>
+              <a:t>分位数：(V, H, 9) 十分位轨迹</a:t>
             </a:r>
           </a:p>
           <a:p>
@@ -16664,7 +16664,7 @@
                 <a:ea typeface="Microsoft YaHei"/>
                 <a:cs typeface="Microsoft YaHei"/>
               </a:rPr>
-              <a:t>point: (V, H) 中位数 q50</a:t>
+              <a:t>点预测：(V, H) 中位数 q50</a:t>
             </a:r>
           </a:p>
           <a:p>
@@ -16682,7 +16682,7 @@
                 <a:ea typeface="Microsoft YaHei"/>
                 <a:cs typeface="Microsoft YaHei"/>
               </a:rPr>
-              <a:t>一次前向，CPM 非自回归；可 stitching 任意 H。</a:t>
+              <a:t>一次前向，CPM 非自回归；可拼接任意预测长度。</a:t>
             </a:r>
           </a:p>
         </p:txBody>
@@ -16811,7 +16811,7 @@
                 <a:ea typeface="Microsoft YaHei"/>
                 <a:cs typeface="Microsoft YaHei"/>
               </a:rPr>
-              <a:t>classify(window) → {label, confidence}</a:t>
+              <a:t>分类（时间窗） → {类别, 置信度}</a:t>
             </a:r>
           </a:p>
         </p:txBody>
@@ -16850,7 +16850,7 @@
                 <a:ea typeface="Microsoft YaHei"/>
                 <a:cs typeface="Microsoft YaHei"/>
               </a:rPr>
-              <a:t>label: 场景方注册的类别 id</a:t>
+              <a:t>类别：场景方注册的类别 id</a:t>
             </a:r>
           </a:p>
           <a:p>
@@ -16868,7 +16868,7 @@
                 <a:ea typeface="Microsoft YaHei"/>
                 <a:cs typeface="Microsoft YaHei"/>
               </a:rPr>
-              <a:t>confidence: softmax 概率</a:t>
+              <a:t>置信度：softmax 概率</a:t>
             </a:r>
           </a:p>
           <a:p>
@@ -16886,7 +16886,7 @@
                 <a:ea typeface="Microsoft YaHei"/>
                 <a:cs typeface="Microsoft YaHei"/>
               </a:rPr>
-              <a:t>基于共享表征 + 任务 token / linear probe。</a:t>
+              <a:t>基于共享表征 + 任务 token / 线性探针。</a:t>
             </a:r>
           </a:p>
         </p:txBody>
@@ -17353,7 +17353,7 @@
                 <a:ea typeface="Microsoft YaHei"/>
                 <a:cs typeface="Microsoft YaHei"/>
               </a:rPr>
-              <a:t>context ≤ 15,360；变元 ≤ 32；target / past-only / past-future。</a:t>
+              <a:t>历史段 ≤ 15,360；变元 ≤ 32；目标 / 仅历史 / 历史+未来 三类变元。</a:t>
             </a:r>
           </a:p>
         </p:txBody>
@@ -17728,7 +17728,7 @@
                 <a:ea typeface="Microsoft YaHei"/>
                 <a:cs typeface="Microsoft YaHei"/>
               </a:rPr>
-              <a:t>Linear 1280→64×9；CPM mask horizon；逆 RevIN；stitching 任意 H。</a:t>
+              <a:t>Linear 1280→64×9；CPM 掩码预测段；逆 RevIN；拼接任意预测长度。</a:t>
             </a:r>
           </a:p>
         </p:txBody>
@@ -17978,7 +17978,7 @@
                 <a:ea typeface="Microsoft YaHei"/>
                 <a:cs typeface="Microsoft YaHei"/>
               </a:rPr>
-              <a:t>底座换 TimesFM-4 / 自研时，predict() 签名与返回结构不变。</a:t>
+              <a:t>底座换 TimesFM-4 / 自研时，预测接口签名与返回结构不变。</a:t>
             </a:r>
           </a:p>
         </p:txBody>
@@ -18238,7 +18238,7 @@
                 <a:ea typeface="Microsoft YaHei"/>
                 <a:cs typeface="Microsoft YaHei"/>
               </a:rPr>
-              <a:t>共享表征 + 任务 token / linear probe</a:t>
+              <a:t>共享表征 + 任务 token / 线性探针</a:t>
             </a:r>
           </a:p>
         </p:txBody>
@@ -18764,7 +18764,7 @@
                 <a:ea typeface="Microsoft YaHei"/>
                 <a:cs typeface="Microsoft YaHei"/>
               </a:rPr>
-              <a:t>MOMENT：掩码预训练编码器 + linear probe / 分类头。</a:t>
+              <a:t>MOMENT：掩码预训练编码器 + 线性探针 / 分类头。</a:t>
             </a:r>
           </a:p>
           <a:p>
@@ -18818,7 +18818,7 @@
                 <a:ea typeface="Microsoft YaHei"/>
                 <a:cs typeface="Microsoft YaHei"/>
               </a:rPr>
-              <a:t>场景方注册类别 → 平台微调 classify() → 返回 label + confidence。</a:t>
+              <a:t>场景方注册类别 → 平台微调分类接口 → 返回类别 + 置信度。</a:t>
             </a:r>
           </a:p>
         </p:txBody>
@@ -19346,7 +19346,7 @@
                 <a:ea typeface="Microsoft YaHei"/>
                 <a:cs typeface="Microsoft YaHei"/>
               </a:rPr>
-              <a:t>predict 零样本（TimesFM-3）；</a:t>
+              <a:t>预测零样本（TimesFM-3）；</a:t>
             </a:r>
           </a:p>
           <a:p>
@@ -19364,7 +19364,7 @@
                 <a:ea typeface="Microsoft YaHei"/>
                 <a:cs typeface="Microsoft YaHei"/>
               </a:rPr>
-              <a:t>classify 规则 / linear probe（UniTS / MOMENT）。</a:t>
+              <a:t>分类走规则 / 线性探针（UniTS / MOMENT）。</a:t>
             </a:r>
           </a:p>
           <a:p>
@@ -19568,7 +19568,7 @@
                 <a:ea typeface="Microsoft YaHei"/>
                 <a:cs typeface="Microsoft YaHei"/>
               </a:rPr>
-              <a:t>LoRA / prompt tuning：TartanIMU 仅 1.1M 参数；</a:t>
+              <a:t>LoRA / 提示微调：TartanIMU 仅 1.1M 参数；</a:t>
             </a:r>
           </a:p>
           <a:p>
@@ -19604,7 +19604,7 @@
                 <a:ea typeface="Microsoft YaHei"/>
                 <a:cs typeface="Microsoft YaHei"/>
               </a:rPr>
-              <a:t>回答：换设备换人还行不行 → 画像进 schema。</a:t>
+              <a:t>回答：换设备换人还行不行 → 画像进数据规格。</a:t>
             </a:r>
           </a:p>
         </p:txBody>
@@ -19912,7 +19912,7 @@
                 <a:ea typeface="Microsoft YaHei"/>
                 <a:cs typeface="Microsoft YaHei"/>
               </a:rPr>
-              <a:t>演进原则：接口（Ingest / predict / classify）向下兼容；底座、权重、头可独立替换。</a:t>
+              <a:t>演进原则：接口（接入 / 预测 / 分类）向下兼容；底座、权重、头可独立替换。</a:t>
             </a:r>
           </a:p>
         </p:txBody>

--- a/AI物理感知平台-华为汇报.pptx
+++ b/AI物理感知平台-华为汇报.pptx
@@ -21,10 +21,6 @@
     <p:sldId id="260" r:id="rId5"/>
     <p:sldId id="261" r:id="rId16"/>
     <p:sldId id="262" r:id="rId17"/>
-    <p:sldId id="263" r:id="rId18"/>
-    <p:sldId id="264" r:id="rId19"/>
-    <p:sldId id="265" r:id="rId20"/>
-    <p:sldId id="266" r:id="rId21"/>
   </p:sldIdLst>
   <p:sldSz cx="12196763" cy="6858000"/>
   <p:notesSz cx="6858000" cy="9144000"/>
@@ -6768,7 +6764,7 @@
                 <a:ea typeface="Microsoft YaHei"/>
                 <a:cs typeface="Microsoft YaHei"/>
               </a:rPr>
-              <a:t>接入规格 → 共享表征 → 预测 / 分类双接口，不做场景应用</a:t>
+              <a:t>接入规格 → 共享特征 → 预测 / 分类双接口，不做场景应用</a:t>
             </a:r>
           </a:p>
         </p:txBody>
@@ -6872,7 +6868,7 @@
                 <a:ea typeface="Microsoft YaHei"/>
                 <a:cs typeface="Microsoft YaHei"/>
               </a:rPr>
-              <a:t>平台对策：统一 patch token 表征 + 统一推理接口；底座可换，接口不变。</a:t>
+              <a:t>平台对策：统一 patch token 特征 + 统一推理接口；底座可换，接口不变。</a:t>
             </a:r>
           </a:p>
         </p:txBody>
@@ -7415,7 +7411,7 @@
                 <a:ea typeface="Microsoft YaHei"/>
                 <a:cs typeface="Microsoft YaHei"/>
               </a:rPr>
-              <a:t>来源：TimesFM / UniTS / MOMENT / LIMU-BERT-X 公开资料  ·  11 页平台版</a:t>
+              <a:t>来源：TimesFM / UniTS / MOMENT / LIMU-BERT-X 公开资料  ·  7 页平台版</a:t>
             </a:r>
           </a:p>
         </p:txBody>
@@ -7454,7 +7450,7 @@
                 <a:ea typeface="Microsoft YaHei"/>
                 <a:cs typeface="Microsoft YaHei"/>
               </a:rPr>
-              <a:t>1  /  11</a:t>
+              <a:t>1  /  7</a:t>
             </a:r>
           </a:p>
         </p:txBody>
@@ -7494,2027 +7490,6 @@
                 <a:cs typeface="Microsoft YaHei"/>
               </a:rPr>
               <a:t>Security Level: Internal</a:t>
-            </a:r>
-          </a:p>
-        </p:txBody>
-      </p:sp>
-    </p:spTree>
-  </p:cSld>
-  <p:clrMapOvr>
-    <a:masterClrMapping/>
-  </p:clrMapOvr>
-</p:sld>
-</file>
-
-<file path=ppt/slides/slide10.xml><?xml version="1.0" encoding="utf-8"?>
-<p:sld xmlns:a="http://schemas.openxmlformats.org/drawingml/2006/main" xmlns:p="http://schemas.openxmlformats.org/presentationml/2006/main" xmlns:r="http://schemas.openxmlformats.org/officeDocument/2006/relationships">
-  <p:cSld>
-    <p:spTree>
-      <p:nvGrpSpPr>
-        <p:cNvPr id="1" name=""/>
-        <p:cNvGrpSpPr/>
-        <p:nvPr/>
-      </p:nvGrpSpPr>
-      <p:grpSpPr/>
-      <p:sp>
-        <p:nvSpPr>
-          <p:cNvPr id="2" name="Rectangle 1"/>
-          <p:cNvSpPr/>
-          <p:nvPr/>
-        </p:nvSpPr>
-        <p:spPr>
-          <a:xfrm>
-            <a:off x="0" y="0"/>
-            <a:ext cx="12196763" cy="6858000"/>
-          </a:xfrm>
-          <a:prstGeom prst="rect">
-            <a:avLst/>
-          </a:prstGeom>
-          <a:solidFill>
-            <a:srgbClr val="FFFFFF"/>
-          </a:solidFill>
-          <a:ln>
-            <a:noFill/>
-          </a:ln>
-        </p:spPr>
-        <p:style>
-          <a:lnRef idx="1">
-            <a:schemeClr val="accent1"/>
-          </a:lnRef>
-          <a:fillRef idx="3">
-            <a:schemeClr val="accent1"/>
-          </a:fillRef>
-          <a:effectRef idx="2">
-            <a:schemeClr val="accent1"/>
-          </a:effectRef>
-          <a:fontRef idx="minor">
-            <a:schemeClr val="lt1"/>
-          </a:fontRef>
-        </p:style>
-        <p:txBody>
-          <a:bodyPr rtlCol="0" anchor="ctr"/>
-          <a:lstStyle/>
-          <a:p>
-            <a:pPr algn="ctr"/>
-          </a:p>
-        </p:txBody>
-      </p:sp>
-      <p:sp>
-        <p:nvSpPr>
-          <p:cNvPr id="3" name="TextBox 2"/>
-          <p:cNvSpPr txBox="1"/>
-          <p:nvPr/>
-        </p:nvSpPr>
-        <p:spPr>
-          <a:xfrm>
-            <a:off x="457200" y="201168"/>
-            <a:ext cx="11155680" cy="256032"/>
-          </a:xfrm>
-          <a:prstGeom prst="rect">
-            <a:avLst/>
-          </a:prstGeom>
-          <a:noFill/>
-        </p:spPr>
-        <p:txBody>
-          <a:bodyPr wrap="square" anchor="t"/>
-          <a:lstStyle/>
-          <a:p>
-            <a:pPr algn="l">
-              <a:spcAft>
-                <a:spcPts val="200"/>
-              </a:spcAft>
-            </a:pPr>
-            <a:r>
-              <a:rPr sz="1100" b="1">
-                <a:solidFill>
-                  <a:srgbClr val="C7000B"/>
-                </a:solidFill>
-                <a:latin typeface="Microsoft YaHei"/>
-                <a:ea typeface="Microsoft YaHei"/>
-                <a:cs typeface="Microsoft YaHei"/>
-              </a:rPr>
-              <a:t>9  评测与许可</a:t>
-            </a:r>
-          </a:p>
-        </p:txBody>
-      </p:sp>
-      <p:sp>
-        <p:nvSpPr>
-          <p:cNvPr id="4" name="TextBox 3"/>
-          <p:cNvSpPr txBox="1"/>
-          <p:nvPr/>
-        </p:nvSpPr>
-        <p:spPr>
-          <a:xfrm>
-            <a:off x="457200" y="438912"/>
-            <a:ext cx="11155680" cy="438912"/>
-          </a:xfrm>
-          <a:prstGeom prst="rect">
-            <a:avLst/>
-          </a:prstGeom>
-          <a:noFill/>
-        </p:spPr>
-        <p:txBody>
-          <a:bodyPr wrap="square" anchor="t"/>
-          <a:lstStyle/>
-          <a:p>
-            <a:pPr algn="l">
-              <a:spcAft>
-                <a:spcPts val="200"/>
-              </a:spcAft>
-            </a:pPr>
-            <a:r>
-              <a:rPr sz="2400" b="1">
-                <a:solidFill>
-                  <a:srgbClr val="1A1A1A"/>
-                </a:solidFill>
-                <a:latin typeface="Microsoft YaHei"/>
-                <a:ea typeface="Microsoft YaHei"/>
-                <a:cs typeface="Microsoft YaHei"/>
-              </a:rPr>
-              <a:t>同一接口，同一评测，不同底座可对比</a:t>
-            </a:r>
-          </a:p>
-        </p:txBody>
-      </p:sp>
-      <p:sp>
-        <p:nvSpPr>
-          <p:cNvPr id="5" name="Rectangle 4"/>
-          <p:cNvSpPr/>
-          <p:nvPr/>
-        </p:nvSpPr>
-        <p:spPr>
-          <a:xfrm>
-            <a:off x="457200" y="914400"/>
-            <a:ext cx="1097280" cy="45720"/>
-          </a:xfrm>
-          <a:prstGeom prst="rect">
-            <a:avLst/>
-          </a:prstGeom>
-          <a:solidFill>
-            <a:srgbClr val="C7000B"/>
-          </a:solidFill>
-          <a:ln>
-            <a:noFill/>
-          </a:ln>
-        </p:spPr>
-        <p:style>
-          <a:lnRef idx="1">
-            <a:schemeClr val="accent1"/>
-          </a:lnRef>
-          <a:fillRef idx="3">
-            <a:schemeClr val="accent1"/>
-          </a:fillRef>
-          <a:effectRef idx="2">
-            <a:schemeClr val="accent1"/>
-          </a:effectRef>
-          <a:fontRef idx="minor">
-            <a:schemeClr val="lt1"/>
-          </a:fontRef>
-        </p:style>
-        <p:txBody>
-          <a:bodyPr rtlCol="0" anchor="ctr"/>
-          <a:lstStyle/>
-          <a:p>
-            <a:pPr algn="ctr"/>
-          </a:p>
-        </p:txBody>
-      </p:sp>
-      <p:sp>
-        <p:nvSpPr>
-          <p:cNvPr id="6" name="TextBox 5"/>
-          <p:cNvSpPr txBox="1"/>
-          <p:nvPr/>
-        </p:nvSpPr>
-        <p:spPr>
-          <a:xfrm>
-            <a:off x="457200" y="1024128"/>
-            <a:ext cx="11155680" cy="292608"/>
-          </a:xfrm>
-          <a:prstGeom prst="rect">
-            <a:avLst/>
-          </a:prstGeom>
-          <a:noFill/>
-        </p:spPr>
-        <p:txBody>
-          <a:bodyPr wrap="square" anchor="t"/>
-          <a:lstStyle/>
-          <a:p>
-            <a:pPr algn="l">
-              <a:spcAft>
-                <a:spcPts val="200"/>
-              </a:spcAft>
-            </a:pPr>
-            <a:r>
-              <a:rPr sz="1200" b="0">
-                <a:solidFill>
-                  <a:srgbClr val="898989"/>
-                </a:solidFill>
-                <a:latin typeface="Microsoft YaHei"/>
-                <a:ea typeface="Microsoft YaHei"/>
-                <a:cs typeface="Microsoft YaHei"/>
-              </a:rPr>
-              <a:t>平台提供统一评测工具链；许可边界随底座变化。</a:t>
-            </a:r>
-          </a:p>
-        </p:txBody>
-      </p:sp>
-      <p:sp>
-        <p:nvSpPr>
-          <p:cNvPr id="7" name="Rounded Rectangle 6"/>
-          <p:cNvSpPr/>
-          <p:nvPr/>
-        </p:nvSpPr>
-        <p:spPr>
-          <a:xfrm>
-            <a:off x="457200" y="1371600"/>
-            <a:ext cx="5577840" cy="4206240"/>
-          </a:xfrm>
-          <a:prstGeom prst="roundRect">
-            <a:avLst>
-              <a:gd name="adj" fmla="val 5000"/>
-            </a:avLst>
-          </a:prstGeom>
-          <a:solidFill>
-            <a:srgbClr val="FFFFFF"/>
-          </a:solidFill>
-          <a:ln w="9525">
-            <a:solidFill>
-              <a:srgbClr val="DDDDDD"/>
-            </a:solidFill>
-          </a:ln>
-        </p:spPr>
-        <p:style>
-          <a:lnRef idx="1">
-            <a:schemeClr val="accent1"/>
-          </a:lnRef>
-          <a:fillRef idx="3">
-            <a:schemeClr val="accent1"/>
-          </a:fillRef>
-          <a:effectRef idx="2">
-            <a:schemeClr val="accent1"/>
-          </a:effectRef>
-          <a:fontRef idx="minor">
-            <a:schemeClr val="lt1"/>
-          </a:fontRef>
-        </p:style>
-        <p:txBody>
-          <a:bodyPr rtlCol="0" anchor="ctr"/>
-          <a:lstStyle/>
-          <a:p>
-            <a:pPr algn="ctr"/>
-          </a:p>
-        </p:txBody>
-      </p:sp>
-      <p:sp>
-        <p:nvSpPr>
-          <p:cNvPr id="8" name="Rectangle 7"/>
-          <p:cNvSpPr/>
-          <p:nvPr/>
-        </p:nvSpPr>
-        <p:spPr>
-          <a:xfrm>
-            <a:off x="457200" y="1371600"/>
-            <a:ext cx="5577840" cy="73152"/>
-          </a:xfrm>
-          <a:prstGeom prst="rect">
-            <a:avLst/>
-          </a:prstGeom>
-          <a:solidFill>
-            <a:srgbClr val="62B230"/>
-          </a:solidFill>
-          <a:ln>
-            <a:noFill/>
-          </a:ln>
-        </p:spPr>
-        <p:style>
-          <a:lnRef idx="1">
-            <a:schemeClr val="accent1"/>
-          </a:lnRef>
-          <a:fillRef idx="3">
-            <a:schemeClr val="accent1"/>
-          </a:fillRef>
-          <a:effectRef idx="2">
-            <a:schemeClr val="accent1"/>
-          </a:effectRef>
-          <a:fontRef idx="minor">
-            <a:schemeClr val="lt1"/>
-          </a:fontRef>
-        </p:style>
-        <p:txBody>
-          <a:bodyPr rtlCol="0" anchor="ctr"/>
-          <a:lstStyle/>
-          <a:p>
-            <a:pPr algn="ctr"/>
-          </a:p>
-        </p:txBody>
-      </p:sp>
-      <p:sp>
-        <p:nvSpPr>
-          <p:cNvPr id="9" name="TextBox 8"/>
-          <p:cNvSpPr txBox="1"/>
-          <p:nvPr/>
-        </p:nvSpPr>
-        <p:spPr>
-          <a:xfrm>
-            <a:off x="640080" y="1600200"/>
-            <a:ext cx="5212080" cy="365760"/>
-          </a:xfrm>
-          <a:prstGeom prst="rect">
-            <a:avLst/>
-          </a:prstGeom>
-          <a:noFill/>
-        </p:spPr>
-        <p:txBody>
-          <a:bodyPr wrap="square" anchor="t"/>
-          <a:lstStyle/>
-          <a:p>
-            <a:pPr algn="l">
-              <a:spcAft>
-                <a:spcPts val="200"/>
-              </a:spcAft>
-            </a:pPr>
-            <a:r>
-              <a:rPr sz="1700" b="1">
-                <a:solidFill>
-                  <a:srgbClr val="62B230"/>
-                </a:solidFill>
-                <a:latin typeface="Microsoft YaHei"/>
-                <a:ea typeface="Microsoft YaHei"/>
-                <a:cs typeface="Microsoft YaHei"/>
-              </a:rPr>
-              <a:t>评测接口</a:t>
-            </a:r>
-          </a:p>
-        </p:txBody>
-      </p:sp>
-      <p:sp>
-        <p:nvSpPr>
-          <p:cNvPr id="10" name="TextBox 9"/>
-          <p:cNvSpPr txBox="1"/>
-          <p:nvPr/>
-        </p:nvSpPr>
-        <p:spPr>
-          <a:xfrm>
-            <a:off x="640080" y="2103120"/>
-            <a:ext cx="5212080" cy="3200400"/>
-          </a:xfrm>
-          <a:prstGeom prst="rect">
-            <a:avLst/>
-          </a:prstGeom>
-          <a:noFill/>
-        </p:spPr>
-        <p:txBody>
-          <a:bodyPr wrap="square" anchor="t"/>
-          <a:lstStyle/>
-          <a:p>
-            <a:pPr algn="l">
-              <a:spcAft>
-                <a:spcPts val="200"/>
-              </a:spcAft>
-            </a:pPr>
-            <a:r>
-              <a:rPr sz="1400" b="0">
-                <a:solidFill>
-                  <a:srgbClr val="555757"/>
-                </a:solidFill>
-                <a:latin typeface="Microsoft YaHei"/>
-                <a:ea typeface="Microsoft YaHei"/>
-                <a:cs typeface="Microsoft YaHei"/>
-              </a:rPr>
-              <a:t>预测：MAE、q10–q90 覆盖率、长时域拼接稳定性。</a:t>
-            </a:r>
-          </a:p>
-          <a:p>
-            <a:pPr algn="l">
-              <a:spcAft>
-                <a:spcPts val="200"/>
-              </a:spcAft>
-            </a:pPr>
-            <a:r>
-              <a:rPr sz="1400" b="0">
-                <a:solidFill>
-                  <a:srgbClr val="555757"/>
-                </a:solidFill>
-                <a:latin typeface="Microsoft YaHei"/>
-                <a:ea typeface="Microsoft YaHei"/>
-                <a:cs typeface="Microsoft YaHei"/>
-              </a:rPr>
-              <a:t>分类：宏 F1、混淆矩阵、注册类别一致性。</a:t>
-            </a:r>
-          </a:p>
-          <a:p>
-            <a:pPr algn="l">
-              <a:spcAft>
-                <a:spcPts val="200"/>
-              </a:spcAft>
-            </a:pPr>
-            <a:r>
-              <a:rPr sz="1400" b="0">
-                <a:solidFill>
-                  <a:srgbClr val="555757"/>
-                </a:solidFill>
-                <a:latin typeface="Microsoft YaHei"/>
-                <a:ea typeface="Microsoft YaHei"/>
-                <a:cs typeface="Microsoft YaHei"/>
-              </a:rPr>
-              <a:t>底座对比：同一批数据，同一接口，换底座重跑。</a:t>
-            </a:r>
-          </a:p>
-        </p:txBody>
-      </p:sp>
-      <p:sp>
-        <p:nvSpPr>
-          <p:cNvPr id="11" name="Rounded Rectangle 10"/>
-          <p:cNvSpPr/>
-          <p:nvPr/>
-        </p:nvSpPr>
-        <p:spPr>
-          <a:xfrm>
-            <a:off x="6217920" y="1371600"/>
-            <a:ext cx="5486400" cy="4206240"/>
-          </a:xfrm>
-          <a:prstGeom prst="roundRect">
-            <a:avLst>
-              <a:gd name="adj" fmla="val 5000"/>
-            </a:avLst>
-          </a:prstGeom>
-          <a:solidFill>
-            <a:srgbClr val="FFFFFF"/>
-          </a:solidFill>
-          <a:ln w="9525">
-            <a:solidFill>
-              <a:srgbClr val="DDDDDD"/>
-            </a:solidFill>
-          </a:ln>
-        </p:spPr>
-        <p:style>
-          <a:lnRef idx="1">
-            <a:schemeClr val="accent1"/>
-          </a:lnRef>
-          <a:fillRef idx="3">
-            <a:schemeClr val="accent1"/>
-          </a:fillRef>
-          <a:effectRef idx="2">
-            <a:schemeClr val="accent1"/>
-          </a:effectRef>
-          <a:fontRef idx="minor">
-            <a:schemeClr val="lt1"/>
-          </a:fontRef>
-        </p:style>
-        <p:txBody>
-          <a:bodyPr rtlCol="0" anchor="ctr"/>
-          <a:lstStyle/>
-          <a:p>
-            <a:pPr algn="ctr"/>
-          </a:p>
-        </p:txBody>
-      </p:sp>
-      <p:sp>
-        <p:nvSpPr>
-          <p:cNvPr id="12" name="Rectangle 11"/>
-          <p:cNvSpPr/>
-          <p:nvPr/>
-        </p:nvSpPr>
-        <p:spPr>
-          <a:xfrm>
-            <a:off x="6217920" y="1371600"/>
-            <a:ext cx="5486400" cy="73152"/>
-          </a:xfrm>
-          <a:prstGeom prst="rect">
-            <a:avLst/>
-          </a:prstGeom>
-          <a:solidFill>
-            <a:srgbClr val="ED6D00"/>
-          </a:solidFill>
-          <a:ln>
-            <a:noFill/>
-          </a:ln>
-        </p:spPr>
-        <p:style>
-          <a:lnRef idx="1">
-            <a:schemeClr val="accent1"/>
-          </a:lnRef>
-          <a:fillRef idx="3">
-            <a:schemeClr val="accent1"/>
-          </a:fillRef>
-          <a:effectRef idx="2">
-            <a:schemeClr val="accent1"/>
-          </a:effectRef>
-          <a:fontRef idx="minor">
-            <a:schemeClr val="lt1"/>
-          </a:fontRef>
-        </p:style>
-        <p:txBody>
-          <a:bodyPr rtlCol="0" anchor="ctr"/>
-          <a:lstStyle/>
-          <a:p>
-            <a:pPr algn="ctr"/>
-          </a:p>
-        </p:txBody>
-      </p:sp>
-      <p:sp>
-        <p:nvSpPr>
-          <p:cNvPr id="13" name="TextBox 12"/>
-          <p:cNvSpPr txBox="1"/>
-          <p:nvPr/>
-        </p:nvSpPr>
-        <p:spPr>
-          <a:xfrm>
-            <a:off x="6400800" y="1600200"/>
-            <a:ext cx="5120640" cy="365760"/>
-          </a:xfrm>
-          <a:prstGeom prst="rect">
-            <a:avLst/>
-          </a:prstGeom>
-          <a:noFill/>
-        </p:spPr>
-        <p:txBody>
-          <a:bodyPr wrap="square" anchor="t"/>
-          <a:lstStyle/>
-          <a:p>
-            <a:pPr algn="l">
-              <a:spcAft>
-                <a:spcPts val="200"/>
-              </a:spcAft>
-            </a:pPr>
-            <a:r>
-              <a:rPr sz="1700" b="1">
-                <a:solidFill>
-                  <a:srgbClr val="ED6D00"/>
-                </a:solidFill>
-                <a:latin typeface="Microsoft YaHei"/>
-                <a:ea typeface="Microsoft YaHei"/>
-                <a:cs typeface="Microsoft YaHei"/>
-              </a:rPr>
-              <a:t>许可边界</a:t>
-            </a:r>
-          </a:p>
-        </p:txBody>
-      </p:sp>
-      <p:sp>
-        <p:nvSpPr>
-          <p:cNvPr id="14" name="TextBox 13"/>
-          <p:cNvSpPr txBox="1"/>
-          <p:nvPr/>
-        </p:nvSpPr>
-        <p:spPr>
-          <a:xfrm>
-            <a:off x="6400800" y="2103120"/>
-            <a:ext cx="5120640" cy="3200400"/>
-          </a:xfrm>
-          <a:prstGeom prst="rect">
-            <a:avLst/>
-          </a:prstGeom>
-          <a:noFill/>
-        </p:spPr>
-        <p:txBody>
-          <a:bodyPr wrap="square" anchor="t"/>
-          <a:lstStyle/>
-          <a:p>
-            <a:pPr algn="l">
-              <a:spcAft>
-                <a:spcPts val="200"/>
-              </a:spcAft>
-            </a:pPr>
-            <a:r>
-              <a:rPr sz="1400" b="0">
-                <a:solidFill>
-                  <a:srgbClr val="555757"/>
-                </a:solidFill>
-                <a:latin typeface="Microsoft YaHei"/>
-                <a:ea typeface="Microsoft YaHei"/>
-                <a:cs typeface="Microsoft YaHei"/>
-              </a:rPr>
-              <a:t>TimesFM-3 权重：NC，商用必须自训底座。</a:t>
-            </a:r>
-          </a:p>
-          <a:p>
-            <a:pPr algn="l">
-              <a:spcAft>
-                <a:spcPts val="200"/>
-              </a:spcAft>
-            </a:pPr>
-            <a:r>
-              <a:rPr sz="1400" b="0">
-                <a:solidFill>
-                  <a:srgbClr val="555757"/>
-                </a:solidFill>
-                <a:latin typeface="Microsoft YaHei"/>
-                <a:ea typeface="Microsoft YaHei"/>
-                <a:cs typeface="Microsoft YaHei"/>
-              </a:rPr>
-              <a:t>TimesFM ≤ 2.5：Apache-2.0，可商用。</a:t>
-            </a:r>
-          </a:p>
-          <a:p>
-            <a:pPr algn="l">
-              <a:spcAft>
-                <a:spcPts val="200"/>
-              </a:spcAft>
-            </a:pPr>
-            <a:r>
-              <a:rPr sz="1400" b="0">
-                <a:solidFill>
-                  <a:srgbClr val="555757"/>
-                </a:solidFill>
-                <a:latin typeface="Microsoft YaHei"/>
-                <a:ea typeface="Microsoft YaHei"/>
-                <a:cs typeface="Microsoft YaHei"/>
-              </a:rPr>
-              <a:t>UniTS / MOMENT：MIT，可商用。</a:t>
-            </a:r>
-          </a:p>
-          <a:p>
-            <a:pPr algn="l">
-              <a:spcAft>
-                <a:spcPts val="200"/>
-              </a:spcAft>
-            </a:pPr>
-            <a:r>
-              <a:rPr sz="1400" b="0">
-                <a:solidFill>
-                  <a:srgbClr val="555757"/>
-                </a:solidFill>
-                <a:latin typeface="Microsoft YaHei"/>
-                <a:ea typeface="Microsoft YaHei"/>
-                <a:cs typeface="Microsoft YaHei"/>
-              </a:rPr>
-              <a:t>Moirai 权重 / Meta EMG：CC-BY-NC，仅研究。</a:t>
-            </a:r>
-          </a:p>
-          <a:p>
-            <a:pPr algn="l">
-              <a:spcAft>
-                <a:spcPts val="200"/>
-              </a:spcAft>
-            </a:pPr>
-            <a:r>
-              <a:rPr sz="1400" b="0">
-                <a:solidFill>
-                  <a:srgbClr val="555757"/>
-                </a:solidFill>
-                <a:latin typeface="Microsoft YaHei"/>
-                <a:ea typeface="Microsoft YaHei"/>
-                <a:cs typeface="Microsoft YaHei"/>
-              </a:rPr>
-              <a:t/>
-            </a:r>
-          </a:p>
-          <a:p>
-            <a:pPr algn="l">
-              <a:spcAft>
-                <a:spcPts val="200"/>
-              </a:spcAft>
-            </a:pPr>
-            <a:r>
-              <a:rPr sz="1400" b="0">
-                <a:solidFill>
-                  <a:srgbClr val="555757"/>
-                </a:solidFill>
-                <a:latin typeface="Microsoft YaHei"/>
-                <a:ea typeface="Microsoft YaHei"/>
-                <a:cs typeface="Microsoft YaHei"/>
-              </a:rPr>
-              <a:t>平台不绑定任何 NC 权重；接口层与许可层解耦。</a:t>
-            </a:r>
-          </a:p>
-        </p:txBody>
-      </p:sp>
-      <p:sp>
-        <p:nvSpPr>
-          <p:cNvPr id="15" name="Rectangle 14"/>
-          <p:cNvSpPr/>
-          <p:nvPr/>
-        </p:nvSpPr>
-        <p:spPr>
-          <a:xfrm>
-            <a:off x="0" y="6537960"/>
-            <a:ext cx="12191695" cy="320040"/>
-          </a:xfrm>
-          <a:prstGeom prst="rect">
-            <a:avLst/>
-          </a:prstGeom>
-          <a:solidFill>
-            <a:srgbClr val="F2F2F2"/>
-          </a:solidFill>
-          <a:ln>
-            <a:noFill/>
-          </a:ln>
-        </p:spPr>
-        <p:style>
-          <a:lnRef idx="1">
-            <a:schemeClr val="accent1"/>
-          </a:lnRef>
-          <a:fillRef idx="3">
-            <a:schemeClr val="accent1"/>
-          </a:fillRef>
-          <a:effectRef idx="2">
-            <a:schemeClr val="accent1"/>
-          </a:effectRef>
-          <a:fontRef idx="minor">
-            <a:schemeClr val="lt1"/>
-          </a:fontRef>
-        </p:style>
-        <p:txBody>
-          <a:bodyPr rtlCol="0" anchor="ctr"/>
-          <a:lstStyle/>
-          <a:p>
-            <a:pPr algn="ctr"/>
-          </a:p>
-        </p:txBody>
-      </p:sp>
-      <p:sp>
-        <p:nvSpPr>
-          <p:cNvPr id="16" name="TextBox 15"/>
-          <p:cNvSpPr txBox="1"/>
-          <p:nvPr/>
-        </p:nvSpPr>
-        <p:spPr>
-          <a:xfrm>
-            <a:off x="457200" y="6537960"/>
-            <a:ext cx="8229600" cy="320040"/>
-          </a:xfrm>
-          <a:prstGeom prst="rect">
-            <a:avLst/>
-          </a:prstGeom>
-          <a:noFill/>
-        </p:spPr>
-        <p:txBody>
-          <a:bodyPr wrap="square" anchor="ctr"/>
-          <a:lstStyle/>
-          <a:p>
-            <a:pPr algn="l">
-              <a:spcAft>
-                <a:spcPts val="200"/>
-              </a:spcAft>
-            </a:pPr>
-            <a:r>
-              <a:rPr sz="900" b="0">
-                <a:solidFill>
-                  <a:srgbClr val="898989"/>
-                </a:solidFill>
-                <a:latin typeface="Microsoft YaHei"/>
-                <a:ea typeface="Microsoft YaHei"/>
-                <a:cs typeface="Microsoft YaHei"/>
-              </a:rPr>
-              <a:t>华为  ·  AI 物理感知平台  ·  评测与许可    |    Security Level: Internal</a:t>
-            </a:r>
-          </a:p>
-        </p:txBody>
-      </p:sp>
-      <p:sp>
-        <p:nvSpPr>
-          <p:cNvPr id="17" name="TextBox 16"/>
-          <p:cNvSpPr txBox="1"/>
-          <p:nvPr/>
-        </p:nvSpPr>
-        <p:spPr>
-          <a:xfrm>
-            <a:off x="10241280" y="6537960"/>
-            <a:ext cx="1554480" cy="320040"/>
-          </a:xfrm>
-          <a:prstGeom prst="rect">
-            <a:avLst/>
-          </a:prstGeom>
-          <a:noFill/>
-        </p:spPr>
-        <p:txBody>
-          <a:bodyPr wrap="square" anchor="ctr"/>
-          <a:lstStyle/>
-          <a:p>
-            <a:pPr algn="r">
-              <a:spcAft>
-                <a:spcPts val="200"/>
-              </a:spcAft>
-            </a:pPr>
-            <a:r>
-              <a:rPr sz="900" b="0">
-                <a:solidFill>
-                  <a:srgbClr val="898989"/>
-                </a:solidFill>
-                <a:latin typeface="Microsoft YaHei"/>
-                <a:ea typeface="Microsoft YaHei"/>
-                <a:cs typeface="Microsoft YaHei"/>
-              </a:rPr>
-              <a:t>10  /  11</a:t>
-            </a:r>
-          </a:p>
-        </p:txBody>
-      </p:sp>
-    </p:spTree>
-  </p:cSld>
-  <p:clrMapOvr>
-    <a:masterClrMapping/>
-  </p:clrMapOvr>
-</p:sld>
-</file>
-
-<file path=ppt/slides/slide11.xml><?xml version="1.0" encoding="utf-8"?>
-<p:sld xmlns:a="http://schemas.openxmlformats.org/drawingml/2006/main" xmlns:p="http://schemas.openxmlformats.org/presentationml/2006/main" xmlns:r="http://schemas.openxmlformats.org/officeDocument/2006/relationships">
-  <p:cSld>
-    <p:spTree>
-      <p:nvGrpSpPr>
-        <p:cNvPr id="1" name=""/>
-        <p:cNvGrpSpPr/>
-        <p:nvPr/>
-      </p:nvGrpSpPr>
-      <p:grpSpPr/>
-      <p:sp>
-        <p:nvSpPr>
-          <p:cNvPr id="2" name="Rectangle 1"/>
-          <p:cNvSpPr/>
-          <p:nvPr/>
-        </p:nvSpPr>
-        <p:spPr>
-          <a:xfrm>
-            <a:off x="0" y="0"/>
-            <a:ext cx="12196763" cy="6858000"/>
-          </a:xfrm>
-          <a:prstGeom prst="rect">
-            <a:avLst/>
-          </a:prstGeom>
-          <a:solidFill>
-            <a:srgbClr val="FFFFFF"/>
-          </a:solidFill>
-          <a:ln>
-            <a:noFill/>
-          </a:ln>
-        </p:spPr>
-        <p:style>
-          <a:lnRef idx="1">
-            <a:schemeClr val="accent1"/>
-          </a:lnRef>
-          <a:fillRef idx="3">
-            <a:schemeClr val="accent1"/>
-          </a:fillRef>
-          <a:effectRef idx="2">
-            <a:schemeClr val="accent1"/>
-          </a:effectRef>
-          <a:fontRef idx="minor">
-            <a:schemeClr val="lt1"/>
-          </a:fontRef>
-        </p:style>
-        <p:txBody>
-          <a:bodyPr rtlCol="0" anchor="ctr"/>
-          <a:lstStyle/>
-          <a:p>
-            <a:pPr algn="ctr"/>
-          </a:p>
-        </p:txBody>
-      </p:sp>
-      <p:sp>
-        <p:nvSpPr>
-          <p:cNvPr id="3" name="TextBox 2"/>
-          <p:cNvSpPr txBox="1"/>
-          <p:nvPr/>
-        </p:nvSpPr>
-        <p:spPr>
-          <a:xfrm>
-            <a:off x="457200" y="201168"/>
-            <a:ext cx="11155680" cy="256032"/>
-          </a:xfrm>
-          <a:prstGeom prst="rect">
-            <a:avLst/>
-          </a:prstGeom>
-          <a:noFill/>
-        </p:spPr>
-        <p:txBody>
-          <a:bodyPr wrap="square" anchor="t"/>
-          <a:lstStyle/>
-          <a:p>
-            <a:pPr algn="l">
-              <a:spcAft>
-                <a:spcPts val="200"/>
-              </a:spcAft>
-            </a:pPr>
-            <a:r>
-              <a:rPr sz="1100" b="1">
-                <a:solidFill>
-                  <a:srgbClr val="C7000B"/>
-                </a:solidFill>
-                <a:latin typeface="Microsoft YaHei"/>
-                <a:ea typeface="Microsoft YaHei"/>
-                <a:cs typeface="Microsoft YaHei"/>
-              </a:rPr>
-              <a:t>决策</a:t>
-            </a:r>
-          </a:p>
-        </p:txBody>
-      </p:sp>
-      <p:sp>
-        <p:nvSpPr>
-          <p:cNvPr id="4" name="TextBox 3"/>
-          <p:cNvSpPr txBox="1"/>
-          <p:nvPr/>
-        </p:nvSpPr>
-        <p:spPr>
-          <a:xfrm>
-            <a:off x="457200" y="438912"/>
-            <a:ext cx="11155680" cy="438912"/>
-          </a:xfrm>
-          <a:prstGeom prst="rect">
-            <a:avLst/>
-          </a:prstGeom>
-          <a:noFill/>
-        </p:spPr>
-        <p:txBody>
-          <a:bodyPr wrap="square" anchor="t"/>
-          <a:lstStyle/>
-          <a:p>
-            <a:pPr algn="l">
-              <a:spcAft>
-                <a:spcPts val="200"/>
-              </a:spcAft>
-            </a:pPr>
-            <a:r>
-              <a:rPr sz="2400" b="1">
-                <a:solidFill>
-                  <a:srgbClr val="1A1A1A"/>
-                </a:solidFill>
-                <a:latin typeface="Microsoft YaHei"/>
-                <a:ea typeface="Microsoft YaHei"/>
-                <a:cs typeface="Microsoft YaHei"/>
-              </a:rPr>
-              <a:t>平台交付接口与工具链，不交付场景语义</a:t>
-            </a:r>
-          </a:p>
-        </p:txBody>
-      </p:sp>
-      <p:sp>
-        <p:nvSpPr>
-          <p:cNvPr id="5" name="Rectangle 4"/>
-          <p:cNvSpPr/>
-          <p:nvPr/>
-        </p:nvSpPr>
-        <p:spPr>
-          <a:xfrm>
-            <a:off x="457200" y="914400"/>
-            <a:ext cx="1097280" cy="45720"/>
-          </a:xfrm>
-          <a:prstGeom prst="rect">
-            <a:avLst/>
-          </a:prstGeom>
-          <a:solidFill>
-            <a:srgbClr val="C7000B"/>
-          </a:solidFill>
-          <a:ln>
-            <a:noFill/>
-          </a:ln>
-        </p:spPr>
-        <p:style>
-          <a:lnRef idx="1">
-            <a:schemeClr val="accent1"/>
-          </a:lnRef>
-          <a:fillRef idx="3">
-            <a:schemeClr val="accent1"/>
-          </a:fillRef>
-          <a:effectRef idx="2">
-            <a:schemeClr val="accent1"/>
-          </a:effectRef>
-          <a:fontRef idx="minor">
-            <a:schemeClr val="lt1"/>
-          </a:fontRef>
-        </p:style>
-        <p:txBody>
-          <a:bodyPr rtlCol="0" anchor="ctr"/>
-          <a:lstStyle/>
-          <a:p>
-            <a:pPr algn="ctr"/>
-          </a:p>
-        </p:txBody>
-      </p:sp>
-      <p:sp>
-        <p:nvSpPr>
-          <p:cNvPr id="6" name="TextBox 5"/>
-          <p:cNvSpPr txBox="1"/>
-          <p:nvPr/>
-        </p:nvSpPr>
-        <p:spPr>
-          <a:xfrm>
-            <a:off x="457200" y="1024128"/>
-            <a:ext cx="11155680" cy="292608"/>
-          </a:xfrm>
-          <a:prstGeom prst="rect">
-            <a:avLst/>
-          </a:prstGeom>
-          <a:noFill/>
-        </p:spPr>
-        <p:txBody>
-          <a:bodyPr wrap="square" anchor="t"/>
-          <a:lstStyle/>
-          <a:p>
-            <a:pPr algn="l">
-              <a:spcAft>
-                <a:spcPts val="200"/>
-              </a:spcAft>
-            </a:pPr>
-            <a:r>
-              <a:rPr sz="1200" b="0">
-                <a:solidFill>
-                  <a:srgbClr val="898989"/>
-                </a:solidFill>
-                <a:latin typeface="Microsoft YaHei"/>
-                <a:ea typeface="Microsoft YaHei"/>
-                <a:cs typeface="Microsoft YaHei"/>
-              </a:rPr>
-              <a:t>痛点驱动：统一表征 + 统一接口；底座可换，代际演进向下兼容。</a:t>
-            </a:r>
-          </a:p>
-        </p:txBody>
-      </p:sp>
-      <p:sp>
-        <p:nvSpPr>
-          <p:cNvPr id="7" name="Rounded Rectangle 6"/>
-          <p:cNvSpPr/>
-          <p:nvPr/>
-        </p:nvSpPr>
-        <p:spPr>
-          <a:xfrm>
-            <a:off x="457200" y="1298448"/>
-            <a:ext cx="11247120" cy="621792"/>
-          </a:xfrm>
-          <a:prstGeom prst="roundRect">
-            <a:avLst>
-              <a:gd name="adj" fmla="val 5000"/>
-            </a:avLst>
-          </a:prstGeom>
-          <a:solidFill>
-            <a:srgbClr val="FFFFFF"/>
-          </a:solidFill>
-          <a:ln w="9525">
-            <a:solidFill>
-              <a:srgbClr val="DDDDDD"/>
-            </a:solidFill>
-          </a:ln>
-        </p:spPr>
-        <p:style>
-          <a:lnRef idx="1">
-            <a:schemeClr val="accent1"/>
-          </a:lnRef>
-          <a:fillRef idx="3">
-            <a:schemeClr val="accent1"/>
-          </a:fillRef>
-          <a:effectRef idx="2">
-            <a:schemeClr val="accent1"/>
-          </a:effectRef>
-          <a:fontRef idx="minor">
-            <a:schemeClr val="lt1"/>
-          </a:fontRef>
-        </p:style>
-        <p:txBody>
-          <a:bodyPr rtlCol="0" anchor="ctr"/>
-          <a:lstStyle/>
-          <a:p>
-            <a:pPr algn="ctr"/>
-          </a:p>
-        </p:txBody>
-      </p:sp>
-      <p:sp>
-        <p:nvSpPr>
-          <p:cNvPr id="8" name="TextBox 7"/>
-          <p:cNvSpPr txBox="1"/>
-          <p:nvPr/>
-        </p:nvSpPr>
-        <p:spPr>
-          <a:xfrm>
-            <a:off x="640080" y="1298448"/>
-            <a:ext cx="1463040" cy="621792"/>
-          </a:xfrm>
-          <a:prstGeom prst="rect">
-            <a:avLst/>
-          </a:prstGeom>
-          <a:noFill/>
-        </p:spPr>
-        <p:txBody>
-          <a:bodyPr wrap="square" anchor="ctr"/>
-          <a:lstStyle/>
-          <a:p>
-            <a:pPr algn="l">
-              <a:spcAft>
-                <a:spcPts val="200"/>
-              </a:spcAft>
-            </a:pPr>
-            <a:r>
-              <a:rPr sz="1600" b="1">
-                <a:solidFill>
-                  <a:srgbClr val="C7000B"/>
-                </a:solidFill>
-                <a:latin typeface="Microsoft YaHei"/>
-                <a:ea typeface="Microsoft YaHei"/>
-                <a:cs typeface="Microsoft YaHei"/>
-              </a:rPr>
-              <a:t>痛点</a:t>
-            </a:r>
-          </a:p>
-        </p:txBody>
-      </p:sp>
-      <p:sp>
-        <p:nvSpPr>
-          <p:cNvPr id="9" name="TextBox 8"/>
-          <p:cNvSpPr txBox="1"/>
-          <p:nvPr/>
-        </p:nvSpPr>
-        <p:spPr>
-          <a:xfrm>
-            <a:off x="2286000" y="1298448"/>
-            <a:ext cx="9235440" cy="621792"/>
-          </a:xfrm>
-          <a:prstGeom prst="rect">
-            <a:avLst/>
-          </a:prstGeom>
-          <a:noFill/>
-        </p:spPr>
-        <p:txBody>
-          <a:bodyPr wrap="square" anchor="ctr"/>
-          <a:lstStyle/>
-          <a:p>
-            <a:pPr algn="l">
-              <a:spcAft>
-                <a:spcPts val="200"/>
-              </a:spcAft>
-            </a:pPr>
-            <a:r>
-              <a:rPr sz="1300" b="0">
-                <a:solidFill>
-                  <a:srgbClr val="1A1A1A"/>
-                </a:solidFill>
-                <a:latin typeface="Microsoft YaHei"/>
-                <a:ea typeface="Microsoft YaHei"/>
-                <a:cs typeface="Microsoft YaHei"/>
-              </a:rPr>
-              <a:t>多模态融合不足、多设备自适应困难、多任务泛化弱 → 统一表征 + 统一接口。</a:t>
-            </a:r>
-          </a:p>
-        </p:txBody>
-      </p:sp>
-      <p:sp>
-        <p:nvSpPr>
-          <p:cNvPr id="10" name="Rounded Rectangle 9"/>
-          <p:cNvSpPr/>
-          <p:nvPr/>
-        </p:nvSpPr>
-        <p:spPr>
-          <a:xfrm>
-            <a:off x="457200" y="1993391"/>
-            <a:ext cx="11247120" cy="621792"/>
-          </a:xfrm>
-          <a:prstGeom prst="roundRect">
-            <a:avLst>
-              <a:gd name="adj" fmla="val 5000"/>
-            </a:avLst>
-          </a:prstGeom>
-          <a:solidFill>
-            <a:srgbClr val="F7F7F7"/>
-          </a:solidFill>
-          <a:ln w="9525">
-            <a:solidFill>
-              <a:srgbClr val="DDDDDD"/>
-            </a:solidFill>
-          </a:ln>
-        </p:spPr>
-        <p:style>
-          <a:lnRef idx="1">
-            <a:schemeClr val="accent1"/>
-          </a:lnRef>
-          <a:fillRef idx="3">
-            <a:schemeClr val="accent1"/>
-          </a:fillRef>
-          <a:effectRef idx="2">
-            <a:schemeClr val="accent1"/>
-          </a:effectRef>
-          <a:fontRef idx="minor">
-            <a:schemeClr val="lt1"/>
-          </a:fontRef>
-        </p:style>
-        <p:txBody>
-          <a:bodyPr rtlCol="0" anchor="ctr"/>
-          <a:lstStyle/>
-          <a:p>
-            <a:pPr algn="ctr"/>
-          </a:p>
-        </p:txBody>
-      </p:sp>
-      <p:sp>
-        <p:nvSpPr>
-          <p:cNvPr id="11" name="TextBox 10"/>
-          <p:cNvSpPr txBox="1"/>
-          <p:nvPr/>
-        </p:nvSpPr>
-        <p:spPr>
-          <a:xfrm>
-            <a:off x="640080" y="1993391"/>
-            <a:ext cx="1463040" cy="621792"/>
-          </a:xfrm>
-          <a:prstGeom prst="rect">
-            <a:avLst/>
-          </a:prstGeom>
-          <a:noFill/>
-        </p:spPr>
-        <p:txBody>
-          <a:bodyPr wrap="square" anchor="ctr"/>
-          <a:lstStyle/>
-          <a:p>
-            <a:pPr algn="l">
-              <a:spcAft>
-                <a:spcPts val="200"/>
-              </a:spcAft>
-            </a:pPr>
-            <a:r>
-              <a:rPr sz="1600" b="1">
-                <a:solidFill>
-                  <a:srgbClr val="C7000B"/>
-                </a:solidFill>
-                <a:latin typeface="Microsoft YaHei"/>
-                <a:ea typeface="Microsoft YaHei"/>
-                <a:cs typeface="Microsoft YaHei"/>
-              </a:rPr>
-              <a:t>接口</a:t>
-            </a:r>
-          </a:p>
-        </p:txBody>
-      </p:sp>
-      <p:sp>
-        <p:nvSpPr>
-          <p:cNvPr id="12" name="TextBox 11"/>
-          <p:cNvSpPr txBox="1"/>
-          <p:nvPr/>
-        </p:nvSpPr>
-        <p:spPr>
-          <a:xfrm>
-            <a:off x="2286000" y="1993391"/>
-            <a:ext cx="9235440" cy="621792"/>
-          </a:xfrm>
-          <a:prstGeom prst="rect">
-            <a:avLst/>
-          </a:prstGeom>
-          <a:noFill/>
-        </p:spPr>
-        <p:txBody>
-          <a:bodyPr wrap="square" anchor="ctr"/>
-          <a:lstStyle/>
-          <a:p>
-            <a:pPr algn="l">
-              <a:spcAft>
-                <a:spcPts val="200"/>
-              </a:spcAft>
-            </a:pPr>
-            <a:r>
-              <a:rPr sz="1300" b="0">
-                <a:solidFill>
-                  <a:srgbClr val="1A1A1A"/>
-                </a:solidFill>
-                <a:latin typeface="Microsoft YaHei"/>
-                <a:ea typeface="Microsoft YaHei"/>
-                <a:cs typeface="Microsoft YaHei"/>
-              </a:rPr>
-              <a:t>接入规格 + 预测接口 + 分类接口；版本化，向下兼容。</a:t>
-            </a:r>
-          </a:p>
-        </p:txBody>
-      </p:sp>
-      <p:sp>
-        <p:nvSpPr>
-          <p:cNvPr id="13" name="Rounded Rectangle 12"/>
-          <p:cNvSpPr/>
-          <p:nvPr/>
-        </p:nvSpPr>
-        <p:spPr>
-          <a:xfrm>
-            <a:off x="457200" y="2688336"/>
-            <a:ext cx="11247120" cy="621792"/>
-          </a:xfrm>
-          <a:prstGeom prst="roundRect">
-            <a:avLst>
-              <a:gd name="adj" fmla="val 5000"/>
-            </a:avLst>
-          </a:prstGeom>
-          <a:solidFill>
-            <a:srgbClr val="FFFFFF"/>
-          </a:solidFill>
-          <a:ln w="9525">
-            <a:solidFill>
-              <a:srgbClr val="DDDDDD"/>
-            </a:solidFill>
-          </a:ln>
-        </p:spPr>
-        <p:style>
-          <a:lnRef idx="1">
-            <a:schemeClr val="accent1"/>
-          </a:lnRef>
-          <a:fillRef idx="3">
-            <a:schemeClr val="accent1"/>
-          </a:fillRef>
-          <a:effectRef idx="2">
-            <a:schemeClr val="accent1"/>
-          </a:effectRef>
-          <a:fontRef idx="minor">
-            <a:schemeClr val="lt1"/>
-          </a:fontRef>
-        </p:style>
-        <p:txBody>
-          <a:bodyPr rtlCol="0" anchor="ctr"/>
-          <a:lstStyle/>
-          <a:p>
-            <a:pPr algn="ctr"/>
-          </a:p>
-        </p:txBody>
-      </p:sp>
-      <p:sp>
-        <p:nvSpPr>
-          <p:cNvPr id="14" name="TextBox 13"/>
-          <p:cNvSpPr txBox="1"/>
-          <p:nvPr/>
-        </p:nvSpPr>
-        <p:spPr>
-          <a:xfrm>
-            <a:off x="640080" y="2688336"/>
-            <a:ext cx="1463040" cy="621792"/>
-          </a:xfrm>
-          <a:prstGeom prst="rect">
-            <a:avLst/>
-          </a:prstGeom>
-          <a:noFill/>
-        </p:spPr>
-        <p:txBody>
-          <a:bodyPr wrap="square" anchor="ctr"/>
-          <a:lstStyle/>
-          <a:p>
-            <a:pPr algn="l">
-              <a:spcAft>
-                <a:spcPts val="200"/>
-              </a:spcAft>
-            </a:pPr>
-            <a:r>
-              <a:rPr sz="1600" b="1">
-                <a:solidFill>
-                  <a:srgbClr val="C7000B"/>
-                </a:solidFill>
-                <a:latin typeface="Microsoft YaHei"/>
-                <a:ea typeface="Microsoft YaHei"/>
-                <a:cs typeface="Microsoft YaHei"/>
-              </a:rPr>
-              <a:t>预测</a:t>
-            </a:r>
-          </a:p>
-        </p:txBody>
-      </p:sp>
-      <p:sp>
-        <p:nvSpPr>
-          <p:cNvPr id="15" name="TextBox 14"/>
-          <p:cNvSpPr txBox="1"/>
-          <p:nvPr/>
-        </p:nvSpPr>
-        <p:spPr>
-          <a:xfrm>
-            <a:off x="2286000" y="2688336"/>
-            <a:ext cx="9235440" cy="621792"/>
-          </a:xfrm>
-          <a:prstGeom prst="rect">
-            <a:avLst/>
-          </a:prstGeom>
-          <a:noFill/>
-        </p:spPr>
-        <p:txBody>
-          <a:bodyPr wrap="square" anchor="ctr"/>
-          <a:lstStyle/>
-          <a:p>
-            <a:pPr algn="l">
-              <a:spcAft>
-                <a:spcPts val="200"/>
-              </a:spcAft>
-            </a:pPr>
-            <a:r>
-              <a:rPr sz="1300" b="0">
-                <a:solidFill>
-                  <a:srgbClr val="1A1A1A"/>
-                </a:solidFill>
-                <a:latin typeface="Microsoft YaHei"/>
-                <a:ea typeface="Microsoft YaHei"/>
-                <a:cs typeface="Microsoft YaHei"/>
-              </a:rPr>
-              <a:t>TimesFM-3 式 CPM 一次前向；点预测 q50；评测 MAE + 覆盖率。</a:t>
-            </a:r>
-          </a:p>
-        </p:txBody>
-      </p:sp>
-      <p:sp>
-        <p:nvSpPr>
-          <p:cNvPr id="16" name="Rounded Rectangle 15"/>
-          <p:cNvSpPr/>
-          <p:nvPr/>
-        </p:nvSpPr>
-        <p:spPr>
-          <a:xfrm>
-            <a:off x="457200" y="3383280"/>
-            <a:ext cx="11247120" cy="621792"/>
-          </a:xfrm>
-          <a:prstGeom prst="roundRect">
-            <a:avLst>
-              <a:gd name="adj" fmla="val 5000"/>
-            </a:avLst>
-          </a:prstGeom>
-          <a:solidFill>
-            <a:srgbClr val="F7F7F7"/>
-          </a:solidFill>
-          <a:ln w="9525">
-            <a:solidFill>
-              <a:srgbClr val="DDDDDD"/>
-            </a:solidFill>
-          </a:ln>
-        </p:spPr>
-        <p:style>
-          <a:lnRef idx="1">
-            <a:schemeClr val="accent1"/>
-          </a:lnRef>
-          <a:fillRef idx="3">
-            <a:schemeClr val="accent1"/>
-          </a:fillRef>
-          <a:effectRef idx="2">
-            <a:schemeClr val="accent1"/>
-          </a:effectRef>
-          <a:fontRef idx="minor">
-            <a:schemeClr val="lt1"/>
-          </a:fontRef>
-        </p:style>
-        <p:txBody>
-          <a:bodyPr rtlCol="0" anchor="ctr"/>
-          <a:lstStyle/>
-          <a:p>
-            <a:pPr algn="ctr"/>
-          </a:p>
-        </p:txBody>
-      </p:sp>
-      <p:sp>
-        <p:nvSpPr>
-          <p:cNvPr id="17" name="TextBox 16"/>
-          <p:cNvSpPr txBox="1"/>
-          <p:nvPr/>
-        </p:nvSpPr>
-        <p:spPr>
-          <a:xfrm>
-            <a:off x="640080" y="3383280"/>
-            <a:ext cx="1463040" cy="621792"/>
-          </a:xfrm>
-          <a:prstGeom prst="rect">
-            <a:avLst/>
-          </a:prstGeom>
-          <a:noFill/>
-        </p:spPr>
-        <p:txBody>
-          <a:bodyPr wrap="square" anchor="ctr"/>
-          <a:lstStyle/>
-          <a:p>
-            <a:pPr algn="l">
-              <a:spcAft>
-                <a:spcPts val="200"/>
-              </a:spcAft>
-            </a:pPr>
-            <a:r>
-              <a:rPr sz="1600" b="1">
-                <a:solidFill>
-                  <a:srgbClr val="C7000B"/>
-                </a:solidFill>
-                <a:latin typeface="Microsoft YaHei"/>
-                <a:ea typeface="Microsoft YaHei"/>
-                <a:cs typeface="Microsoft YaHei"/>
-              </a:rPr>
-              <a:t>分类</a:t>
-            </a:r>
-          </a:p>
-        </p:txBody>
-      </p:sp>
-      <p:sp>
-        <p:nvSpPr>
-          <p:cNvPr id="18" name="TextBox 17"/>
-          <p:cNvSpPr txBox="1"/>
-          <p:nvPr/>
-        </p:nvSpPr>
-        <p:spPr>
-          <a:xfrm>
-            <a:off x="2286000" y="3383280"/>
-            <a:ext cx="9235440" cy="621792"/>
-          </a:xfrm>
-          <a:prstGeom prst="rect">
-            <a:avLst/>
-          </a:prstGeom>
-          <a:noFill/>
-        </p:spPr>
-        <p:txBody>
-          <a:bodyPr wrap="square" anchor="ctr"/>
-          <a:lstStyle/>
-          <a:p>
-            <a:pPr algn="l">
-              <a:spcAft>
-                <a:spcPts val="200"/>
-              </a:spcAft>
-            </a:pPr>
-            <a:r>
-              <a:rPr sz="1300" b="0">
-                <a:solidFill>
-                  <a:srgbClr val="1A1A1A"/>
-                </a:solidFill>
-                <a:latin typeface="Microsoft YaHei"/>
-                <a:ea typeface="Microsoft YaHei"/>
-                <a:cs typeface="Microsoft YaHei"/>
-              </a:rPr>
-              <a:t>UniTS 任务 token / MOMENT 线性探针；场景方注册类别，平台微调。</a:t>
-            </a:r>
-          </a:p>
-        </p:txBody>
-      </p:sp>
-      <p:sp>
-        <p:nvSpPr>
-          <p:cNvPr id="19" name="Rounded Rectangle 18"/>
-          <p:cNvSpPr/>
-          <p:nvPr/>
-        </p:nvSpPr>
-        <p:spPr>
-          <a:xfrm>
-            <a:off x="457200" y="4078224"/>
-            <a:ext cx="11247120" cy="621792"/>
-          </a:xfrm>
-          <a:prstGeom prst="roundRect">
-            <a:avLst>
-              <a:gd name="adj" fmla="val 5000"/>
-            </a:avLst>
-          </a:prstGeom>
-          <a:solidFill>
-            <a:srgbClr val="FFFFFF"/>
-          </a:solidFill>
-          <a:ln w="9525">
-            <a:solidFill>
-              <a:srgbClr val="DDDDDD"/>
-            </a:solidFill>
-          </a:ln>
-        </p:spPr>
-        <p:style>
-          <a:lnRef idx="1">
-            <a:schemeClr val="accent1"/>
-          </a:lnRef>
-          <a:fillRef idx="3">
-            <a:schemeClr val="accent1"/>
-          </a:fillRef>
-          <a:effectRef idx="2">
-            <a:schemeClr val="accent1"/>
-          </a:effectRef>
-          <a:fontRef idx="minor">
-            <a:schemeClr val="lt1"/>
-          </a:fontRef>
-        </p:style>
-        <p:txBody>
-          <a:bodyPr rtlCol="0" anchor="ctr"/>
-          <a:lstStyle/>
-          <a:p>
-            <a:pPr algn="ctr"/>
-          </a:p>
-        </p:txBody>
-      </p:sp>
-      <p:sp>
-        <p:nvSpPr>
-          <p:cNvPr id="20" name="TextBox 19"/>
-          <p:cNvSpPr txBox="1"/>
-          <p:nvPr/>
-        </p:nvSpPr>
-        <p:spPr>
-          <a:xfrm>
-            <a:off x="640080" y="4078224"/>
-            <a:ext cx="1463040" cy="621792"/>
-          </a:xfrm>
-          <a:prstGeom prst="rect">
-            <a:avLst/>
-          </a:prstGeom>
-          <a:noFill/>
-        </p:spPr>
-        <p:txBody>
-          <a:bodyPr wrap="square" anchor="ctr"/>
-          <a:lstStyle/>
-          <a:p>
-            <a:pPr algn="l">
-              <a:spcAft>
-                <a:spcPts val="200"/>
-              </a:spcAft>
-            </a:pPr>
-            <a:r>
-              <a:rPr sz="1600" b="1">
-                <a:solidFill>
-                  <a:srgbClr val="C7000B"/>
-                </a:solidFill>
-                <a:latin typeface="Microsoft YaHei"/>
-                <a:ea typeface="Microsoft YaHei"/>
-                <a:cs typeface="Microsoft YaHei"/>
-              </a:rPr>
-              <a:t>演进</a:t>
-            </a:r>
-          </a:p>
-        </p:txBody>
-      </p:sp>
-      <p:sp>
-        <p:nvSpPr>
-          <p:cNvPr id="21" name="TextBox 20"/>
-          <p:cNvSpPr txBox="1"/>
-          <p:nvPr/>
-        </p:nvSpPr>
-        <p:spPr>
-          <a:xfrm>
-            <a:off x="2286000" y="4078224"/>
-            <a:ext cx="9235440" cy="621792"/>
-          </a:xfrm>
-          <a:prstGeom prst="rect">
-            <a:avLst/>
-          </a:prstGeom>
-          <a:noFill/>
-        </p:spPr>
-        <p:txBody>
-          <a:bodyPr wrap="square" anchor="ctr"/>
-          <a:lstStyle/>
-          <a:p>
-            <a:pPr algn="l">
-              <a:spcAft>
-                <a:spcPts val="200"/>
-              </a:spcAft>
-            </a:pPr>
-            <a:r>
-              <a:rPr sz="1300" b="0">
-                <a:solidFill>
-                  <a:srgbClr val="1A1A1A"/>
-                </a:solidFill>
-                <a:latin typeface="Microsoft YaHei"/>
-                <a:ea typeface="Microsoft YaHei"/>
-                <a:cs typeface="Microsoft YaHei"/>
-              </a:rPr>
-              <a:t>零样本基线 → 千人千面 → Token 嵌入大模型；接口不变。</a:t>
-            </a:r>
-          </a:p>
-        </p:txBody>
-      </p:sp>
-      <p:sp>
-        <p:nvSpPr>
-          <p:cNvPr id="22" name="Rounded Rectangle 21"/>
-          <p:cNvSpPr/>
-          <p:nvPr/>
-        </p:nvSpPr>
-        <p:spPr>
-          <a:xfrm>
-            <a:off x="457200" y="4773168"/>
-            <a:ext cx="11247120" cy="621792"/>
-          </a:xfrm>
-          <a:prstGeom prst="roundRect">
-            <a:avLst>
-              <a:gd name="adj" fmla="val 5000"/>
-            </a:avLst>
-          </a:prstGeom>
-          <a:solidFill>
-            <a:srgbClr val="F7F7F7"/>
-          </a:solidFill>
-          <a:ln w="9525">
-            <a:solidFill>
-              <a:srgbClr val="DDDDDD"/>
-            </a:solidFill>
-          </a:ln>
-        </p:spPr>
-        <p:style>
-          <a:lnRef idx="1">
-            <a:schemeClr val="accent1"/>
-          </a:lnRef>
-          <a:fillRef idx="3">
-            <a:schemeClr val="accent1"/>
-          </a:fillRef>
-          <a:effectRef idx="2">
-            <a:schemeClr val="accent1"/>
-          </a:effectRef>
-          <a:fontRef idx="minor">
-            <a:schemeClr val="lt1"/>
-          </a:fontRef>
-        </p:style>
-        <p:txBody>
-          <a:bodyPr rtlCol="0" anchor="ctr"/>
-          <a:lstStyle/>
-          <a:p>
-            <a:pPr algn="ctr"/>
-          </a:p>
-        </p:txBody>
-      </p:sp>
-      <p:sp>
-        <p:nvSpPr>
-          <p:cNvPr id="23" name="TextBox 22"/>
-          <p:cNvSpPr txBox="1"/>
-          <p:nvPr/>
-        </p:nvSpPr>
-        <p:spPr>
-          <a:xfrm>
-            <a:off x="640080" y="4773168"/>
-            <a:ext cx="1463040" cy="621792"/>
-          </a:xfrm>
-          <a:prstGeom prst="rect">
-            <a:avLst/>
-          </a:prstGeom>
-          <a:noFill/>
-        </p:spPr>
-        <p:txBody>
-          <a:bodyPr wrap="square" anchor="ctr"/>
-          <a:lstStyle/>
-          <a:p>
-            <a:pPr algn="l">
-              <a:spcAft>
-                <a:spcPts val="200"/>
-              </a:spcAft>
-            </a:pPr>
-            <a:r>
-              <a:rPr sz="1600" b="1">
-                <a:solidFill>
-                  <a:srgbClr val="C7000B"/>
-                </a:solidFill>
-                <a:latin typeface="Microsoft YaHei"/>
-                <a:ea typeface="Microsoft YaHei"/>
-                <a:cs typeface="Microsoft YaHei"/>
-              </a:rPr>
-              <a:t>许可</a:t>
-            </a:r>
-          </a:p>
-        </p:txBody>
-      </p:sp>
-      <p:sp>
-        <p:nvSpPr>
-          <p:cNvPr id="24" name="TextBox 23"/>
-          <p:cNvSpPr txBox="1"/>
-          <p:nvPr/>
-        </p:nvSpPr>
-        <p:spPr>
-          <a:xfrm>
-            <a:off x="2286000" y="4773168"/>
-            <a:ext cx="9235440" cy="621792"/>
-          </a:xfrm>
-          <a:prstGeom prst="rect">
-            <a:avLst/>
-          </a:prstGeom>
-          <a:noFill/>
-        </p:spPr>
-        <p:txBody>
-          <a:bodyPr wrap="square" anchor="ctr"/>
-          <a:lstStyle/>
-          <a:p>
-            <a:pPr algn="l">
-              <a:spcAft>
-                <a:spcPts val="200"/>
-              </a:spcAft>
-            </a:pPr>
-            <a:r>
-              <a:rPr sz="1300" b="0">
-                <a:solidFill>
-                  <a:srgbClr val="1A1A1A"/>
-                </a:solidFill>
-                <a:latin typeface="Microsoft YaHei"/>
-                <a:ea typeface="Microsoft YaHei"/>
-                <a:cs typeface="Microsoft YaHei"/>
-              </a:rPr>
-              <a:t>3.0 权重 NC；≤2.5 Apache；UniTS / MOMENT MIT；平台层与许可层解耦。</a:t>
-            </a:r>
-          </a:p>
-        </p:txBody>
-      </p:sp>
-      <p:sp>
-        <p:nvSpPr>
-          <p:cNvPr id="25" name="Rounded Rectangle 24"/>
-          <p:cNvSpPr/>
-          <p:nvPr/>
-        </p:nvSpPr>
-        <p:spPr>
-          <a:xfrm>
-            <a:off x="457200" y="5468112"/>
-            <a:ext cx="11247120" cy="621792"/>
-          </a:xfrm>
-          <a:prstGeom prst="roundRect">
-            <a:avLst>
-              <a:gd name="adj" fmla="val 5000"/>
-            </a:avLst>
-          </a:prstGeom>
-          <a:solidFill>
-            <a:srgbClr val="FFFFFF"/>
-          </a:solidFill>
-          <a:ln w="9525">
-            <a:solidFill>
-              <a:srgbClr val="DDDDDD"/>
-            </a:solidFill>
-          </a:ln>
-        </p:spPr>
-        <p:style>
-          <a:lnRef idx="1">
-            <a:schemeClr val="accent1"/>
-          </a:lnRef>
-          <a:fillRef idx="3">
-            <a:schemeClr val="accent1"/>
-          </a:fillRef>
-          <a:effectRef idx="2">
-            <a:schemeClr val="accent1"/>
-          </a:effectRef>
-          <a:fontRef idx="minor">
-            <a:schemeClr val="lt1"/>
-          </a:fontRef>
-        </p:style>
-        <p:txBody>
-          <a:bodyPr rtlCol="0" anchor="ctr"/>
-          <a:lstStyle/>
-          <a:p>
-            <a:pPr algn="ctr"/>
-          </a:p>
-        </p:txBody>
-      </p:sp>
-      <p:sp>
-        <p:nvSpPr>
-          <p:cNvPr id="26" name="TextBox 25"/>
-          <p:cNvSpPr txBox="1"/>
-          <p:nvPr/>
-        </p:nvSpPr>
-        <p:spPr>
-          <a:xfrm>
-            <a:off x="640080" y="5468112"/>
-            <a:ext cx="1463040" cy="621792"/>
-          </a:xfrm>
-          <a:prstGeom prst="rect">
-            <a:avLst/>
-          </a:prstGeom>
-          <a:noFill/>
-        </p:spPr>
-        <p:txBody>
-          <a:bodyPr wrap="square" anchor="ctr"/>
-          <a:lstStyle/>
-          <a:p>
-            <a:pPr algn="l">
-              <a:spcAft>
-                <a:spcPts val="200"/>
-              </a:spcAft>
-            </a:pPr>
-            <a:r>
-              <a:rPr sz="1600" b="1">
-                <a:solidFill>
-                  <a:srgbClr val="C7000B"/>
-                </a:solidFill>
-                <a:latin typeface="Microsoft YaHei"/>
-                <a:ea typeface="Microsoft YaHei"/>
-                <a:cs typeface="Microsoft YaHei"/>
-              </a:rPr>
-              <a:t>不做</a:t>
-            </a:r>
-          </a:p>
-        </p:txBody>
-      </p:sp>
-      <p:sp>
-        <p:nvSpPr>
-          <p:cNvPr id="27" name="TextBox 26"/>
-          <p:cNvSpPr txBox="1"/>
-          <p:nvPr/>
-        </p:nvSpPr>
-        <p:spPr>
-          <a:xfrm>
-            <a:off x="2286000" y="5468112"/>
-            <a:ext cx="9235440" cy="621792"/>
-          </a:xfrm>
-          <a:prstGeom prst="rect">
-            <a:avLst/>
-          </a:prstGeom>
-          <a:noFill/>
-        </p:spPr>
-        <p:txBody>
-          <a:bodyPr wrap="square" anchor="ctr"/>
-          <a:lstStyle/>
-          <a:p>
-            <a:pPr algn="l">
-              <a:spcAft>
-                <a:spcPts val="200"/>
-              </a:spcAft>
-            </a:pPr>
-            <a:r>
-              <a:rPr sz="1300" b="0">
-                <a:solidFill>
-                  <a:srgbClr val="1A1A1A"/>
-                </a:solidFill>
-                <a:latin typeface="Microsoft YaHei"/>
-                <a:ea typeface="Microsoft YaHei"/>
-                <a:cs typeface="Microsoft YaHei"/>
-              </a:rPr>
-              <a:t>场景 Pack、整机、芯片、自建大模型、世界视频、把 TimesFM 当分类模型宣传。</a:t>
-            </a:r>
-          </a:p>
-        </p:txBody>
-      </p:sp>
-      <p:sp>
-        <p:nvSpPr>
-          <p:cNvPr id="28" name="Rectangle 27"/>
-          <p:cNvSpPr/>
-          <p:nvPr/>
-        </p:nvSpPr>
-        <p:spPr>
-          <a:xfrm>
-            <a:off x="0" y="6537960"/>
-            <a:ext cx="12191695" cy="320040"/>
-          </a:xfrm>
-          <a:prstGeom prst="rect">
-            <a:avLst/>
-          </a:prstGeom>
-          <a:solidFill>
-            <a:srgbClr val="F2F2F2"/>
-          </a:solidFill>
-          <a:ln>
-            <a:noFill/>
-          </a:ln>
-        </p:spPr>
-        <p:style>
-          <a:lnRef idx="1">
-            <a:schemeClr val="accent1"/>
-          </a:lnRef>
-          <a:fillRef idx="3">
-            <a:schemeClr val="accent1"/>
-          </a:fillRef>
-          <a:effectRef idx="2">
-            <a:schemeClr val="accent1"/>
-          </a:effectRef>
-          <a:fontRef idx="minor">
-            <a:schemeClr val="lt1"/>
-          </a:fontRef>
-        </p:style>
-        <p:txBody>
-          <a:bodyPr rtlCol="0" anchor="ctr"/>
-          <a:lstStyle/>
-          <a:p>
-            <a:pPr algn="ctr"/>
-          </a:p>
-        </p:txBody>
-      </p:sp>
-      <p:sp>
-        <p:nvSpPr>
-          <p:cNvPr id="29" name="TextBox 28"/>
-          <p:cNvSpPr txBox="1"/>
-          <p:nvPr/>
-        </p:nvSpPr>
-        <p:spPr>
-          <a:xfrm>
-            <a:off x="457200" y="6537960"/>
-            <a:ext cx="8229600" cy="320040"/>
-          </a:xfrm>
-          <a:prstGeom prst="rect">
-            <a:avLst/>
-          </a:prstGeom>
-          <a:noFill/>
-        </p:spPr>
-        <p:txBody>
-          <a:bodyPr wrap="square" anchor="ctr"/>
-          <a:lstStyle/>
-          <a:p>
-            <a:pPr algn="l">
-              <a:spcAft>
-                <a:spcPts val="200"/>
-              </a:spcAft>
-            </a:pPr>
-            <a:r>
-              <a:rPr sz="900" b="0">
-                <a:solidFill>
-                  <a:srgbClr val="898989"/>
-                </a:solidFill>
-                <a:latin typeface="Microsoft YaHei"/>
-                <a:ea typeface="Microsoft YaHei"/>
-                <a:cs typeface="Microsoft YaHei"/>
-              </a:rPr>
-              <a:t>华为  ·  AI 物理感知平台  ·  决策    |    Security Level: Internal</a:t>
-            </a:r>
-          </a:p>
-        </p:txBody>
-      </p:sp>
-      <p:sp>
-        <p:nvSpPr>
-          <p:cNvPr id="30" name="TextBox 29"/>
-          <p:cNvSpPr txBox="1"/>
-          <p:nvPr/>
-        </p:nvSpPr>
-        <p:spPr>
-          <a:xfrm>
-            <a:off x="10241280" y="6537960"/>
-            <a:ext cx="1554480" cy="320040"/>
-          </a:xfrm>
-          <a:prstGeom prst="rect">
-            <a:avLst/>
-          </a:prstGeom>
-          <a:noFill/>
-        </p:spPr>
-        <p:txBody>
-          <a:bodyPr wrap="square" anchor="ctr"/>
-          <a:lstStyle/>
-          <a:p>
-            <a:pPr algn="r">
-              <a:spcAft>
-                <a:spcPts val="200"/>
-              </a:spcAft>
-            </a:pPr>
-            <a:r>
-              <a:rPr sz="900" b="0">
-                <a:solidFill>
-                  <a:srgbClr val="898989"/>
-                </a:solidFill>
-                <a:latin typeface="Microsoft YaHei"/>
-                <a:ea typeface="Microsoft YaHei"/>
-                <a:cs typeface="Microsoft YaHei"/>
-              </a:rPr>
-              <a:t>11  /  11</a:t>
             </a:r>
           </a:p>
         </p:txBody>
@@ -9653,7 +7628,7 @@
                 <a:ea typeface="Microsoft YaHei"/>
                 <a:cs typeface="Microsoft YaHei"/>
               </a:rPr>
-              <a:t>三个痛点，一个根因：缺统一表征与统一接口</a:t>
+              <a:t>三个痛点，一个根因：缺统一特征与统一接口</a:t>
             </a:r>
           </a:p>
         </p:txBody>
@@ -10487,7 +8462,7 @@
                 <a:ea typeface="Microsoft YaHei"/>
                 <a:cs typeface="Microsoft YaHei"/>
               </a:rPr>
-              <a:t>根因：没有「统一表征 + 统一接口」的物理时序底座——这正是平台的定位。</a:t>
+              <a:t>根因：没有「统一特征 + 统一接口」的物理时序底座——这正是平台的定位。</a:t>
             </a:r>
           </a:p>
         </p:txBody>
@@ -10608,7 +8583,7 @@
                 <a:ea typeface="Microsoft YaHei"/>
                 <a:cs typeface="Microsoft YaHei"/>
               </a:rPr>
-              <a:t>2  /  11</a:t>
+              <a:t>2  /  7</a:t>
             </a:r>
           </a:p>
         </p:txBody>
@@ -12844,7 +10819,7 @@
                 <a:ea typeface="Microsoft YaHei"/>
                 <a:cs typeface="Microsoft YaHei"/>
               </a:rPr>
-              <a:t>3  /  11</a:t>
+              <a:t>3  /  7</a:t>
             </a:r>
           </a:p>
         </p:txBody>
@@ -14467,7 +12442,7 @@
                 <a:ea typeface="Microsoft YaHei"/>
                 <a:cs typeface="Microsoft YaHei"/>
               </a:rPr>
-              <a:t>多模态人体感知表征</a:t>
+              <a:t>多模态人体感知特征</a:t>
             </a:r>
           </a:p>
         </p:txBody>
@@ -15031,7 +13006,7 @@
                 <a:ea typeface="Microsoft YaHei"/>
                 <a:cs typeface="Microsoft YaHei"/>
               </a:rPr>
-              <a:t>4  /  11</a:t>
+              <a:t>4  /  7</a:t>
             </a:r>
           </a:p>
         </p:txBody>
@@ -15252,7 +13227,7 @@
                 <a:ea typeface="Microsoft YaHei"/>
                 <a:cs typeface="Microsoft YaHei"/>
               </a:rPr>
-              <a:t>平台不做场景：只把模型能力收敛成 接入 → 表征 → 预测 / 分类。</a:t>
+              <a:t>平台不做场景：只把模型能力收敛成 接入 → 特征 → 预测 / 分类。</a:t>
             </a:r>
           </a:p>
         </p:txBody>
@@ -15950,7 +13925,7 @@
                 <a:ea typeface="Microsoft YaHei"/>
                 <a:cs typeface="Microsoft YaHei"/>
               </a:rPr>
-              <a:t>平台边界：交付接入校验、共享表征、预测 / 分类双接口、评测工具链；不交付场景 Pack、整机、芯片。</a:t>
+              <a:t>平台边界：交付接入校验、共享特征、预测 / 分类双接口、评测工具链；不交付场景 Pack、整机、芯片。</a:t>
             </a:r>
           </a:p>
         </p:txBody>
@@ -16071,7 +14046,7 @@
                 <a:ea typeface="Microsoft YaHei"/>
                 <a:cs typeface="Microsoft YaHei"/>
               </a:rPr>
-              <a:t>5  /  11</a:t>
+              <a:t>5  /  7</a:t>
             </a:r>
           </a:p>
         </p:txBody>
@@ -16886,7 +14861,7 @@
                 <a:ea typeface="Microsoft YaHei"/>
                 <a:cs typeface="Microsoft YaHei"/>
               </a:rPr>
-              <a:t>基于共享表征 + 任务 token / 线性探针。</a:t>
+              <a:t>基于共享特征 + 任务 token / 线性探针。</a:t>
             </a:r>
           </a:p>
         </p:txBody>
@@ -17007,7 +14982,7 @@
                 <a:ea typeface="Microsoft YaHei"/>
                 <a:cs typeface="Microsoft YaHei"/>
               </a:rPr>
-              <a:t>6  /  11</a:t>
+              <a:t>6  /  7</a:t>
             </a:r>
           </a:p>
         </p:txBody>
@@ -17107,7 +15082,7 @@
                 <a:ea typeface="Microsoft YaHei"/>
                 <a:cs typeface="Microsoft YaHei"/>
               </a:rPr>
-              <a:t>6  预测实现</a:t>
+              <a:t>6  代际演进</a:t>
             </a:r>
           </a:p>
         </p:txBody>
@@ -17146,7 +15121,7 @@
                 <a:ea typeface="Microsoft YaHei"/>
                 <a:cs typeface="Microsoft YaHei"/>
               </a:rPr>
-              <a:t>TimesFM-3 式：CPM 一次前向出 9 分位数</a:t>
+              <a:t>Gen1 零样本基线 → Gen2 千人千面 → Gen3 Token 嵌入大模型</a:t>
             </a:r>
           </a:p>
         </p:txBody>
@@ -17228,7 +15203,7 @@
                 <a:ea typeface="Microsoft YaHei"/>
                 <a:cs typeface="Microsoft YaHei"/>
               </a:rPr>
-              <a:t>预测是平台原生能力；接口固定，底座可换。</a:t>
+              <a:t>接口不变，能力逐代升级；每代回答一个业务问题。</a:t>
             </a:r>
           </a:p>
         </p:txBody>
@@ -17241,8 +15216,8 @@
         </p:nvSpPr>
         <p:spPr>
           <a:xfrm>
-            <a:off x="457200" y="1371600"/>
-            <a:ext cx="5623560" cy="1298448"/>
+            <a:off x="411480" y="1417320"/>
+            <a:ext cx="2788920" cy="3566160"/>
           </a:xfrm>
           <a:prstGeom prst="roundRect">
             <a:avLst>
@@ -17282,40 +15257,44 @@
       </p:sp>
       <p:sp>
         <p:nvSpPr>
-          <p:cNvPr id="8" name="TextBox 7"/>
-          <p:cNvSpPr txBox="1"/>
-          <p:nvPr/>
-        </p:nvSpPr>
-        <p:spPr>
-          <a:xfrm>
-            <a:off x="658368" y="1508760"/>
-            <a:ext cx="5212080" cy="320040"/>
-          </a:xfrm>
-          <a:prstGeom prst="rect">
-            <a:avLst/>
-          </a:prstGeom>
-          <a:noFill/>
-        </p:spPr>
-        <p:txBody>
-          <a:bodyPr wrap="square" anchor="t"/>
-          <a:lstStyle/>
-          <a:p>
-            <a:pPr algn="l">
-              <a:spcAft>
-                <a:spcPts val="200"/>
-              </a:spcAft>
-            </a:pPr>
-            <a:r>
-              <a:rPr sz="1600" b="1">
-                <a:solidFill>
-                  <a:srgbClr val="C7000B"/>
-                </a:solidFill>
-                <a:latin typeface="Microsoft YaHei"/>
-                <a:ea typeface="Microsoft YaHei"/>
-                <a:cs typeface="Microsoft YaHei"/>
-              </a:rPr>
-              <a:t>输入</a:t>
-            </a:r>
+          <p:cNvPr id="8" name="Rectangle 7"/>
+          <p:cNvSpPr/>
+          <p:nvPr/>
+        </p:nvSpPr>
+        <p:spPr>
+          <a:xfrm>
+            <a:off x="411480" y="1417320"/>
+            <a:ext cx="2788920" cy="73152"/>
+          </a:xfrm>
+          <a:prstGeom prst="rect">
+            <a:avLst/>
+          </a:prstGeom>
+          <a:solidFill>
+            <a:srgbClr val="C7000B"/>
+          </a:solidFill>
+          <a:ln>
+            <a:noFill/>
+          </a:ln>
+        </p:spPr>
+        <p:style>
+          <a:lnRef idx="1">
+            <a:schemeClr val="accent1"/>
+          </a:lnRef>
+          <a:fillRef idx="3">
+            <a:schemeClr val="accent1"/>
+          </a:fillRef>
+          <a:effectRef idx="2">
+            <a:schemeClr val="accent1"/>
+          </a:effectRef>
+          <a:fontRef idx="minor">
+            <a:schemeClr val="lt1"/>
+          </a:fontRef>
+        </p:style>
+        <p:txBody>
+          <a:bodyPr rtlCol="0" anchor="ctr"/>
+          <a:lstStyle/>
+          <a:p>
+            <a:pPr algn="ctr"/>
           </a:p>
         </p:txBody>
       </p:sp>
@@ -17327,8 +15306,8 @@
         </p:nvSpPr>
         <p:spPr>
           <a:xfrm>
-            <a:off x="658368" y="1874520"/>
-            <a:ext cx="5212080" cy="685800"/>
+            <a:off x="548640" y="1645920"/>
+            <a:ext cx="2514600" cy="365760"/>
           </a:xfrm>
           <a:prstGeom prst="rect">
             <a:avLst/>
@@ -17345,7 +15324,46 @@
               </a:spcAft>
             </a:pPr>
             <a:r>
-              <a:rPr sz="1300" b="0">
+              <a:rPr sz="1600" b="1">
+                <a:solidFill>
+                  <a:srgbClr val="C7000B"/>
+                </a:solidFill>
+                <a:latin typeface="Microsoft YaHei"/>
+                <a:ea typeface="Microsoft YaHei"/>
+                <a:cs typeface="Microsoft YaHei"/>
+              </a:rPr>
+              <a:t>Gen1  零样本基线</a:t>
+            </a:r>
+          </a:p>
+        </p:txBody>
+      </p:sp>
+      <p:sp>
+        <p:nvSpPr>
+          <p:cNvPr id="10" name="TextBox 9"/>
+          <p:cNvSpPr txBox="1"/>
+          <p:nvPr/>
+        </p:nvSpPr>
+        <p:spPr>
+          <a:xfrm>
+            <a:off x="548640" y="2148840"/>
+            <a:ext cx="2514600" cy="2651760"/>
+          </a:xfrm>
+          <a:prstGeom prst="rect">
+            <a:avLst/>
+          </a:prstGeom>
+          <a:noFill/>
+        </p:spPr>
+        <p:txBody>
+          <a:bodyPr wrap="square" anchor="t"/>
+          <a:lstStyle/>
+          <a:p>
+            <a:pPr algn="l">
+              <a:spcAft>
+                <a:spcPts val="200"/>
+              </a:spcAft>
+            </a:pPr>
+            <a:r>
+              <a:rPr sz="1200" b="0">
                 <a:solidFill>
                   <a:srgbClr val="555757"/>
                 </a:solidFill>
@@ -17353,21 +15371,75 @@
                 <a:ea typeface="Microsoft YaHei"/>
                 <a:cs typeface="Microsoft YaHei"/>
               </a:rPr>
-              <a:t>历史段 ≤ 15,360；变元 ≤ 32；目标 / 仅历史 / 历史+未来 三类变元。</a:t>
-            </a:r>
-          </a:p>
-        </p:txBody>
-      </p:sp>
-      <p:sp>
-        <p:nvSpPr>
-          <p:cNvPr id="10" name="Rounded Rectangle 9"/>
+              <a:t>预训练底座直接上岗。</a:t>
+            </a:r>
+          </a:p>
+          <a:p>
+            <a:pPr algn="l">
+              <a:spcAft>
+                <a:spcPts val="200"/>
+              </a:spcAft>
+            </a:pPr>
+            <a:r>
+              <a:rPr sz="1200" b="0">
+                <a:solidFill>
+                  <a:srgbClr val="555757"/>
+                </a:solidFill>
+                <a:latin typeface="Microsoft YaHei"/>
+                <a:ea typeface="Microsoft YaHei"/>
+                <a:cs typeface="Microsoft YaHei"/>
+              </a:rPr>
+              <a:t>预测零样本（TimesFM-3）；</a:t>
+            </a:r>
+          </a:p>
+          <a:p>
+            <a:pPr algn="l">
+              <a:spcAft>
+                <a:spcPts val="200"/>
+              </a:spcAft>
+            </a:pPr>
+            <a:r>
+              <a:rPr sz="1200" b="0">
+                <a:solidFill>
+                  <a:srgbClr val="555757"/>
+                </a:solidFill>
+                <a:latin typeface="Microsoft YaHei"/>
+                <a:ea typeface="Microsoft YaHei"/>
+                <a:cs typeface="Microsoft YaHei"/>
+              </a:rPr>
+              <a:t>分类走规则 / 线性探针（UniTS / MOMENT）。</a:t>
+            </a:r>
+          </a:p>
+          <a:p>
+            <a:pPr algn="l">
+              <a:spcAft>
+                <a:spcPts val="200"/>
+              </a:spcAft>
+            </a:pPr>
+            <a:r>
+              <a:rPr sz="1200" b="0">
+                <a:solidFill>
+                  <a:srgbClr val="555757"/>
+                </a:solidFill>
+                <a:latin typeface="Microsoft YaHei"/>
+                <a:ea typeface="Microsoft YaHei"/>
+                <a:cs typeface="Microsoft YaHei"/>
+              </a:rPr>
+              <a:t>回答：底座行不行 → 统一评测基线。</a:t>
+            </a:r>
+          </a:p>
+        </p:txBody>
+      </p:sp>
+      <p:sp>
+        <p:nvSpPr>
+          <p:cNvPr id="11" name="Rounded Rectangle 10"/>
           <p:cNvSpPr/>
           <p:nvPr/>
         </p:nvSpPr>
         <p:spPr>
           <a:xfrm>
-            <a:off x="6263640" y="1371600"/>
-            <a:ext cx="5623560" cy="1298448"/>
+            <a:off x="3337560" y="1417320"/>
+            <a:ext cx="2788920" cy="3566160"/>
           </a:xfrm>
           <a:prstGeom prst="roundRect">
             <a:avLst>
@@ -17407,14 +15479,57 @@
       </p:sp>
       <p:sp>
         <p:nvSpPr>
-          <p:cNvPr id="11" name="TextBox 10"/>
+          <p:cNvPr id="12" name="Rectangle 11"/>
+          <p:cNvSpPr/>
+          <p:nvPr/>
+        </p:nvSpPr>
+        <p:spPr>
+          <a:xfrm>
+            <a:off x="3337560" y="1417320"/>
+            <a:ext cx="2788920" cy="73152"/>
+          </a:xfrm>
+          <a:prstGeom prst="rect">
+            <a:avLst/>
+          </a:prstGeom>
+          <a:solidFill>
+            <a:srgbClr val="ED6D00"/>
+          </a:solidFill>
+          <a:ln>
+            <a:noFill/>
+          </a:ln>
+        </p:spPr>
+        <p:style>
+          <a:lnRef idx="1">
+            <a:schemeClr val="accent1"/>
+          </a:lnRef>
+          <a:fillRef idx="3">
+            <a:schemeClr val="accent1"/>
+          </a:fillRef>
+          <a:effectRef idx="2">
+            <a:schemeClr val="accent1"/>
+          </a:effectRef>
+          <a:fontRef idx="minor">
+            <a:schemeClr val="lt1"/>
+          </a:fontRef>
+        </p:style>
+        <p:txBody>
+          <a:bodyPr rtlCol="0" anchor="ctr"/>
+          <a:lstStyle/>
+          <a:p>
+            <a:pPr algn="ctr"/>
+          </a:p>
+        </p:txBody>
+      </p:sp>
+      <p:sp>
+        <p:nvSpPr>
+          <p:cNvPr id="13" name="TextBox 12"/>
           <p:cNvSpPr txBox="1"/>
           <p:nvPr/>
         </p:nvSpPr>
         <p:spPr>
           <a:xfrm>
-            <a:off x="6464808" y="1508760"/>
-            <a:ext cx="5212080" cy="320040"/>
+            <a:off x="3474720" y="1645920"/>
+            <a:ext cx="2514600" cy="365760"/>
           </a:xfrm>
           <a:prstGeom prst="rect">
             <a:avLst/>
@@ -17433,27 +15548,27 @@
             <a:r>
               <a:rPr sz="1600" b="1">
                 <a:solidFill>
-                  <a:srgbClr val="C7000B"/>
-                </a:solidFill>
-                <a:latin typeface="Microsoft YaHei"/>
-                <a:ea typeface="Microsoft YaHei"/>
-                <a:cs typeface="Microsoft YaHei"/>
-              </a:rPr>
-              <a:t>特征</a:t>
-            </a:r>
-          </a:p>
-        </p:txBody>
-      </p:sp>
-      <p:sp>
-        <p:nvSpPr>
-          <p:cNvPr id="12" name="TextBox 11"/>
+                  <a:srgbClr val="ED6D00"/>
+                </a:solidFill>
+                <a:latin typeface="Microsoft YaHei"/>
+                <a:ea typeface="Microsoft YaHei"/>
+                <a:cs typeface="Microsoft YaHei"/>
+              </a:rPr>
+              <a:t>Gen2  千人千面</a:t>
+            </a:r>
+          </a:p>
+        </p:txBody>
+      </p:sp>
+      <p:sp>
+        <p:nvSpPr>
+          <p:cNvPr id="14" name="TextBox 13"/>
           <p:cNvSpPr txBox="1"/>
           <p:nvPr/>
         </p:nvSpPr>
         <p:spPr>
           <a:xfrm>
-            <a:off x="6464808" y="1874520"/>
-            <a:ext cx="5212080" cy="685800"/>
+            <a:off x="3474720" y="2148840"/>
+            <a:ext cx="2514600" cy="2651760"/>
           </a:xfrm>
           <a:prstGeom prst="rect">
             <a:avLst/>
@@ -17470,7 +15585,7 @@
               </a:spcAft>
             </a:pPr>
             <a:r>
-              <a:rPr sz="1300" b="0">
+              <a:rPr sz="1200" b="0">
                 <a:solidFill>
                   <a:srgbClr val="555757"/>
                 </a:solidFill>
@@ -17478,21 +15593,75 @@
                 <a:ea typeface="Microsoft YaHei"/>
                 <a:cs typeface="Microsoft YaHei"/>
               </a:rPr>
-              <a:t>pad32 → 去趋势 → RevIN → patch 192 → ResidualBlock → 1280 token。</a:t>
-            </a:r>
-          </a:p>
-        </p:txBody>
-      </p:sp>
-      <p:sp>
-        <p:nvSpPr>
-          <p:cNvPr id="13" name="Rounded Rectangle 12"/>
+              <a:t>轻量适配到每设备、每用户。</a:t>
+            </a:r>
+          </a:p>
+          <a:p>
+            <a:pPr algn="l">
+              <a:spcAft>
+                <a:spcPts val="200"/>
+              </a:spcAft>
+            </a:pPr>
+            <a:r>
+              <a:rPr sz="1200" b="0">
+                <a:solidFill>
+                  <a:srgbClr val="555757"/>
+                </a:solidFill>
+                <a:latin typeface="Microsoft YaHei"/>
+                <a:ea typeface="Microsoft YaHei"/>
+                <a:cs typeface="Microsoft YaHei"/>
+              </a:rPr>
+              <a:t>LoRA / 提示微调：TartanIMU 仅 1.1M 参数；</a:t>
+            </a:r>
+          </a:p>
+          <a:p>
+            <a:pPr algn="l">
+              <a:spcAft>
+                <a:spcPts val="200"/>
+              </a:spcAft>
+            </a:pPr>
+            <a:r>
+              <a:rPr sz="1200" b="0">
+                <a:solidFill>
+                  <a:srgbClr val="555757"/>
+                </a:solidFill>
+                <a:latin typeface="Microsoft YaHei"/>
+                <a:ea typeface="Microsoft YaHei"/>
+                <a:cs typeface="Microsoft YaHei"/>
+              </a:rPr>
+              <a:t>Meta EMG 个性化后再 +16%。</a:t>
+            </a:r>
+          </a:p>
+          <a:p>
+            <a:pPr algn="l">
+              <a:spcAft>
+                <a:spcPts val="200"/>
+              </a:spcAft>
+            </a:pPr>
+            <a:r>
+              <a:rPr sz="1200" b="0">
+                <a:solidFill>
+                  <a:srgbClr val="555757"/>
+                </a:solidFill>
+                <a:latin typeface="Microsoft YaHei"/>
+                <a:ea typeface="Microsoft YaHei"/>
+                <a:cs typeface="Microsoft YaHei"/>
+              </a:rPr>
+              <a:t>回答：换设备换人还行不行 → 画像进数据规格。</a:t>
+            </a:r>
+          </a:p>
+        </p:txBody>
+      </p:sp>
+      <p:sp>
+        <p:nvSpPr>
+          <p:cNvPr id="15" name="Rounded Rectangle 14"/>
           <p:cNvSpPr/>
           <p:nvPr/>
         </p:nvSpPr>
         <p:spPr>
           <a:xfrm>
-            <a:off x="457200" y="2788920"/>
-            <a:ext cx="5623560" cy="1298448"/>
+            <a:off x="6263640" y="1417320"/>
+            <a:ext cx="2788920" cy="3566160"/>
           </a:xfrm>
           <a:prstGeom prst="roundRect">
             <a:avLst>
@@ -17532,2132 +15701,6 @@
       </p:sp>
       <p:sp>
         <p:nvSpPr>
-          <p:cNvPr id="14" name="TextBox 13"/>
-          <p:cNvSpPr txBox="1"/>
-          <p:nvPr/>
-        </p:nvSpPr>
-        <p:spPr>
-          <a:xfrm>
-            <a:off x="658368" y="2926080"/>
-            <a:ext cx="5212080" cy="320040"/>
-          </a:xfrm>
-          <a:prstGeom prst="rect">
-            <a:avLst/>
-          </a:prstGeom>
-          <a:noFill/>
-        </p:spPr>
-        <p:txBody>
-          <a:bodyPr wrap="square" anchor="t"/>
-          <a:lstStyle/>
-          <a:p>
-            <a:pPr algn="l">
-              <a:spcAft>
-                <a:spcPts val="200"/>
-              </a:spcAft>
-            </a:pPr>
-            <a:r>
-              <a:rPr sz="1600" b="1">
-                <a:solidFill>
-                  <a:srgbClr val="C7000B"/>
-                </a:solidFill>
-                <a:latin typeface="Microsoft YaHei"/>
-                <a:ea typeface="Microsoft YaHei"/>
-                <a:cs typeface="Microsoft YaHei"/>
-              </a:rPr>
-              <a:t>表征</a:t>
-            </a:r>
-          </a:p>
-        </p:txBody>
-      </p:sp>
-      <p:sp>
-        <p:nvSpPr>
-          <p:cNvPr id="15" name="TextBox 14"/>
-          <p:cNvSpPr txBox="1"/>
-          <p:nvPr/>
-        </p:nvSpPr>
-        <p:spPr>
-          <a:xfrm>
-            <a:off x="658368" y="3291840"/>
-            <a:ext cx="5212080" cy="685800"/>
-          </a:xfrm>
-          <a:prstGeom prst="rect">
-            <a:avLst/>
-          </a:prstGeom>
-          <a:noFill/>
-        </p:spPr>
-        <p:txBody>
-          <a:bodyPr wrap="square" anchor="t"/>
-          <a:lstStyle/>
-          <a:p>
-            <a:pPr algn="l">
-              <a:spcAft>
-                <a:spcPts val="200"/>
-              </a:spcAft>
-            </a:pPr>
-            <a:r>
-              <a:rPr sz="1300" b="0">
-                <a:solidFill>
-                  <a:srgbClr val="555757"/>
-                </a:solidFill>
-                <a:latin typeface="Microsoft YaHei"/>
-                <a:ea typeface="Microsoft YaHei"/>
-                <a:cs typeface="Microsoft YaHei"/>
-              </a:rPr>
-              <a:t>20 × MixingTransformer：因果时间注意力 + 变元注意力 + FFN。</a:t>
-            </a:r>
-          </a:p>
-        </p:txBody>
-      </p:sp>
-      <p:sp>
-        <p:nvSpPr>
-          <p:cNvPr id="16" name="Rounded Rectangle 15"/>
-          <p:cNvSpPr/>
-          <p:nvPr/>
-        </p:nvSpPr>
-        <p:spPr>
-          <a:xfrm>
-            <a:off x="6263640" y="2788920"/>
-            <a:ext cx="5623560" cy="1298448"/>
-          </a:xfrm>
-          <a:prstGeom prst="roundRect">
-            <a:avLst>
-              <a:gd name="adj" fmla="val 5000"/>
-            </a:avLst>
-          </a:prstGeom>
-          <a:solidFill>
-            <a:srgbClr val="FFFFFF"/>
-          </a:solidFill>
-          <a:ln w="9525">
-            <a:solidFill>
-              <a:srgbClr val="DDDDDD"/>
-            </a:solidFill>
-          </a:ln>
-        </p:spPr>
-        <p:style>
-          <a:lnRef idx="1">
-            <a:schemeClr val="accent1"/>
-          </a:lnRef>
-          <a:fillRef idx="3">
-            <a:schemeClr val="accent1"/>
-          </a:fillRef>
-          <a:effectRef idx="2">
-            <a:schemeClr val="accent1"/>
-          </a:effectRef>
-          <a:fontRef idx="minor">
-            <a:schemeClr val="lt1"/>
-          </a:fontRef>
-        </p:style>
-        <p:txBody>
-          <a:bodyPr rtlCol="0" anchor="ctr"/>
-          <a:lstStyle/>
-          <a:p>
-            <a:pPr algn="ctr"/>
-          </a:p>
-        </p:txBody>
-      </p:sp>
-      <p:sp>
-        <p:nvSpPr>
-          <p:cNvPr id="17" name="TextBox 16"/>
-          <p:cNvSpPr txBox="1"/>
-          <p:nvPr/>
-        </p:nvSpPr>
-        <p:spPr>
-          <a:xfrm>
-            <a:off x="6464808" y="2926080"/>
-            <a:ext cx="5212080" cy="320040"/>
-          </a:xfrm>
-          <a:prstGeom prst="rect">
-            <a:avLst/>
-          </a:prstGeom>
-          <a:noFill/>
-        </p:spPr>
-        <p:txBody>
-          <a:bodyPr wrap="square" anchor="t"/>
-          <a:lstStyle/>
-          <a:p>
-            <a:pPr algn="l">
-              <a:spcAft>
-                <a:spcPts val="200"/>
-              </a:spcAft>
-            </a:pPr>
-            <a:r>
-              <a:rPr sz="1600" b="1">
-                <a:solidFill>
-                  <a:srgbClr val="C7000B"/>
-                </a:solidFill>
-                <a:latin typeface="Microsoft YaHei"/>
-                <a:ea typeface="Microsoft YaHei"/>
-                <a:cs typeface="Microsoft YaHei"/>
-              </a:rPr>
-              <a:t>输出头</a:t>
-            </a:r>
-          </a:p>
-        </p:txBody>
-      </p:sp>
-      <p:sp>
-        <p:nvSpPr>
-          <p:cNvPr id="18" name="TextBox 17"/>
-          <p:cNvSpPr txBox="1"/>
-          <p:nvPr/>
-        </p:nvSpPr>
-        <p:spPr>
-          <a:xfrm>
-            <a:off x="6464808" y="3291840"/>
-            <a:ext cx="5212080" cy="685800"/>
-          </a:xfrm>
-          <a:prstGeom prst="rect">
-            <a:avLst/>
-          </a:prstGeom>
-          <a:noFill/>
-        </p:spPr>
-        <p:txBody>
-          <a:bodyPr wrap="square" anchor="t"/>
-          <a:lstStyle/>
-          <a:p>
-            <a:pPr algn="l">
-              <a:spcAft>
-                <a:spcPts val="200"/>
-              </a:spcAft>
-            </a:pPr>
-            <a:r>
-              <a:rPr sz="1300" b="0">
-                <a:solidFill>
-                  <a:srgbClr val="555757"/>
-                </a:solidFill>
-                <a:latin typeface="Microsoft YaHei"/>
-                <a:ea typeface="Microsoft YaHei"/>
-                <a:cs typeface="Microsoft YaHei"/>
-              </a:rPr>
-              <a:t>Linear 1280→64×9；CPM 掩码预测段；逆 RevIN；拼接任意预测长度。</a:t>
-            </a:r>
-          </a:p>
-        </p:txBody>
-      </p:sp>
-      <p:sp>
-        <p:nvSpPr>
-          <p:cNvPr id="19" name="Rounded Rectangle 18"/>
-          <p:cNvSpPr/>
-          <p:nvPr/>
-        </p:nvSpPr>
-        <p:spPr>
-          <a:xfrm>
-            <a:off x="457200" y="4206240"/>
-            <a:ext cx="5623560" cy="1298448"/>
-          </a:xfrm>
-          <a:prstGeom prst="roundRect">
-            <a:avLst>
-              <a:gd name="adj" fmla="val 5000"/>
-            </a:avLst>
-          </a:prstGeom>
-          <a:solidFill>
-            <a:srgbClr val="FFFFFF"/>
-          </a:solidFill>
-          <a:ln w="9525">
-            <a:solidFill>
-              <a:srgbClr val="DDDDDD"/>
-            </a:solidFill>
-          </a:ln>
-        </p:spPr>
-        <p:style>
-          <a:lnRef idx="1">
-            <a:schemeClr val="accent1"/>
-          </a:lnRef>
-          <a:fillRef idx="3">
-            <a:schemeClr val="accent1"/>
-          </a:fillRef>
-          <a:effectRef idx="2">
-            <a:schemeClr val="accent1"/>
-          </a:effectRef>
-          <a:fontRef idx="minor">
-            <a:schemeClr val="lt1"/>
-          </a:fontRef>
-        </p:style>
-        <p:txBody>
-          <a:bodyPr rtlCol="0" anchor="ctr"/>
-          <a:lstStyle/>
-          <a:p>
-            <a:pPr algn="ctr"/>
-          </a:p>
-        </p:txBody>
-      </p:sp>
-      <p:sp>
-        <p:nvSpPr>
-          <p:cNvPr id="20" name="TextBox 19"/>
-          <p:cNvSpPr txBox="1"/>
-          <p:nvPr/>
-        </p:nvSpPr>
-        <p:spPr>
-          <a:xfrm>
-            <a:off x="658368" y="4343400"/>
-            <a:ext cx="5212080" cy="320040"/>
-          </a:xfrm>
-          <a:prstGeom prst="rect">
-            <a:avLst/>
-          </a:prstGeom>
-          <a:noFill/>
-        </p:spPr>
-        <p:txBody>
-          <a:bodyPr wrap="square" anchor="t"/>
-          <a:lstStyle/>
-          <a:p>
-            <a:pPr algn="l">
-              <a:spcAft>
-                <a:spcPts val="200"/>
-              </a:spcAft>
-            </a:pPr>
-            <a:r>
-              <a:rPr sz="1600" b="1">
-                <a:solidFill>
-                  <a:srgbClr val="C7000B"/>
-                </a:solidFill>
-                <a:latin typeface="Microsoft YaHei"/>
-                <a:ea typeface="Microsoft YaHei"/>
-                <a:cs typeface="Microsoft YaHei"/>
-              </a:rPr>
-              <a:t>读出</a:t>
-            </a:r>
-          </a:p>
-        </p:txBody>
-      </p:sp>
-      <p:sp>
-        <p:nvSpPr>
-          <p:cNvPr id="21" name="TextBox 20"/>
-          <p:cNvSpPr txBox="1"/>
-          <p:nvPr/>
-        </p:nvSpPr>
-        <p:spPr>
-          <a:xfrm>
-            <a:off x="658368" y="4709160"/>
-            <a:ext cx="5212080" cy="685800"/>
-          </a:xfrm>
-          <a:prstGeom prst="rect">
-            <a:avLst/>
-          </a:prstGeom>
-          <a:noFill/>
-        </p:spPr>
-        <p:txBody>
-          <a:bodyPr wrap="square" anchor="t"/>
-          <a:lstStyle/>
-          <a:p>
-            <a:pPr algn="l">
-              <a:spcAft>
-                <a:spcPts val="200"/>
-              </a:spcAft>
-            </a:pPr>
-            <a:r>
-              <a:rPr sz="1300" b="0">
-                <a:solidFill>
-                  <a:srgbClr val="555757"/>
-                </a:solidFill>
-                <a:latin typeface="Microsoft YaHei"/>
-                <a:ea typeface="Microsoft YaHei"/>
-                <a:cs typeface="Microsoft YaHei"/>
-              </a:rPr>
-              <a:t>点预测 q50；概率区间 q10–q90；MAE + 覆盖率评测。</a:t>
-            </a:r>
-          </a:p>
-        </p:txBody>
-      </p:sp>
-      <p:sp>
-        <p:nvSpPr>
-          <p:cNvPr id="22" name="Rounded Rectangle 21"/>
-          <p:cNvSpPr/>
-          <p:nvPr/>
-        </p:nvSpPr>
-        <p:spPr>
-          <a:xfrm>
-            <a:off x="6263640" y="4206240"/>
-            <a:ext cx="5623560" cy="1298448"/>
-          </a:xfrm>
-          <a:prstGeom prst="roundRect">
-            <a:avLst>
-              <a:gd name="adj" fmla="val 5000"/>
-            </a:avLst>
-          </a:prstGeom>
-          <a:solidFill>
-            <a:srgbClr val="FFFFFF"/>
-          </a:solidFill>
-          <a:ln w="9525">
-            <a:solidFill>
-              <a:srgbClr val="DDDDDD"/>
-            </a:solidFill>
-          </a:ln>
-        </p:spPr>
-        <p:style>
-          <a:lnRef idx="1">
-            <a:schemeClr val="accent1"/>
-          </a:lnRef>
-          <a:fillRef idx="3">
-            <a:schemeClr val="accent1"/>
-          </a:fillRef>
-          <a:effectRef idx="2">
-            <a:schemeClr val="accent1"/>
-          </a:effectRef>
-          <a:fontRef idx="minor">
-            <a:schemeClr val="lt1"/>
-          </a:fontRef>
-        </p:style>
-        <p:txBody>
-          <a:bodyPr rtlCol="0" anchor="ctr"/>
-          <a:lstStyle/>
-          <a:p>
-            <a:pPr algn="ctr"/>
-          </a:p>
-        </p:txBody>
-      </p:sp>
-      <p:sp>
-        <p:nvSpPr>
-          <p:cNvPr id="23" name="TextBox 22"/>
-          <p:cNvSpPr txBox="1"/>
-          <p:nvPr/>
-        </p:nvSpPr>
-        <p:spPr>
-          <a:xfrm>
-            <a:off x="6464808" y="4343400"/>
-            <a:ext cx="5212080" cy="320040"/>
-          </a:xfrm>
-          <a:prstGeom prst="rect">
-            <a:avLst/>
-          </a:prstGeom>
-          <a:noFill/>
-        </p:spPr>
-        <p:txBody>
-          <a:bodyPr wrap="square" anchor="t"/>
-          <a:lstStyle/>
-          <a:p>
-            <a:pPr algn="l">
-              <a:spcAft>
-                <a:spcPts val="200"/>
-              </a:spcAft>
-            </a:pPr>
-            <a:r>
-              <a:rPr sz="1600" b="1">
-                <a:solidFill>
-                  <a:srgbClr val="C7000B"/>
-                </a:solidFill>
-                <a:latin typeface="Microsoft YaHei"/>
-                <a:ea typeface="Microsoft YaHei"/>
-                <a:cs typeface="Microsoft YaHei"/>
-              </a:rPr>
-              <a:t>替换点</a:t>
-            </a:r>
-          </a:p>
-        </p:txBody>
-      </p:sp>
-      <p:sp>
-        <p:nvSpPr>
-          <p:cNvPr id="24" name="TextBox 23"/>
-          <p:cNvSpPr txBox="1"/>
-          <p:nvPr/>
-        </p:nvSpPr>
-        <p:spPr>
-          <a:xfrm>
-            <a:off x="6464808" y="4709160"/>
-            <a:ext cx="5212080" cy="685800"/>
-          </a:xfrm>
-          <a:prstGeom prst="rect">
-            <a:avLst/>
-          </a:prstGeom>
-          <a:noFill/>
-        </p:spPr>
-        <p:txBody>
-          <a:bodyPr wrap="square" anchor="t"/>
-          <a:lstStyle/>
-          <a:p>
-            <a:pPr algn="l">
-              <a:spcAft>
-                <a:spcPts val="200"/>
-              </a:spcAft>
-            </a:pPr>
-            <a:r>
-              <a:rPr sz="1300" b="0">
-                <a:solidFill>
-                  <a:srgbClr val="555757"/>
-                </a:solidFill>
-                <a:latin typeface="Microsoft YaHei"/>
-                <a:ea typeface="Microsoft YaHei"/>
-                <a:cs typeface="Microsoft YaHei"/>
-              </a:rPr>
-              <a:t>底座换 TimesFM-4 / 自研时，预测接口签名与返回结构不变。</a:t>
-            </a:r>
-          </a:p>
-        </p:txBody>
-      </p:sp>
-      <p:sp>
-        <p:nvSpPr>
-          <p:cNvPr id="25" name="Rectangle 24"/>
-          <p:cNvSpPr/>
-          <p:nvPr/>
-        </p:nvSpPr>
-        <p:spPr>
-          <a:xfrm>
-            <a:off x="0" y="6537960"/>
-            <a:ext cx="12191695" cy="320040"/>
-          </a:xfrm>
-          <a:prstGeom prst="rect">
-            <a:avLst/>
-          </a:prstGeom>
-          <a:solidFill>
-            <a:srgbClr val="F2F2F2"/>
-          </a:solidFill>
-          <a:ln>
-            <a:noFill/>
-          </a:ln>
-        </p:spPr>
-        <p:style>
-          <a:lnRef idx="1">
-            <a:schemeClr val="accent1"/>
-          </a:lnRef>
-          <a:fillRef idx="3">
-            <a:schemeClr val="accent1"/>
-          </a:fillRef>
-          <a:effectRef idx="2">
-            <a:schemeClr val="accent1"/>
-          </a:effectRef>
-          <a:fontRef idx="minor">
-            <a:schemeClr val="lt1"/>
-          </a:fontRef>
-        </p:style>
-        <p:txBody>
-          <a:bodyPr rtlCol="0" anchor="ctr"/>
-          <a:lstStyle/>
-          <a:p>
-            <a:pPr algn="ctr"/>
-          </a:p>
-        </p:txBody>
-      </p:sp>
-      <p:sp>
-        <p:nvSpPr>
-          <p:cNvPr id="26" name="TextBox 25"/>
-          <p:cNvSpPr txBox="1"/>
-          <p:nvPr/>
-        </p:nvSpPr>
-        <p:spPr>
-          <a:xfrm>
-            <a:off x="457200" y="6537960"/>
-            <a:ext cx="8229600" cy="320040"/>
-          </a:xfrm>
-          <a:prstGeom prst="rect">
-            <a:avLst/>
-          </a:prstGeom>
-          <a:noFill/>
-        </p:spPr>
-        <p:txBody>
-          <a:bodyPr wrap="square" anchor="ctr"/>
-          <a:lstStyle/>
-          <a:p>
-            <a:pPr algn="l">
-              <a:spcAft>
-                <a:spcPts val="200"/>
-              </a:spcAft>
-            </a:pPr>
-            <a:r>
-              <a:rPr sz="900" b="0">
-                <a:solidFill>
-                  <a:srgbClr val="898989"/>
-                </a:solidFill>
-                <a:latin typeface="Microsoft YaHei"/>
-                <a:ea typeface="Microsoft YaHei"/>
-                <a:cs typeface="Microsoft YaHei"/>
-              </a:rPr>
-              <a:t>华为  ·  AI 物理感知平台  ·  预测    |    Security Level: Internal</a:t>
-            </a:r>
-          </a:p>
-        </p:txBody>
-      </p:sp>
-      <p:sp>
-        <p:nvSpPr>
-          <p:cNvPr id="27" name="TextBox 26"/>
-          <p:cNvSpPr txBox="1"/>
-          <p:nvPr/>
-        </p:nvSpPr>
-        <p:spPr>
-          <a:xfrm>
-            <a:off x="10241280" y="6537960"/>
-            <a:ext cx="1554480" cy="320040"/>
-          </a:xfrm>
-          <a:prstGeom prst="rect">
-            <a:avLst/>
-          </a:prstGeom>
-          <a:noFill/>
-        </p:spPr>
-        <p:txBody>
-          <a:bodyPr wrap="square" anchor="ctr"/>
-          <a:lstStyle/>
-          <a:p>
-            <a:pPr algn="r">
-              <a:spcAft>
-                <a:spcPts val="200"/>
-              </a:spcAft>
-            </a:pPr>
-            <a:r>
-              <a:rPr sz="900" b="0">
-                <a:solidFill>
-                  <a:srgbClr val="898989"/>
-                </a:solidFill>
-                <a:latin typeface="Microsoft YaHei"/>
-                <a:ea typeface="Microsoft YaHei"/>
-                <a:cs typeface="Microsoft YaHei"/>
-              </a:rPr>
-              <a:t>7  /  11</a:t>
-            </a:r>
-          </a:p>
-        </p:txBody>
-      </p:sp>
-    </p:spTree>
-  </p:cSld>
-  <p:clrMapOvr>
-    <a:masterClrMapping/>
-  </p:clrMapOvr>
-</p:sld>
-</file>
-
-<file path=ppt/slides/slide8.xml><?xml version="1.0" encoding="utf-8"?>
-<p:sld xmlns:a="http://schemas.openxmlformats.org/drawingml/2006/main" xmlns:p="http://schemas.openxmlformats.org/presentationml/2006/main" xmlns:r="http://schemas.openxmlformats.org/officeDocument/2006/relationships">
-  <p:cSld>
-    <p:spTree>
-      <p:nvGrpSpPr>
-        <p:cNvPr id="1" name=""/>
-        <p:cNvGrpSpPr/>
-        <p:nvPr/>
-      </p:nvGrpSpPr>
-      <p:grpSpPr/>
-      <p:sp>
-        <p:nvSpPr>
-          <p:cNvPr id="2" name="Rectangle 1"/>
-          <p:cNvSpPr/>
-          <p:nvPr/>
-        </p:nvSpPr>
-        <p:spPr>
-          <a:xfrm>
-            <a:off x="0" y="0"/>
-            <a:ext cx="12196763" cy="6858000"/>
-          </a:xfrm>
-          <a:prstGeom prst="rect">
-            <a:avLst/>
-          </a:prstGeom>
-          <a:solidFill>
-            <a:srgbClr val="FFFFFF"/>
-          </a:solidFill>
-          <a:ln>
-            <a:noFill/>
-          </a:ln>
-        </p:spPr>
-        <p:style>
-          <a:lnRef idx="1">
-            <a:schemeClr val="accent1"/>
-          </a:lnRef>
-          <a:fillRef idx="3">
-            <a:schemeClr val="accent1"/>
-          </a:fillRef>
-          <a:effectRef idx="2">
-            <a:schemeClr val="accent1"/>
-          </a:effectRef>
-          <a:fontRef idx="minor">
-            <a:schemeClr val="lt1"/>
-          </a:fontRef>
-        </p:style>
-        <p:txBody>
-          <a:bodyPr rtlCol="0" anchor="ctr"/>
-          <a:lstStyle/>
-          <a:p>
-            <a:pPr algn="ctr"/>
-          </a:p>
-        </p:txBody>
-      </p:sp>
-      <p:sp>
-        <p:nvSpPr>
-          <p:cNvPr id="3" name="TextBox 2"/>
-          <p:cNvSpPr txBox="1"/>
-          <p:nvPr/>
-        </p:nvSpPr>
-        <p:spPr>
-          <a:xfrm>
-            <a:off x="457200" y="201168"/>
-            <a:ext cx="11155680" cy="256032"/>
-          </a:xfrm>
-          <a:prstGeom prst="rect">
-            <a:avLst/>
-          </a:prstGeom>
-          <a:noFill/>
-        </p:spPr>
-        <p:txBody>
-          <a:bodyPr wrap="square" anchor="t"/>
-          <a:lstStyle/>
-          <a:p>
-            <a:pPr algn="l">
-              <a:spcAft>
-                <a:spcPts val="200"/>
-              </a:spcAft>
-            </a:pPr>
-            <a:r>
-              <a:rPr sz="1100" b="1">
-                <a:solidFill>
-                  <a:srgbClr val="C7000B"/>
-                </a:solidFill>
-                <a:latin typeface="Microsoft YaHei"/>
-                <a:ea typeface="Microsoft YaHei"/>
-                <a:cs typeface="Microsoft YaHei"/>
-              </a:rPr>
-              <a:t>7  分类实现</a:t>
-            </a:r>
-          </a:p>
-        </p:txBody>
-      </p:sp>
-      <p:sp>
-        <p:nvSpPr>
-          <p:cNvPr id="4" name="TextBox 3"/>
-          <p:cNvSpPr txBox="1"/>
-          <p:nvPr/>
-        </p:nvSpPr>
-        <p:spPr>
-          <a:xfrm>
-            <a:off x="457200" y="438912"/>
-            <a:ext cx="11155680" cy="438912"/>
-          </a:xfrm>
-          <a:prstGeom prst="rect">
-            <a:avLst/>
-          </a:prstGeom>
-          <a:noFill/>
-        </p:spPr>
-        <p:txBody>
-          <a:bodyPr wrap="square" anchor="t"/>
-          <a:lstStyle/>
-          <a:p>
-            <a:pPr algn="l">
-              <a:spcAft>
-                <a:spcPts val="200"/>
-              </a:spcAft>
-            </a:pPr>
-            <a:r>
-              <a:rPr sz="2400" b="1">
-                <a:solidFill>
-                  <a:srgbClr val="1A1A1A"/>
-                </a:solidFill>
-                <a:latin typeface="Microsoft YaHei"/>
-                <a:ea typeface="Microsoft YaHei"/>
-                <a:cs typeface="Microsoft YaHei"/>
-              </a:rPr>
-              <a:t>共享表征 + 任务 token / 线性探针</a:t>
-            </a:r>
-          </a:p>
-        </p:txBody>
-      </p:sp>
-      <p:sp>
-        <p:nvSpPr>
-          <p:cNvPr id="5" name="Rectangle 4"/>
-          <p:cNvSpPr/>
-          <p:nvPr/>
-        </p:nvSpPr>
-        <p:spPr>
-          <a:xfrm>
-            <a:off x="457200" y="914400"/>
-            <a:ext cx="1097280" cy="45720"/>
-          </a:xfrm>
-          <a:prstGeom prst="rect">
-            <a:avLst/>
-          </a:prstGeom>
-          <a:solidFill>
-            <a:srgbClr val="C7000B"/>
-          </a:solidFill>
-          <a:ln>
-            <a:noFill/>
-          </a:ln>
-        </p:spPr>
-        <p:style>
-          <a:lnRef idx="1">
-            <a:schemeClr val="accent1"/>
-          </a:lnRef>
-          <a:fillRef idx="3">
-            <a:schemeClr val="accent1"/>
-          </a:fillRef>
-          <a:effectRef idx="2">
-            <a:schemeClr val="accent1"/>
-          </a:effectRef>
-          <a:fontRef idx="minor">
-            <a:schemeClr val="lt1"/>
-          </a:fontRef>
-        </p:style>
-        <p:txBody>
-          <a:bodyPr rtlCol="0" anchor="ctr"/>
-          <a:lstStyle/>
-          <a:p>
-            <a:pPr algn="ctr"/>
-          </a:p>
-        </p:txBody>
-      </p:sp>
-      <p:sp>
-        <p:nvSpPr>
-          <p:cNvPr id="6" name="TextBox 5"/>
-          <p:cNvSpPr txBox="1"/>
-          <p:nvPr/>
-        </p:nvSpPr>
-        <p:spPr>
-          <a:xfrm>
-            <a:off x="457200" y="1024128"/>
-            <a:ext cx="11155680" cy="292608"/>
-          </a:xfrm>
-          <a:prstGeom prst="rect">
-            <a:avLst/>
-          </a:prstGeom>
-          <a:noFill/>
-        </p:spPr>
-        <p:txBody>
-          <a:bodyPr wrap="square" anchor="t"/>
-          <a:lstStyle/>
-          <a:p>
-            <a:pPr algn="l">
-              <a:spcAft>
-                <a:spcPts val="200"/>
-              </a:spcAft>
-            </a:pPr>
-            <a:r>
-              <a:rPr sz="1200" b="0">
-                <a:solidFill>
-                  <a:srgbClr val="898989"/>
-                </a:solidFill>
-                <a:latin typeface="Microsoft YaHei"/>
-                <a:ea typeface="Microsoft YaHei"/>
-                <a:cs typeface="Microsoft YaHei"/>
-              </a:rPr>
-              <a:t>分类不是 TimesFM 内建；平台用 UniTS / MOMENT 方式补。</a:t>
-            </a:r>
-          </a:p>
-        </p:txBody>
-      </p:sp>
-      <p:sp>
-        <p:nvSpPr>
-          <p:cNvPr id="7" name="Rounded Rectangle 6"/>
-          <p:cNvSpPr/>
-          <p:nvPr/>
-        </p:nvSpPr>
-        <p:spPr>
-          <a:xfrm>
-            <a:off x="457200" y="1371600"/>
-            <a:ext cx="5577840" cy="4206240"/>
-          </a:xfrm>
-          <a:prstGeom prst="roundRect">
-            <a:avLst>
-              <a:gd name="adj" fmla="val 5000"/>
-            </a:avLst>
-          </a:prstGeom>
-          <a:solidFill>
-            <a:srgbClr val="FFFFFF"/>
-          </a:solidFill>
-          <a:ln w="9525">
-            <a:solidFill>
-              <a:srgbClr val="DDDDDD"/>
-            </a:solidFill>
-          </a:ln>
-        </p:spPr>
-        <p:style>
-          <a:lnRef idx="1">
-            <a:schemeClr val="accent1"/>
-          </a:lnRef>
-          <a:fillRef idx="3">
-            <a:schemeClr val="accent1"/>
-          </a:fillRef>
-          <a:effectRef idx="2">
-            <a:schemeClr val="accent1"/>
-          </a:effectRef>
-          <a:fontRef idx="minor">
-            <a:schemeClr val="lt1"/>
-          </a:fontRef>
-        </p:style>
-        <p:txBody>
-          <a:bodyPr rtlCol="0" anchor="ctr"/>
-          <a:lstStyle/>
-          <a:p>
-            <a:pPr algn="ctr"/>
-          </a:p>
-        </p:txBody>
-      </p:sp>
-      <p:sp>
-        <p:nvSpPr>
-          <p:cNvPr id="8" name="Rectangle 7"/>
-          <p:cNvSpPr/>
-          <p:nvPr/>
-        </p:nvSpPr>
-        <p:spPr>
-          <a:xfrm>
-            <a:off x="457200" y="1371600"/>
-            <a:ext cx="5577840" cy="73152"/>
-          </a:xfrm>
-          <a:prstGeom prst="rect">
-            <a:avLst/>
-          </a:prstGeom>
-          <a:solidFill>
-            <a:srgbClr val="898989"/>
-          </a:solidFill>
-          <a:ln>
-            <a:noFill/>
-          </a:ln>
-        </p:spPr>
-        <p:style>
-          <a:lnRef idx="1">
-            <a:schemeClr val="accent1"/>
-          </a:lnRef>
-          <a:fillRef idx="3">
-            <a:schemeClr val="accent1"/>
-          </a:fillRef>
-          <a:effectRef idx="2">
-            <a:schemeClr val="accent1"/>
-          </a:effectRef>
-          <a:fontRef idx="minor">
-            <a:schemeClr val="lt1"/>
-          </a:fontRef>
-        </p:style>
-        <p:txBody>
-          <a:bodyPr rtlCol="0" anchor="ctr"/>
-          <a:lstStyle/>
-          <a:p>
-            <a:pPr algn="ctr"/>
-          </a:p>
-        </p:txBody>
-      </p:sp>
-      <p:sp>
-        <p:nvSpPr>
-          <p:cNvPr id="9" name="TextBox 8"/>
-          <p:cNvSpPr txBox="1"/>
-          <p:nvPr/>
-        </p:nvSpPr>
-        <p:spPr>
-          <a:xfrm>
-            <a:off x="640080" y="1600200"/>
-            <a:ext cx="5212080" cy="365760"/>
-          </a:xfrm>
-          <a:prstGeom prst="rect">
-            <a:avLst/>
-          </a:prstGeom>
-          <a:noFill/>
-        </p:spPr>
-        <p:txBody>
-          <a:bodyPr wrap="square" anchor="t"/>
-          <a:lstStyle/>
-          <a:p>
-            <a:pPr algn="l">
-              <a:spcAft>
-                <a:spcPts val="200"/>
-              </a:spcAft>
-            </a:pPr>
-            <a:r>
-              <a:rPr sz="1700" b="1">
-                <a:solidFill>
-                  <a:srgbClr val="898989"/>
-                </a:solidFill>
-                <a:latin typeface="Microsoft YaHei"/>
-                <a:ea typeface="Microsoft YaHei"/>
-                <a:cs typeface="Microsoft YaHei"/>
-              </a:rPr>
-              <a:t>路 A  规则下游（零样本，示意）</a:t>
-            </a:r>
-          </a:p>
-        </p:txBody>
-      </p:sp>
-      <p:sp>
-        <p:nvSpPr>
-          <p:cNvPr id="10" name="TextBox 9"/>
-          <p:cNvSpPr txBox="1"/>
-          <p:nvPr/>
-        </p:nvSpPr>
-        <p:spPr>
-          <a:xfrm>
-            <a:off x="640080" y="2103120"/>
-            <a:ext cx="5212080" cy="3200400"/>
-          </a:xfrm>
-          <a:prstGeom prst="rect">
-            <a:avLst/>
-          </a:prstGeom>
-          <a:noFill/>
-        </p:spPr>
-        <p:txBody>
-          <a:bodyPr wrap="square" anchor="t"/>
-          <a:lstStyle/>
-          <a:p>
-            <a:pPr algn="l">
-              <a:spcAft>
-                <a:spcPts val="200"/>
-              </a:spcAft>
-            </a:pPr>
-            <a:r>
-              <a:rPr sz="1400" b="0">
-                <a:solidFill>
-                  <a:srgbClr val="555757"/>
-                </a:solidFill>
-                <a:latin typeface="Microsoft YaHei"/>
-                <a:ea typeface="Microsoft YaHei"/>
-                <a:cs typeface="Microsoft YaHei"/>
-              </a:rPr>
-              <a:t>历史段：去趋势残差 z-score。</a:t>
-            </a:r>
-          </a:p>
-          <a:p>
-            <a:pPr algn="l">
-              <a:spcAft>
-                <a:spcPts val="200"/>
-              </a:spcAft>
-            </a:pPr>
-            <a:r>
-              <a:rPr sz="1400" b="0">
-                <a:solidFill>
-                  <a:srgbClr val="555757"/>
-                </a:solidFill>
-                <a:latin typeface="Microsoft YaHei"/>
-                <a:ea typeface="Microsoft YaHei"/>
-                <a:cs typeface="Microsoft YaHei"/>
-              </a:rPr>
-              <a:t>|z|≥3 CRITICAL，≥2 WARNING，否则 NORMAL。</a:t>
-            </a:r>
-          </a:p>
-          <a:p>
-            <a:pPr algn="l">
-              <a:spcAft>
-                <a:spcPts val="200"/>
-              </a:spcAft>
-            </a:pPr>
-            <a:r>
-              <a:rPr sz="1400" b="0">
-                <a:solidFill>
-                  <a:srgbClr val="555757"/>
-                </a:solidFill>
-                <a:latin typeface="Microsoft YaHei"/>
-                <a:ea typeface="Microsoft YaHei"/>
-                <a:cs typeface="Microsoft YaHei"/>
-              </a:rPr>
-              <a:t/>
-            </a:r>
-          </a:p>
-          <a:p>
-            <a:pPr algn="l">
-              <a:spcAft>
-                <a:spcPts val="200"/>
-              </a:spcAft>
-            </a:pPr>
-            <a:r>
-              <a:rPr sz="1400" b="0">
-                <a:solidFill>
-                  <a:srgbClr val="555757"/>
-                </a:solidFill>
-                <a:latin typeface="Microsoft YaHei"/>
-                <a:ea typeface="Microsoft YaHei"/>
-                <a:cs typeface="Microsoft YaHei"/>
-              </a:rPr>
-              <a:t>未来段：观测是否落在 q10–q90 / q20–q80 外。</a:t>
-            </a:r>
-          </a:p>
-          <a:p>
-            <a:pPr algn="l">
-              <a:spcAft>
-                <a:spcPts val="200"/>
-              </a:spcAft>
-            </a:pPr>
-            <a:r>
-              <a:rPr sz="1400" b="0">
-                <a:solidFill>
-                  <a:srgbClr val="555757"/>
-                </a:solidFill>
-                <a:latin typeface="Microsoft YaHei"/>
-                <a:ea typeface="Microsoft YaHei"/>
-                <a:cs typeface="Microsoft YaHei"/>
-              </a:rPr>
-              <a:t/>
-            </a:r>
-          </a:p>
-          <a:p>
-            <a:pPr algn="l">
-              <a:spcAft>
-                <a:spcPts val="200"/>
-              </a:spcAft>
-            </a:pPr>
-            <a:r>
-              <a:rPr sz="1400" b="0">
-                <a:solidFill>
-                  <a:srgbClr val="555757"/>
-                </a:solidFill>
-                <a:latin typeface="Microsoft YaHei"/>
-                <a:ea typeface="Microsoft YaHei"/>
-                <a:cs typeface="Microsoft YaHei"/>
-              </a:rPr>
-              <a:t>不改权重，不能注册新类别，只能做异常示意。</a:t>
-            </a:r>
-          </a:p>
-        </p:txBody>
-      </p:sp>
-      <p:sp>
-        <p:nvSpPr>
-          <p:cNvPr id="11" name="Rounded Rectangle 10"/>
-          <p:cNvSpPr/>
-          <p:nvPr/>
-        </p:nvSpPr>
-        <p:spPr>
-          <a:xfrm>
-            <a:off x="6217920" y="1371600"/>
-            <a:ext cx="5486400" cy="4206240"/>
-          </a:xfrm>
-          <a:prstGeom prst="roundRect">
-            <a:avLst>
-              <a:gd name="adj" fmla="val 5000"/>
-            </a:avLst>
-          </a:prstGeom>
-          <a:solidFill>
-            <a:srgbClr val="FFFFFF"/>
-          </a:solidFill>
-          <a:ln w="9525">
-            <a:solidFill>
-              <a:srgbClr val="DDDDDD"/>
-            </a:solidFill>
-          </a:ln>
-        </p:spPr>
-        <p:style>
-          <a:lnRef idx="1">
-            <a:schemeClr val="accent1"/>
-          </a:lnRef>
-          <a:fillRef idx="3">
-            <a:schemeClr val="accent1"/>
-          </a:fillRef>
-          <a:effectRef idx="2">
-            <a:schemeClr val="accent1"/>
-          </a:effectRef>
-          <a:fontRef idx="minor">
-            <a:schemeClr val="lt1"/>
-          </a:fontRef>
-        </p:style>
-        <p:txBody>
-          <a:bodyPr rtlCol="0" anchor="ctr"/>
-          <a:lstStyle/>
-          <a:p>
-            <a:pPr algn="ctr"/>
-          </a:p>
-        </p:txBody>
-      </p:sp>
-      <p:sp>
-        <p:nvSpPr>
-          <p:cNvPr id="12" name="Rectangle 11"/>
-          <p:cNvSpPr/>
-          <p:nvPr/>
-        </p:nvSpPr>
-        <p:spPr>
-          <a:xfrm>
-            <a:off x="6217920" y="1371600"/>
-            <a:ext cx="5486400" cy="73152"/>
-          </a:xfrm>
-          <a:prstGeom prst="rect">
-            <a:avLst/>
-          </a:prstGeom>
-          <a:solidFill>
-            <a:srgbClr val="C7000B"/>
-          </a:solidFill>
-          <a:ln>
-            <a:noFill/>
-          </a:ln>
-        </p:spPr>
-        <p:style>
-          <a:lnRef idx="1">
-            <a:schemeClr val="accent1"/>
-          </a:lnRef>
-          <a:fillRef idx="3">
-            <a:schemeClr val="accent1"/>
-          </a:fillRef>
-          <a:effectRef idx="2">
-            <a:schemeClr val="accent1"/>
-          </a:effectRef>
-          <a:fontRef idx="minor">
-            <a:schemeClr val="lt1"/>
-          </a:fontRef>
-        </p:style>
-        <p:txBody>
-          <a:bodyPr rtlCol="0" anchor="ctr"/>
-          <a:lstStyle/>
-          <a:p>
-            <a:pPr algn="ctr"/>
-          </a:p>
-        </p:txBody>
-      </p:sp>
-      <p:sp>
-        <p:nvSpPr>
-          <p:cNvPr id="13" name="TextBox 12"/>
-          <p:cNvSpPr txBox="1"/>
-          <p:nvPr/>
-        </p:nvSpPr>
-        <p:spPr>
-          <a:xfrm>
-            <a:off x="6400800" y="1600200"/>
-            <a:ext cx="5120640" cy="365760"/>
-          </a:xfrm>
-          <a:prstGeom prst="rect">
-            <a:avLst/>
-          </a:prstGeom>
-          <a:noFill/>
-        </p:spPr>
-        <p:txBody>
-          <a:bodyPr wrap="square" anchor="t"/>
-          <a:lstStyle/>
-          <a:p>
-            <a:pPr algn="l">
-              <a:spcAft>
-                <a:spcPts val="200"/>
-              </a:spcAft>
-            </a:pPr>
-            <a:r>
-              <a:rPr sz="1700" b="1">
-                <a:solidFill>
-                  <a:srgbClr val="C7000B"/>
-                </a:solidFill>
-                <a:latin typeface="Microsoft YaHei"/>
-                <a:ea typeface="Microsoft YaHei"/>
-                <a:cs typeface="Microsoft YaHei"/>
-              </a:rPr>
-              <a:t>路 B  可学习分类（平台接口）</a:t>
-            </a:r>
-          </a:p>
-        </p:txBody>
-      </p:sp>
-      <p:sp>
-        <p:nvSpPr>
-          <p:cNvPr id="14" name="TextBox 13"/>
-          <p:cNvSpPr txBox="1"/>
-          <p:nvPr/>
-        </p:nvSpPr>
-        <p:spPr>
-          <a:xfrm>
-            <a:off x="6400800" y="2103120"/>
-            <a:ext cx="5120640" cy="3200400"/>
-          </a:xfrm>
-          <a:prstGeom prst="rect">
-            <a:avLst/>
-          </a:prstGeom>
-          <a:noFill/>
-        </p:spPr>
-        <p:txBody>
-          <a:bodyPr wrap="square" anchor="t"/>
-          <a:lstStyle/>
-          <a:p>
-            <a:pPr algn="l">
-              <a:spcAft>
-                <a:spcPts val="200"/>
-              </a:spcAft>
-            </a:pPr>
-            <a:r>
-              <a:rPr sz="1400" b="0">
-                <a:solidFill>
-                  <a:srgbClr val="555757"/>
-                </a:solidFill>
-                <a:latin typeface="Microsoft YaHei"/>
-                <a:ea typeface="Microsoft YaHei"/>
-                <a:cs typeface="Microsoft YaHei"/>
-              </a:rPr>
-              <a:t>UniTS：任务 token 把预测 / 分类 / 填补 / 异常收进同一套参数。</a:t>
-            </a:r>
-          </a:p>
-          <a:p>
-            <a:pPr algn="l">
-              <a:spcAft>
-                <a:spcPts val="200"/>
-              </a:spcAft>
-            </a:pPr>
-            <a:r>
-              <a:rPr sz="1400" b="0">
-                <a:solidFill>
-                  <a:srgbClr val="555757"/>
-                </a:solidFill>
-                <a:latin typeface="Microsoft YaHei"/>
-                <a:ea typeface="Microsoft YaHei"/>
-                <a:cs typeface="Microsoft YaHei"/>
-              </a:rPr>
-              <a:t>MOMENT：掩码预训练编码器 + 线性探针 / 分类头。</a:t>
-            </a:r>
-          </a:p>
-          <a:p>
-            <a:pPr algn="l">
-              <a:spcAft>
-                <a:spcPts val="200"/>
-              </a:spcAft>
-            </a:pPr>
-            <a:r>
-              <a:rPr sz="1400" b="0">
-                <a:solidFill>
-                  <a:srgbClr val="555757"/>
-                </a:solidFill>
-                <a:latin typeface="Microsoft YaHei"/>
-                <a:ea typeface="Microsoft YaHei"/>
-                <a:cs typeface="Microsoft YaHei"/>
-              </a:rPr>
-              <a:t>LIMU-BERT-X：IMU 掩码预训练，直接初始化 IMU 变元。</a:t>
-            </a:r>
-          </a:p>
-          <a:p>
-            <a:pPr algn="l">
-              <a:spcAft>
-                <a:spcPts val="200"/>
-              </a:spcAft>
-            </a:pPr>
-            <a:r>
-              <a:rPr sz="1400" b="0">
-                <a:solidFill>
-                  <a:srgbClr val="555757"/>
-                </a:solidFill>
-                <a:latin typeface="Microsoft YaHei"/>
-                <a:ea typeface="Microsoft YaHei"/>
-                <a:cs typeface="Microsoft YaHei"/>
-              </a:rPr>
-              <a:t/>
-            </a:r>
-          </a:p>
-          <a:p>
-            <a:pPr algn="l">
-              <a:spcAft>
-                <a:spcPts val="200"/>
-              </a:spcAft>
-            </a:pPr>
-            <a:r>
-              <a:rPr sz="1400" b="0">
-                <a:solidFill>
-                  <a:srgbClr val="555757"/>
-                </a:solidFill>
-                <a:latin typeface="Microsoft YaHei"/>
-                <a:ea typeface="Microsoft YaHei"/>
-                <a:cs typeface="Microsoft YaHei"/>
-              </a:rPr>
-              <a:t>场景方注册类别 → 平台微调分类接口 → 返回类别 + 置信度。</a:t>
-            </a:r>
-          </a:p>
-        </p:txBody>
-      </p:sp>
-      <p:sp>
-        <p:nvSpPr>
-          <p:cNvPr id="15" name="Rectangle 14"/>
-          <p:cNvSpPr/>
-          <p:nvPr/>
-        </p:nvSpPr>
-        <p:spPr>
-          <a:xfrm>
-            <a:off x="0" y="6537960"/>
-            <a:ext cx="12191695" cy="320040"/>
-          </a:xfrm>
-          <a:prstGeom prst="rect">
-            <a:avLst/>
-          </a:prstGeom>
-          <a:solidFill>
-            <a:srgbClr val="F2F2F2"/>
-          </a:solidFill>
-          <a:ln>
-            <a:noFill/>
-          </a:ln>
-        </p:spPr>
-        <p:style>
-          <a:lnRef idx="1">
-            <a:schemeClr val="accent1"/>
-          </a:lnRef>
-          <a:fillRef idx="3">
-            <a:schemeClr val="accent1"/>
-          </a:fillRef>
-          <a:effectRef idx="2">
-            <a:schemeClr val="accent1"/>
-          </a:effectRef>
-          <a:fontRef idx="minor">
-            <a:schemeClr val="lt1"/>
-          </a:fontRef>
-        </p:style>
-        <p:txBody>
-          <a:bodyPr rtlCol="0" anchor="ctr"/>
-          <a:lstStyle/>
-          <a:p>
-            <a:pPr algn="ctr"/>
-          </a:p>
-        </p:txBody>
-      </p:sp>
-      <p:sp>
-        <p:nvSpPr>
-          <p:cNvPr id="16" name="TextBox 15"/>
-          <p:cNvSpPr txBox="1"/>
-          <p:nvPr/>
-        </p:nvSpPr>
-        <p:spPr>
-          <a:xfrm>
-            <a:off x="457200" y="6537960"/>
-            <a:ext cx="8229600" cy="320040"/>
-          </a:xfrm>
-          <a:prstGeom prst="rect">
-            <a:avLst/>
-          </a:prstGeom>
-          <a:noFill/>
-        </p:spPr>
-        <p:txBody>
-          <a:bodyPr wrap="square" anchor="ctr"/>
-          <a:lstStyle/>
-          <a:p>
-            <a:pPr algn="l">
-              <a:spcAft>
-                <a:spcPts val="200"/>
-              </a:spcAft>
-            </a:pPr>
-            <a:r>
-              <a:rPr sz="900" b="0">
-                <a:solidFill>
-                  <a:srgbClr val="898989"/>
-                </a:solidFill>
-                <a:latin typeface="Microsoft YaHei"/>
-                <a:ea typeface="Microsoft YaHei"/>
-                <a:cs typeface="Microsoft YaHei"/>
-              </a:rPr>
-              <a:t>华为  ·  AI 物理感知平台  ·  分类    |    Security Level: Internal</a:t>
-            </a:r>
-          </a:p>
-        </p:txBody>
-      </p:sp>
-      <p:sp>
-        <p:nvSpPr>
-          <p:cNvPr id="17" name="TextBox 16"/>
-          <p:cNvSpPr txBox="1"/>
-          <p:nvPr/>
-        </p:nvSpPr>
-        <p:spPr>
-          <a:xfrm>
-            <a:off x="10241280" y="6537960"/>
-            <a:ext cx="1554480" cy="320040"/>
-          </a:xfrm>
-          <a:prstGeom prst="rect">
-            <a:avLst/>
-          </a:prstGeom>
-          <a:noFill/>
-        </p:spPr>
-        <p:txBody>
-          <a:bodyPr wrap="square" anchor="ctr"/>
-          <a:lstStyle/>
-          <a:p>
-            <a:pPr algn="r">
-              <a:spcAft>
-                <a:spcPts val="200"/>
-              </a:spcAft>
-            </a:pPr>
-            <a:r>
-              <a:rPr sz="900" b="0">
-                <a:solidFill>
-                  <a:srgbClr val="898989"/>
-                </a:solidFill>
-                <a:latin typeface="Microsoft YaHei"/>
-                <a:ea typeface="Microsoft YaHei"/>
-                <a:cs typeface="Microsoft YaHei"/>
-              </a:rPr>
-              <a:t>8  /  11</a:t>
-            </a:r>
-          </a:p>
-        </p:txBody>
-      </p:sp>
-    </p:spTree>
-  </p:cSld>
-  <p:clrMapOvr>
-    <a:masterClrMapping/>
-  </p:clrMapOvr>
-</p:sld>
-</file>
-
-<file path=ppt/slides/slide9.xml><?xml version="1.0" encoding="utf-8"?>
-<p:sld xmlns:a="http://schemas.openxmlformats.org/drawingml/2006/main" xmlns:p="http://schemas.openxmlformats.org/presentationml/2006/main" xmlns:r="http://schemas.openxmlformats.org/officeDocument/2006/relationships">
-  <p:cSld>
-    <p:spTree>
-      <p:nvGrpSpPr>
-        <p:cNvPr id="1" name=""/>
-        <p:cNvGrpSpPr/>
-        <p:nvPr/>
-      </p:nvGrpSpPr>
-      <p:grpSpPr/>
-      <p:sp>
-        <p:nvSpPr>
-          <p:cNvPr id="2" name="Rectangle 1"/>
-          <p:cNvSpPr/>
-          <p:nvPr/>
-        </p:nvSpPr>
-        <p:spPr>
-          <a:xfrm>
-            <a:off x="0" y="0"/>
-            <a:ext cx="12196763" cy="6858000"/>
-          </a:xfrm>
-          <a:prstGeom prst="rect">
-            <a:avLst/>
-          </a:prstGeom>
-          <a:solidFill>
-            <a:srgbClr val="FFFFFF"/>
-          </a:solidFill>
-          <a:ln>
-            <a:noFill/>
-          </a:ln>
-        </p:spPr>
-        <p:style>
-          <a:lnRef idx="1">
-            <a:schemeClr val="accent1"/>
-          </a:lnRef>
-          <a:fillRef idx="3">
-            <a:schemeClr val="accent1"/>
-          </a:fillRef>
-          <a:effectRef idx="2">
-            <a:schemeClr val="accent1"/>
-          </a:effectRef>
-          <a:fontRef idx="minor">
-            <a:schemeClr val="lt1"/>
-          </a:fontRef>
-        </p:style>
-        <p:txBody>
-          <a:bodyPr rtlCol="0" anchor="ctr"/>
-          <a:lstStyle/>
-          <a:p>
-            <a:pPr algn="ctr"/>
-          </a:p>
-        </p:txBody>
-      </p:sp>
-      <p:sp>
-        <p:nvSpPr>
-          <p:cNvPr id="3" name="TextBox 2"/>
-          <p:cNvSpPr txBox="1"/>
-          <p:nvPr/>
-        </p:nvSpPr>
-        <p:spPr>
-          <a:xfrm>
-            <a:off x="457200" y="201168"/>
-            <a:ext cx="11155680" cy="256032"/>
-          </a:xfrm>
-          <a:prstGeom prst="rect">
-            <a:avLst/>
-          </a:prstGeom>
-          <a:noFill/>
-        </p:spPr>
-        <p:txBody>
-          <a:bodyPr wrap="square" anchor="t"/>
-          <a:lstStyle/>
-          <a:p>
-            <a:pPr algn="l">
-              <a:spcAft>
-                <a:spcPts val="200"/>
-              </a:spcAft>
-            </a:pPr>
-            <a:r>
-              <a:rPr sz="1100" b="1">
-                <a:solidFill>
-                  <a:srgbClr val="C7000B"/>
-                </a:solidFill>
-                <a:latin typeface="Microsoft YaHei"/>
-                <a:ea typeface="Microsoft YaHei"/>
-                <a:cs typeface="Microsoft YaHei"/>
-              </a:rPr>
-              <a:t>8  代际演进</a:t>
-            </a:r>
-          </a:p>
-        </p:txBody>
-      </p:sp>
-      <p:sp>
-        <p:nvSpPr>
-          <p:cNvPr id="4" name="TextBox 3"/>
-          <p:cNvSpPr txBox="1"/>
-          <p:nvPr/>
-        </p:nvSpPr>
-        <p:spPr>
-          <a:xfrm>
-            <a:off x="457200" y="438912"/>
-            <a:ext cx="11155680" cy="438912"/>
-          </a:xfrm>
-          <a:prstGeom prst="rect">
-            <a:avLst/>
-          </a:prstGeom>
-          <a:noFill/>
-        </p:spPr>
-        <p:txBody>
-          <a:bodyPr wrap="square" anchor="t"/>
-          <a:lstStyle/>
-          <a:p>
-            <a:pPr algn="l">
-              <a:spcAft>
-                <a:spcPts val="200"/>
-              </a:spcAft>
-            </a:pPr>
-            <a:r>
-              <a:rPr sz="2400" b="1">
-                <a:solidFill>
-                  <a:srgbClr val="1A1A1A"/>
-                </a:solidFill>
-                <a:latin typeface="Microsoft YaHei"/>
-                <a:ea typeface="Microsoft YaHei"/>
-                <a:cs typeface="Microsoft YaHei"/>
-              </a:rPr>
-              <a:t>Gen1 零样本基线 → Gen2 千人千面 → Gen3 Token 嵌入大模型</a:t>
-            </a:r>
-          </a:p>
-        </p:txBody>
-      </p:sp>
-      <p:sp>
-        <p:nvSpPr>
-          <p:cNvPr id="5" name="Rectangle 4"/>
-          <p:cNvSpPr/>
-          <p:nvPr/>
-        </p:nvSpPr>
-        <p:spPr>
-          <a:xfrm>
-            <a:off x="457200" y="914400"/>
-            <a:ext cx="1097280" cy="45720"/>
-          </a:xfrm>
-          <a:prstGeom prst="rect">
-            <a:avLst/>
-          </a:prstGeom>
-          <a:solidFill>
-            <a:srgbClr val="C7000B"/>
-          </a:solidFill>
-          <a:ln>
-            <a:noFill/>
-          </a:ln>
-        </p:spPr>
-        <p:style>
-          <a:lnRef idx="1">
-            <a:schemeClr val="accent1"/>
-          </a:lnRef>
-          <a:fillRef idx="3">
-            <a:schemeClr val="accent1"/>
-          </a:fillRef>
-          <a:effectRef idx="2">
-            <a:schemeClr val="accent1"/>
-          </a:effectRef>
-          <a:fontRef idx="minor">
-            <a:schemeClr val="lt1"/>
-          </a:fontRef>
-        </p:style>
-        <p:txBody>
-          <a:bodyPr rtlCol="0" anchor="ctr"/>
-          <a:lstStyle/>
-          <a:p>
-            <a:pPr algn="ctr"/>
-          </a:p>
-        </p:txBody>
-      </p:sp>
-      <p:sp>
-        <p:nvSpPr>
-          <p:cNvPr id="6" name="TextBox 5"/>
-          <p:cNvSpPr txBox="1"/>
-          <p:nvPr/>
-        </p:nvSpPr>
-        <p:spPr>
-          <a:xfrm>
-            <a:off x="457200" y="1024128"/>
-            <a:ext cx="11155680" cy="292608"/>
-          </a:xfrm>
-          <a:prstGeom prst="rect">
-            <a:avLst/>
-          </a:prstGeom>
-          <a:noFill/>
-        </p:spPr>
-        <p:txBody>
-          <a:bodyPr wrap="square" anchor="t"/>
-          <a:lstStyle/>
-          <a:p>
-            <a:pPr algn="l">
-              <a:spcAft>
-                <a:spcPts val="200"/>
-              </a:spcAft>
-            </a:pPr>
-            <a:r>
-              <a:rPr sz="1200" b="0">
-                <a:solidFill>
-                  <a:srgbClr val="898989"/>
-                </a:solidFill>
-                <a:latin typeface="Microsoft YaHei"/>
-                <a:ea typeface="Microsoft YaHei"/>
-                <a:cs typeface="Microsoft YaHei"/>
-              </a:rPr>
-              <a:t>接口不变，能力逐代升级；每代回答一个业务问题。</a:t>
-            </a:r>
-          </a:p>
-        </p:txBody>
-      </p:sp>
-      <p:sp>
-        <p:nvSpPr>
-          <p:cNvPr id="7" name="Rounded Rectangle 6"/>
-          <p:cNvSpPr/>
-          <p:nvPr/>
-        </p:nvSpPr>
-        <p:spPr>
-          <a:xfrm>
-            <a:off x="411480" y="1417320"/>
-            <a:ext cx="2788920" cy="3566160"/>
-          </a:xfrm>
-          <a:prstGeom prst="roundRect">
-            <a:avLst>
-              <a:gd name="adj" fmla="val 5000"/>
-            </a:avLst>
-          </a:prstGeom>
-          <a:solidFill>
-            <a:srgbClr val="FFFFFF"/>
-          </a:solidFill>
-          <a:ln w="9525">
-            <a:solidFill>
-              <a:srgbClr val="DDDDDD"/>
-            </a:solidFill>
-          </a:ln>
-        </p:spPr>
-        <p:style>
-          <a:lnRef idx="1">
-            <a:schemeClr val="accent1"/>
-          </a:lnRef>
-          <a:fillRef idx="3">
-            <a:schemeClr val="accent1"/>
-          </a:fillRef>
-          <a:effectRef idx="2">
-            <a:schemeClr val="accent1"/>
-          </a:effectRef>
-          <a:fontRef idx="minor">
-            <a:schemeClr val="lt1"/>
-          </a:fontRef>
-        </p:style>
-        <p:txBody>
-          <a:bodyPr rtlCol="0" anchor="ctr"/>
-          <a:lstStyle/>
-          <a:p>
-            <a:pPr algn="ctr"/>
-          </a:p>
-        </p:txBody>
-      </p:sp>
-      <p:sp>
-        <p:nvSpPr>
-          <p:cNvPr id="8" name="Rectangle 7"/>
-          <p:cNvSpPr/>
-          <p:nvPr/>
-        </p:nvSpPr>
-        <p:spPr>
-          <a:xfrm>
-            <a:off x="411480" y="1417320"/>
-            <a:ext cx="2788920" cy="73152"/>
-          </a:xfrm>
-          <a:prstGeom prst="rect">
-            <a:avLst/>
-          </a:prstGeom>
-          <a:solidFill>
-            <a:srgbClr val="C7000B"/>
-          </a:solidFill>
-          <a:ln>
-            <a:noFill/>
-          </a:ln>
-        </p:spPr>
-        <p:style>
-          <a:lnRef idx="1">
-            <a:schemeClr val="accent1"/>
-          </a:lnRef>
-          <a:fillRef idx="3">
-            <a:schemeClr val="accent1"/>
-          </a:fillRef>
-          <a:effectRef idx="2">
-            <a:schemeClr val="accent1"/>
-          </a:effectRef>
-          <a:fontRef idx="minor">
-            <a:schemeClr val="lt1"/>
-          </a:fontRef>
-        </p:style>
-        <p:txBody>
-          <a:bodyPr rtlCol="0" anchor="ctr"/>
-          <a:lstStyle/>
-          <a:p>
-            <a:pPr algn="ctr"/>
-          </a:p>
-        </p:txBody>
-      </p:sp>
-      <p:sp>
-        <p:nvSpPr>
-          <p:cNvPr id="9" name="TextBox 8"/>
-          <p:cNvSpPr txBox="1"/>
-          <p:nvPr/>
-        </p:nvSpPr>
-        <p:spPr>
-          <a:xfrm>
-            <a:off x="548640" y="1645920"/>
-            <a:ext cx="2514600" cy="365760"/>
-          </a:xfrm>
-          <a:prstGeom prst="rect">
-            <a:avLst/>
-          </a:prstGeom>
-          <a:noFill/>
-        </p:spPr>
-        <p:txBody>
-          <a:bodyPr wrap="square" anchor="t"/>
-          <a:lstStyle/>
-          <a:p>
-            <a:pPr algn="l">
-              <a:spcAft>
-                <a:spcPts val="200"/>
-              </a:spcAft>
-            </a:pPr>
-            <a:r>
-              <a:rPr sz="1600" b="1">
-                <a:solidFill>
-                  <a:srgbClr val="C7000B"/>
-                </a:solidFill>
-                <a:latin typeface="Microsoft YaHei"/>
-                <a:ea typeface="Microsoft YaHei"/>
-                <a:cs typeface="Microsoft YaHei"/>
-              </a:rPr>
-              <a:t>Gen1  零样本基线</a:t>
-            </a:r>
-          </a:p>
-        </p:txBody>
-      </p:sp>
-      <p:sp>
-        <p:nvSpPr>
-          <p:cNvPr id="10" name="TextBox 9"/>
-          <p:cNvSpPr txBox="1"/>
-          <p:nvPr/>
-        </p:nvSpPr>
-        <p:spPr>
-          <a:xfrm>
-            <a:off x="548640" y="2148840"/>
-            <a:ext cx="2514600" cy="2651760"/>
-          </a:xfrm>
-          <a:prstGeom prst="rect">
-            <a:avLst/>
-          </a:prstGeom>
-          <a:noFill/>
-        </p:spPr>
-        <p:txBody>
-          <a:bodyPr wrap="square" anchor="t"/>
-          <a:lstStyle/>
-          <a:p>
-            <a:pPr algn="l">
-              <a:spcAft>
-                <a:spcPts val="200"/>
-              </a:spcAft>
-            </a:pPr>
-            <a:r>
-              <a:rPr sz="1200" b="0">
-                <a:solidFill>
-                  <a:srgbClr val="555757"/>
-                </a:solidFill>
-                <a:latin typeface="Microsoft YaHei"/>
-                <a:ea typeface="Microsoft YaHei"/>
-                <a:cs typeface="Microsoft YaHei"/>
-              </a:rPr>
-              <a:t>预训练底座直接上岗。</a:t>
-            </a:r>
-          </a:p>
-          <a:p>
-            <a:pPr algn="l">
-              <a:spcAft>
-                <a:spcPts val="200"/>
-              </a:spcAft>
-            </a:pPr>
-            <a:r>
-              <a:rPr sz="1200" b="0">
-                <a:solidFill>
-                  <a:srgbClr val="555757"/>
-                </a:solidFill>
-                <a:latin typeface="Microsoft YaHei"/>
-                <a:ea typeface="Microsoft YaHei"/>
-                <a:cs typeface="Microsoft YaHei"/>
-              </a:rPr>
-              <a:t>预测零样本（TimesFM-3）；</a:t>
-            </a:r>
-          </a:p>
-          <a:p>
-            <a:pPr algn="l">
-              <a:spcAft>
-                <a:spcPts val="200"/>
-              </a:spcAft>
-            </a:pPr>
-            <a:r>
-              <a:rPr sz="1200" b="0">
-                <a:solidFill>
-                  <a:srgbClr val="555757"/>
-                </a:solidFill>
-                <a:latin typeface="Microsoft YaHei"/>
-                <a:ea typeface="Microsoft YaHei"/>
-                <a:cs typeface="Microsoft YaHei"/>
-              </a:rPr>
-              <a:t>分类走规则 / 线性探针（UniTS / MOMENT）。</a:t>
-            </a:r>
-          </a:p>
-          <a:p>
-            <a:pPr algn="l">
-              <a:spcAft>
-                <a:spcPts val="200"/>
-              </a:spcAft>
-            </a:pPr>
-            <a:r>
-              <a:rPr sz="1200" b="0">
-                <a:solidFill>
-                  <a:srgbClr val="555757"/>
-                </a:solidFill>
-                <a:latin typeface="Microsoft YaHei"/>
-                <a:ea typeface="Microsoft YaHei"/>
-                <a:cs typeface="Microsoft YaHei"/>
-              </a:rPr>
-              <a:t>回答：底座行不行 → 统一评测基线。</a:t>
-            </a:r>
-          </a:p>
-        </p:txBody>
-      </p:sp>
-      <p:sp>
-        <p:nvSpPr>
-          <p:cNvPr id="11" name="Rounded Rectangle 10"/>
-          <p:cNvSpPr/>
-          <p:nvPr/>
-        </p:nvSpPr>
-        <p:spPr>
-          <a:xfrm>
-            <a:off x="3337560" y="1417320"/>
-            <a:ext cx="2788920" cy="3566160"/>
-          </a:xfrm>
-          <a:prstGeom prst="roundRect">
-            <a:avLst>
-              <a:gd name="adj" fmla="val 5000"/>
-            </a:avLst>
-          </a:prstGeom>
-          <a:solidFill>
-            <a:srgbClr val="FFFFFF"/>
-          </a:solidFill>
-          <a:ln w="9525">
-            <a:solidFill>
-              <a:srgbClr val="DDDDDD"/>
-            </a:solidFill>
-          </a:ln>
-        </p:spPr>
-        <p:style>
-          <a:lnRef idx="1">
-            <a:schemeClr val="accent1"/>
-          </a:lnRef>
-          <a:fillRef idx="3">
-            <a:schemeClr val="accent1"/>
-          </a:fillRef>
-          <a:effectRef idx="2">
-            <a:schemeClr val="accent1"/>
-          </a:effectRef>
-          <a:fontRef idx="minor">
-            <a:schemeClr val="lt1"/>
-          </a:fontRef>
-        </p:style>
-        <p:txBody>
-          <a:bodyPr rtlCol="0" anchor="ctr"/>
-          <a:lstStyle/>
-          <a:p>
-            <a:pPr algn="ctr"/>
-          </a:p>
-        </p:txBody>
-      </p:sp>
-      <p:sp>
-        <p:nvSpPr>
-          <p:cNvPr id="12" name="Rectangle 11"/>
-          <p:cNvSpPr/>
-          <p:nvPr/>
-        </p:nvSpPr>
-        <p:spPr>
-          <a:xfrm>
-            <a:off x="3337560" y="1417320"/>
-            <a:ext cx="2788920" cy="73152"/>
-          </a:xfrm>
-          <a:prstGeom prst="rect">
-            <a:avLst/>
-          </a:prstGeom>
-          <a:solidFill>
-            <a:srgbClr val="ED6D00"/>
-          </a:solidFill>
-          <a:ln>
-            <a:noFill/>
-          </a:ln>
-        </p:spPr>
-        <p:style>
-          <a:lnRef idx="1">
-            <a:schemeClr val="accent1"/>
-          </a:lnRef>
-          <a:fillRef idx="3">
-            <a:schemeClr val="accent1"/>
-          </a:fillRef>
-          <a:effectRef idx="2">
-            <a:schemeClr val="accent1"/>
-          </a:effectRef>
-          <a:fontRef idx="minor">
-            <a:schemeClr val="lt1"/>
-          </a:fontRef>
-        </p:style>
-        <p:txBody>
-          <a:bodyPr rtlCol="0" anchor="ctr"/>
-          <a:lstStyle/>
-          <a:p>
-            <a:pPr algn="ctr"/>
-          </a:p>
-        </p:txBody>
-      </p:sp>
-      <p:sp>
-        <p:nvSpPr>
-          <p:cNvPr id="13" name="TextBox 12"/>
-          <p:cNvSpPr txBox="1"/>
-          <p:nvPr/>
-        </p:nvSpPr>
-        <p:spPr>
-          <a:xfrm>
-            <a:off x="3474720" y="1645920"/>
-            <a:ext cx="2514600" cy="365760"/>
-          </a:xfrm>
-          <a:prstGeom prst="rect">
-            <a:avLst/>
-          </a:prstGeom>
-          <a:noFill/>
-        </p:spPr>
-        <p:txBody>
-          <a:bodyPr wrap="square" anchor="t"/>
-          <a:lstStyle/>
-          <a:p>
-            <a:pPr algn="l">
-              <a:spcAft>
-                <a:spcPts val="200"/>
-              </a:spcAft>
-            </a:pPr>
-            <a:r>
-              <a:rPr sz="1600" b="1">
-                <a:solidFill>
-                  <a:srgbClr val="ED6D00"/>
-                </a:solidFill>
-                <a:latin typeface="Microsoft YaHei"/>
-                <a:ea typeface="Microsoft YaHei"/>
-                <a:cs typeface="Microsoft YaHei"/>
-              </a:rPr>
-              <a:t>Gen2  千人千面</a:t>
-            </a:r>
-          </a:p>
-        </p:txBody>
-      </p:sp>
-      <p:sp>
-        <p:nvSpPr>
-          <p:cNvPr id="14" name="TextBox 13"/>
-          <p:cNvSpPr txBox="1"/>
-          <p:nvPr/>
-        </p:nvSpPr>
-        <p:spPr>
-          <a:xfrm>
-            <a:off x="3474720" y="2148840"/>
-            <a:ext cx="2514600" cy="2651760"/>
-          </a:xfrm>
-          <a:prstGeom prst="rect">
-            <a:avLst/>
-          </a:prstGeom>
-          <a:noFill/>
-        </p:spPr>
-        <p:txBody>
-          <a:bodyPr wrap="square" anchor="t"/>
-          <a:lstStyle/>
-          <a:p>
-            <a:pPr algn="l">
-              <a:spcAft>
-                <a:spcPts val="200"/>
-              </a:spcAft>
-            </a:pPr>
-            <a:r>
-              <a:rPr sz="1200" b="0">
-                <a:solidFill>
-                  <a:srgbClr val="555757"/>
-                </a:solidFill>
-                <a:latin typeface="Microsoft YaHei"/>
-                <a:ea typeface="Microsoft YaHei"/>
-                <a:cs typeface="Microsoft YaHei"/>
-              </a:rPr>
-              <a:t>轻量适配到每设备、每用户。</a:t>
-            </a:r>
-          </a:p>
-          <a:p>
-            <a:pPr algn="l">
-              <a:spcAft>
-                <a:spcPts val="200"/>
-              </a:spcAft>
-            </a:pPr>
-            <a:r>
-              <a:rPr sz="1200" b="0">
-                <a:solidFill>
-                  <a:srgbClr val="555757"/>
-                </a:solidFill>
-                <a:latin typeface="Microsoft YaHei"/>
-                <a:ea typeface="Microsoft YaHei"/>
-                <a:cs typeface="Microsoft YaHei"/>
-              </a:rPr>
-              <a:t>LoRA / 提示微调：TartanIMU 仅 1.1M 参数；</a:t>
-            </a:r>
-          </a:p>
-          <a:p>
-            <a:pPr algn="l">
-              <a:spcAft>
-                <a:spcPts val="200"/>
-              </a:spcAft>
-            </a:pPr>
-            <a:r>
-              <a:rPr sz="1200" b="0">
-                <a:solidFill>
-                  <a:srgbClr val="555757"/>
-                </a:solidFill>
-                <a:latin typeface="Microsoft YaHei"/>
-                <a:ea typeface="Microsoft YaHei"/>
-                <a:cs typeface="Microsoft YaHei"/>
-              </a:rPr>
-              <a:t>Meta EMG 个性化后再 +16%。</a:t>
-            </a:r>
-          </a:p>
-          <a:p>
-            <a:pPr algn="l">
-              <a:spcAft>
-                <a:spcPts val="200"/>
-              </a:spcAft>
-            </a:pPr>
-            <a:r>
-              <a:rPr sz="1200" b="0">
-                <a:solidFill>
-                  <a:srgbClr val="555757"/>
-                </a:solidFill>
-                <a:latin typeface="Microsoft YaHei"/>
-                <a:ea typeface="Microsoft YaHei"/>
-                <a:cs typeface="Microsoft YaHei"/>
-              </a:rPr>
-              <a:t>回答：换设备换人还行不行 → 画像进数据规格。</a:t>
-            </a:r>
-          </a:p>
-        </p:txBody>
-      </p:sp>
-      <p:sp>
-        <p:nvSpPr>
-          <p:cNvPr id="15" name="Rounded Rectangle 14"/>
-          <p:cNvSpPr/>
-          <p:nvPr/>
-        </p:nvSpPr>
-        <p:spPr>
-          <a:xfrm>
-            <a:off x="6263640" y="1417320"/>
-            <a:ext cx="2788920" cy="3566160"/>
-          </a:xfrm>
-          <a:prstGeom prst="roundRect">
-            <a:avLst>
-              <a:gd name="adj" fmla="val 5000"/>
-            </a:avLst>
-          </a:prstGeom>
-          <a:solidFill>
-            <a:srgbClr val="FFFFFF"/>
-          </a:solidFill>
-          <a:ln w="9525">
-            <a:solidFill>
-              <a:srgbClr val="DDDDDD"/>
-            </a:solidFill>
-          </a:ln>
-        </p:spPr>
-        <p:style>
-          <a:lnRef idx="1">
-            <a:schemeClr val="accent1"/>
-          </a:lnRef>
-          <a:fillRef idx="3">
-            <a:schemeClr val="accent1"/>
-          </a:fillRef>
-          <a:effectRef idx="2">
-            <a:schemeClr val="accent1"/>
-          </a:effectRef>
-          <a:fontRef idx="minor">
-            <a:schemeClr val="lt1"/>
-          </a:fontRef>
-        </p:style>
-        <p:txBody>
-          <a:bodyPr rtlCol="0" anchor="ctr"/>
-          <a:lstStyle/>
-          <a:p>
-            <a:pPr algn="ctr"/>
-          </a:p>
-        </p:txBody>
-      </p:sp>
-      <p:sp>
-        <p:nvSpPr>
           <p:cNvPr id="16" name="Rectangle 15"/>
           <p:cNvSpPr/>
           <p:nvPr/>
@@ -20033,7 +16076,7 @@
                 <a:ea typeface="Microsoft YaHei"/>
                 <a:cs typeface="Microsoft YaHei"/>
               </a:rPr>
-              <a:t>9  /  11</a:t>
+              <a:t>7  /  7</a:t>
             </a:r>
           </a:p>
         </p:txBody>

--- a/AI物理感知平台-华为汇报.pptx
+++ b/AI物理感知平台-华为汇报.pptx
@@ -21,6 +21,8 @@
     <p:sldId id="260" r:id="rId5"/>
     <p:sldId id="261" r:id="rId16"/>
     <p:sldId id="262" r:id="rId17"/>
+    <p:sldId id="263" r:id="rId18"/>
+    <p:sldId id="264" r:id="rId19"/>
   </p:sldIdLst>
   <p:sldSz cx="12196763" cy="6858000"/>
   <p:notesSz cx="6858000" cy="9144000"/>
@@ -7411,7 +7413,7 @@
                 <a:ea typeface="Microsoft YaHei"/>
                 <a:cs typeface="Microsoft YaHei"/>
               </a:rPr>
-              <a:t>来源：TimesFM / UniTS / MOMENT / LIMU-BERT-X 公开资料  ·  7 页平台版</a:t>
+              <a:t>来源：TimesFM / UniTS / MOMENT / LIMU-BERT-X 公开资料  ·  9 页平台版</a:t>
             </a:r>
           </a:p>
         </p:txBody>
@@ -7450,7 +7452,7 @@
                 <a:ea typeface="Microsoft YaHei"/>
                 <a:cs typeface="Microsoft YaHei"/>
               </a:rPr>
-              <a:t>1  /  7</a:t>
+              <a:t>1  /  9</a:t>
             </a:r>
           </a:p>
         </p:txBody>
@@ -8583,7 +8585,7 @@
                 <a:ea typeface="Microsoft YaHei"/>
                 <a:cs typeface="Microsoft YaHei"/>
               </a:rPr>
-              <a:t>2  /  7</a:t>
+              <a:t>2  /  9</a:t>
             </a:r>
           </a:p>
         </p:txBody>
@@ -10819,7 +10821,7 @@
                 <a:ea typeface="Microsoft YaHei"/>
                 <a:cs typeface="Microsoft YaHei"/>
               </a:rPr>
-              <a:t>3  /  7</a:t>
+              <a:t>3  /  9</a:t>
             </a:r>
           </a:p>
         </p:txBody>
@@ -13006,7 +13008,7 @@
                 <a:ea typeface="Microsoft YaHei"/>
                 <a:cs typeface="Microsoft YaHei"/>
               </a:rPr>
-              <a:t>4  /  7</a:t>
+              <a:t>4  /  9</a:t>
             </a:r>
           </a:p>
         </p:txBody>
@@ -13106,7 +13108,7 @@
                 <a:ea typeface="Microsoft YaHei"/>
                 <a:cs typeface="Microsoft YaHei"/>
               </a:rPr>
-              <a:t>4  痛点 → 方案</a:t>
+              <a:t>4  TOP3 研究团队</a:t>
             </a:r>
           </a:p>
         </p:txBody>
@@ -13145,7 +13147,7 @@
                 <a:ea typeface="Microsoft YaHei"/>
                 <a:cs typeface="Microsoft YaHei"/>
               </a:rPr>
-              <a:t>每个痛点对应一类已验证的模型能力</a:t>
+              <a:t>物理感知方向最值得对标的三支队伍</a:t>
             </a:r>
           </a:p>
         </p:txBody>
@@ -13227,7 +13229,7 @@
                 <a:ea typeface="Microsoft YaHei"/>
                 <a:cs typeface="Microsoft YaHei"/>
               </a:rPr>
-              <a:t>平台不做场景：只把模型能力收敛成 接入 → 特征 → 预测 / 分类。</a:t>
+              <a:t>选型口径：有基础模型、有真实数据、有产业部署。</a:t>
             </a:r>
           </a:p>
         </p:txBody>
@@ -13240,8 +13242,8 @@
         </p:nvSpPr>
         <p:spPr>
           <a:xfrm>
-            <a:off x="457200" y="1371600"/>
-            <a:ext cx="11247120" cy="1115568"/>
+            <a:off x="411480" y="1417320"/>
+            <a:ext cx="2788920" cy="3566160"/>
           </a:xfrm>
           <a:prstGeom prst="roundRect">
             <a:avLst>
@@ -13287,8 +13289,8 @@
         </p:nvSpPr>
         <p:spPr>
           <a:xfrm>
-            <a:off x="457200" y="1371600"/>
-            <a:ext cx="91440" cy="1115568"/>
+            <a:off x="411480" y="1417320"/>
+            <a:ext cx="2788920" cy="73152"/>
           </a:xfrm>
           <a:prstGeom prst="rect">
             <a:avLst/>
@@ -13330,8 +13332,8 @@
         </p:nvSpPr>
         <p:spPr>
           <a:xfrm>
-            <a:off x="713232" y="1499616"/>
-            <a:ext cx="2560320" cy="868680"/>
+            <a:off x="548640" y="1645920"/>
+            <a:ext cx="2514600" cy="685800"/>
           </a:xfrm>
           <a:prstGeom prst="rect">
             <a:avLst/>
@@ -13356,25 +13358,7 @@
                 <a:ea typeface="Microsoft YaHei"/>
                 <a:cs typeface="Microsoft YaHei"/>
               </a:rPr>
-              <a:t>多模态</a:t>
-            </a:r>
-          </a:p>
-          <a:p>
-            <a:pPr algn="l">
-              <a:spcAft>
-                <a:spcPts val="200"/>
-              </a:spcAft>
-            </a:pPr>
-            <a:r>
-              <a:rPr sz="1500" b="1">
-                <a:solidFill>
-                  <a:srgbClr val="C7000B"/>
-                </a:solidFill>
-                <a:latin typeface="Microsoft YaHei"/>
-                <a:ea typeface="Microsoft YaHei"/>
-                <a:cs typeface="Microsoft YaHei"/>
-              </a:rPr>
-              <a:t>融合不足</a:t>
+              <a:t>Google Research</a:t>
             </a:r>
           </a:p>
         </p:txBody>
@@ -13387,8 +13371,8 @@
         </p:nvSpPr>
         <p:spPr>
           <a:xfrm>
-            <a:off x="3474720" y="1481328"/>
-            <a:ext cx="8046720" cy="914400"/>
+            <a:off x="548640" y="2377440"/>
+            <a:ext cx="2514600" cy="2468880"/>
           </a:xfrm>
           <a:prstGeom prst="rect">
             <a:avLst/>
@@ -13413,7 +13397,7 @@
                 <a:ea typeface="Microsoft YaHei"/>
                 <a:cs typeface="Microsoft YaHei"/>
               </a:rPr>
-              <a:t>统一 patch token + 变元注意力：TimesFM-3 变元注意力、UniTS 任务 token；Babel 6 模态对齐作参照。</a:t>
+              <a:t>TimesFM 系列（1.0 → 3.0）。</a:t>
             </a:r>
           </a:p>
           <a:p>
@@ -13431,7 +13415,25 @@
                 <a:ea typeface="Microsoft YaHei"/>
                 <a:cs typeface="Microsoft YaHei"/>
               </a:rPr>
-              <a:t>接入规格统一时钟、量纲、质量位——对齐在进模型前完成。</a:t>
+              <a:t>通用时序预测标杆：fev-bench / TIME / GIFT-Eval 三榜第一。</a:t>
+            </a:r>
+          </a:p>
+          <a:p>
+            <a:pPr algn="l">
+              <a:spcAft>
+                <a:spcPts val="200"/>
+              </a:spcAft>
+            </a:pPr>
+            <a:r>
+              <a:rPr sz="1200" b="0">
+                <a:solidFill>
+                  <a:srgbClr val="555757"/>
+                </a:solidFill>
+                <a:latin typeface="Microsoft YaHei"/>
+                <a:ea typeface="Microsoft YaHei"/>
+                <a:cs typeface="Microsoft YaHei"/>
+              </a:rPr>
+              <a:t>平台预测底座的来源。</a:t>
             </a:r>
           </a:p>
         </p:txBody>
@@ -13444,8 +13446,8 @@
         </p:nvSpPr>
         <p:spPr>
           <a:xfrm>
-            <a:off x="457200" y="2606040"/>
-            <a:ext cx="11247120" cy="1115568"/>
+            <a:off x="3337560" y="1417320"/>
+            <a:ext cx="2788920" cy="3566160"/>
           </a:xfrm>
           <a:prstGeom prst="roundRect">
             <a:avLst>
@@ -13491,8 +13493,8 @@
         </p:nvSpPr>
         <p:spPr>
           <a:xfrm>
-            <a:off x="457200" y="2606040"/>
-            <a:ext cx="91440" cy="1115568"/>
+            <a:off x="3337560" y="1417320"/>
+            <a:ext cx="2788920" cy="73152"/>
           </a:xfrm>
           <a:prstGeom prst="rect">
             <a:avLst/>
@@ -13534,8 +13536,8 @@
         </p:nvSpPr>
         <p:spPr>
           <a:xfrm>
-            <a:off x="713232" y="2734056"/>
-            <a:ext cx="2560320" cy="868680"/>
+            <a:off x="3474720" y="1645920"/>
+            <a:ext cx="2514600" cy="685800"/>
           </a:xfrm>
           <a:prstGeom prst="rect">
             <a:avLst/>
@@ -13560,7 +13562,7 @@
                 <a:ea typeface="Microsoft YaHei"/>
                 <a:cs typeface="Microsoft YaHei"/>
               </a:rPr>
-              <a:t>多设备</a:t>
+              <a:t>Mo Li 团队</a:t>
             </a:r>
           </a:p>
           <a:p>
@@ -13578,7 +13580,7 @@
                 <a:ea typeface="Microsoft YaHei"/>
                 <a:cs typeface="Microsoft YaHei"/>
               </a:rPr>
-              <a:t>自适应困难</a:t>
+              <a:t>港科大/南洋理工 + 阿里巴巴</a:t>
             </a:r>
           </a:p>
         </p:txBody>
@@ -13591,8 +13593,8 @@
         </p:nvSpPr>
         <p:spPr>
           <a:xfrm>
-            <a:off x="3474720" y="2715768"/>
-            <a:ext cx="8046720" cy="914400"/>
+            <a:off x="3474720" y="2377440"/>
+            <a:ext cx="2514600" cy="2468880"/>
           </a:xfrm>
           <a:prstGeom prst="rect">
             <a:avLst/>
@@ -13617,7 +13619,7 @@
                 <a:ea typeface="Microsoft YaHei"/>
                 <a:cs typeface="Microsoft YaHei"/>
               </a:rPr>
-              <a:t>跨设备预训练先验：LIMU-BERT-X 覆盖 1.1K 机型、6 万人；Meta EMG 跨用户泛化。</a:t>
+              <a:t>LIMU-BERT（SenSys'21 最佳论文提名）→ LIMU-BERT-X（MobiCom'25）→ Babel（SenSys'25）。</a:t>
             </a:r>
           </a:p>
           <a:p>
@@ -13635,7 +13637,25 @@
                 <a:ea typeface="Microsoft YaHei"/>
                 <a:cs typeface="Microsoft YaHei"/>
               </a:rPr>
-              <a:t>RevIN 实例归一 + LoRA 轻适配（TartanIMU 仅 1.1M 参数即适配新设备）。</a:t>
+              <a:t>143 万小时真实数据；外卖配送全国部署。</a:t>
+            </a:r>
+          </a:p>
+          <a:p>
+            <a:pPr algn="l">
+              <a:spcAft>
+                <a:spcPts val="200"/>
+              </a:spcAft>
+            </a:pPr>
+            <a:r>
+              <a:rPr sz="1200" b="0">
+                <a:solidFill>
+                  <a:srgbClr val="555757"/>
+                </a:solidFill>
+                <a:latin typeface="Microsoft YaHei"/>
+                <a:ea typeface="Microsoft YaHei"/>
+                <a:cs typeface="Microsoft YaHei"/>
+              </a:rPr>
+              <a:t>传感器基础模型从论文走到产业。</a:t>
             </a:r>
           </a:p>
         </p:txBody>
@@ -13648,8 +13668,8 @@
         </p:nvSpPr>
         <p:spPr>
           <a:xfrm>
-            <a:off x="457200" y="3840480"/>
-            <a:ext cx="11247120" cy="1115568"/>
+            <a:off x="6263640" y="1417320"/>
+            <a:ext cx="2788920" cy="3566160"/>
           </a:xfrm>
           <a:prstGeom prst="roundRect">
             <a:avLst>
@@ -13695,8 +13715,8 @@
         </p:nvSpPr>
         <p:spPr>
           <a:xfrm>
-            <a:off x="457200" y="3840480"/>
-            <a:ext cx="91440" cy="1115568"/>
+            <a:off x="6263640" y="1417320"/>
+            <a:ext cx="2788920" cy="73152"/>
           </a:xfrm>
           <a:prstGeom prst="rect">
             <a:avLst/>
@@ -13738,8 +13758,8 @@
         </p:nvSpPr>
         <p:spPr>
           <a:xfrm>
-            <a:off x="713232" y="3968496"/>
-            <a:ext cx="2560320" cy="868680"/>
+            <a:off x="6400800" y="1645920"/>
+            <a:ext cx="2514600" cy="685800"/>
           </a:xfrm>
           <a:prstGeom prst="rect">
             <a:avLst/>
@@ -13764,25 +13784,7 @@
                 <a:ea typeface="Microsoft YaHei"/>
                 <a:cs typeface="Microsoft YaHei"/>
               </a:rPr>
-              <a:t>多任务多场景</a:t>
-            </a:r>
-          </a:p>
-          <a:p>
-            <a:pPr algn="l">
-              <a:spcAft>
-                <a:spcPts val="200"/>
-              </a:spcAft>
-            </a:pPr>
-            <a:r>
-              <a:rPr sz="1500" b="1">
-                <a:solidFill>
-                  <a:srgbClr val="30B5C5"/>
-                </a:solidFill>
-                <a:latin typeface="Microsoft YaHei"/>
-                <a:ea typeface="Microsoft YaHei"/>
-                <a:cs typeface="Microsoft YaHei"/>
-              </a:rPr>
-              <a:t>泛化弱</a:t>
+              <a:t>Meta Reality Labs</a:t>
             </a:r>
           </a:p>
         </p:txBody>
@@ -13795,8 +13797,8 @@
         </p:nvSpPr>
         <p:spPr>
           <a:xfrm>
-            <a:off x="3474720" y="3950208"/>
-            <a:ext cx="8046720" cy="914400"/>
+            <a:off x="6400800" y="2377440"/>
+            <a:ext cx="2514600" cy="2468880"/>
           </a:xfrm>
           <a:prstGeom prst="rect">
             <a:avLst/>
@@ -13821,7 +13823,7 @@
                 <a:ea typeface="Microsoft YaHei"/>
                 <a:cs typeface="Microsoft YaHei"/>
               </a:rPr>
-              <a:t>零样本基座：TimesFM-3 零样本预测；UniTS 零样本多任务（预测/分类/填补/异常）。</a:t>
+              <a:t>sEMG 神经腕带（Nature'25）。</a:t>
             </a:r>
           </a:p>
           <a:p>
@@ -13839,7 +13841,25 @@
                 <a:ea typeface="Microsoft YaHei"/>
                 <a:cs typeface="Microsoft YaHei"/>
               </a:rPr>
-              <a:t>统一预测 / 分类接口，新场景先零样本启动，再按需微调。</a:t>
+              <a:t>跨用户泛化：0.88 手势/s、手写 20.9 WPM。</a:t>
+            </a:r>
+          </a:p>
+          <a:p>
+            <a:pPr algn="l">
+              <a:spcAft>
+                <a:spcPts val="200"/>
+              </a:spcAft>
+            </a:pPr>
+            <a:r>
+              <a:rPr sz="1200" b="0">
+                <a:solidFill>
+                  <a:srgbClr val="555757"/>
+                </a:solidFill>
+                <a:latin typeface="Microsoft YaHei"/>
+                <a:ea typeface="Microsoft YaHei"/>
+                <a:cs typeface="Microsoft YaHei"/>
+              </a:rPr>
+              <a:t>已随 Ray-Ban Display 出货——唯一规模商用的 EMG 接口。</a:t>
             </a:r>
           </a:p>
         </p:txBody>
@@ -13852,8 +13872,8 @@
         </p:nvSpPr>
         <p:spPr>
           <a:xfrm>
-            <a:off x="457200" y="5166360"/>
-            <a:ext cx="11247120" cy="777240"/>
+            <a:off x="457200" y="5120640"/>
+            <a:ext cx="11247120" cy="822960"/>
           </a:xfrm>
           <a:prstGeom prst="roundRect">
             <a:avLst>
@@ -13899,8 +13919,8 @@
         </p:nvSpPr>
         <p:spPr>
           <a:xfrm>
-            <a:off x="640080" y="5285232"/>
-            <a:ext cx="10881360" cy="566928"/>
+            <a:off x="640080" y="5257800"/>
+            <a:ext cx="10881360" cy="548640"/>
           </a:xfrm>
           <a:prstGeom prst="rect">
             <a:avLst/>
@@ -13917,15 +13937,15 @@
               </a:spcAft>
             </a:pPr>
             <a:r>
-              <a:rPr sz="1300" b="1">
-                <a:solidFill>
-                  <a:srgbClr val="C7000B"/>
-                </a:solidFill>
-                <a:latin typeface="Microsoft YaHei"/>
-                <a:ea typeface="Microsoft YaHei"/>
-                <a:cs typeface="Microsoft YaHei"/>
-              </a:rPr>
-              <a:t>平台边界：交付接入校验、共享特征、预测 / 分类双接口、评测工具链；不交付场景 Pack、整机、芯片。</a:t>
+              <a:rPr sz="1300" b="0">
+                <a:solidFill>
+                  <a:srgbClr val="555757"/>
+                </a:solidFill>
+                <a:latin typeface="Microsoft YaHei"/>
+                <a:ea typeface="Microsoft YaHei"/>
+                <a:cs typeface="Microsoft YaHei"/>
+              </a:rPr>
+              <a:t>跟踪名单：CMU（MOMENT + TartanIMU）、Harvard + MIT 林肯实验室（UniTS）、Nokia Bell Labs（PRIMUS）、微软研究院（Babel）。</a:t>
             </a:r>
           </a:p>
         </p:txBody>
@@ -14007,7 +14027,7 @@
                 <a:ea typeface="Microsoft YaHei"/>
                 <a:cs typeface="Microsoft YaHei"/>
               </a:rPr>
-              <a:t>华为  ·  AI 物理感知平台  ·  痛点→方案    |    Security Level: Internal</a:t>
+              <a:t>华为  ·  AI 物理感知平台  ·  TOP3 团队    |    Security Level: Internal</a:t>
             </a:r>
           </a:p>
         </p:txBody>
@@ -14046,7 +14066,7 @@
                 <a:ea typeface="Microsoft YaHei"/>
                 <a:cs typeface="Microsoft YaHei"/>
               </a:rPr>
-              <a:t>5  /  7</a:t>
+              <a:t>5  /  9</a:t>
             </a:r>
           </a:p>
         </p:txBody>
@@ -14146,7 +14166,7 @@
                 <a:ea typeface="Microsoft YaHei"/>
                 <a:cs typeface="Microsoft YaHei"/>
               </a:rPr>
-              <a:t>5  接口定义</a:t>
+              <a:t>5  TOP3 商用场景</a:t>
             </a:r>
           </a:p>
         </p:txBody>
@@ -14185,7 +14205,7 @@
                 <a:ea typeface="Microsoft YaHei"/>
                 <a:cs typeface="Microsoft YaHei"/>
               </a:rPr>
-              <a:t>接入规格 + 预测接口 + 分类接口</a:t>
+              <a:t>平台能力已被产业验证的三个方向</a:t>
             </a:r>
           </a:p>
         </p:txBody>
@@ -14267,7 +14287,7 @@
                 <a:ea typeface="Microsoft YaHei"/>
                 <a:cs typeface="Microsoft YaHei"/>
               </a:rPr>
-              <a:t>所有输入先过接入校验；预测与分类共用同一批 patch token。</a:t>
+              <a:t>平台只提供接入 / 预测 / 分类接口；场景 Pack 由业务方交付。</a:t>
             </a:r>
           </a:p>
         </p:txBody>
@@ -14280,8 +14300,8 @@
         </p:nvSpPr>
         <p:spPr>
           <a:xfrm>
-            <a:off x="457200" y="1371600"/>
-            <a:ext cx="11247120" cy="1828800"/>
+            <a:off x="411480" y="1417320"/>
+            <a:ext cx="2788920" cy="3566160"/>
           </a:xfrm>
           <a:prstGeom prst="roundRect">
             <a:avLst>
@@ -14327,8 +14347,8 @@
         </p:nvSpPr>
         <p:spPr>
           <a:xfrm>
-            <a:off x="457200" y="1371600"/>
-            <a:ext cx="11247120" cy="73152"/>
+            <a:off x="411480" y="1417320"/>
+            <a:ext cx="2788920" cy="73152"/>
           </a:xfrm>
           <a:prstGeom prst="rect">
             <a:avLst/>
@@ -14370,8 +14390,8 @@
         </p:nvSpPr>
         <p:spPr>
           <a:xfrm>
-            <a:off x="640080" y="1600200"/>
-            <a:ext cx="10881360" cy="320040"/>
+            <a:off x="548640" y="1645920"/>
+            <a:ext cx="2514600" cy="365760"/>
           </a:xfrm>
           <a:prstGeom prst="rect">
             <a:avLst/>
@@ -14396,7 +14416,7 @@
                 <a:ea typeface="Microsoft YaHei"/>
                 <a:cs typeface="Microsoft YaHei"/>
               </a:rPr>
-              <a:t>接入（数据规格） → 校验 → patch token</a:t>
+              <a:t>可穿戴运动健康</a:t>
             </a:r>
           </a:p>
         </p:txBody>
@@ -14409,8 +14429,8 @@
         </p:nvSpPr>
         <p:spPr>
           <a:xfrm>
-            <a:off x="640080" y="2011680"/>
-            <a:ext cx="10881360" cy="1005840"/>
+            <a:off x="548640" y="2148840"/>
+            <a:ext cx="2514600" cy="2651760"/>
           </a:xfrm>
           <a:prstGeom prst="rect">
             <a:avLst/>
@@ -14427,7 +14447,7 @@
               </a:spcAft>
             </a:pPr>
             <a:r>
-              <a:rPr sz="1300" b="0">
+              <a:rPr sz="1200" b="0">
                 <a:solidFill>
                   <a:srgbClr val="555757"/>
                 </a:solidFill>
@@ -14435,17 +14455,17 @@
                 <a:ea typeface="Microsoft YaHei"/>
                 <a:cs typeface="Microsoft YaHei"/>
               </a:rPr>
-              <a:t>数据规格 = {序列 id, 时间戳, 数值, 量纲单位, 质量位, 变元角色: 目标 / 仅历史 / 历史+未来}</a:t>
-            </a:r>
-          </a:p>
-          <a:p>
-            <a:pPr algn="l">
-              <a:spcAft>
-                <a:spcPts val="200"/>
-              </a:spcAft>
-            </a:pPr>
-            <a:r>
-              <a:rPr sz="1300" b="0">
+              <a:t>传感器：IMU / EMG（手表、手环、腕带）。</a:t>
+            </a:r>
+          </a:p>
+          <a:p>
+            <a:pPr algn="l">
+              <a:spcAft>
+                <a:spcPts val="200"/>
+              </a:spcAft>
+            </a:pPr>
+            <a:r>
+              <a:rPr sz="1200" b="0">
                 <a:solidFill>
                   <a:srgbClr val="555757"/>
                 </a:solidFill>
@@ -14453,7 +14473,25 @@
                 <a:ea typeface="Microsoft YaHei"/>
                 <a:cs typeface="Microsoft YaHei"/>
               </a:rPr>
-              <a:t>校验：时钟对齐、量纲归一、质量位过滤、变元上限 32、历史段 ≤ 15,360。不合格直接拒收。</a:t>
+              <a:t>能力：手势 / 活动分类 + 生理指标预测。</a:t>
+            </a:r>
+          </a:p>
+          <a:p>
+            <a:pPr algn="l">
+              <a:spcAft>
+                <a:spcPts val="200"/>
+              </a:spcAft>
+            </a:pPr>
+            <a:r>
+              <a:rPr sz="1200" b="0">
+                <a:solidFill>
+                  <a:srgbClr val="555757"/>
+                </a:solidFill>
+                <a:latin typeface="Microsoft YaHei"/>
+                <a:ea typeface="Microsoft YaHei"/>
+                <a:cs typeface="Microsoft YaHei"/>
+              </a:rPr>
+              <a:t>验证：Meta 腕带随 Ray-Ban Display 出货；LIMU-BERT-X 端侧 HAR。</a:t>
             </a:r>
           </a:p>
         </p:txBody>
@@ -14466,8 +14504,8 @@
         </p:nvSpPr>
         <p:spPr>
           <a:xfrm>
-            <a:off x="457200" y="3383280"/>
-            <a:ext cx="5577840" cy="2194560"/>
+            <a:off x="3337560" y="1417320"/>
+            <a:ext cx="2788920" cy="3566160"/>
           </a:xfrm>
           <a:prstGeom prst="roundRect">
             <a:avLst>
@@ -14513,14 +14551,14 @@
         </p:nvSpPr>
         <p:spPr>
           <a:xfrm>
-            <a:off x="457200" y="3383280"/>
-            <a:ext cx="5577840" cy="73152"/>
+            <a:off x="3337560" y="1417320"/>
+            <a:ext cx="2788920" cy="73152"/>
           </a:xfrm>
           <a:prstGeom prst="rect">
             <a:avLst/>
           </a:prstGeom>
           <a:solidFill>
-            <a:srgbClr val="62B230"/>
+            <a:srgbClr val="ED6D00"/>
           </a:solidFill>
           <a:ln>
             <a:noFill/>
@@ -14556,8 +14594,8 @@
         </p:nvSpPr>
         <p:spPr>
           <a:xfrm>
-            <a:off x="640080" y="3611880"/>
-            <a:ext cx="5212080" cy="320040"/>
+            <a:off x="3474720" y="1645920"/>
+            <a:ext cx="2514600" cy="365760"/>
           </a:xfrm>
           <a:prstGeom prst="rect">
             <a:avLst/>
@@ -14576,13 +14614,13 @@
             <a:r>
               <a:rPr sz="1600" b="1">
                 <a:solidFill>
-                  <a:srgbClr val="62B230"/>
-                </a:solidFill>
-                <a:latin typeface="Microsoft YaHei"/>
-                <a:ea typeface="Microsoft YaHei"/>
-                <a:cs typeface="Microsoft YaHei"/>
-              </a:rPr>
-              <a:t>预测（历史段, 预测时长） → {分位数, 点预测}</a:t>
+                  <a:srgbClr val="ED6D00"/>
+                </a:solidFill>
+                <a:latin typeface="Microsoft YaHei"/>
+                <a:ea typeface="Microsoft YaHei"/>
+                <a:cs typeface="Microsoft YaHei"/>
+              </a:rPr>
+              <a:t>终端情境感知</a:t>
             </a:r>
           </a:p>
         </p:txBody>
@@ -14595,8 +14633,8 @@
         </p:nvSpPr>
         <p:spPr>
           <a:xfrm>
-            <a:off x="640080" y="4069080"/>
-            <a:ext cx="5212080" cy="1280160"/>
+            <a:off x="3474720" y="2148840"/>
+            <a:ext cx="2514600" cy="2651760"/>
           </a:xfrm>
           <a:prstGeom prst="rect">
             <a:avLst/>
@@ -14613,7 +14651,7 @@
               </a:spcAft>
             </a:pPr>
             <a:r>
-              <a:rPr sz="1300" b="0">
+              <a:rPr sz="1200" b="0">
                 <a:solidFill>
                   <a:srgbClr val="555757"/>
                 </a:solidFill>
@@ -14621,17 +14659,17 @@
                 <a:ea typeface="Microsoft YaHei"/>
                 <a:cs typeface="Microsoft YaHei"/>
               </a:rPr>
-              <a:t>分位数：(V, H, 9) 十分位轨迹</a:t>
-            </a:r>
-          </a:p>
-          <a:p>
-            <a:pPr algn="l">
-              <a:spcAft>
-                <a:spcPts val="200"/>
-              </a:spcAft>
-            </a:pPr>
-            <a:r>
-              <a:rPr sz="1300" b="0">
+              <a:t>传感器：IMU（手机、耳机）。</a:t>
+            </a:r>
+          </a:p>
+          <a:p>
+            <a:pPr algn="l">
+              <a:spcAft>
+                <a:spcPts val="200"/>
+              </a:spcAft>
+            </a:pPr>
+            <a:r>
+              <a:rPr sz="1200" b="0">
                 <a:solidFill>
                   <a:srgbClr val="555757"/>
                 </a:solidFill>
@@ -14639,17 +14677,17 @@
                 <a:ea typeface="Microsoft YaHei"/>
                 <a:cs typeface="Microsoft YaHei"/>
               </a:rPr>
-              <a:t>点预测：(V, H) 中位数 q50</a:t>
-            </a:r>
-          </a:p>
-          <a:p>
-            <a:pPr algn="l">
-              <a:spcAft>
-                <a:spcPts val="200"/>
-              </a:spcAft>
-            </a:pPr>
-            <a:r>
-              <a:rPr sz="1300" b="0">
+              <a:t>能力：骑行 / 驾驶 / 跌倒识别 + 状态预测。</a:t>
+            </a:r>
+          </a:p>
+          <a:p>
+            <a:pPr algn="l">
+              <a:spcAft>
+                <a:spcPts val="200"/>
+              </a:spcAft>
+            </a:pPr>
+            <a:r>
+              <a:rPr sz="1200" b="0">
                 <a:solidFill>
                   <a:srgbClr val="555757"/>
                 </a:solidFill>
@@ -14657,7 +14695,7 @@
                 <a:ea typeface="Microsoft YaHei"/>
                 <a:cs typeface="Microsoft YaHei"/>
               </a:rPr>
-              <a:t>一次前向，CPM 非自回归；可拼接任意预测长度。</a:t>
+              <a:t>验证：LIMU-BERT-X 外卖配送全国部署，6 万骑手、1.1K 种机型。</a:t>
             </a:r>
           </a:p>
         </p:txBody>
@@ -14670,8 +14708,8 @@
         </p:nvSpPr>
         <p:spPr>
           <a:xfrm>
-            <a:off x="6217920" y="3383280"/>
-            <a:ext cx="5486400" cy="2194560"/>
+            <a:off x="6263640" y="1417320"/>
+            <a:ext cx="2788920" cy="3566160"/>
           </a:xfrm>
           <a:prstGeom prst="roundRect">
             <a:avLst>
@@ -14717,8 +14755,8 @@
         </p:nvSpPr>
         <p:spPr>
           <a:xfrm>
-            <a:off x="6217920" y="3383280"/>
-            <a:ext cx="5486400" cy="73152"/>
+            <a:off x="6263640" y="1417320"/>
+            <a:ext cx="2788920" cy="73152"/>
           </a:xfrm>
           <a:prstGeom prst="rect">
             <a:avLst/>
@@ -14760,8 +14798,8 @@
         </p:nvSpPr>
         <p:spPr>
           <a:xfrm>
-            <a:off x="6400800" y="3611880"/>
-            <a:ext cx="5120640" cy="320040"/>
+            <a:off x="6400800" y="1645920"/>
+            <a:ext cx="2514600" cy="365760"/>
           </a:xfrm>
           <a:prstGeom prst="rect">
             <a:avLst/>
@@ -14786,7 +14824,7 @@
                 <a:ea typeface="Microsoft YaHei"/>
                 <a:cs typeface="Microsoft YaHei"/>
               </a:rPr>
-              <a:t>分类（时间窗） → {类别, 置信度}</a:t>
+              <a:t>工业与机器人</a:t>
             </a:r>
           </a:p>
         </p:txBody>
@@ -14799,8 +14837,8 @@
         </p:nvSpPr>
         <p:spPr>
           <a:xfrm>
-            <a:off x="6400800" y="4069080"/>
-            <a:ext cx="5120640" cy="1280160"/>
+            <a:off x="6400800" y="2148840"/>
+            <a:ext cx="2514600" cy="2651760"/>
           </a:xfrm>
           <a:prstGeom prst="rect">
             <a:avLst/>
@@ -14817,7 +14855,7 @@
               </a:spcAft>
             </a:pPr>
             <a:r>
-              <a:rPr sz="1300" b="0">
+              <a:rPr sz="1200" b="0">
                 <a:solidFill>
                   <a:srgbClr val="555757"/>
                 </a:solidFill>
@@ -14825,17 +14863,17 @@
                 <a:ea typeface="Microsoft YaHei"/>
                 <a:cs typeface="Microsoft YaHei"/>
               </a:rPr>
-              <a:t>类别：场景方注册的类别 id</a:t>
-            </a:r>
-          </a:p>
-          <a:p>
-            <a:pPr algn="l">
-              <a:spcAft>
-                <a:spcPts val="200"/>
-              </a:spcAft>
-            </a:pPr>
-            <a:r>
-              <a:rPr sz="1300" b="0">
+              <a:t>传感器：IMU / TP（温度压力）。</a:t>
+            </a:r>
+          </a:p>
+          <a:p>
+            <a:pPr algn="l">
+              <a:spcAft>
+                <a:spcPts val="200"/>
+              </a:spcAft>
+            </a:pPr>
+            <a:r>
+              <a:rPr sz="1200" b="0">
                 <a:solidFill>
                   <a:srgbClr val="555757"/>
                 </a:solidFill>
@@ -14843,17 +14881,17 @@
                 <a:ea typeface="Microsoft YaHei"/>
                 <a:cs typeface="Microsoft YaHei"/>
               </a:rPr>
-              <a:t>置信度：softmax 概率</a:t>
-            </a:r>
-          </a:p>
-          <a:p>
-            <a:pPr algn="l">
-              <a:spcAft>
-                <a:spcPts val="200"/>
-              </a:spcAft>
-            </a:pPr>
-            <a:r>
-              <a:rPr sz="1300" b="0">
+              <a:t>能力：工况分类 + 预测性维护 + 位姿估计。</a:t>
+            </a:r>
+          </a:p>
+          <a:p>
+            <a:pPr algn="l">
+              <a:spcAft>
+                <a:spcPts val="200"/>
+              </a:spcAft>
+            </a:pPr>
+            <a:r>
+              <a:rPr sz="1200" b="0">
                 <a:solidFill>
                   <a:srgbClr val="555757"/>
                 </a:solidFill>
@@ -14861,14 +14899,100 @@
                 <a:ea typeface="Microsoft YaHei"/>
                 <a:cs typeface="Microsoft YaHei"/>
               </a:rPr>
-              <a:t>基于共享特征 + 任务 token / 线性探针。</a:t>
-            </a:r>
-          </a:p>
-        </p:txBody>
-      </p:sp>
-      <p:sp>
-        <p:nvSpPr>
-          <p:cNvPr id="19" name="Rectangle 18"/>
+              <a:t>验证：TartanIMU 跨机器人平台，LoRA 1.1M 参数适配、200 FPS。</a:t>
+            </a:r>
+          </a:p>
+        </p:txBody>
+      </p:sp>
+      <p:sp>
+        <p:nvSpPr>
+          <p:cNvPr id="19" name="Rounded Rectangle 18"/>
+          <p:cNvSpPr/>
+          <p:nvPr/>
+        </p:nvSpPr>
+        <p:spPr>
+          <a:xfrm>
+            <a:off x="457200" y="5120640"/>
+            <a:ext cx="11247120" cy="822960"/>
+          </a:xfrm>
+          <a:prstGeom prst="roundRect">
+            <a:avLst>
+              <a:gd name="adj" fmla="val 5000"/>
+            </a:avLst>
+          </a:prstGeom>
+          <a:solidFill>
+            <a:srgbClr val="F7F7F7"/>
+          </a:solidFill>
+          <a:ln w="9525">
+            <a:solidFill>
+              <a:srgbClr val="DDDDDD"/>
+            </a:solidFill>
+          </a:ln>
+        </p:spPr>
+        <p:style>
+          <a:lnRef idx="1">
+            <a:schemeClr val="accent1"/>
+          </a:lnRef>
+          <a:fillRef idx="3">
+            <a:schemeClr val="accent1"/>
+          </a:fillRef>
+          <a:effectRef idx="2">
+            <a:schemeClr val="accent1"/>
+          </a:effectRef>
+          <a:fontRef idx="minor">
+            <a:schemeClr val="lt1"/>
+          </a:fontRef>
+        </p:style>
+        <p:txBody>
+          <a:bodyPr rtlCol="0" anchor="ctr"/>
+          <a:lstStyle/>
+          <a:p>
+            <a:pPr algn="ctr"/>
+          </a:p>
+        </p:txBody>
+      </p:sp>
+      <p:sp>
+        <p:nvSpPr>
+          <p:cNvPr id="20" name="TextBox 19"/>
+          <p:cNvSpPr txBox="1"/>
+          <p:nvPr/>
+        </p:nvSpPr>
+        <p:spPr>
+          <a:xfrm>
+            <a:off x="640080" y="5257800"/>
+            <a:ext cx="10881360" cy="548640"/>
+          </a:xfrm>
+          <a:prstGeom prst="rect">
+            <a:avLst/>
+          </a:prstGeom>
+          <a:noFill/>
+        </p:spPr>
+        <p:txBody>
+          <a:bodyPr wrap="square" anchor="t"/>
+          <a:lstStyle/>
+          <a:p>
+            <a:pPr algn="l">
+              <a:spcAft>
+                <a:spcPts val="200"/>
+              </a:spcAft>
+            </a:pPr>
+            <a:r>
+              <a:rPr sz="1400" b="1">
+                <a:solidFill>
+                  <a:srgbClr val="C7000B"/>
+                </a:solidFill>
+                <a:latin typeface="Microsoft YaHei"/>
+                <a:ea typeface="Microsoft YaHei"/>
+                <a:cs typeface="Microsoft YaHei"/>
+              </a:rPr>
+              <a:t>共性：三个场景都需要「预测 + 分类」同时在线，且设备 / 用户高度异构——正对应三大痛点。</a:t>
+            </a:r>
+          </a:p>
+        </p:txBody>
+      </p:sp>
+      <p:sp>
+        <p:nvSpPr>
+          <p:cNvPr id="21" name="Rectangle 20"/>
           <p:cNvSpPr/>
           <p:nvPr/>
         </p:nvSpPr>
@@ -14911,7 +15035,7 @@
       </p:sp>
       <p:sp>
         <p:nvSpPr>
-          <p:cNvPr id="20" name="TextBox 19"/>
+          <p:cNvPr id="22" name="TextBox 21"/>
           <p:cNvSpPr txBox="1"/>
           <p:nvPr/>
         </p:nvSpPr>
@@ -14943,14 +15067,14 @@
                 <a:ea typeface="Microsoft YaHei"/>
                 <a:cs typeface="Microsoft YaHei"/>
               </a:rPr>
-              <a:t>华为  ·  AI 物理感知平台  ·  接口    |    Security Level: Internal</a:t>
-            </a:r>
-          </a:p>
-        </p:txBody>
-      </p:sp>
-      <p:sp>
-        <p:nvSpPr>
-          <p:cNvPr id="21" name="TextBox 20"/>
+              <a:t>华为  ·  AI 物理感知平台  ·  TOP3 场景    |    Security Level: Internal</a:t>
+            </a:r>
+          </a:p>
+        </p:txBody>
+      </p:sp>
+      <p:sp>
+        <p:nvSpPr>
+          <p:cNvPr id="23" name="TextBox 22"/>
           <p:cNvSpPr txBox="1"/>
           <p:nvPr/>
         </p:nvSpPr>
@@ -14982,7 +15106,7 @@
                 <a:ea typeface="Microsoft YaHei"/>
                 <a:cs typeface="Microsoft YaHei"/>
               </a:rPr>
-              <a:t>6  /  7</a:t>
+              <a:t>6  /  9</a:t>
             </a:r>
           </a:p>
         </p:txBody>
@@ -15082,7 +15206,7 @@
                 <a:ea typeface="Microsoft YaHei"/>
                 <a:cs typeface="Microsoft YaHei"/>
               </a:rPr>
-              <a:t>6  代际演进</a:t>
+              <a:t>6  痛点 → 方案</a:t>
             </a:r>
           </a:p>
         </p:txBody>
@@ -15121,7 +15245,7 @@
                 <a:ea typeface="Microsoft YaHei"/>
                 <a:cs typeface="Microsoft YaHei"/>
               </a:rPr>
-              <a:t>Gen1 零样本基线 → Gen2 千人千面 → Gen3 Token 嵌入大模型</a:t>
+              <a:t>每个痛点对应一类已验证的模型能力</a:t>
             </a:r>
           </a:p>
         </p:txBody>
@@ -15203,7 +15327,7 @@
                 <a:ea typeface="Microsoft YaHei"/>
                 <a:cs typeface="Microsoft YaHei"/>
               </a:rPr>
-              <a:t>接口不变，能力逐代升级；每代回答一个业务问题。</a:t>
+              <a:t>平台不做场景：只把模型能力收敛成 接入 → 特征 → 预测 / 分类。</a:t>
             </a:r>
           </a:p>
         </p:txBody>
@@ -15216,8 +15340,8 @@
         </p:nvSpPr>
         <p:spPr>
           <a:xfrm>
-            <a:off x="411480" y="1417320"/>
-            <a:ext cx="2788920" cy="3566160"/>
+            <a:off x="457200" y="1371600"/>
+            <a:ext cx="11247120" cy="1115568"/>
           </a:xfrm>
           <a:prstGeom prst="roundRect">
             <a:avLst>
@@ -15263,8 +15387,8 @@
         </p:nvSpPr>
         <p:spPr>
           <a:xfrm>
-            <a:off x="411480" y="1417320"/>
-            <a:ext cx="2788920" cy="73152"/>
+            <a:off x="457200" y="1371600"/>
+            <a:ext cx="91440" cy="1115568"/>
           </a:xfrm>
           <a:prstGeom prst="rect">
             <a:avLst/>
@@ -15306,8 +15430,8 @@
         </p:nvSpPr>
         <p:spPr>
           <a:xfrm>
-            <a:off x="548640" y="1645920"/>
-            <a:ext cx="2514600" cy="365760"/>
+            <a:off x="713232" y="1499616"/>
+            <a:ext cx="2560320" cy="868680"/>
           </a:xfrm>
           <a:prstGeom prst="rect">
             <a:avLst/>
@@ -15324,7 +15448,7 @@
               </a:spcAft>
             </a:pPr>
             <a:r>
-              <a:rPr sz="1600" b="1">
+              <a:rPr sz="1500" b="1">
                 <a:solidFill>
                   <a:srgbClr val="C7000B"/>
                 </a:solidFill>
@@ -15332,7 +15456,25 @@
                 <a:ea typeface="Microsoft YaHei"/>
                 <a:cs typeface="Microsoft YaHei"/>
               </a:rPr>
-              <a:t>Gen1  零样本基线</a:t>
+              <a:t>多模态</a:t>
+            </a:r>
+          </a:p>
+          <a:p>
+            <a:pPr algn="l">
+              <a:spcAft>
+                <a:spcPts val="200"/>
+              </a:spcAft>
+            </a:pPr>
+            <a:r>
+              <a:rPr sz="1500" b="1">
+                <a:solidFill>
+                  <a:srgbClr val="C7000B"/>
+                </a:solidFill>
+                <a:latin typeface="Microsoft YaHei"/>
+                <a:ea typeface="Microsoft YaHei"/>
+                <a:cs typeface="Microsoft YaHei"/>
+              </a:rPr>
+              <a:t>融合不足</a:t>
             </a:r>
           </a:p>
         </p:txBody>
@@ -15345,8 +15487,8 @@
         </p:nvSpPr>
         <p:spPr>
           <a:xfrm>
-            <a:off x="548640" y="2148840"/>
-            <a:ext cx="2514600" cy="2651760"/>
+            <a:off x="3474720" y="1481328"/>
+            <a:ext cx="8046720" cy="914400"/>
           </a:xfrm>
           <a:prstGeom prst="rect">
             <a:avLst/>
@@ -15371,7 +15513,7 @@
                 <a:ea typeface="Microsoft YaHei"/>
                 <a:cs typeface="Microsoft YaHei"/>
               </a:rPr>
-              <a:t>预训练底座直接上岗。</a:t>
+              <a:t>统一 patch token + 变元注意力：TimesFM-3 变元注意力、UniTS 任务 token；Babel 6 模态对齐作参照。</a:t>
             </a:r>
           </a:p>
           <a:p>
@@ -15389,43 +15531,7 @@
                 <a:ea typeface="Microsoft YaHei"/>
                 <a:cs typeface="Microsoft YaHei"/>
               </a:rPr>
-              <a:t>预测零样本（TimesFM-3）；</a:t>
-            </a:r>
-          </a:p>
-          <a:p>
-            <a:pPr algn="l">
-              <a:spcAft>
-                <a:spcPts val="200"/>
-              </a:spcAft>
-            </a:pPr>
-            <a:r>
-              <a:rPr sz="1200" b="0">
-                <a:solidFill>
-                  <a:srgbClr val="555757"/>
-                </a:solidFill>
-                <a:latin typeface="Microsoft YaHei"/>
-                <a:ea typeface="Microsoft YaHei"/>
-                <a:cs typeface="Microsoft YaHei"/>
-              </a:rPr>
-              <a:t>分类走规则 / 线性探针（UniTS / MOMENT）。</a:t>
-            </a:r>
-          </a:p>
-          <a:p>
-            <a:pPr algn="l">
-              <a:spcAft>
-                <a:spcPts val="200"/>
-              </a:spcAft>
-            </a:pPr>
-            <a:r>
-              <a:rPr sz="1200" b="0">
-                <a:solidFill>
-                  <a:srgbClr val="555757"/>
-                </a:solidFill>
-                <a:latin typeface="Microsoft YaHei"/>
-                <a:ea typeface="Microsoft YaHei"/>
-                <a:cs typeface="Microsoft YaHei"/>
-              </a:rPr>
-              <a:t>回答：底座行不行 → 统一评测基线。</a:t>
+              <a:t>接入规格统一时钟、量纲、质量位——对齐在进模型前完成。</a:t>
             </a:r>
           </a:p>
         </p:txBody>
@@ -15438,8 +15544,8 @@
         </p:nvSpPr>
         <p:spPr>
           <a:xfrm>
-            <a:off x="3337560" y="1417320"/>
-            <a:ext cx="2788920" cy="3566160"/>
+            <a:off x="457200" y="2606040"/>
+            <a:ext cx="11247120" cy="1115568"/>
           </a:xfrm>
           <a:prstGeom prst="roundRect">
             <a:avLst>
@@ -15485,8 +15591,8 @@
         </p:nvSpPr>
         <p:spPr>
           <a:xfrm>
-            <a:off x="3337560" y="1417320"/>
-            <a:ext cx="2788920" cy="73152"/>
+            <a:off x="457200" y="2606040"/>
+            <a:ext cx="91440" cy="1115568"/>
           </a:xfrm>
           <a:prstGeom prst="rect">
             <a:avLst/>
@@ -15528,8 +15634,8 @@
         </p:nvSpPr>
         <p:spPr>
           <a:xfrm>
-            <a:off x="3474720" y="1645920"/>
-            <a:ext cx="2514600" cy="365760"/>
+            <a:off x="713232" y="2734056"/>
+            <a:ext cx="2560320" cy="868680"/>
           </a:xfrm>
           <a:prstGeom prst="rect">
             <a:avLst/>
@@ -15546,7 +15652,7 @@
               </a:spcAft>
             </a:pPr>
             <a:r>
-              <a:rPr sz="1600" b="1">
+              <a:rPr sz="1500" b="1">
                 <a:solidFill>
                   <a:srgbClr val="ED6D00"/>
                 </a:solidFill>
@@ -15554,7 +15660,25 @@
                 <a:ea typeface="Microsoft YaHei"/>
                 <a:cs typeface="Microsoft YaHei"/>
               </a:rPr>
-              <a:t>Gen2  千人千面</a:t>
+              <a:t>多设备</a:t>
+            </a:r>
+          </a:p>
+          <a:p>
+            <a:pPr algn="l">
+              <a:spcAft>
+                <a:spcPts val="200"/>
+              </a:spcAft>
+            </a:pPr>
+            <a:r>
+              <a:rPr sz="1500" b="1">
+                <a:solidFill>
+                  <a:srgbClr val="ED6D00"/>
+                </a:solidFill>
+                <a:latin typeface="Microsoft YaHei"/>
+                <a:ea typeface="Microsoft YaHei"/>
+                <a:cs typeface="Microsoft YaHei"/>
+              </a:rPr>
+              <a:t>自适应困难</a:t>
             </a:r>
           </a:p>
         </p:txBody>
@@ -15567,8 +15691,8 @@
         </p:nvSpPr>
         <p:spPr>
           <a:xfrm>
-            <a:off x="3474720" y="2148840"/>
-            <a:ext cx="2514600" cy="2651760"/>
+            <a:off x="3474720" y="2715768"/>
+            <a:ext cx="8046720" cy="914400"/>
           </a:xfrm>
           <a:prstGeom prst="rect">
             <a:avLst/>
@@ -15593,7 +15717,7 @@
                 <a:ea typeface="Microsoft YaHei"/>
                 <a:cs typeface="Microsoft YaHei"/>
               </a:rPr>
-              <a:t>轻量适配到每设备、每用户。</a:t>
+              <a:t>跨设备预训练先验：LIMU-BERT-X 覆盖 1.1K 机型、6 万人；Meta EMG 跨用户泛化。</a:t>
             </a:r>
           </a:p>
           <a:p>
@@ -15611,43 +15735,7 @@
                 <a:ea typeface="Microsoft YaHei"/>
                 <a:cs typeface="Microsoft YaHei"/>
               </a:rPr>
-              <a:t>LoRA / 提示微调：TartanIMU 仅 1.1M 参数；</a:t>
-            </a:r>
-          </a:p>
-          <a:p>
-            <a:pPr algn="l">
-              <a:spcAft>
-                <a:spcPts val="200"/>
-              </a:spcAft>
-            </a:pPr>
-            <a:r>
-              <a:rPr sz="1200" b="0">
-                <a:solidFill>
-                  <a:srgbClr val="555757"/>
-                </a:solidFill>
-                <a:latin typeface="Microsoft YaHei"/>
-                <a:ea typeface="Microsoft YaHei"/>
-                <a:cs typeface="Microsoft YaHei"/>
-              </a:rPr>
-              <a:t>Meta EMG 个性化后再 +16%。</a:t>
-            </a:r>
-          </a:p>
-          <a:p>
-            <a:pPr algn="l">
-              <a:spcAft>
-                <a:spcPts val="200"/>
-              </a:spcAft>
-            </a:pPr>
-            <a:r>
-              <a:rPr sz="1200" b="0">
-                <a:solidFill>
-                  <a:srgbClr val="555757"/>
-                </a:solidFill>
-                <a:latin typeface="Microsoft YaHei"/>
-                <a:ea typeface="Microsoft YaHei"/>
-                <a:cs typeface="Microsoft YaHei"/>
-              </a:rPr>
-              <a:t>回答：换设备换人还行不行 → 画像进数据规格。</a:t>
+              <a:t>RevIN 实例归一 + LoRA 轻适配（TartanIMU 仅 1.1M 参数即适配新设备）。</a:t>
             </a:r>
           </a:p>
         </p:txBody>
@@ -15660,8 +15748,8 @@
         </p:nvSpPr>
         <p:spPr>
           <a:xfrm>
-            <a:off x="6263640" y="1417320"/>
-            <a:ext cx="2788920" cy="3566160"/>
+            <a:off x="457200" y="3840480"/>
+            <a:ext cx="11247120" cy="1115568"/>
           </a:xfrm>
           <a:prstGeom prst="roundRect">
             <a:avLst>
@@ -15707,8 +15795,8 @@
         </p:nvSpPr>
         <p:spPr>
           <a:xfrm>
-            <a:off x="6263640" y="1417320"/>
-            <a:ext cx="2788920" cy="73152"/>
+            <a:off x="457200" y="3840480"/>
+            <a:ext cx="91440" cy="1115568"/>
           </a:xfrm>
           <a:prstGeom prst="rect">
             <a:avLst/>
@@ -15750,8 +15838,8 @@
         </p:nvSpPr>
         <p:spPr>
           <a:xfrm>
-            <a:off x="6400800" y="1645920"/>
-            <a:ext cx="2514600" cy="365760"/>
+            <a:off x="713232" y="3968496"/>
+            <a:ext cx="2560320" cy="868680"/>
           </a:xfrm>
           <a:prstGeom prst="rect">
             <a:avLst/>
@@ -15768,7 +15856,7 @@
               </a:spcAft>
             </a:pPr>
             <a:r>
-              <a:rPr sz="1600" b="1">
+              <a:rPr sz="1500" b="1">
                 <a:solidFill>
                   <a:srgbClr val="30B5C5"/>
                 </a:solidFill>
@@ -15776,7 +15864,25 @@
                 <a:ea typeface="Microsoft YaHei"/>
                 <a:cs typeface="Microsoft YaHei"/>
               </a:rPr>
-              <a:t>Gen3  Token 嵌入大模型</a:t>
+              <a:t>多任务多场景</a:t>
+            </a:r>
+          </a:p>
+          <a:p>
+            <a:pPr algn="l">
+              <a:spcAft>
+                <a:spcPts val="200"/>
+              </a:spcAft>
+            </a:pPr>
+            <a:r>
+              <a:rPr sz="1500" b="1">
+                <a:solidFill>
+                  <a:srgbClr val="30B5C5"/>
+                </a:solidFill>
+                <a:latin typeface="Microsoft YaHei"/>
+                <a:ea typeface="Microsoft YaHei"/>
+                <a:cs typeface="Microsoft YaHei"/>
+              </a:rPr>
+              <a:t>泛化弱</a:t>
             </a:r>
           </a:p>
         </p:txBody>
@@ -15789,8 +15895,8 @@
         </p:nvSpPr>
         <p:spPr>
           <a:xfrm>
-            <a:off x="6400800" y="2148840"/>
-            <a:ext cx="2514600" cy="2651760"/>
+            <a:off x="3474720" y="3950208"/>
+            <a:ext cx="8046720" cy="914400"/>
           </a:xfrm>
           <a:prstGeom prst="rect">
             <a:avLst/>
@@ -15815,7 +15921,7 @@
                 <a:ea typeface="Microsoft YaHei"/>
                 <a:cs typeface="Microsoft YaHei"/>
               </a:rPr>
-              <a:t>物理 patch token 作为新模态注入大模型。</a:t>
+              <a:t>零样本基座：TimesFM-3 零样本预测；UniTS 零样本多任务（预测/分类/填补/异常）。</a:t>
             </a:r>
           </a:p>
           <a:p>
@@ -15833,43 +15939,7 @@
                 <a:ea typeface="Microsoft YaHei"/>
                 <a:cs typeface="Microsoft YaHei"/>
               </a:rPr>
-              <a:t>预测 + 分类变成大模型的原生能力；</a:t>
-            </a:r>
-          </a:p>
-          <a:p>
-            <a:pPr algn="l">
-              <a:spcAft>
-                <a:spcPts val="200"/>
-              </a:spcAft>
-            </a:pPr>
-            <a:r>
-              <a:rPr sz="1200" b="0">
-                <a:solidFill>
-                  <a:srgbClr val="555757"/>
-                </a:solidFill>
-                <a:latin typeface="Microsoft YaHei"/>
-                <a:ea typeface="Microsoft YaHei"/>
-                <a:cs typeface="Microsoft YaHei"/>
-              </a:rPr>
-              <a:t>平台从「提供模型」变成「提供 token 与接口」。</a:t>
-            </a:r>
-          </a:p>
-          <a:p>
-            <a:pPr algn="l">
-              <a:spcAft>
-                <a:spcPts val="200"/>
-              </a:spcAft>
-            </a:pPr>
-            <a:r>
-              <a:rPr sz="1200" b="0">
-                <a:solidFill>
-                  <a:srgbClr val="555757"/>
-                </a:solidFill>
-                <a:latin typeface="Microsoft YaHei"/>
-                <a:ea typeface="Microsoft YaHei"/>
-                <a:cs typeface="Microsoft YaHei"/>
-              </a:rPr>
-              <a:t>回答：物理感知如何进入统一智能。</a:t>
+              <a:t>统一预测 / 分类接口，新场景先零样本启动，再按需微调。</a:t>
             </a:r>
           </a:p>
         </p:txBody>
@@ -15882,8 +15952,8 @@
         </p:nvSpPr>
         <p:spPr>
           <a:xfrm>
-            <a:off x="457200" y="5120640"/>
-            <a:ext cx="11247120" cy="822960"/>
+            <a:off x="457200" y="5166360"/>
+            <a:ext cx="11247120" cy="777240"/>
           </a:xfrm>
           <a:prstGeom prst="roundRect">
             <a:avLst>
@@ -15929,8 +15999,8 @@
         </p:nvSpPr>
         <p:spPr>
           <a:xfrm>
-            <a:off x="640080" y="5257800"/>
-            <a:ext cx="10881360" cy="548640"/>
+            <a:off x="640080" y="5285232"/>
+            <a:ext cx="10881360" cy="566928"/>
           </a:xfrm>
           <a:prstGeom prst="rect">
             <a:avLst/>
@@ -15947,7 +16017,7 @@
               </a:spcAft>
             </a:pPr>
             <a:r>
-              <a:rPr sz="1400" b="1">
+              <a:rPr sz="1300" b="1">
                 <a:solidFill>
                   <a:srgbClr val="C7000B"/>
                 </a:solidFill>
@@ -15955,7 +16025,7 @@
                 <a:ea typeface="Microsoft YaHei"/>
                 <a:cs typeface="Microsoft YaHei"/>
               </a:rPr>
-              <a:t>演进原则：接口（接入 / 预测 / 分类）向下兼容；底座、权重、头可独立替换。</a:t>
+              <a:t>平台边界：交付接入校验、共享特征、预测 / 分类双接口、评测工具链；不交付场景 Pack、整机、芯片。</a:t>
             </a:r>
           </a:p>
         </p:txBody>
@@ -16037,7 +16107,7 @@
                 <a:ea typeface="Microsoft YaHei"/>
                 <a:cs typeface="Microsoft YaHei"/>
               </a:rPr>
-              <a:t>华为  ·  AI 物理感知平台  ·  代际演进    |    Security Level: Internal</a:t>
+              <a:t>华为  ·  AI 物理感知平台  ·  痛点→方案    |    Security Level: Internal</a:t>
             </a:r>
           </a:p>
         </p:txBody>
@@ -16076,7 +16146,2037 @@
                 <a:ea typeface="Microsoft YaHei"/>
                 <a:cs typeface="Microsoft YaHei"/>
               </a:rPr>
-              <a:t>7  /  7</a:t>
+              <a:t>7  /  9</a:t>
+            </a:r>
+          </a:p>
+        </p:txBody>
+      </p:sp>
+    </p:spTree>
+  </p:cSld>
+  <p:clrMapOvr>
+    <a:masterClrMapping/>
+  </p:clrMapOvr>
+</p:sld>
+</file>
+
+<file path=ppt/slides/slide8.xml><?xml version="1.0" encoding="utf-8"?>
+<p:sld xmlns:a="http://schemas.openxmlformats.org/drawingml/2006/main" xmlns:p="http://schemas.openxmlformats.org/presentationml/2006/main" xmlns:r="http://schemas.openxmlformats.org/officeDocument/2006/relationships">
+  <p:cSld>
+    <p:spTree>
+      <p:nvGrpSpPr>
+        <p:cNvPr id="1" name=""/>
+        <p:cNvGrpSpPr/>
+        <p:nvPr/>
+      </p:nvGrpSpPr>
+      <p:grpSpPr/>
+      <p:sp>
+        <p:nvSpPr>
+          <p:cNvPr id="2" name="Rectangle 1"/>
+          <p:cNvSpPr/>
+          <p:nvPr/>
+        </p:nvSpPr>
+        <p:spPr>
+          <a:xfrm>
+            <a:off x="0" y="0"/>
+            <a:ext cx="12196763" cy="6858000"/>
+          </a:xfrm>
+          <a:prstGeom prst="rect">
+            <a:avLst/>
+          </a:prstGeom>
+          <a:solidFill>
+            <a:srgbClr val="FFFFFF"/>
+          </a:solidFill>
+          <a:ln>
+            <a:noFill/>
+          </a:ln>
+        </p:spPr>
+        <p:style>
+          <a:lnRef idx="1">
+            <a:schemeClr val="accent1"/>
+          </a:lnRef>
+          <a:fillRef idx="3">
+            <a:schemeClr val="accent1"/>
+          </a:fillRef>
+          <a:effectRef idx="2">
+            <a:schemeClr val="accent1"/>
+          </a:effectRef>
+          <a:fontRef idx="minor">
+            <a:schemeClr val="lt1"/>
+          </a:fontRef>
+        </p:style>
+        <p:txBody>
+          <a:bodyPr rtlCol="0" anchor="ctr"/>
+          <a:lstStyle/>
+          <a:p>
+            <a:pPr algn="ctr"/>
+          </a:p>
+        </p:txBody>
+      </p:sp>
+      <p:sp>
+        <p:nvSpPr>
+          <p:cNvPr id="3" name="TextBox 2"/>
+          <p:cNvSpPr txBox="1"/>
+          <p:nvPr/>
+        </p:nvSpPr>
+        <p:spPr>
+          <a:xfrm>
+            <a:off x="457200" y="201168"/>
+            <a:ext cx="11155680" cy="256032"/>
+          </a:xfrm>
+          <a:prstGeom prst="rect">
+            <a:avLst/>
+          </a:prstGeom>
+          <a:noFill/>
+        </p:spPr>
+        <p:txBody>
+          <a:bodyPr wrap="square" anchor="t"/>
+          <a:lstStyle/>
+          <a:p>
+            <a:pPr algn="l">
+              <a:spcAft>
+                <a:spcPts val="200"/>
+              </a:spcAft>
+            </a:pPr>
+            <a:r>
+              <a:rPr sz="1100" b="1">
+                <a:solidFill>
+                  <a:srgbClr val="C7000B"/>
+                </a:solidFill>
+                <a:latin typeface="Microsoft YaHei"/>
+                <a:ea typeface="Microsoft YaHei"/>
+                <a:cs typeface="Microsoft YaHei"/>
+              </a:rPr>
+              <a:t>7  接口定义</a:t>
+            </a:r>
+          </a:p>
+        </p:txBody>
+      </p:sp>
+      <p:sp>
+        <p:nvSpPr>
+          <p:cNvPr id="4" name="TextBox 3"/>
+          <p:cNvSpPr txBox="1"/>
+          <p:nvPr/>
+        </p:nvSpPr>
+        <p:spPr>
+          <a:xfrm>
+            <a:off x="457200" y="438912"/>
+            <a:ext cx="11155680" cy="438912"/>
+          </a:xfrm>
+          <a:prstGeom prst="rect">
+            <a:avLst/>
+          </a:prstGeom>
+          <a:noFill/>
+        </p:spPr>
+        <p:txBody>
+          <a:bodyPr wrap="square" anchor="t"/>
+          <a:lstStyle/>
+          <a:p>
+            <a:pPr algn="l">
+              <a:spcAft>
+                <a:spcPts val="200"/>
+              </a:spcAft>
+            </a:pPr>
+            <a:r>
+              <a:rPr sz="2400" b="1">
+                <a:solidFill>
+                  <a:srgbClr val="1A1A1A"/>
+                </a:solidFill>
+                <a:latin typeface="Microsoft YaHei"/>
+                <a:ea typeface="Microsoft YaHei"/>
+                <a:cs typeface="Microsoft YaHei"/>
+              </a:rPr>
+              <a:t>接入规格 + 预测接口 + 分类接口</a:t>
+            </a:r>
+          </a:p>
+        </p:txBody>
+      </p:sp>
+      <p:sp>
+        <p:nvSpPr>
+          <p:cNvPr id="5" name="Rectangle 4"/>
+          <p:cNvSpPr/>
+          <p:nvPr/>
+        </p:nvSpPr>
+        <p:spPr>
+          <a:xfrm>
+            <a:off x="457200" y="914400"/>
+            <a:ext cx="1097280" cy="45720"/>
+          </a:xfrm>
+          <a:prstGeom prst="rect">
+            <a:avLst/>
+          </a:prstGeom>
+          <a:solidFill>
+            <a:srgbClr val="C7000B"/>
+          </a:solidFill>
+          <a:ln>
+            <a:noFill/>
+          </a:ln>
+        </p:spPr>
+        <p:style>
+          <a:lnRef idx="1">
+            <a:schemeClr val="accent1"/>
+          </a:lnRef>
+          <a:fillRef idx="3">
+            <a:schemeClr val="accent1"/>
+          </a:fillRef>
+          <a:effectRef idx="2">
+            <a:schemeClr val="accent1"/>
+          </a:effectRef>
+          <a:fontRef idx="minor">
+            <a:schemeClr val="lt1"/>
+          </a:fontRef>
+        </p:style>
+        <p:txBody>
+          <a:bodyPr rtlCol="0" anchor="ctr"/>
+          <a:lstStyle/>
+          <a:p>
+            <a:pPr algn="ctr"/>
+          </a:p>
+        </p:txBody>
+      </p:sp>
+      <p:sp>
+        <p:nvSpPr>
+          <p:cNvPr id="6" name="TextBox 5"/>
+          <p:cNvSpPr txBox="1"/>
+          <p:nvPr/>
+        </p:nvSpPr>
+        <p:spPr>
+          <a:xfrm>
+            <a:off x="457200" y="1024128"/>
+            <a:ext cx="11155680" cy="292608"/>
+          </a:xfrm>
+          <a:prstGeom prst="rect">
+            <a:avLst/>
+          </a:prstGeom>
+          <a:noFill/>
+        </p:spPr>
+        <p:txBody>
+          <a:bodyPr wrap="square" anchor="t"/>
+          <a:lstStyle/>
+          <a:p>
+            <a:pPr algn="l">
+              <a:spcAft>
+                <a:spcPts val="200"/>
+              </a:spcAft>
+            </a:pPr>
+            <a:r>
+              <a:rPr sz="1200" b="0">
+                <a:solidFill>
+                  <a:srgbClr val="898989"/>
+                </a:solidFill>
+                <a:latin typeface="Microsoft YaHei"/>
+                <a:ea typeface="Microsoft YaHei"/>
+                <a:cs typeface="Microsoft YaHei"/>
+              </a:rPr>
+              <a:t>所有输入先过接入校验；预测与分类共用同一批 patch token。</a:t>
+            </a:r>
+          </a:p>
+        </p:txBody>
+      </p:sp>
+      <p:sp>
+        <p:nvSpPr>
+          <p:cNvPr id="7" name="Rounded Rectangle 6"/>
+          <p:cNvSpPr/>
+          <p:nvPr/>
+        </p:nvSpPr>
+        <p:spPr>
+          <a:xfrm>
+            <a:off x="457200" y="1371600"/>
+            <a:ext cx="11247120" cy="1828800"/>
+          </a:xfrm>
+          <a:prstGeom prst="roundRect">
+            <a:avLst>
+              <a:gd name="adj" fmla="val 5000"/>
+            </a:avLst>
+          </a:prstGeom>
+          <a:solidFill>
+            <a:srgbClr val="FFFFFF"/>
+          </a:solidFill>
+          <a:ln w="9525">
+            <a:solidFill>
+              <a:srgbClr val="DDDDDD"/>
+            </a:solidFill>
+          </a:ln>
+        </p:spPr>
+        <p:style>
+          <a:lnRef idx="1">
+            <a:schemeClr val="accent1"/>
+          </a:lnRef>
+          <a:fillRef idx="3">
+            <a:schemeClr val="accent1"/>
+          </a:fillRef>
+          <a:effectRef idx="2">
+            <a:schemeClr val="accent1"/>
+          </a:effectRef>
+          <a:fontRef idx="minor">
+            <a:schemeClr val="lt1"/>
+          </a:fontRef>
+        </p:style>
+        <p:txBody>
+          <a:bodyPr rtlCol="0" anchor="ctr"/>
+          <a:lstStyle/>
+          <a:p>
+            <a:pPr algn="ctr"/>
+          </a:p>
+        </p:txBody>
+      </p:sp>
+      <p:sp>
+        <p:nvSpPr>
+          <p:cNvPr id="8" name="Rectangle 7"/>
+          <p:cNvSpPr/>
+          <p:nvPr/>
+        </p:nvSpPr>
+        <p:spPr>
+          <a:xfrm>
+            <a:off x="457200" y="1371600"/>
+            <a:ext cx="11247120" cy="73152"/>
+          </a:xfrm>
+          <a:prstGeom prst="rect">
+            <a:avLst/>
+          </a:prstGeom>
+          <a:solidFill>
+            <a:srgbClr val="C7000B"/>
+          </a:solidFill>
+          <a:ln>
+            <a:noFill/>
+          </a:ln>
+        </p:spPr>
+        <p:style>
+          <a:lnRef idx="1">
+            <a:schemeClr val="accent1"/>
+          </a:lnRef>
+          <a:fillRef idx="3">
+            <a:schemeClr val="accent1"/>
+          </a:fillRef>
+          <a:effectRef idx="2">
+            <a:schemeClr val="accent1"/>
+          </a:effectRef>
+          <a:fontRef idx="minor">
+            <a:schemeClr val="lt1"/>
+          </a:fontRef>
+        </p:style>
+        <p:txBody>
+          <a:bodyPr rtlCol="0" anchor="ctr"/>
+          <a:lstStyle/>
+          <a:p>
+            <a:pPr algn="ctr"/>
+          </a:p>
+        </p:txBody>
+      </p:sp>
+      <p:sp>
+        <p:nvSpPr>
+          <p:cNvPr id="9" name="TextBox 8"/>
+          <p:cNvSpPr txBox="1"/>
+          <p:nvPr/>
+        </p:nvSpPr>
+        <p:spPr>
+          <a:xfrm>
+            <a:off x="640080" y="1600200"/>
+            <a:ext cx="10881360" cy="320040"/>
+          </a:xfrm>
+          <a:prstGeom prst="rect">
+            <a:avLst/>
+          </a:prstGeom>
+          <a:noFill/>
+        </p:spPr>
+        <p:txBody>
+          <a:bodyPr wrap="square" anchor="t"/>
+          <a:lstStyle/>
+          <a:p>
+            <a:pPr algn="l">
+              <a:spcAft>
+                <a:spcPts val="200"/>
+              </a:spcAft>
+            </a:pPr>
+            <a:r>
+              <a:rPr sz="1600" b="1">
+                <a:solidFill>
+                  <a:srgbClr val="C7000B"/>
+                </a:solidFill>
+                <a:latin typeface="Microsoft YaHei"/>
+                <a:ea typeface="Microsoft YaHei"/>
+                <a:cs typeface="Microsoft YaHei"/>
+              </a:rPr>
+              <a:t>接入（数据规格） → 校验 → patch token</a:t>
+            </a:r>
+          </a:p>
+        </p:txBody>
+      </p:sp>
+      <p:sp>
+        <p:nvSpPr>
+          <p:cNvPr id="10" name="TextBox 9"/>
+          <p:cNvSpPr txBox="1"/>
+          <p:nvPr/>
+        </p:nvSpPr>
+        <p:spPr>
+          <a:xfrm>
+            <a:off x="640080" y="2011680"/>
+            <a:ext cx="10881360" cy="1005840"/>
+          </a:xfrm>
+          <a:prstGeom prst="rect">
+            <a:avLst/>
+          </a:prstGeom>
+          <a:noFill/>
+        </p:spPr>
+        <p:txBody>
+          <a:bodyPr wrap="square" anchor="t"/>
+          <a:lstStyle/>
+          <a:p>
+            <a:pPr algn="l">
+              <a:spcAft>
+                <a:spcPts val="200"/>
+              </a:spcAft>
+            </a:pPr>
+            <a:r>
+              <a:rPr sz="1300" b="0">
+                <a:solidFill>
+                  <a:srgbClr val="555757"/>
+                </a:solidFill>
+                <a:latin typeface="Microsoft YaHei"/>
+                <a:ea typeface="Microsoft YaHei"/>
+                <a:cs typeface="Microsoft YaHei"/>
+              </a:rPr>
+              <a:t>数据规格 = {序列 id, 时间戳, 数值, 量纲单位, 质量位, 变元角色: 目标 / 仅历史 / 历史+未来}</a:t>
+            </a:r>
+          </a:p>
+          <a:p>
+            <a:pPr algn="l">
+              <a:spcAft>
+                <a:spcPts val="200"/>
+              </a:spcAft>
+            </a:pPr>
+            <a:r>
+              <a:rPr sz="1300" b="0">
+                <a:solidFill>
+                  <a:srgbClr val="555757"/>
+                </a:solidFill>
+                <a:latin typeface="Microsoft YaHei"/>
+                <a:ea typeface="Microsoft YaHei"/>
+                <a:cs typeface="Microsoft YaHei"/>
+              </a:rPr>
+              <a:t>校验：时钟对齐、量纲归一、质量位过滤、变元上限 32、历史段 ≤ 15,360。不合格直接拒收。</a:t>
+            </a:r>
+          </a:p>
+        </p:txBody>
+      </p:sp>
+      <p:sp>
+        <p:nvSpPr>
+          <p:cNvPr id="11" name="Rounded Rectangle 10"/>
+          <p:cNvSpPr/>
+          <p:nvPr/>
+        </p:nvSpPr>
+        <p:spPr>
+          <a:xfrm>
+            <a:off x="457200" y="3383280"/>
+            <a:ext cx="5577840" cy="2194560"/>
+          </a:xfrm>
+          <a:prstGeom prst="roundRect">
+            <a:avLst>
+              <a:gd name="adj" fmla="val 5000"/>
+            </a:avLst>
+          </a:prstGeom>
+          <a:solidFill>
+            <a:srgbClr val="FFFFFF"/>
+          </a:solidFill>
+          <a:ln w="9525">
+            <a:solidFill>
+              <a:srgbClr val="DDDDDD"/>
+            </a:solidFill>
+          </a:ln>
+        </p:spPr>
+        <p:style>
+          <a:lnRef idx="1">
+            <a:schemeClr val="accent1"/>
+          </a:lnRef>
+          <a:fillRef idx="3">
+            <a:schemeClr val="accent1"/>
+          </a:fillRef>
+          <a:effectRef idx="2">
+            <a:schemeClr val="accent1"/>
+          </a:effectRef>
+          <a:fontRef idx="minor">
+            <a:schemeClr val="lt1"/>
+          </a:fontRef>
+        </p:style>
+        <p:txBody>
+          <a:bodyPr rtlCol="0" anchor="ctr"/>
+          <a:lstStyle/>
+          <a:p>
+            <a:pPr algn="ctr"/>
+          </a:p>
+        </p:txBody>
+      </p:sp>
+      <p:sp>
+        <p:nvSpPr>
+          <p:cNvPr id="12" name="Rectangle 11"/>
+          <p:cNvSpPr/>
+          <p:nvPr/>
+        </p:nvSpPr>
+        <p:spPr>
+          <a:xfrm>
+            <a:off x="457200" y="3383280"/>
+            <a:ext cx="5577840" cy="73152"/>
+          </a:xfrm>
+          <a:prstGeom prst="rect">
+            <a:avLst/>
+          </a:prstGeom>
+          <a:solidFill>
+            <a:srgbClr val="62B230"/>
+          </a:solidFill>
+          <a:ln>
+            <a:noFill/>
+          </a:ln>
+        </p:spPr>
+        <p:style>
+          <a:lnRef idx="1">
+            <a:schemeClr val="accent1"/>
+          </a:lnRef>
+          <a:fillRef idx="3">
+            <a:schemeClr val="accent1"/>
+          </a:fillRef>
+          <a:effectRef idx="2">
+            <a:schemeClr val="accent1"/>
+          </a:effectRef>
+          <a:fontRef idx="minor">
+            <a:schemeClr val="lt1"/>
+          </a:fontRef>
+        </p:style>
+        <p:txBody>
+          <a:bodyPr rtlCol="0" anchor="ctr"/>
+          <a:lstStyle/>
+          <a:p>
+            <a:pPr algn="ctr"/>
+          </a:p>
+        </p:txBody>
+      </p:sp>
+      <p:sp>
+        <p:nvSpPr>
+          <p:cNvPr id="13" name="TextBox 12"/>
+          <p:cNvSpPr txBox="1"/>
+          <p:nvPr/>
+        </p:nvSpPr>
+        <p:spPr>
+          <a:xfrm>
+            <a:off x="640080" y="3611880"/>
+            <a:ext cx="5212080" cy="320040"/>
+          </a:xfrm>
+          <a:prstGeom prst="rect">
+            <a:avLst/>
+          </a:prstGeom>
+          <a:noFill/>
+        </p:spPr>
+        <p:txBody>
+          <a:bodyPr wrap="square" anchor="t"/>
+          <a:lstStyle/>
+          <a:p>
+            <a:pPr algn="l">
+              <a:spcAft>
+                <a:spcPts val="200"/>
+              </a:spcAft>
+            </a:pPr>
+            <a:r>
+              <a:rPr sz="1600" b="1">
+                <a:solidFill>
+                  <a:srgbClr val="62B230"/>
+                </a:solidFill>
+                <a:latin typeface="Microsoft YaHei"/>
+                <a:ea typeface="Microsoft YaHei"/>
+                <a:cs typeface="Microsoft YaHei"/>
+              </a:rPr>
+              <a:t>预测（历史段, 预测时长） → {分位数, 点预测}</a:t>
+            </a:r>
+          </a:p>
+        </p:txBody>
+      </p:sp>
+      <p:sp>
+        <p:nvSpPr>
+          <p:cNvPr id="14" name="TextBox 13"/>
+          <p:cNvSpPr txBox="1"/>
+          <p:nvPr/>
+        </p:nvSpPr>
+        <p:spPr>
+          <a:xfrm>
+            <a:off x="640080" y="4069080"/>
+            <a:ext cx="5212080" cy="1280160"/>
+          </a:xfrm>
+          <a:prstGeom prst="rect">
+            <a:avLst/>
+          </a:prstGeom>
+          <a:noFill/>
+        </p:spPr>
+        <p:txBody>
+          <a:bodyPr wrap="square" anchor="t"/>
+          <a:lstStyle/>
+          <a:p>
+            <a:pPr algn="l">
+              <a:spcAft>
+                <a:spcPts val="200"/>
+              </a:spcAft>
+            </a:pPr>
+            <a:r>
+              <a:rPr sz="1300" b="0">
+                <a:solidFill>
+                  <a:srgbClr val="555757"/>
+                </a:solidFill>
+                <a:latin typeface="Microsoft YaHei"/>
+                <a:ea typeface="Microsoft YaHei"/>
+                <a:cs typeface="Microsoft YaHei"/>
+              </a:rPr>
+              <a:t>分位数：(V, H, 9) 十分位轨迹</a:t>
+            </a:r>
+          </a:p>
+          <a:p>
+            <a:pPr algn="l">
+              <a:spcAft>
+                <a:spcPts val="200"/>
+              </a:spcAft>
+            </a:pPr>
+            <a:r>
+              <a:rPr sz="1300" b="0">
+                <a:solidFill>
+                  <a:srgbClr val="555757"/>
+                </a:solidFill>
+                <a:latin typeface="Microsoft YaHei"/>
+                <a:ea typeface="Microsoft YaHei"/>
+                <a:cs typeface="Microsoft YaHei"/>
+              </a:rPr>
+              <a:t>点预测：(V, H) 中位数 q50</a:t>
+            </a:r>
+          </a:p>
+          <a:p>
+            <a:pPr algn="l">
+              <a:spcAft>
+                <a:spcPts val="200"/>
+              </a:spcAft>
+            </a:pPr>
+            <a:r>
+              <a:rPr sz="1300" b="0">
+                <a:solidFill>
+                  <a:srgbClr val="555757"/>
+                </a:solidFill>
+                <a:latin typeface="Microsoft YaHei"/>
+                <a:ea typeface="Microsoft YaHei"/>
+                <a:cs typeface="Microsoft YaHei"/>
+              </a:rPr>
+              <a:t>一次前向，CPM 非自回归；可拼接任意预测长度。</a:t>
+            </a:r>
+          </a:p>
+        </p:txBody>
+      </p:sp>
+      <p:sp>
+        <p:nvSpPr>
+          <p:cNvPr id="15" name="Rounded Rectangle 14"/>
+          <p:cNvSpPr/>
+          <p:nvPr/>
+        </p:nvSpPr>
+        <p:spPr>
+          <a:xfrm>
+            <a:off x="6217920" y="3383280"/>
+            <a:ext cx="5486400" cy="2194560"/>
+          </a:xfrm>
+          <a:prstGeom prst="roundRect">
+            <a:avLst>
+              <a:gd name="adj" fmla="val 5000"/>
+            </a:avLst>
+          </a:prstGeom>
+          <a:solidFill>
+            <a:srgbClr val="FFFFFF"/>
+          </a:solidFill>
+          <a:ln w="9525">
+            <a:solidFill>
+              <a:srgbClr val="DDDDDD"/>
+            </a:solidFill>
+          </a:ln>
+        </p:spPr>
+        <p:style>
+          <a:lnRef idx="1">
+            <a:schemeClr val="accent1"/>
+          </a:lnRef>
+          <a:fillRef idx="3">
+            <a:schemeClr val="accent1"/>
+          </a:fillRef>
+          <a:effectRef idx="2">
+            <a:schemeClr val="accent1"/>
+          </a:effectRef>
+          <a:fontRef idx="minor">
+            <a:schemeClr val="lt1"/>
+          </a:fontRef>
+        </p:style>
+        <p:txBody>
+          <a:bodyPr rtlCol="0" anchor="ctr"/>
+          <a:lstStyle/>
+          <a:p>
+            <a:pPr algn="ctr"/>
+          </a:p>
+        </p:txBody>
+      </p:sp>
+      <p:sp>
+        <p:nvSpPr>
+          <p:cNvPr id="16" name="Rectangle 15"/>
+          <p:cNvSpPr/>
+          <p:nvPr/>
+        </p:nvSpPr>
+        <p:spPr>
+          <a:xfrm>
+            <a:off x="6217920" y="3383280"/>
+            <a:ext cx="5486400" cy="73152"/>
+          </a:xfrm>
+          <a:prstGeom prst="rect">
+            <a:avLst/>
+          </a:prstGeom>
+          <a:solidFill>
+            <a:srgbClr val="30B5C5"/>
+          </a:solidFill>
+          <a:ln>
+            <a:noFill/>
+          </a:ln>
+        </p:spPr>
+        <p:style>
+          <a:lnRef idx="1">
+            <a:schemeClr val="accent1"/>
+          </a:lnRef>
+          <a:fillRef idx="3">
+            <a:schemeClr val="accent1"/>
+          </a:fillRef>
+          <a:effectRef idx="2">
+            <a:schemeClr val="accent1"/>
+          </a:effectRef>
+          <a:fontRef idx="minor">
+            <a:schemeClr val="lt1"/>
+          </a:fontRef>
+        </p:style>
+        <p:txBody>
+          <a:bodyPr rtlCol="0" anchor="ctr"/>
+          <a:lstStyle/>
+          <a:p>
+            <a:pPr algn="ctr"/>
+          </a:p>
+        </p:txBody>
+      </p:sp>
+      <p:sp>
+        <p:nvSpPr>
+          <p:cNvPr id="17" name="TextBox 16"/>
+          <p:cNvSpPr txBox="1"/>
+          <p:nvPr/>
+        </p:nvSpPr>
+        <p:spPr>
+          <a:xfrm>
+            <a:off x="6400800" y="3611880"/>
+            <a:ext cx="5120640" cy="320040"/>
+          </a:xfrm>
+          <a:prstGeom prst="rect">
+            <a:avLst/>
+          </a:prstGeom>
+          <a:noFill/>
+        </p:spPr>
+        <p:txBody>
+          <a:bodyPr wrap="square" anchor="t"/>
+          <a:lstStyle/>
+          <a:p>
+            <a:pPr algn="l">
+              <a:spcAft>
+                <a:spcPts val="200"/>
+              </a:spcAft>
+            </a:pPr>
+            <a:r>
+              <a:rPr sz="1600" b="1">
+                <a:solidFill>
+                  <a:srgbClr val="30B5C5"/>
+                </a:solidFill>
+                <a:latin typeface="Microsoft YaHei"/>
+                <a:ea typeface="Microsoft YaHei"/>
+                <a:cs typeface="Microsoft YaHei"/>
+              </a:rPr>
+              <a:t>分类（时间窗） → {类别, 置信度}</a:t>
+            </a:r>
+          </a:p>
+        </p:txBody>
+      </p:sp>
+      <p:sp>
+        <p:nvSpPr>
+          <p:cNvPr id="18" name="TextBox 17"/>
+          <p:cNvSpPr txBox="1"/>
+          <p:nvPr/>
+        </p:nvSpPr>
+        <p:spPr>
+          <a:xfrm>
+            <a:off x="6400800" y="4069080"/>
+            <a:ext cx="5120640" cy="1280160"/>
+          </a:xfrm>
+          <a:prstGeom prst="rect">
+            <a:avLst/>
+          </a:prstGeom>
+          <a:noFill/>
+        </p:spPr>
+        <p:txBody>
+          <a:bodyPr wrap="square" anchor="t"/>
+          <a:lstStyle/>
+          <a:p>
+            <a:pPr algn="l">
+              <a:spcAft>
+                <a:spcPts val="200"/>
+              </a:spcAft>
+            </a:pPr>
+            <a:r>
+              <a:rPr sz="1300" b="0">
+                <a:solidFill>
+                  <a:srgbClr val="555757"/>
+                </a:solidFill>
+                <a:latin typeface="Microsoft YaHei"/>
+                <a:ea typeface="Microsoft YaHei"/>
+                <a:cs typeface="Microsoft YaHei"/>
+              </a:rPr>
+              <a:t>类别：场景方注册的类别 id</a:t>
+            </a:r>
+          </a:p>
+          <a:p>
+            <a:pPr algn="l">
+              <a:spcAft>
+                <a:spcPts val="200"/>
+              </a:spcAft>
+            </a:pPr>
+            <a:r>
+              <a:rPr sz="1300" b="0">
+                <a:solidFill>
+                  <a:srgbClr val="555757"/>
+                </a:solidFill>
+                <a:latin typeface="Microsoft YaHei"/>
+                <a:ea typeface="Microsoft YaHei"/>
+                <a:cs typeface="Microsoft YaHei"/>
+              </a:rPr>
+              <a:t>置信度：softmax 概率</a:t>
+            </a:r>
+          </a:p>
+          <a:p>
+            <a:pPr algn="l">
+              <a:spcAft>
+                <a:spcPts val="200"/>
+              </a:spcAft>
+            </a:pPr>
+            <a:r>
+              <a:rPr sz="1300" b="0">
+                <a:solidFill>
+                  <a:srgbClr val="555757"/>
+                </a:solidFill>
+                <a:latin typeface="Microsoft YaHei"/>
+                <a:ea typeface="Microsoft YaHei"/>
+                <a:cs typeface="Microsoft YaHei"/>
+              </a:rPr>
+              <a:t>基于共享特征 + 任务 token / 线性探针。</a:t>
+            </a:r>
+          </a:p>
+        </p:txBody>
+      </p:sp>
+      <p:sp>
+        <p:nvSpPr>
+          <p:cNvPr id="19" name="Rectangle 18"/>
+          <p:cNvSpPr/>
+          <p:nvPr/>
+        </p:nvSpPr>
+        <p:spPr>
+          <a:xfrm>
+            <a:off x="0" y="6537960"/>
+            <a:ext cx="12191695" cy="320040"/>
+          </a:xfrm>
+          <a:prstGeom prst="rect">
+            <a:avLst/>
+          </a:prstGeom>
+          <a:solidFill>
+            <a:srgbClr val="F2F2F2"/>
+          </a:solidFill>
+          <a:ln>
+            <a:noFill/>
+          </a:ln>
+        </p:spPr>
+        <p:style>
+          <a:lnRef idx="1">
+            <a:schemeClr val="accent1"/>
+          </a:lnRef>
+          <a:fillRef idx="3">
+            <a:schemeClr val="accent1"/>
+          </a:fillRef>
+          <a:effectRef idx="2">
+            <a:schemeClr val="accent1"/>
+          </a:effectRef>
+          <a:fontRef idx="minor">
+            <a:schemeClr val="lt1"/>
+          </a:fontRef>
+        </p:style>
+        <p:txBody>
+          <a:bodyPr rtlCol="0" anchor="ctr"/>
+          <a:lstStyle/>
+          <a:p>
+            <a:pPr algn="ctr"/>
+          </a:p>
+        </p:txBody>
+      </p:sp>
+      <p:sp>
+        <p:nvSpPr>
+          <p:cNvPr id="20" name="TextBox 19"/>
+          <p:cNvSpPr txBox="1"/>
+          <p:nvPr/>
+        </p:nvSpPr>
+        <p:spPr>
+          <a:xfrm>
+            <a:off x="457200" y="6537960"/>
+            <a:ext cx="8229600" cy="320040"/>
+          </a:xfrm>
+          <a:prstGeom prst="rect">
+            <a:avLst/>
+          </a:prstGeom>
+          <a:noFill/>
+        </p:spPr>
+        <p:txBody>
+          <a:bodyPr wrap="square" anchor="ctr"/>
+          <a:lstStyle/>
+          <a:p>
+            <a:pPr algn="l">
+              <a:spcAft>
+                <a:spcPts val="200"/>
+              </a:spcAft>
+            </a:pPr>
+            <a:r>
+              <a:rPr sz="900" b="0">
+                <a:solidFill>
+                  <a:srgbClr val="898989"/>
+                </a:solidFill>
+                <a:latin typeface="Microsoft YaHei"/>
+                <a:ea typeface="Microsoft YaHei"/>
+                <a:cs typeface="Microsoft YaHei"/>
+              </a:rPr>
+              <a:t>华为  ·  AI 物理感知平台  ·  接口    |    Security Level: Internal</a:t>
+            </a:r>
+          </a:p>
+        </p:txBody>
+      </p:sp>
+      <p:sp>
+        <p:nvSpPr>
+          <p:cNvPr id="21" name="TextBox 20"/>
+          <p:cNvSpPr txBox="1"/>
+          <p:nvPr/>
+        </p:nvSpPr>
+        <p:spPr>
+          <a:xfrm>
+            <a:off x="10241280" y="6537960"/>
+            <a:ext cx="1554480" cy="320040"/>
+          </a:xfrm>
+          <a:prstGeom prst="rect">
+            <a:avLst/>
+          </a:prstGeom>
+          <a:noFill/>
+        </p:spPr>
+        <p:txBody>
+          <a:bodyPr wrap="square" anchor="ctr"/>
+          <a:lstStyle/>
+          <a:p>
+            <a:pPr algn="r">
+              <a:spcAft>
+                <a:spcPts val="200"/>
+              </a:spcAft>
+            </a:pPr>
+            <a:r>
+              <a:rPr sz="900" b="0">
+                <a:solidFill>
+                  <a:srgbClr val="898989"/>
+                </a:solidFill>
+                <a:latin typeface="Microsoft YaHei"/>
+                <a:ea typeface="Microsoft YaHei"/>
+                <a:cs typeface="Microsoft YaHei"/>
+              </a:rPr>
+              <a:t>8  /  9</a:t>
+            </a:r>
+          </a:p>
+        </p:txBody>
+      </p:sp>
+    </p:spTree>
+  </p:cSld>
+  <p:clrMapOvr>
+    <a:masterClrMapping/>
+  </p:clrMapOvr>
+</p:sld>
+</file>
+
+<file path=ppt/slides/slide9.xml><?xml version="1.0" encoding="utf-8"?>
+<p:sld xmlns:a="http://schemas.openxmlformats.org/drawingml/2006/main" xmlns:p="http://schemas.openxmlformats.org/presentationml/2006/main" xmlns:r="http://schemas.openxmlformats.org/officeDocument/2006/relationships">
+  <p:cSld>
+    <p:spTree>
+      <p:nvGrpSpPr>
+        <p:cNvPr id="1" name=""/>
+        <p:cNvGrpSpPr/>
+        <p:nvPr/>
+      </p:nvGrpSpPr>
+      <p:grpSpPr/>
+      <p:sp>
+        <p:nvSpPr>
+          <p:cNvPr id="2" name="Rectangle 1"/>
+          <p:cNvSpPr/>
+          <p:nvPr/>
+        </p:nvSpPr>
+        <p:spPr>
+          <a:xfrm>
+            <a:off x="0" y="0"/>
+            <a:ext cx="12196763" cy="6858000"/>
+          </a:xfrm>
+          <a:prstGeom prst="rect">
+            <a:avLst/>
+          </a:prstGeom>
+          <a:solidFill>
+            <a:srgbClr val="FFFFFF"/>
+          </a:solidFill>
+          <a:ln>
+            <a:noFill/>
+          </a:ln>
+        </p:spPr>
+        <p:style>
+          <a:lnRef idx="1">
+            <a:schemeClr val="accent1"/>
+          </a:lnRef>
+          <a:fillRef idx="3">
+            <a:schemeClr val="accent1"/>
+          </a:fillRef>
+          <a:effectRef idx="2">
+            <a:schemeClr val="accent1"/>
+          </a:effectRef>
+          <a:fontRef idx="minor">
+            <a:schemeClr val="lt1"/>
+          </a:fontRef>
+        </p:style>
+        <p:txBody>
+          <a:bodyPr rtlCol="0" anchor="ctr"/>
+          <a:lstStyle/>
+          <a:p>
+            <a:pPr algn="ctr"/>
+          </a:p>
+        </p:txBody>
+      </p:sp>
+      <p:sp>
+        <p:nvSpPr>
+          <p:cNvPr id="3" name="TextBox 2"/>
+          <p:cNvSpPr txBox="1"/>
+          <p:nvPr/>
+        </p:nvSpPr>
+        <p:spPr>
+          <a:xfrm>
+            <a:off x="457200" y="201168"/>
+            <a:ext cx="11155680" cy="256032"/>
+          </a:xfrm>
+          <a:prstGeom prst="rect">
+            <a:avLst/>
+          </a:prstGeom>
+          <a:noFill/>
+        </p:spPr>
+        <p:txBody>
+          <a:bodyPr wrap="square" anchor="t"/>
+          <a:lstStyle/>
+          <a:p>
+            <a:pPr algn="l">
+              <a:spcAft>
+                <a:spcPts val="200"/>
+              </a:spcAft>
+            </a:pPr>
+            <a:r>
+              <a:rPr sz="1100" b="1">
+                <a:solidFill>
+                  <a:srgbClr val="C7000B"/>
+                </a:solidFill>
+                <a:latin typeface="Microsoft YaHei"/>
+                <a:ea typeface="Microsoft YaHei"/>
+                <a:cs typeface="Microsoft YaHei"/>
+              </a:rPr>
+              <a:t>8  代际演进</a:t>
+            </a:r>
+          </a:p>
+        </p:txBody>
+      </p:sp>
+      <p:sp>
+        <p:nvSpPr>
+          <p:cNvPr id="4" name="TextBox 3"/>
+          <p:cNvSpPr txBox="1"/>
+          <p:nvPr/>
+        </p:nvSpPr>
+        <p:spPr>
+          <a:xfrm>
+            <a:off x="457200" y="438912"/>
+            <a:ext cx="11155680" cy="438912"/>
+          </a:xfrm>
+          <a:prstGeom prst="rect">
+            <a:avLst/>
+          </a:prstGeom>
+          <a:noFill/>
+        </p:spPr>
+        <p:txBody>
+          <a:bodyPr wrap="square" anchor="t"/>
+          <a:lstStyle/>
+          <a:p>
+            <a:pPr algn="l">
+              <a:spcAft>
+                <a:spcPts val="200"/>
+              </a:spcAft>
+            </a:pPr>
+            <a:r>
+              <a:rPr sz="2400" b="1">
+                <a:solidFill>
+                  <a:srgbClr val="1A1A1A"/>
+                </a:solidFill>
+                <a:latin typeface="Microsoft YaHei"/>
+                <a:ea typeface="Microsoft YaHei"/>
+                <a:cs typeface="Microsoft YaHei"/>
+              </a:rPr>
+              <a:t>Gen1 零样本基线 → Gen2 千人千面 → Gen3 Token 嵌入大模型</a:t>
+            </a:r>
+          </a:p>
+        </p:txBody>
+      </p:sp>
+      <p:sp>
+        <p:nvSpPr>
+          <p:cNvPr id="5" name="Rectangle 4"/>
+          <p:cNvSpPr/>
+          <p:nvPr/>
+        </p:nvSpPr>
+        <p:spPr>
+          <a:xfrm>
+            <a:off x="457200" y="914400"/>
+            <a:ext cx="1097280" cy="45720"/>
+          </a:xfrm>
+          <a:prstGeom prst="rect">
+            <a:avLst/>
+          </a:prstGeom>
+          <a:solidFill>
+            <a:srgbClr val="C7000B"/>
+          </a:solidFill>
+          <a:ln>
+            <a:noFill/>
+          </a:ln>
+        </p:spPr>
+        <p:style>
+          <a:lnRef idx="1">
+            <a:schemeClr val="accent1"/>
+          </a:lnRef>
+          <a:fillRef idx="3">
+            <a:schemeClr val="accent1"/>
+          </a:fillRef>
+          <a:effectRef idx="2">
+            <a:schemeClr val="accent1"/>
+          </a:effectRef>
+          <a:fontRef idx="minor">
+            <a:schemeClr val="lt1"/>
+          </a:fontRef>
+        </p:style>
+        <p:txBody>
+          <a:bodyPr rtlCol="0" anchor="ctr"/>
+          <a:lstStyle/>
+          <a:p>
+            <a:pPr algn="ctr"/>
+          </a:p>
+        </p:txBody>
+      </p:sp>
+      <p:sp>
+        <p:nvSpPr>
+          <p:cNvPr id="6" name="TextBox 5"/>
+          <p:cNvSpPr txBox="1"/>
+          <p:nvPr/>
+        </p:nvSpPr>
+        <p:spPr>
+          <a:xfrm>
+            <a:off x="457200" y="1024128"/>
+            <a:ext cx="11155680" cy="292608"/>
+          </a:xfrm>
+          <a:prstGeom prst="rect">
+            <a:avLst/>
+          </a:prstGeom>
+          <a:noFill/>
+        </p:spPr>
+        <p:txBody>
+          <a:bodyPr wrap="square" anchor="t"/>
+          <a:lstStyle/>
+          <a:p>
+            <a:pPr algn="l">
+              <a:spcAft>
+                <a:spcPts val="200"/>
+              </a:spcAft>
+            </a:pPr>
+            <a:r>
+              <a:rPr sz="1200" b="0">
+                <a:solidFill>
+                  <a:srgbClr val="898989"/>
+                </a:solidFill>
+                <a:latin typeface="Microsoft YaHei"/>
+                <a:ea typeface="Microsoft YaHei"/>
+                <a:cs typeface="Microsoft YaHei"/>
+              </a:rPr>
+              <a:t>接口不变，能力逐代升级；每代回答一个业务问题。</a:t>
+            </a:r>
+          </a:p>
+        </p:txBody>
+      </p:sp>
+      <p:sp>
+        <p:nvSpPr>
+          <p:cNvPr id="7" name="Rounded Rectangle 6"/>
+          <p:cNvSpPr/>
+          <p:nvPr/>
+        </p:nvSpPr>
+        <p:spPr>
+          <a:xfrm>
+            <a:off x="411480" y="1417320"/>
+            <a:ext cx="2788920" cy="3566160"/>
+          </a:xfrm>
+          <a:prstGeom prst="roundRect">
+            <a:avLst>
+              <a:gd name="adj" fmla="val 5000"/>
+            </a:avLst>
+          </a:prstGeom>
+          <a:solidFill>
+            <a:srgbClr val="FFFFFF"/>
+          </a:solidFill>
+          <a:ln w="9525">
+            <a:solidFill>
+              <a:srgbClr val="DDDDDD"/>
+            </a:solidFill>
+          </a:ln>
+        </p:spPr>
+        <p:style>
+          <a:lnRef idx="1">
+            <a:schemeClr val="accent1"/>
+          </a:lnRef>
+          <a:fillRef idx="3">
+            <a:schemeClr val="accent1"/>
+          </a:fillRef>
+          <a:effectRef idx="2">
+            <a:schemeClr val="accent1"/>
+          </a:effectRef>
+          <a:fontRef idx="minor">
+            <a:schemeClr val="lt1"/>
+          </a:fontRef>
+        </p:style>
+        <p:txBody>
+          <a:bodyPr rtlCol="0" anchor="ctr"/>
+          <a:lstStyle/>
+          <a:p>
+            <a:pPr algn="ctr"/>
+          </a:p>
+        </p:txBody>
+      </p:sp>
+      <p:sp>
+        <p:nvSpPr>
+          <p:cNvPr id="8" name="Rectangle 7"/>
+          <p:cNvSpPr/>
+          <p:nvPr/>
+        </p:nvSpPr>
+        <p:spPr>
+          <a:xfrm>
+            <a:off x="411480" y="1417320"/>
+            <a:ext cx="2788920" cy="73152"/>
+          </a:xfrm>
+          <a:prstGeom prst="rect">
+            <a:avLst/>
+          </a:prstGeom>
+          <a:solidFill>
+            <a:srgbClr val="C7000B"/>
+          </a:solidFill>
+          <a:ln>
+            <a:noFill/>
+          </a:ln>
+        </p:spPr>
+        <p:style>
+          <a:lnRef idx="1">
+            <a:schemeClr val="accent1"/>
+          </a:lnRef>
+          <a:fillRef idx="3">
+            <a:schemeClr val="accent1"/>
+          </a:fillRef>
+          <a:effectRef idx="2">
+            <a:schemeClr val="accent1"/>
+          </a:effectRef>
+          <a:fontRef idx="minor">
+            <a:schemeClr val="lt1"/>
+          </a:fontRef>
+        </p:style>
+        <p:txBody>
+          <a:bodyPr rtlCol="0" anchor="ctr"/>
+          <a:lstStyle/>
+          <a:p>
+            <a:pPr algn="ctr"/>
+          </a:p>
+        </p:txBody>
+      </p:sp>
+      <p:sp>
+        <p:nvSpPr>
+          <p:cNvPr id="9" name="TextBox 8"/>
+          <p:cNvSpPr txBox="1"/>
+          <p:nvPr/>
+        </p:nvSpPr>
+        <p:spPr>
+          <a:xfrm>
+            <a:off x="548640" y="1645920"/>
+            <a:ext cx="2514600" cy="365760"/>
+          </a:xfrm>
+          <a:prstGeom prst="rect">
+            <a:avLst/>
+          </a:prstGeom>
+          <a:noFill/>
+        </p:spPr>
+        <p:txBody>
+          <a:bodyPr wrap="square" anchor="t"/>
+          <a:lstStyle/>
+          <a:p>
+            <a:pPr algn="l">
+              <a:spcAft>
+                <a:spcPts val="200"/>
+              </a:spcAft>
+            </a:pPr>
+            <a:r>
+              <a:rPr sz="1600" b="1">
+                <a:solidFill>
+                  <a:srgbClr val="C7000B"/>
+                </a:solidFill>
+                <a:latin typeface="Microsoft YaHei"/>
+                <a:ea typeface="Microsoft YaHei"/>
+                <a:cs typeface="Microsoft YaHei"/>
+              </a:rPr>
+              <a:t>Gen1  零样本基线</a:t>
+            </a:r>
+          </a:p>
+        </p:txBody>
+      </p:sp>
+      <p:sp>
+        <p:nvSpPr>
+          <p:cNvPr id="10" name="TextBox 9"/>
+          <p:cNvSpPr txBox="1"/>
+          <p:nvPr/>
+        </p:nvSpPr>
+        <p:spPr>
+          <a:xfrm>
+            <a:off x="548640" y="2148840"/>
+            <a:ext cx="2514600" cy="2651760"/>
+          </a:xfrm>
+          <a:prstGeom prst="rect">
+            <a:avLst/>
+          </a:prstGeom>
+          <a:noFill/>
+        </p:spPr>
+        <p:txBody>
+          <a:bodyPr wrap="square" anchor="t"/>
+          <a:lstStyle/>
+          <a:p>
+            <a:pPr algn="l">
+              <a:spcAft>
+                <a:spcPts val="200"/>
+              </a:spcAft>
+            </a:pPr>
+            <a:r>
+              <a:rPr sz="1200" b="0">
+                <a:solidFill>
+                  <a:srgbClr val="555757"/>
+                </a:solidFill>
+                <a:latin typeface="Microsoft YaHei"/>
+                <a:ea typeface="Microsoft YaHei"/>
+                <a:cs typeface="Microsoft YaHei"/>
+              </a:rPr>
+              <a:t>预训练底座直接上岗。</a:t>
+            </a:r>
+          </a:p>
+          <a:p>
+            <a:pPr algn="l">
+              <a:spcAft>
+                <a:spcPts val="200"/>
+              </a:spcAft>
+            </a:pPr>
+            <a:r>
+              <a:rPr sz="1200" b="0">
+                <a:solidFill>
+                  <a:srgbClr val="555757"/>
+                </a:solidFill>
+                <a:latin typeface="Microsoft YaHei"/>
+                <a:ea typeface="Microsoft YaHei"/>
+                <a:cs typeface="Microsoft YaHei"/>
+              </a:rPr>
+              <a:t>预测零样本（TimesFM-3）；</a:t>
+            </a:r>
+          </a:p>
+          <a:p>
+            <a:pPr algn="l">
+              <a:spcAft>
+                <a:spcPts val="200"/>
+              </a:spcAft>
+            </a:pPr>
+            <a:r>
+              <a:rPr sz="1200" b="0">
+                <a:solidFill>
+                  <a:srgbClr val="555757"/>
+                </a:solidFill>
+                <a:latin typeface="Microsoft YaHei"/>
+                <a:ea typeface="Microsoft YaHei"/>
+                <a:cs typeface="Microsoft YaHei"/>
+              </a:rPr>
+              <a:t>分类走规则 / 线性探针（UniTS / MOMENT）。</a:t>
+            </a:r>
+          </a:p>
+          <a:p>
+            <a:pPr algn="l">
+              <a:spcAft>
+                <a:spcPts val="200"/>
+              </a:spcAft>
+            </a:pPr>
+            <a:r>
+              <a:rPr sz="1200" b="0">
+                <a:solidFill>
+                  <a:srgbClr val="555757"/>
+                </a:solidFill>
+                <a:latin typeface="Microsoft YaHei"/>
+                <a:ea typeface="Microsoft YaHei"/>
+                <a:cs typeface="Microsoft YaHei"/>
+              </a:rPr>
+              <a:t>回答：底座行不行 → 统一评测基线。</a:t>
+            </a:r>
+          </a:p>
+        </p:txBody>
+      </p:sp>
+      <p:sp>
+        <p:nvSpPr>
+          <p:cNvPr id="11" name="Rounded Rectangle 10"/>
+          <p:cNvSpPr/>
+          <p:nvPr/>
+        </p:nvSpPr>
+        <p:spPr>
+          <a:xfrm>
+            <a:off x="3337560" y="1417320"/>
+            <a:ext cx="2788920" cy="3566160"/>
+          </a:xfrm>
+          <a:prstGeom prst="roundRect">
+            <a:avLst>
+              <a:gd name="adj" fmla="val 5000"/>
+            </a:avLst>
+          </a:prstGeom>
+          <a:solidFill>
+            <a:srgbClr val="FFFFFF"/>
+          </a:solidFill>
+          <a:ln w="9525">
+            <a:solidFill>
+              <a:srgbClr val="DDDDDD"/>
+            </a:solidFill>
+          </a:ln>
+        </p:spPr>
+        <p:style>
+          <a:lnRef idx="1">
+            <a:schemeClr val="accent1"/>
+          </a:lnRef>
+          <a:fillRef idx="3">
+            <a:schemeClr val="accent1"/>
+          </a:fillRef>
+          <a:effectRef idx="2">
+            <a:schemeClr val="accent1"/>
+          </a:effectRef>
+          <a:fontRef idx="minor">
+            <a:schemeClr val="lt1"/>
+          </a:fontRef>
+        </p:style>
+        <p:txBody>
+          <a:bodyPr rtlCol="0" anchor="ctr"/>
+          <a:lstStyle/>
+          <a:p>
+            <a:pPr algn="ctr"/>
+          </a:p>
+        </p:txBody>
+      </p:sp>
+      <p:sp>
+        <p:nvSpPr>
+          <p:cNvPr id="12" name="Rectangle 11"/>
+          <p:cNvSpPr/>
+          <p:nvPr/>
+        </p:nvSpPr>
+        <p:spPr>
+          <a:xfrm>
+            <a:off x="3337560" y="1417320"/>
+            <a:ext cx="2788920" cy="73152"/>
+          </a:xfrm>
+          <a:prstGeom prst="rect">
+            <a:avLst/>
+          </a:prstGeom>
+          <a:solidFill>
+            <a:srgbClr val="ED6D00"/>
+          </a:solidFill>
+          <a:ln>
+            <a:noFill/>
+          </a:ln>
+        </p:spPr>
+        <p:style>
+          <a:lnRef idx="1">
+            <a:schemeClr val="accent1"/>
+          </a:lnRef>
+          <a:fillRef idx="3">
+            <a:schemeClr val="accent1"/>
+          </a:fillRef>
+          <a:effectRef idx="2">
+            <a:schemeClr val="accent1"/>
+          </a:effectRef>
+          <a:fontRef idx="minor">
+            <a:schemeClr val="lt1"/>
+          </a:fontRef>
+        </p:style>
+        <p:txBody>
+          <a:bodyPr rtlCol="0" anchor="ctr"/>
+          <a:lstStyle/>
+          <a:p>
+            <a:pPr algn="ctr"/>
+          </a:p>
+        </p:txBody>
+      </p:sp>
+      <p:sp>
+        <p:nvSpPr>
+          <p:cNvPr id="13" name="TextBox 12"/>
+          <p:cNvSpPr txBox="1"/>
+          <p:nvPr/>
+        </p:nvSpPr>
+        <p:spPr>
+          <a:xfrm>
+            <a:off x="3474720" y="1645920"/>
+            <a:ext cx="2514600" cy="365760"/>
+          </a:xfrm>
+          <a:prstGeom prst="rect">
+            <a:avLst/>
+          </a:prstGeom>
+          <a:noFill/>
+        </p:spPr>
+        <p:txBody>
+          <a:bodyPr wrap="square" anchor="t"/>
+          <a:lstStyle/>
+          <a:p>
+            <a:pPr algn="l">
+              <a:spcAft>
+                <a:spcPts val="200"/>
+              </a:spcAft>
+            </a:pPr>
+            <a:r>
+              <a:rPr sz="1600" b="1">
+                <a:solidFill>
+                  <a:srgbClr val="ED6D00"/>
+                </a:solidFill>
+                <a:latin typeface="Microsoft YaHei"/>
+                <a:ea typeface="Microsoft YaHei"/>
+                <a:cs typeface="Microsoft YaHei"/>
+              </a:rPr>
+              <a:t>Gen2  千人千面</a:t>
+            </a:r>
+          </a:p>
+        </p:txBody>
+      </p:sp>
+      <p:sp>
+        <p:nvSpPr>
+          <p:cNvPr id="14" name="TextBox 13"/>
+          <p:cNvSpPr txBox="1"/>
+          <p:nvPr/>
+        </p:nvSpPr>
+        <p:spPr>
+          <a:xfrm>
+            <a:off x="3474720" y="2148840"/>
+            <a:ext cx="2514600" cy="2651760"/>
+          </a:xfrm>
+          <a:prstGeom prst="rect">
+            <a:avLst/>
+          </a:prstGeom>
+          <a:noFill/>
+        </p:spPr>
+        <p:txBody>
+          <a:bodyPr wrap="square" anchor="t"/>
+          <a:lstStyle/>
+          <a:p>
+            <a:pPr algn="l">
+              <a:spcAft>
+                <a:spcPts val="200"/>
+              </a:spcAft>
+            </a:pPr>
+            <a:r>
+              <a:rPr sz="1200" b="0">
+                <a:solidFill>
+                  <a:srgbClr val="555757"/>
+                </a:solidFill>
+                <a:latin typeface="Microsoft YaHei"/>
+                <a:ea typeface="Microsoft YaHei"/>
+                <a:cs typeface="Microsoft YaHei"/>
+              </a:rPr>
+              <a:t>轻量适配到每设备、每用户。</a:t>
+            </a:r>
+          </a:p>
+          <a:p>
+            <a:pPr algn="l">
+              <a:spcAft>
+                <a:spcPts val="200"/>
+              </a:spcAft>
+            </a:pPr>
+            <a:r>
+              <a:rPr sz="1200" b="0">
+                <a:solidFill>
+                  <a:srgbClr val="555757"/>
+                </a:solidFill>
+                <a:latin typeface="Microsoft YaHei"/>
+                <a:ea typeface="Microsoft YaHei"/>
+                <a:cs typeface="Microsoft YaHei"/>
+              </a:rPr>
+              <a:t>LoRA / 提示微调：TartanIMU 仅 1.1M 参数；</a:t>
+            </a:r>
+          </a:p>
+          <a:p>
+            <a:pPr algn="l">
+              <a:spcAft>
+                <a:spcPts val="200"/>
+              </a:spcAft>
+            </a:pPr>
+            <a:r>
+              <a:rPr sz="1200" b="0">
+                <a:solidFill>
+                  <a:srgbClr val="555757"/>
+                </a:solidFill>
+                <a:latin typeface="Microsoft YaHei"/>
+                <a:ea typeface="Microsoft YaHei"/>
+                <a:cs typeface="Microsoft YaHei"/>
+              </a:rPr>
+              <a:t>Meta EMG 个性化后再 +16%。</a:t>
+            </a:r>
+          </a:p>
+          <a:p>
+            <a:pPr algn="l">
+              <a:spcAft>
+                <a:spcPts val="200"/>
+              </a:spcAft>
+            </a:pPr>
+            <a:r>
+              <a:rPr sz="1200" b="0">
+                <a:solidFill>
+                  <a:srgbClr val="555757"/>
+                </a:solidFill>
+                <a:latin typeface="Microsoft YaHei"/>
+                <a:ea typeface="Microsoft YaHei"/>
+                <a:cs typeface="Microsoft YaHei"/>
+              </a:rPr>
+              <a:t>回答：换设备换人还行不行 → 画像进数据规格。</a:t>
+            </a:r>
+          </a:p>
+        </p:txBody>
+      </p:sp>
+      <p:sp>
+        <p:nvSpPr>
+          <p:cNvPr id="15" name="Rounded Rectangle 14"/>
+          <p:cNvSpPr/>
+          <p:nvPr/>
+        </p:nvSpPr>
+        <p:spPr>
+          <a:xfrm>
+            <a:off x="6263640" y="1417320"/>
+            <a:ext cx="2788920" cy="3566160"/>
+          </a:xfrm>
+          <a:prstGeom prst="roundRect">
+            <a:avLst>
+              <a:gd name="adj" fmla="val 5000"/>
+            </a:avLst>
+          </a:prstGeom>
+          <a:solidFill>
+            <a:srgbClr val="FFFFFF"/>
+          </a:solidFill>
+          <a:ln w="9525">
+            <a:solidFill>
+              <a:srgbClr val="DDDDDD"/>
+            </a:solidFill>
+          </a:ln>
+        </p:spPr>
+        <p:style>
+          <a:lnRef idx="1">
+            <a:schemeClr val="accent1"/>
+          </a:lnRef>
+          <a:fillRef idx="3">
+            <a:schemeClr val="accent1"/>
+          </a:fillRef>
+          <a:effectRef idx="2">
+            <a:schemeClr val="accent1"/>
+          </a:effectRef>
+          <a:fontRef idx="minor">
+            <a:schemeClr val="lt1"/>
+          </a:fontRef>
+        </p:style>
+        <p:txBody>
+          <a:bodyPr rtlCol="0" anchor="ctr"/>
+          <a:lstStyle/>
+          <a:p>
+            <a:pPr algn="ctr"/>
+          </a:p>
+        </p:txBody>
+      </p:sp>
+      <p:sp>
+        <p:nvSpPr>
+          <p:cNvPr id="16" name="Rectangle 15"/>
+          <p:cNvSpPr/>
+          <p:nvPr/>
+        </p:nvSpPr>
+        <p:spPr>
+          <a:xfrm>
+            <a:off x="6263640" y="1417320"/>
+            <a:ext cx="2788920" cy="73152"/>
+          </a:xfrm>
+          <a:prstGeom prst="rect">
+            <a:avLst/>
+          </a:prstGeom>
+          <a:solidFill>
+            <a:srgbClr val="30B5C5"/>
+          </a:solidFill>
+          <a:ln>
+            <a:noFill/>
+          </a:ln>
+        </p:spPr>
+        <p:style>
+          <a:lnRef idx="1">
+            <a:schemeClr val="accent1"/>
+          </a:lnRef>
+          <a:fillRef idx="3">
+            <a:schemeClr val="accent1"/>
+          </a:fillRef>
+          <a:effectRef idx="2">
+            <a:schemeClr val="accent1"/>
+          </a:effectRef>
+          <a:fontRef idx="minor">
+            <a:schemeClr val="lt1"/>
+          </a:fontRef>
+        </p:style>
+        <p:txBody>
+          <a:bodyPr rtlCol="0" anchor="ctr"/>
+          <a:lstStyle/>
+          <a:p>
+            <a:pPr algn="ctr"/>
+          </a:p>
+        </p:txBody>
+      </p:sp>
+      <p:sp>
+        <p:nvSpPr>
+          <p:cNvPr id="17" name="TextBox 16"/>
+          <p:cNvSpPr txBox="1"/>
+          <p:nvPr/>
+        </p:nvSpPr>
+        <p:spPr>
+          <a:xfrm>
+            <a:off x="6400800" y="1645920"/>
+            <a:ext cx="2514600" cy="365760"/>
+          </a:xfrm>
+          <a:prstGeom prst="rect">
+            <a:avLst/>
+          </a:prstGeom>
+          <a:noFill/>
+        </p:spPr>
+        <p:txBody>
+          <a:bodyPr wrap="square" anchor="t"/>
+          <a:lstStyle/>
+          <a:p>
+            <a:pPr algn="l">
+              <a:spcAft>
+                <a:spcPts val="200"/>
+              </a:spcAft>
+            </a:pPr>
+            <a:r>
+              <a:rPr sz="1600" b="1">
+                <a:solidFill>
+                  <a:srgbClr val="30B5C5"/>
+                </a:solidFill>
+                <a:latin typeface="Microsoft YaHei"/>
+                <a:ea typeface="Microsoft YaHei"/>
+                <a:cs typeface="Microsoft YaHei"/>
+              </a:rPr>
+              <a:t>Gen3  Token 嵌入大模型</a:t>
+            </a:r>
+          </a:p>
+        </p:txBody>
+      </p:sp>
+      <p:sp>
+        <p:nvSpPr>
+          <p:cNvPr id="18" name="TextBox 17"/>
+          <p:cNvSpPr txBox="1"/>
+          <p:nvPr/>
+        </p:nvSpPr>
+        <p:spPr>
+          <a:xfrm>
+            <a:off x="6400800" y="2148840"/>
+            <a:ext cx="2514600" cy="2651760"/>
+          </a:xfrm>
+          <a:prstGeom prst="rect">
+            <a:avLst/>
+          </a:prstGeom>
+          <a:noFill/>
+        </p:spPr>
+        <p:txBody>
+          <a:bodyPr wrap="square" anchor="t"/>
+          <a:lstStyle/>
+          <a:p>
+            <a:pPr algn="l">
+              <a:spcAft>
+                <a:spcPts val="200"/>
+              </a:spcAft>
+            </a:pPr>
+            <a:r>
+              <a:rPr sz="1200" b="0">
+                <a:solidFill>
+                  <a:srgbClr val="555757"/>
+                </a:solidFill>
+                <a:latin typeface="Microsoft YaHei"/>
+                <a:ea typeface="Microsoft YaHei"/>
+                <a:cs typeface="Microsoft YaHei"/>
+              </a:rPr>
+              <a:t>物理 patch token 作为新模态注入大模型。</a:t>
+            </a:r>
+          </a:p>
+          <a:p>
+            <a:pPr algn="l">
+              <a:spcAft>
+                <a:spcPts val="200"/>
+              </a:spcAft>
+            </a:pPr>
+            <a:r>
+              <a:rPr sz="1200" b="0">
+                <a:solidFill>
+                  <a:srgbClr val="555757"/>
+                </a:solidFill>
+                <a:latin typeface="Microsoft YaHei"/>
+                <a:ea typeface="Microsoft YaHei"/>
+                <a:cs typeface="Microsoft YaHei"/>
+              </a:rPr>
+              <a:t>预测 + 分类变成大模型的原生能力；</a:t>
+            </a:r>
+          </a:p>
+          <a:p>
+            <a:pPr algn="l">
+              <a:spcAft>
+                <a:spcPts val="200"/>
+              </a:spcAft>
+            </a:pPr>
+            <a:r>
+              <a:rPr sz="1200" b="0">
+                <a:solidFill>
+                  <a:srgbClr val="555757"/>
+                </a:solidFill>
+                <a:latin typeface="Microsoft YaHei"/>
+                <a:ea typeface="Microsoft YaHei"/>
+                <a:cs typeface="Microsoft YaHei"/>
+              </a:rPr>
+              <a:t>平台从「提供模型」变成「提供 token 与接口」。</a:t>
+            </a:r>
+          </a:p>
+          <a:p>
+            <a:pPr algn="l">
+              <a:spcAft>
+                <a:spcPts val="200"/>
+              </a:spcAft>
+            </a:pPr>
+            <a:r>
+              <a:rPr sz="1200" b="0">
+                <a:solidFill>
+                  <a:srgbClr val="555757"/>
+                </a:solidFill>
+                <a:latin typeface="Microsoft YaHei"/>
+                <a:ea typeface="Microsoft YaHei"/>
+                <a:cs typeface="Microsoft YaHei"/>
+              </a:rPr>
+              <a:t>回答：物理感知如何进入统一智能。</a:t>
+            </a:r>
+          </a:p>
+        </p:txBody>
+      </p:sp>
+      <p:sp>
+        <p:nvSpPr>
+          <p:cNvPr id="19" name="Rounded Rectangle 18"/>
+          <p:cNvSpPr/>
+          <p:nvPr/>
+        </p:nvSpPr>
+        <p:spPr>
+          <a:xfrm>
+            <a:off x="457200" y="5120640"/>
+            <a:ext cx="11247120" cy="822960"/>
+          </a:xfrm>
+          <a:prstGeom prst="roundRect">
+            <a:avLst>
+              <a:gd name="adj" fmla="val 5000"/>
+            </a:avLst>
+          </a:prstGeom>
+          <a:solidFill>
+            <a:srgbClr val="F7F7F7"/>
+          </a:solidFill>
+          <a:ln w="9525">
+            <a:solidFill>
+              <a:srgbClr val="DDDDDD"/>
+            </a:solidFill>
+          </a:ln>
+        </p:spPr>
+        <p:style>
+          <a:lnRef idx="1">
+            <a:schemeClr val="accent1"/>
+          </a:lnRef>
+          <a:fillRef idx="3">
+            <a:schemeClr val="accent1"/>
+          </a:fillRef>
+          <a:effectRef idx="2">
+            <a:schemeClr val="accent1"/>
+          </a:effectRef>
+          <a:fontRef idx="minor">
+            <a:schemeClr val="lt1"/>
+          </a:fontRef>
+        </p:style>
+        <p:txBody>
+          <a:bodyPr rtlCol="0" anchor="ctr"/>
+          <a:lstStyle/>
+          <a:p>
+            <a:pPr algn="ctr"/>
+          </a:p>
+        </p:txBody>
+      </p:sp>
+      <p:sp>
+        <p:nvSpPr>
+          <p:cNvPr id="20" name="TextBox 19"/>
+          <p:cNvSpPr txBox="1"/>
+          <p:nvPr/>
+        </p:nvSpPr>
+        <p:spPr>
+          <a:xfrm>
+            <a:off x="640080" y="5257800"/>
+            <a:ext cx="10881360" cy="548640"/>
+          </a:xfrm>
+          <a:prstGeom prst="rect">
+            <a:avLst/>
+          </a:prstGeom>
+          <a:noFill/>
+        </p:spPr>
+        <p:txBody>
+          <a:bodyPr wrap="square" anchor="t"/>
+          <a:lstStyle/>
+          <a:p>
+            <a:pPr algn="l">
+              <a:spcAft>
+                <a:spcPts val="200"/>
+              </a:spcAft>
+            </a:pPr>
+            <a:r>
+              <a:rPr sz="1400" b="1">
+                <a:solidFill>
+                  <a:srgbClr val="C7000B"/>
+                </a:solidFill>
+                <a:latin typeface="Microsoft YaHei"/>
+                <a:ea typeface="Microsoft YaHei"/>
+                <a:cs typeface="Microsoft YaHei"/>
+              </a:rPr>
+              <a:t>演进原则：接口（接入 / 预测 / 分类）向下兼容；底座、权重、头可独立替换。</a:t>
+            </a:r>
+          </a:p>
+        </p:txBody>
+      </p:sp>
+      <p:sp>
+        <p:nvSpPr>
+          <p:cNvPr id="21" name="Rectangle 20"/>
+          <p:cNvSpPr/>
+          <p:nvPr/>
+        </p:nvSpPr>
+        <p:spPr>
+          <a:xfrm>
+            <a:off x="0" y="6537960"/>
+            <a:ext cx="12191695" cy="320040"/>
+          </a:xfrm>
+          <a:prstGeom prst="rect">
+            <a:avLst/>
+          </a:prstGeom>
+          <a:solidFill>
+            <a:srgbClr val="F2F2F2"/>
+          </a:solidFill>
+          <a:ln>
+            <a:noFill/>
+          </a:ln>
+        </p:spPr>
+        <p:style>
+          <a:lnRef idx="1">
+            <a:schemeClr val="accent1"/>
+          </a:lnRef>
+          <a:fillRef idx="3">
+            <a:schemeClr val="accent1"/>
+          </a:fillRef>
+          <a:effectRef idx="2">
+            <a:schemeClr val="accent1"/>
+          </a:effectRef>
+          <a:fontRef idx="minor">
+            <a:schemeClr val="lt1"/>
+          </a:fontRef>
+        </p:style>
+        <p:txBody>
+          <a:bodyPr rtlCol="0" anchor="ctr"/>
+          <a:lstStyle/>
+          <a:p>
+            <a:pPr algn="ctr"/>
+          </a:p>
+        </p:txBody>
+      </p:sp>
+      <p:sp>
+        <p:nvSpPr>
+          <p:cNvPr id="22" name="TextBox 21"/>
+          <p:cNvSpPr txBox="1"/>
+          <p:nvPr/>
+        </p:nvSpPr>
+        <p:spPr>
+          <a:xfrm>
+            <a:off x="457200" y="6537960"/>
+            <a:ext cx="8229600" cy="320040"/>
+          </a:xfrm>
+          <a:prstGeom prst="rect">
+            <a:avLst/>
+          </a:prstGeom>
+          <a:noFill/>
+        </p:spPr>
+        <p:txBody>
+          <a:bodyPr wrap="square" anchor="ctr"/>
+          <a:lstStyle/>
+          <a:p>
+            <a:pPr algn="l">
+              <a:spcAft>
+                <a:spcPts val="200"/>
+              </a:spcAft>
+            </a:pPr>
+            <a:r>
+              <a:rPr sz="900" b="0">
+                <a:solidFill>
+                  <a:srgbClr val="898989"/>
+                </a:solidFill>
+                <a:latin typeface="Microsoft YaHei"/>
+                <a:ea typeface="Microsoft YaHei"/>
+                <a:cs typeface="Microsoft YaHei"/>
+              </a:rPr>
+              <a:t>华为  ·  AI 物理感知平台  ·  代际演进    |    Security Level: Internal</a:t>
+            </a:r>
+          </a:p>
+        </p:txBody>
+      </p:sp>
+      <p:sp>
+        <p:nvSpPr>
+          <p:cNvPr id="23" name="TextBox 22"/>
+          <p:cNvSpPr txBox="1"/>
+          <p:nvPr/>
+        </p:nvSpPr>
+        <p:spPr>
+          <a:xfrm>
+            <a:off x="10241280" y="6537960"/>
+            <a:ext cx="1554480" cy="320040"/>
+          </a:xfrm>
+          <a:prstGeom prst="rect">
+            <a:avLst/>
+          </a:prstGeom>
+          <a:noFill/>
+        </p:spPr>
+        <p:txBody>
+          <a:bodyPr wrap="square" anchor="ctr"/>
+          <a:lstStyle/>
+          <a:p>
+            <a:pPr algn="r">
+              <a:spcAft>
+                <a:spcPts val="200"/>
+              </a:spcAft>
+            </a:pPr>
+            <a:r>
+              <a:rPr sz="900" b="0">
+                <a:solidFill>
+                  <a:srgbClr val="898989"/>
+                </a:solidFill>
+                <a:latin typeface="Microsoft YaHei"/>
+                <a:ea typeface="Microsoft YaHei"/>
+                <a:cs typeface="Microsoft YaHei"/>
+              </a:rPr>
+              <a:t>9  /  9</a:t>
             </a:r>
           </a:p>
         </p:txBody>

--- a/AI物理感知平台-华为汇报.pptx
+++ b/AI物理感知平台-华为汇报.pptx
@@ -23,6 +23,8 @@
     <p:sldId id="262" r:id="rId17"/>
     <p:sldId id="263" r:id="rId18"/>
     <p:sldId id="264" r:id="rId19"/>
+    <p:sldId id="265" r:id="rId20"/>
+    <p:sldId id="266" r:id="rId21"/>
   </p:sldIdLst>
   <p:sldSz cx="12196763" cy="6858000"/>
   <p:notesSz cx="6858000" cy="9144000"/>
@@ -7413,7 +7415,7 @@
                 <a:ea typeface="Microsoft YaHei"/>
                 <a:cs typeface="Microsoft YaHei"/>
               </a:rPr>
-              <a:t>来源：TimesFM / UniTS / MOMENT / LIMU-BERT-X 公开资料  ·  9 页平台版</a:t>
+              <a:t>来源：TimesFM / UniTS / MOMENT / LIMU-BERT-X 公开资料  ·  11 页平台版</a:t>
             </a:r>
           </a:p>
         </p:txBody>
@@ -7452,7 +7454,7 @@
                 <a:ea typeface="Microsoft YaHei"/>
                 <a:cs typeface="Microsoft YaHei"/>
               </a:rPr>
-              <a:t>1  /  9</a:t>
+              <a:t>1  /  11</a:t>
             </a:r>
           </a:p>
         </p:txBody>
@@ -7492,6 +7494,3435 @@
                 <a:cs typeface="Microsoft YaHei"/>
               </a:rPr>
               <a:t>Security Level: Internal</a:t>
+            </a:r>
+          </a:p>
+        </p:txBody>
+      </p:sp>
+    </p:spTree>
+  </p:cSld>
+  <p:clrMapOvr>
+    <a:masterClrMapping/>
+  </p:clrMapOvr>
+</p:sld>
+</file>
+
+<file path=ppt/slides/slide10.xml><?xml version="1.0" encoding="utf-8"?>
+<p:sld xmlns:a="http://schemas.openxmlformats.org/drawingml/2006/main" xmlns:p="http://schemas.openxmlformats.org/presentationml/2006/main" xmlns:r="http://schemas.openxmlformats.org/officeDocument/2006/relationships">
+  <p:cSld>
+    <p:spTree>
+      <p:nvGrpSpPr>
+        <p:cNvPr id="1" name=""/>
+        <p:cNvGrpSpPr/>
+        <p:nvPr/>
+      </p:nvGrpSpPr>
+      <p:grpSpPr/>
+      <p:sp>
+        <p:nvSpPr>
+          <p:cNvPr id="2" name="Rectangle 1"/>
+          <p:cNvSpPr/>
+          <p:nvPr/>
+        </p:nvSpPr>
+        <p:spPr>
+          <a:xfrm>
+            <a:off x="0" y="0"/>
+            <a:ext cx="12196763" cy="6858000"/>
+          </a:xfrm>
+          <a:prstGeom prst="rect">
+            <a:avLst/>
+          </a:prstGeom>
+          <a:solidFill>
+            <a:srgbClr val="FFFFFF"/>
+          </a:solidFill>
+          <a:ln>
+            <a:noFill/>
+          </a:ln>
+        </p:spPr>
+        <p:style>
+          <a:lnRef idx="1">
+            <a:schemeClr val="accent1"/>
+          </a:lnRef>
+          <a:fillRef idx="3">
+            <a:schemeClr val="accent1"/>
+          </a:fillRef>
+          <a:effectRef idx="2">
+            <a:schemeClr val="accent1"/>
+          </a:effectRef>
+          <a:fontRef idx="minor">
+            <a:schemeClr val="lt1"/>
+          </a:fontRef>
+        </p:style>
+        <p:txBody>
+          <a:bodyPr rtlCol="0" anchor="ctr"/>
+          <a:lstStyle/>
+          <a:p>
+            <a:pPr algn="ctr"/>
+          </a:p>
+        </p:txBody>
+      </p:sp>
+      <p:sp>
+        <p:nvSpPr>
+          <p:cNvPr id="3" name="TextBox 2"/>
+          <p:cNvSpPr txBox="1"/>
+          <p:nvPr/>
+        </p:nvSpPr>
+        <p:spPr>
+          <a:xfrm>
+            <a:off x="457200" y="201168"/>
+            <a:ext cx="11155680" cy="256032"/>
+          </a:xfrm>
+          <a:prstGeom prst="rect">
+            <a:avLst/>
+          </a:prstGeom>
+          <a:noFill/>
+        </p:spPr>
+        <p:txBody>
+          <a:bodyPr wrap="square" anchor="t"/>
+          <a:lstStyle/>
+          <a:p>
+            <a:pPr algn="l">
+              <a:spcAft>
+                <a:spcPts val="200"/>
+              </a:spcAft>
+            </a:pPr>
+            <a:r>
+              <a:rPr sz="1100" b="1">
+                <a:solidFill>
+                  <a:srgbClr val="C7000B"/>
+                </a:solidFill>
+                <a:latin typeface="Microsoft YaHei"/>
+                <a:ea typeface="Microsoft YaHei"/>
+                <a:cs typeface="Microsoft YaHei"/>
+              </a:rPr>
+              <a:t>9  量化指标</a:t>
+            </a:r>
+          </a:p>
+        </p:txBody>
+      </p:sp>
+      <p:sp>
+        <p:nvSpPr>
+          <p:cNvPr id="4" name="TextBox 3"/>
+          <p:cNvSpPr txBox="1"/>
+          <p:nvPr/>
+        </p:nvSpPr>
+        <p:spPr>
+          <a:xfrm>
+            <a:off x="457200" y="438912"/>
+            <a:ext cx="11155680" cy="438912"/>
+          </a:xfrm>
+          <a:prstGeom prst="rect">
+            <a:avLst/>
+          </a:prstGeom>
+          <a:noFill/>
+        </p:spPr>
+        <p:txBody>
+          <a:bodyPr wrap="square" anchor="t"/>
+          <a:lstStyle/>
+          <a:p>
+            <a:pPr algn="l">
+              <a:spcAft>
+                <a:spcPts val="200"/>
+              </a:spcAft>
+            </a:pPr>
+            <a:r>
+              <a:rPr sz="2400" b="1">
+                <a:solidFill>
+                  <a:srgbClr val="1A1A1A"/>
+                </a:solidFill>
+                <a:latin typeface="Microsoft YaHei"/>
+                <a:ea typeface="Microsoft YaHei"/>
+                <a:cs typeface="Microsoft YaHei"/>
+              </a:rPr>
+              <a:t>每项指标 = 基线 + 目标值 + 测量方法 + 数据集</a:t>
+            </a:r>
+          </a:p>
+        </p:txBody>
+      </p:sp>
+      <p:sp>
+        <p:nvSpPr>
+          <p:cNvPr id="5" name="Rectangle 4"/>
+          <p:cNvSpPr/>
+          <p:nvPr/>
+        </p:nvSpPr>
+        <p:spPr>
+          <a:xfrm>
+            <a:off x="457200" y="914400"/>
+            <a:ext cx="1097280" cy="45720"/>
+          </a:xfrm>
+          <a:prstGeom prst="rect">
+            <a:avLst/>
+          </a:prstGeom>
+          <a:solidFill>
+            <a:srgbClr val="C7000B"/>
+          </a:solidFill>
+          <a:ln>
+            <a:noFill/>
+          </a:ln>
+        </p:spPr>
+        <p:style>
+          <a:lnRef idx="1">
+            <a:schemeClr val="accent1"/>
+          </a:lnRef>
+          <a:fillRef idx="3">
+            <a:schemeClr val="accent1"/>
+          </a:fillRef>
+          <a:effectRef idx="2">
+            <a:schemeClr val="accent1"/>
+          </a:effectRef>
+          <a:fontRef idx="minor">
+            <a:schemeClr val="lt1"/>
+          </a:fontRef>
+        </p:style>
+        <p:txBody>
+          <a:bodyPr rtlCol="0" anchor="ctr"/>
+          <a:lstStyle/>
+          <a:p>
+            <a:pPr algn="ctr"/>
+          </a:p>
+        </p:txBody>
+      </p:sp>
+      <p:sp>
+        <p:nvSpPr>
+          <p:cNvPr id="6" name="TextBox 5"/>
+          <p:cNvSpPr txBox="1"/>
+          <p:nvPr/>
+        </p:nvSpPr>
+        <p:spPr>
+          <a:xfrm>
+            <a:off x="457200" y="1024128"/>
+            <a:ext cx="11155680" cy="292608"/>
+          </a:xfrm>
+          <a:prstGeom prst="rect">
+            <a:avLst/>
+          </a:prstGeom>
+          <a:noFill/>
+        </p:spPr>
+        <p:txBody>
+          <a:bodyPr wrap="square" anchor="t"/>
+          <a:lstStyle/>
+          <a:p>
+            <a:pPr algn="l">
+              <a:spcAft>
+                <a:spcPts val="200"/>
+              </a:spcAft>
+            </a:pPr>
+            <a:r>
+              <a:rPr sz="1200" b="0">
+                <a:solidFill>
+                  <a:srgbClr val="898989"/>
+                </a:solidFill>
+                <a:latin typeface="Microsoft YaHei"/>
+                <a:ea typeface="Microsoft YaHei"/>
+                <a:cs typeface="Microsoft YaHei"/>
+              </a:rPr>
+              <a:t>精度 / 时延 / 功耗三层，绑定代际承诺，标杆任务锚定公开数据。</a:t>
+            </a:r>
+          </a:p>
+        </p:txBody>
+      </p:sp>
+      <p:sp>
+        <p:nvSpPr>
+          <p:cNvPr id="7" name="TextBox 6"/>
+          <p:cNvSpPr txBox="1"/>
+          <p:nvPr/>
+        </p:nvSpPr>
+        <p:spPr>
+          <a:xfrm>
+            <a:off x="548640" y="1298448"/>
+            <a:ext cx="1024128" cy="292608"/>
+          </a:xfrm>
+          <a:prstGeom prst="rect">
+            <a:avLst/>
+          </a:prstGeom>
+          <a:noFill/>
+        </p:spPr>
+        <p:txBody>
+          <a:bodyPr wrap="square" anchor="t"/>
+          <a:lstStyle/>
+          <a:p>
+            <a:pPr algn="l">
+              <a:spcAft>
+                <a:spcPts val="200"/>
+              </a:spcAft>
+            </a:pPr>
+            <a:r>
+              <a:rPr sz="1200" b="1">
+                <a:solidFill>
+                  <a:srgbClr val="898989"/>
+                </a:solidFill>
+                <a:latin typeface="Microsoft YaHei"/>
+                <a:ea typeface="Microsoft YaHei"/>
+                <a:cs typeface="Microsoft YaHei"/>
+              </a:rPr>
+              <a:t>层</a:t>
+            </a:r>
+          </a:p>
+        </p:txBody>
+      </p:sp>
+      <p:sp>
+        <p:nvSpPr>
+          <p:cNvPr id="8" name="TextBox 7"/>
+          <p:cNvSpPr txBox="1"/>
+          <p:nvPr/>
+        </p:nvSpPr>
+        <p:spPr>
+          <a:xfrm>
+            <a:off x="1783080" y="1298448"/>
+            <a:ext cx="1755648" cy="292608"/>
+          </a:xfrm>
+          <a:prstGeom prst="rect">
+            <a:avLst/>
+          </a:prstGeom>
+          <a:noFill/>
+        </p:spPr>
+        <p:txBody>
+          <a:bodyPr wrap="square" anchor="t"/>
+          <a:lstStyle/>
+          <a:p>
+            <a:pPr algn="l">
+              <a:spcAft>
+                <a:spcPts val="200"/>
+              </a:spcAft>
+            </a:pPr>
+            <a:r>
+              <a:rPr sz="1200" b="1">
+                <a:solidFill>
+                  <a:srgbClr val="898989"/>
+                </a:solidFill>
+                <a:latin typeface="Microsoft YaHei"/>
+                <a:ea typeface="Microsoft YaHei"/>
+                <a:cs typeface="Microsoft YaHei"/>
+              </a:rPr>
+              <a:t>指标</a:t>
+            </a:r>
+          </a:p>
+        </p:txBody>
+      </p:sp>
+      <p:sp>
+        <p:nvSpPr>
+          <p:cNvPr id="9" name="TextBox 8"/>
+          <p:cNvSpPr txBox="1"/>
+          <p:nvPr/>
+        </p:nvSpPr>
+        <p:spPr>
+          <a:xfrm>
+            <a:off x="3749039" y="1298448"/>
+            <a:ext cx="2304288" cy="292608"/>
+          </a:xfrm>
+          <a:prstGeom prst="rect">
+            <a:avLst/>
+          </a:prstGeom>
+          <a:noFill/>
+        </p:spPr>
+        <p:txBody>
+          <a:bodyPr wrap="square" anchor="t"/>
+          <a:lstStyle/>
+          <a:p>
+            <a:pPr algn="l">
+              <a:spcAft>
+                <a:spcPts val="200"/>
+              </a:spcAft>
+            </a:pPr>
+            <a:r>
+              <a:rPr sz="1200" b="1">
+                <a:solidFill>
+                  <a:srgbClr val="898989"/>
+                </a:solidFill>
+                <a:latin typeface="Microsoft YaHei"/>
+                <a:ea typeface="Microsoft YaHei"/>
+                <a:cs typeface="Microsoft YaHei"/>
+              </a:rPr>
+              <a:t>基线 / 对标</a:t>
+            </a:r>
+          </a:p>
+        </p:txBody>
+      </p:sp>
+      <p:sp>
+        <p:nvSpPr>
+          <p:cNvPr id="10" name="TextBox 9"/>
+          <p:cNvSpPr txBox="1"/>
+          <p:nvPr/>
+        </p:nvSpPr>
+        <p:spPr>
+          <a:xfrm>
+            <a:off x="6263640" y="1298448"/>
+            <a:ext cx="2944368" cy="292608"/>
+          </a:xfrm>
+          <a:prstGeom prst="rect">
+            <a:avLst/>
+          </a:prstGeom>
+          <a:noFill/>
+        </p:spPr>
+        <p:txBody>
+          <a:bodyPr wrap="square" anchor="t"/>
+          <a:lstStyle/>
+          <a:p>
+            <a:pPr algn="l">
+              <a:spcAft>
+                <a:spcPts val="200"/>
+              </a:spcAft>
+            </a:pPr>
+            <a:r>
+              <a:rPr sz="1200" b="1">
+                <a:solidFill>
+                  <a:srgbClr val="898989"/>
+                </a:solidFill>
+                <a:latin typeface="Microsoft YaHei"/>
+                <a:ea typeface="Microsoft YaHei"/>
+                <a:cs typeface="Microsoft YaHei"/>
+              </a:rPr>
+              <a:t>目标值</a:t>
+            </a:r>
+          </a:p>
+        </p:txBody>
+      </p:sp>
+      <p:sp>
+        <p:nvSpPr>
+          <p:cNvPr id="11" name="TextBox 10"/>
+          <p:cNvSpPr txBox="1"/>
+          <p:nvPr/>
+        </p:nvSpPr>
+        <p:spPr>
+          <a:xfrm>
+            <a:off x="9418319" y="1298448"/>
+            <a:ext cx="2212848" cy="292608"/>
+          </a:xfrm>
+          <a:prstGeom prst="rect">
+            <a:avLst/>
+          </a:prstGeom>
+          <a:noFill/>
+        </p:spPr>
+        <p:txBody>
+          <a:bodyPr wrap="square" anchor="t"/>
+          <a:lstStyle/>
+          <a:p>
+            <a:pPr algn="l">
+              <a:spcAft>
+                <a:spcPts val="200"/>
+              </a:spcAft>
+            </a:pPr>
+            <a:r>
+              <a:rPr sz="1200" b="1">
+                <a:solidFill>
+                  <a:srgbClr val="898989"/>
+                </a:solidFill>
+                <a:latin typeface="Microsoft YaHei"/>
+                <a:ea typeface="Microsoft YaHei"/>
+                <a:cs typeface="Microsoft YaHei"/>
+              </a:rPr>
+              <a:t>测量方法</a:t>
+            </a:r>
+          </a:p>
+        </p:txBody>
+      </p:sp>
+      <p:sp>
+        <p:nvSpPr>
+          <p:cNvPr id="12" name="Rounded Rectangle 11"/>
+          <p:cNvSpPr/>
+          <p:nvPr/>
+        </p:nvSpPr>
+        <p:spPr>
+          <a:xfrm>
+            <a:off x="457200" y="1645920"/>
+            <a:ext cx="11247120" cy="512064"/>
+          </a:xfrm>
+          <a:prstGeom prst="roundRect">
+            <a:avLst>
+              <a:gd name="adj" fmla="val 5000"/>
+            </a:avLst>
+          </a:prstGeom>
+          <a:solidFill>
+            <a:srgbClr val="FFFFFF"/>
+          </a:solidFill>
+          <a:ln w="9525">
+            <a:solidFill>
+              <a:srgbClr val="DDDDDD"/>
+            </a:solidFill>
+          </a:ln>
+        </p:spPr>
+        <p:style>
+          <a:lnRef idx="1">
+            <a:schemeClr val="accent1"/>
+          </a:lnRef>
+          <a:fillRef idx="3">
+            <a:schemeClr val="accent1"/>
+          </a:fillRef>
+          <a:effectRef idx="2">
+            <a:schemeClr val="accent1"/>
+          </a:effectRef>
+          <a:fontRef idx="minor">
+            <a:schemeClr val="lt1"/>
+          </a:fontRef>
+        </p:style>
+        <p:txBody>
+          <a:bodyPr rtlCol="0" anchor="ctr"/>
+          <a:lstStyle/>
+          <a:p>
+            <a:pPr algn="ctr"/>
+          </a:p>
+        </p:txBody>
+      </p:sp>
+      <p:sp>
+        <p:nvSpPr>
+          <p:cNvPr id="13" name="TextBox 12"/>
+          <p:cNvSpPr txBox="1"/>
+          <p:nvPr/>
+        </p:nvSpPr>
+        <p:spPr>
+          <a:xfrm>
+            <a:off x="548640" y="1673352"/>
+            <a:ext cx="1024128" cy="457200"/>
+          </a:xfrm>
+          <a:prstGeom prst="rect">
+            <a:avLst/>
+          </a:prstGeom>
+          <a:noFill/>
+        </p:spPr>
+        <p:txBody>
+          <a:bodyPr wrap="square" anchor="t"/>
+          <a:lstStyle/>
+          <a:p>
+            <a:pPr algn="l">
+              <a:spcAft>
+                <a:spcPts val="200"/>
+              </a:spcAft>
+            </a:pPr>
+            <a:r>
+              <a:rPr sz="1000" b="1">
+                <a:solidFill>
+                  <a:srgbClr val="C7000B"/>
+                </a:solidFill>
+                <a:latin typeface="Microsoft YaHei"/>
+                <a:ea typeface="Microsoft YaHei"/>
+                <a:cs typeface="Microsoft YaHei"/>
+              </a:rPr>
+              <a:t>精度</a:t>
+            </a:r>
+          </a:p>
+        </p:txBody>
+      </p:sp>
+      <p:sp>
+        <p:nvSpPr>
+          <p:cNvPr id="14" name="TextBox 13"/>
+          <p:cNvSpPr txBox="1"/>
+          <p:nvPr/>
+        </p:nvSpPr>
+        <p:spPr>
+          <a:xfrm>
+            <a:off x="1783080" y="1673352"/>
+            <a:ext cx="1755648" cy="457200"/>
+          </a:xfrm>
+          <a:prstGeom prst="rect">
+            <a:avLst/>
+          </a:prstGeom>
+          <a:noFill/>
+        </p:spPr>
+        <p:txBody>
+          <a:bodyPr wrap="square" anchor="t"/>
+          <a:lstStyle/>
+          <a:p>
+            <a:pPr algn="l">
+              <a:spcAft>
+                <a:spcPts val="200"/>
+              </a:spcAft>
+            </a:pPr>
+            <a:r>
+              <a:rPr sz="1000" b="0">
+                <a:solidFill>
+                  <a:srgbClr val="555757"/>
+                </a:solidFill>
+                <a:latin typeface="Microsoft YaHei"/>
+                <a:ea typeface="Microsoft YaHei"/>
+                <a:cs typeface="Microsoft YaHei"/>
+              </a:rPr>
+              <a:t>预测 MAE / MASE</a:t>
+            </a:r>
+          </a:p>
+        </p:txBody>
+      </p:sp>
+      <p:sp>
+        <p:nvSpPr>
+          <p:cNvPr id="15" name="TextBox 14"/>
+          <p:cNvSpPr txBox="1"/>
+          <p:nvPr/>
+        </p:nvSpPr>
+        <p:spPr>
+          <a:xfrm>
+            <a:off x="3749039" y="1673352"/>
+            <a:ext cx="2304288" cy="457200"/>
+          </a:xfrm>
+          <a:prstGeom prst="rect">
+            <a:avLst/>
+          </a:prstGeom>
+          <a:noFill/>
+        </p:spPr>
+        <p:txBody>
+          <a:bodyPr wrap="square" anchor="t"/>
+          <a:lstStyle/>
+          <a:p>
+            <a:pPr algn="l">
+              <a:spcAft>
+                <a:spcPts val="200"/>
+              </a:spcAft>
+            </a:pPr>
+            <a:r>
+              <a:rPr sz="1000" b="0">
+                <a:solidFill>
+                  <a:srgbClr val="555757"/>
+                </a:solidFill>
+                <a:latin typeface="Microsoft YaHei"/>
+                <a:ea typeface="Microsoft YaHei"/>
+                <a:cs typeface="Microsoft YaHei"/>
+              </a:rPr>
+              <a:t>TimesFM-3 零样本</a:t>
+            </a:r>
+          </a:p>
+        </p:txBody>
+      </p:sp>
+      <p:sp>
+        <p:nvSpPr>
+          <p:cNvPr id="16" name="TextBox 15"/>
+          <p:cNvSpPr txBox="1"/>
+          <p:nvPr/>
+        </p:nvSpPr>
+        <p:spPr>
+          <a:xfrm>
+            <a:off x="6263640" y="1673352"/>
+            <a:ext cx="2944368" cy="457200"/>
+          </a:xfrm>
+          <a:prstGeom prst="rect">
+            <a:avLst/>
+          </a:prstGeom>
+          <a:noFill/>
+        </p:spPr>
+        <p:txBody>
+          <a:bodyPr wrap="square" anchor="t"/>
+          <a:lstStyle/>
+          <a:p>
+            <a:pPr algn="l">
+              <a:spcAft>
+                <a:spcPts val="200"/>
+              </a:spcAft>
+            </a:pPr>
+            <a:r>
+              <a:rPr sz="1000" b="1">
+                <a:solidFill>
+                  <a:srgbClr val="1A1A1A"/>
+                </a:solidFill>
+                <a:latin typeface="Microsoft YaHei"/>
+                <a:ea typeface="Microsoft YaHei"/>
+                <a:cs typeface="Microsoft YaHei"/>
+              </a:rPr>
+              <a:t>持平或更优；自研 ≤ 0.95×基线</a:t>
+            </a:r>
+          </a:p>
+        </p:txBody>
+      </p:sp>
+      <p:sp>
+        <p:nvSpPr>
+          <p:cNvPr id="17" name="TextBox 16"/>
+          <p:cNvSpPr txBox="1"/>
+          <p:nvPr/>
+        </p:nvSpPr>
+        <p:spPr>
+          <a:xfrm>
+            <a:off x="9418319" y="1673352"/>
+            <a:ext cx="2212848" cy="457200"/>
+          </a:xfrm>
+          <a:prstGeom prst="rect">
+            <a:avLst/>
+          </a:prstGeom>
+          <a:noFill/>
+        </p:spPr>
+        <p:txBody>
+          <a:bodyPr wrap="square" anchor="t"/>
+          <a:lstStyle/>
+          <a:p>
+            <a:pPr algn="l">
+              <a:spcAft>
+                <a:spcPts val="200"/>
+              </a:spcAft>
+            </a:pPr>
+            <a:r>
+              <a:rPr sz="1000" b="0">
+                <a:solidFill>
+                  <a:srgbClr val="555757"/>
+                </a:solidFill>
+                <a:latin typeface="Microsoft YaHei"/>
+                <a:ea typeface="Microsoft YaHei"/>
+                <a:cs typeface="Microsoft YaHei"/>
+              </a:rPr>
+              <a:t>公开 benchmark</a:t>
+            </a:r>
+          </a:p>
+          <a:p>
+            <a:pPr algn="l">
+              <a:spcAft>
+                <a:spcPts val="200"/>
+              </a:spcAft>
+            </a:pPr>
+            <a:r>
+              <a:rPr sz="1000" b="0">
+                <a:solidFill>
+                  <a:srgbClr val="555757"/>
+                </a:solidFill>
+                <a:latin typeface="Microsoft YaHei"/>
+                <a:ea typeface="Microsoft YaHei"/>
+                <a:cs typeface="Microsoft YaHei"/>
+              </a:rPr>
+              <a:t>+ 自有数据集</a:t>
+            </a:r>
+          </a:p>
+        </p:txBody>
+      </p:sp>
+      <p:sp>
+        <p:nvSpPr>
+          <p:cNvPr id="18" name="Rounded Rectangle 17"/>
+          <p:cNvSpPr/>
+          <p:nvPr/>
+        </p:nvSpPr>
+        <p:spPr>
+          <a:xfrm>
+            <a:off x="457200" y="2212848"/>
+            <a:ext cx="11247120" cy="512064"/>
+          </a:xfrm>
+          <a:prstGeom prst="roundRect">
+            <a:avLst>
+              <a:gd name="adj" fmla="val 5000"/>
+            </a:avLst>
+          </a:prstGeom>
+          <a:solidFill>
+            <a:srgbClr val="F7F7F7"/>
+          </a:solidFill>
+          <a:ln w="9525">
+            <a:solidFill>
+              <a:srgbClr val="DDDDDD"/>
+            </a:solidFill>
+          </a:ln>
+        </p:spPr>
+        <p:style>
+          <a:lnRef idx="1">
+            <a:schemeClr val="accent1"/>
+          </a:lnRef>
+          <a:fillRef idx="3">
+            <a:schemeClr val="accent1"/>
+          </a:fillRef>
+          <a:effectRef idx="2">
+            <a:schemeClr val="accent1"/>
+          </a:effectRef>
+          <a:fontRef idx="minor">
+            <a:schemeClr val="lt1"/>
+          </a:fontRef>
+        </p:style>
+        <p:txBody>
+          <a:bodyPr rtlCol="0" anchor="ctr"/>
+          <a:lstStyle/>
+          <a:p>
+            <a:pPr algn="ctr"/>
+          </a:p>
+        </p:txBody>
+      </p:sp>
+      <p:sp>
+        <p:nvSpPr>
+          <p:cNvPr id="19" name="TextBox 18"/>
+          <p:cNvSpPr txBox="1"/>
+          <p:nvPr/>
+        </p:nvSpPr>
+        <p:spPr>
+          <a:xfrm>
+            <a:off x="548640" y="2240280"/>
+            <a:ext cx="1024128" cy="457200"/>
+          </a:xfrm>
+          <a:prstGeom prst="rect">
+            <a:avLst/>
+          </a:prstGeom>
+          <a:noFill/>
+        </p:spPr>
+        <p:txBody>
+          <a:bodyPr wrap="square" anchor="t"/>
+          <a:lstStyle/>
+          <a:p>
+            <a:pPr algn="l">
+              <a:spcAft>
+                <a:spcPts val="200"/>
+              </a:spcAft>
+            </a:pPr>
+            <a:r>
+              <a:rPr sz="1000" b="1">
+                <a:solidFill>
+                  <a:srgbClr val="C7000B"/>
+                </a:solidFill>
+                <a:latin typeface="Microsoft YaHei"/>
+                <a:ea typeface="Microsoft YaHei"/>
+                <a:cs typeface="Microsoft YaHei"/>
+              </a:rPr>
+              <a:t>精度</a:t>
+            </a:r>
+          </a:p>
+        </p:txBody>
+      </p:sp>
+      <p:sp>
+        <p:nvSpPr>
+          <p:cNvPr id="20" name="TextBox 19"/>
+          <p:cNvSpPr txBox="1"/>
+          <p:nvPr/>
+        </p:nvSpPr>
+        <p:spPr>
+          <a:xfrm>
+            <a:off x="1783080" y="2240280"/>
+            <a:ext cx="1755648" cy="457200"/>
+          </a:xfrm>
+          <a:prstGeom prst="rect">
+            <a:avLst/>
+          </a:prstGeom>
+          <a:noFill/>
+        </p:spPr>
+        <p:txBody>
+          <a:bodyPr wrap="square" anchor="t"/>
+          <a:lstStyle/>
+          <a:p>
+            <a:pPr algn="l">
+              <a:spcAft>
+                <a:spcPts val="200"/>
+              </a:spcAft>
+            </a:pPr>
+            <a:r>
+              <a:rPr sz="1000" b="0">
+                <a:solidFill>
+                  <a:srgbClr val="555757"/>
+                </a:solidFill>
+                <a:latin typeface="Microsoft YaHei"/>
+                <a:ea typeface="Microsoft YaHei"/>
+                <a:cs typeface="Microsoft YaHei"/>
+              </a:rPr>
+              <a:t>q10–q90 覆盖率</a:t>
+            </a:r>
+          </a:p>
+        </p:txBody>
+      </p:sp>
+      <p:sp>
+        <p:nvSpPr>
+          <p:cNvPr id="21" name="TextBox 20"/>
+          <p:cNvSpPr txBox="1"/>
+          <p:nvPr/>
+        </p:nvSpPr>
+        <p:spPr>
+          <a:xfrm>
+            <a:off x="3749039" y="2240280"/>
+            <a:ext cx="2304288" cy="457200"/>
+          </a:xfrm>
+          <a:prstGeom prst="rect">
+            <a:avLst/>
+          </a:prstGeom>
+          <a:noFill/>
+        </p:spPr>
+        <p:txBody>
+          <a:bodyPr wrap="square" anchor="t"/>
+          <a:lstStyle/>
+          <a:p>
+            <a:pPr algn="l">
+              <a:spcAft>
+                <a:spcPts val="200"/>
+              </a:spcAft>
+            </a:pPr>
+            <a:r>
+              <a:rPr sz="1000" b="0">
+                <a:solidFill>
+                  <a:srgbClr val="555757"/>
+                </a:solidFill>
+                <a:latin typeface="Microsoft YaHei"/>
+                <a:ea typeface="Microsoft YaHei"/>
+                <a:cs typeface="Microsoft YaHei"/>
+              </a:rPr>
+              <a:t>理论 80%</a:t>
+            </a:r>
+          </a:p>
+        </p:txBody>
+      </p:sp>
+      <p:sp>
+        <p:nvSpPr>
+          <p:cNvPr id="22" name="TextBox 21"/>
+          <p:cNvSpPr txBox="1"/>
+          <p:nvPr/>
+        </p:nvSpPr>
+        <p:spPr>
+          <a:xfrm>
+            <a:off x="6263640" y="2240280"/>
+            <a:ext cx="2944368" cy="457200"/>
+          </a:xfrm>
+          <a:prstGeom prst="rect">
+            <a:avLst/>
+          </a:prstGeom>
+          <a:noFill/>
+        </p:spPr>
+        <p:txBody>
+          <a:bodyPr wrap="square" anchor="t"/>
+          <a:lstStyle/>
+          <a:p>
+            <a:pPr algn="l">
+              <a:spcAft>
+                <a:spcPts val="200"/>
+              </a:spcAft>
+            </a:pPr>
+            <a:r>
+              <a:rPr sz="1000" b="1">
+                <a:solidFill>
+                  <a:srgbClr val="1A1A1A"/>
+                </a:solidFill>
+                <a:latin typeface="Microsoft YaHei"/>
+                <a:ea typeface="Microsoft YaHei"/>
+                <a:cs typeface="Microsoft YaHei"/>
+              </a:rPr>
+              <a:t>实测 80% ± 5pp</a:t>
+            </a:r>
+          </a:p>
+        </p:txBody>
+      </p:sp>
+      <p:sp>
+        <p:nvSpPr>
+          <p:cNvPr id="23" name="TextBox 22"/>
+          <p:cNvSpPr txBox="1"/>
+          <p:nvPr/>
+        </p:nvSpPr>
+        <p:spPr>
+          <a:xfrm>
+            <a:off x="9418319" y="2240280"/>
+            <a:ext cx="2212848" cy="457200"/>
+          </a:xfrm>
+          <a:prstGeom prst="rect">
+            <a:avLst/>
+          </a:prstGeom>
+          <a:noFill/>
+        </p:spPr>
+        <p:txBody>
+          <a:bodyPr wrap="square" anchor="t"/>
+          <a:lstStyle/>
+          <a:p>
+            <a:pPr algn="l">
+              <a:spcAft>
+                <a:spcPts val="200"/>
+              </a:spcAft>
+            </a:pPr>
+            <a:r>
+              <a:rPr sz="1000" b="0">
+                <a:solidFill>
+                  <a:srgbClr val="555757"/>
+                </a:solidFill>
+                <a:latin typeface="Microsoft YaHei"/>
+                <a:ea typeface="Microsoft YaHei"/>
+                <a:cs typeface="Microsoft YaHei"/>
+              </a:rPr>
+              <a:t>留出集滚动回测</a:t>
+            </a:r>
+          </a:p>
+        </p:txBody>
+      </p:sp>
+      <p:sp>
+        <p:nvSpPr>
+          <p:cNvPr id="24" name="Rounded Rectangle 23"/>
+          <p:cNvSpPr/>
+          <p:nvPr/>
+        </p:nvSpPr>
+        <p:spPr>
+          <a:xfrm>
+            <a:off x="457200" y="2779776"/>
+            <a:ext cx="11247120" cy="512064"/>
+          </a:xfrm>
+          <a:prstGeom prst="roundRect">
+            <a:avLst>
+              <a:gd name="adj" fmla="val 5000"/>
+            </a:avLst>
+          </a:prstGeom>
+          <a:solidFill>
+            <a:srgbClr val="FFFFFF"/>
+          </a:solidFill>
+          <a:ln w="9525">
+            <a:solidFill>
+              <a:srgbClr val="DDDDDD"/>
+            </a:solidFill>
+          </a:ln>
+        </p:spPr>
+        <p:style>
+          <a:lnRef idx="1">
+            <a:schemeClr val="accent1"/>
+          </a:lnRef>
+          <a:fillRef idx="3">
+            <a:schemeClr val="accent1"/>
+          </a:fillRef>
+          <a:effectRef idx="2">
+            <a:schemeClr val="accent1"/>
+          </a:effectRef>
+          <a:fontRef idx="minor">
+            <a:schemeClr val="lt1"/>
+          </a:fontRef>
+        </p:style>
+        <p:txBody>
+          <a:bodyPr rtlCol="0" anchor="ctr"/>
+          <a:lstStyle/>
+          <a:p>
+            <a:pPr algn="ctr"/>
+          </a:p>
+        </p:txBody>
+      </p:sp>
+      <p:sp>
+        <p:nvSpPr>
+          <p:cNvPr id="25" name="TextBox 24"/>
+          <p:cNvSpPr txBox="1"/>
+          <p:nvPr/>
+        </p:nvSpPr>
+        <p:spPr>
+          <a:xfrm>
+            <a:off x="548640" y="2807208"/>
+            <a:ext cx="1024128" cy="457200"/>
+          </a:xfrm>
+          <a:prstGeom prst="rect">
+            <a:avLst/>
+          </a:prstGeom>
+          <a:noFill/>
+        </p:spPr>
+        <p:txBody>
+          <a:bodyPr wrap="square" anchor="t"/>
+          <a:lstStyle/>
+          <a:p>
+            <a:pPr algn="l">
+              <a:spcAft>
+                <a:spcPts val="200"/>
+              </a:spcAft>
+            </a:pPr>
+            <a:r>
+              <a:rPr sz="1000" b="1">
+                <a:solidFill>
+                  <a:srgbClr val="C7000B"/>
+                </a:solidFill>
+                <a:latin typeface="Microsoft YaHei"/>
+                <a:ea typeface="Microsoft YaHei"/>
+                <a:cs typeface="Microsoft YaHei"/>
+              </a:rPr>
+              <a:t>精度</a:t>
+            </a:r>
+          </a:p>
+        </p:txBody>
+      </p:sp>
+      <p:sp>
+        <p:nvSpPr>
+          <p:cNvPr id="26" name="TextBox 25"/>
+          <p:cNvSpPr txBox="1"/>
+          <p:nvPr/>
+        </p:nvSpPr>
+        <p:spPr>
+          <a:xfrm>
+            <a:off x="1783080" y="2807208"/>
+            <a:ext cx="1755648" cy="457200"/>
+          </a:xfrm>
+          <a:prstGeom prst="rect">
+            <a:avLst/>
+          </a:prstGeom>
+          <a:noFill/>
+        </p:spPr>
+        <p:txBody>
+          <a:bodyPr wrap="square" anchor="t"/>
+          <a:lstStyle/>
+          <a:p>
+            <a:pPr algn="l">
+              <a:spcAft>
+                <a:spcPts val="200"/>
+              </a:spcAft>
+            </a:pPr>
+            <a:r>
+              <a:rPr sz="1000" b="0">
+                <a:solidFill>
+                  <a:srgbClr val="555757"/>
+                </a:solidFill>
+                <a:latin typeface="Microsoft YaHei"/>
+                <a:ea typeface="Microsoft YaHei"/>
+                <a:cs typeface="Microsoft YaHei"/>
+              </a:rPr>
+              <a:t>分类宏 F1</a:t>
+            </a:r>
+          </a:p>
+        </p:txBody>
+      </p:sp>
+      <p:sp>
+        <p:nvSpPr>
+          <p:cNvPr id="27" name="TextBox 26"/>
+          <p:cNvSpPr txBox="1"/>
+          <p:nvPr/>
+        </p:nvSpPr>
+        <p:spPr>
+          <a:xfrm>
+            <a:off x="3749039" y="2807208"/>
+            <a:ext cx="2304288" cy="457200"/>
+          </a:xfrm>
+          <a:prstGeom prst="rect">
+            <a:avLst/>
+          </a:prstGeom>
+          <a:noFill/>
+        </p:spPr>
+        <p:txBody>
+          <a:bodyPr wrap="square" anchor="t"/>
+          <a:lstStyle/>
+          <a:p>
+            <a:pPr algn="l">
+              <a:spcAft>
+                <a:spcPts val="200"/>
+              </a:spcAft>
+            </a:pPr>
+            <a:r>
+              <a:rPr sz="1000" b="0">
+                <a:solidFill>
+                  <a:srgbClr val="555757"/>
+                </a:solidFill>
+                <a:latin typeface="Microsoft YaHei"/>
+                <a:ea typeface="Microsoft YaHei"/>
+                <a:cs typeface="Microsoft YaHei"/>
+              </a:rPr>
+              <a:t>LIMU-BERT-X / UniTS</a:t>
+            </a:r>
+          </a:p>
+        </p:txBody>
+      </p:sp>
+      <p:sp>
+        <p:nvSpPr>
+          <p:cNvPr id="28" name="TextBox 27"/>
+          <p:cNvSpPr txBox="1"/>
+          <p:nvPr/>
+        </p:nvSpPr>
+        <p:spPr>
+          <a:xfrm>
+            <a:off x="6263640" y="2807208"/>
+            <a:ext cx="2944368" cy="457200"/>
+          </a:xfrm>
+          <a:prstGeom prst="rect">
+            <a:avLst/>
+          </a:prstGeom>
+          <a:noFill/>
+        </p:spPr>
+        <p:txBody>
+          <a:bodyPr wrap="square" anchor="t"/>
+          <a:lstStyle/>
+          <a:p>
+            <a:pPr algn="l">
+              <a:spcAft>
+                <a:spcPts val="200"/>
+              </a:spcAft>
+            </a:pPr>
+            <a:r>
+              <a:rPr sz="1000" b="1">
+                <a:solidFill>
+                  <a:srgbClr val="1A1A1A"/>
+                </a:solidFill>
+                <a:latin typeface="Microsoft YaHei"/>
+                <a:ea typeface="Microsoft YaHei"/>
+                <a:cs typeface="Microsoft YaHei"/>
+              </a:rPr>
+              <a:t>零样本 ≥ 基线−5pp；百样本 ≥ 基线</a:t>
+            </a:r>
+          </a:p>
+        </p:txBody>
+      </p:sp>
+      <p:sp>
+        <p:nvSpPr>
+          <p:cNvPr id="29" name="TextBox 28"/>
+          <p:cNvSpPr txBox="1"/>
+          <p:nvPr/>
+        </p:nvSpPr>
+        <p:spPr>
+          <a:xfrm>
+            <a:off x="9418319" y="2807208"/>
+            <a:ext cx="2212848" cy="457200"/>
+          </a:xfrm>
+          <a:prstGeom prst="rect">
+            <a:avLst/>
+          </a:prstGeom>
+          <a:noFill/>
+        </p:spPr>
+        <p:txBody>
+          <a:bodyPr wrap="square" anchor="t"/>
+          <a:lstStyle/>
+          <a:p>
+            <a:pPr algn="l">
+              <a:spcAft>
+                <a:spcPts val="200"/>
+              </a:spcAft>
+            </a:pPr>
+            <a:r>
+              <a:rPr sz="1000" b="0">
+                <a:solidFill>
+                  <a:srgbClr val="555757"/>
+                </a:solidFill>
+                <a:latin typeface="Microsoft YaHei"/>
+                <a:ea typeface="Microsoft YaHei"/>
+                <a:cs typeface="Microsoft YaHei"/>
+              </a:rPr>
+              <a:t>公开集 + 场景注册集</a:t>
+            </a:r>
+          </a:p>
+        </p:txBody>
+      </p:sp>
+      <p:sp>
+        <p:nvSpPr>
+          <p:cNvPr id="30" name="Rounded Rectangle 29"/>
+          <p:cNvSpPr/>
+          <p:nvPr/>
+        </p:nvSpPr>
+        <p:spPr>
+          <a:xfrm>
+            <a:off x="457200" y="3346704"/>
+            <a:ext cx="11247120" cy="512064"/>
+          </a:xfrm>
+          <a:prstGeom prst="roundRect">
+            <a:avLst>
+              <a:gd name="adj" fmla="val 5000"/>
+            </a:avLst>
+          </a:prstGeom>
+          <a:solidFill>
+            <a:srgbClr val="F7F7F7"/>
+          </a:solidFill>
+          <a:ln w="9525">
+            <a:solidFill>
+              <a:srgbClr val="DDDDDD"/>
+            </a:solidFill>
+          </a:ln>
+        </p:spPr>
+        <p:style>
+          <a:lnRef idx="1">
+            <a:schemeClr val="accent1"/>
+          </a:lnRef>
+          <a:fillRef idx="3">
+            <a:schemeClr val="accent1"/>
+          </a:fillRef>
+          <a:effectRef idx="2">
+            <a:schemeClr val="accent1"/>
+          </a:effectRef>
+          <a:fontRef idx="minor">
+            <a:schemeClr val="lt1"/>
+          </a:fontRef>
+        </p:style>
+        <p:txBody>
+          <a:bodyPr rtlCol="0" anchor="ctr"/>
+          <a:lstStyle/>
+          <a:p>
+            <a:pPr algn="ctr"/>
+          </a:p>
+        </p:txBody>
+      </p:sp>
+      <p:sp>
+        <p:nvSpPr>
+          <p:cNvPr id="31" name="TextBox 30"/>
+          <p:cNvSpPr txBox="1"/>
+          <p:nvPr/>
+        </p:nvSpPr>
+        <p:spPr>
+          <a:xfrm>
+            <a:off x="548640" y="3374136"/>
+            <a:ext cx="1024128" cy="457200"/>
+          </a:xfrm>
+          <a:prstGeom prst="rect">
+            <a:avLst/>
+          </a:prstGeom>
+          <a:noFill/>
+        </p:spPr>
+        <p:txBody>
+          <a:bodyPr wrap="square" anchor="t"/>
+          <a:lstStyle/>
+          <a:p>
+            <a:pPr algn="l">
+              <a:spcAft>
+                <a:spcPts val="200"/>
+              </a:spcAft>
+            </a:pPr>
+            <a:r>
+              <a:rPr sz="1000" b="1">
+                <a:solidFill>
+                  <a:srgbClr val="C7000B"/>
+                </a:solidFill>
+                <a:latin typeface="Microsoft YaHei"/>
+                <a:ea typeface="Microsoft YaHei"/>
+                <a:cs typeface="Microsoft YaHei"/>
+              </a:rPr>
+              <a:t>泛化</a:t>
+            </a:r>
+          </a:p>
+        </p:txBody>
+      </p:sp>
+      <p:sp>
+        <p:nvSpPr>
+          <p:cNvPr id="32" name="TextBox 31"/>
+          <p:cNvSpPr txBox="1"/>
+          <p:nvPr/>
+        </p:nvSpPr>
+        <p:spPr>
+          <a:xfrm>
+            <a:off x="1783080" y="3374136"/>
+            <a:ext cx="1755648" cy="457200"/>
+          </a:xfrm>
+          <a:prstGeom prst="rect">
+            <a:avLst/>
+          </a:prstGeom>
+          <a:noFill/>
+        </p:spPr>
+        <p:txBody>
+          <a:bodyPr wrap="square" anchor="t"/>
+          <a:lstStyle/>
+          <a:p>
+            <a:pPr algn="l">
+              <a:spcAft>
+                <a:spcPts val="200"/>
+              </a:spcAft>
+            </a:pPr>
+            <a:r>
+              <a:rPr sz="1000" b="0">
+                <a:solidFill>
+                  <a:srgbClr val="555757"/>
+                </a:solidFill>
+                <a:latin typeface="Microsoft YaHei"/>
+                <a:ea typeface="Microsoft YaHei"/>
+                <a:cs typeface="Microsoft YaHei"/>
+              </a:rPr>
+              <a:t>跨设备/用户衰减</a:t>
+            </a:r>
+          </a:p>
+        </p:txBody>
+      </p:sp>
+      <p:sp>
+        <p:nvSpPr>
+          <p:cNvPr id="33" name="TextBox 32"/>
+          <p:cNvSpPr txBox="1"/>
+          <p:nvPr/>
+        </p:nvSpPr>
+        <p:spPr>
+          <a:xfrm>
+            <a:off x="3749039" y="3374136"/>
+            <a:ext cx="2304288" cy="457200"/>
+          </a:xfrm>
+          <a:prstGeom prst="rect">
+            <a:avLst/>
+          </a:prstGeom>
+          <a:noFill/>
+        </p:spPr>
+        <p:txBody>
+          <a:bodyPr wrap="square" anchor="t"/>
+          <a:lstStyle/>
+          <a:p>
+            <a:pPr algn="l">
+              <a:spcAft>
+                <a:spcPts val="200"/>
+              </a:spcAft>
+            </a:pPr>
+            <a:r>
+              <a:rPr sz="1000" b="0">
+                <a:solidFill>
+                  <a:srgbClr val="555757"/>
+                </a:solidFill>
+                <a:latin typeface="Microsoft YaHei"/>
+                <a:ea typeface="Microsoft YaHei"/>
+                <a:cs typeface="Microsoft YaHei"/>
+              </a:rPr>
+              <a:t>单设备独立优化</a:t>
+            </a:r>
+          </a:p>
+        </p:txBody>
+      </p:sp>
+      <p:sp>
+        <p:nvSpPr>
+          <p:cNvPr id="34" name="TextBox 33"/>
+          <p:cNvSpPr txBox="1"/>
+          <p:nvPr/>
+        </p:nvSpPr>
+        <p:spPr>
+          <a:xfrm>
+            <a:off x="6263640" y="3374136"/>
+            <a:ext cx="2944368" cy="457200"/>
+          </a:xfrm>
+          <a:prstGeom prst="rect">
+            <a:avLst/>
+          </a:prstGeom>
+          <a:noFill/>
+        </p:spPr>
+        <p:txBody>
+          <a:bodyPr wrap="square" anchor="t"/>
+          <a:lstStyle/>
+          <a:p>
+            <a:pPr algn="l">
+              <a:spcAft>
+                <a:spcPts val="200"/>
+              </a:spcAft>
+            </a:pPr>
+            <a:r>
+              <a:rPr sz="1000" b="1">
+                <a:solidFill>
+                  <a:srgbClr val="1A1A1A"/>
+                </a:solidFill>
+                <a:latin typeface="Microsoft YaHei"/>
+                <a:ea typeface="Microsoft YaHei"/>
+                <a:cs typeface="Microsoft YaHei"/>
+              </a:rPr>
+              <a:t>≤ 5pp；Gen2 后 ≤ 2pp</a:t>
+            </a:r>
+          </a:p>
+        </p:txBody>
+      </p:sp>
+      <p:sp>
+        <p:nvSpPr>
+          <p:cNvPr id="35" name="TextBox 34"/>
+          <p:cNvSpPr txBox="1"/>
+          <p:nvPr/>
+        </p:nvSpPr>
+        <p:spPr>
+          <a:xfrm>
+            <a:off x="9418319" y="3374136"/>
+            <a:ext cx="2212848" cy="457200"/>
+          </a:xfrm>
+          <a:prstGeom prst="rect">
+            <a:avLst/>
+          </a:prstGeom>
+          <a:noFill/>
+        </p:spPr>
+        <p:txBody>
+          <a:bodyPr wrap="square" anchor="t"/>
+          <a:lstStyle/>
+          <a:p>
+            <a:pPr algn="l">
+              <a:spcAft>
+                <a:spcPts val="200"/>
+              </a:spcAft>
+            </a:pPr>
+            <a:r>
+              <a:rPr sz="1000" b="0">
+                <a:solidFill>
+                  <a:srgbClr val="555757"/>
+                </a:solidFill>
+                <a:latin typeface="Microsoft YaHei"/>
+                <a:ea typeface="Microsoft YaHei"/>
+                <a:cs typeface="Microsoft YaHei"/>
+              </a:rPr>
+              <a:t>留一交叉验证</a:t>
+            </a:r>
+          </a:p>
+        </p:txBody>
+      </p:sp>
+      <p:sp>
+        <p:nvSpPr>
+          <p:cNvPr id="36" name="Rounded Rectangle 35"/>
+          <p:cNvSpPr/>
+          <p:nvPr/>
+        </p:nvSpPr>
+        <p:spPr>
+          <a:xfrm>
+            <a:off x="457200" y="3913632"/>
+            <a:ext cx="11247120" cy="512064"/>
+          </a:xfrm>
+          <a:prstGeom prst="roundRect">
+            <a:avLst>
+              <a:gd name="adj" fmla="val 5000"/>
+            </a:avLst>
+          </a:prstGeom>
+          <a:solidFill>
+            <a:srgbClr val="FFFFFF"/>
+          </a:solidFill>
+          <a:ln w="9525">
+            <a:solidFill>
+              <a:srgbClr val="DDDDDD"/>
+            </a:solidFill>
+          </a:ln>
+        </p:spPr>
+        <p:style>
+          <a:lnRef idx="1">
+            <a:schemeClr val="accent1"/>
+          </a:lnRef>
+          <a:fillRef idx="3">
+            <a:schemeClr val="accent1"/>
+          </a:fillRef>
+          <a:effectRef idx="2">
+            <a:schemeClr val="accent1"/>
+          </a:effectRef>
+          <a:fontRef idx="minor">
+            <a:schemeClr val="lt1"/>
+          </a:fontRef>
+        </p:style>
+        <p:txBody>
+          <a:bodyPr rtlCol="0" anchor="ctr"/>
+          <a:lstStyle/>
+          <a:p>
+            <a:pPr algn="ctr"/>
+          </a:p>
+        </p:txBody>
+      </p:sp>
+      <p:sp>
+        <p:nvSpPr>
+          <p:cNvPr id="37" name="TextBox 36"/>
+          <p:cNvSpPr txBox="1"/>
+          <p:nvPr/>
+        </p:nvSpPr>
+        <p:spPr>
+          <a:xfrm>
+            <a:off x="548640" y="3941064"/>
+            <a:ext cx="1024128" cy="457200"/>
+          </a:xfrm>
+          <a:prstGeom prst="rect">
+            <a:avLst/>
+          </a:prstGeom>
+          <a:noFill/>
+        </p:spPr>
+        <p:txBody>
+          <a:bodyPr wrap="square" anchor="t"/>
+          <a:lstStyle/>
+          <a:p>
+            <a:pPr algn="l">
+              <a:spcAft>
+                <a:spcPts val="200"/>
+              </a:spcAft>
+            </a:pPr>
+            <a:r>
+              <a:rPr sz="1000" b="1">
+                <a:solidFill>
+                  <a:srgbClr val="C7000B"/>
+                </a:solidFill>
+                <a:latin typeface="Microsoft YaHei"/>
+                <a:ea typeface="Microsoft YaHei"/>
+                <a:cs typeface="Microsoft YaHei"/>
+              </a:rPr>
+              <a:t>时延</a:t>
+            </a:r>
+          </a:p>
+        </p:txBody>
+      </p:sp>
+      <p:sp>
+        <p:nvSpPr>
+          <p:cNvPr id="38" name="TextBox 37"/>
+          <p:cNvSpPr txBox="1"/>
+          <p:nvPr/>
+        </p:nvSpPr>
+        <p:spPr>
+          <a:xfrm>
+            <a:off x="1783080" y="3941064"/>
+            <a:ext cx="1755648" cy="457200"/>
+          </a:xfrm>
+          <a:prstGeom prst="rect">
+            <a:avLst/>
+          </a:prstGeom>
+          <a:noFill/>
+        </p:spPr>
+        <p:txBody>
+          <a:bodyPr wrap="square" anchor="t"/>
+          <a:lstStyle/>
+          <a:p>
+            <a:pPr algn="l">
+              <a:spcAft>
+                <a:spcPts val="200"/>
+              </a:spcAft>
+            </a:pPr>
+            <a:r>
+              <a:rPr sz="1000" b="0">
+                <a:solidFill>
+                  <a:srgbClr val="555757"/>
+                </a:solidFill>
+                <a:latin typeface="Microsoft YaHei"/>
+                <a:ea typeface="Microsoft YaHei"/>
+                <a:cs typeface="Microsoft YaHei"/>
+              </a:rPr>
+              <a:t>端侧 p95</a:t>
+            </a:r>
+          </a:p>
+        </p:txBody>
+      </p:sp>
+      <p:sp>
+        <p:nvSpPr>
+          <p:cNvPr id="39" name="TextBox 38"/>
+          <p:cNvSpPr txBox="1"/>
+          <p:nvPr/>
+        </p:nvSpPr>
+        <p:spPr>
+          <a:xfrm>
+            <a:off x="3749039" y="3941064"/>
+            <a:ext cx="2304288" cy="457200"/>
+          </a:xfrm>
+          <a:prstGeom prst="rect">
+            <a:avLst/>
+          </a:prstGeom>
+          <a:noFill/>
+        </p:spPr>
+        <p:txBody>
+          <a:bodyPr wrap="square" anchor="t"/>
+          <a:lstStyle/>
+          <a:p>
+            <a:pPr algn="l">
+              <a:spcAft>
+                <a:spcPts val="200"/>
+              </a:spcAft>
+            </a:pPr>
+            <a:r>
+              <a:rPr sz="1000" b="0">
+                <a:solidFill>
+                  <a:srgbClr val="555757"/>
+                </a:solidFill>
+                <a:latin typeface="Microsoft YaHei"/>
+                <a:ea typeface="Microsoft YaHei"/>
+                <a:cs typeface="Microsoft YaHei"/>
+              </a:rPr>
+              <a:t>TimesFM-3：M4 Max 11ms</a:t>
+            </a:r>
+          </a:p>
+        </p:txBody>
+      </p:sp>
+      <p:sp>
+        <p:nvSpPr>
+          <p:cNvPr id="40" name="TextBox 39"/>
+          <p:cNvSpPr txBox="1"/>
+          <p:nvPr/>
+        </p:nvSpPr>
+        <p:spPr>
+          <a:xfrm>
+            <a:off x="6263640" y="3941064"/>
+            <a:ext cx="2944368" cy="457200"/>
+          </a:xfrm>
+          <a:prstGeom prst="rect">
+            <a:avLst/>
+          </a:prstGeom>
+          <a:noFill/>
+        </p:spPr>
+        <p:txBody>
+          <a:bodyPr wrap="square" anchor="t"/>
+          <a:lstStyle/>
+          <a:p>
+            <a:pPr algn="l">
+              <a:spcAft>
+                <a:spcPts val="200"/>
+              </a:spcAft>
+            </a:pPr>
+            <a:r>
+              <a:rPr sz="1000" b="1">
+                <a:solidFill>
+                  <a:srgbClr val="1A1A1A"/>
+                </a:solidFill>
+                <a:latin typeface="Microsoft YaHei"/>
+                <a:ea typeface="Microsoft YaHei"/>
+                <a:cs typeface="Microsoft YaHei"/>
+              </a:rPr>
+              <a:t>手机 ≤ 30ms；手表 ≤ 50ms</a:t>
+            </a:r>
+          </a:p>
+        </p:txBody>
+      </p:sp>
+      <p:sp>
+        <p:nvSpPr>
+          <p:cNvPr id="41" name="TextBox 40"/>
+          <p:cNvSpPr txBox="1"/>
+          <p:nvPr/>
+        </p:nvSpPr>
+        <p:spPr>
+          <a:xfrm>
+            <a:off x="9418319" y="3941064"/>
+            <a:ext cx="2212848" cy="457200"/>
+          </a:xfrm>
+          <a:prstGeom prst="rect">
+            <a:avLst/>
+          </a:prstGeom>
+          <a:noFill/>
+        </p:spPr>
+        <p:txBody>
+          <a:bodyPr wrap="square" anchor="t"/>
+          <a:lstStyle/>
+          <a:p>
+            <a:pPr algn="l">
+              <a:spcAft>
+                <a:spcPts val="200"/>
+              </a:spcAft>
+            </a:pPr>
+            <a:r>
+              <a:rPr sz="1000" b="0">
+                <a:solidFill>
+                  <a:srgbClr val="555757"/>
+                </a:solidFill>
+                <a:latin typeface="Microsoft YaHei"/>
+                <a:ea typeface="Microsoft YaHei"/>
+                <a:cs typeface="Microsoft YaHei"/>
+              </a:rPr>
+              <a:t>真机 profiling</a:t>
+            </a:r>
+          </a:p>
+        </p:txBody>
+      </p:sp>
+      <p:sp>
+        <p:nvSpPr>
+          <p:cNvPr id="42" name="Rounded Rectangle 41"/>
+          <p:cNvSpPr/>
+          <p:nvPr/>
+        </p:nvSpPr>
+        <p:spPr>
+          <a:xfrm>
+            <a:off x="457200" y="4480560"/>
+            <a:ext cx="11247120" cy="512064"/>
+          </a:xfrm>
+          <a:prstGeom prst="roundRect">
+            <a:avLst>
+              <a:gd name="adj" fmla="val 5000"/>
+            </a:avLst>
+          </a:prstGeom>
+          <a:solidFill>
+            <a:srgbClr val="F7F7F7"/>
+          </a:solidFill>
+          <a:ln w="9525">
+            <a:solidFill>
+              <a:srgbClr val="DDDDDD"/>
+            </a:solidFill>
+          </a:ln>
+        </p:spPr>
+        <p:style>
+          <a:lnRef idx="1">
+            <a:schemeClr val="accent1"/>
+          </a:lnRef>
+          <a:fillRef idx="3">
+            <a:schemeClr val="accent1"/>
+          </a:fillRef>
+          <a:effectRef idx="2">
+            <a:schemeClr val="accent1"/>
+          </a:effectRef>
+          <a:fontRef idx="minor">
+            <a:schemeClr val="lt1"/>
+          </a:fontRef>
+        </p:style>
+        <p:txBody>
+          <a:bodyPr rtlCol="0" anchor="ctr"/>
+          <a:lstStyle/>
+          <a:p>
+            <a:pPr algn="ctr"/>
+          </a:p>
+        </p:txBody>
+      </p:sp>
+      <p:sp>
+        <p:nvSpPr>
+          <p:cNvPr id="43" name="TextBox 42"/>
+          <p:cNvSpPr txBox="1"/>
+          <p:nvPr/>
+        </p:nvSpPr>
+        <p:spPr>
+          <a:xfrm>
+            <a:off x="548640" y="4507992"/>
+            <a:ext cx="1024128" cy="457200"/>
+          </a:xfrm>
+          <a:prstGeom prst="rect">
+            <a:avLst/>
+          </a:prstGeom>
+          <a:noFill/>
+        </p:spPr>
+        <p:txBody>
+          <a:bodyPr wrap="square" anchor="t"/>
+          <a:lstStyle/>
+          <a:p>
+            <a:pPr algn="l">
+              <a:spcAft>
+                <a:spcPts val="200"/>
+              </a:spcAft>
+            </a:pPr>
+            <a:r>
+              <a:rPr sz="1000" b="1">
+                <a:solidFill>
+                  <a:srgbClr val="C7000B"/>
+                </a:solidFill>
+                <a:latin typeface="Microsoft YaHei"/>
+                <a:ea typeface="Microsoft YaHei"/>
+                <a:cs typeface="Microsoft YaHei"/>
+              </a:rPr>
+              <a:t>功耗</a:t>
+            </a:r>
+          </a:p>
+        </p:txBody>
+      </p:sp>
+      <p:sp>
+        <p:nvSpPr>
+          <p:cNvPr id="44" name="TextBox 43"/>
+          <p:cNvSpPr txBox="1"/>
+          <p:nvPr/>
+        </p:nvSpPr>
+        <p:spPr>
+          <a:xfrm>
+            <a:off x="1783080" y="4507992"/>
+            <a:ext cx="1755648" cy="457200"/>
+          </a:xfrm>
+          <a:prstGeom prst="rect">
+            <a:avLst/>
+          </a:prstGeom>
+          <a:noFill/>
+        </p:spPr>
+        <p:txBody>
+          <a:bodyPr wrap="square" anchor="t"/>
+          <a:lstStyle/>
+          <a:p>
+            <a:pPr algn="l">
+              <a:spcAft>
+                <a:spcPts val="200"/>
+              </a:spcAft>
+            </a:pPr>
+            <a:r>
+              <a:rPr sz="1000" b="0">
+                <a:solidFill>
+                  <a:srgbClr val="555757"/>
+                </a:solidFill>
+                <a:latin typeface="Microsoft YaHei"/>
+                <a:ea typeface="Microsoft YaHei"/>
+                <a:cs typeface="Microsoft YaHei"/>
+              </a:rPr>
+              <a:t>千次推理能耗</a:t>
+            </a:r>
+          </a:p>
+        </p:txBody>
+      </p:sp>
+      <p:sp>
+        <p:nvSpPr>
+          <p:cNvPr id="45" name="TextBox 44"/>
+          <p:cNvSpPr txBox="1"/>
+          <p:nvPr/>
+        </p:nvSpPr>
+        <p:spPr>
+          <a:xfrm>
+            <a:off x="3749039" y="4507992"/>
+            <a:ext cx="2304288" cy="457200"/>
+          </a:xfrm>
+          <a:prstGeom prst="rect">
+            <a:avLst/>
+          </a:prstGeom>
+          <a:noFill/>
+        </p:spPr>
+        <p:txBody>
+          <a:bodyPr wrap="square" anchor="t"/>
+          <a:lstStyle/>
+          <a:p>
+            <a:pPr algn="l">
+              <a:spcAft>
+                <a:spcPts val="200"/>
+              </a:spcAft>
+            </a:pPr>
+            <a:r>
+              <a:rPr sz="1000" b="0">
+                <a:solidFill>
+                  <a:srgbClr val="555757"/>
+                </a:solidFill>
+                <a:latin typeface="Microsoft YaHei"/>
+                <a:ea typeface="Microsoft YaHei"/>
+                <a:cs typeface="Microsoft YaHei"/>
+              </a:rPr>
+              <a:t>—（Gen3 考核）</a:t>
+            </a:r>
+          </a:p>
+        </p:txBody>
+      </p:sp>
+      <p:sp>
+        <p:nvSpPr>
+          <p:cNvPr id="46" name="TextBox 45"/>
+          <p:cNvSpPr txBox="1"/>
+          <p:nvPr/>
+        </p:nvSpPr>
+        <p:spPr>
+          <a:xfrm>
+            <a:off x="6263640" y="4507992"/>
+            <a:ext cx="2944368" cy="457200"/>
+          </a:xfrm>
+          <a:prstGeom prst="rect">
+            <a:avLst/>
+          </a:prstGeom>
+          <a:noFill/>
+        </p:spPr>
+        <p:txBody>
+          <a:bodyPr wrap="square" anchor="t"/>
+          <a:lstStyle/>
+          <a:p>
+            <a:pPr algn="l">
+              <a:spcAft>
+                <a:spcPts val="200"/>
+              </a:spcAft>
+            </a:pPr>
+            <a:r>
+              <a:rPr sz="1000" b="1">
+                <a:solidFill>
+                  <a:srgbClr val="1A1A1A"/>
+                </a:solidFill>
+                <a:latin typeface="Microsoft YaHei"/>
+                <a:ea typeface="Microsoft YaHei"/>
+                <a:cs typeface="Microsoft YaHei"/>
+              </a:rPr>
+              <a:t>整机续航影响 &lt; 1%</a:t>
+            </a:r>
+          </a:p>
+        </p:txBody>
+      </p:sp>
+      <p:sp>
+        <p:nvSpPr>
+          <p:cNvPr id="47" name="TextBox 46"/>
+          <p:cNvSpPr txBox="1"/>
+          <p:nvPr/>
+        </p:nvSpPr>
+        <p:spPr>
+          <a:xfrm>
+            <a:off x="9418319" y="4507992"/>
+            <a:ext cx="2212848" cy="457200"/>
+          </a:xfrm>
+          <a:prstGeom prst="rect">
+            <a:avLst/>
+          </a:prstGeom>
+          <a:noFill/>
+        </p:spPr>
+        <p:txBody>
+          <a:bodyPr wrap="square" anchor="t"/>
+          <a:lstStyle/>
+          <a:p>
+            <a:pPr algn="l">
+              <a:spcAft>
+                <a:spcPts val="200"/>
+              </a:spcAft>
+            </a:pPr>
+            <a:r>
+              <a:rPr sz="1000" b="0">
+                <a:solidFill>
+                  <a:srgbClr val="555757"/>
+                </a:solidFill>
+                <a:latin typeface="Microsoft YaHei"/>
+                <a:ea typeface="Microsoft YaHei"/>
+                <a:cs typeface="Microsoft YaHei"/>
+              </a:rPr>
+              <a:t>功耗仪实测</a:t>
+            </a:r>
+          </a:p>
+        </p:txBody>
+      </p:sp>
+      <p:sp>
+        <p:nvSpPr>
+          <p:cNvPr id="48" name="Rounded Rectangle 47"/>
+          <p:cNvSpPr/>
+          <p:nvPr/>
+        </p:nvSpPr>
+        <p:spPr>
+          <a:xfrm>
+            <a:off x="457200" y="5047488"/>
+            <a:ext cx="11247120" cy="512064"/>
+          </a:xfrm>
+          <a:prstGeom prst="roundRect">
+            <a:avLst>
+              <a:gd name="adj" fmla="val 5000"/>
+            </a:avLst>
+          </a:prstGeom>
+          <a:solidFill>
+            <a:srgbClr val="FFFFFF"/>
+          </a:solidFill>
+          <a:ln w="9525">
+            <a:solidFill>
+              <a:srgbClr val="DDDDDD"/>
+            </a:solidFill>
+          </a:ln>
+        </p:spPr>
+        <p:style>
+          <a:lnRef idx="1">
+            <a:schemeClr val="accent1"/>
+          </a:lnRef>
+          <a:fillRef idx="3">
+            <a:schemeClr val="accent1"/>
+          </a:fillRef>
+          <a:effectRef idx="2">
+            <a:schemeClr val="accent1"/>
+          </a:effectRef>
+          <a:fontRef idx="minor">
+            <a:schemeClr val="lt1"/>
+          </a:fontRef>
+        </p:style>
+        <p:txBody>
+          <a:bodyPr rtlCol="0" anchor="ctr"/>
+          <a:lstStyle/>
+          <a:p>
+            <a:pPr algn="ctr"/>
+          </a:p>
+        </p:txBody>
+      </p:sp>
+      <p:sp>
+        <p:nvSpPr>
+          <p:cNvPr id="49" name="TextBox 48"/>
+          <p:cNvSpPr txBox="1"/>
+          <p:nvPr/>
+        </p:nvSpPr>
+        <p:spPr>
+          <a:xfrm>
+            <a:off x="548640" y="5074920"/>
+            <a:ext cx="1024128" cy="457200"/>
+          </a:xfrm>
+          <a:prstGeom prst="rect">
+            <a:avLst/>
+          </a:prstGeom>
+          <a:noFill/>
+        </p:spPr>
+        <p:txBody>
+          <a:bodyPr wrap="square" anchor="t"/>
+          <a:lstStyle/>
+          <a:p>
+            <a:pPr algn="l">
+              <a:spcAft>
+                <a:spcPts val="200"/>
+              </a:spcAft>
+            </a:pPr>
+            <a:r>
+              <a:rPr sz="1000" b="1">
+                <a:solidFill>
+                  <a:srgbClr val="C7000B"/>
+                </a:solidFill>
+                <a:latin typeface="Microsoft YaHei"/>
+                <a:ea typeface="Microsoft YaHei"/>
+                <a:cs typeface="Microsoft YaHei"/>
+              </a:rPr>
+              <a:t>工程</a:t>
+            </a:r>
+          </a:p>
+        </p:txBody>
+      </p:sp>
+      <p:sp>
+        <p:nvSpPr>
+          <p:cNvPr id="50" name="TextBox 49"/>
+          <p:cNvSpPr txBox="1"/>
+          <p:nvPr/>
+        </p:nvSpPr>
+        <p:spPr>
+          <a:xfrm>
+            <a:off x="1783080" y="5074920"/>
+            <a:ext cx="1755648" cy="457200"/>
+          </a:xfrm>
+          <a:prstGeom prst="rect">
+            <a:avLst/>
+          </a:prstGeom>
+          <a:noFill/>
+        </p:spPr>
+        <p:txBody>
+          <a:bodyPr wrap="square" anchor="t"/>
+          <a:lstStyle/>
+          <a:p>
+            <a:pPr algn="l">
+              <a:spcAft>
+                <a:spcPts val="200"/>
+              </a:spcAft>
+            </a:pPr>
+            <a:r>
+              <a:rPr sz="1000" b="0">
+                <a:solidFill>
+                  <a:srgbClr val="555757"/>
+                </a:solidFill>
+                <a:latin typeface="Microsoft YaHei"/>
+                <a:ea typeface="Microsoft YaHei"/>
+                <a:cs typeface="Microsoft YaHei"/>
+              </a:rPr>
+              <a:t>拒收率 / 兼容性</a:t>
+            </a:r>
+          </a:p>
+        </p:txBody>
+      </p:sp>
+      <p:sp>
+        <p:nvSpPr>
+          <p:cNvPr id="51" name="TextBox 50"/>
+          <p:cNvSpPr txBox="1"/>
+          <p:nvPr/>
+        </p:nvSpPr>
+        <p:spPr>
+          <a:xfrm>
+            <a:off x="3749039" y="5074920"/>
+            <a:ext cx="2304288" cy="457200"/>
+          </a:xfrm>
+          <a:prstGeom prst="rect">
+            <a:avLst/>
+          </a:prstGeom>
+          <a:noFill/>
+        </p:spPr>
+        <p:txBody>
+          <a:bodyPr wrap="square" anchor="t"/>
+          <a:lstStyle/>
+          <a:p>
+            <a:pPr algn="l">
+              <a:spcAft>
+                <a:spcPts val="200"/>
+              </a:spcAft>
+            </a:pPr>
+            <a:r>
+              <a:rPr sz="1000" b="0">
+                <a:solidFill>
+                  <a:srgbClr val="555757"/>
+                </a:solidFill>
+                <a:latin typeface="Microsoft YaHei"/>
+                <a:ea typeface="Microsoft YaHei"/>
+                <a:cs typeface="Microsoft YaHei"/>
+              </a:rPr>
+              <a:t>—</a:t>
+            </a:r>
+          </a:p>
+        </p:txBody>
+      </p:sp>
+      <p:sp>
+        <p:nvSpPr>
+          <p:cNvPr id="52" name="TextBox 51"/>
+          <p:cNvSpPr txBox="1"/>
+          <p:nvPr/>
+        </p:nvSpPr>
+        <p:spPr>
+          <a:xfrm>
+            <a:off x="6263640" y="5074920"/>
+            <a:ext cx="2944368" cy="457200"/>
+          </a:xfrm>
+          <a:prstGeom prst="rect">
+            <a:avLst/>
+          </a:prstGeom>
+          <a:noFill/>
+        </p:spPr>
+        <p:txBody>
+          <a:bodyPr wrap="square" anchor="t"/>
+          <a:lstStyle/>
+          <a:p>
+            <a:pPr algn="l">
+              <a:spcAft>
+                <a:spcPts val="200"/>
+              </a:spcAft>
+            </a:pPr>
+            <a:r>
+              <a:rPr sz="1000" b="1">
+                <a:solidFill>
+                  <a:srgbClr val="1A1A1A"/>
+                </a:solidFill>
+                <a:latin typeface="Microsoft YaHei"/>
+                <a:ea typeface="Microsoft YaHei"/>
+                <a:cs typeface="Microsoft YaHei"/>
+              </a:rPr>
+              <a:t>版本升级不破坏旧调用</a:t>
+            </a:r>
+          </a:p>
+        </p:txBody>
+      </p:sp>
+      <p:sp>
+        <p:nvSpPr>
+          <p:cNvPr id="53" name="TextBox 52"/>
+          <p:cNvSpPr txBox="1"/>
+          <p:nvPr/>
+        </p:nvSpPr>
+        <p:spPr>
+          <a:xfrm>
+            <a:off x="9418319" y="5074920"/>
+            <a:ext cx="2212848" cy="457200"/>
+          </a:xfrm>
+          <a:prstGeom prst="rect">
+            <a:avLst/>
+          </a:prstGeom>
+          <a:noFill/>
+        </p:spPr>
+        <p:txBody>
+          <a:bodyPr wrap="square" anchor="t"/>
+          <a:lstStyle/>
+          <a:p>
+            <a:pPr algn="l">
+              <a:spcAft>
+                <a:spcPts val="200"/>
+              </a:spcAft>
+            </a:pPr>
+            <a:r>
+              <a:rPr sz="1000" b="0">
+                <a:solidFill>
+                  <a:srgbClr val="555757"/>
+                </a:solidFill>
+                <a:latin typeface="Microsoft YaHei"/>
+                <a:ea typeface="Microsoft YaHei"/>
+                <a:cs typeface="Microsoft YaHei"/>
+              </a:rPr>
+              <a:t>工具链自动化</a:t>
+            </a:r>
+          </a:p>
+        </p:txBody>
+      </p:sp>
+      <p:sp>
+        <p:nvSpPr>
+          <p:cNvPr id="54" name="Rounded Rectangle 53"/>
+          <p:cNvSpPr/>
+          <p:nvPr/>
+        </p:nvSpPr>
+        <p:spPr>
+          <a:xfrm>
+            <a:off x="457200" y="5715000"/>
+            <a:ext cx="11247120" cy="685800"/>
+          </a:xfrm>
+          <a:prstGeom prst="roundRect">
+            <a:avLst>
+              <a:gd name="adj" fmla="val 5000"/>
+            </a:avLst>
+          </a:prstGeom>
+          <a:solidFill>
+            <a:srgbClr val="F7F7F7"/>
+          </a:solidFill>
+          <a:ln w="9525">
+            <a:solidFill>
+              <a:srgbClr val="DDDDDD"/>
+            </a:solidFill>
+          </a:ln>
+        </p:spPr>
+        <p:style>
+          <a:lnRef idx="1">
+            <a:schemeClr val="accent1"/>
+          </a:lnRef>
+          <a:fillRef idx="3">
+            <a:schemeClr val="accent1"/>
+          </a:fillRef>
+          <a:effectRef idx="2">
+            <a:schemeClr val="accent1"/>
+          </a:effectRef>
+          <a:fontRef idx="minor">
+            <a:schemeClr val="lt1"/>
+          </a:fontRef>
+        </p:style>
+        <p:txBody>
+          <a:bodyPr rtlCol="0" anchor="ctr"/>
+          <a:lstStyle/>
+          <a:p>
+            <a:pPr algn="ctr"/>
+          </a:p>
+        </p:txBody>
+      </p:sp>
+      <p:sp>
+        <p:nvSpPr>
+          <p:cNvPr id="55" name="TextBox 54"/>
+          <p:cNvSpPr txBox="1"/>
+          <p:nvPr/>
+        </p:nvSpPr>
+        <p:spPr>
+          <a:xfrm>
+            <a:off x="640080" y="5806440"/>
+            <a:ext cx="10881360" cy="502920"/>
+          </a:xfrm>
+          <a:prstGeom prst="rect">
+            <a:avLst/>
+          </a:prstGeom>
+          <a:noFill/>
+        </p:spPr>
+        <p:txBody>
+          <a:bodyPr wrap="square" anchor="t"/>
+          <a:lstStyle/>
+          <a:p>
+            <a:pPr algn="l">
+              <a:spcAft>
+                <a:spcPts val="200"/>
+              </a:spcAft>
+            </a:pPr>
+            <a:r>
+              <a:rPr sz="1200" b="1">
+                <a:solidFill>
+                  <a:srgbClr val="C7000B"/>
+                </a:solidFill>
+                <a:latin typeface="Microsoft YaHei"/>
+                <a:ea typeface="Microsoft YaHei"/>
+                <a:cs typeface="Microsoft YaHei"/>
+              </a:rPr>
+              <a:t>代际绑定：Gen1 承诺精度基线 → Gen2 承诺泛化提升 → Gen3 承诺时延功耗；标杆任务：Meta 手势 0.88/s、LIMU-BERT-X 骑手、TartanIMU 200 FPS。</a:t>
+            </a:r>
+          </a:p>
+        </p:txBody>
+      </p:sp>
+      <p:sp>
+        <p:nvSpPr>
+          <p:cNvPr id="56" name="Rectangle 55"/>
+          <p:cNvSpPr/>
+          <p:nvPr/>
+        </p:nvSpPr>
+        <p:spPr>
+          <a:xfrm>
+            <a:off x="0" y="6537960"/>
+            <a:ext cx="12191695" cy="320040"/>
+          </a:xfrm>
+          <a:prstGeom prst="rect">
+            <a:avLst/>
+          </a:prstGeom>
+          <a:solidFill>
+            <a:srgbClr val="F2F2F2"/>
+          </a:solidFill>
+          <a:ln>
+            <a:noFill/>
+          </a:ln>
+        </p:spPr>
+        <p:style>
+          <a:lnRef idx="1">
+            <a:schemeClr val="accent1"/>
+          </a:lnRef>
+          <a:fillRef idx="3">
+            <a:schemeClr val="accent1"/>
+          </a:fillRef>
+          <a:effectRef idx="2">
+            <a:schemeClr val="accent1"/>
+          </a:effectRef>
+          <a:fontRef idx="minor">
+            <a:schemeClr val="lt1"/>
+          </a:fontRef>
+        </p:style>
+        <p:txBody>
+          <a:bodyPr rtlCol="0" anchor="ctr"/>
+          <a:lstStyle/>
+          <a:p>
+            <a:pPr algn="ctr"/>
+          </a:p>
+        </p:txBody>
+      </p:sp>
+      <p:sp>
+        <p:nvSpPr>
+          <p:cNvPr id="57" name="TextBox 56"/>
+          <p:cNvSpPr txBox="1"/>
+          <p:nvPr/>
+        </p:nvSpPr>
+        <p:spPr>
+          <a:xfrm>
+            <a:off x="457200" y="6537960"/>
+            <a:ext cx="8229600" cy="320040"/>
+          </a:xfrm>
+          <a:prstGeom prst="rect">
+            <a:avLst/>
+          </a:prstGeom>
+          <a:noFill/>
+        </p:spPr>
+        <p:txBody>
+          <a:bodyPr wrap="square" anchor="ctr"/>
+          <a:lstStyle/>
+          <a:p>
+            <a:pPr algn="l">
+              <a:spcAft>
+                <a:spcPts val="200"/>
+              </a:spcAft>
+            </a:pPr>
+            <a:r>
+              <a:rPr sz="900" b="0">
+                <a:solidFill>
+                  <a:srgbClr val="898989"/>
+                </a:solidFill>
+                <a:latin typeface="Microsoft YaHei"/>
+                <a:ea typeface="Microsoft YaHei"/>
+                <a:cs typeface="Microsoft YaHei"/>
+              </a:rPr>
+              <a:t>华为  ·  AI 物理感知平台  ·  量化指标    |    Security Level: Internal</a:t>
+            </a:r>
+          </a:p>
+        </p:txBody>
+      </p:sp>
+      <p:sp>
+        <p:nvSpPr>
+          <p:cNvPr id="58" name="TextBox 57"/>
+          <p:cNvSpPr txBox="1"/>
+          <p:nvPr/>
+        </p:nvSpPr>
+        <p:spPr>
+          <a:xfrm>
+            <a:off x="10241280" y="6537960"/>
+            <a:ext cx="1554480" cy="320040"/>
+          </a:xfrm>
+          <a:prstGeom prst="rect">
+            <a:avLst/>
+          </a:prstGeom>
+          <a:noFill/>
+        </p:spPr>
+        <p:txBody>
+          <a:bodyPr wrap="square" anchor="ctr"/>
+          <a:lstStyle/>
+          <a:p>
+            <a:pPr algn="r">
+              <a:spcAft>
+                <a:spcPts val="200"/>
+              </a:spcAft>
+            </a:pPr>
+            <a:r>
+              <a:rPr sz="900" b="0">
+                <a:solidFill>
+                  <a:srgbClr val="898989"/>
+                </a:solidFill>
+                <a:latin typeface="Microsoft YaHei"/>
+                <a:ea typeface="Microsoft YaHei"/>
+                <a:cs typeface="Microsoft YaHei"/>
+              </a:rPr>
+              <a:t>10  /  11</a:t>
+            </a:r>
+          </a:p>
+        </p:txBody>
+      </p:sp>
+    </p:spTree>
+  </p:cSld>
+  <p:clrMapOvr>
+    <a:masterClrMapping/>
+  </p:clrMapOvr>
+</p:sld>
+</file>
+
+<file path=ppt/slides/slide11.xml><?xml version="1.0" encoding="utf-8"?>
+<p:sld xmlns:a="http://schemas.openxmlformats.org/drawingml/2006/main" xmlns:p="http://schemas.openxmlformats.org/presentationml/2006/main" xmlns:r="http://schemas.openxmlformats.org/officeDocument/2006/relationships">
+  <p:cSld>
+    <p:spTree>
+      <p:nvGrpSpPr>
+        <p:cNvPr id="1" name=""/>
+        <p:cNvGrpSpPr/>
+        <p:nvPr/>
+      </p:nvGrpSpPr>
+      <p:grpSpPr/>
+      <p:sp>
+        <p:nvSpPr>
+          <p:cNvPr id="2" name="Rectangle 1"/>
+          <p:cNvSpPr/>
+          <p:nvPr/>
+        </p:nvSpPr>
+        <p:spPr>
+          <a:xfrm>
+            <a:off x="0" y="0"/>
+            <a:ext cx="12196763" cy="6858000"/>
+          </a:xfrm>
+          <a:prstGeom prst="rect">
+            <a:avLst/>
+          </a:prstGeom>
+          <a:solidFill>
+            <a:srgbClr val="FFFFFF"/>
+          </a:solidFill>
+          <a:ln>
+            <a:noFill/>
+          </a:ln>
+        </p:spPr>
+        <p:style>
+          <a:lnRef idx="1">
+            <a:schemeClr val="accent1"/>
+          </a:lnRef>
+          <a:fillRef idx="3">
+            <a:schemeClr val="accent1"/>
+          </a:fillRef>
+          <a:effectRef idx="2">
+            <a:schemeClr val="accent1"/>
+          </a:effectRef>
+          <a:fontRef idx="minor">
+            <a:schemeClr val="lt1"/>
+          </a:fontRef>
+        </p:style>
+        <p:txBody>
+          <a:bodyPr rtlCol="0" anchor="ctr"/>
+          <a:lstStyle/>
+          <a:p>
+            <a:pPr algn="ctr"/>
+          </a:p>
+        </p:txBody>
+      </p:sp>
+      <p:sp>
+        <p:nvSpPr>
+          <p:cNvPr id="3" name="TextBox 2"/>
+          <p:cNvSpPr txBox="1"/>
+          <p:nvPr/>
+        </p:nvSpPr>
+        <p:spPr>
+          <a:xfrm>
+            <a:off x="457200" y="201168"/>
+            <a:ext cx="11155680" cy="256032"/>
+          </a:xfrm>
+          <a:prstGeom prst="rect">
+            <a:avLst/>
+          </a:prstGeom>
+          <a:noFill/>
+        </p:spPr>
+        <p:txBody>
+          <a:bodyPr wrap="square" anchor="t"/>
+          <a:lstStyle/>
+          <a:p>
+            <a:pPr algn="l">
+              <a:spcAft>
+                <a:spcPts val="200"/>
+              </a:spcAft>
+            </a:pPr>
+            <a:r>
+              <a:rPr sz="1100" b="1">
+                <a:solidFill>
+                  <a:srgbClr val="C7000B"/>
+                </a:solidFill>
+                <a:latin typeface="Microsoft YaHei"/>
+                <a:ea typeface="Microsoft YaHei"/>
+                <a:cs typeface="Microsoft YaHei"/>
+              </a:rPr>
+              <a:t>10  代际演进</a:t>
+            </a:r>
+          </a:p>
+        </p:txBody>
+      </p:sp>
+      <p:sp>
+        <p:nvSpPr>
+          <p:cNvPr id="4" name="TextBox 3"/>
+          <p:cNvSpPr txBox="1"/>
+          <p:nvPr/>
+        </p:nvSpPr>
+        <p:spPr>
+          <a:xfrm>
+            <a:off x="457200" y="438912"/>
+            <a:ext cx="11155680" cy="438912"/>
+          </a:xfrm>
+          <a:prstGeom prst="rect">
+            <a:avLst/>
+          </a:prstGeom>
+          <a:noFill/>
+        </p:spPr>
+        <p:txBody>
+          <a:bodyPr wrap="square" anchor="t"/>
+          <a:lstStyle/>
+          <a:p>
+            <a:pPr algn="l">
+              <a:spcAft>
+                <a:spcPts val="200"/>
+              </a:spcAft>
+            </a:pPr>
+            <a:r>
+              <a:rPr sz="2400" b="1">
+                <a:solidFill>
+                  <a:srgbClr val="1A1A1A"/>
+                </a:solidFill>
+                <a:latin typeface="Microsoft YaHei"/>
+                <a:ea typeface="Microsoft YaHei"/>
+                <a:cs typeface="Microsoft YaHei"/>
+              </a:rPr>
+              <a:t>Gen1 零样本基线 → Gen2 千人千面 → Gen3 Token 嵌入大模型</a:t>
+            </a:r>
+          </a:p>
+        </p:txBody>
+      </p:sp>
+      <p:sp>
+        <p:nvSpPr>
+          <p:cNvPr id="5" name="Rectangle 4"/>
+          <p:cNvSpPr/>
+          <p:nvPr/>
+        </p:nvSpPr>
+        <p:spPr>
+          <a:xfrm>
+            <a:off x="457200" y="914400"/>
+            <a:ext cx="1097280" cy="45720"/>
+          </a:xfrm>
+          <a:prstGeom prst="rect">
+            <a:avLst/>
+          </a:prstGeom>
+          <a:solidFill>
+            <a:srgbClr val="C7000B"/>
+          </a:solidFill>
+          <a:ln>
+            <a:noFill/>
+          </a:ln>
+        </p:spPr>
+        <p:style>
+          <a:lnRef idx="1">
+            <a:schemeClr val="accent1"/>
+          </a:lnRef>
+          <a:fillRef idx="3">
+            <a:schemeClr val="accent1"/>
+          </a:fillRef>
+          <a:effectRef idx="2">
+            <a:schemeClr val="accent1"/>
+          </a:effectRef>
+          <a:fontRef idx="minor">
+            <a:schemeClr val="lt1"/>
+          </a:fontRef>
+        </p:style>
+        <p:txBody>
+          <a:bodyPr rtlCol="0" anchor="ctr"/>
+          <a:lstStyle/>
+          <a:p>
+            <a:pPr algn="ctr"/>
+          </a:p>
+        </p:txBody>
+      </p:sp>
+      <p:sp>
+        <p:nvSpPr>
+          <p:cNvPr id="6" name="TextBox 5"/>
+          <p:cNvSpPr txBox="1"/>
+          <p:nvPr/>
+        </p:nvSpPr>
+        <p:spPr>
+          <a:xfrm>
+            <a:off x="457200" y="1024128"/>
+            <a:ext cx="11155680" cy="292608"/>
+          </a:xfrm>
+          <a:prstGeom prst="rect">
+            <a:avLst/>
+          </a:prstGeom>
+          <a:noFill/>
+        </p:spPr>
+        <p:txBody>
+          <a:bodyPr wrap="square" anchor="t"/>
+          <a:lstStyle/>
+          <a:p>
+            <a:pPr algn="l">
+              <a:spcAft>
+                <a:spcPts val="200"/>
+              </a:spcAft>
+            </a:pPr>
+            <a:r>
+              <a:rPr sz="1200" b="0">
+                <a:solidFill>
+                  <a:srgbClr val="898989"/>
+                </a:solidFill>
+                <a:latin typeface="Microsoft YaHei"/>
+                <a:ea typeface="Microsoft YaHei"/>
+                <a:cs typeface="Microsoft YaHei"/>
+              </a:rPr>
+              <a:t>接口不变，能力逐代升级；每代回答一个业务问题。</a:t>
+            </a:r>
+          </a:p>
+        </p:txBody>
+      </p:sp>
+      <p:sp>
+        <p:nvSpPr>
+          <p:cNvPr id="7" name="Rounded Rectangle 6"/>
+          <p:cNvSpPr/>
+          <p:nvPr/>
+        </p:nvSpPr>
+        <p:spPr>
+          <a:xfrm>
+            <a:off x="411480" y="1417320"/>
+            <a:ext cx="2788920" cy="3566160"/>
+          </a:xfrm>
+          <a:prstGeom prst="roundRect">
+            <a:avLst>
+              <a:gd name="adj" fmla="val 5000"/>
+            </a:avLst>
+          </a:prstGeom>
+          <a:solidFill>
+            <a:srgbClr val="FFFFFF"/>
+          </a:solidFill>
+          <a:ln w="9525">
+            <a:solidFill>
+              <a:srgbClr val="DDDDDD"/>
+            </a:solidFill>
+          </a:ln>
+        </p:spPr>
+        <p:style>
+          <a:lnRef idx="1">
+            <a:schemeClr val="accent1"/>
+          </a:lnRef>
+          <a:fillRef idx="3">
+            <a:schemeClr val="accent1"/>
+          </a:fillRef>
+          <a:effectRef idx="2">
+            <a:schemeClr val="accent1"/>
+          </a:effectRef>
+          <a:fontRef idx="minor">
+            <a:schemeClr val="lt1"/>
+          </a:fontRef>
+        </p:style>
+        <p:txBody>
+          <a:bodyPr rtlCol="0" anchor="ctr"/>
+          <a:lstStyle/>
+          <a:p>
+            <a:pPr algn="ctr"/>
+          </a:p>
+        </p:txBody>
+      </p:sp>
+      <p:sp>
+        <p:nvSpPr>
+          <p:cNvPr id="8" name="Rectangle 7"/>
+          <p:cNvSpPr/>
+          <p:nvPr/>
+        </p:nvSpPr>
+        <p:spPr>
+          <a:xfrm>
+            <a:off x="411480" y="1417320"/>
+            <a:ext cx="2788920" cy="73152"/>
+          </a:xfrm>
+          <a:prstGeom prst="rect">
+            <a:avLst/>
+          </a:prstGeom>
+          <a:solidFill>
+            <a:srgbClr val="C7000B"/>
+          </a:solidFill>
+          <a:ln>
+            <a:noFill/>
+          </a:ln>
+        </p:spPr>
+        <p:style>
+          <a:lnRef idx="1">
+            <a:schemeClr val="accent1"/>
+          </a:lnRef>
+          <a:fillRef idx="3">
+            <a:schemeClr val="accent1"/>
+          </a:fillRef>
+          <a:effectRef idx="2">
+            <a:schemeClr val="accent1"/>
+          </a:effectRef>
+          <a:fontRef idx="minor">
+            <a:schemeClr val="lt1"/>
+          </a:fontRef>
+        </p:style>
+        <p:txBody>
+          <a:bodyPr rtlCol="0" anchor="ctr"/>
+          <a:lstStyle/>
+          <a:p>
+            <a:pPr algn="ctr"/>
+          </a:p>
+        </p:txBody>
+      </p:sp>
+      <p:sp>
+        <p:nvSpPr>
+          <p:cNvPr id="9" name="TextBox 8"/>
+          <p:cNvSpPr txBox="1"/>
+          <p:nvPr/>
+        </p:nvSpPr>
+        <p:spPr>
+          <a:xfrm>
+            <a:off x="548640" y="1645920"/>
+            <a:ext cx="2514600" cy="365760"/>
+          </a:xfrm>
+          <a:prstGeom prst="rect">
+            <a:avLst/>
+          </a:prstGeom>
+          <a:noFill/>
+        </p:spPr>
+        <p:txBody>
+          <a:bodyPr wrap="square" anchor="t"/>
+          <a:lstStyle/>
+          <a:p>
+            <a:pPr algn="l">
+              <a:spcAft>
+                <a:spcPts val="200"/>
+              </a:spcAft>
+            </a:pPr>
+            <a:r>
+              <a:rPr sz="1600" b="1">
+                <a:solidFill>
+                  <a:srgbClr val="C7000B"/>
+                </a:solidFill>
+                <a:latin typeface="Microsoft YaHei"/>
+                <a:ea typeface="Microsoft YaHei"/>
+                <a:cs typeface="Microsoft YaHei"/>
+              </a:rPr>
+              <a:t>Gen1  零样本基线</a:t>
+            </a:r>
+          </a:p>
+        </p:txBody>
+      </p:sp>
+      <p:sp>
+        <p:nvSpPr>
+          <p:cNvPr id="10" name="TextBox 9"/>
+          <p:cNvSpPr txBox="1"/>
+          <p:nvPr/>
+        </p:nvSpPr>
+        <p:spPr>
+          <a:xfrm>
+            <a:off x="548640" y="2148840"/>
+            <a:ext cx="2514600" cy="2651760"/>
+          </a:xfrm>
+          <a:prstGeom prst="rect">
+            <a:avLst/>
+          </a:prstGeom>
+          <a:noFill/>
+        </p:spPr>
+        <p:txBody>
+          <a:bodyPr wrap="square" anchor="t"/>
+          <a:lstStyle/>
+          <a:p>
+            <a:pPr algn="l">
+              <a:spcAft>
+                <a:spcPts val="200"/>
+              </a:spcAft>
+            </a:pPr>
+            <a:r>
+              <a:rPr sz="1200" b="0">
+                <a:solidFill>
+                  <a:srgbClr val="555757"/>
+                </a:solidFill>
+                <a:latin typeface="Microsoft YaHei"/>
+                <a:ea typeface="Microsoft YaHei"/>
+                <a:cs typeface="Microsoft YaHei"/>
+              </a:rPr>
+              <a:t>预训练底座直接上岗。</a:t>
+            </a:r>
+          </a:p>
+          <a:p>
+            <a:pPr algn="l">
+              <a:spcAft>
+                <a:spcPts val="200"/>
+              </a:spcAft>
+            </a:pPr>
+            <a:r>
+              <a:rPr sz="1200" b="0">
+                <a:solidFill>
+                  <a:srgbClr val="555757"/>
+                </a:solidFill>
+                <a:latin typeface="Microsoft YaHei"/>
+                <a:ea typeface="Microsoft YaHei"/>
+                <a:cs typeface="Microsoft YaHei"/>
+              </a:rPr>
+              <a:t>预测零样本（TimesFM-3）；</a:t>
+            </a:r>
+          </a:p>
+          <a:p>
+            <a:pPr algn="l">
+              <a:spcAft>
+                <a:spcPts val="200"/>
+              </a:spcAft>
+            </a:pPr>
+            <a:r>
+              <a:rPr sz="1200" b="0">
+                <a:solidFill>
+                  <a:srgbClr val="555757"/>
+                </a:solidFill>
+                <a:latin typeface="Microsoft YaHei"/>
+                <a:ea typeface="Microsoft YaHei"/>
+                <a:cs typeface="Microsoft YaHei"/>
+              </a:rPr>
+              <a:t>分类走规则 / 线性探针（UniTS / MOMENT）。</a:t>
+            </a:r>
+          </a:p>
+          <a:p>
+            <a:pPr algn="l">
+              <a:spcAft>
+                <a:spcPts val="200"/>
+              </a:spcAft>
+            </a:pPr>
+            <a:r>
+              <a:rPr sz="1200" b="0">
+                <a:solidFill>
+                  <a:srgbClr val="555757"/>
+                </a:solidFill>
+                <a:latin typeface="Microsoft YaHei"/>
+                <a:ea typeface="Microsoft YaHei"/>
+                <a:cs typeface="Microsoft YaHei"/>
+              </a:rPr>
+              <a:t>回答：底座行不行 → 统一评测基线。</a:t>
+            </a:r>
+          </a:p>
+        </p:txBody>
+      </p:sp>
+      <p:sp>
+        <p:nvSpPr>
+          <p:cNvPr id="11" name="Rounded Rectangle 10"/>
+          <p:cNvSpPr/>
+          <p:nvPr/>
+        </p:nvSpPr>
+        <p:spPr>
+          <a:xfrm>
+            <a:off x="3337560" y="1417320"/>
+            <a:ext cx="2788920" cy="3566160"/>
+          </a:xfrm>
+          <a:prstGeom prst="roundRect">
+            <a:avLst>
+              <a:gd name="adj" fmla="val 5000"/>
+            </a:avLst>
+          </a:prstGeom>
+          <a:solidFill>
+            <a:srgbClr val="FFFFFF"/>
+          </a:solidFill>
+          <a:ln w="9525">
+            <a:solidFill>
+              <a:srgbClr val="DDDDDD"/>
+            </a:solidFill>
+          </a:ln>
+        </p:spPr>
+        <p:style>
+          <a:lnRef idx="1">
+            <a:schemeClr val="accent1"/>
+          </a:lnRef>
+          <a:fillRef idx="3">
+            <a:schemeClr val="accent1"/>
+          </a:fillRef>
+          <a:effectRef idx="2">
+            <a:schemeClr val="accent1"/>
+          </a:effectRef>
+          <a:fontRef idx="minor">
+            <a:schemeClr val="lt1"/>
+          </a:fontRef>
+        </p:style>
+        <p:txBody>
+          <a:bodyPr rtlCol="0" anchor="ctr"/>
+          <a:lstStyle/>
+          <a:p>
+            <a:pPr algn="ctr"/>
+          </a:p>
+        </p:txBody>
+      </p:sp>
+      <p:sp>
+        <p:nvSpPr>
+          <p:cNvPr id="12" name="Rectangle 11"/>
+          <p:cNvSpPr/>
+          <p:nvPr/>
+        </p:nvSpPr>
+        <p:spPr>
+          <a:xfrm>
+            <a:off x="3337560" y="1417320"/>
+            <a:ext cx="2788920" cy="73152"/>
+          </a:xfrm>
+          <a:prstGeom prst="rect">
+            <a:avLst/>
+          </a:prstGeom>
+          <a:solidFill>
+            <a:srgbClr val="ED6D00"/>
+          </a:solidFill>
+          <a:ln>
+            <a:noFill/>
+          </a:ln>
+        </p:spPr>
+        <p:style>
+          <a:lnRef idx="1">
+            <a:schemeClr val="accent1"/>
+          </a:lnRef>
+          <a:fillRef idx="3">
+            <a:schemeClr val="accent1"/>
+          </a:fillRef>
+          <a:effectRef idx="2">
+            <a:schemeClr val="accent1"/>
+          </a:effectRef>
+          <a:fontRef idx="minor">
+            <a:schemeClr val="lt1"/>
+          </a:fontRef>
+        </p:style>
+        <p:txBody>
+          <a:bodyPr rtlCol="0" anchor="ctr"/>
+          <a:lstStyle/>
+          <a:p>
+            <a:pPr algn="ctr"/>
+          </a:p>
+        </p:txBody>
+      </p:sp>
+      <p:sp>
+        <p:nvSpPr>
+          <p:cNvPr id="13" name="TextBox 12"/>
+          <p:cNvSpPr txBox="1"/>
+          <p:nvPr/>
+        </p:nvSpPr>
+        <p:spPr>
+          <a:xfrm>
+            <a:off x="3474720" y="1645920"/>
+            <a:ext cx="2514600" cy="365760"/>
+          </a:xfrm>
+          <a:prstGeom prst="rect">
+            <a:avLst/>
+          </a:prstGeom>
+          <a:noFill/>
+        </p:spPr>
+        <p:txBody>
+          <a:bodyPr wrap="square" anchor="t"/>
+          <a:lstStyle/>
+          <a:p>
+            <a:pPr algn="l">
+              <a:spcAft>
+                <a:spcPts val="200"/>
+              </a:spcAft>
+            </a:pPr>
+            <a:r>
+              <a:rPr sz="1600" b="1">
+                <a:solidFill>
+                  <a:srgbClr val="ED6D00"/>
+                </a:solidFill>
+                <a:latin typeface="Microsoft YaHei"/>
+                <a:ea typeface="Microsoft YaHei"/>
+                <a:cs typeface="Microsoft YaHei"/>
+              </a:rPr>
+              <a:t>Gen2  千人千面</a:t>
+            </a:r>
+          </a:p>
+        </p:txBody>
+      </p:sp>
+      <p:sp>
+        <p:nvSpPr>
+          <p:cNvPr id="14" name="TextBox 13"/>
+          <p:cNvSpPr txBox="1"/>
+          <p:nvPr/>
+        </p:nvSpPr>
+        <p:spPr>
+          <a:xfrm>
+            <a:off x="3474720" y="2148840"/>
+            <a:ext cx="2514600" cy="2651760"/>
+          </a:xfrm>
+          <a:prstGeom prst="rect">
+            <a:avLst/>
+          </a:prstGeom>
+          <a:noFill/>
+        </p:spPr>
+        <p:txBody>
+          <a:bodyPr wrap="square" anchor="t"/>
+          <a:lstStyle/>
+          <a:p>
+            <a:pPr algn="l">
+              <a:spcAft>
+                <a:spcPts val="200"/>
+              </a:spcAft>
+            </a:pPr>
+            <a:r>
+              <a:rPr sz="1200" b="0">
+                <a:solidFill>
+                  <a:srgbClr val="555757"/>
+                </a:solidFill>
+                <a:latin typeface="Microsoft YaHei"/>
+                <a:ea typeface="Microsoft YaHei"/>
+                <a:cs typeface="Microsoft YaHei"/>
+              </a:rPr>
+              <a:t>轻量适配到每设备、每用户。</a:t>
+            </a:r>
+          </a:p>
+          <a:p>
+            <a:pPr algn="l">
+              <a:spcAft>
+                <a:spcPts val="200"/>
+              </a:spcAft>
+            </a:pPr>
+            <a:r>
+              <a:rPr sz="1200" b="0">
+                <a:solidFill>
+                  <a:srgbClr val="555757"/>
+                </a:solidFill>
+                <a:latin typeface="Microsoft YaHei"/>
+                <a:ea typeface="Microsoft YaHei"/>
+                <a:cs typeface="Microsoft YaHei"/>
+              </a:rPr>
+              <a:t>LoRA / 提示微调：TartanIMU 仅 1.1M 参数；</a:t>
+            </a:r>
+          </a:p>
+          <a:p>
+            <a:pPr algn="l">
+              <a:spcAft>
+                <a:spcPts val="200"/>
+              </a:spcAft>
+            </a:pPr>
+            <a:r>
+              <a:rPr sz="1200" b="0">
+                <a:solidFill>
+                  <a:srgbClr val="555757"/>
+                </a:solidFill>
+                <a:latin typeface="Microsoft YaHei"/>
+                <a:ea typeface="Microsoft YaHei"/>
+                <a:cs typeface="Microsoft YaHei"/>
+              </a:rPr>
+              <a:t>Meta EMG 个性化后再 +16%。</a:t>
+            </a:r>
+          </a:p>
+          <a:p>
+            <a:pPr algn="l">
+              <a:spcAft>
+                <a:spcPts val="200"/>
+              </a:spcAft>
+            </a:pPr>
+            <a:r>
+              <a:rPr sz="1200" b="0">
+                <a:solidFill>
+                  <a:srgbClr val="555757"/>
+                </a:solidFill>
+                <a:latin typeface="Microsoft YaHei"/>
+                <a:ea typeface="Microsoft YaHei"/>
+                <a:cs typeface="Microsoft YaHei"/>
+              </a:rPr>
+              <a:t>回答：换设备换人还行不行 → 画像进数据规格。</a:t>
+            </a:r>
+          </a:p>
+        </p:txBody>
+      </p:sp>
+      <p:sp>
+        <p:nvSpPr>
+          <p:cNvPr id="15" name="Rounded Rectangle 14"/>
+          <p:cNvSpPr/>
+          <p:nvPr/>
+        </p:nvSpPr>
+        <p:spPr>
+          <a:xfrm>
+            <a:off x="6263640" y="1417320"/>
+            <a:ext cx="2788920" cy="3566160"/>
+          </a:xfrm>
+          <a:prstGeom prst="roundRect">
+            <a:avLst>
+              <a:gd name="adj" fmla="val 5000"/>
+            </a:avLst>
+          </a:prstGeom>
+          <a:solidFill>
+            <a:srgbClr val="FFFFFF"/>
+          </a:solidFill>
+          <a:ln w="9525">
+            <a:solidFill>
+              <a:srgbClr val="DDDDDD"/>
+            </a:solidFill>
+          </a:ln>
+        </p:spPr>
+        <p:style>
+          <a:lnRef idx="1">
+            <a:schemeClr val="accent1"/>
+          </a:lnRef>
+          <a:fillRef idx="3">
+            <a:schemeClr val="accent1"/>
+          </a:fillRef>
+          <a:effectRef idx="2">
+            <a:schemeClr val="accent1"/>
+          </a:effectRef>
+          <a:fontRef idx="minor">
+            <a:schemeClr val="lt1"/>
+          </a:fontRef>
+        </p:style>
+        <p:txBody>
+          <a:bodyPr rtlCol="0" anchor="ctr"/>
+          <a:lstStyle/>
+          <a:p>
+            <a:pPr algn="ctr"/>
+          </a:p>
+        </p:txBody>
+      </p:sp>
+      <p:sp>
+        <p:nvSpPr>
+          <p:cNvPr id="16" name="Rectangle 15"/>
+          <p:cNvSpPr/>
+          <p:nvPr/>
+        </p:nvSpPr>
+        <p:spPr>
+          <a:xfrm>
+            <a:off x="6263640" y="1417320"/>
+            <a:ext cx="2788920" cy="73152"/>
+          </a:xfrm>
+          <a:prstGeom prst="rect">
+            <a:avLst/>
+          </a:prstGeom>
+          <a:solidFill>
+            <a:srgbClr val="30B5C5"/>
+          </a:solidFill>
+          <a:ln>
+            <a:noFill/>
+          </a:ln>
+        </p:spPr>
+        <p:style>
+          <a:lnRef idx="1">
+            <a:schemeClr val="accent1"/>
+          </a:lnRef>
+          <a:fillRef idx="3">
+            <a:schemeClr val="accent1"/>
+          </a:fillRef>
+          <a:effectRef idx="2">
+            <a:schemeClr val="accent1"/>
+          </a:effectRef>
+          <a:fontRef idx="minor">
+            <a:schemeClr val="lt1"/>
+          </a:fontRef>
+        </p:style>
+        <p:txBody>
+          <a:bodyPr rtlCol="0" anchor="ctr"/>
+          <a:lstStyle/>
+          <a:p>
+            <a:pPr algn="ctr"/>
+          </a:p>
+        </p:txBody>
+      </p:sp>
+      <p:sp>
+        <p:nvSpPr>
+          <p:cNvPr id="17" name="TextBox 16"/>
+          <p:cNvSpPr txBox="1"/>
+          <p:nvPr/>
+        </p:nvSpPr>
+        <p:spPr>
+          <a:xfrm>
+            <a:off x="6400800" y="1645920"/>
+            <a:ext cx="2514600" cy="365760"/>
+          </a:xfrm>
+          <a:prstGeom prst="rect">
+            <a:avLst/>
+          </a:prstGeom>
+          <a:noFill/>
+        </p:spPr>
+        <p:txBody>
+          <a:bodyPr wrap="square" anchor="t"/>
+          <a:lstStyle/>
+          <a:p>
+            <a:pPr algn="l">
+              <a:spcAft>
+                <a:spcPts val="200"/>
+              </a:spcAft>
+            </a:pPr>
+            <a:r>
+              <a:rPr sz="1600" b="1">
+                <a:solidFill>
+                  <a:srgbClr val="30B5C5"/>
+                </a:solidFill>
+                <a:latin typeface="Microsoft YaHei"/>
+                <a:ea typeface="Microsoft YaHei"/>
+                <a:cs typeface="Microsoft YaHei"/>
+              </a:rPr>
+              <a:t>Gen3  Token 嵌入大模型</a:t>
+            </a:r>
+          </a:p>
+        </p:txBody>
+      </p:sp>
+      <p:sp>
+        <p:nvSpPr>
+          <p:cNvPr id="18" name="TextBox 17"/>
+          <p:cNvSpPr txBox="1"/>
+          <p:nvPr/>
+        </p:nvSpPr>
+        <p:spPr>
+          <a:xfrm>
+            <a:off x="6400800" y="2148840"/>
+            <a:ext cx="2514600" cy="2651760"/>
+          </a:xfrm>
+          <a:prstGeom prst="rect">
+            <a:avLst/>
+          </a:prstGeom>
+          <a:noFill/>
+        </p:spPr>
+        <p:txBody>
+          <a:bodyPr wrap="square" anchor="t"/>
+          <a:lstStyle/>
+          <a:p>
+            <a:pPr algn="l">
+              <a:spcAft>
+                <a:spcPts val="200"/>
+              </a:spcAft>
+            </a:pPr>
+            <a:r>
+              <a:rPr sz="1200" b="0">
+                <a:solidFill>
+                  <a:srgbClr val="555757"/>
+                </a:solidFill>
+                <a:latin typeface="Microsoft YaHei"/>
+                <a:ea typeface="Microsoft YaHei"/>
+                <a:cs typeface="Microsoft YaHei"/>
+              </a:rPr>
+              <a:t>物理 patch token 作为新模态注入大模型。</a:t>
+            </a:r>
+          </a:p>
+          <a:p>
+            <a:pPr algn="l">
+              <a:spcAft>
+                <a:spcPts val="200"/>
+              </a:spcAft>
+            </a:pPr>
+            <a:r>
+              <a:rPr sz="1200" b="0">
+                <a:solidFill>
+                  <a:srgbClr val="555757"/>
+                </a:solidFill>
+                <a:latin typeface="Microsoft YaHei"/>
+                <a:ea typeface="Microsoft YaHei"/>
+                <a:cs typeface="Microsoft YaHei"/>
+              </a:rPr>
+              <a:t>预测 + 分类变成大模型的原生能力；</a:t>
+            </a:r>
+          </a:p>
+          <a:p>
+            <a:pPr algn="l">
+              <a:spcAft>
+                <a:spcPts val="200"/>
+              </a:spcAft>
+            </a:pPr>
+            <a:r>
+              <a:rPr sz="1200" b="0">
+                <a:solidFill>
+                  <a:srgbClr val="555757"/>
+                </a:solidFill>
+                <a:latin typeface="Microsoft YaHei"/>
+                <a:ea typeface="Microsoft YaHei"/>
+                <a:cs typeface="Microsoft YaHei"/>
+              </a:rPr>
+              <a:t>平台从「提供模型」变成「提供 token 与接口」。</a:t>
+            </a:r>
+          </a:p>
+          <a:p>
+            <a:pPr algn="l">
+              <a:spcAft>
+                <a:spcPts val="200"/>
+              </a:spcAft>
+            </a:pPr>
+            <a:r>
+              <a:rPr sz="1200" b="0">
+                <a:solidFill>
+                  <a:srgbClr val="555757"/>
+                </a:solidFill>
+                <a:latin typeface="Microsoft YaHei"/>
+                <a:ea typeface="Microsoft YaHei"/>
+                <a:cs typeface="Microsoft YaHei"/>
+              </a:rPr>
+              <a:t>回答：物理感知如何进入统一智能。</a:t>
+            </a:r>
+          </a:p>
+        </p:txBody>
+      </p:sp>
+      <p:sp>
+        <p:nvSpPr>
+          <p:cNvPr id="19" name="Rounded Rectangle 18"/>
+          <p:cNvSpPr/>
+          <p:nvPr/>
+        </p:nvSpPr>
+        <p:spPr>
+          <a:xfrm>
+            <a:off x="457200" y="5120640"/>
+            <a:ext cx="11247120" cy="822960"/>
+          </a:xfrm>
+          <a:prstGeom prst="roundRect">
+            <a:avLst>
+              <a:gd name="adj" fmla="val 5000"/>
+            </a:avLst>
+          </a:prstGeom>
+          <a:solidFill>
+            <a:srgbClr val="F7F7F7"/>
+          </a:solidFill>
+          <a:ln w="9525">
+            <a:solidFill>
+              <a:srgbClr val="DDDDDD"/>
+            </a:solidFill>
+          </a:ln>
+        </p:spPr>
+        <p:style>
+          <a:lnRef idx="1">
+            <a:schemeClr val="accent1"/>
+          </a:lnRef>
+          <a:fillRef idx="3">
+            <a:schemeClr val="accent1"/>
+          </a:fillRef>
+          <a:effectRef idx="2">
+            <a:schemeClr val="accent1"/>
+          </a:effectRef>
+          <a:fontRef idx="minor">
+            <a:schemeClr val="lt1"/>
+          </a:fontRef>
+        </p:style>
+        <p:txBody>
+          <a:bodyPr rtlCol="0" anchor="ctr"/>
+          <a:lstStyle/>
+          <a:p>
+            <a:pPr algn="ctr"/>
+          </a:p>
+        </p:txBody>
+      </p:sp>
+      <p:sp>
+        <p:nvSpPr>
+          <p:cNvPr id="20" name="TextBox 19"/>
+          <p:cNvSpPr txBox="1"/>
+          <p:nvPr/>
+        </p:nvSpPr>
+        <p:spPr>
+          <a:xfrm>
+            <a:off x="640080" y="5257800"/>
+            <a:ext cx="10881360" cy="548640"/>
+          </a:xfrm>
+          <a:prstGeom prst="rect">
+            <a:avLst/>
+          </a:prstGeom>
+          <a:noFill/>
+        </p:spPr>
+        <p:txBody>
+          <a:bodyPr wrap="square" anchor="t"/>
+          <a:lstStyle/>
+          <a:p>
+            <a:pPr algn="l">
+              <a:spcAft>
+                <a:spcPts val="200"/>
+              </a:spcAft>
+            </a:pPr>
+            <a:r>
+              <a:rPr sz="1400" b="1">
+                <a:solidFill>
+                  <a:srgbClr val="C7000B"/>
+                </a:solidFill>
+                <a:latin typeface="Microsoft YaHei"/>
+                <a:ea typeface="Microsoft YaHei"/>
+                <a:cs typeface="Microsoft YaHei"/>
+              </a:rPr>
+              <a:t>演进原则：接口（接入 / 预测 / 分类）向下兼容；底座、权重、头可独立替换。</a:t>
+            </a:r>
+          </a:p>
+        </p:txBody>
+      </p:sp>
+      <p:sp>
+        <p:nvSpPr>
+          <p:cNvPr id="21" name="Rectangle 20"/>
+          <p:cNvSpPr/>
+          <p:nvPr/>
+        </p:nvSpPr>
+        <p:spPr>
+          <a:xfrm>
+            <a:off x="0" y="6537960"/>
+            <a:ext cx="12191695" cy="320040"/>
+          </a:xfrm>
+          <a:prstGeom prst="rect">
+            <a:avLst/>
+          </a:prstGeom>
+          <a:solidFill>
+            <a:srgbClr val="F2F2F2"/>
+          </a:solidFill>
+          <a:ln>
+            <a:noFill/>
+          </a:ln>
+        </p:spPr>
+        <p:style>
+          <a:lnRef idx="1">
+            <a:schemeClr val="accent1"/>
+          </a:lnRef>
+          <a:fillRef idx="3">
+            <a:schemeClr val="accent1"/>
+          </a:fillRef>
+          <a:effectRef idx="2">
+            <a:schemeClr val="accent1"/>
+          </a:effectRef>
+          <a:fontRef idx="minor">
+            <a:schemeClr val="lt1"/>
+          </a:fontRef>
+        </p:style>
+        <p:txBody>
+          <a:bodyPr rtlCol="0" anchor="ctr"/>
+          <a:lstStyle/>
+          <a:p>
+            <a:pPr algn="ctr"/>
+          </a:p>
+        </p:txBody>
+      </p:sp>
+      <p:sp>
+        <p:nvSpPr>
+          <p:cNvPr id="22" name="TextBox 21"/>
+          <p:cNvSpPr txBox="1"/>
+          <p:nvPr/>
+        </p:nvSpPr>
+        <p:spPr>
+          <a:xfrm>
+            <a:off x="457200" y="6537960"/>
+            <a:ext cx="8229600" cy="320040"/>
+          </a:xfrm>
+          <a:prstGeom prst="rect">
+            <a:avLst/>
+          </a:prstGeom>
+          <a:noFill/>
+        </p:spPr>
+        <p:txBody>
+          <a:bodyPr wrap="square" anchor="ctr"/>
+          <a:lstStyle/>
+          <a:p>
+            <a:pPr algn="l">
+              <a:spcAft>
+                <a:spcPts val="200"/>
+              </a:spcAft>
+            </a:pPr>
+            <a:r>
+              <a:rPr sz="900" b="0">
+                <a:solidFill>
+                  <a:srgbClr val="898989"/>
+                </a:solidFill>
+                <a:latin typeface="Microsoft YaHei"/>
+                <a:ea typeface="Microsoft YaHei"/>
+                <a:cs typeface="Microsoft YaHei"/>
+              </a:rPr>
+              <a:t>华为  ·  AI 物理感知平台  ·  代际演进    |    Security Level: Internal</a:t>
+            </a:r>
+          </a:p>
+        </p:txBody>
+      </p:sp>
+      <p:sp>
+        <p:nvSpPr>
+          <p:cNvPr id="23" name="TextBox 22"/>
+          <p:cNvSpPr txBox="1"/>
+          <p:nvPr/>
+        </p:nvSpPr>
+        <p:spPr>
+          <a:xfrm>
+            <a:off x="10241280" y="6537960"/>
+            <a:ext cx="1554480" cy="320040"/>
+          </a:xfrm>
+          <a:prstGeom prst="rect">
+            <a:avLst/>
+          </a:prstGeom>
+          <a:noFill/>
+        </p:spPr>
+        <p:txBody>
+          <a:bodyPr wrap="square" anchor="ctr"/>
+          <a:lstStyle/>
+          <a:p>
+            <a:pPr algn="r">
+              <a:spcAft>
+                <a:spcPts val="200"/>
+              </a:spcAft>
+            </a:pPr>
+            <a:r>
+              <a:rPr sz="900" b="0">
+                <a:solidFill>
+                  <a:srgbClr val="898989"/>
+                </a:solidFill>
+                <a:latin typeface="Microsoft YaHei"/>
+                <a:ea typeface="Microsoft YaHei"/>
+                <a:cs typeface="Microsoft YaHei"/>
+              </a:rPr>
+              <a:t>11  /  11</a:t>
             </a:r>
           </a:p>
         </p:txBody>
@@ -8585,7 +12016,7 @@
                 <a:ea typeface="Microsoft YaHei"/>
                 <a:cs typeface="Microsoft YaHei"/>
               </a:rPr>
-              <a:t>2  /  9</a:t>
+              <a:t>2  /  11</a:t>
             </a:r>
           </a:p>
         </p:txBody>
@@ -10821,7 +14252,7 @@
                 <a:ea typeface="Microsoft YaHei"/>
                 <a:cs typeface="Microsoft YaHei"/>
               </a:rPr>
-              <a:t>3  /  9</a:t>
+              <a:t>3  /  11</a:t>
             </a:r>
           </a:p>
         </p:txBody>
@@ -13008,7 +16439,7 @@
                 <a:ea typeface="Microsoft YaHei"/>
                 <a:cs typeface="Microsoft YaHei"/>
               </a:rPr>
-              <a:t>4  /  9</a:t>
+              <a:t>4  /  11</a:t>
             </a:r>
           </a:p>
         </p:txBody>
@@ -14066,7 +17497,7 @@
                 <a:ea typeface="Microsoft YaHei"/>
                 <a:cs typeface="Microsoft YaHei"/>
               </a:rPr>
-              <a:t>5  /  9</a:t>
+              <a:t>5  /  11</a:t>
             </a:r>
           </a:p>
         </p:txBody>
@@ -15106,7 +18537,7 @@
                 <a:ea typeface="Microsoft YaHei"/>
                 <a:cs typeface="Microsoft YaHei"/>
               </a:rPr>
-              <a:t>6  /  9</a:t>
+              <a:t>6  /  11</a:t>
             </a:r>
           </a:p>
         </p:txBody>
@@ -16146,7 +19577,7 @@
                 <a:ea typeface="Microsoft YaHei"/>
                 <a:cs typeface="Microsoft YaHei"/>
               </a:rPr>
-              <a:t>7  /  9</a:t>
+              <a:t>7  /  11</a:t>
             </a:r>
           </a:p>
         </p:txBody>
@@ -17082,7 +20513,7 @@
                 <a:ea typeface="Microsoft YaHei"/>
                 <a:cs typeface="Microsoft YaHei"/>
               </a:rPr>
-              <a:t>8  /  9</a:t>
+              <a:t>8  /  11</a:t>
             </a:r>
           </a:p>
         </p:txBody>
@@ -17182,7 +20613,7 @@
                 <a:ea typeface="Microsoft YaHei"/>
                 <a:cs typeface="Microsoft YaHei"/>
               </a:rPr>
-              <a:t>8  代际演进</a:t>
+              <a:t>8  接口规格</a:t>
             </a:r>
           </a:p>
         </p:txBody>
@@ -17221,7 +20652,7 @@
                 <a:ea typeface="Microsoft YaHei"/>
                 <a:cs typeface="Microsoft YaHei"/>
               </a:rPr>
-              <a:t>Gen1 零样本基线 → Gen2 千人千面 → Gen3 Token 嵌入大模型</a:t>
+              <a:t>输入输出只描述数据形态，不含场景语义</a:t>
             </a:r>
           </a:p>
         </p:txBody>
@@ -17303,7 +20734,7 @@
                 <a:ea typeface="Microsoft YaHei"/>
                 <a:cs typeface="Microsoft YaHei"/>
               </a:rPr>
-              <a:t>接口不变，能力逐代升级；每代回答一个业务问题。</a:t>
+              <a:t>立项口径：每个字段、每个返回结构都可考核、可验收。</a:t>
             </a:r>
           </a:p>
         </p:txBody>
@@ -17316,8 +20747,8 @@
         </p:nvSpPr>
         <p:spPr>
           <a:xfrm>
-            <a:off x="411480" y="1417320"/>
-            <a:ext cx="2788920" cy="3566160"/>
+            <a:off x="457200" y="1371600"/>
+            <a:ext cx="5577840" cy="4206240"/>
           </a:xfrm>
           <a:prstGeom prst="roundRect">
             <a:avLst>
@@ -17363,8 +20794,8 @@
         </p:nvSpPr>
         <p:spPr>
           <a:xfrm>
-            <a:off x="411480" y="1417320"/>
-            <a:ext cx="2788920" cy="73152"/>
+            <a:off x="457200" y="1371600"/>
+            <a:ext cx="5577840" cy="73152"/>
           </a:xfrm>
           <a:prstGeom prst="rect">
             <a:avLst/>
@@ -17406,8 +20837,8 @@
         </p:nvSpPr>
         <p:spPr>
           <a:xfrm>
-            <a:off x="548640" y="1645920"/>
-            <a:ext cx="2514600" cy="365760"/>
+            <a:off x="640080" y="1600200"/>
+            <a:ext cx="5212080" cy="365760"/>
           </a:xfrm>
           <a:prstGeom prst="rect">
             <a:avLst/>
@@ -17424,7 +20855,7 @@
               </a:spcAft>
             </a:pPr>
             <a:r>
-              <a:rPr sz="1600" b="1">
+              <a:rPr sz="1700" b="1">
                 <a:solidFill>
                   <a:srgbClr val="C7000B"/>
                 </a:solidFill>
@@ -17432,7 +20863,7 @@
                 <a:ea typeface="Microsoft YaHei"/>
                 <a:cs typeface="Microsoft YaHei"/>
               </a:rPr>
-              <a:t>Gen1  零样本基线</a:t>
+              <a:t>输入规格（唯一入口）</a:t>
             </a:r>
           </a:p>
         </p:txBody>
@@ -17445,8 +20876,8 @@
         </p:nvSpPr>
         <p:spPr>
           <a:xfrm>
-            <a:off x="548640" y="2148840"/>
-            <a:ext cx="2514600" cy="2651760"/>
+            <a:off x="640080" y="2103120"/>
+            <a:ext cx="5212080" cy="3291840"/>
           </a:xfrm>
           <a:prstGeom prst="rect">
             <a:avLst/>
@@ -17463,7 +20894,7 @@
               </a:spcAft>
             </a:pPr>
             <a:r>
-              <a:rPr sz="1200" b="0">
+              <a:rPr sz="1300" b="0">
                 <a:solidFill>
                   <a:srgbClr val="555757"/>
                 </a:solidFill>
@@ -17471,17 +20902,17 @@
                 <a:ea typeface="Microsoft YaHei"/>
                 <a:cs typeface="Microsoft YaHei"/>
               </a:rPr>
-              <a:t>预训练底座直接上岗。</a:t>
-            </a:r>
-          </a:p>
-          <a:p>
-            <a:pPr algn="l">
-              <a:spcAft>
-                <a:spcPts val="200"/>
-              </a:spcAft>
-            </a:pPr>
-            <a:r>
-              <a:rPr sz="1200" b="0">
+              <a:t>字段：序列 id / 时间戳 / 数值 / 量纲单位 / 质量位 / 变元角色。</a:t>
+            </a:r>
+          </a:p>
+          <a:p>
+            <a:pPr algn="l">
+              <a:spcAft>
+                <a:spcPts val="200"/>
+              </a:spcAft>
+            </a:pPr>
+            <a:r>
+              <a:rPr sz="1300" b="0">
                 <a:solidFill>
                   <a:srgbClr val="555757"/>
                 </a:solidFill>
@@ -17489,17 +20920,17 @@
                 <a:ea typeface="Microsoft YaHei"/>
                 <a:cs typeface="Microsoft YaHei"/>
               </a:rPr>
-              <a:t>预测零样本（TimesFM-3）；</a:t>
-            </a:r>
-          </a:p>
-          <a:p>
-            <a:pPr algn="l">
-              <a:spcAft>
-                <a:spcPts val="200"/>
-              </a:spcAft>
-            </a:pPr>
-            <a:r>
-              <a:rPr sz="1200" b="0">
+              <a:t>六字段缺一不可，缺即拒收。</a:t>
+            </a:r>
+          </a:p>
+          <a:p>
+            <a:pPr algn="l">
+              <a:spcAft>
+                <a:spcPts val="200"/>
+              </a:spcAft>
+            </a:pPr>
+            <a:r>
+              <a:rPr sz="1300" b="0">
                 <a:solidFill>
                   <a:srgbClr val="555757"/>
                 </a:solidFill>
@@ -17507,17 +20938,17 @@
                 <a:ea typeface="Microsoft YaHei"/>
                 <a:cs typeface="Microsoft YaHei"/>
               </a:rPr>
-              <a:t>分类走规则 / 线性探针（UniTS / MOMENT）。</a:t>
-            </a:r>
-          </a:p>
-          <a:p>
-            <a:pPr algn="l">
-              <a:spcAft>
-                <a:spcPts val="200"/>
-              </a:spcAft>
-            </a:pPr>
-            <a:r>
-              <a:rPr sz="1200" b="0">
+              <a:t/>
+            </a:r>
+          </a:p>
+          <a:p>
+            <a:pPr algn="l">
+              <a:spcAft>
+                <a:spcPts val="200"/>
+              </a:spcAft>
+            </a:pPr>
+            <a:r>
+              <a:rPr sz="1300" b="0">
                 <a:solidFill>
                   <a:srgbClr val="555757"/>
                 </a:solidFill>
@@ -17525,7 +20956,79 @@
                 <a:ea typeface="Microsoft YaHei"/>
                 <a:cs typeface="Microsoft YaHei"/>
               </a:rPr>
-              <a:t>回答：底座行不行 → 统一评测基线。</a:t>
+              <a:t>变元：目标 / 仅历史 / 历史+未来；覆盖 IMU / EMG / TP；上限 32。</a:t>
+            </a:r>
+          </a:p>
+          <a:p>
+            <a:pPr algn="l">
+              <a:spcAft>
+                <a:spcPts val="200"/>
+              </a:spcAft>
+            </a:pPr>
+            <a:r>
+              <a:rPr sz="1300" b="0">
+                <a:solidFill>
+                  <a:srgbClr val="555757"/>
+                </a:solidFill>
+                <a:latin typeface="Microsoft YaHei"/>
+                <a:ea typeface="Microsoft YaHei"/>
+                <a:cs typeface="Microsoft YaHei"/>
+              </a:rPr>
+              <a:t/>
+            </a:r>
+          </a:p>
+          <a:p>
+            <a:pPr algn="l">
+              <a:spcAft>
+                <a:spcPts val="200"/>
+              </a:spcAft>
+            </a:pPr>
+            <a:r>
+              <a:rPr sz="1300" b="0">
+                <a:solidFill>
+                  <a:srgbClr val="555757"/>
+                </a:solidFill>
+                <a:latin typeface="Microsoft YaHei"/>
+                <a:ea typeface="Microsoft YaHei"/>
+                <a:cs typeface="Microsoft YaHei"/>
+              </a:rPr>
+              <a:t>规模：历史段 ≤ 15,360 点（对齐 TimesFM-3，换底座可上调）。</a:t>
+            </a:r>
+          </a:p>
+          <a:p>
+            <a:pPr algn="l">
+              <a:spcAft>
+                <a:spcPts val="200"/>
+              </a:spcAft>
+            </a:pPr>
+            <a:r>
+              <a:rPr sz="1300" b="0">
+                <a:solidFill>
+                  <a:srgbClr val="555757"/>
+                </a:solidFill>
+                <a:latin typeface="Microsoft YaHei"/>
+                <a:ea typeface="Microsoft YaHei"/>
+                <a:cs typeface="Microsoft YaHei"/>
+              </a:rPr>
+              <a:t/>
+            </a:r>
+          </a:p>
+          <a:p>
+            <a:pPr algn="l">
+              <a:spcAft>
+                <a:spcPts val="200"/>
+              </a:spcAft>
+            </a:pPr>
+            <a:r>
+              <a:rPr sz="1300" b="0">
+                <a:solidFill>
+                  <a:srgbClr val="555757"/>
+                </a:solidFill>
+                <a:latin typeface="Microsoft YaHei"/>
+                <a:ea typeface="Microsoft YaHei"/>
+                <a:cs typeface="Microsoft YaHei"/>
+              </a:rPr>
+              <a:t>采样率：档位制 10 / 50 / 100 / 200 Hz；超档自动重采样并记入质量位。</a:t>
             </a:r>
           </a:p>
         </p:txBody>
@@ -17538,8 +21041,8 @@
         </p:nvSpPr>
         <p:spPr>
           <a:xfrm>
-            <a:off x="3337560" y="1417320"/>
-            <a:ext cx="2788920" cy="3566160"/>
+            <a:off x="6217920" y="1371600"/>
+            <a:ext cx="5486400" cy="4206240"/>
           </a:xfrm>
           <a:prstGeom prst="roundRect">
             <a:avLst>
@@ -17585,14 +21088,14 @@
         </p:nvSpPr>
         <p:spPr>
           <a:xfrm>
-            <a:off x="3337560" y="1417320"/>
-            <a:ext cx="2788920" cy="73152"/>
+            <a:off x="6217920" y="1371600"/>
+            <a:ext cx="5486400" cy="73152"/>
           </a:xfrm>
           <a:prstGeom prst="rect">
             <a:avLst/>
           </a:prstGeom>
           <a:solidFill>
-            <a:srgbClr val="ED6D00"/>
+            <a:srgbClr val="62B230"/>
           </a:solidFill>
           <a:ln>
             <a:noFill/>
@@ -17628,8 +21131,8 @@
         </p:nvSpPr>
         <p:spPr>
           <a:xfrm>
-            <a:off x="3474720" y="1645920"/>
-            <a:ext cx="2514600" cy="365760"/>
+            <a:off x="6400800" y="1600200"/>
+            <a:ext cx="5120640" cy="365760"/>
           </a:xfrm>
           <a:prstGeom prst="rect">
             <a:avLst/>
@@ -17646,15 +21149,15 @@
               </a:spcAft>
             </a:pPr>
             <a:r>
-              <a:rPr sz="1600" b="1">
-                <a:solidFill>
-                  <a:srgbClr val="ED6D00"/>
-                </a:solidFill>
-                <a:latin typeface="Microsoft YaHei"/>
-                <a:ea typeface="Microsoft YaHei"/>
-                <a:cs typeface="Microsoft YaHei"/>
-              </a:rPr>
-              <a:t>Gen2  千人千面</a:t>
+              <a:rPr sz="1700" b="1">
+                <a:solidFill>
+                  <a:srgbClr val="62B230"/>
+                </a:solidFill>
+                <a:latin typeface="Microsoft YaHei"/>
+                <a:ea typeface="Microsoft YaHei"/>
+                <a:cs typeface="Microsoft YaHei"/>
+              </a:rPr>
+              <a:t>输出规格（结构冻结）</a:t>
             </a:r>
           </a:p>
         </p:txBody>
@@ -17667,8 +21170,8 @@
         </p:nvSpPr>
         <p:spPr>
           <a:xfrm>
-            <a:off x="3474720" y="2148840"/>
-            <a:ext cx="2514600" cy="2651760"/>
+            <a:off x="6400800" y="2103120"/>
+            <a:ext cx="5120640" cy="3291840"/>
           </a:xfrm>
           <a:prstGeom prst="rect">
             <a:avLst/>
@@ -17685,7 +21188,7 @@
               </a:spcAft>
             </a:pPr>
             <a:r>
-              <a:rPr sz="1200" b="0">
+              <a:rPr sz="1300" b="0">
                 <a:solidFill>
                   <a:srgbClr val="555757"/>
                 </a:solidFill>
@@ -17693,17 +21196,17 @@
                 <a:ea typeface="Microsoft YaHei"/>
                 <a:cs typeface="Microsoft YaHei"/>
               </a:rPr>
-              <a:t>轻量适配到每设备、每用户。</a:t>
-            </a:r>
-          </a:p>
-          <a:p>
-            <a:pPr algn="l">
-              <a:spcAft>
-                <a:spcPts val="200"/>
-              </a:spcAft>
-            </a:pPr>
-            <a:r>
-              <a:rPr sz="1200" b="0">
+              <a:t>预测接口 → {分位数 (V,H,9), 点预测 (V,H)}。</a:t>
+            </a:r>
+          </a:p>
+          <a:p>
+            <a:pPr algn="l">
+              <a:spcAft>
+                <a:spcPts val="200"/>
+              </a:spcAft>
+            </a:pPr>
+            <a:r>
+              <a:rPr sz="1300" b="0">
                 <a:solidFill>
                   <a:srgbClr val="555757"/>
                 </a:solidFill>
@@ -17711,17 +21214,17 @@
                 <a:ea typeface="Microsoft YaHei"/>
                 <a:cs typeface="Microsoft YaHei"/>
               </a:rPr>
-              <a:t>LoRA / 提示微调：TartanIMU 仅 1.1M 参数；</a:t>
-            </a:r>
-          </a:p>
-          <a:p>
-            <a:pPr algn="l">
-              <a:spcAft>
-                <a:spcPts val="200"/>
-              </a:spcAft>
-            </a:pPr>
-            <a:r>
-              <a:rPr sz="1200" b="0">
+              <a:t/>
+            </a:r>
+          </a:p>
+          <a:p>
+            <a:pPr algn="l">
+              <a:spcAft>
+                <a:spcPts val="200"/>
+              </a:spcAft>
+            </a:pPr>
+            <a:r>
+              <a:rPr sz="1300" b="0">
                 <a:solidFill>
                   <a:srgbClr val="555757"/>
                 </a:solidFill>
@@ -17729,17 +21232,17 @@
                 <a:ea typeface="Microsoft YaHei"/>
                 <a:cs typeface="Microsoft YaHei"/>
               </a:rPr>
-              <a:t>Meta EMG 个性化后再 +16%。</a:t>
-            </a:r>
-          </a:p>
-          <a:p>
-            <a:pPr algn="l">
-              <a:spcAft>
-                <a:spcPts val="200"/>
-              </a:spcAft>
-            </a:pPr>
-            <a:r>
-              <a:rPr sz="1200" b="0">
+              <a:t>分类接口 → {类别, 置信度}；类别表由场景方注册。</a:t>
+            </a:r>
+          </a:p>
+          <a:p>
+            <a:pPr algn="l">
+              <a:spcAft>
+                <a:spcPts val="200"/>
+              </a:spcAft>
+            </a:pPr>
+            <a:r>
+              <a:rPr sz="1300" b="0">
                 <a:solidFill>
                   <a:srgbClr val="555757"/>
                 </a:solidFill>
@@ -17747,167 +21250,17 @@
                 <a:ea typeface="Microsoft YaHei"/>
                 <a:cs typeface="Microsoft YaHei"/>
               </a:rPr>
-              <a:t>回答：换设备换人还行不行 → 画像进数据规格。</a:t>
-            </a:r>
-          </a:p>
-        </p:txBody>
-      </p:sp>
-      <p:sp>
-        <p:nvSpPr>
-          <p:cNvPr id="15" name="Rounded Rectangle 14"/>
-          <p:cNvSpPr/>
-          <p:nvPr/>
-        </p:nvSpPr>
-        <p:spPr>
-          <a:xfrm>
-            <a:off x="6263640" y="1417320"/>
-            <a:ext cx="2788920" cy="3566160"/>
-          </a:xfrm>
-          <a:prstGeom prst="roundRect">
-            <a:avLst>
-              <a:gd name="adj" fmla="val 5000"/>
-            </a:avLst>
-          </a:prstGeom>
-          <a:solidFill>
-            <a:srgbClr val="FFFFFF"/>
-          </a:solidFill>
-          <a:ln w="9525">
-            <a:solidFill>
-              <a:srgbClr val="DDDDDD"/>
-            </a:solidFill>
-          </a:ln>
-        </p:spPr>
-        <p:style>
-          <a:lnRef idx="1">
-            <a:schemeClr val="accent1"/>
-          </a:lnRef>
-          <a:fillRef idx="3">
-            <a:schemeClr val="accent1"/>
-          </a:fillRef>
-          <a:effectRef idx="2">
-            <a:schemeClr val="accent1"/>
-          </a:effectRef>
-          <a:fontRef idx="minor">
-            <a:schemeClr val="lt1"/>
-          </a:fontRef>
-        </p:style>
-        <p:txBody>
-          <a:bodyPr rtlCol="0" anchor="ctr"/>
-          <a:lstStyle/>
-          <a:p>
-            <a:pPr algn="ctr"/>
-          </a:p>
-        </p:txBody>
-      </p:sp>
-      <p:sp>
-        <p:nvSpPr>
-          <p:cNvPr id="16" name="Rectangle 15"/>
-          <p:cNvSpPr/>
-          <p:nvPr/>
-        </p:nvSpPr>
-        <p:spPr>
-          <a:xfrm>
-            <a:off x="6263640" y="1417320"/>
-            <a:ext cx="2788920" cy="73152"/>
-          </a:xfrm>
-          <a:prstGeom prst="rect">
-            <a:avLst/>
-          </a:prstGeom>
-          <a:solidFill>
-            <a:srgbClr val="30B5C5"/>
-          </a:solidFill>
-          <a:ln>
-            <a:noFill/>
-          </a:ln>
-        </p:spPr>
-        <p:style>
-          <a:lnRef idx="1">
-            <a:schemeClr val="accent1"/>
-          </a:lnRef>
-          <a:fillRef idx="3">
-            <a:schemeClr val="accent1"/>
-          </a:fillRef>
-          <a:effectRef idx="2">
-            <a:schemeClr val="accent1"/>
-          </a:effectRef>
-          <a:fontRef idx="minor">
-            <a:schemeClr val="lt1"/>
-          </a:fontRef>
-        </p:style>
-        <p:txBody>
-          <a:bodyPr rtlCol="0" anchor="ctr"/>
-          <a:lstStyle/>
-          <a:p>
-            <a:pPr algn="ctr"/>
-          </a:p>
-        </p:txBody>
-      </p:sp>
-      <p:sp>
-        <p:nvSpPr>
-          <p:cNvPr id="17" name="TextBox 16"/>
-          <p:cNvSpPr txBox="1"/>
-          <p:nvPr/>
-        </p:nvSpPr>
-        <p:spPr>
-          <a:xfrm>
-            <a:off x="6400800" y="1645920"/>
-            <a:ext cx="2514600" cy="365760"/>
-          </a:xfrm>
-          <a:prstGeom prst="rect">
-            <a:avLst/>
-          </a:prstGeom>
-          <a:noFill/>
-        </p:spPr>
-        <p:txBody>
-          <a:bodyPr wrap="square" anchor="t"/>
-          <a:lstStyle/>
-          <a:p>
-            <a:pPr algn="l">
-              <a:spcAft>
-                <a:spcPts val="200"/>
-              </a:spcAft>
-            </a:pPr>
-            <a:r>
-              <a:rPr sz="1600" b="1">
-                <a:solidFill>
-                  <a:srgbClr val="30B5C5"/>
-                </a:solidFill>
-                <a:latin typeface="Microsoft YaHei"/>
-                <a:ea typeface="Microsoft YaHei"/>
-                <a:cs typeface="Microsoft YaHei"/>
-              </a:rPr>
-              <a:t>Gen3  Token 嵌入大模型</a:t>
-            </a:r>
-          </a:p>
-        </p:txBody>
-      </p:sp>
-      <p:sp>
-        <p:nvSpPr>
-          <p:cNvPr id="18" name="TextBox 17"/>
-          <p:cNvSpPr txBox="1"/>
-          <p:nvPr/>
-        </p:nvSpPr>
-        <p:spPr>
-          <a:xfrm>
-            <a:off x="6400800" y="2148840"/>
-            <a:ext cx="2514600" cy="2651760"/>
-          </a:xfrm>
-          <a:prstGeom prst="rect">
-            <a:avLst/>
-          </a:prstGeom>
-          <a:noFill/>
-        </p:spPr>
-        <p:txBody>
-          <a:bodyPr wrap="square" anchor="t"/>
-          <a:lstStyle/>
-          <a:p>
-            <a:pPr algn="l">
-              <a:spcAft>
-                <a:spcPts val="200"/>
-              </a:spcAft>
-            </a:pPr>
-            <a:r>
-              <a:rPr sz="1200" b="0">
+              <a:t/>
+            </a:r>
+          </a:p>
+          <a:p>
+            <a:pPr algn="l">
+              <a:spcAft>
+                <a:spcPts val="200"/>
+              </a:spcAft>
+            </a:pPr>
+            <a:r>
+              <a:rPr sz="1300" b="0">
                 <a:solidFill>
                   <a:srgbClr val="555757"/>
                 </a:solidFill>
@@ -17915,17 +21268,17 @@
                 <a:ea typeface="Microsoft YaHei"/>
                 <a:cs typeface="Microsoft YaHei"/>
               </a:rPr>
-              <a:t>物理 patch token 作为新模态注入大模型。</a:t>
-            </a:r>
-          </a:p>
-          <a:p>
-            <a:pPr algn="l">
-              <a:spcAft>
-                <a:spcPts val="200"/>
-              </a:spcAft>
-            </a:pPr>
-            <a:r>
-              <a:rPr sz="1200" b="0">
+              <a:t>场景语义（类别表 / 预测时长 / 告警阈值）不进平台接口——「平台不做场景」的落法。</a:t>
+            </a:r>
+          </a:p>
+          <a:p>
+            <a:pPr algn="l">
+              <a:spcAft>
+                <a:spcPts val="200"/>
+              </a:spcAft>
+            </a:pPr>
+            <a:r>
+              <a:rPr sz="1300" b="0">
                 <a:solidFill>
                   <a:srgbClr val="555757"/>
                 </a:solidFill>
@@ -17933,17 +21286,17 @@
                 <a:ea typeface="Microsoft YaHei"/>
                 <a:cs typeface="Microsoft YaHei"/>
               </a:rPr>
-              <a:t>预测 + 分类变成大模型的原生能力；</a:t>
-            </a:r>
-          </a:p>
-          <a:p>
-            <a:pPr algn="l">
-              <a:spcAft>
-                <a:spcPts val="200"/>
-              </a:spcAft>
-            </a:pPr>
-            <a:r>
-              <a:rPr sz="1200" b="0">
+              <a:t/>
+            </a:r>
+          </a:p>
+          <a:p>
+            <a:pPr algn="l">
+              <a:spcAft>
+                <a:spcPts val="200"/>
+              </a:spcAft>
+            </a:pPr>
+            <a:r>
+              <a:rPr sz="1300" b="0">
                 <a:solidFill>
                   <a:srgbClr val="555757"/>
                 </a:solidFill>
@@ -17951,118 +21304,14 @@
                 <a:ea typeface="Microsoft YaHei"/>
                 <a:cs typeface="Microsoft YaHei"/>
               </a:rPr>
-              <a:t>平台从「提供模型」变成「提供 token 与接口」。</a:t>
-            </a:r>
-          </a:p>
-          <a:p>
-            <a:pPr algn="l">
-              <a:spcAft>
-                <a:spcPts val="200"/>
-              </a:spcAft>
-            </a:pPr>
-            <a:r>
-              <a:rPr sz="1200" b="0">
-                <a:solidFill>
-                  <a:srgbClr val="555757"/>
-                </a:solidFill>
-                <a:latin typeface="Microsoft YaHei"/>
-                <a:ea typeface="Microsoft YaHei"/>
-                <a:cs typeface="Microsoft YaHei"/>
-              </a:rPr>
-              <a:t>回答：物理感知如何进入统一智能。</a:t>
-            </a:r>
-          </a:p>
-        </p:txBody>
-      </p:sp>
-      <p:sp>
-        <p:nvSpPr>
-          <p:cNvPr id="19" name="Rounded Rectangle 18"/>
-          <p:cNvSpPr/>
-          <p:nvPr/>
-        </p:nvSpPr>
-        <p:spPr>
-          <a:xfrm>
-            <a:off x="457200" y="5120640"/>
-            <a:ext cx="11247120" cy="822960"/>
-          </a:xfrm>
-          <a:prstGeom prst="roundRect">
-            <a:avLst>
-              <a:gd name="adj" fmla="val 5000"/>
-            </a:avLst>
-          </a:prstGeom>
-          <a:solidFill>
-            <a:srgbClr val="F7F7F7"/>
-          </a:solidFill>
-          <a:ln w="9525">
-            <a:solidFill>
-              <a:srgbClr val="DDDDDD"/>
-            </a:solidFill>
-          </a:ln>
-        </p:spPr>
-        <p:style>
-          <a:lnRef idx="1">
-            <a:schemeClr val="accent1"/>
-          </a:lnRef>
-          <a:fillRef idx="3">
-            <a:schemeClr val="accent1"/>
-          </a:fillRef>
-          <a:effectRef idx="2">
-            <a:schemeClr val="accent1"/>
-          </a:effectRef>
-          <a:fontRef idx="minor">
-            <a:schemeClr val="lt1"/>
-          </a:fontRef>
-        </p:style>
-        <p:txBody>
-          <a:bodyPr rtlCol="0" anchor="ctr"/>
-          <a:lstStyle/>
-          <a:p>
-            <a:pPr algn="ctr"/>
-          </a:p>
-        </p:txBody>
-      </p:sp>
-      <p:sp>
-        <p:nvSpPr>
-          <p:cNvPr id="20" name="TextBox 19"/>
-          <p:cNvSpPr txBox="1"/>
-          <p:nvPr/>
-        </p:nvSpPr>
-        <p:spPr>
-          <a:xfrm>
-            <a:off x="640080" y="5257800"/>
-            <a:ext cx="10881360" cy="548640"/>
-          </a:xfrm>
-          <a:prstGeom prst="rect">
-            <a:avLst/>
-          </a:prstGeom>
-          <a:noFill/>
-        </p:spPr>
-        <p:txBody>
-          <a:bodyPr wrap="square" anchor="t"/>
-          <a:lstStyle/>
-          <a:p>
-            <a:pPr algn="l">
-              <a:spcAft>
-                <a:spcPts val="200"/>
-              </a:spcAft>
-            </a:pPr>
-            <a:r>
-              <a:rPr sz="1400" b="1">
-                <a:solidFill>
-                  <a:srgbClr val="C7000B"/>
-                </a:solidFill>
-                <a:latin typeface="Microsoft YaHei"/>
-                <a:ea typeface="Microsoft YaHei"/>
-                <a:cs typeface="Microsoft YaHei"/>
-              </a:rPr>
-              <a:t>演进原则：接口（接入 / 预测 / 分类）向下兼容；底座、权重、头可独立替换。</a:t>
-            </a:r>
-          </a:p>
-        </p:txBody>
-      </p:sp>
-      <p:sp>
-        <p:nvSpPr>
-          <p:cNvPr id="21" name="Rectangle 20"/>
+              <a:t>版本化：接口升级向下兼容，旧调用不破坏。</a:t>
+            </a:r>
+          </a:p>
+        </p:txBody>
+      </p:sp>
+      <p:sp>
+        <p:nvSpPr>
+          <p:cNvPr id="15" name="Rectangle 14"/>
           <p:cNvSpPr/>
           <p:nvPr/>
         </p:nvSpPr>
@@ -18105,7 +21354,7 @@
       </p:sp>
       <p:sp>
         <p:nvSpPr>
-          <p:cNvPr id="22" name="TextBox 21"/>
+          <p:cNvPr id="16" name="TextBox 15"/>
           <p:cNvSpPr txBox="1"/>
           <p:nvPr/>
         </p:nvSpPr>
@@ -18137,14 +21386,14 @@
                 <a:ea typeface="Microsoft YaHei"/>
                 <a:cs typeface="Microsoft YaHei"/>
               </a:rPr>
-              <a:t>华为  ·  AI 物理感知平台  ·  代际演进    |    Security Level: Internal</a:t>
-            </a:r>
-          </a:p>
-        </p:txBody>
-      </p:sp>
-      <p:sp>
-        <p:nvSpPr>
-          <p:cNvPr id="23" name="TextBox 22"/>
+              <a:t>华为  ·  AI 物理感知平台  ·  接口规格    |    Security Level: Internal</a:t>
+            </a:r>
+          </a:p>
+        </p:txBody>
+      </p:sp>
+      <p:sp>
+        <p:nvSpPr>
+          <p:cNvPr id="17" name="TextBox 16"/>
           <p:cNvSpPr txBox="1"/>
           <p:nvPr/>
         </p:nvSpPr>
@@ -18176,7 +21425,7 @@
                 <a:ea typeface="Microsoft YaHei"/>
                 <a:cs typeface="Microsoft YaHei"/>
               </a:rPr>
-              <a:t>9  /  9</a:t>
+              <a:t>9  /  11</a:t>
             </a:r>
           </a:p>
         </p:txBody>

--- a/AI物理感知平台-华为汇报.pptx
+++ b/AI物理感知平台-华为汇报.pptx
@@ -6782,7 +6782,7 @@
         <p:spPr>
           <a:xfrm>
             <a:off x="640080" y="2834640"/>
-            <a:ext cx="10881360" cy="1097280"/>
+            <a:ext cx="10881360" cy="1325880"/>
           </a:xfrm>
           <a:prstGeom prst="roundRect">
             <a:avLst>
@@ -6828,8 +6828,8 @@
         </p:nvSpPr>
         <p:spPr>
           <a:xfrm>
-            <a:off x="868680" y="2971800"/>
-            <a:ext cx="10424160" cy="868680"/>
+            <a:off x="868680" y="2944368"/>
+            <a:ext cx="10424160" cy="1143000"/>
           </a:xfrm>
           <a:prstGeom prst="rect">
             <a:avLst/>
@@ -6846,7 +6846,7 @@
               </a:spcAft>
             </a:pPr>
             <a:r>
-              <a:rPr sz="1500" b="0">
+              <a:rPr sz="1400" b="0">
                 <a:solidFill>
                   <a:srgbClr val="555757"/>
                 </a:solidFill>
@@ -6864,7 +6864,7 @@
               </a:spcAft>
             </a:pPr>
             <a:r>
-              <a:rPr sz="1500" b="0">
+              <a:rPr sz="1400" b="0">
                 <a:solidFill>
                   <a:srgbClr val="555757"/>
                 </a:solidFill>
@@ -6873,6 +6873,24 @@
                 <a:cs typeface="Microsoft YaHei"/>
               </a:rPr>
               <a:t>平台对策：统一 patch token 特征 + 统一推理接口；底座可换，接口不变。</a:t>
+            </a:r>
+          </a:p>
+          <a:p>
+            <a:pPr algn="l">
+              <a:spcAft>
+                <a:spcPts val="200"/>
+              </a:spcAft>
+            </a:pPr>
+            <a:r>
+              <a:rPr sz="1400" b="0">
+                <a:solidFill>
+                  <a:srgbClr val="555757"/>
+                </a:solidFill>
+                <a:latin typeface="Microsoft YaHei"/>
+                <a:ea typeface="Microsoft YaHei"/>
+                <a:cs typeface="Microsoft YaHei"/>
+              </a:rPr>
+              <a:t>首批接入特性：手机智感握姿、手表手势识别（敲一敲 / 划一划）。</a:t>
             </a:r>
           </a:p>
         </p:txBody>
@@ -6885,8 +6903,8 @@
         </p:nvSpPr>
         <p:spPr>
           <a:xfrm>
-            <a:off x="640080" y="4160520"/>
-            <a:ext cx="3520440" cy="1554480"/>
+            <a:off x="640080" y="4343400"/>
+            <a:ext cx="3520440" cy="1417320"/>
           </a:xfrm>
           <a:prstGeom prst="roundRect">
             <a:avLst>
@@ -6932,7 +6950,7 @@
         </p:nvSpPr>
         <p:spPr>
           <a:xfrm>
-            <a:off x="640080" y="4160520"/>
+            <a:off x="640080" y="4343400"/>
             <a:ext cx="3520440" cy="73152"/>
           </a:xfrm>
           <a:prstGeom prst="rect">
@@ -6975,7 +6993,7 @@
         </p:nvSpPr>
         <p:spPr>
           <a:xfrm>
-            <a:off x="822960" y="4343400"/>
+            <a:off x="822960" y="4498848"/>
             <a:ext cx="3154680" cy="320040"/>
           </a:xfrm>
           <a:prstGeom prst="rect">
@@ -7014,7 +7032,7 @@
         </p:nvSpPr>
         <p:spPr>
           <a:xfrm>
-            <a:off x="822960" y="4754880"/>
+            <a:off x="822960" y="4892040"/>
             <a:ext cx="3154680" cy="777240"/>
           </a:xfrm>
           <a:prstGeom prst="rect">
@@ -7053,8 +7071,8 @@
         </p:nvSpPr>
         <p:spPr>
           <a:xfrm>
-            <a:off x="4343400" y="4160520"/>
-            <a:ext cx="3520440" cy="1554480"/>
+            <a:off x="4343400" y="4343400"/>
+            <a:ext cx="3520440" cy="1417320"/>
           </a:xfrm>
           <a:prstGeom prst="roundRect">
             <a:avLst>
@@ -7100,7 +7118,7 @@
         </p:nvSpPr>
         <p:spPr>
           <a:xfrm>
-            <a:off x="4343400" y="4160520"/>
+            <a:off x="4343400" y="4343400"/>
             <a:ext cx="3520440" cy="73152"/>
           </a:xfrm>
           <a:prstGeom prst="rect">
@@ -7143,7 +7161,7 @@
         </p:nvSpPr>
         <p:spPr>
           <a:xfrm>
-            <a:off x="4526280" y="4343400"/>
+            <a:off x="4526280" y="4498848"/>
             <a:ext cx="3154680" cy="320040"/>
           </a:xfrm>
           <a:prstGeom prst="rect">
@@ -7182,7 +7200,7 @@
         </p:nvSpPr>
         <p:spPr>
           <a:xfrm>
-            <a:off x="4526280" y="4754880"/>
+            <a:off x="4526280" y="4892040"/>
             <a:ext cx="3154680" cy="777240"/>
           </a:xfrm>
           <a:prstGeom prst="rect">
@@ -7221,8 +7239,8 @@
         </p:nvSpPr>
         <p:spPr>
           <a:xfrm>
-            <a:off x="8046719" y="4160520"/>
-            <a:ext cx="3520440" cy="1554480"/>
+            <a:off x="8046719" y="4343400"/>
+            <a:ext cx="3520440" cy="1417320"/>
           </a:xfrm>
           <a:prstGeom prst="roundRect">
             <a:avLst>
@@ -7268,7 +7286,7 @@
         </p:nvSpPr>
         <p:spPr>
           <a:xfrm>
-            <a:off x="8046719" y="4160520"/>
+            <a:off x="8046719" y="4343400"/>
             <a:ext cx="3520440" cy="73152"/>
           </a:xfrm>
           <a:prstGeom prst="rect">
@@ -7311,7 +7329,7 @@
         </p:nvSpPr>
         <p:spPr>
           <a:xfrm>
-            <a:off x="8229599" y="4343400"/>
+            <a:off x="8229599" y="4498848"/>
             <a:ext cx="3154680" cy="320040"/>
           </a:xfrm>
           <a:prstGeom prst="rect">
@@ -7350,7 +7368,7 @@
         </p:nvSpPr>
         <p:spPr>
           <a:xfrm>
-            <a:off x="8229599" y="4754880"/>
+            <a:off x="8229599" y="4892040"/>
             <a:ext cx="3154680" cy="777240"/>
           </a:xfrm>
           <a:prstGeom prst="rect">
@@ -8536,7 +8554,7 @@
                 <a:ea typeface="Microsoft YaHei"/>
                 <a:cs typeface="Microsoft YaHei"/>
               </a:rPr>
-              <a:t>分类宏 F1</a:t>
+              <a:t>握姿四分类 / 手势宏 F1</a:t>
             </a:r>
           </a:p>
         </p:txBody>
@@ -8575,7 +8593,7 @@
                 <a:ea typeface="Microsoft YaHei"/>
                 <a:cs typeface="Microsoft YaHei"/>
               </a:rPr>
-              <a:t>LIMU-BERT-X / UniTS</a:t>
+              <a:t>现网启发式 + LIMU-BERT-X</a:t>
             </a:r>
           </a:p>
         </p:txBody>
@@ -9059,7 +9077,7 @@
                 <a:ea typeface="Microsoft YaHei"/>
                 <a:cs typeface="Microsoft YaHei"/>
               </a:rPr>
-              <a:t>TimesFM-3：M4 Max 11ms</a:t>
+              <a:t>现网握姿 200ms</a:t>
             </a:r>
           </a:p>
         </p:txBody>
@@ -9098,7 +9116,7 @@
                 <a:ea typeface="Microsoft YaHei"/>
                 <a:cs typeface="Microsoft YaHei"/>
               </a:rPr>
-              <a:t>手机 ≤ 30ms；手表 ≤ 50ms</a:t>
+              <a:t>握姿 ≤ 200ms；手表手势 p95 ≤ 50ms</a:t>
             </a:r>
           </a:p>
         </p:txBody>
@@ -9707,7 +9725,7 @@
                 <a:ea typeface="Microsoft YaHei"/>
                 <a:cs typeface="Microsoft YaHei"/>
               </a:rPr>
-              <a:t>代际绑定：Gen1 承诺精度基线 → Gen2 承诺泛化提升 → Gen3 承诺时延功耗；标杆任务：Meta 手势 0.88/s、LIMU-BERT-X 骑手、TartanIMU 200 FPS。</a:t>
+              <a:t>代际绑定：Gen1 承诺精度基线 → Gen2 承诺泛化提升 → Gen3 承诺时延功耗；标杆任务：智感握姿四分类（200ms）、WATCH 5 敲一敲/划一划、Meta 腕带 0.88 手势/s。</a:t>
             </a:r>
           </a:p>
         </p:txBody>
@@ -10235,7 +10253,7 @@
                 <a:ea typeface="Microsoft YaHei"/>
                 <a:cs typeface="Microsoft YaHei"/>
               </a:rPr>
-              <a:t>预测零样本（TimesFM-3）；</a:t>
+              <a:t>握姿 / 手势零样本基线；</a:t>
             </a:r>
           </a:p>
           <a:p>
@@ -10457,7 +10475,7 @@
                 <a:ea typeface="Microsoft YaHei"/>
                 <a:cs typeface="Microsoft YaHei"/>
               </a:rPr>
-              <a:t>LoRA / 提示微调：TartanIMU 仅 1.1M 参数；</a:t>
+              <a:t>左右手习惯、佩戴松紧、手套 / 纹身 → LoRA 个性化；</a:t>
             </a:r>
           </a:p>
           <a:p>
@@ -10475,7 +10493,7 @@
                 <a:ea typeface="Microsoft YaHei"/>
                 <a:cs typeface="Microsoft YaHei"/>
               </a:rPr>
-              <a:t>Meta EMG 个性化后再 +16%。</a:t>
+              <a:t>TartanIMU 仅 1.1M 参数、Meta EMG +16%。</a:t>
             </a:r>
           </a:p>
           <a:p>
@@ -11143,7 +11161,7 @@
                 <a:ea typeface="Microsoft YaHei"/>
                 <a:cs typeface="Microsoft YaHei"/>
               </a:rPr>
-              <a:t>来自一线业务复盘；每个痛点都对应后文一类模型能力。</a:t>
+              <a:t>以智感握姿、手表手势两个现网特性为镜；每个痛点都对应后文一类模型能力。</a:t>
             </a:r>
           </a:p>
         </p:txBody>
@@ -11329,7 +11347,7 @@
                 <a:ea typeface="Microsoft YaHei"/>
                 <a:cs typeface="Microsoft YaHei"/>
               </a:rPr>
-              <a:t>异构模态缺乏统一对齐。</a:t>
+              <a:t>智感握姿靠电容阵列 + IMU + 接近光启发式拼接；</a:t>
             </a:r>
           </a:p>
           <a:p>
@@ -11347,7 +11365,7 @@
                 <a:ea typeface="Microsoft YaHei"/>
                 <a:cs typeface="Microsoft YaHei"/>
               </a:rPr>
-              <a:t>IMU / EMG / TP 各自建模：量纲、采样率、时钟不一致；</a:t>
+              <a:t>手表 X-TAP（PPG / ECG / 触摸）与 IMU 各自为政。</a:t>
             </a:r>
           </a:p>
           <a:p>
@@ -11365,7 +11383,7 @@
                 <a:ea typeface="Microsoft YaHei"/>
                 <a:cs typeface="Microsoft YaHei"/>
               </a:rPr>
-              <a:t>跨模态信息互相看不见，融合靠人工拼特征。</a:t>
+              <a:t>异构模态缺统一对齐，融合靠人工拼特征。</a:t>
             </a:r>
           </a:p>
         </p:txBody>
@@ -11551,7 +11569,7 @@
                 <a:ea typeface="Microsoft YaHei"/>
                 <a:cs typeface="Microsoft YaHei"/>
               </a:rPr>
-              <a:t>基于单设备独立优化。</a:t>
+              <a:t>握姿仅支持部分机型（不支持直接返回 801）；</a:t>
             </a:r>
           </a:p>
           <a:p>
@@ -11569,7 +11587,7 @@
                 <a:ea typeface="Microsoft YaHei"/>
                 <a:cs typeface="Microsoft YaHei"/>
               </a:rPr>
-              <a:t>每款设备单独采数据、单独调参；</a:t>
+              <a:t>保护壳 &gt; 3mm、戴手套精度即掉；</a:t>
             </a:r>
           </a:p>
           <a:p>
@@ -11587,7 +11605,7 @@
                 <a:ea typeface="Microsoft YaHei"/>
                 <a:cs typeface="Microsoft YaHei"/>
               </a:rPr>
-              <a:t>换机型、换佩戴位置就要重新标定，成本线性增长。</a:t>
+              <a:t>WATCH 3 与 WATCH 5 手势集不通用——每机型单独标定。</a:t>
             </a:r>
           </a:p>
         </p:txBody>
@@ -11773,7 +11791,7 @@
                 <a:ea typeface="Microsoft YaHei"/>
                 <a:cs typeface="Microsoft YaHei"/>
               </a:rPr>
-              <a:t>算法针对特定场景设计。</a:t>
+              <a:t>跑步 / 骑行 / 高尔夫 / 滑雪下手表手势失效；</a:t>
             </a:r>
           </a:p>
           <a:p>
@@ -11791,7 +11809,7 @@
                 <a:ea typeface="Microsoft YaHei"/>
                 <a:cs typeface="Microsoft YaHei"/>
               </a:rPr>
-              <a:t>一个场景一个模型；新场景重新标注、重新训练；</a:t>
+              <a:t>纹身、汗水、油腻场景识别率骤降；</a:t>
             </a:r>
           </a:p>
           <a:p>
@@ -11809,7 +11827,7 @@
                 <a:ea typeface="Microsoft YaHei"/>
                 <a:cs typeface="Microsoft YaHei"/>
               </a:rPr>
-              <a:t>无法零样本启动，长尾场景覆盖不了。</a:t>
+              <a:t>新场景重新标注训练，无法零样本启动。</a:t>
             </a:r>
           </a:p>
         </p:txBody>
@@ -17636,7 +17654,7 @@
                 <a:ea typeface="Microsoft YaHei"/>
                 <a:cs typeface="Microsoft YaHei"/>
               </a:rPr>
-              <a:t>平台能力已被产业验证的三个方向</a:t>
+              <a:t>首批落地：智感握姿 + 手表手势，再向外延展</a:t>
             </a:r>
           </a:p>
         </p:txBody>
@@ -17847,7 +17865,7 @@
                 <a:ea typeface="Microsoft YaHei"/>
                 <a:cs typeface="Microsoft YaHei"/>
               </a:rPr>
-              <a:t>可穿戴运动健康</a:t>
+              <a:t>手机智感握姿</a:t>
             </a:r>
           </a:p>
         </p:txBody>
@@ -17886,7 +17904,7 @@
                 <a:ea typeface="Microsoft YaHei"/>
                 <a:cs typeface="Microsoft YaHei"/>
               </a:rPr>
-              <a:t>传感器：IMU / EMG（手表、手环、腕带）。</a:t>
+              <a:t>传感器：边框电容阵列 + IMU + 接近光。</a:t>
             </a:r>
           </a:p>
           <a:p>
@@ -17904,7 +17922,7 @@
                 <a:ea typeface="Microsoft YaHei"/>
                 <a:cs typeface="Microsoft YaHei"/>
               </a:rPr>
-              <a:t>能力：手势 / 活动分类 + 生理指标预测。</a:t>
+              <a:t>能力：左手/右手/双手/未握持四分类（200ms 内）+ 握姿切换预测。</a:t>
             </a:r>
           </a:p>
           <a:p>
@@ -17922,7 +17940,7 @@
                 <a:ea typeface="Microsoft YaHei"/>
                 <a:cs typeface="Microsoft YaHei"/>
               </a:rPr>
-              <a:t>验证：Meta 腕带随 Ray-Ban Display 出货；LIMU-BERT-X 端侧 HAR。</a:t>
+              <a:t>现网：MultimodalAwarenessKit，来电按钮跟手；仅部分机型。</a:t>
             </a:r>
           </a:p>
         </p:txBody>
@@ -18051,7 +18069,7 @@
                 <a:ea typeface="Microsoft YaHei"/>
                 <a:cs typeface="Microsoft YaHei"/>
               </a:rPr>
-              <a:t>终端情境感知</a:t>
+              <a:t>手表手势识别</a:t>
             </a:r>
           </a:p>
         </p:txBody>
@@ -18090,7 +18108,7 @@
                 <a:ea typeface="Microsoft YaHei"/>
                 <a:cs typeface="Microsoft YaHei"/>
               </a:rPr>
-              <a:t>传感器：IMU（手机、耳机）。</a:t>
+              <a:t>传感器：IMU + X-TAP（PPG / ECG / 触摸）。</a:t>
             </a:r>
           </a:p>
           <a:p>
@@ -18108,7 +18126,7 @@
                 <a:ea typeface="Microsoft YaHei"/>
                 <a:cs typeface="Microsoft YaHei"/>
               </a:rPr>
-              <a:t>能力：骑行 / 驾驶 / 跌倒识别 + 状态预测。</a:t>
+              <a:t>能力：敲一敲 / 划一划 / 握拳 / 翻腕分类 + 误触抑制。</a:t>
             </a:r>
           </a:p>
           <a:p>
@@ -18126,7 +18144,7 @@
                 <a:ea typeface="Microsoft YaHei"/>
                 <a:cs typeface="Microsoft YaHei"/>
               </a:rPr>
-              <a:t>验证：LIMU-BERT-X 外卖配送全国部署，6 万骑手、1.1K 种机型。</a:t>
+              <a:t>现网：WATCH 5 首配 NPU，接电话 / 遥控拍照 / 车钥匙解锁。</a:t>
             </a:r>
           </a:p>
         </p:txBody>
@@ -18255,7 +18273,7 @@
                 <a:ea typeface="Microsoft YaHei"/>
                 <a:cs typeface="Microsoft YaHei"/>
               </a:rPr>
-              <a:t>工业与机器人</a:t>
+              <a:t>运动健康与工业（延展）</a:t>
             </a:r>
           </a:p>
         </p:txBody>
@@ -18312,7 +18330,7 @@
                 <a:ea typeface="Microsoft YaHei"/>
                 <a:cs typeface="Microsoft YaHei"/>
               </a:rPr>
-              <a:t>能力：工况分类 + 预测性维护 + 位姿估计。</a:t>
+              <a:t>能力：活动识别 + 工况分类 + 预测性维护。</a:t>
             </a:r>
           </a:p>
           <a:p>
@@ -18330,7 +18348,7 @@
                 <a:ea typeface="Microsoft YaHei"/>
                 <a:cs typeface="Microsoft YaHei"/>
               </a:rPr>
-              <a:t>验证：TartanIMU 跨机器人平台，LoRA 1.1M 参数适配、200 FPS。</a:t>
+              <a:t>验证：LIMU-BERT-X 外卖全国部署；TartanIMU 跨机器人 200 FPS。</a:t>
             </a:r>
           </a:p>
         </p:txBody>

--- a/AI物理感知平台-华为汇报.pptx
+++ b/AI物理感知平台-华为汇报.pptx
@@ -25,6 +25,7 @@
     <p:sldId id="264" r:id="rId19"/>
     <p:sldId id="265" r:id="rId20"/>
     <p:sldId id="266" r:id="rId21"/>
+    <p:sldId id="267" r:id="rId22"/>
   </p:sldIdLst>
   <p:sldSz cx="12196763" cy="6858000"/>
   <p:notesSz cx="6858000" cy="9144000"/>
@@ -7433,7 +7434,7 @@
                 <a:ea typeface="Microsoft YaHei"/>
                 <a:cs typeface="Microsoft YaHei"/>
               </a:rPr>
-              <a:t>来源：TimesFM / UniTS / MOMENT / LIMU-BERT-X 公开资料  ·  11 页平台版</a:t>
+              <a:t>来源：TimesFM / UniTS / MOMENT / LIMU-BERT-X 公开资料  ·  12 页平台版</a:t>
             </a:r>
           </a:p>
         </p:txBody>
@@ -7472,7 +7473,7 @@
                 <a:ea typeface="Microsoft YaHei"/>
                 <a:cs typeface="Microsoft YaHei"/>
               </a:rPr>
-              <a:t>1  /  11</a:t>
+              <a:t>1  /  12</a:t>
             </a:r>
           </a:p>
         </p:txBody>
@@ -7611,7 +7612,7 @@
                 <a:ea typeface="Microsoft YaHei"/>
                 <a:cs typeface="Microsoft YaHei"/>
               </a:rPr>
-              <a:t>9  量化指标</a:t>
+              <a:t>9  平台层</a:t>
             </a:r>
           </a:p>
         </p:txBody>
@@ -7650,7 +7651,7 @@
                 <a:ea typeface="Microsoft YaHei"/>
                 <a:cs typeface="Microsoft YaHei"/>
               </a:rPr>
-              <a:t>每项指标 = 基线 + 目标值 + 测量方法 + 数据集</a:t>
+              <a:t>两个接口、四种原语、N 个特性</a:t>
             </a:r>
           </a:p>
         </p:txBody>
@@ -7732,7 +7733,7 @@
                 <a:ea typeface="Microsoft YaHei"/>
                 <a:cs typeface="Microsoft YaHei"/>
               </a:rPr>
-              <a:t>精度 / 时延 / 功耗三层，绑定代际承诺，标杆任务锚定公开数据。</a:t>
+              <a:t>特性爆炸的收法：不按特性抽象，按输出原语抽象；新特性 = 注册配置，不训练新模型。</a:t>
             </a:r>
           </a:p>
         </p:txBody>
@@ -7746,7 +7747,7 @@
         <p:spPr>
           <a:xfrm>
             <a:off x="548640" y="1298448"/>
-            <a:ext cx="1024128" cy="292608"/>
+            <a:ext cx="1847088" cy="292608"/>
           </a:xfrm>
           <a:prstGeom prst="rect">
             <a:avLst/>
@@ -7771,7 +7772,7 @@
                 <a:ea typeface="Microsoft YaHei"/>
                 <a:cs typeface="Microsoft YaHei"/>
               </a:rPr>
-              <a:t>层</a:t>
+              <a:t>特性</a:t>
             </a:r>
           </a:p>
         </p:txBody>
@@ -7784,8 +7785,8 @@
         </p:nvSpPr>
         <p:spPr>
           <a:xfrm>
-            <a:off x="1783080" y="1298448"/>
-            <a:ext cx="1755648" cy="292608"/>
+            <a:off x="2606040" y="1298448"/>
+            <a:ext cx="2487168" cy="292608"/>
           </a:xfrm>
           <a:prstGeom prst="rect">
             <a:avLst/>
@@ -7810,7 +7811,7 @@
                 <a:ea typeface="Microsoft YaHei"/>
                 <a:cs typeface="Microsoft YaHei"/>
               </a:rPr>
-              <a:t>指标</a:t>
+              <a:t>传感器</a:t>
             </a:r>
           </a:p>
         </p:txBody>
@@ -7823,8 +7824,8 @@
         </p:nvSpPr>
         <p:spPr>
           <a:xfrm>
-            <a:off x="3749039" y="1298448"/>
-            <a:ext cx="2304288" cy="292608"/>
+            <a:off x="5303520" y="1298448"/>
+            <a:ext cx="1389888" cy="292608"/>
           </a:xfrm>
           <a:prstGeom prst="rect">
             <a:avLst/>
@@ -7849,7 +7850,7 @@
                 <a:ea typeface="Microsoft YaHei"/>
                 <a:cs typeface="Microsoft YaHei"/>
               </a:rPr>
-              <a:t>基线 / 对标</a:t>
+              <a:t>原语</a:t>
             </a:r>
           </a:p>
         </p:txBody>
@@ -7862,8 +7863,8 @@
         </p:nvSpPr>
         <p:spPr>
           <a:xfrm>
-            <a:off x="6263640" y="1298448"/>
-            <a:ext cx="2944368" cy="292608"/>
+            <a:off x="6903720" y="1298448"/>
+            <a:ext cx="1755648" cy="292608"/>
           </a:xfrm>
           <a:prstGeom prst="rect">
             <a:avLst/>
@@ -7888,7 +7889,7 @@
                 <a:ea typeface="Microsoft YaHei"/>
                 <a:cs typeface="Microsoft YaHei"/>
               </a:rPr>
-              <a:t>目标值</a:t>
+              <a:t>窗口</a:t>
             </a:r>
           </a:p>
         </p:txBody>
@@ -7901,8 +7902,8 @@
         </p:nvSpPr>
         <p:spPr>
           <a:xfrm>
-            <a:off x="9418319" y="1298448"/>
-            <a:ext cx="2212848" cy="292608"/>
+            <a:off x="8869680" y="1298448"/>
+            <a:ext cx="2761488" cy="292608"/>
           </a:xfrm>
           <a:prstGeom prst="rect">
             <a:avLst/>
@@ -7927,7 +7928,7 @@
                 <a:ea typeface="Microsoft YaHei"/>
                 <a:cs typeface="Microsoft YaHei"/>
               </a:rPr>
-              <a:t>测量方法</a:t>
+              <a:t>关键指标</a:t>
             </a:r>
           </a:p>
         </p:txBody>
@@ -7941,7 +7942,7 @@
         <p:spPr>
           <a:xfrm>
             <a:off x="457200" y="1645920"/>
-            <a:ext cx="11247120" cy="512064"/>
+            <a:ext cx="11247120" cy="640080"/>
           </a:xfrm>
           <a:prstGeom prst="roundRect">
             <a:avLst>
@@ -7987,8 +7988,8 @@
         </p:nvSpPr>
         <p:spPr>
           <a:xfrm>
-            <a:off x="548640" y="1673352"/>
-            <a:ext cx="1024128" cy="457200"/>
+            <a:off x="548640" y="1682496"/>
+            <a:ext cx="1847088" cy="566928"/>
           </a:xfrm>
           <a:prstGeom prst="rect">
             <a:avLst/>
@@ -8005,7 +8006,7 @@
               </a:spcAft>
             </a:pPr>
             <a:r>
-              <a:rPr sz="1000" b="1">
+              <a:rPr sz="1200" b="1">
                 <a:solidFill>
                   <a:srgbClr val="C7000B"/>
                 </a:solidFill>
@@ -8013,7 +8014,7 @@
                 <a:ea typeface="Microsoft YaHei"/>
                 <a:cs typeface="Microsoft YaHei"/>
               </a:rPr>
-              <a:t>精度</a:t>
+              <a:t>智感握姿</a:t>
             </a:r>
           </a:p>
         </p:txBody>
@@ -8026,8 +8027,8 @@
         </p:nvSpPr>
         <p:spPr>
           <a:xfrm>
-            <a:off x="1783080" y="1673352"/>
-            <a:ext cx="1755648" cy="457200"/>
+            <a:off x="2606040" y="1682496"/>
+            <a:ext cx="2487168" cy="566928"/>
           </a:xfrm>
           <a:prstGeom prst="rect">
             <a:avLst/>
@@ -8052,7 +8053,7 @@
                 <a:ea typeface="Microsoft YaHei"/>
                 <a:cs typeface="Microsoft YaHei"/>
               </a:rPr>
-              <a:t>预测 MAE / MASE</a:t>
+              <a:t>电容阵列 + IMU + 接近光</a:t>
             </a:r>
           </a:p>
         </p:txBody>
@@ -8065,8 +8066,8 @@
         </p:nvSpPr>
         <p:spPr>
           <a:xfrm>
-            <a:off x="3749039" y="1673352"/>
-            <a:ext cx="2304288" cy="457200"/>
+            <a:off x="5303520" y="1682496"/>
+            <a:ext cx="1389888" cy="566928"/>
           </a:xfrm>
           <a:prstGeom prst="rect">
             <a:avLst/>
@@ -8083,15 +8084,15 @@
               </a:spcAft>
             </a:pPr>
             <a:r>
-              <a:rPr sz="1000" b="0">
-                <a:solidFill>
-                  <a:srgbClr val="555757"/>
-                </a:solidFill>
-                <a:latin typeface="Microsoft YaHei"/>
-                <a:ea typeface="Microsoft YaHei"/>
-                <a:cs typeface="Microsoft YaHei"/>
-              </a:rPr>
-              <a:t>TimesFM-3 零样本</a:t>
+              <a:rPr sz="1100" b="1">
+                <a:solidFill>
+                  <a:srgbClr val="0074CC"/>
+                </a:solidFill>
+                <a:latin typeface="Microsoft YaHei"/>
+                <a:ea typeface="Microsoft YaHei"/>
+                <a:cs typeface="Microsoft YaHei"/>
+              </a:rPr>
+              <a:t>状态分类</a:t>
             </a:r>
           </a:p>
         </p:txBody>
@@ -8104,8 +8105,8 @@
         </p:nvSpPr>
         <p:spPr>
           <a:xfrm>
-            <a:off x="6263640" y="1673352"/>
-            <a:ext cx="2944368" cy="457200"/>
+            <a:off x="6903720" y="1682496"/>
+            <a:ext cx="1755648" cy="566928"/>
           </a:xfrm>
           <a:prstGeom prst="rect">
             <a:avLst/>
@@ -8122,15 +8123,33 @@
               </a:spcAft>
             </a:pPr>
             <a:r>
-              <a:rPr sz="1000" b="1">
-                <a:solidFill>
-                  <a:srgbClr val="1A1A1A"/>
-                </a:solidFill>
-                <a:latin typeface="Microsoft YaHei"/>
-                <a:ea typeface="Microsoft YaHei"/>
-                <a:cs typeface="Microsoft YaHei"/>
-              </a:rPr>
-              <a:t>持平或更优；自研 ≤ 0.95×基线</a:t>
+              <a:rPr sz="1000" b="0">
+                <a:solidFill>
+                  <a:srgbClr val="555757"/>
+                </a:solidFill>
+                <a:latin typeface="Microsoft YaHei"/>
+                <a:ea typeface="Microsoft YaHei"/>
+                <a:cs typeface="Microsoft YaHei"/>
+              </a:rPr>
+              <a:t>长窗 · 秒级</a:t>
+            </a:r>
+          </a:p>
+          <a:p>
+            <a:pPr algn="l">
+              <a:spcAft>
+                <a:spcPts val="200"/>
+              </a:spcAft>
+            </a:pPr>
+            <a:r>
+              <a:rPr sz="1000" b="0">
+                <a:solidFill>
+                  <a:srgbClr val="555757"/>
+                </a:solidFill>
+                <a:latin typeface="Microsoft YaHei"/>
+                <a:ea typeface="Microsoft YaHei"/>
+                <a:cs typeface="Microsoft YaHei"/>
+              </a:rPr>
+              <a:t>带状态机</a:t>
             </a:r>
           </a:p>
         </p:txBody>
@@ -8143,8 +8162,8 @@
         </p:nvSpPr>
         <p:spPr>
           <a:xfrm>
-            <a:off x="9418319" y="1673352"/>
-            <a:ext cx="2212848" cy="457200"/>
+            <a:off x="8869680" y="1682496"/>
+            <a:ext cx="2761488" cy="566928"/>
           </a:xfrm>
           <a:prstGeom prst="rect">
             <a:avLst/>
@@ -8169,7 +8188,7 @@
                 <a:ea typeface="Microsoft YaHei"/>
                 <a:cs typeface="Microsoft YaHei"/>
               </a:rPr>
-              <a:t>公开 benchmark</a:t>
+              <a:t>宏 F1；切换 ≤ 200ms；</a:t>
             </a:r>
           </a:p>
           <a:p>
@@ -8187,7 +8206,7 @@
                 <a:ea typeface="Microsoft YaHei"/>
                 <a:cs typeface="Microsoft YaHei"/>
               </a:rPr>
-              <a:t>+ 自有数据集</a:t>
+              <a:t>稳态抖动率</a:t>
             </a:r>
           </a:p>
         </p:txBody>
@@ -8200,8 +8219,8 @@
         </p:nvSpPr>
         <p:spPr>
           <a:xfrm>
-            <a:off x="457200" y="2212848"/>
-            <a:ext cx="11247120" cy="512064"/>
+            <a:off x="457200" y="2359152"/>
+            <a:ext cx="11247120" cy="640080"/>
           </a:xfrm>
           <a:prstGeom prst="roundRect">
             <a:avLst>
@@ -8247,8 +8266,8 @@
         </p:nvSpPr>
         <p:spPr>
           <a:xfrm>
-            <a:off x="548640" y="2240280"/>
-            <a:ext cx="1024128" cy="457200"/>
+            <a:off x="548640" y="2395728"/>
+            <a:ext cx="1847088" cy="566928"/>
           </a:xfrm>
           <a:prstGeom prst="rect">
             <a:avLst/>
@@ -8265,7 +8284,7 @@
               </a:spcAft>
             </a:pPr>
             <a:r>
-              <a:rPr sz="1000" b="1">
+              <a:rPr sz="1200" b="1">
                 <a:solidFill>
                   <a:srgbClr val="C7000B"/>
                 </a:solidFill>
@@ -8273,7 +8292,7 @@
                 <a:ea typeface="Microsoft YaHei"/>
                 <a:cs typeface="Microsoft YaHei"/>
               </a:rPr>
-              <a:t>精度</a:t>
+              <a:t>敲一敲 / 划一划</a:t>
             </a:r>
           </a:p>
         </p:txBody>
@@ -8286,8 +8305,8 @@
         </p:nvSpPr>
         <p:spPr>
           <a:xfrm>
-            <a:off x="1783080" y="2240280"/>
-            <a:ext cx="1755648" cy="457200"/>
+            <a:off x="2606040" y="2395728"/>
+            <a:ext cx="2487168" cy="566928"/>
           </a:xfrm>
           <a:prstGeom prst="rect">
             <a:avLst/>
@@ -8312,7 +8331,7 @@
                 <a:ea typeface="Microsoft YaHei"/>
                 <a:cs typeface="Microsoft YaHei"/>
               </a:rPr>
-              <a:t>q10–q90 覆盖率</a:t>
+              <a:t>IMU + X-TAP</a:t>
             </a:r>
           </a:p>
         </p:txBody>
@@ -8325,8 +8344,8 @@
         </p:nvSpPr>
         <p:spPr>
           <a:xfrm>
-            <a:off x="3749039" y="2240280"/>
-            <a:ext cx="2304288" cy="457200"/>
+            <a:off x="5303520" y="2395728"/>
+            <a:ext cx="1389888" cy="566928"/>
           </a:xfrm>
           <a:prstGeom prst="rect">
             <a:avLst/>
@@ -8343,15 +8362,15 @@
               </a:spcAft>
             </a:pPr>
             <a:r>
-              <a:rPr sz="1000" b="0">
-                <a:solidFill>
-                  <a:srgbClr val="555757"/>
-                </a:solidFill>
-                <a:latin typeface="Microsoft YaHei"/>
-                <a:ea typeface="Microsoft YaHei"/>
-                <a:cs typeface="Microsoft YaHei"/>
-              </a:rPr>
-              <a:t>理论 80%</a:t>
+              <a:rPr sz="1100" b="1">
+                <a:solidFill>
+                  <a:srgbClr val="0074CC"/>
+                </a:solidFill>
+                <a:latin typeface="Microsoft YaHei"/>
+                <a:ea typeface="Microsoft YaHei"/>
+                <a:cs typeface="Microsoft YaHei"/>
+              </a:rPr>
+              <a:t>事件检测</a:t>
             </a:r>
           </a:p>
         </p:txBody>
@@ -8364,8 +8383,8 @@
         </p:nvSpPr>
         <p:spPr>
           <a:xfrm>
-            <a:off x="6263640" y="2240280"/>
-            <a:ext cx="2944368" cy="457200"/>
+            <a:off x="6903720" y="2395728"/>
+            <a:ext cx="1755648" cy="566928"/>
           </a:xfrm>
           <a:prstGeom prst="rect">
             <a:avLst/>
@@ -8382,15 +8401,33 @@
               </a:spcAft>
             </a:pPr>
             <a:r>
-              <a:rPr sz="1000" b="1">
-                <a:solidFill>
-                  <a:srgbClr val="1A1A1A"/>
-                </a:solidFill>
-                <a:latin typeface="Microsoft YaHei"/>
-                <a:ea typeface="Microsoft YaHei"/>
-                <a:cs typeface="Microsoft YaHei"/>
-              </a:rPr>
-              <a:t>实测 80% ± 5pp</a:t>
+              <a:rPr sz="1000" b="0">
+                <a:solidFill>
+                  <a:srgbClr val="555757"/>
+                </a:solidFill>
+                <a:latin typeface="Microsoft YaHei"/>
+                <a:ea typeface="Microsoft YaHei"/>
+                <a:cs typeface="Microsoft YaHei"/>
+              </a:rPr>
+              <a:t>短窗 · ~0.5s</a:t>
+            </a:r>
+          </a:p>
+          <a:p>
+            <a:pPr algn="l">
+              <a:spcAft>
+                <a:spcPts val="200"/>
+              </a:spcAft>
+            </a:pPr>
+            <a:r>
+              <a:rPr sz="1000" b="0">
+                <a:solidFill>
+                  <a:srgbClr val="555757"/>
+                </a:solidFill>
+                <a:latin typeface="Microsoft YaHei"/>
+                <a:ea typeface="Microsoft YaHei"/>
+                <a:cs typeface="Microsoft YaHei"/>
+              </a:rPr>
+              <a:t>门控触发</a:t>
             </a:r>
           </a:p>
         </p:txBody>
@@ -8403,8 +8440,8 @@
         </p:nvSpPr>
         <p:spPr>
           <a:xfrm>
-            <a:off x="9418319" y="2240280"/>
-            <a:ext cx="2212848" cy="457200"/>
+            <a:off x="8869680" y="2395728"/>
+            <a:ext cx="2761488" cy="566928"/>
           </a:xfrm>
           <a:prstGeom prst="rect">
             <a:avLst/>
@@ -8429,7 +8466,25 @@
                 <a:ea typeface="Microsoft YaHei"/>
                 <a:cs typeface="Microsoft YaHei"/>
               </a:rPr>
-              <a:t>留出集滚动回测</a:t>
+              <a:t>召回 @ 误报；</a:t>
+            </a:r>
+          </a:p>
+          <a:p>
+            <a:pPr algn="l">
+              <a:spcAft>
+                <a:spcPts val="200"/>
+              </a:spcAft>
+            </a:pPr>
+            <a:r>
+              <a:rPr sz="1000" b="0">
+                <a:solidFill>
+                  <a:srgbClr val="555757"/>
+                </a:solidFill>
+                <a:latin typeface="Microsoft YaHei"/>
+                <a:ea typeface="Microsoft YaHei"/>
+                <a:cs typeface="Microsoft YaHei"/>
+              </a:rPr>
+              <a:t>触发 p95 ≤ 50ms</a:t>
             </a:r>
           </a:p>
         </p:txBody>
@@ -8442,8 +8497,8 @@
         </p:nvSpPr>
         <p:spPr>
           <a:xfrm>
-            <a:off x="457200" y="2779776"/>
-            <a:ext cx="11247120" cy="512064"/>
+            <a:off x="457200" y="3072384"/>
+            <a:ext cx="11247120" cy="640080"/>
           </a:xfrm>
           <a:prstGeom prst="roundRect">
             <a:avLst>
@@ -8489,8 +8544,8 @@
         </p:nvSpPr>
         <p:spPr>
           <a:xfrm>
-            <a:off x="548640" y="2807208"/>
-            <a:ext cx="1024128" cy="457200"/>
+            <a:off x="548640" y="3108960"/>
+            <a:ext cx="1847088" cy="566928"/>
           </a:xfrm>
           <a:prstGeom prst="rect">
             <a:avLst/>
@@ -8507,7 +8562,7 @@
               </a:spcAft>
             </a:pPr>
             <a:r>
-              <a:rPr sz="1000" b="1">
+              <a:rPr sz="1200" b="1">
                 <a:solidFill>
                   <a:srgbClr val="C7000B"/>
                 </a:solidFill>
@@ -8515,7 +8570,7 @@
                 <a:ea typeface="Microsoft YaHei"/>
                 <a:cs typeface="Microsoft YaHei"/>
               </a:rPr>
-              <a:t>精度</a:t>
+              <a:t>招一招 / 翻手腕</a:t>
             </a:r>
           </a:p>
         </p:txBody>
@@ -8528,8 +8583,8 @@
         </p:nvSpPr>
         <p:spPr>
           <a:xfrm>
-            <a:off x="1783080" y="2807208"/>
-            <a:ext cx="1755648" cy="457200"/>
+            <a:off x="2606040" y="3108960"/>
+            <a:ext cx="2487168" cy="566928"/>
           </a:xfrm>
           <a:prstGeom prst="rect">
             <a:avLst/>
@@ -8554,7 +8609,7 @@
                 <a:ea typeface="Microsoft YaHei"/>
                 <a:cs typeface="Microsoft YaHei"/>
               </a:rPr>
-              <a:t>握姿四分类 / 手势宏 F1</a:t>
+              <a:t>IMU</a:t>
             </a:r>
           </a:p>
         </p:txBody>
@@ -8567,8 +8622,8 @@
         </p:nvSpPr>
         <p:spPr>
           <a:xfrm>
-            <a:off x="3749039" y="2807208"/>
-            <a:ext cx="2304288" cy="457200"/>
+            <a:off x="5303520" y="3108960"/>
+            <a:ext cx="1389888" cy="566928"/>
           </a:xfrm>
           <a:prstGeom prst="rect">
             <a:avLst/>
@@ -8585,15 +8640,15 @@
               </a:spcAft>
             </a:pPr>
             <a:r>
-              <a:rPr sz="1000" b="0">
-                <a:solidFill>
-                  <a:srgbClr val="555757"/>
-                </a:solidFill>
-                <a:latin typeface="Microsoft YaHei"/>
-                <a:ea typeface="Microsoft YaHei"/>
-                <a:cs typeface="Microsoft YaHei"/>
-              </a:rPr>
-              <a:t>现网启发式 + LIMU-BERT-X</a:t>
+              <a:rPr sz="1100" b="1">
+                <a:solidFill>
+                  <a:srgbClr val="0074CC"/>
+                </a:solidFill>
+                <a:latin typeface="Microsoft YaHei"/>
+                <a:ea typeface="Microsoft YaHei"/>
+                <a:cs typeface="Microsoft YaHei"/>
+              </a:rPr>
+              <a:t>事件检测</a:t>
             </a:r>
           </a:p>
         </p:txBody>
@@ -8606,8 +8661,8 @@
         </p:nvSpPr>
         <p:spPr>
           <a:xfrm>
-            <a:off x="6263640" y="2807208"/>
-            <a:ext cx="2944368" cy="457200"/>
+            <a:off x="6903720" y="3108960"/>
+            <a:ext cx="1755648" cy="566928"/>
           </a:xfrm>
           <a:prstGeom prst="rect">
             <a:avLst/>
@@ -8624,15 +8679,33 @@
               </a:spcAft>
             </a:pPr>
             <a:r>
-              <a:rPr sz="1000" b="1">
-                <a:solidFill>
-                  <a:srgbClr val="1A1A1A"/>
-                </a:solidFill>
-                <a:latin typeface="Microsoft YaHei"/>
-                <a:ea typeface="Microsoft YaHei"/>
-                <a:cs typeface="Microsoft YaHei"/>
-              </a:rPr>
-              <a:t>零样本 ≥ 基线−5pp；百样本 ≥ 基线</a:t>
+              <a:rPr sz="1000" b="0">
+                <a:solidFill>
+                  <a:srgbClr val="555757"/>
+                </a:solidFill>
+                <a:latin typeface="Microsoft YaHei"/>
+                <a:ea typeface="Microsoft YaHei"/>
+                <a:cs typeface="Microsoft YaHei"/>
+              </a:rPr>
+              <a:t>短窗 · ~0.5s</a:t>
+            </a:r>
+          </a:p>
+          <a:p>
+            <a:pPr algn="l">
+              <a:spcAft>
+                <a:spcPts val="200"/>
+              </a:spcAft>
+            </a:pPr>
+            <a:r>
+              <a:rPr sz="1000" b="0">
+                <a:solidFill>
+                  <a:srgbClr val="555757"/>
+                </a:solidFill>
+                <a:latin typeface="Microsoft YaHei"/>
+                <a:ea typeface="Microsoft YaHei"/>
+                <a:cs typeface="Microsoft YaHei"/>
+              </a:rPr>
+              <a:t>门控触发</a:t>
             </a:r>
           </a:p>
         </p:txBody>
@@ -8645,8 +8718,8 @@
         </p:nvSpPr>
         <p:spPr>
           <a:xfrm>
-            <a:off x="9418319" y="2807208"/>
-            <a:ext cx="2212848" cy="457200"/>
+            <a:off x="8869680" y="3108960"/>
+            <a:ext cx="2761488" cy="566928"/>
           </a:xfrm>
           <a:prstGeom prst="rect">
             <a:avLst/>
@@ -8671,7 +8744,25 @@
                 <a:ea typeface="Microsoft YaHei"/>
                 <a:cs typeface="Microsoft YaHei"/>
               </a:rPr>
-              <a:t>公开集 + 场景注册集</a:t>
+              <a:t>召回 @ 误报；</a:t>
+            </a:r>
+          </a:p>
+          <a:p>
+            <a:pPr algn="l">
+              <a:spcAft>
+                <a:spcPts val="200"/>
+              </a:spcAft>
+            </a:pPr>
+            <a:r>
+              <a:rPr sz="1000" b="0">
+                <a:solidFill>
+                  <a:srgbClr val="555757"/>
+                </a:solidFill>
+                <a:latin typeface="Microsoft YaHei"/>
+                <a:ea typeface="Microsoft YaHei"/>
+                <a:cs typeface="Microsoft YaHei"/>
+              </a:rPr>
+              <a:t>触发 p95 ≤ 50ms</a:t>
             </a:r>
           </a:p>
         </p:txBody>
@@ -8684,8 +8775,8 @@
         </p:nvSpPr>
         <p:spPr>
           <a:xfrm>
-            <a:off x="457200" y="3346704"/>
-            <a:ext cx="11247120" cy="512064"/>
+            <a:off x="457200" y="3785615"/>
+            <a:ext cx="11247120" cy="640080"/>
           </a:xfrm>
           <a:prstGeom prst="roundRect">
             <a:avLst>
@@ -8731,8 +8822,8 @@
         </p:nvSpPr>
         <p:spPr>
           <a:xfrm>
-            <a:off x="548640" y="3374136"/>
-            <a:ext cx="1024128" cy="457200"/>
+            <a:off x="548640" y="3822191"/>
+            <a:ext cx="1847088" cy="566928"/>
           </a:xfrm>
           <a:prstGeom prst="rect">
             <a:avLst/>
@@ -8749,7 +8840,7 @@
               </a:spcAft>
             </a:pPr>
             <a:r>
-              <a:rPr sz="1000" b="1">
+              <a:rPr sz="1200" b="1">
                 <a:solidFill>
                   <a:srgbClr val="C7000B"/>
                 </a:solidFill>
@@ -8757,7 +8848,7 @@
                 <a:ea typeface="Microsoft YaHei"/>
                 <a:cs typeface="Microsoft YaHei"/>
               </a:rPr>
-              <a:t>泛化</a:t>
+              <a:t>智感旋转</a:t>
             </a:r>
           </a:p>
         </p:txBody>
@@ -8770,8 +8861,8 @@
         </p:nvSpPr>
         <p:spPr>
           <a:xfrm>
-            <a:off x="1783080" y="3374136"/>
-            <a:ext cx="1755648" cy="457200"/>
+            <a:off x="2606040" y="3822191"/>
+            <a:ext cx="2487168" cy="566928"/>
           </a:xfrm>
           <a:prstGeom prst="rect">
             <a:avLst/>
@@ -8796,7 +8887,7 @@
                 <a:ea typeface="Microsoft YaHei"/>
                 <a:cs typeface="Microsoft YaHei"/>
               </a:rPr>
-              <a:t>跨设备/用户衰减</a:t>
+              <a:t>IMU（陀螺仪）</a:t>
             </a:r>
           </a:p>
         </p:txBody>
@@ -8809,8 +8900,8 @@
         </p:nvSpPr>
         <p:spPr>
           <a:xfrm>
-            <a:off x="3749039" y="3374136"/>
-            <a:ext cx="2304288" cy="457200"/>
+            <a:off x="5303520" y="3822191"/>
+            <a:ext cx="1389888" cy="566928"/>
           </a:xfrm>
           <a:prstGeom prst="rect">
             <a:avLst/>
@@ -8827,15 +8918,15 @@
               </a:spcAft>
             </a:pPr>
             <a:r>
-              <a:rPr sz="1000" b="0">
-                <a:solidFill>
-                  <a:srgbClr val="555757"/>
-                </a:solidFill>
-                <a:latin typeface="Microsoft YaHei"/>
-                <a:ea typeface="Microsoft YaHei"/>
-                <a:cs typeface="Microsoft YaHei"/>
-              </a:rPr>
-              <a:t>单设备独立优化</a:t>
+              <a:rPr sz="1100" b="1">
+                <a:solidFill>
+                  <a:srgbClr val="0074CC"/>
+                </a:solidFill>
+                <a:latin typeface="Microsoft YaHei"/>
+                <a:ea typeface="Microsoft YaHei"/>
+                <a:cs typeface="Microsoft YaHei"/>
+              </a:rPr>
+              <a:t>连续预测</a:t>
             </a:r>
           </a:p>
         </p:txBody>
@@ -8848,8 +8939,8 @@
         </p:nvSpPr>
         <p:spPr>
           <a:xfrm>
-            <a:off x="6263640" y="3374136"/>
-            <a:ext cx="2944368" cy="457200"/>
+            <a:off x="6903720" y="3822191"/>
+            <a:ext cx="1755648" cy="566928"/>
           </a:xfrm>
           <a:prstGeom prst="rect">
             <a:avLst/>
@@ -8866,15 +8957,15 @@
               </a:spcAft>
             </a:pPr>
             <a:r>
-              <a:rPr sz="1000" b="1">
-                <a:solidFill>
-                  <a:srgbClr val="1A1A1A"/>
-                </a:solidFill>
-                <a:latin typeface="Microsoft YaHei"/>
-                <a:ea typeface="Microsoft YaHei"/>
-                <a:cs typeface="Microsoft YaHei"/>
-              </a:rPr>
-              <a:t>≤ 5pp；Gen2 后 ≤ 2pp</a:t>
+              <a:rPr sz="1000" b="0">
+                <a:solidFill>
+                  <a:srgbClr val="555757"/>
+                </a:solidFill>
+                <a:latin typeface="Microsoft YaHei"/>
+                <a:ea typeface="Microsoft YaHei"/>
+                <a:cs typeface="Microsoft YaHei"/>
+              </a:rPr>
+              <a:t>滑动窗</a:t>
             </a:r>
           </a:p>
         </p:txBody>
@@ -8887,8 +8978,8 @@
         </p:nvSpPr>
         <p:spPr>
           <a:xfrm>
-            <a:off x="9418319" y="3374136"/>
-            <a:ext cx="2212848" cy="457200"/>
+            <a:off x="8869680" y="3822191"/>
+            <a:ext cx="2761488" cy="566928"/>
           </a:xfrm>
           <a:prstGeom prst="rect">
             <a:avLst/>
@@ -8913,7 +9004,25 @@
                 <a:ea typeface="Microsoft YaHei"/>
                 <a:cs typeface="Microsoft YaHei"/>
               </a:rPr>
-              <a:t>留一交叉验证</a:t>
+              <a:t>角度 MAE；</a:t>
+            </a:r>
+          </a:p>
+          <a:p>
+            <a:pPr algn="l">
+              <a:spcAft>
+                <a:spcPts val="200"/>
+              </a:spcAft>
+            </a:pPr>
+            <a:r>
+              <a:rPr sz="1000" b="0">
+                <a:solidFill>
+                  <a:srgbClr val="555757"/>
+                </a:solidFill>
+                <a:latin typeface="Microsoft YaHei"/>
+                <a:ea typeface="Microsoft YaHei"/>
+                <a:cs typeface="Microsoft YaHei"/>
+              </a:rPr>
+              <a:t>分位数覆盖率</a:t>
             </a:r>
           </a:p>
         </p:txBody>
@@ -8926,8 +9035,8 @@
         </p:nvSpPr>
         <p:spPr>
           <a:xfrm>
-            <a:off x="457200" y="3913632"/>
-            <a:ext cx="11247120" cy="512064"/>
+            <a:off x="457200" y="4498848"/>
+            <a:ext cx="11247120" cy="640080"/>
           </a:xfrm>
           <a:prstGeom prst="roundRect">
             <a:avLst>
@@ -8973,8 +9082,8 @@
         </p:nvSpPr>
         <p:spPr>
           <a:xfrm>
-            <a:off x="548640" y="3941064"/>
-            <a:ext cx="1024128" cy="457200"/>
+            <a:off x="548640" y="4535424"/>
+            <a:ext cx="1847088" cy="566928"/>
           </a:xfrm>
           <a:prstGeom prst="rect">
             <a:avLst/>
@@ -8991,7 +9100,7 @@
               </a:spcAft>
             </a:pPr>
             <a:r>
-              <a:rPr sz="1000" b="1">
+              <a:rPr sz="1200" b="1">
                 <a:solidFill>
                   <a:srgbClr val="C7000B"/>
                 </a:solidFill>
@@ -8999,7 +9108,7 @@
                 <a:ea typeface="Microsoft YaHei"/>
                 <a:cs typeface="Microsoft YaHei"/>
               </a:rPr>
-              <a:t>时延</a:t>
+              <a:t>误触抑制（共用）</a:t>
             </a:r>
           </a:p>
         </p:txBody>
@@ -9012,8 +9121,8 @@
         </p:nvSpPr>
         <p:spPr>
           <a:xfrm>
-            <a:off x="1783080" y="3941064"/>
-            <a:ext cx="1755648" cy="457200"/>
+            <a:off x="2606040" y="4535424"/>
+            <a:ext cx="2487168" cy="566928"/>
           </a:xfrm>
           <a:prstGeom prst="rect">
             <a:avLst/>
@@ -9038,7 +9147,7 @@
                 <a:ea typeface="Microsoft YaHei"/>
                 <a:cs typeface="Microsoft YaHei"/>
               </a:rPr>
-              <a:t>端侧 p95</a:t>
+              <a:t>全部</a:t>
             </a:r>
           </a:p>
         </p:txBody>
@@ -9051,8 +9160,8 @@
         </p:nvSpPr>
         <p:spPr>
           <a:xfrm>
-            <a:off x="3749039" y="3941064"/>
-            <a:ext cx="2304288" cy="457200"/>
+            <a:off x="5303520" y="4535424"/>
+            <a:ext cx="1389888" cy="566928"/>
           </a:xfrm>
           <a:prstGeom prst="rect">
             <a:avLst/>
@@ -9069,15 +9178,15 @@
               </a:spcAft>
             </a:pPr>
             <a:r>
-              <a:rPr sz="1000" b="0">
-                <a:solidFill>
-                  <a:srgbClr val="555757"/>
-                </a:solidFill>
-                <a:latin typeface="Microsoft YaHei"/>
-                <a:ea typeface="Microsoft YaHei"/>
-                <a:cs typeface="Microsoft YaHei"/>
-              </a:rPr>
-              <a:t>现网握姿 200ms</a:t>
+              <a:rPr sz="1100" b="1">
+                <a:solidFill>
+                  <a:srgbClr val="0074CC"/>
+                </a:solidFill>
+                <a:latin typeface="Microsoft YaHei"/>
+                <a:ea typeface="Microsoft YaHei"/>
+                <a:cs typeface="Microsoft YaHei"/>
+              </a:rPr>
+              <a:t>置信度 / 拒识</a:t>
             </a:r>
           </a:p>
         </p:txBody>
@@ -9090,8 +9199,8 @@
         </p:nvSpPr>
         <p:spPr>
           <a:xfrm>
-            <a:off x="6263640" y="3941064"/>
-            <a:ext cx="2944368" cy="457200"/>
+            <a:off x="6903720" y="4535424"/>
+            <a:ext cx="1755648" cy="566928"/>
           </a:xfrm>
           <a:prstGeom prst="rect">
             <a:avLst/>
@@ -9108,15 +9217,15 @@
               </a:spcAft>
             </a:pPr>
             <a:r>
-              <a:rPr sz="1000" b="1">
-                <a:solidFill>
-                  <a:srgbClr val="1A1A1A"/>
-                </a:solidFill>
-                <a:latin typeface="Microsoft YaHei"/>
-                <a:ea typeface="Microsoft YaHei"/>
-                <a:cs typeface="Microsoft YaHei"/>
-              </a:rPr>
-              <a:t>握姿 ≤ 200ms；手表手势 p95 ≤ 50ms</a:t>
+              <a:rPr sz="1000" b="0">
+                <a:solidFill>
+                  <a:srgbClr val="555757"/>
+                </a:solidFill>
+                <a:latin typeface="Microsoft YaHei"/>
+                <a:ea typeface="Microsoft YaHei"/>
+                <a:cs typeface="Microsoft YaHei"/>
+              </a:rPr>
+              <a:t>—</a:t>
             </a:r>
           </a:p>
         </p:txBody>
@@ -9129,8 +9238,8 @@
         </p:nvSpPr>
         <p:spPr>
           <a:xfrm>
-            <a:off x="9418319" y="3941064"/>
-            <a:ext cx="2212848" cy="457200"/>
+            <a:off x="8869680" y="4535424"/>
+            <a:ext cx="2761488" cy="566928"/>
           </a:xfrm>
           <a:prstGeom prst="rect">
             <a:avLst/>
@@ -9155,7 +9264,7 @@
                 <a:ea typeface="Microsoft YaHei"/>
                 <a:cs typeface="Microsoft YaHei"/>
               </a:rPr>
-              <a:t>真机 profiling</a:t>
+              <a:t>误触 &lt; 1 次/天</a:t>
             </a:r>
           </a:p>
         </p:txBody>
@@ -9168,8 +9277,8 @@
         </p:nvSpPr>
         <p:spPr>
           <a:xfrm>
-            <a:off x="457200" y="4480560"/>
-            <a:ext cx="11247120" cy="512064"/>
+            <a:off x="457200" y="5349240"/>
+            <a:ext cx="11247120" cy="960120"/>
           </a:xfrm>
           <a:prstGeom prst="roundRect">
             <a:avLst>
@@ -9215,8 +9324,8 @@
         </p:nvSpPr>
         <p:spPr>
           <a:xfrm>
-            <a:off x="548640" y="4507992"/>
-            <a:ext cx="1024128" cy="457200"/>
+            <a:off x="640080" y="5458968"/>
+            <a:ext cx="10881360" cy="777240"/>
           </a:xfrm>
           <a:prstGeom prst="rect">
             <a:avLst/>
@@ -9233,7 +9342,7 @@
               </a:spcAft>
             </a:pPr>
             <a:r>
-              <a:rPr sz="1000" b="1">
+              <a:rPr sz="1300" b="1">
                 <a:solidFill>
                   <a:srgbClr val="C7000B"/>
                 </a:solidFill>
@@ -9241,241 +9350,17 @@
                 <a:ea typeface="Microsoft YaHei"/>
                 <a:cs typeface="Microsoft YaHei"/>
               </a:rPr>
-              <a:t>功耗</a:t>
-            </a:r>
-          </a:p>
-        </p:txBody>
-      </p:sp>
-      <p:sp>
-        <p:nvSpPr>
-          <p:cNvPr id="44" name="TextBox 43"/>
-          <p:cNvSpPr txBox="1"/>
-          <p:nvPr/>
-        </p:nvSpPr>
-        <p:spPr>
-          <a:xfrm>
-            <a:off x="1783080" y="4507992"/>
-            <a:ext cx="1755648" cy="457200"/>
-          </a:xfrm>
-          <a:prstGeom prst="rect">
-            <a:avLst/>
-          </a:prstGeom>
-          <a:noFill/>
-        </p:spPr>
-        <p:txBody>
-          <a:bodyPr wrap="square" anchor="t"/>
-          <a:lstStyle/>
-          <a:p>
-            <a:pPr algn="l">
-              <a:spcAft>
-                <a:spcPts val="200"/>
-              </a:spcAft>
-            </a:pPr>
-            <a:r>
-              <a:rPr sz="1000" b="0">
-                <a:solidFill>
-                  <a:srgbClr val="555757"/>
-                </a:solidFill>
-                <a:latin typeface="Microsoft YaHei"/>
-                <a:ea typeface="Microsoft YaHei"/>
-                <a:cs typeface="Microsoft YaHei"/>
-              </a:rPr>
-              <a:t>千次推理能耗</a:t>
-            </a:r>
-          </a:p>
-        </p:txBody>
-      </p:sp>
-      <p:sp>
-        <p:nvSpPr>
-          <p:cNvPr id="45" name="TextBox 44"/>
-          <p:cNvSpPr txBox="1"/>
-          <p:nvPr/>
-        </p:nvSpPr>
-        <p:spPr>
-          <a:xfrm>
-            <a:off x="3749039" y="4507992"/>
-            <a:ext cx="2304288" cy="457200"/>
-          </a:xfrm>
-          <a:prstGeom prst="rect">
-            <a:avLst/>
-          </a:prstGeom>
-          <a:noFill/>
-        </p:spPr>
-        <p:txBody>
-          <a:bodyPr wrap="square" anchor="t"/>
-          <a:lstStyle/>
-          <a:p>
-            <a:pPr algn="l">
-              <a:spcAft>
-                <a:spcPts val="200"/>
-              </a:spcAft>
-            </a:pPr>
-            <a:r>
-              <a:rPr sz="1000" b="0">
-                <a:solidFill>
-                  <a:srgbClr val="555757"/>
-                </a:solidFill>
-                <a:latin typeface="Microsoft YaHei"/>
-                <a:ea typeface="Microsoft YaHei"/>
-                <a:cs typeface="Microsoft YaHei"/>
-              </a:rPr>
-              <a:t>—（Gen3 考核）</a:t>
-            </a:r>
-          </a:p>
-        </p:txBody>
-      </p:sp>
-      <p:sp>
-        <p:nvSpPr>
-          <p:cNvPr id="46" name="TextBox 45"/>
-          <p:cNvSpPr txBox="1"/>
-          <p:nvPr/>
-        </p:nvSpPr>
-        <p:spPr>
-          <a:xfrm>
-            <a:off x="6263640" y="4507992"/>
-            <a:ext cx="2944368" cy="457200"/>
-          </a:xfrm>
-          <a:prstGeom prst="rect">
-            <a:avLst/>
-          </a:prstGeom>
-          <a:noFill/>
-        </p:spPr>
-        <p:txBody>
-          <a:bodyPr wrap="square" anchor="t"/>
-          <a:lstStyle/>
-          <a:p>
-            <a:pPr algn="l">
-              <a:spcAft>
-                <a:spcPts val="200"/>
-              </a:spcAft>
-            </a:pPr>
-            <a:r>
-              <a:rPr sz="1000" b="1">
-                <a:solidFill>
-                  <a:srgbClr val="1A1A1A"/>
-                </a:solidFill>
-                <a:latin typeface="Microsoft YaHei"/>
-                <a:ea typeface="Microsoft YaHei"/>
-                <a:cs typeface="Microsoft YaHei"/>
-              </a:rPr>
-              <a:t>整机续航影响 &lt; 1%</a:t>
-            </a:r>
-          </a:p>
-        </p:txBody>
-      </p:sp>
-      <p:sp>
-        <p:nvSpPr>
-          <p:cNvPr id="47" name="TextBox 46"/>
-          <p:cNvSpPr txBox="1"/>
-          <p:nvPr/>
-        </p:nvSpPr>
-        <p:spPr>
-          <a:xfrm>
-            <a:off x="9418319" y="4507992"/>
-            <a:ext cx="2212848" cy="457200"/>
-          </a:xfrm>
-          <a:prstGeom prst="rect">
-            <a:avLst/>
-          </a:prstGeom>
-          <a:noFill/>
-        </p:spPr>
-        <p:txBody>
-          <a:bodyPr wrap="square" anchor="t"/>
-          <a:lstStyle/>
-          <a:p>
-            <a:pPr algn="l">
-              <a:spcAft>
-                <a:spcPts val="200"/>
-              </a:spcAft>
-            </a:pPr>
-            <a:r>
-              <a:rPr sz="1000" b="0">
-                <a:solidFill>
-                  <a:srgbClr val="555757"/>
-                </a:solidFill>
-                <a:latin typeface="Microsoft YaHei"/>
-                <a:ea typeface="Microsoft YaHei"/>
-                <a:cs typeface="Microsoft YaHei"/>
-              </a:rPr>
-              <a:t>功耗仪实测</a:t>
-            </a:r>
-          </a:p>
-        </p:txBody>
-      </p:sp>
-      <p:sp>
-        <p:nvSpPr>
-          <p:cNvPr id="48" name="Rounded Rectangle 47"/>
-          <p:cNvSpPr/>
-          <p:nvPr/>
-        </p:nvSpPr>
-        <p:spPr>
-          <a:xfrm>
-            <a:off x="457200" y="5047488"/>
-            <a:ext cx="11247120" cy="512064"/>
-          </a:xfrm>
-          <a:prstGeom prst="roundRect">
-            <a:avLst>
-              <a:gd name="adj" fmla="val 5000"/>
-            </a:avLst>
-          </a:prstGeom>
-          <a:solidFill>
-            <a:srgbClr val="FFFFFF"/>
-          </a:solidFill>
-          <a:ln w="9525">
-            <a:solidFill>
-              <a:srgbClr val="DDDDDD"/>
-            </a:solidFill>
-          </a:ln>
-        </p:spPr>
-        <p:style>
-          <a:lnRef idx="1">
-            <a:schemeClr val="accent1"/>
-          </a:lnRef>
-          <a:fillRef idx="3">
-            <a:schemeClr val="accent1"/>
-          </a:fillRef>
-          <a:effectRef idx="2">
-            <a:schemeClr val="accent1"/>
-          </a:effectRef>
-          <a:fontRef idx="minor">
-            <a:schemeClr val="lt1"/>
-          </a:fontRef>
-        </p:style>
-        <p:txBody>
-          <a:bodyPr rtlCol="0" anchor="ctr"/>
-          <a:lstStyle/>
-          <a:p>
-            <a:pPr algn="ctr"/>
-          </a:p>
-        </p:txBody>
-      </p:sp>
-      <p:sp>
-        <p:nvSpPr>
-          <p:cNvPr id="49" name="TextBox 48"/>
-          <p:cNvSpPr txBox="1"/>
-          <p:nvPr/>
-        </p:nvSpPr>
-        <p:spPr>
-          <a:xfrm>
-            <a:off x="548640" y="5074920"/>
-            <a:ext cx="1024128" cy="457200"/>
-          </a:xfrm>
-          <a:prstGeom prst="rect">
-            <a:avLst/>
-          </a:prstGeom>
-          <a:noFill/>
-        </p:spPr>
-        <p:txBody>
-          <a:bodyPr wrap="square" anchor="t"/>
-          <a:lstStyle/>
-          <a:p>
-            <a:pPr algn="l">
-              <a:spcAft>
-                <a:spcPts val="200"/>
-              </a:spcAft>
-            </a:pPr>
-            <a:r>
-              <a:rPr sz="1000" b="1">
+              <a:t>新增特性 = 注册数据规格 + 选原语 + 类别表 / 触发阈值 + 可选 LoRA；平台承诺原语级 SLA，特性团队按配置组装。</a:t>
+            </a:r>
+          </a:p>
+          <a:p>
+            <a:pPr algn="l">
+              <a:spcAft>
+                <a:spcPts val="200"/>
+              </a:spcAft>
+            </a:pPr>
+            <a:r>
+              <a:rPr sz="1300" b="1">
                 <a:solidFill>
                   <a:srgbClr val="C7000B"/>
                 </a:solidFill>
@@ -9483,256 +9368,14 @@
                 <a:ea typeface="Microsoft YaHei"/>
                 <a:cs typeface="Microsoft YaHei"/>
               </a:rPr>
-              <a:t>工程</a:t>
-            </a:r>
-          </a:p>
-        </p:txBody>
-      </p:sp>
-      <p:sp>
-        <p:nvSpPr>
-          <p:cNvPr id="50" name="TextBox 49"/>
-          <p:cNvSpPr txBox="1"/>
-          <p:nvPr/>
-        </p:nvSpPr>
-        <p:spPr>
-          <a:xfrm>
-            <a:off x="1783080" y="5074920"/>
-            <a:ext cx="1755648" cy="457200"/>
-          </a:xfrm>
-          <a:prstGeom prst="rect">
-            <a:avLst/>
-          </a:prstGeom>
-          <a:noFill/>
-        </p:spPr>
-        <p:txBody>
-          <a:bodyPr wrap="square" anchor="t"/>
-          <a:lstStyle/>
-          <a:p>
-            <a:pPr algn="l">
-              <a:spcAft>
-                <a:spcPts val="200"/>
-              </a:spcAft>
-            </a:pPr>
-            <a:r>
-              <a:rPr sz="1000" b="0">
-                <a:solidFill>
-                  <a:srgbClr val="555757"/>
-                </a:solidFill>
-                <a:latin typeface="Microsoft YaHei"/>
-                <a:ea typeface="Microsoft YaHei"/>
-                <a:cs typeface="Microsoft YaHei"/>
-              </a:rPr>
-              <a:t>拒收率 / 兼容性</a:t>
-            </a:r>
-          </a:p>
-        </p:txBody>
-      </p:sp>
-      <p:sp>
-        <p:nvSpPr>
-          <p:cNvPr id="51" name="TextBox 50"/>
-          <p:cNvSpPr txBox="1"/>
-          <p:nvPr/>
-        </p:nvSpPr>
-        <p:spPr>
-          <a:xfrm>
-            <a:off x="3749039" y="5074920"/>
-            <a:ext cx="2304288" cy="457200"/>
-          </a:xfrm>
-          <a:prstGeom prst="rect">
-            <a:avLst/>
-          </a:prstGeom>
-          <a:noFill/>
-        </p:spPr>
-        <p:txBody>
-          <a:bodyPr wrap="square" anchor="t"/>
-          <a:lstStyle/>
-          <a:p>
-            <a:pPr algn="l">
-              <a:spcAft>
-                <a:spcPts val="200"/>
-              </a:spcAft>
-            </a:pPr>
-            <a:r>
-              <a:rPr sz="1000" b="0">
-                <a:solidFill>
-                  <a:srgbClr val="555757"/>
-                </a:solidFill>
-                <a:latin typeface="Microsoft YaHei"/>
-                <a:ea typeface="Microsoft YaHei"/>
-                <a:cs typeface="Microsoft YaHei"/>
-              </a:rPr>
-              <a:t>—</a:t>
-            </a:r>
-          </a:p>
-        </p:txBody>
-      </p:sp>
-      <p:sp>
-        <p:nvSpPr>
-          <p:cNvPr id="52" name="TextBox 51"/>
-          <p:cNvSpPr txBox="1"/>
-          <p:nvPr/>
-        </p:nvSpPr>
-        <p:spPr>
-          <a:xfrm>
-            <a:off x="6263640" y="5074920"/>
-            <a:ext cx="2944368" cy="457200"/>
-          </a:xfrm>
-          <a:prstGeom prst="rect">
-            <a:avLst/>
-          </a:prstGeom>
-          <a:noFill/>
-        </p:spPr>
-        <p:txBody>
-          <a:bodyPr wrap="square" anchor="t"/>
-          <a:lstStyle/>
-          <a:p>
-            <a:pPr algn="l">
-              <a:spcAft>
-                <a:spcPts val="200"/>
-              </a:spcAft>
-            </a:pPr>
-            <a:r>
-              <a:rPr sz="1000" b="1">
-                <a:solidFill>
-                  <a:srgbClr val="1A1A1A"/>
-                </a:solidFill>
-                <a:latin typeface="Microsoft YaHei"/>
-                <a:ea typeface="Microsoft YaHei"/>
-                <a:cs typeface="Microsoft YaHei"/>
-              </a:rPr>
-              <a:t>版本升级不破坏旧调用</a:t>
-            </a:r>
-          </a:p>
-        </p:txBody>
-      </p:sp>
-      <p:sp>
-        <p:nvSpPr>
-          <p:cNvPr id="53" name="TextBox 52"/>
-          <p:cNvSpPr txBox="1"/>
-          <p:nvPr/>
-        </p:nvSpPr>
-        <p:spPr>
-          <a:xfrm>
-            <a:off x="9418319" y="5074920"/>
-            <a:ext cx="2212848" cy="457200"/>
-          </a:xfrm>
-          <a:prstGeom prst="rect">
-            <a:avLst/>
-          </a:prstGeom>
-          <a:noFill/>
-        </p:spPr>
-        <p:txBody>
-          <a:bodyPr wrap="square" anchor="t"/>
-          <a:lstStyle/>
-          <a:p>
-            <a:pPr algn="l">
-              <a:spcAft>
-                <a:spcPts val="200"/>
-              </a:spcAft>
-            </a:pPr>
-            <a:r>
-              <a:rPr sz="1000" b="0">
-                <a:solidFill>
-                  <a:srgbClr val="555757"/>
-                </a:solidFill>
-                <a:latin typeface="Microsoft YaHei"/>
-                <a:ea typeface="Microsoft YaHei"/>
-                <a:cs typeface="Microsoft YaHei"/>
-              </a:rPr>
-              <a:t>工具链自动化</a:t>
-            </a:r>
-          </a:p>
-        </p:txBody>
-      </p:sp>
-      <p:sp>
-        <p:nvSpPr>
-          <p:cNvPr id="54" name="Rounded Rectangle 53"/>
-          <p:cNvSpPr/>
-          <p:nvPr/>
-        </p:nvSpPr>
-        <p:spPr>
-          <a:xfrm>
-            <a:off x="457200" y="5715000"/>
-            <a:ext cx="11247120" cy="685800"/>
-          </a:xfrm>
-          <a:prstGeom prst="roundRect">
-            <a:avLst>
-              <a:gd name="adj" fmla="val 5000"/>
-            </a:avLst>
-          </a:prstGeom>
-          <a:solidFill>
-            <a:srgbClr val="F7F7F7"/>
-          </a:solidFill>
-          <a:ln w="9525">
-            <a:solidFill>
-              <a:srgbClr val="DDDDDD"/>
-            </a:solidFill>
-          </a:ln>
-        </p:spPr>
-        <p:style>
-          <a:lnRef idx="1">
-            <a:schemeClr val="accent1"/>
-          </a:lnRef>
-          <a:fillRef idx="3">
-            <a:schemeClr val="accent1"/>
-          </a:fillRef>
-          <a:effectRef idx="2">
-            <a:schemeClr val="accent1"/>
-          </a:effectRef>
-          <a:fontRef idx="minor">
-            <a:schemeClr val="lt1"/>
-          </a:fontRef>
-        </p:style>
-        <p:txBody>
-          <a:bodyPr rtlCol="0" anchor="ctr"/>
-          <a:lstStyle/>
-          <a:p>
-            <a:pPr algn="ctr"/>
-          </a:p>
-        </p:txBody>
-      </p:sp>
-      <p:sp>
-        <p:nvSpPr>
-          <p:cNvPr id="55" name="TextBox 54"/>
-          <p:cNvSpPr txBox="1"/>
-          <p:nvPr/>
-        </p:nvSpPr>
-        <p:spPr>
-          <a:xfrm>
-            <a:off x="640080" y="5806440"/>
-            <a:ext cx="10881360" cy="502920"/>
-          </a:xfrm>
-          <a:prstGeom prst="rect">
-            <a:avLst/>
-          </a:prstGeom>
-          <a:noFill/>
-        </p:spPr>
-        <p:txBody>
-          <a:bodyPr wrap="square" anchor="t"/>
-          <a:lstStyle/>
-          <a:p>
-            <a:pPr algn="l">
-              <a:spcAft>
-                <a:spcPts val="200"/>
-              </a:spcAft>
-            </a:pPr>
-            <a:r>
-              <a:rPr sz="1200" b="1">
-                <a:solidFill>
-                  <a:srgbClr val="C7000B"/>
-                </a:solidFill>
-                <a:latin typeface="Microsoft YaHei"/>
-                <a:ea typeface="Microsoft YaHei"/>
-                <a:cs typeface="Microsoft YaHei"/>
-              </a:rPr>
-              <a:t>代际绑定：Gen1 承诺精度基线 → Gen2 承诺泛化提升 → Gen3 承诺时延功耗；标杆任务：智感握姿四分类（200ms）、WATCH 5 敲一敲/划一划、Meta 腕带 0.88 手势/s。</a:t>
-            </a:r>
-          </a:p>
-        </p:txBody>
-      </p:sp>
-      <p:sp>
-        <p:nvSpPr>
-          <p:cNvPr id="56" name="Rectangle 55"/>
+              <a:t>握姿与敲一敲共享同一底座，差异只在窗口与类别表。</a:t>
+            </a:r>
+          </a:p>
+        </p:txBody>
+      </p:sp>
+      <p:sp>
+        <p:nvSpPr>
+          <p:cNvPr id="44" name="Rectangle 43"/>
           <p:cNvSpPr/>
           <p:nvPr/>
         </p:nvSpPr>
@@ -9775,7 +9418,7 @@
       </p:sp>
       <p:sp>
         <p:nvSpPr>
-          <p:cNvPr id="57" name="TextBox 56"/>
+          <p:cNvPr id="45" name="TextBox 44"/>
           <p:cNvSpPr txBox="1"/>
           <p:nvPr/>
         </p:nvSpPr>
@@ -9807,14 +9450,14 @@
                 <a:ea typeface="Microsoft YaHei"/>
                 <a:cs typeface="Microsoft YaHei"/>
               </a:rPr>
-              <a:t>华为  ·  AI 物理感知平台  ·  量化指标    |    Security Level: Internal</a:t>
-            </a:r>
-          </a:p>
-        </p:txBody>
-      </p:sp>
-      <p:sp>
-        <p:nvSpPr>
-          <p:cNvPr id="58" name="TextBox 57"/>
+              <a:t>华为  ·  AI 物理感知平台  ·  平台层    |    Security Level: Internal</a:t>
+            </a:r>
+          </a:p>
+        </p:txBody>
+      </p:sp>
+      <p:sp>
+        <p:nvSpPr>
+          <p:cNvPr id="46" name="TextBox 45"/>
           <p:cNvSpPr txBox="1"/>
           <p:nvPr/>
         </p:nvSpPr>
@@ -9846,7 +9489,7 @@
                 <a:ea typeface="Microsoft YaHei"/>
                 <a:cs typeface="Microsoft YaHei"/>
               </a:rPr>
-              <a:t>10  /  11</a:t>
+              <a:t>10  /  12</a:t>
             </a:r>
           </a:p>
         </p:txBody>
@@ -9946,7 +9589,7 @@
                 <a:ea typeface="Microsoft YaHei"/>
                 <a:cs typeface="Microsoft YaHei"/>
               </a:rPr>
-              <a:t>10  代际演进</a:t>
+              <a:t>10  量化指标</a:t>
             </a:r>
           </a:p>
         </p:txBody>
@@ -9985,7 +9628,7 @@
                 <a:ea typeface="Microsoft YaHei"/>
                 <a:cs typeface="Microsoft YaHei"/>
               </a:rPr>
-              <a:t>Gen1 零样本基线 → Gen2 千人千面 → Gen3 Token 嵌入大模型</a:t>
+              <a:t>按原语考核，不按特性考核</a:t>
             </a:r>
           </a:p>
         </p:txBody>
@@ -10067,21 +9710,216 @@
                 <a:ea typeface="Microsoft YaHei"/>
                 <a:cs typeface="Microsoft YaHei"/>
               </a:rPr>
-              <a:t>接口不变，能力逐代升级；每代回答一个业务问题。</a:t>
-            </a:r>
-          </a:p>
-        </p:txBody>
-      </p:sp>
-      <p:sp>
-        <p:nvSpPr>
-          <p:cNvPr id="7" name="Rounded Rectangle 6"/>
+              <a:t>每项指标 = 基线 + 目标值 + 测量方法 + 数据集；特性只声明用哪个原语和目标档。</a:t>
+            </a:r>
+          </a:p>
+        </p:txBody>
+      </p:sp>
+      <p:sp>
+        <p:nvSpPr>
+          <p:cNvPr id="7" name="TextBox 6"/>
+          <p:cNvSpPr txBox="1"/>
+          <p:nvPr/>
+        </p:nvSpPr>
+        <p:spPr>
+          <a:xfrm>
+            <a:off x="548640" y="1298448"/>
+            <a:ext cx="1024128" cy="292608"/>
+          </a:xfrm>
+          <a:prstGeom prst="rect">
+            <a:avLst/>
+          </a:prstGeom>
+          <a:noFill/>
+        </p:spPr>
+        <p:txBody>
+          <a:bodyPr wrap="square" anchor="t"/>
+          <a:lstStyle/>
+          <a:p>
+            <a:pPr algn="l">
+              <a:spcAft>
+                <a:spcPts val="200"/>
+              </a:spcAft>
+            </a:pPr>
+            <a:r>
+              <a:rPr sz="1200" b="1">
+                <a:solidFill>
+                  <a:srgbClr val="898989"/>
+                </a:solidFill>
+                <a:latin typeface="Microsoft YaHei"/>
+                <a:ea typeface="Microsoft YaHei"/>
+                <a:cs typeface="Microsoft YaHei"/>
+              </a:rPr>
+              <a:t>层</a:t>
+            </a:r>
+          </a:p>
+        </p:txBody>
+      </p:sp>
+      <p:sp>
+        <p:nvSpPr>
+          <p:cNvPr id="8" name="TextBox 7"/>
+          <p:cNvSpPr txBox="1"/>
+          <p:nvPr/>
+        </p:nvSpPr>
+        <p:spPr>
+          <a:xfrm>
+            <a:off x="1783080" y="1298448"/>
+            <a:ext cx="1755648" cy="292608"/>
+          </a:xfrm>
+          <a:prstGeom prst="rect">
+            <a:avLst/>
+          </a:prstGeom>
+          <a:noFill/>
+        </p:spPr>
+        <p:txBody>
+          <a:bodyPr wrap="square" anchor="t"/>
+          <a:lstStyle/>
+          <a:p>
+            <a:pPr algn="l">
+              <a:spcAft>
+                <a:spcPts val="200"/>
+              </a:spcAft>
+            </a:pPr>
+            <a:r>
+              <a:rPr sz="1200" b="1">
+                <a:solidFill>
+                  <a:srgbClr val="898989"/>
+                </a:solidFill>
+                <a:latin typeface="Microsoft YaHei"/>
+                <a:ea typeface="Microsoft YaHei"/>
+                <a:cs typeface="Microsoft YaHei"/>
+              </a:rPr>
+              <a:t>指标</a:t>
+            </a:r>
+          </a:p>
+        </p:txBody>
+      </p:sp>
+      <p:sp>
+        <p:nvSpPr>
+          <p:cNvPr id="9" name="TextBox 8"/>
+          <p:cNvSpPr txBox="1"/>
+          <p:nvPr/>
+        </p:nvSpPr>
+        <p:spPr>
+          <a:xfrm>
+            <a:off x="3749039" y="1298448"/>
+            <a:ext cx="2304288" cy="292608"/>
+          </a:xfrm>
+          <a:prstGeom prst="rect">
+            <a:avLst/>
+          </a:prstGeom>
+          <a:noFill/>
+        </p:spPr>
+        <p:txBody>
+          <a:bodyPr wrap="square" anchor="t"/>
+          <a:lstStyle/>
+          <a:p>
+            <a:pPr algn="l">
+              <a:spcAft>
+                <a:spcPts val="200"/>
+              </a:spcAft>
+            </a:pPr>
+            <a:r>
+              <a:rPr sz="1200" b="1">
+                <a:solidFill>
+                  <a:srgbClr val="898989"/>
+                </a:solidFill>
+                <a:latin typeface="Microsoft YaHei"/>
+                <a:ea typeface="Microsoft YaHei"/>
+                <a:cs typeface="Microsoft YaHei"/>
+              </a:rPr>
+              <a:t>基线 / 对标</a:t>
+            </a:r>
+          </a:p>
+        </p:txBody>
+      </p:sp>
+      <p:sp>
+        <p:nvSpPr>
+          <p:cNvPr id="10" name="TextBox 9"/>
+          <p:cNvSpPr txBox="1"/>
+          <p:nvPr/>
+        </p:nvSpPr>
+        <p:spPr>
+          <a:xfrm>
+            <a:off x="6263640" y="1298448"/>
+            <a:ext cx="2944368" cy="292608"/>
+          </a:xfrm>
+          <a:prstGeom prst="rect">
+            <a:avLst/>
+          </a:prstGeom>
+          <a:noFill/>
+        </p:spPr>
+        <p:txBody>
+          <a:bodyPr wrap="square" anchor="t"/>
+          <a:lstStyle/>
+          <a:p>
+            <a:pPr algn="l">
+              <a:spcAft>
+                <a:spcPts val="200"/>
+              </a:spcAft>
+            </a:pPr>
+            <a:r>
+              <a:rPr sz="1200" b="1">
+                <a:solidFill>
+                  <a:srgbClr val="898989"/>
+                </a:solidFill>
+                <a:latin typeface="Microsoft YaHei"/>
+                <a:ea typeface="Microsoft YaHei"/>
+                <a:cs typeface="Microsoft YaHei"/>
+              </a:rPr>
+              <a:t>目标值</a:t>
+            </a:r>
+          </a:p>
+        </p:txBody>
+      </p:sp>
+      <p:sp>
+        <p:nvSpPr>
+          <p:cNvPr id="11" name="TextBox 10"/>
+          <p:cNvSpPr txBox="1"/>
+          <p:nvPr/>
+        </p:nvSpPr>
+        <p:spPr>
+          <a:xfrm>
+            <a:off x="9418319" y="1298448"/>
+            <a:ext cx="2212848" cy="292608"/>
+          </a:xfrm>
+          <a:prstGeom prst="rect">
+            <a:avLst/>
+          </a:prstGeom>
+          <a:noFill/>
+        </p:spPr>
+        <p:txBody>
+          <a:bodyPr wrap="square" anchor="t"/>
+          <a:lstStyle/>
+          <a:p>
+            <a:pPr algn="l">
+              <a:spcAft>
+                <a:spcPts val="200"/>
+              </a:spcAft>
+            </a:pPr>
+            <a:r>
+              <a:rPr sz="1200" b="1">
+                <a:solidFill>
+                  <a:srgbClr val="898989"/>
+                </a:solidFill>
+                <a:latin typeface="Microsoft YaHei"/>
+                <a:ea typeface="Microsoft YaHei"/>
+                <a:cs typeface="Microsoft YaHei"/>
+              </a:rPr>
+              <a:t>测量方法</a:t>
+            </a:r>
+          </a:p>
+        </p:txBody>
+      </p:sp>
+      <p:sp>
+        <p:nvSpPr>
+          <p:cNvPr id="12" name="Rounded Rectangle 11"/>
           <p:cNvSpPr/>
           <p:nvPr/>
         </p:nvSpPr>
         <p:spPr>
           <a:xfrm>
-            <a:off x="411480" y="1417320"/>
-            <a:ext cx="2788920" cy="3566160"/>
+            <a:off x="457200" y="1645920"/>
+            <a:ext cx="11247120" cy="512064"/>
           </a:xfrm>
           <a:prstGeom prst="roundRect">
             <a:avLst>
@@ -10121,23 +9959,240 @@
       </p:sp>
       <p:sp>
         <p:nvSpPr>
-          <p:cNvPr id="8" name="Rectangle 7"/>
+          <p:cNvPr id="13" name="TextBox 12"/>
+          <p:cNvSpPr txBox="1"/>
+          <p:nvPr/>
+        </p:nvSpPr>
+        <p:spPr>
+          <a:xfrm>
+            <a:off x="548640" y="1673352"/>
+            <a:ext cx="1024128" cy="457200"/>
+          </a:xfrm>
+          <a:prstGeom prst="rect">
+            <a:avLst/>
+          </a:prstGeom>
+          <a:noFill/>
+        </p:spPr>
+        <p:txBody>
+          <a:bodyPr wrap="square" anchor="t"/>
+          <a:lstStyle/>
+          <a:p>
+            <a:pPr algn="l">
+              <a:spcAft>
+                <a:spcPts val="200"/>
+              </a:spcAft>
+            </a:pPr>
+            <a:r>
+              <a:rPr sz="1000" b="1">
+                <a:solidFill>
+                  <a:srgbClr val="C7000B"/>
+                </a:solidFill>
+                <a:latin typeface="Microsoft YaHei"/>
+                <a:ea typeface="Microsoft YaHei"/>
+                <a:cs typeface="Microsoft YaHei"/>
+              </a:rPr>
+              <a:t>精度</a:t>
+            </a:r>
+          </a:p>
+        </p:txBody>
+      </p:sp>
+      <p:sp>
+        <p:nvSpPr>
+          <p:cNvPr id="14" name="TextBox 13"/>
+          <p:cNvSpPr txBox="1"/>
+          <p:nvPr/>
+        </p:nvSpPr>
+        <p:spPr>
+          <a:xfrm>
+            <a:off x="1783080" y="1673352"/>
+            <a:ext cx="1755648" cy="457200"/>
+          </a:xfrm>
+          <a:prstGeom prst="rect">
+            <a:avLst/>
+          </a:prstGeom>
+          <a:noFill/>
+        </p:spPr>
+        <p:txBody>
+          <a:bodyPr wrap="square" anchor="t"/>
+          <a:lstStyle/>
+          <a:p>
+            <a:pPr algn="l">
+              <a:spcAft>
+                <a:spcPts val="200"/>
+              </a:spcAft>
+            </a:pPr>
+            <a:r>
+              <a:rPr sz="1000" b="0">
+                <a:solidFill>
+                  <a:srgbClr val="555757"/>
+                </a:solidFill>
+                <a:latin typeface="Microsoft YaHei"/>
+                <a:ea typeface="Microsoft YaHei"/>
+                <a:cs typeface="Microsoft YaHei"/>
+              </a:rPr>
+              <a:t>预测 MAE / MASE</a:t>
+            </a:r>
+          </a:p>
+        </p:txBody>
+      </p:sp>
+      <p:sp>
+        <p:nvSpPr>
+          <p:cNvPr id="15" name="TextBox 14"/>
+          <p:cNvSpPr txBox="1"/>
+          <p:nvPr/>
+        </p:nvSpPr>
+        <p:spPr>
+          <a:xfrm>
+            <a:off x="3749039" y="1673352"/>
+            <a:ext cx="2304288" cy="457200"/>
+          </a:xfrm>
+          <a:prstGeom prst="rect">
+            <a:avLst/>
+          </a:prstGeom>
+          <a:noFill/>
+        </p:spPr>
+        <p:txBody>
+          <a:bodyPr wrap="square" anchor="t"/>
+          <a:lstStyle/>
+          <a:p>
+            <a:pPr algn="l">
+              <a:spcAft>
+                <a:spcPts val="200"/>
+              </a:spcAft>
+            </a:pPr>
+            <a:r>
+              <a:rPr sz="1000" b="0">
+                <a:solidFill>
+                  <a:srgbClr val="555757"/>
+                </a:solidFill>
+                <a:latin typeface="Microsoft YaHei"/>
+                <a:ea typeface="Microsoft YaHei"/>
+                <a:cs typeface="Microsoft YaHei"/>
+              </a:rPr>
+              <a:t>TimesFM-3 零样本</a:t>
+            </a:r>
+          </a:p>
+        </p:txBody>
+      </p:sp>
+      <p:sp>
+        <p:nvSpPr>
+          <p:cNvPr id="16" name="TextBox 15"/>
+          <p:cNvSpPr txBox="1"/>
+          <p:nvPr/>
+        </p:nvSpPr>
+        <p:spPr>
+          <a:xfrm>
+            <a:off x="6263640" y="1673352"/>
+            <a:ext cx="2944368" cy="457200"/>
+          </a:xfrm>
+          <a:prstGeom prst="rect">
+            <a:avLst/>
+          </a:prstGeom>
+          <a:noFill/>
+        </p:spPr>
+        <p:txBody>
+          <a:bodyPr wrap="square" anchor="t"/>
+          <a:lstStyle/>
+          <a:p>
+            <a:pPr algn="l">
+              <a:spcAft>
+                <a:spcPts val="200"/>
+              </a:spcAft>
+            </a:pPr>
+            <a:r>
+              <a:rPr sz="1000" b="1">
+                <a:solidFill>
+                  <a:srgbClr val="1A1A1A"/>
+                </a:solidFill>
+                <a:latin typeface="Microsoft YaHei"/>
+                <a:ea typeface="Microsoft YaHei"/>
+                <a:cs typeface="Microsoft YaHei"/>
+              </a:rPr>
+              <a:t>持平或更优；自研 ≤ 0.95×基线</a:t>
+            </a:r>
+          </a:p>
+        </p:txBody>
+      </p:sp>
+      <p:sp>
+        <p:nvSpPr>
+          <p:cNvPr id="17" name="TextBox 16"/>
+          <p:cNvSpPr txBox="1"/>
+          <p:nvPr/>
+        </p:nvSpPr>
+        <p:spPr>
+          <a:xfrm>
+            <a:off x="9418319" y="1673352"/>
+            <a:ext cx="2212848" cy="457200"/>
+          </a:xfrm>
+          <a:prstGeom prst="rect">
+            <a:avLst/>
+          </a:prstGeom>
+          <a:noFill/>
+        </p:spPr>
+        <p:txBody>
+          <a:bodyPr wrap="square" anchor="t"/>
+          <a:lstStyle/>
+          <a:p>
+            <a:pPr algn="l">
+              <a:spcAft>
+                <a:spcPts val="200"/>
+              </a:spcAft>
+            </a:pPr>
+            <a:r>
+              <a:rPr sz="1000" b="0">
+                <a:solidFill>
+                  <a:srgbClr val="555757"/>
+                </a:solidFill>
+                <a:latin typeface="Microsoft YaHei"/>
+                <a:ea typeface="Microsoft YaHei"/>
+                <a:cs typeface="Microsoft YaHei"/>
+              </a:rPr>
+              <a:t>公开 benchmark</a:t>
+            </a:r>
+          </a:p>
+          <a:p>
+            <a:pPr algn="l">
+              <a:spcAft>
+                <a:spcPts val="200"/>
+              </a:spcAft>
+            </a:pPr>
+            <a:r>
+              <a:rPr sz="1000" b="0">
+                <a:solidFill>
+                  <a:srgbClr val="555757"/>
+                </a:solidFill>
+                <a:latin typeface="Microsoft YaHei"/>
+                <a:ea typeface="Microsoft YaHei"/>
+                <a:cs typeface="Microsoft YaHei"/>
+              </a:rPr>
+              <a:t>+ 自有数据集</a:t>
+            </a:r>
+          </a:p>
+        </p:txBody>
+      </p:sp>
+      <p:sp>
+        <p:nvSpPr>
+          <p:cNvPr id="18" name="Rounded Rectangle 17"/>
           <p:cNvSpPr/>
           <p:nvPr/>
         </p:nvSpPr>
         <p:spPr>
           <a:xfrm>
-            <a:off x="411480" y="1417320"/>
-            <a:ext cx="2788920" cy="73152"/>
-          </a:xfrm>
-          <a:prstGeom prst="rect">
-            <a:avLst/>
+            <a:off x="457200" y="2212848"/>
+            <a:ext cx="11247120" cy="512064"/>
+          </a:xfrm>
+          <a:prstGeom prst="roundRect">
+            <a:avLst>
+              <a:gd name="adj" fmla="val 5000"/>
+            </a:avLst>
           </a:prstGeom>
           <a:solidFill>
-            <a:srgbClr val="C7000B"/>
+            <a:srgbClr val="F7F7F7"/>
           </a:solidFill>
-          <a:ln>
-            <a:noFill/>
+          <a:ln w="9525">
+            <a:solidFill>
+              <a:srgbClr val="DDDDDD"/>
+            </a:solidFill>
           </a:ln>
         </p:spPr>
         <p:style>
@@ -10164,14 +10219,14 @@
       </p:sp>
       <p:sp>
         <p:nvSpPr>
-          <p:cNvPr id="9" name="TextBox 8"/>
+          <p:cNvPr id="19" name="TextBox 18"/>
           <p:cNvSpPr txBox="1"/>
           <p:nvPr/>
         </p:nvSpPr>
         <p:spPr>
           <a:xfrm>
-            <a:off x="548640" y="1645920"/>
-            <a:ext cx="2514600" cy="365760"/>
+            <a:off x="548640" y="2240280"/>
+            <a:ext cx="1024128" cy="457200"/>
           </a:xfrm>
           <a:prstGeom prst="rect">
             <a:avLst/>
@@ -10188,7 +10243,7 @@
               </a:spcAft>
             </a:pPr>
             <a:r>
-              <a:rPr sz="1600" b="1">
+              <a:rPr sz="1000" b="1">
                 <a:solidFill>
                   <a:srgbClr val="C7000B"/>
                 </a:solidFill>
@@ -10196,21 +10251,21 @@
                 <a:ea typeface="Microsoft YaHei"/>
                 <a:cs typeface="Microsoft YaHei"/>
               </a:rPr>
-              <a:t>Gen1  零样本基线</a:t>
-            </a:r>
-          </a:p>
-        </p:txBody>
-      </p:sp>
-      <p:sp>
-        <p:nvSpPr>
-          <p:cNvPr id="10" name="TextBox 9"/>
+              <a:t>精度</a:t>
+            </a:r>
+          </a:p>
+        </p:txBody>
+      </p:sp>
+      <p:sp>
+        <p:nvSpPr>
+          <p:cNvPr id="20" name="TextBox 19"/>
           <p:cNvSpPr txBox="1"/>
           <p:nvPr/>
         </p:nvSpPr>
         <p:spPr>
           <a:xfrm>
-            <a:off x="548640" y="2148840"/>
-            <a:ext cx="2514600" cy="2651760"/>
+            <a:off x="1783080" y="2240280"/>
+            <a:ext cx="1755648" cy="457200"/>
           </a:xfrm>
           <a:prstGeom prst="rect">
             <a:avLst/>
@@ -10227,7 +10282,7 @@
               </a:spcAft>
             </a:pPr>
             <a:r>
-              <a:rPr sz="1200" b="0">
+              <a:rPr sz="1000" b="0">
                 <a:solidFill>
                   <a:srgbClr val="555757"/>
                 </a:solidFill>
@@ -10235,17 +10290,38 @@
                 <a:ea typeface="Microsoft YaHei"/>
                 <a:cs typeface="Microsoft YaHei"/>
               </a:rPr>
-              <a:t>预训练底座直接上岗。</a:t>
-            </a:r>
-          </a:p>
-          <a:p>
-            <a:pPr algn="l">
-              <a:spcAft>
-                <a:spcPts val="200"/>
-              </a:spcAft>
-            </a:pPr>
-            <a:r>
-              <a:rPr sz="1200" b="0">
+              <a:t>q10–q90 覆盖率</a:t>
+            </a:r>
+          </a:p>
+        </p:txBody>
+      </p:sp>
+      <p:sp>
+        <p:nvSpPr>
+          <p:cNvPr id="21" name="TextBox 20"/>
+          <p:cNvSpPr txBox="1"/>
+          <p:nvPr/>
+        </p:nvSpPr>
+        <p:spPr>
+          <a:xfrm>
+            <a:off x="3749039" y="2240280"/>
+            <a:ext cx="2304288" cy="457200"/>
+          </a:xfrm>
+          <a:prstGeom prst="rect">
+            <a:avLst/>
+          </a:prstGeom>
+          <a:noFill/>
+        </p:spPr>
+        <p:txBody>
+          <a:bodyPr wrap="square" anchor="t"/>
+          <a:lstStyle/>
+          <a:p>
+            <a:pPr algn="l">
+              <a:spcAft>
+                <a:spcPts val="200"/>
+              </a:spcAft>
+            </a:pPr>
+            <a:r>
+              <a:rPr sz="1000" b="0">
                 <a:solidFill>
                   <a:srgbClr val="555757"/>
                 </a:solidFill>
@@ -10253,17 +10329,77 @@
                 <a:ea typeface="Microsoft YaHei"/>
                 <a:cs typeface="Microsoft YaHei"/>
               </a:rPr>
-              <a:t>握姿 / 手势零样本基线；</a:t>
-            </a:r>
-          </a:p>
-          <a:p>
-            <a:pPr algn="l">
-              <a:spcAft>
-                <a:spcPts val="200"/>
-              </a:spcAft>
-            </a:pPr>
-            <a:r>
-              <a:rPr sz="1200" b="0">
+              <a:t>理论 80%</a:t>
+            </a:r>
+          </a:p>
+        </p:txBody>
+      </p:sp>
+      <p:sp>
+        <p:nvSpPr>
+          <p:cNvPr id="22" name="TextBox 21"/>
+          <p:cNvSpPr txBox="1"/>
+          <p:nvPr/>
+        </p:nvSpPr>
+        <p:spPr>
+          <a:xfrm>
+            <a:off x="6263640" y="2240280"/>
+            <a:ext cx="2944368" cy="457200"/>
+          </a:xfrm>
+          <a:prstGeom prst="rect">
+            <a:avLst/>
+          </a:prstGeom>
+          <a:noFill/>
+        </p:spPr>
+        <p:txBody>
+          <a:bodyPr wrap="square" anchor="t"/>
+          <a:lstStyle/>
+          <a:p>
+            <a:pPr algn="l">
+              <a:spcAft>
+                <a:spcPts val="200"/>
+              </a:spcAft>
+            </a:pPr>
+            <a:r>
+              <a:rPr sz="1000" b="1">
+                <a:solidFill>
+                  <a:srgbClr val="1A1A1A"/>
+                </a:solidFill>
+                <a:latin typeface="Microsoft YaHei"/>
+                <a:ea typeface="Microsoft YaHei"/>
+                <a:cs typeface="Microsoft YaHei"/>
+              </a:rPr>
+              <a:t>实测 80% ± 5pp</a:t>
+            </a:r>
+          </a:p>
+        </p:txBody>
+      </p:sp>
+      <p:sp>
+        <p:nvSpPr>
+          <p:cNvPr id="23" name="TextBox 22"/>
+          <p:cNvSpPr txBox="1"/>
+          <p:nvPr/>
+        </p:nvSpPr>
+        <p:spPr>
+          <a:xfrm>
+            <a:off x="9418319" y="2240280"/>
+            <a:ext cx="2212848" cy="457200"/>
+          </a:xfrm>
+          <a:prstGeom prst="rect">
+            <a:avLst/>
+          </a:prstGeom>
+          <a:noFill/>
+        </p:spPr>
+        <p:txBody>
+          <a:bodyPr wrap="square" anchor="t"/>
+          <a:lstStyle/>
+          <a:p>
+            <a:pPr algn="l">
+              <a:spcAft>
+                <a:spcPts val="200"/>
+              </a:spcAft>
+            </a:pPr>
+            <a:r>
+              <a:rPr sz="1000" b="0">
                 <a:solidFill>
                   <a:srgbClr val="555757"/>
                 </a:solidFill>
@@ -10271,39 +10407,21 @@
                 <a:ea typeface="Microsoft YaHei"/>
                 <a:cs typeface="Microsoft YaHei"/>
               </a:rPr>
-              <a:t>分类走规则 / 线性探针（UniTS / MOMENT）。</a:t>
-            </a:r>
-          </a:p>
-          <a:p>
-            <a:pPr algn="l">
-              <a:spcAft>
-                <a:spcPts val="200"/>
-              </a:spcAft>
-            </a:pPr>
-            <a:r>
-              <a:rPr sz="1200" b="0">
-                <a:solidFill>
-                  <a:srgbClr val="555757"/>
-                </a:solidFill>
-                <a:latin typeface="Microsoft YaHei"/>
-                <a:ea typeface="Microsoft YaHei"/>
-                <a:cs typeface="Microsoft YaHei"/>
-              </a:rPr>
-              <a:t>回答：底座行不行 → 统一评测基线。</a:t>
-            </a:r>
-          </a:p>
-        </p:txBody>
-      </p:sp>
-      <p:sp>
-        <p:nvSpPr>
-          <p:cNvPr id="11" name="Rounded Rectangle 10"/>
+              <a:t>留出集滚动回测</a:t>
+            </a:r>
+          </a:p>
+        </p:txBody>
+      </p:sp>
+      <p:sp>
+        <p:nvSpPr>
+          <p:cNvPr id="24" name="Rounded Rectangle 23"/>
           <p:cNvSpPr/>
           <p:nvPr/>
         </p:nvSpPr>
         <p:spPr>
           <a:xfrm>
-            <a:off x="3337560" y="1417320"/>
-            <a:ext cx="2788920" cy="3566160"/>
+            <a:off x="457200" y="2779776"/>
+            <a:ext cx="11247120" cy="512064"/>
           </a:xfrm>
           <a:prstGeom prst="roundRect">
             <a:avLst>
@@ -10343,23 +10461,222 @@
       </p:sp>
       <p:sp>
         <p:nvSpPr>
-          <p:cNvPr id="12" name="Rectangle 11"/>
+          <p:cNvPr id="25" name="TextBox 24"/>
+          <p:cNvSpPr txBox="1"/>
+          <p:nvPr/>
+        </p:nvSpPr>
+        <p:spPr>
+          <a:xfrm>
+            <a:off x="548640" y="2807208"/>
+            <a:ext cx="1024128" cy="457200"/>
+          </a:xfrm>
+          <a:prstGeom prst="rect">
+            <a:avLst/>
+          </a:prstGeom>
+          <a:noFill/>
+        </p:spPr>
+        <p:txBody>
+          <a:bodyPr wrap="square" anchor="t"/>
+          <a:lstStyle/>
+          <a:p>
+            <a:pPr algn="l">
+              <a:spcAft>
+                <a:spcPts val="200"/>
+              </a:spcAft>
+            </a:pPr>
+            <a:r>
+              <a:rPr sz="1000" b="1">
+                <a:solidFill>
+                  <a:srgbClr val="C7000B"/>
+                </a:solidFill>
+                <a:latin typeface="Microsoft YaHei"/>
+                <a:ea typeface="Microsoft YaHei"/>
+                <a:cs typeface="Microsoft YaHei"/>
+              </a:rPr>
+              <a:t>精度</a:t>
+            </a:r>
+          </a:p>
+        </p:txBody>
+      </p:sp>
+      <p:sp>
+        <p:nvSpPr>
+          <p:cNvPr id="26" name="TextBox 25"/>
+          <p:cNvSpPr txBox="1"/>
+          <p:nvPr/>
+        </p:nvSpPr>
+        <p:spPr>
+          <a:xfrm>
+            <a:off x="1783080" y="2807208"/>
+            <a:ext cx="1755648" cy="457200"/>
+          </a:xfrm>
+          <a:prstGeom prst="rect">
+            <a:avLst/>
+          </a:prstGeom>
+          <a:noFill/>
+        </p:spPr>
+        <p:txBody>
+          <a:bodyPr wrap="square" anchor="t"/>
+          <a:lstStyle/>
+          <a:p>
+            <a:pPr algn="l">
+              <a:spcAft>
+                <a:spcPts val="200"/>
+              </a:spcAft>
+            </a:pPr>
+            <a:r>
+              <a:rPr sz="1000" b="0">
+                <a:solidFill>
+                  <a:srgbClr val="555757"/>
+                </a:solidFill>
+                <a:latin typeface="Microsoft YaHei"/>
+                <a:ea typeface="Microsoft YaHei"/>
+                <a:cs typeface="Microsoft YaHei"/>
+              </a:rPr>
+              <a:t>握姿四分类 / 手势宏 F1</a:t>
+            </a:r>
+          </a:p>
+        </p:txBody>
+      </p:sp>
+      <p:sp>
+        <p:nvSpPr>
+          <p:cNvPr id="27" name="TextBox 26"/>
+          <p:cNvSpPr txBox="1"/>
+          <p:nvPr/>
+        </p:nvSpPr>
+        <p:spPr>
+          <a:xfrm>
+            <a:off x="3749039" y="2807208"/>
+            <a:ext cx="2304288" cy="457200"/>
+          </a:xfrm>
+          <a:prstGeom prst="rect">
+            <a:avLst/>
+          </a:prstGeom>
+          <a:noFill/>
+        </p:spPr>
+        <p:txBody>
+          <a:bodyPr wrap="square" anchor="t"/>
+          <a:lstStyle/>
+          <a:p>
+            <a:pPr algn="l">
+              <a:spcAft>
+                <a:spcPts val="200"/>
+              </a:spcAft>
+            </a:pPr>
+            <a:r>
+              <a:rPr sz="1000" b="0">
+                <a:solidFill>
+                  <a:srgbClr val="555757"/>
+                </a:solidFill>
+                <a:latin typeface="Microsoft YaHei"/>
+                <a:ea typeface="Microsoft YaHei"/>
+                <a:cs typeface="Microsoft YaHei"/>
+              </a:rPr>
+              <a:t>现网启发式 + LIMU-BERT-X</a:t>
+            </a:r>
+          </a:p>
+        </p:txBody>
+      </p:sp>
+      <p:sp>
+        <p:nvSpPr>
+          <p:cNvPr id="28" name="TextBox 27"/>
+          <p:cNvSpPr txBox="1"/>
+          <p:nvPr/>
+        </p:nvSpPr>
+        <p:spPr>
+          <a:xfrm>
+            <a:off x="6263640" y="2807208"/>
+            <a:ext cx="2944368" cy="457200"/>
+          </a:xfrm>
+          <a:prstGeom prst="rect">
+            <a:avLst/>
+          </a:prstGeom>
+          <a:noFill/>
+        </p:spPr>
+        <p:txBody>
+          <a:bodyPr wrap="square" anchor="t"/>
+          <a:lstStyle/>
+          <a:p>
+            <a:pPr algn="l">
+              <a:spcAft>
+                <a:spcPts val="200"/>
+              </a:spcAft>
+            </a:pPr>
+            <a:r>
+              <a:rPr sz="1000" b="1">
+                <a:solidFill>
+                  <a:srgbClr val="1A1A1A"/>
+                </a:solidFill>
+                <a:latin typeface="Microsoft YaHei"/>
+                <a:ea typeface="Microsoft YaHei"/>
+                <a:cs typeface="Microsoft YaHei"/>
+              </a:rPr>
+              <a:t>零样本 ≥ 基线−5pp；百样本 ≥ 基线</a:t>
+            </a:r>
+          </a:p>
+        </p:txBody>
+      </p:sp>
+      <p:sp>
+        <p:nvSpPr>
+          <p:cNvPr id="29" name="TextBox 28"/>
+          <p:cNvSpPr txBox="1"/>
+          <p:nvPr/>
+        </p:nvSpPr>
+        <p:spPr>
+          <a:xfrm>
+            <a:off x="9418319" y="2807208"/>
+            <a:ext cx="2212848" cy="457200"/>
+          </a:xfrm>
+          <a:prstGeom prst="rect">
+            <a:avLst/>
+          </a:prstGeom>
+          <a:noFill/>
+        </p:spPr>
+        <p:txBody>
+          <a:bodyPr wrap="square" anchor="t"/>
+          <a:lstStyle/>
+          <a:p>
+            <a:pPr algn="l">
+              <a:spcAft>
+                <a:spcPts val="200"/>
+              </a:spcAft>
+            </a:pPr>
+            <a:r>
+              <a:rPr sz="1000" b="0">
+                <a:solidFill>
+                  <a:srgbClr val="555757"/>
+                </a:solidFill>
+                <a:latin typeface="Microsoft YaHei"/>
+                <a:ea typeface="Microsoft YaHei"/>
+                <a:cs typeface="Microsoft YaHei"/>
+              </a:rPr>
+              <a:t>公开集 + 场景注册集</a:t>
+            </a:r>
+          </a:p>
+        </p:txBody>
+      </p:sp>
+      <p:sp>
+        <p:nvSpPr>
+          <p:cNvPr id="30" name="Rounded Rectangle 29"/>
           <p:cNvSpPr/>
           <p:nvPr/>
         </p:nvSpPr>
         <p:spPr>
           <a:xfrm>
-            <a:off x="3337560" y="1417320"/>
-            <a:ext cx="2788920" cy="73152"/>
-          </a:xfrm>
-          <a:prstGeom prst="rect">
-            <a:avLst/>
+            <a:off x="457200" y="3346704"/>
+            <a:ext cx="11247120" cy="512064"/>
+          </a:xfrm>
+          <a:prstGeom prst="roundRect">
+            <a:avLst>
+              <a:gd name="adj" fmla="val 5000"/>
+            </a:avLst>
           </a:prstGeom>
           <a:solidFill>
-            <a:srgbClr val="ED6D00"/>
+            <a:srgbClr val="F7F7F7"/>
           </a:solidFill>
-          <a:ln>
-            <a:noFill/>
+          <a:ln w="9525">
+            <a:solidFill>
+              <a:srgbClr val="DDDDDD"/>
+            </a:solidFill>
           </a:ln>
         </p:spPr>
         <p:style>
@@ -10386,14 +10703,14 @@
       </p:sp>
       <p:sp>
         <p:nvSpPr>
-          <p:cNvPr id="13" name="TextBox 12"/>
+          <p:cNvPr id="31" name="TextBox 30"/>
           <p:cNvSpPr txBox="1"/>
           <p:nvPr/>
         </p:nvSpPr>
         <p:spPr>
           <a:xfrm>
-            <a:off x="3474720" y="1645920"/>
-            <a:ext cx="2514600" cy="365760"/>
+            <a:off x="548640" y="3374136"/>
+            <a:ext cx="1024128" cy="457200"/>
           </a:xfrm>
           <a:prstGeom prst="rect">
             <a:avLst/>
@@ -10410,29 +10727,29 @@
               </a:spcAft>
             </a:pPr>
             <a:r>
-              <a:rPr sz="1600" b="1">
-                <a:solidFill>
-                  <a:srgbClr val="ED6D00"/>
-                </a:solidFill>
-                <a:latin typeface="Microsoft YaHei"/>
-                <a:ea typeface="Microsoft YaHei"/>
-                <a:cs typeface="Microsoft YaHei"/>
-              </a:rPr>
-              <a:t>Gen2  千人千面</a:t>
-            </a:r>
-          </a:p>
-        </p:txBody>
-      </p:sp>
-      <p:sp>
-        <p:nvSpPr>
-          <p:cNvPr id="14" name="TextBox 13"/>
+              <a:rPr sz="1000" b="1">
+                <a:solidFill>
+                  <a:srgbClr val="C7000B"/>
+                </a:solidFill>
+                <a:latin typeface="Microsoft YaHei"/>
+                <a:ea typeface="Microsoft YaHei"/>
+                <a:cs typeface="Microsoft YaHei"/>
+              </a:rPr>
+              <a:t>泛化</a:t>
+            </a:r>
+          </a:p>
+        </p:txBody>
+      </p:sp>
+      <p:sp>
+        <p:nvSpPr>
+          <p:cNvPr id="32" name="TextBox 31"/>
           <p:cNvSpPr txBox="1"/>
           <p:nvPr/>
         </p:nvSpPr>
         <p:spPr>
           <a:xfrm>
-            <a:off x="3474720" y="2148840"/>
-            <a:ext cx="2514600" cy="2651760"/>
+            <a:off x="1783080" y="3374136"/>
+            <a:ext cx="1755648" cy="457200"/>
           </a:xfrm>
           <a:prstGeom prst="rect">
             <a:avLst/>
@@ -10449,7 +10766,7 @@
               </a:spcAft>
             </a:pPr>
             <a:r>
-              <a:rPr sz="1200" b="0">
+              <a:rPr sz="1000" b="0">
                 <a:solidFill>
                   <a:srgbClr val="555757"/>
                 </a:solidFill>
@@ -10457,17 +10774,38 @@
                 <a:ea typeface="Microsoft YaHei"/>
                 <a:cs typeface="Microsoft YaHei"/>
               </a:rPr>
-              <a:t>轻量适配到每设备、每用户。</a:t>
-            </a:r>
-          </a:p>
-          <a:p>
-            <a:pPr algn="l">
-              <a:spcAft>
-                <a:spcPts val="200"/>
-              </a:spcAft>
-            </a:pPr>
-            <a:r>
-              <a:rPr sz="1200" b="0">
+              <a:t>跨设备/用户衰减</a:t>
+            </a:r>
+          </a:p>
+        </p:txBody>
+      </p:sp>
+      <p:sp>
+        <p:nvSpPr>
+          <p:cNvPr id="33" name="TextBox 32"/>
+          <p:cNvSpPr txBox="1"/>
+          <p:nvPr/>
+        </p:nvSpPr>
+        <p:spPr>
+          <a:xfrm>
+            <a:off x="3749039" y="3374136"/>
+            <a:ext cx="2304288" cy="457200"/>
+          </a:xfrm>
+          <a:prstGeom prst="rect">
+            <a:avLst/>
+          </a:prstGeom>
+          <a:noFill/>
+        </p:spPr>
+        <p:txBody>
+          <a:bodyPr wrap="square" anchor="t"/>
+          <a:lstStyle/>
+          <a:p>
+            <a:pPr algn="l">
+              <a:spcAft>
+                <a:spcPts val="200"/>
+              </a:spcAft>
+            </a:pPr>
+            <a:r>
+              <a:rPr sz="1000" b="0">
                 <a:solidFill>
                   <a:srgbClr val="555757"/>
                 </a:solidFill>
@@ -10475,17 +10813,77 @@
                 <a:ea typeface="Microsoft YaHei"/>
                 <a:cs typeface="Microsoft YaHei"/>
               </a:rPr>
-              <a:t>左右手习惯、佩戴松紧、手套 / 纹身 → LoRA 个性化；</a:t>
-            </a:r>
-          </a:p>
-          <a:p>
-            <a:pPr algn="l">
-              <a:spcAft>
-                <a:spcPts val="200"/>
-              </a:spcAft>
-            </a:pPr>
-            <a:r>
-              <a:rPr sz="1200" b="0">
+              <a:t>单设备独立优化</a:t>
+            </a:r>
+          </a:p>
+        </p:txBody>
+      </p:sp>
+      <p:sp>
+        <p:nvSpPr>
+          <p:cNvPr id="34" name="TextBox 33"/>
+          <p:cNvSpPr txBox="1"/>
+          <p:nvPr/>
+        </p:nvSpPr>
+        <p:spPr>
+          <a:xfrm>
+            <a:off x="6263640" y="3374136"/>
+            <a:ext cx="2944368" cy="457200"/>
+          </a:xfrm>
+          <a:prstGeom prst="rect">
+            <a:avLst/>
+          </a:prstGeom>
+          <a:noFill/>
+        </p:spPr>
+        <p:txBody>
+          <a:bodyPr wrap="square" anchor="t"/>
+          <a:lstStyle/>
+          <a:p>
+            <a:pPr algn="l">
+              <a:spcAft>
+                <a:spcPts val="200"/>
+              </a:spcAft>
+            </a:pPr>
+            <a:r>
+              <a:rPr sz="1000" b="1">
+                <a:solidFill>
+                  <a:srgbClr val="1A1A1A"/>
+                </a:solidFill>
+                <a:latin typeface="Microsoft YaHei"/>
+                <a:ea typeface="Microsoft YaHei"/>
+                <a:cs typeface="Microsoft YaHei"/>
+              </a:rPr>
+              <a:t>≤ 5pp；Gen2 后 ≤ 2pp</a:t>
+            </a:r>
+          </a:p>
+        </p:txBody>
+      </p:sp>
+      <p:sp>
+        <p:nvSpPr>
+          <p:cNvPr id="35" name="TextBox 34"/>
+          <p:cNvSpPr txBox="1"/>
+          <p:nvPr/>
+        </p:nvSpPr>
+        <p:spPr>
+          <a:xfrm>
+            <a:off x="9418319" y="3374136"/>
+            <a:ext cx="2212848" cy="457200"/>
+          </a:xfrm>
+          <a:prstGeom prst="rect">
+            <a:avLst/>
+          </a:prstGeom>
+          <a:noFill/>
+        </p:spPr>
+        <p:txBody>
+          <a:bodyPr wrap="square" anchor="t"/>
+          <a:lstStyle/>
+          <a:p>
+            <a:pPr algn="l">
+              <a:spcAft>
+                <a:spcPts val="200"/>
+              </a:spcAft>
+            </a:pPr>
+            <a:r>
+              <a:rPr sz="1000" b="0">
                 <a:solidFill>
                   <a:srgbClr val="555757"/>
                 </a:solidFill>
@@ -10493,39 +10891,21 @@
                 <a:ea typeface="Microsoft YaHei"/>
                 <a:cs typeface="Microsoft YaHei"/>
               </a:rPr>
-              <a:t>TartanIMU 仅 1.1M 参数、Meta EMG +16%。</a:t>
-            </a:r>
-          </a:p>
-          <a:p>
-            <a:pPr algn="l">
-              <a:spcAft>
-                <a:spcPts val="200"/>
-              </a:spcAft>
-            </a:pPr>
-            <a:r>
-              <a:rPr sz="1200" b="0">
-                <a:solidFill>
-                  <a:srgbClr val="555757"/>
-                </a:solidFill>
-                <a:latin typeface="Microsoft YaHei"/>
-                <a:ea typeface="Microsoft YaHei"/>
-                <a:cs typeface="Microsoft YaHei"/>
-              </a:rPr>
-              <a:t>回答：换设备换人还行不行 → 画像进数据规格。</a:t>
-            </a:r>
-          </a:p>
-        </p:txBody>
-      </p:sp>
-      <p:sp>
-        <p:nvSpPr>
-          <p:cNvPr id="15" name="Rounded Rectangle 14"/>
+              <a:t>留一交叉验证</a:t>
+            </a:r>
+          </a:p>
+        </p:txBody>
+      </p:sp>
+      <p:sp>
+        <p:nvSpPr>
+          <p:cNvPr id="36" name="Rounded Rectangle 35"/>
           <p:cNvSpPr/>
           <p:nvPr/>
         </p:nvSpPr>
         <p:spPr>
           <a:xfrm>
-            <a:off x="6263640" y="1417320"/>
-            <a:ext cx="2788920" cy="3566160"/>
+            <a:off x="457200" y="3913632"/>
+            <a:ext cx="11247120" cy="512064"/>
           </a:xfrm>
           <a:prstGeom prst="roundRect">
             <a:avLst>
@@ -10565,189 +10945,209 @@
       </p:sp>
       <p:sp>
         <p:nvSpPr>
-          <p:cNvPr id="16" name="Rectangle 15"/>
+          <p:cNvPr id="37" name="TextBox 36"/>
+          <p:cNvSpPr txBox="1"/>
+          <p:nvPr/>
+        </p:nvSpPr>
+        <p:spPr>
+          <a:xfrm>
+            <a:off x="548640" y="3941064"/>
+            <a:ext cx="1024128" cy="457200"/>
+          </a:xfrm>
+          <a:prstGeom prst="rect">
+            <a:avLst/>
+          </a:prstGeom>
+          <a:noFill/>
+        </p:spPr>
+        <p:txBody>
+          <a:bodyPr wrap="square" anchor="t"/>
+          <a:lstStyle/>
+          <a:p>
+            <a:pPr algn="l">
+              <a:spcAft>
+                <a:spcPts val="200"/>
+              </a:spcAft>
+            </a:pPr>
+            <a:r>
+              <a:rPr sz="1000" b="1">
+                <a:solidFill>
+                  <a:srgbClr val="C7000B"/>
+                </a:solidFill>
+                <a:latin typeface="Microsoft YaHei"/>
+                <a:ea typeface="Microsoft YaHei"/>
+                <a:cs typeface="Microsoft YaHei"/>
+              </a:rPr>
+              <a:t>时延</a:t>
+            </a:r>
+          </a:p>
+        </p:txBody>
+      </p:sp>
+      <p:sp>
+        <p:nvSpPr>
+          <p:cNvPr id="38" name="TextBox 37"/>
+          <p:cNvSpPr txBox="1"/>
+          <p:nvPr/>
+        </p:nvSpPr>
+        <p:spPr>
+          <a:xfrm>
+            <a:off x="1783080" y="3941064"/>
+            <a:ext cx="1755648" cy="457200"/>
+          </a:xfrm>
+          <a:prstGeom prst="rect">
+            <a:avLst/>
+          </a:prstGeom>
+          <a:noFill/>
+        </p:spPr>
+        <p:txBody>
+          <a:bodyPr wrap="square" anchor="t"/>
+          <a:lstStyle/>
+          <a:p>
+            <a:pPr algn="l">
+              <a:spcAft>
+                <a:spcPts val="200"/>
+              </a:spcAft>
+            </a:pPr>
+            <a:r>
+              <a:rPr sz="1000" b="0">
+                <a:solidFill>
+                  <a:srgbClr val="555757"/>
+                </a:solidFill>
+                <a:latin typeface="Microsoft YaHei"/>
+                <a:ea typeface="Microsoft YaHei"/>
+                <a:cs typeface="Microsoft YaHei"/>
+              </a:rPr>
+              <a:t>端侧 p95</a:t>
+            </a:r>
+          </a:p>
+        </p:txBody>
+      </p:sp>
+      <p:sp>
+        <p:nvSpPr>
+          <p:cNvPr id="39" name="TextBox 38"/>
+          <p:cNvSpPr txBox="1"/>
+          <p:nvPr/>
+        </p:nvSpPr>
+        <p:spPr>
+          <a:xfrm>
+            <a:off x="3749039" y="3941064"/>
+            <a:ext cx="2304288" cy="457200"/>
+          </a:xfrm>
+          <a:prstGeom prst="rect">
+            <a:avLst/>
+          </a:prstGeom>
+          <a:noFill/>
+        </p:spPr>
+        <p:txBody>
+          <a:bodyPr wrap="square" anchor="t"/>
+          <a:lstStyle/>
+          <a:p>
+            <a:pPr algn="l">
+              <a:spcAft>
+                <a:spcPts val="200"/>
+              </a:spcAft>
+            </a:pPr>
+            <a:r>
+              <a:rPr sz="1000" b="0">
+                <a:solidFill>
+                  <a:srgbClr val="555757"/>
+                </a:solidFill>
+                <a:latin typeface="Microsoft YaHei"/>
+                <a:ea typeface="Microsoft YaHei"/>
+                <a:cs typeface="Microsoft YaHei"/>
+              </a:rPr>
+              <a:t>现网握姿 200ms</a:t>
+            </a:r>
+          </a:p>
+        </p:txBody>
+      </p:sp>
+      <p:sp>
+        <p:nvSpPr>
+          <p:cNvPr id="40" name="TextBox 39"/>
+          <p:cNvSpPr txBox="1"/>
+          <p:nvPr/>
+        </p:nvSpPr>
+        <p:spPr>
+          <a:xfrm>
+            <a:off x="6263640" y="3941064"/>
+            <a:ext cx="2944368" cy="457200"/>
+          </a:xfrm>
+          <a:prstGeom prst="rect">
+            <a:avLst/>
+          </a:prstGeom>
+          <a:noFill/>
+        </p:spPr>
+        <p:txBody>
+          <a:bodyPr wrap="square" anchor="t"/>
+          <a:lstStyle/>
+          <a:p>
+            <a:pPr algn="l">
+              <a:spcAft>
+                <a:spcPts val="200"/>
+              </a:spcAft>
+            </a:pPr>
+            <a:r>
+              <a:rPr sz="1000" b="1">
+                <a:solidFill>
+                  <a:srgbClr val="1A1A1A"/>
+                </a:solidFill>
+                <a:latin typeface="Microsoft YaHei"/>
+                <a:ea typeface="Microsoft YaHei"/>
+                <a:cs typeface="Microsoft YaHei"/>
+              </a:rPr>
+              <a:t>握姿 ≤ 200ms；手表手势 p95 ≤ 50ms</a:t>
+            </a:r>
+          </a:p>
+        </p:txBody>
+      </p:sp>
+      <p:sp>
+        <p:nvSpPr>
+          <p:cNvPr id="41" name="TextBox 40"/>
+          <p:cNvSpPr txBox="1"/>
+          <p:nvPr/>
+        </p:nvSpPr>
+        <p:spPr>
+          <a:xfrm>
+            <a:off x="9418319" y="3941064"/>
+            <a:ext cx="2212848" cy="457200"/>
+          </a:xfrm>
+          <a:prstGeom prst="rect">
+            <a:avLst/>
+          </a:prstGeom>
+          <a:noFill/>
+        </p:spPr>
+        <p:txBody>
+          <a:bodyPr wrap="square" anchor="t"/>
+          <a:lstStyle/>
+          <a:p>
+            <a:pPr algn="l">
+              <a:spcAft>
+                <a:spcPts val="200"/>
+              </a:spcAft>
+            </a:pPr>
+            <a:r>
+              <a:rPr sz="1000" b="0">
+                <a:solidFill>
+                  <a:srgbClr val="555757"/>
+                </a:solidFill>
+                <a:latin typeface="Microsoft YaHei"/>
+                <a:ea typeface="Microsoft YaHei"/>
+                <a:cs typeface="Microsoft YaHei"/>
+              </a:rPr>
+              <a:t>真机 profiling</a:t>
+            </a:r>
+          </a:p>
+        </p:txBody>
+      </p:sp>
+      <p:sp>
+        <p:nvSpPr>
+          <p:cNvPr id="42" name="Rounded Rectangle 41"/>
           <p:cNvSpPr/>
           <p:nvPr/>
         </p:nvSpPr>
         <p:spPr>
           <a:xfrm>
-            <a:off x="6263640" y="1417320"/>
-            <a:ext cx="2788920" cy="73152"/>
-          </a:xfrm>
-          <a:prstGeom prst="rect">
-            <a:avLst/>
-          </a:prstGeom>
-          <a:solidFill>
-            <a:srgbClr val="30B5C5"/>
-          </a:solidFill>
-          <a:ln>
-            <a:noFill/>
-          </a:ln>
-        </p:spPr>
-        <p:style>
-          <a:lnRef idx="1">
-            <a:schemeClr val="accent1"/>
-          </a:lnRef>
-          <a:fillRef idx="3">
-            <a:schemeClr val="accent1"/>
-          </a:fillRef>
-          <a:effectRef idx="2">
-            <a:schemeClr val="accent1"/>
-          </a:effectRef>
-          <a:fontRef idx="minor">
-            <a:schemeClr val="lt1"/>
-          </a:fontRef>
-        </p:style>
-        <p:txBody>
-          <a:bodyPr rtlCol="0" anchor="ctr"/>
-          <a:lstStyle/>
-          <a:p>
-            <a:pPr algn="ctr"/>
-          </a:p>
-        </p:txBody>
-      </p:sp>
-      <p:sp>
-        <p:nvSpPr>
-          <p:cNvPr id="17" name="TextBox 16"/>
-          <p:cNvSpPr txBox="1"/>
-          <p:nvPr/>
-        </p:nvSpPr>
-        <p:spPr>
-          <a:xfrm>
-            <a:off x="6400800" y="1645920"/>
-            <a:ext cx="2514600" cy="365760"/>
-          </a:xfrm>
-          <a:prstGeom prst="rect">
-            <a:avLst/>
-          </a:prstGeom>
-          <a:noFill/>
-        </p:spPr>
-        <p:txBody>
-          <a:bodyPr wrap="square" anchor="t"/>
-          <a:lstStyle/>
-          <a:p>
-            <a:pPr algn="l">
-              <a:spcAft>
-                <a:spcPts val="200"/>
-              </a:spcAft>
-            </a:pPr>
-            <a:r>
-              <a:rPr sz="1600" b="1">
-                <a:solidFill>
-                  <a:srgbClr val="30B5C5"/>
-                </a:solidFill>
-                <a:latin typeface="Microsoft YaHei"/>
-                <a:ea typeface="Microsoft YaHei"/>
-                <a:cs typeface="Microsoft YaHei"/>
-              </a:rPr>
-              <a:t>Gen3  Token 嵌入大模型</a:t>
-            </a:r>
-          </a:p>
-        </p:txBody>
-      </p:sp>
-      <p:sp>
-        <p:nvSpPr>
-          <p:cNvPr id="18" name="TextBox 17"/>
-          <p:cNvSpPr txBox="1"/>
-          <p:nvPr/>
-        </p:nvSpPr>
-        <p:spPr>
-          <a:xfrm>
-            <a:off x="6400800" y="2148840"/>
-            <a:ext cx="2514600" cy="2651760"/>
-          </a:xfrm>
-          <a:prstGeom prst="rect">
-            <a:avLst/>
-          </a:prstGeom>
-          <a:noFill/>
-        </p:spPr>
-        <p:txBody>
-          <a:bodyPr wrap="square" anchor="t"/>
-          <a:lstStyle/>
-          <a:p>
-            <a:pPr algn="l">
-              <a:spcAft>
-                <a:spcPts val="200"/>
-              </a:spcAft>
-            </a:pPr>
-            <a:r>
-              <a:rPr sz="1200" b="0">
-                <a:solidFill>
-                  <a:srgbClr val="555757"/>
-                </a:solidFill>
-                <a:latin typeface="Microsoft YaHei"/>
-                <a:ea typeface="Microsoft YaHei"/>
-                <a:cs typeface="Microsoft YaHei"/>
-              </a:rPr>
-              <a:t>物理 patch token 作为新模态注入大模型。</a:t>
-            </a:r>
-          </a:p>
-          <a:p>
-            <a:pPr algn="l">
-              <a:spcAft>
-                <a:spcPts val="200"/>
-              </a:spcAft>
-            </a:pPr>
-            <a:r>
-              <a:rPr sz="1200" b="0">
-                <a:solidFill>
-                  <a:srgbClr val="555757"/>
-                </a:solidFill>
-                <a:latin typeface="Microsoft YaHei"/>
-                <a:ea typeface="Microsoft YaHei"/>
-                <a:cs typeface="Microsoft YaHei"/>
-              </a:rPr>
-              <a:t>预测 + 分类变成大模型的原生能力；</a:t>
-            </a:r>
-          </a:p>
-          <a:p>
-            <a:pPr algn="l">
-              <a:spcAft>
-                <a:spcPts val="200"/>
-              </a:spcAft>
-            </a:pPr>
-            <a:r>
-              <a:rPr sz="1200" b="0">
-                <a:solidFill>
-                  <a:srgbClr val="555757"/>
-                </a:solidFill>
-                <a:latin typeface="Microsoft YaHei"/>
-                <a:ea typeface="Microsoft YaHei"/>
-                <a:cs typeface="Microsoft YaHei"/>
-              </a:rPr>
-              <a:t>平台从「提供模型」变成「提供 token 与接口」。</a:t>
-            </a:r>
-          </a:p>
-          <a:p>
-            <a:pPr algn="l">
-              <a:spcAft>
-                <a:spcPts val="200"/>
-              </a:spcAft>
-            </a:pPr>
-            <a:r>
-              <a:rPr sz="1200" b="0">
-                <a:solidFill>
-                  <a:srgbClr val="555757"/>
-                </a:solidFill>
-                <a:latin typeface="Microsoft YaHei"/>
-                <a:ea typeface="Microsoft YaHei"/>
-                <a:cs typeface="Microsoft YaHei"/>
-              </a:rPr>
-              <a:t>回答：物理感知如何进入统一智能。</a:t>
-            </a:r>
-          </a:p>
-        </p:txBody>
-      </p:sp>
-      <p:sp>
-        <p:nvSpPr>
-          <p:cNvPr id="19" name="Rounded Rectangle 18"/>
-          <p:cNvSpPr/>
-          <p:nvPr/>
-        </p:nvSpPr>
-        <p:spPr>
-          <a:xfrm>
-            <a:off x="457200" y="5120640"/>
-            <a:ext cx="11247120" cy="822960"/>
+            <a:off x="457200" y="4480560"/>
+            <a:ext cx="11247120" cy="512064"/>
           </a:xfrm>
           <a:prstGeom prst="roundRect">
             <a:avLst>
@@ -10787,14 +11187,14 @@
       </p:sp>
       <p:sp>
         <p:nvSpPr>
-          <p:cNvPr id="20" name="TextBox 19"/>
+          <p:cNvPr id="43" name="TextBox 42"/>
           <p:cNvSpPr txBox="1"/>
           <p:nvPr/>
         </p:nvSpPr>
         <p:spPr>
           <a:xfrm>
-            <a:off x="640080" y="5257800"/>
-            <a:ext cx="10881360" cy="548640"/>
+            <a:off x="548640" y="4507992"/>
+            <a:ext cx="1024128" cy="457200"/>
           </a:xfrm>
           <a:prstGeom prst="rect">
             <a:avLst/>
@@ -10811,7 +11211,7 @@
               </a:spcAft>
             </a:pPr>
             <a:r>
-              <a:rPr sz="1400" b="1">
+              <a:rPr sz="1000" b="1">
                 <a:solidFill>
                   <a:srgbClr val="C7000B"/>
                 </a:solidFill>
@@ -10819,14 +11219,498 @@
                 <a:ea typeface="Microsoft YaHei"/>
                 <a:cs typeface="Microsoft YaHei"/>
               </a:rPr>
-              <a:t>演进原则：接口（接入 / 预测 / 分类）向下兼容；底座、权重、头可独立替换。</a:t>
-            </a:r>
-          </a:p>
-        </p:txBody>
-      </p:sp>
-      <p:sp>
-        <p:nvSpPr>
-          <p:cNvPr id="21" name="Rectangle 20"/>
+              <a:t>功耗</a:t>
+            </a:r>
+          </a:p>
+        </p:txBody>
+      </p:sp>
+      <p:sp>
+        <p:nvSpPr>
+          <p:cNvPr id="44" name="TextBox 43"/>
+          <p:cNvSpPr txBox="1"/>
+          <p:nvPr/>
+        </p:nvSpPr>
+        <p:spPr>
+          <a:xfrm>
+            <a:off x="1783080" y="4507992"/>
+            <a:ext cx="1755648" cy="457200"/>
+          </a:xfrm>
+          <a:prstGeom prst="rect">
+            <a:avLst/>
+          </a:prstGeom>
+          <a:noFill/>
+        </p:spPr>
+        <p:txBody>
+          <a:bodyPr wrap="square" anchor="t"/>
+          <a:lstStyle/>
+          <a:p>
+            <a:pPr algn="l">
+              <a:spcAft>
+                <a:spcPts val="200"/>
+              </a:spcAft>
+            </a:pPr>
+            <a:r>
+              <a:rPr sz="1000" b="0">
+                <a:solidFill>
+                  <a:srgbClr val="555757"/>
+                </a:solidFill>
+                <a:latin typeface="Microsoft YaHei"/>
+                <a:ea typeface="Microsoft YaHei"/>
+                <a:cs typeface="Microsoft YaHei"/>
+              </a:rPr>
+              <a:t>千次推理能耗</a:t>
+            </a:r>
+          </a:p>
+        </p:txBody>
+      </p:sp>
+      <p:sp>
+        <p:nvSpPr>
+          <p:cNvPr id="45" name="TextBox 44"/>
+          <p:cNvSpPr txBox="1"/>
+          <p:nvPr/>
+        </p:nvSpPr>
+        <p:spPr>
+          <a:xfrm>
+            <a:off x="3749039" y="4507992"/>
+            <a:ext cx="2304288" cy="457200"/>
+          </a:xfrm>
+          <a:prstGeom prst="rect">
+            <a:avLst/>
+          </a:prstGeom>
+          <a:noFill/>
+        </p:spPr>
+        <p:txBody>
+          <a:bodyPr wrap="square" anchor="t"/>
+          <a:lstStyle/>
+          <a:p>
+            <a:pPr algn="l">
+              <a:spcAft>
+                <a:spcPts val="200"/>
+              </a:spcAft>
+            </a:pPr>
+            <a:r>
+              <a:rPr sz="1000" b="0">
+                <a:solidFill>
+                  <a:srgbClr val="555757"/>
+                </a:solidFill>
+                <a:latin typeface="Microsoft YaHei"/>
+                <a:ea typeface="Microsoft YaHei"/>
+                <a:cs typeface="Microsoft YaHei"/>
+              </a:rPr>
+              <a:t>—（Gen3 考核）</a:t>
+            </a:r>
+          </a:p>
+        </p:txBody>
+      </p:sp>
+      <p:sp>
+        <p:nvSpPr>
+          <p:cNvPr id="46" name="TextBox 45"/>
+          <p:cNvSpPr txBox="1"/>
+          <p:nvPr/>
+        </p:nvSpPr>
+        <p:spPr>
+          <a:xfrm>
+            <a:off x="6263640" y="4507992"/>
+            <a:ext cx="2944368" cy="457200"/>
+          </a:xfrm>
+          <a:prstGeom prst="rect">
+            <a:avLst/>
+          </a:prstGeom>
+          <a:noFill/>
+        </p:spPr>
+        <p:txBody>
+          <a:bodyPr wrap="square" anchor="t"/>
+          <a:lstStyle/>
+          <a:p>
+            <a:pPr algn="l">
+              <a:spcAft>
+                <a:spcPts val="200"/>
+              </a:spcAft>
+            </a:pPr>
+            <a:r>
+              <a:rPr sz="1000" b="1">
+                <a:solidFill>
+                  <a:srgbClr val="1A1A1A"/>
+                </a:solidFill>
+                <a:latin typeface="Microsoft YaHei"/>
+                <a:ea typeface="Microsoft YaHei"/>
+                <a:cs typeface="Microsoft YaHei"/>
+              </a:rPr>
+              <a:t>整机续航影响 &lt; 1%</a:t>
+            </a:r>
+          </a:p>
+        </p:txBody>
+      </p:sp>
+      <p:sp>
+        <p:nvSpPr>
+          <p:cNvPr id="47" name="TextBox 46"/>
+          <p:cNvSpPr txBox="1"/>
+          <p:nvPr/>
+        </p:nvSpPr>
+        <p:spPr>
+          <a:xfrm>
+            <a:off x="9418319" y="4507992"/>
+            <a:ext cx="2212848" cy="457200"/>
+          </a:xfrm>
+          <a:prstGeom prst="rect">
+            <a:avLst/>
+          </a:prstGeom>
+          <a:noFill/>
+        </p:spPr>
+        <p:txBody>
+          <a:bodyPr wrap="square" anchor="t"/>
+          <a:lstStyle/>
+          <a:p>
+            <a:pPr algn="l">
+              <a:spcAft>
+                <a:spcPts val="200"/>
+              </a:spcAft>
+            </a:pPr>
+            <a:r>
+              <a:rPr sz="1000" b="0">
+                <a:solidFill>
+                  <a:srgbClr val="555757"/>
+                </a:solidFill>
+                <a:latin typeface="Microsoft YaHei"/>
+                <a:ea typeface="Microsoft YaHei"/>
+                <a:cs typeface="Microsoft YaHei"/>
+              </a:rPr>
+              <a:t>功耗仪实测</a:t>
+            </a:r>
+          </a:p>
+        </p:txBody>
+      </p:sp>
+      <p:sp>
+        <p:nvSpPr>
+          <p:cNvPr id="48" name="Rounded Rectangle 47"/>
+          <p:cNvSpPr/>
+          <p:nvPr/>
+        </p:nvSpPr>
+        <p:spPr>
+          <a:xfrm>
+            <a:off x="457200" y="5047488"/>
+            <a:ext cx="11247120" cy="512064"/>
+          </a:xfrm>
+          <a:prstGeom prst="roundRect">
+            <a:avLst>
+              <a:gd name="adj" fmla="val 5000"/>
+            </a:avLst>
+          </a:prstGeom>
+          <a:solidFill>
+            <a:srgbClr val="FFFFFF"/>
+          </a:solidFill>
+          <a:ln w="9525">
+            <a:solidFill>
+              <a:srgbClr val="DDDDDD"/>
+            </a:solidFill>
+          </a:ln>
+        </p:spPr>
+        <p:style>
+          <a:lnRef idx="1">
+            <a:schemeClr val="accent1"/>
+          </a:lnRef>
+          <a:fillRef idx="3">
+            <a:schemeClr val="accent1"/>
+          </a:fillRef>
+          <a:effectRef idx="2">
+            <a:schemeClr val="accent1"/>
+          </a:effectRef>
+          <a:fontRef idx="minor">
+            <a:schemeClr val="lt1"/>
+          </a:fontRef>
+        </p:style>
+        <p:txBody>
+          <a:bodyPr rtlCol="0" anchor="ctr"/>
+          <a:lstStyle/>
+          <a:p>
+            <a:pPr algn="ctr"/>
+          </a:p>
+        </p:txBody>
+      </p:sp>
+      <p:sp>
+        <p:nvSpPr>
+          <p:cNvPr id="49" name="TextBox 48"/>
+          <p:cNvSpPr txBox="1"/>
+          <p:nvPr/>
+        </p:nvSpPr>
+        <p:spPr>
+          <a:xfrm>
+            <a:off x="548640" y="5074920"/>
+            <a:ext cx="1024128" cy="457200"/>
+          </a:xfrm>
+          <a:prstGeom prst="rect">
+            <a:avLst/>
+          </a:prstGeom>
+          <a:noFill/>
+        </p:spPr>
+        <p:txBody>
+          <a:bodyPr wrap="square" anchor="t"/>
+          <a:lstStyle/>
+          <a:p>
+            <a:pPr algn="l">
+              <a:spcAft>
+                <a:spcPts val="200"/>
+              </a:spcAft>
+            </a:pPr>
+            <a:r>
+              <a:rPr sz="1000" b="1">
+                <a:solidFill>
+                  <a:srgbClr val="C7000B"/>
+                </a:solidFill>
+                <a:latin typeface="Microsoft YaHei"/>
+                <a:ea typeface="Microsoft YaHei"/>
+                <a:cs typeface="Microsoft YaHei"/>
+              </a:rPr>
+              <a:t>工程</a:t>
+            </a:r>
+          </a:p>
+        </p:txBody>
+      </p:sp>
+      <p:sp>
+        <p:nvSpPr>
+          <p:cNvPr id="50" name="TextBox 49"/>
+          <p:cNvSpPr txBox="1"/>
+          <p:nvPr/>
+        </p:nvSpPr>
+        <p:spPr>
+          <a:xfrm>
+            <a:off x="1783080" y="5074920"/>
+            <a:ext cx="1755648" cy="457200"/>
+          </a:xfrm>
+          <a:prstGeom prst="rect">
+            <a:avLst/>
+          </a:prstGeom>
+          <a:noFill/>
+        </p:spPr>
+        <p:txBody>
+          <a:bodyPr wrap="square" anchor="t"/>
+          <a:lstStyle/>
+          <a:p>
+            <a:pPr algn="l">
+              <a:spcAft>
+                <a:spcPts val="200"/>
+              </a:spcAft>
+            </a:pPr>
+            <a:r>
+              <a:rPr sz="1000" b="0">
+                <a:solidFill>
+                  <a:srgbClr val="555757"/>
+                </a:solidFill>
+                <a:latin typeface="Microsoft YaHei"/>
+                <a:ea typeface="Microsoft YaHei"/>
+                <a:cs typeface="Microsoft YaHei"/>
+              </a:rPr>
+              <a:t>拒收率 / 兼容性</a:t>
+            </a:r>
+          </a:p>
+        </p:txBody>
+      </p:sp>
+      <p:sp>
+        <p:nvSpPr>
+          <p:cNvPr id="51" name="TextBox 50"/>
+          <p:cNvSpPr txBox="1"/>
+          <p:nvPr/>
+        </p:nvSpPr>
+        <p:spPr>
+          <a:xfrm>
+            <a:off x="3749039" y="5074920"/>
+            <a:ext cx="2304288" cy="457200"/>
+          </a:xfrm>
+          <a:prstGeom prst="rect">
+            <a:avLst/>
+          </a:prstGeom>
+          <a:noFill/>
+        </p:spPr>
+        <p:txBody>
+          <a:bodyPr wrap="square" anchor="t"/>
+          <a:lstStyle/>
+          <a:p>
+            <a:pPr algn="l">
+              <a:spcAft>
+                <a:spcPts val="200"/>
+              </a:spcAft>
+            </a:pPr>
+            <a:r>
+              <a:rPr sz="1000" b="0">
+                <a:solidFill>
+                  <a:srgbClr val="555757"/>
+                </a:solidFill>
+                <a:latin typeface="Microsoft YaHei"/>
+                <a:ea typeface="Microsoft YaHei"/>
+                <a:cs typeface="Microsoft YaHei"/>
+              </a:rPr>
+              <a:t>—</a:t>
+            </a:r>
+          </a:p>
+        </p:txBody>
+      </p:sp>
+      <p:sp>
+        <p:nvSpPr>
+          <p:cNvPr id="52" name="TextBox 51"/>
+          <p:cNvSpPr txBox="1"/>
+          <p:nvPr/>
+        </p:nvSpPr>
+        <p:spPr>
+          <a:xfrm>
+            <a:off x="6263640" y="5074920"/>
+            <a:ext cx="2944368" cy="457200"/>
+          </a:xfrm>
+          <a:prstGeom prst="rect">
+            <a:avLst/>
+          </a:prstGeom>
+          <a:noFill/>
+        </p:spPr>
+        <p:txBody>
+          <a:bodyPr wrap="square" anchor="t"/>
+          <a:lstStyle/>
+          <a:p>
+            <a:pPr algn="l">
+              <a:spcAft>
+                <a:spcPts val="200"/>
+              </a:spcAft>
+            </a:pPr>
+            <a:r>
+              <a:rPr sz="1000" b="1">
+                <a:solidFill>
+                  <a:srgbClr val="1A1A1A"/>
+                </a:solidFill>
+                <a:latin typeface="Microsoft YaHei"/>
+                <a:ea typeface="Microsoft YaHei"/>
+                <a:cs typeface="Microsoft YaHei"/>
+              </a:rPr>
+              <a:t>版本升级不破坏旧调用</a:t>
+            </a:r>
+          </a:p>
+        </p:txBody>
+      </p:sp>
+      <p:sp>
+        <p:nvSpPr>
+          <p:cNvPr id="53" name="TextBox 52"/>
+          <p:cNvSpPr txBox="1"/>
+          <p:nvPr/>
+        </p:nvSpPr>
+        <p:spPr>
+          <a:xfrm>
+            <a:off x="9418319" y="5074920"/>
+            <a:ext cx="2212848" cy="457200"/>
+          </a:xfrm>
+          <a:prstGeom prst="rect">
+            <a:avLst/>
+          </a:prstGeom>
+          <a:noFill/>
+        </p:spPr>
+        <p:txBody>
+          <a:bodyPr wrap="square" anchor="t"/>
+          <a:lstStyle/>
+          <a:p>
+            <a:pPr algn="l">
+              <a:spcAft>
+                <a:spcPts val="200"/>
+              </a:spcAft>
+            </a:pPr>
+            <a:r>
+              <a:rPr sz="1000" b="0">
+                <a:solidFill>
+                  <a:srgbClr val="555757"/>
+                </a:solidFill>
+                <a:latin typeface="Microsoft YaHei"/>
+                <a:ea typeface="Microsoft YaHei"/>
+                <a:cs typeface="Microsoft YaHei"/>
+              </a:rPr>
+              <a:t>工具链自动化</a:t>
+            </a:r>
+          </a:p>
+        </p:txBody>
+      </p:sp>
+      <p:sp>
+        <p:nvSpPr>
+          <p:cNvPr id="54" name="Rounded Rectangle 53"/>
+          <p:cNvSpPr/>
+          <p:nvPr/>
+        </p:nvSpPr>
+        <p:spPr>
+          <a:xfrm>
+            <a:off x="457200" y="5715000"/>
+            <a:ext cx="11247120" cy="685800"/>
+          </a:xfrm>
+          <a:prstGeom prst="roundRect">
+            <a:avLst>
+              <a:gd name="adj" fmla="val 5000"/>
+            </a:avLst>
+          </a:prstGeom>
+          <a:solidFill>
+            <a:srgbClr val="F7F7F7"/>
+          </a:solidFill>
+          <a:ln w="9525">
+            <a:solidFill>
+              <a:srgbClr val="DDDDDD"/>
+            </a:solidFill>
+          </a:ln>
+        </p:spPr>
+        <p:style>
+          <a:lnRef idx="1">
+            <a:schemeClr val="accent1"/>
+          </a:lnRef>
+          <a:fillRef idx="3">
+            <a:schemeClr val="accent1"/>
+          </a:fillRef>
+          <a:effectRef idx="2">
+            <a:schemeClr val="accent1"/>
+          </a:effectRef>
+          <a:fontRef idx="minor">
+            <a:schemeClr val="lt1"/>
+          </a:fontRef>
+        </p:style>
+        <p:txBody>
+          <a:bodyPr rtlCol="0" anchor="ctr"/>
+          <a:lstStyle/>
+          <a:p>
+            <a:pPr algn="ctr"/>
+          </a:p>
+        </p:txBody>
+      </p:sp>
+      <p:sp>
+        <p:nvSpPr>
+          <p:cNvPr id="55" name="TextBox 54"/>
+          <p:cNvSpPr txBox="1"/>
+          <p:nvPr/>
+        </p:nvSpPr>
+        <p:spPr>
+          <a:xfrm>
+            <a:off x="640080" y="5806440"/>
+            <a:ext cx="10881360" cy="502920"/>
+          </a:xfrm>
+          <a:prstGeom prst="rect">
+            <a:avLst/>
+          </a:prstGeom>
+          <a:noFill/>
+        </p:spPr>
+        <p:txBody>
+          <a:bodyPr wrap="square" anchor="t"/>
+          <a:lstStyle/>
+          <a:p>
+            <a:pPr algn="l">
+              <a:spcAft>
+                <a:spcPts val="200"/>
+              </a:spcAft>
+            </a:pPr>
+            <a:r>
+              <a:rPr sz="1200" b="1">
+                <a:solidFill>
+                  <a:srgbClr val="C7000B"/>
+                </a:solidFill>
+                <a:latin typeface="Microsoft YaHei"/>
+                <a:ea typeface="Microsoft YaHei"/>
+                <a:cs typeface="Microsoft YaHei"/>
+              </a:rPr>
+              <a:t>代际绑定：Gen1 承诺精度基线 → Gen2 承诺泛化提升 → Gen3 承诺时延功耗；标杆任务：智感握姿四分类（200ms）、WATCH 5 敲一敲/划一划、Meta 腕带 0.88 手势/s。</a:t>
+            </a:r>
+          </a:p>
+        </p:txBody>
+      </p:sp>
+      <p:sp>
+        <p:nvSpPr>
+          <p:cNvPr id="56" name="Rectangle 55"/>
           <p:cNvSpPr/>
           <p:nvPr/>
         </p:nvSpPr>
@@ -10869,6 +11753,1100 @@
       </p:sp>
       <p:sp>
         <p:nvSpPr>
+          <p:cNvPr id="57" name="TextBox 56"/>
+          <p:cNvSpPr txBox="1"/>
+          <p:nvPr/>
+        </p:nvSpPr>
+        <p:spPr>
+          <a:xfrm>
+            <a:off x="457200" y="6537960"/>
+            <a:ext cx="8229600" cy="320040"/>
+          </a:xfrm>
+          <a:prstGeom prst="rect">
+            <a:avLst/>
+          </a:prstGeom>
+          <a:noFill/>
+        </p:spPr>
+        <p:txBody>
+          <a:bodyPr wrap="square" anchor="ctr"/>
+          <a:lstStyle/>
+          <a:p>
+            <a:pPr algn="l">
+              <a:spcAft>
+                <a:spcPts val="200"/>
+              </a:spcAft>
+            </a:pPr>
+            <a:r>
+              <a:rPr sz="900" b="0">
+                <a:solidFill>
+                  <a:srgbClr val="898989"/>
+                </a:solidFill>
+                <a:latin typeface="Microsoft YaHei"/>
+                <a:ea typeface="Microsoft YaHei"/>
+                <a:cs typeface="Microsoft YaHei"/>
+              </a:rPr>
+              <a:t>华为  ·  AI 物理感知平台  ·  量化指标    |    Security Level: Internal</a:t>
+            </a:r>
+          </a:p>
+        </p:txBody>
+      </p:sp>
+      <p:sp>
+        <p:nvSpPr>
+          <p:cNvPr id="58" name="TextBox 57"/>
+          <p:cNvSpPr txBox="1"/>
+          <p:nvPr/>
+        </p:nvSpPr>
+        <p:spPr>
+          <a:xfrm>
+            <a:off x="10241280" y="6537960"/>
+            <a:ext cx="1554480" cy="320040"/>
+          </a:xfrm>
+          <a:prstGeom prst="rect">
+            <a:avLst/>
+          </a:prstGeom>
+          <a:noFill/>
+        </p:spPr>
+        <p:txBody>
+          <a:bodyPr wrap="square" anchor="ctr"/>
+          <a:lstStyle/>
+          <a:p>
+            <a:pPr algn="r">
+              <a:spcAft>
+                <a:spcPts val="200"/>
+              </a:spcAft>
+            </a:pPr>
+            <a:r>
+              <a:rPr sz="900" b="0">
+                <a:solidFill>
+                  <a:srgbClr val="898989"/>
+                </a:solidFill>
+                <a:latin typeface="Microsoft YaHei"/>
+                <a:ea typeface="Microsoft YaHei"/>
+                <a:cs typeface="Microsoft YaHei"/>
+              </a:rPr>
+              <a:t>11  /  12</a:t>
+            </a:r>
+          </a:p>
+        </p:txBody>
+      </p:sp>
+    </p:spTree>
+  </p:cSld>
+  <p:clrMapOvr>
+    <a:masterClrMapping/>
+  </p:clrMapOvr>
+</p:sld>
+</file>
+
+<file path=ppt/slides/slide12.xml><?xml version="1.0" encoding="utf-8"?>
+<p:sld xmlns:a="http://schemas.openxmlformats.org/drawingml/2006/main" xmlns:p="http://schemas.openxmlformats.org/presentationml/2006/main" xmlns:r="http://schemas.openxmlformats.org/officeDocument/2006/relationships">
+  <p:cSld>
+    <p:spTree>
+      <p:nvGrpSpPr>
+        <p:cNvPr id="1" name=""/>
+        <p:cNvGrpSpPr/>
+        <p:nvPr/>
+      </p:nvGrpSpPr>
+      <p:grpSpPr/>
+      <p:sp>
+        <p:nvSpPr>
+          <p:cNvPr id="2" name="Rectangle 1"/>
+          <p:cNvSpPr/>
+          <p:nvPr/>
+        </p:nvSpPr>
+        <p:spPr>
+          <a:xfrm>
+            <a:off x="0" y="0"/>
+            <a:ext cx="12196763" cy="6858000"/>
+          </a:xfrm>
+          <a:prstGeom prst="rect">
+            <a:avLst/>
+          </a:prstGeom>
+          <a:solidFill>
+            <a:srgbClr val="FFFFFF"/>
+          </a:solidFill>
+          <a:ln>
+            <a:noFill/>
+          </a:ln>
+        </p:spPr>
+        <p:style>
+          <a:lnRef idx="1">
+            <a:schemeClr val="accent1"/>
+          </a:lnRef>
+          <a:fillRef idx="3">
+            <a:schemeClr val="accent1"/>
+          </a:fillRef>
+          <a:effectRef idx="2">
+            <a:schemeClr val="accent1"/>
+          </a:effectRef>
+          <a:fontRef idx="minor">
+            <a:schemeClr val="lt1"/>
+          </a:fontRef>
+        </p:style>
+        <p:txBody>
+          <a:bodyPr rtlCol="0" anchor="ctr"/>
+          <a:lstStyle/>
+          <a:p>
+            <a:pPr algn="ctr"/>
+          </a:p>
+        </p:txBody>
+      </p:sp>
+      <p:sp>
+        <p:nvSpPr>
+          <p:cNvPr id="3" name="TextBox 2"/>
+          <p:cNvSpPr txBox="1"/>
+          <p:nvPr/>
+        </p:nvSpPr>
+        <p:spPr>
+          <a:xfrm>
+            <a:off x="457200" y="201168"/>
+            <a:ext cx="11155680" cy="256032"/>
+          </a:xfrm>
+          <a:prstGeom prst="rect">
+            <a:avLst/>
+          </a:prstGeom>
+          <a:noFill/>
+        </p:spPr>
+        <p:txBody>
+          <a:bodyPr wrap="square" anchor="t"/>
+          <a:lstStyle/>
+          <a:p>
+            <a:pPr algn="l">
+              <a:spcAft>
+                <a:spcPts val="200"/>
+              </a:spcAft>
+            </a:pPr>
+            <a:r>
+              <a:rPr sz="1100" b="1">
+                <a:solidFill>
+                  <a:srgbClr val="C7000B"/>
+                </a:solidFill>
+                <a:latin typeface="Microsoft YaHei"/>
+                <a:ea typeface="Microsoft YaHei"/>
+                <a:cs typeface="Microsoft YaHei"/>
+              </a:rPr>
+              <a:t>11  代际演进</a:t>
+            </a:r>
+          </a:p>
+        </p:txBody>
+      </p:sp>
+      <p:sp>
+        <p:nvSpPr>
+          <p:cNvPr id="4" name="TextBox 3"/>
+          <p:cNvSpPr txBox="1"/>
+          <p:nvPr/>
+        </p:nvSpPr>
+        <p:spPr>
+          <a:xfrm>
+            <a:off x="457200" y="438912"/>
+            <a:ext cx="11155680" cy="438912"/>
+          </a:xfrm>
+          <a:prstGeom prst="rect">
+            <a:avLst/>
+          </a:prstGeom>
+          <a:noFill/>
+        </p:spPr>
+        <p:txBody>
+          <a:bodyPr wrap="square" anchor="t"/>
+          <a:lstStyle/>
+          <a:p>
+            <a:pPr algn="l">
+              <a:spcAft>
+                <a:spcPts val="200"/>
+              </a:spcAft>
+            </a:pPr>
+            <a:r>
+              <a:rPr sz="2400" b="1">
+                <a:solidFill>
+                  <a:srgbClr val="1A1A1A"/>
+                </a:solidFill>
+                <a:latin typeface="Microsoft YaHei"/>
+                <a:ea typeface="Microsoft YaHei"/>
+                <a:cs typeface="Microsoft YaHei"/>
+              </a:rPr>
+              <a:t>Gen1 零样本基线 → Gen2 千人千面 → Gen3 Token 嵌入大模型</a:t>
+            </a:r>
+          </a:p>
+        </p:txBody>
+      </p:sp>
+      <p:sp>
+        <p:nvSpPr>
+          <p:cNvPr id="5" name="Rectangle 4"/>
+          <p:cNvSpPr/>
+          <p:nvPr/>
+        </p:nvSpPr>
+        <p:spPr>
+          <a:xfrm>
+            <a:off x="457200" y="914400"/>
+            <a:ext cx="1097280" cy="45720"/>
+          </a:xfrm>
+          <a:prstGeom prst="rect">
+            <a:avLst/>
+          </a:prstGeom>
+          <a:solidFill>
+            <a:srgbClr val="C7000B"/>
+          </a:solidFill>
+          <a:ln>
+            <a:noFill/>
+          </a:ln>
+        </p:spPr>
+        <p:style>
+          <a:lnRef idx="1">
+            <a:schemeClr val="accent1"/>
+          </a:lnRef>
+          <a:fillRef idx="3">
+            <a:schemeClr val="accent1"/>
+          </a:fillRef>
+          <a:effectRef idx="2">
+            <a:schemeClr val="accent1"/>
+          </a:effectRef>
+          <a:fontRef idx="minor">
+            <a:schemeClr val="lt1"/>
+          </a:fontRef>
+        </p:style>
+        <p:txBody>
+          <a:bodyPr rtlCol="0" anchor="ctr"/>
+          <a:lstStyle/>
+          <a:p>
+            <a:pPr algn="ctr"/>
+          </a:p>
+        </p:txBody>
+      </p:sp>
+      <p:sp>
+        <p:nvSpPr>
+          <p:cNvPr id="6" name="TextBox 5"/>
+          <p:cNvSpPr txBox="1"/>
+          <p:nvPr/>
+        </p:nvSpPr>
+        <p:spPr>
+          <a:xfrm>
+            <a:off x="457200" y="1024128"/>
+            <a:ext cx="11155680" cy="292608"/>
+          </a:xfrm>
+          <a:prstGeom prst="rect">
+            <a:avLst/>
+          </a:prstGeom>
+          <a:noFill/>
+        </p:spPr>
+        <p:txBody>
+          <a:bodyPr wrap="square" anchor="t"/>
+          <a:lstStyle/>
+          <a:p>
+            <a:pPr algn="l">
+              <a:spcAft>
+                <a:spcPts val="200"/>
+              </a:spcAft>
+            </a:pPr>
+            <a:r>
+              <a:rPr sz="1200" b="0">
+                <a:solidFill>
+                  <a:srgbClr val="898989"/>
+                </a:solidFill>
+                <a:latin typeface="Microsoft YaHei"/>
+                <a:ea typeface="Microsoft YaHei"/>
+                <a:cs typeface="Microsoft YaHei"/>
+              </a:rPr>
+              <a:t>接口不变，能力逐代升级；每代回答一个业务问题。</a:t>
+            </a:r>
+          </a:p>
+        </p:txBody>
+      </p:sp>
+      <p:sp>
+        <p:nvSpPr>
+          <p:cNvPr id="7" name="Rounded Rectangle 6"/>
+          <p:cNvSpPr/>
+          <p:nvPr/>
+        </p:nvSpPr>
+        <p:spPr>
+          <a:xfrm>
+            <a:off x="411480" y="1417320"/>
+            <a:ext cx="2788920" cy="3566160"/>
+          </a:xfrm>
+          <a:prstGeom prst="roundRect">
+            <a:avLst>
+              <a:gd name="adj" fmla="val 5000"/>
+            </a:avLst>
+          </a:prstGeom>
+          <a:solidFill>
+            <a:srgbClr val="FFFFFF"/>
+          </a:solidFill>
+          <a:ln w="9525">
+            <a:solidFill>
+              <a:srgbClr val="DDDDDD"/>
+            </a:solidFill>
+          </a:ln>
+        </p:spPr>
+        <p:style>
+          <a:lnRef idx="1">
+            <a:schemeClr val="accent1"/>
+          </a:lnRef>
+          <a:fillRef idx="3">
+            <a:schemeClr val="accent1"/>
+          </a:fillRef>
+          <a:effectRef idx="2">
+            <a:schemeClr val="accent1"/>
+          </a:effectRef>
+          <a:fontRef idx="minor">
+            <a:schemeClr val="lt1"/>
+          </a:fontRef>
+        </p:style>
+        <p:txBody>
+          <a:bodyPr rtlCol="0" anchor="ctr"/>
+          <a:lstStyle/>
+          <a:p>
+            <a:pPr algn="ctr"/>
+          </a:p>
+        </p:txBody>
+      </p:sp>
+      <p:sp>
+        <p:nvSpPr>
+          <p:cNvPr id="8" name="Rectangle 7"/>
+          <p:cNvSpPr/>
+          <p:nvPr/>
+        </p:nvSpPr>
+        <p:spPr>
+          <a:xfrm>
+            <a:off x="411480" y="1417320"/>
+            <a:ext cx="2788920" cy="73152"/>
+          </a:xfrm>
+          <a:prstGeom prst="rect">
+            <a:avLst/>
+          </a:prstGeom>
+          <a:solidFill>
+            <a:srgbClr val="C7000B"/>
+          </a:solidFill>
+          <a:ln>
+            <a:noFill/>
+          </a:ln>
+        </p:spPr>
+        <p:style>
+          <a:lnRef idx="1">
+            <a:schemeClr val="accent1"/>
+          </a:lnRef>
+          <a:fillRef idx="3">
+            <a:schemeClr val="accent1"/>
+          </a:fillRef>
+          <a:effectRef idx="2">
+            <a:schemeClr val="accent1"/>
+          </a:effectRef>
+          <a:fontRef idx="minor">
+            <a:schemeClr val="lt1"/>
+          </a:fontRef>
+        </p:style>
+        <p:txBody>
+          <a:bodyPr rtlCol="0" anchor="ctr"/>
+          <a:lstStyle/>
+          <a:p>
+            <a:pPr algn="ctr"/>
+          </a:p>
+        </p:txBody>
+      </p:sp>
+      <p:sp>
+        <p:nvSpPr>
+          <p:cNvPr id="9" name="TextBox 8"/>
+          <p:cNvSpPr txBox="1"/>
+          <p:nvPr/>
+        </p:nvSpPr>
+        <p:spPr>
+          <a:xfrm>
+            <a:off x="548640" y="1645920"/>
+            <a:ext cx="2514600" cy="365760"/>
+          </a:xfrm>
+          <a:prstGeom prst="rect">
+            <a:avLst/>
+          </a:prstGeom>
+          <a:noFill/>
+        </p:spPr>
+        <p:txBody>
+          <a:bodyPr wrap="square" anchor="t"/>
+          <a:lstStyle/>
+          <a:p>
+            <a:pPr algn="l">
+              <a:spcAft>
+                <a:spcPts val="200"/>
+              </a:spcAft>
+            </a:pPr>
+            <a:r>
+              <a:rPr sz="1600" b="1">
+                <a:solidFill>
+                  <a:srgbClr val="C7000B"/>
+                </a:solidFill>
+                <a:latin typeface="Microsoft YaHei"/>
+                <a:ea typeface="Microsoft YaHei"/>
+                <a:cs typeface="Microsoft YaHei"/>
+              </a:rPr>
+              <a:t>Gen1  零样本基线</a:t>
+            </a:r>
+          </a:p>
+        </p:txBody>
+      </p:sp>
+      <p:sp>
+        <p:nvSpPr>
+          <p:cNvPr id="10" name="TextBox 9"/>
+          <p:cNvSpPr txBox="1"/>
+          <p:nvPr/>
+        </p:nvSpPr>
+        <p:spPr>
+          <a:xfrm>
+            <a:off x="548640" y="2148840"/>
+            <a:ext cx="2514600" cy="2651760"/>
+          </a:xfrm>
+          <a:prstGeom prst="rect">
+            <a:avLst/>
+          </a:prstGeom>
+          <a:noFill/>
+        </p:spPr>
+        <p:txBody>
+          <a:bodyPr wrap="square" anchor="t"/>
+          <a:lstStyle/>
+          <a:p>
+            <a:pPr algn="l">
+              <a:spcAft>
+                <a:spcPts val="200"/>
+              </a:spcAft>
+            </a:pPr>
+            <a:r>
+              <a:rPr sz="1200" b="0">
+                <a:solidFill>
+                  <a:srgbClr val="555757"/>
+                </a:solidFill>
+                <a:latin typeface="Microsoft YaHei"/>
+                <a:ea typeface="Microsoft YaHei"/>
+                <a:cs typeface="Microsoft YaHei"/>
+              </a:rPr>
+              <a:t>预训练底座直接上岗。</a:t>
+            </a:r>
+          </a:p>
+          <a:p>
+            <a:pPr algn="l">
+              <a:spcAft>
+                <a:spcPts val="200"/>
+              </a:spcAft>
+            </a:pPr>
+            <a:r>
+              <a:rPr sz="1200" b="0">
+                <a:solidFill>
+                  <a:srgbClr val="555757"/>
+                </a:solidFill>
+                <a:latin typeface="Microsoft YaHei"/>
+                <a:ea typeface="Microsoft YaHei"/>
+                <a:cs typeface="Microsoft YaHei"/>
+              </a:rPr>
+              <a:t>握姿 / 手势零样本基线；</a:t>
+            </a:r>
+          </a:p>
+          <a:p>
+            <a:pPr algn="l">
+              <a:spcAft>
+                <a:spcPts val="200"/>
+              </a:spcAft>
+            </a:pPr>
+            <a:r>
+              <a:rPr sz="1200" b="0">
+                <a:solidFill>
+                  <a:srgbClr val="555757"/>
+                </a:solidFill>
+                <a:latin typeface="Microsoft YaHei"/>
+                <a:ea typeface="Microsoft YaHei"/>
+                <a:cs typeface="Microsoft YaHei"/>
+              </a:rPr>
+              <a:t>分类走规则 / 线性探针（UniTS / MOMENT）。</a:t>
+            </a:r>
+          </a:p>
+          <a:p>
+            <a:pPr algn="l">
+              <a:spcAft>
+                <a:spcPts val="200"/>
+              </a:spcAft>
+            </a:pPr>
+            <a:r>
+              <a:rPr sz="1200" b="0">
+                <a:solidFill>
+                  <a:srgbClr val="555757"/>
+                </a:solidFill>
+                <a:latin typeface="Microsoft YaHei"/>
+                <a:ea typeface="Microsoft YaHei"/>
+                <a:cs typeface="Microsoft YaHei"/>
+              </a:rPr>
+              <a:t>回答：底座行不行 → 统一评测基线。</a:t>
+            </a:r>
+          </a:p>
+        </p:txBody>
+      </p:sp>
+      <p:sp>
+        <p:nvSpPr>
+          <p:cNvPr id="11" name="Rounded Rectangle 10"/>
+          <p:cNvSpPr/>
+          <p:nvPr/>
+        </p:nvSpPr>
+        <p:spPr>
+          <a:xfrm>
+            <a:off x="3337560" y="1417320"/>
+            <a:ext cx="2788920" cy="3566160"/>
+          </a:xfrm>
+          <a:prstGeom prst="roundRect">
+            <a:avLst>
+              <a:gd name="adj" fmla="val 5000"/>
+            </a:avLst>
+          </a:prstGeom>
+          <a:solidFill>
+            <a:srgbClr val="FFFFFF"/>
+          </a:solidFill>
+          <a:ln w="9525">
+            <a:solidFill>
+              <a:srgbClr val="DDDDDD"/>
+            </a:solidFill>
+          </a:ln>
+        </p:spPr>
+        <p:style>
+          <a:lnRef idx="1">
+            <a:schemeClr val="accent1"/>
+          </a:lnRef>
+          <a:fillRef idx="3">
+            <a:schemeClr val="accent1"/>
+          </a:fillRef>
+          <a:effectRef idx="2">
+            <a:schemeClr val="accent1"/>
+          </a:effectRef>
+          <a:fontRef idx="minor">
+            <a:schemeClr val="lt1"/>
+          </a:fontRef>
+        </p:style>
+        <p:txBody>
+          <a:bodyPr rtlCol="0" anchor="ctr"/>
+          <a:lstStyle/>
+          <a:p>
+            <a:pPr algn="ctr"/>
+          </a:p>
+        </p:txBody>
+      </p:sp>
+      <p:sp>
+        <p:nvSpPr>
+          <p:cNvPr id="12" name="Rectangle 11"/>
+          <p:cNvSpPr/>
+          <p:nvPr/>
+        </p:nvSpPr>
+        <p:spPr>
+          <a:xfrm>
+            <a:off x="3337560" y="1417320"/>
+            <a:ext cx="2788920" cy="73152"/>
+          </a:xfrm>
+          <a:prstGeom prst="rect">
+            <a:avLst/>
+          </a:prstGeom>
+          <a:solidFill>
+            <a:srgbClr val="ED6D00"/>
+          </a:solidFill>
+          <a:ln>
+            <a:noFill/>
+          </a:ln>
+        </p:spPr>
+        <p:style>
+          <a:lnRef idx="1">
+            <a:schemeClr val="accent1"/>
+          </a:lnRef>
+          <a:fillRef idx="3">
+            <a:schemeClr val="accent1"/>
+          </a:fillRef>
+          <a:effectRef idx="2">
+            <a:schemeClr val="accent1"/>
+          </a:effectRef>
+          <a:fontRef idx="minor">
+            <a:schemeClr val="lt1"/>
+          </a:fontRef>
+        </p:style>
+        <p:txBody>
+          <a:bodyPr rtlCol="0" anchor="ctr"/>
+          <a:lstStyle/>
+          <a:p>
+            <a:pPr algn="ctr"/>
+          </a:p>
+        </p:txBody>
+      </p:sp>
+      <p:sp>
+        <p:nvSpPr>
+          <p:cNvPr id="13" name="TextBox 12"/>
+          <p:cNvSpPr txBox="1"/>
+          <p:nvPr/>
+        </p:nvSpPr>
+        <p:spPr>
+          <a:xfrm>
+            <a:off x="3474720" y="1645920"/>
+            <a:ext cx="2514600" cy="365760"/>
+          </a:xfrm>
+          <a:prstGeom prst="rect">
+            <a:avLst/>
+          </a:prstGeom>
+          <a:noFill/>
+        </p:spPr>
+        <p:txBody>
+          <a:bodyPr wrap="square" anchor="t"/>
+          <a:lstStyle/>
+          <a:p>
+            <a:pPr algn="l">
+              <a:spcAft>
+                <a:spcPts val="200"/>
+              </a:spcAft>
+            </a:pPr>
+            <a:r>
+              <a:rPr sz="1600" b="1">
+                <a:solidFill>
+                  <a:srgbClr val="ED6D00"/>
+                </a:solidFill>
+                <a:latin typeface="Microsoft YaHei"/>
+                <a:ea typeface="Microsoft YaHei"/>
+                <a:cs typeface="Microsoft YaHei"/>
+              </a:rPr>
+              <a:t>Gen2  千人千面</a:t>
+            </a:r>
+          </a:p>
+        </p:txBody>
+      </p:sp>
+      <p:sp>
+        <p:nvSpPr>
+          <p:cNvPr id="14" name="TextBox 13"/>
+          <p:cNvSpPr txBox="1"/>
+          <p:nvPr/>
+        </p:nvSpPr>
+        <p:spPr>
+          <a:xfrm>
+            <a:off x="3474720" y="2148840"/>
+            <a:ext cx="2514600" cy="2651760"/>
+          </a:xfrm>
+          <a:prstGeom prst="rect">
+            <a:avLst/>
+          </a:prstGeom>
+          <a:noFill/>
+        </p:spPr>
+        <p:txBody>
+          <a:bodyPr wrap="square" anchor="t"/>
+          <a:lstStyle/>
+          <a:p>
+            <a:pPr algn="l">
+              <a:spcAft>
+                <a:spcPts val="200"/>
+              </a:spcAft>
+            </a:pPr>
+            <a:r>
+              <a:rPr sz="1200" b="0">
+                <a:solidFill>
+                  <a:srgbClr val="555757"/>
+                </a:solidFill>
+                <a:latin typeface="Microsoft YaHei"/>
+                <a:ea typeface="Microsoft YaHei"/>
+                <a:cs typeface="Microsoft YaHei"/>
+              </a:rPr>
+              <a:t>轻量适配到每设备、每用户。</a:t>
+            </a:r>
+          </a:p>
+          <a:p>
+            <a:pPr algn="l">
+              <a:spcAft>
+                <a:spcPts val="200"/>
+              </a:spcAft>
+            </a:pPr>
+            <a:r>
+              <a:rPr sz="1200" b="0">
+                <a:solidFill>
+                  <a:srgbClr val="555757"/>
+                </a:solidFill>
+                <a:latin typeface="Microsoft YaHei"/>
+                <a:ea typeface="Microsoft YaHei"/>
+                <a:cs typeface="Microsoft YaHei"/>
+              </a:rPr>
+              <a:t>左右手习惯、佩戴松紧、手套 / 纹身 → LoRA 个性化；</a:t>
+            </a:r>
+          </a:p>
+          <a:p>
+            <a:pPr algn="l">
+              <a:spcAft>
+                <a:spcPts val="200"/>
+              </a:spcAft>
+            </a:pPr>
+            <a:r>
+              <a:rPr sz="1200" b="0">
+                <a:solidFill>
+                  <a:srgbClr val="555757"/>
+                </a:solidFill>
+                <a:latin typeface="Microsoft YaHei"/>
+                <a:ea typeface="Microsoft YaHei"/>
+                <a:cs typeface="Microsoft YaHei"/>
+              </a:rPr>
+              <a:t>TartanIMU 仅 1.1M 参数、Meta EMG +16%。</a:t>
+            </a:r>
+          </a:p>
+          <a:p>
+            <a:pPr algn="l">
+              <a:spcAft>
+                <a:spcPts val="200"/>
+              </a:spcAft>
+            </a:pPr>
+            <a:r>
+              <a:rPr sz="1200" b="0">
+                <a:solidFill>
+                  <a:srgbClr val="555757"/>
+                </a:solidFill>
+                <a:latin typeface="Microsoft YaHei"/>
+                <a:ea typeface="Microsoft YaHei"/>
+                <a:cs typeface="Microsoft YaHei"/>
+              </a:rPr>
+              <a:t>回答：换设备换人还行不行 → 画像进数据规格。</a:t>
+            </a:r>
+          </a:p>
+        </p:txBody>
+      </p:sp>
+      <p:sp>
+        <p:nvSpPr>
+          <p:cNvPr id="15" name="Rounded Rectangle 14"/>
+          <p:cNvSpPr/>
+          <p:nvPr/>
+        </p:nvSpPr>
+        <p:spPr>
+          <a:xfrm>
+            <a:off x="6263640" y="1417320"/>
+            <a:ext cx="2788920" cy="3566160"/>
+          </a:xfrm>
+          <a:prstGeom prst="roundRect">
+            <a:avLst>
+              <a:gd name="adj" fmla="val 5000"/>
+            </a:avLst>
+          </a:prstGeom>
+          <a:solidFill>
+            <a:srgbClr val="FFFFFF"/>
+          </a:solidFill>
+          <a:ln w="9525">
+            <a:solidFill>
+              <a:srgbClr val="DDDDDD"/>
+            </a:solidFill>
+          </a:ln>
+        </p:spPr>
+        <p:style>
+          <a:lnRef idx="1">
+            <a:schemeClr val="accent1"/>
+          </a:lnRef>
+          <a:fillRef idx="3">
+            <a:schemeClr val="accent1"/>
+          </a:fillRef>
+          <a:effectRef idx="2">
+            <a:schemeClr val="accent1"/>
+          </a:effectRef>
+          <a:fontRef idx="minor">
+            <a:schemeClr val="lt1"/>
+          </a:fontRef>
+        </p:style>
+        <p:txBody>
+          <a:bodyPr rtlCol="0" anchor="ctr"/>
+          <a:lstStyle/>
+          <a:p>
+            <a:pPr algn="ctr"/>
+          </a:p>
+        </p:txBody>
+      </p:sp>
+      <p:sp>
+        <p:nvSpPr>
+          <p:cNvPr id="16" name="Rectangle 15"/>
+          <p:cNvSpPr/>
+          <p:nvPr/>
+        </p:nvSpPr>
+        <p:spPr>
+          <a:xfrm>
+            <a:off x="6263640" y="1417320"/>
+            <a:ext cx="2788920" cy="73152"/>
+          </a:xfrm>
+          <a:prstGeom prst="rect">
+            <a:avLst/>
+          </a:prstGeom>
+          <a:solidFill>
+            <a:srgbClr val="30B5C5"/>
+          </a:solidFill>
+          <a:ln>
+            <a:noFill/>
+          </a:ln>
+        </p:spPr>
+        <p:style>
+          <a:lnRef idx="1">
+            <a:schemeClr val="accent1"/>
+          </a:lnRef>
+          <a:fillRef idx="3">
+            <a:schemeClr val="accent1"/>
+          </a:fillRef>
+          <a:effectRef idx="2">
+            <a:schemeClr val="accent1"/>
+          </a:effectRef>
+          <a:fontRef idx="minor">
+            <a:schemeClr val="lt1"/>
+          </a:fontRef>
+        </p:style>
+        <p:txBody>
+          <a:bodyPr rtlCol="0" anchor="ctr"/>
+          <a:lstStyle/>
+          <a:p>
+            <a:pPr algn="ctr"/>
+          </a:p>
+        </p:txBody>
+      </p:sp>
+      <p:sp>
+        <p:nvSpPr>
+          <p:cNvPr id="17" name="TextBox 16"/>
+          <p:cNvSpPr txBox="1"/>
+          <p:nvPr/>
+        </p:nvSpPr>
+        <p:spPr>
+          <a:xfrm>
+            <a:off x="6400800" y="1645920"/>
+            <a:ext cx="2514600" cy="365760"/>
+          </a:xfrm>
+          <a:prstGeom prst="rect">
+            <a:avLst/>
+          </a:prstGeom>
+          <a:noFill/>
+        </p:spPr>
+        <p:txBody>
+          <a:bodyPr wrap="square" anchor="t"/>
+          <a:lstStyle/>
+          <a:p>
+            <a:pPr algn="l">
+              <a:spcAft>
+                <a:spcPts val="200"/>
+              </a:spcAft>
+            </a:pPr>
+            <a:r>
+              <a:rPr sz="1600" b="1">
+                <a:solidFill>
+                  <a:srgbClr val="30B5C5"/>
+                </a:solidFill>
+                <a:latin typeface="Microsoft YaHei"/>
+                <a:ea typeface="Microsoft YaHei"/>
+                <a:cs typeface="Microsoft YaHei"/>
+              </a:rPr>
+              <a:t>Gen3  Token 嵌入大模型</a:t>
+            </a:r>
+          </a:p>
+        </p:txBody>
+      </p:sp>
+      <p:sp>
+        <p:nvSpPr>
+          <p:cNvPr id="18" name="TextBox 17"/>
+          <p:cNvSpPr txBox="1"/>
+          <p:nvPr/>
+        </p:nvSpPr>
+        <p:spPr>
+          <a:xfrm>
+            <a:off x="6400800" y="2148840"/>
+            <a:ext cx="2514600" cy="2651760"/>
+          </a:xfrm>
+          <a:prstGeom prst="rect">
+            <a:avLst/>
+          </a:prstGeom>
+          <a:noFill/>
+        </p:spPr>
+        <p:txBody>
+          <a:bodyPr wrap="square" anchor="t"/>
+          <a:lstStyle/>
+          <a:p>
+            <a:pPr algn="l">
+              <a:spcAft>
+                <a:spcPts val="200"/>
+              </a:spcAft>
+            </a:pPr>
+            <a:r>
+              <a:rPr sz="1200" b="0">
+                <a:solidFill>
+                  <a:srgbClr val="555757"/>
+                </a:solidFill>
+                <a:latin typeface="Microsoft YaHei"/>
+                <a:ea typeface="Microsoft YaHei"/>
+                <a:cs typeface="Microsoft YaHei"/>
+              </a:rPr>
+              <a:t>物理 patch token 作为新模态注入大模型。</a:t>
+            </a:r>
+          </a:p>
+          <a:p>
+            <a:pPr algn="l">
+              <a:spcAft>
+                <a:spcPts val="200"/>
+              </a:spcAft>
+            </a:pPr>
+            <a:r>
+              <a:rPr sz="1200" b="0">
+                <a:solidFill>
+                  <a:srgbClr val="555757"/>
+                </a:solidFill>
+                <a:latin typeface="Microsoft YaHei"/>
+                <a:ea typeface="Microsoft YaHei"/>
+                <a:cs typeface="Microsoft YaHei"/>
+              </a:rPr>
+              <a:t>预测 + 分类变成大模型的原生能力；</a:t>
+            </a:r>
+          </a:p>
+          <a:p>
+            <a:pPr algn="l">
+              <a:spcAft>
+                <a:spcPts val="200"/>
+              </a:spcAft>
+            </a:pPr>
+            <a:r>
+              <a:rPr sz="1200" b="0">
+                <a:solidFill>
+                  <a:srgbClr val="555757"/>
+                </a:solidFill>
+                <a:latin typeface="Microsoft YaHei"/>
+                <a:ea typeface="Microsoft YaHei"/>
+                <a:cs typeface="Microsoft YaHei"/>
+              </a:rPr>
+              <a:t>平台从「提供模型」变成「提供 token 与接口」。</a:t>
+            </a:r>
+          </a:p>
+          <a:p>
+            <a:pPr algn="l">
+              <a:spcAft>
+                <a:spcPts val="200"/>
+              </a:spcAft>
+            </a:pPr>
+            <a:r>
+              <a:rPr sz="1200" b="0">
+                <a:solidFill>
+                  <a:srgbClr val="555757"/>
+                </a:solidFill>
+                <a:latin typeface="Microsoft YaHei"/>
+                <a:ea typeface="Microsoft YaHei"/>
+                <a:cs typeface="Microsoft YaHei"/>
+              </a:rPr>
+              <a:t>回答：物理感知如何进入统一智能。</a:t>
+            </a:r>
+          </a:p>
+        </p:txBody>
+      </p:sp>
+      <p:sp>
+        <p:nvSpPr>
+          <p:cNvPr id="19" name="Rounded Rectangle 18"/>
+          <p:cNvSpPr/>
+          <p:nvPr/>
+        </p:nvSpPr>
+        <p:spPr>
+          <a:xfrm>
+            <a:off x="457200" y="5120640"/>
+            <a:ext cx="11247120" cy="822960"/>
+          </a:xfrm>
+          <a:prstGeom prst="roundRect">
+            <a:avLst>
+              <a:gd name="adj" fmla="val 5000"/>
+            </a:avLst>
+          </a:prstGeom>
+          <a:solidFill>
+            <a:srgbClr val="F7F7F7"/>
+          </a:solidFill>
+          <a:ln w="9525">
+            <a:solidFill>
+              <a:srgbClr val="DDDDDD"/>
+            </a:solidFill>
+          </a:ln>
+        </p:spPr>
+        <p:style>
+          <a:lnRef idx="1">
+            <a:schemeClr val="accent1"/>
+          </a:lnRef>
+          <a:fillRef idx="3">
+            <a:schemeClr val="accent1"/>
+          </a:fillRef>
+          <a:effectRef idx="2">
+            <a:schemeClr val="accent1"/>
+          </a:effectRef>
+          <a:fontRef idx="minor">
+            <a:schemeClr val="lt1"/>
+          </a:fontRef>
+        </p:style>
+        <p:txBody>
+          <a:bodyPr rtlCol="0" anchor="ctr"/>
+          <a:lstStyle/>
+          <a:p>
+            <a:pPr algn="ctr"/>
+          </a:p>
+        </p:txBody>
+      </p:sp>
+      <p:sp>
+        <p:nvSpPr>
+          <p:cNvPr id="20" name="TextBox 19"/>
+          <p:cNvSpPr txBox="1"/>
+          <p:nvPr/>
+        </p:nvSpPr>
+        <p:spPr>
+          <a:xfrm>
+            <a:off x="640080" y="5257800"/>
+            <a:ext cx="10881360" cy="548640"/>
+          </a:xfrm>
+          <a:prstGeom prst="rect">
+            <a:avLst/>
+          </a:prstGeom>
+          <a:noFill/>
+        </p:spPr>
+        <p:txBody>
+          <a:bodyPr wrap="square" anchor="t"/>
+          <a:lstStyle/>
+          <a:p>
+            <a:pPr algn="l">
+              <a:spcAft>
+                <a:spcPts val="200"/>
+              </a:spcAft>
+            </a:pPr>
+            <a:r>
+              <a:rPr sz="1400" b="1">
+                <a:solidFill>
+                  <a:srgbClr val="C7000B"/>
+                </a:solidFill>
+                <a:latin typeface="Microsoft YaHei"/>
+                <a:ea typeface="Microsoft YaHei"/>
+                <a:cs typeface="Microsoft YaHei"/>
+              </a:rPr>
+              <a:t>演进原则：接口（接入 / 预测 / 分类）向下兼容；底座、权重、头可独立替换。</a:t>
+            </a:r>
+          </a:p>
+        </p:txBody>
+      </p:sp>
+      <p:sp>
+        <p:nvSpPr>
+          <p:cNvPr id="21" name="Rectangle 20"/>
+          <p:cNvSpPr/>
+          <p:nvPr/>
+        </p:nvSpPr>
+        <p:spPr>
+          <a:xfrm>
+            <a:off x="0" y="6537960"/>
+            <a:ext cx="12191695" cy="320040"/>
+          </a:xfrm>
+          <a:prstGeom prst="rect">
+            <a:avLst/>
+          </a:prstGeom>
+          <a:solidFill>
+            <a:srgbClr val="F2F2F2"/>
+          </a:solidFill>
+          <a:ln>
+            <a:noFill/>
+          </a:ln>
+        </p:spPr>
+        <p:style>
+          <a:lnRef idx="1">
+            <a:schemeClr val="accent1"/>
+          </a:lnRef>
+          <a:fillRef idx="3">
+            <a:schemeClr val="accent1"/>
+          </a:fillRef>
+          <a:effectRef idx="2">
+            <a:schemeClr val="accent1"/>
+          </a:effectRef>
+          <a:fontRef idx="minor">
+            <a:schemeClr val="lt1"/>
+          </a:fontRef>
+        </p:style>
+        <p:txBody>
+          <a:bodyPr rtlCol="0" anchor="ctr"/>
+          <a:lstStyle/>
+          <a:p>
+            <a:pPr algn="ctr"/>
+          </a:p>
+        </p:txBody>
+      </p:sp>
+      <p:sp>
+        <p:nvSpPr>
           <p:cNvPr id="22" name="TextBox 21"/>
           <p:cNvSpPr txBox="1"/>
           <p:nvPr/>
@@ -10940,7 +12918,7 @@
                 <a:ea typeface="Microsoft YaHei"/>
                 <a:cs typeface="Microsoft YaHei"/>
               </a:rPr>
-              <a:t>11  /  11</a:t>
+              <a:t>12  /  12</a:t>
             </a:r>
           </a:p>
         </p:txBody>
@@ -12034,7 +14012,7 @@
                 <a:ea typeface="Microsoft YaHei"/>
                 <a:cs typeface="Microsoft YaHei"/>
               </a:rPr>
-              <a:t>2  /  11</a:t>
+              <a:t>2  /  12</a:t>
             </a:r>
           </a:p>
         </p:txBody>
@@ -14270,7 +16248,7 @@
                 <a:ea typeface="Microsoft YaHei"/>
                 <a:cs typeface="Microsoft YaHei"/>
               </a:rPr>
-              <a:t>3  /  11</a:t>
+              <a:t>3  /  12</a:t>
             </a:r>
           </a:p>
         </p:txBody>
@@ -16457,7 +18435,7 @@
                 <a:ea typeface="Microsoft YaHei"/>
                 <a:cs typeface="Microsoft YaHei"/>
               </a:rPr>
-              <a:t>4  /  11</a:t>
+              <a:t>4  /  12</a:t>
             </a:r>
           </a:p>
         </p:txBody>
@@ -17515,7 +19493,7 @@
                 <a:ea typeface="Microsoft YaHei"/>
                 <a:cs typeface="Microsoft YaHei"/>
               </a:rPr>
-              <a:t>5  /  11</a:t>
+              <a:t>5  /  12</a:t>
             </a:r>
           </a:p>
         </p:txBody>
@@ -18555,7 +20533,7 @@
                 <a:ea typeface="Microsoft YaHei"/>
                 <a:cs typeface="Microsoft YaHei"/>
               </a:rPr>
-              <a:t>6  /  11</a:t>
+              <a:t>6  /  12</a:t>
             </a:r>
           </a:p>
         </p:txBody>
@@ -19595,7 +21573,7 @@
                 <a:ea typeface="Microsoft YaHei"/>
                 <a:cs typeface="Microsoft YaHei"/>
               </a:rPr>
-              <a:t>7  /  11</a:t>
+              <a:t>7  /  12</a:t>
             </a:r>
           </a:p>
         </p:txBody>
@@ -20531,7 +22509,7 @@
                 <a:ea typeface="Microsoft YaHei"/>
                 <a:cs typeface="Microsoft YaHei"/>
               </a:rPr>
-              <a:t>8  /  11</a:t>
+              <a:t>8  /  12</a:t>
             </a:r>
           </a:p>
         </p:txBody>
@@ -21443,7 +23421,7 @@
                 <a:ea typeface="Microsoft YaHei"/>
                 <a:cs typeface="Microsoft YaHei"/>
               </a:rPr>
-              <a:t>9  /  11</a:t>
+              <a:t>9  /  12</a:t>
             </a:r>
           </a:p>
         </p:txBody>

--- a/AI物理感知平台-华为汇报.pptx
+++ b/AI物理感知平台-华为汇报.pptx
@@ -7651,7 +7651,7 @@
                 <a:ea typeface="Microsoft YaHei"/>
                 <a:cs typeface="Microsoft YaHei"/>
               </a:rPr>
-              <a:t>两个接口、四种原语、N 个特性</a:t>
+              <a:t>两个接口、四种能力、N 个特性</a:t>
             </a:r>
           </a:p>
         </p:txBody>
@@ -7733,7 +7733,7 @@
                 <a:ea typeface="Microsoft YaHei"/>
                 <a:cs typeface="Microsoft YaHei"/>
               </a:rPr>
-              <a:t>特性爆炸的收法：不按特性抽象，按输出原语抽象；新特性 = 注册配置，不训练新模型。</a:t>
+              <a:t>特性爆炸的收法：不按特性抽象，按输出能力抽象；新特性 = 注册配置，不训练新模型。</a:t>
             </a:r>
           </a:p>
         </p:txBody>
@@ -7850,7 +7850,7 @@
                 <a:ea typeface="Microsoft YaHei"/>
                 <a:cs typeface="Microsoft YaHei"/>
               </a:rPr>
-              <a:t>原语</a:t>
+              <a:t>能力类型</a:t>
             </a:r>
           </a:p>
         </p:txBody>
@@ -9350,7 +9350,7 @@
                 <a:ea typeface="Microsoft YaHei"/>
                 <a:cs typeface="Microsoft YaHei"/>
               </a:rPr>
-              <a:t>新增特性 = 注册数据规格 + 选原语 + 类别表 / 触发阈值 + 可选 LoRA；平台承诺原语级 SLA，特性团队按配置组装。</a:t>
+              <a:t>新增特性 = 注册数据规格 + 选能力类型 + 类别表 / 触发阈值 + 可选 LoRA；平台按能力类型定指标，特性团队按配置组装。</a:t>
             </a:r>
           </a:p>
           <a:p>
@@ -9628,7 +9628,7 @@
                 <a:ea typeface="Microsoft YaHei"/>
                 <a:cs typeface="Microsoft YaHei"/>
               </a:rPr>
-              <a:t>按原语考核，不按特性考核</a:t>
+              <a:t>按能力考核，不按特性考核</a:t>
             </a:r>
           </a:p>
         </p:txBody>
@@ -9710,7 +9710,7 @@
                 <a:ea typeface="Microsoft YaHei"/>
                 <a:cs typeface="Microsoft YaHei"/>
               </a:rPr>
-              <a:t>每项指标 = 基线 + 目标值 + 测量方法 + 数据集；特性只声明用哪个原语和目标档。</a:t>
+              <a:t>每项指标 = 基线 + 目标值 + 测量方法 + 数据集；特性只声明用哪种能力和目标档。</a:t>
             </a:r>
           </a:p>
         </p:txBody>
